--- a/FastAPI/FastAPI- Intermediate.pptx
+++ b/FastAPI/FastAPI- Intermediate.pptx
@@ -149,7 +149,7 @@
 <file path=ppt/revisionInfo.xml><?xml version="1.0" encoding="utf-8"?>
 <p1510:revInfo xmlns:a="http://schemas.openxmlformats.org/drawingml/2006/main" xmlns:r="http://schemas.openxmlformats.org/officeDocument/2006/relationships" xmlns:p1510="http://schemas.microsoft.com/office/powerpoint/2015/10/main">
   <p1510:revLst>
-    <p1510:client id="{90A747A9-39C3-436E-A3AC-34027D23E8DE}" v="69" dt="2025-10-26T06:41:33.102"/>
+    <p1510:client id="{90A747A9-39C3-436E-A3AC-34027D23E8DE}" v="71" dt="2025-10-26T09:32:10.852"/>
   </p1510:revLst>
 </p1510:revInfo>
 </file>
@@ -159,7 +159,7 @@
   <pc:docChgLst>
     <pc:chgData name="Pramod Naik" userId="ceb6df04-ef15-4d9b-a141-998a03559d75" providerId="ADAL" clId="{62E9B5AE-779D-4001-92D3-8FF830A8A9C1}"/>
     <pc:docChg chg="undo custSel addSld delSld modSld">
-      <pc:chgData name="Pramod Naik" userId="ceb6df04-ef15-4d9b-a141-998a03559d75" providerId="ADAL" clId="{62E9B5AE-779D-4001-92D3-8FF830A8A9C1}" dt="2025-10-26T06:42:02.529" v="2899" actId="20577"/>
+      <pc:chgData name="Pramod Naik" userId="ceb6df04-ef15-4d9b-a141-998a03559d75" providerId="ADAL" clId="{62E9B5AE-779D-4001-92D3-8FF830A8A9C1}" dt="2025-10-26T09:32:17.363" v="2928" actId="113"/>
       <pc:docMkLst>
         <pc:docMk/>
       </pc:docMkLst>
@@ -1058,12 +1058,20 @@
           <pc:sldMk cId="3987673880" sldId="541"/>
         </pc:sldMkLst>
       </pc:sldChg>
-      <pc:sldChg chg="add">
-        <pc:chgData name="Pramod Naik" userId="ceb6df04-ef15-4d9b-a141-998a03559d75" providerId="ADAL" clId="{62E9B5AE-779D-4001-92D3-8FF830A8A9C1}" dt="2025-10-26T06:41:33.094" v="2886"/>
+      <pc:sldChg chg="modSp add mod">
+        <pc:chgData name="Pramod Naik" userId="ceb6df04-ef15-4d9b-a141-998a03559d75" providerId="ADAL" clId="{62E9B5AE-779D-4001-92D3-8FF830A8A9C1}" dt="2025-10-26T09:30:56.105" v="2900" actId="113"/>
         <pc:sldMkLst>
           <pc:docMk/>
           <pc:sldMk cId="1246240379" sldId="542"/>
         </pc:sldMkLst>
+        <pc:spChg chg="mod">
+          <ac:chgData name="Pramod Naik" userId="ceb6df04-ef15-4d9b-a141-998a03559d75" providerId="ADAL" clId="{62E9B5AE-779D-4001-92D3-8FF830A8A9C1}" dt="2025-10-26T09:30:56.105" v="2900" actId="113"/>
+          <ac:spMkLst>
+            <pc:docMk/>
+            <pc:sldMk cId="1246240379" sldId="542"/>
+            <ac:spMk id="3" creationId="{16F99938-04B2-18EF-CB76-B49128814016}"/>
+          </ac:spMkLst>
+        </pc:spChg>
       </pc:sldChg>
       <pc:sldChg chg="addSp delSp modSp new mod">
         <pc:chgData name="Pramod Naik" userId="ceb6df04-ef15-4d9b-a141-998a03559d75" providerId="ADAL" clId="{62E9B5AE-779D-4001-92D3-8FF830A8A9C1}" dt="2025-10-09T19:26:54.859" v="271" actId="27636"/>
@@ -1102,12 +1110,20 @@
           </ac:picMkLst>
         </pc:picChg>
       </pc:sldChg>
-      <pc:sldChg chg="add">
-        <pc:chgData name="Pramod Naik" userId="ceb6df04-ef15-4d9b-a141-998a03559d75" providerId="ADAL" clId="{62E9B5AE-779D-4001-92D3-8FF830A8A9C1}" dt="2025-10-26T06:41:33.094" v="2886"/>
+      <pc:sldChg chg="modSp add mod">
+        <pc:chgData name="Pramod Naik" userId="ceb6df04-ef15-4d9b-a141-998a03559d75" providerId="ADAL" clId="{62E9B5AE-779D-4001-92D3-8FF830A8A9C1}" dt="2025-10-26T09:32:17.363" v="2928" actId="113"/>
         <pc:sldMkLst>
           <pc:docMk/>
           <pc:sldMk cId="432416882" sldId="543"/>
         </pc:sldMkLst>
+        <pc:spChg chg="mod">
+          <ac:chgData name="Pramod Naik" userId="ceb6df04-ef15-4d9b-a141-998a03559d75" providerId="ADAL" clId="{62E9B5AE-779D-4001-92D3-8FF830A8A9C1}" dt="2025-10-26T09:32:17.363" v="2928" actId="113"/>
+          <ac:spMkLst>
+            <pc:docMk/>
+            <pc:sldMk cId="432416882" sldId="543"/>
+            <ac:spMk id="3" creationId="{4900D9B0-1C8C-8D53-CBBB-97D6771E2FF1}"/>
+          </ac:spMkLst>
+        </pc:spChg>
       </pc:sldChg>
       <pc:sldChg chg="addSp modSp add del mod">
         <pc:chgData name="Pramod Naik" userId="ceb6df04-ef15-4d9b-a141-998a03559d75" providerId="ADAL" clId="{62E9B5AE-779D-4001-92D3-8FF830A8A9C1}" dt="2025-10-26T05:53:01.949" v="2485" actId="47"/>
@@ -8057,7 +8073,23 @@
             </a:r>
             <a:r>
               <a:rPr lang="en-US" sz="2400" dirty="0"/>
-              <a:t> works well when you expect a particular header (required or optional). </a:t>
+              <a:t> works well when you expect a particular header (</a:t>
+            </a:r>
+            <a:r>
+              <a:rPr lang="en-US" sz="2400" b="1" dirty="0"/>
+              <a:t>required</a:t>
+            </a:r>
+            <a:r>
+              <a:rPr lang="en-US" sz="2400" dirty="0"/>
+              <a:t> or </a:t>
+            </a:r>
+            <a:r>
+              <a:rPr lang="en-US" sz="2400" b="1" dirty="0"/>
+              <a:t>optional</a:t>
+            </a:r>
+            <a:r>
+              <a:rPr lang="en-US" sz="2400" dirty="0"/>
+              <a:t>). </a:t>
             </a:r>
             <a:r>
               <a:rPr lang="en-US" sz="2400" dirty="0" err="1"/>
@@ -8225,12 +8257,24 @@
               <a:t>Use </a:t>
             </a:r>
             <a:r>
-              <a:rPr lang="en-US" dirty="0"/>
+              <a:rPr lang="en-US" sz="2400" b="1" dirty="0">
+                <a:solidFill>
+                  <a:srgbClr val="002060"/>
+                </a:solidFill>
+              </a:rPr>
               <a:t>Header(...)</a:t>
             </a:r>
             <a:r>
-              <a:rPr lang="en-US" sz="2400" dirty="0"/>
-              <a:t> to mark a header </a:t>
+              <a:rPr lang="en-US" sz="2800" b="1" dirty="0">
+                <a:solidFill>
+                  <a:srgbClr val="002060"/>
+                </a:solidFill>
+              </a:rPr>
+              <a:t> </a:t>
+            </a:r>
+            <a:r>
+              <a:rPr lang="en-US" sz="2400" dirty="0"/>
+              <a:t>to mark a header </a:t>
             </a:r>
             <a:r>
               <a:rPr lang="en-US" sz="2400" b="1" dirty="0">
@@ -8245,12 +8289,24 @@
               <a:t>; </a:t>
             </a:r>
             <a:r>
-              <a:rPr lang="en-US" dirty="0"/>
+              <a:rPr lang="en-US" sz="2400" b="1" dirty="0">
+                <a:solidFill>
+                  <a:srgbClr val="002060"/>
+                </a:solidFill>
+              </a:rPr>
               <a:t>Header(None)</a:t>
             </a:r>
             <a:r>
-              <a:rPr lang="en-US" sz="2400" dirty="0"/>
-              <a:t> makes it </a:t>
+              <a:rPr lang="en-US" sz="2800" b="1" dirty="0">
+                <a:solidFill>
+                  <a:srgbClr val="002060"/>
+                </a:solidFill>
+              </a:rPr>
+              <a:t> </a:t>
+            </a:r>
+            <a:r>
+              <a:rPr lang="en-US" sz="2400" dirty="0"/>
+              <a:t>makes it </a:t>
             </a:r>
             <a:r>
               <a:rPr lang="en-US" sz="2400" b="1" dirty="0">
@@ -8263,6 +8319,40 @@
             <a:r>
               <a:rPr lang="en-US" sz="2400" dirty="0"/>
               <a:t>.</a:t>
+            </a:r>
+          </a:p>
+          <a:p>
+            <a:r>
+              <a:rPr lang="en-US" sz="2400" dirty="0"/>
+              <a:t>Here … </a:t>
+            </a:r>
+            <a:r>
+              <a:rPr lang="en-IN" sz="2400" dirty="0"/>
+              <a:t>Ellipsis used to </a:t>
+            </a:r>
+            <a:r>
+              <a:rPr lang="en-US" sz="2400" dirty="0"/>
+              <a:t>mark the parameter as </a:t>
+            </a:r>
+            <a:r>
+              <a:rPr lang="en-US" sz="2400" b="1" dirty="0"/>
+              <a:t>required</a:t>
+            </a:r>
+            <a:r>
+              <a:rPr lang="en-US" sz="2400" dirty="0"/>
+              <a:t> — just like </a:t>
+            </a:r>
+            <a:r>
+              <a:rPr lang="en-US" b="1" dirty="0"/>
+              <a:t>required=True</a:t>
+            </a:r>
+            <a:r>
+              <a:rPr lang="en-US" sz="2400" b="1" dirty="0"/>
+              <a:t> </a:t>
+            </a:r>
+            <a:r>
+              <a:rPr lang="en-US" sz="2400" dirty="0"/>
+              <a:t>in other frameworks.</a:t>
             </a:r>
           </a:p>
           <a:p>

--- a/FastAPI/FastAPI- Intermediate.pptx
+++ b/FastAPI/FastAPI- Intermediate.pptx
@@ -5,7 +5,7 @@
     <p:sldMasterId id="2147483710" r:id="rId1"/>
   </p:sldMasterIdLst>
   <p:notesMasterIdLst>
-    <p:notesMasterId r:id="rId34"/>
+    <p:notesMasterId r:id="rId46"/>
   </p:notesMasterIdLst>
   <p:sldIdLst>
     <p:sldId id="531" r:id="rId2"/>
@@ -17,29 +17,41 @@
     <p:sldId id="314" r:id="rId8"/>
     <p:sldId id="315" r:id="rId9"/>
     <p:sldId id="320" r:id="rId10"/>
-    <p:sldId id="532" r:id="rId11"/>
-    <p:sldId id="533" r:id="rId12"/>
-    <p:sldId id="534" r:id="rId13"/>
-    <p:sldId id="535" r:id="rId14"/>
-    <p:sldId id="536" r:id="rId15"/>
-    <p:sldId id="541" r:id="rId16"/>
-    <p:sldId id="542" r:id="rId17"/>
-    <p:sldId id="543" r:id="rId18"/>
-    <p:sldId id="544" r:id="rId19"/>
-    <p:sldId id="537" r:id="rId20"/>
-    <p:sldId id="538" r:id="rId21"/>
-    <p:sldId id="539" r:id="rId22"/>
-    <p:sldId id="540" r:id="rId23"/>
-    <p:sldId id="545" r:id="rId24"/>
-    <p:sldId id="546" r:id="rId25"/>
-    <p:sldId id="547" r:id="rId26"/>
-    <p:sldId id="548" r:id="rId27"/>
+    <p:sldId id="555" r:id="rId11"/>
+    <p:sldId id="532" r:id="rId12"/>
+    <p:sldId id="533" r:id="rId13"/>
+    <p:sldId id="534" r:id="rId14"/>
+    <p:sldId id="535" r:id="rId15"/>
+    <p:sldId id="536" r:id="rId16"/>
+    <p:sldId id="541" r:id="rId17"/>
+    <p:sldId id="542" r:id="rId18"/>
+    <p:sldId id="543" r:id="rId19"/>
+    <p:sldId id="544" r:id="rId20"/>
+    <p:sldId id="537" r:id="rId21"/>
+    <p:sldId id="538" r:id="rId22"/>
+    <p:sldId id="539" r:id="rId23"/>
+    <p:sldId id="540" r:id="rId24"/>
+    <p:sldId id="545" r:id="rId25"/>
+    <p:sldId id="546" r:id="rId26"/>
+    <p:sldId id="547" r:id="rId27"/>
     <p:sldId id="549" r:id="rId28"/>
     <p:sldId id="550" r:id="rId29"/>
     <p:sldId id="551" r:id="rId30"/>
     <p:sldId id="552" r:id="rId31"/>
     <p:sldId id="553" r:id="rId32"/>
-    <p:sldId id="554" r:id="rId33"/>
+    <p:sldId id="548" r:id="rId33"/>
+    <p:sldId id="554" r:id="rId34"/>
+    <p:sldId id="556" r:id="rId35"/>
+    <p:sldId id="557" r:id="rId36"/>
+    <p:sldId id="558" r:id="rId37"/>
+    <p:sldId id="559" r:id="rId38"/>
+    <p:sldId id="560" r:id="rId39"/>
+    <p:sldId id="561" r:id="rId40"/>
+    <p:sldId id="562" r:id="rId41"/>
+    <p:sldId id="563" r:id="rId42"/>
+    <p:sldId id="564" r:id="rId43"/>
+    <p:sldId id="565" r:id="rId44"/>
+    <p:sldId id="566" r:id="rId45"/>
   </p:sldIdLst>
   <p:sldSz cx="12192000" cy="6858000"/>
   <p:notesSz cx="6858000" cy="9144000"/>
@@ -149,7 +161,7 @@
 <file path=ppt/revisionInfo.xml><?xml version="1.0" encoding="utf-8"?>
 <p1510:revInfo xmlns:a="http://schemas.openxmlformats.org/drawingml/2006/main" xmlns:r="http://schemas.openxmlformats.org/officeDocument/2006/relationships" xmlns:p1510="http://schemas.microsoft.com/office/powerpoint/2015/10/main">
   <p1510:revLst>
-    <p1510:client id="{90A747A9-39C3-436E-A3AC-34027D23E8DE}" v="71" dt="2025-10-26T09:32:10.852"/>
+    <p1510:client id="{90A747A9-39C3-436E-A3AC-34027D23E8DE}" v="126" dt="2025-10-29T18:42:23.018"/>
   </p1510:revLst>
 </p1510:revInfo>
 </file>
@@ -158,8 +170,8 @@
 <pc:chgInfo xmlns:a="http://schemas.openxmlformats.org/drawingml/2006/main" xmlns:r="http://schemas.openxmlformats.org/officeDocument/2006/relationships" xmlns:ac="http://schemas.microsoft.com/office/drawing/2013/main/command" xmlns:pc="http://schemas.microsoft.com/office/powerpoint/2013/main/command">
   <pc:docChgLst>
     <pc:chgData name="Pramod Naik" userId="ceb6df04-ef15-4d9b-a141-998a03559d75" providerId="ADAL" clId="{62E9B5AE-779D-4001-92D3-8FF830A8A9C1}"/>
-    <pc:docChg chg="undo custSel addSld delSld modSld">
-      <pc:chgData name="Pramod Naik" userId="ceb6df04-ef15-4d9b-a141-998a03559d75" providerId="ADAL" clId="{62E9B5AE-779D-4001-92D3-8FF830A8A9C1}" dt="2025-10-26T09:32:17.363" v="2928" actId="113"/>
+    <pc:docChg chg="undo custSel addSld delSld modSld sldOrd">
+      <pc:chgData name="Pramod Naik" userId="ceb6df04-ef15-4d9b-a141-998a03559d75" providerId="ADAL" clId="{62E9B5AE-779D-4001-92D3-8FF830A8A9C1}" dt="2025-10-29T18:43:06.446" v="3529" actId="113"/>
       <pc:docMkLst>
         <pc:docMk/>
       </pc:docMkLst>
@@ -234,11 +246,19 @@
         </pc:sldMkLst>
       </pc:sldChg>
       <pc:sldChg chg="modSp add del mod">
-        <pc:chgData name="Pramod Naik" userId="ceb6df04-ef15-4d9b-a141-998a03559d75" providerId="ADAL" clId="{62E9B5AE-779D-4001-92D3-8FF830A8A9C1}" dt="2025-10-26T05:53:46.492" v="2529"/>
+        <pc:chgData name="Pramod Naik" userId="ceb6df04-ef15-4d9b-a141-998a03559d75" providerId="ADAL" clId="{62E9B5AE-779D-4001-92D3-8FF830A8A9C1}" dt="2025-10-27T06:47:51.196" v="2997" actId="20578"/>
         <pc:sldMkLst>
           <pc:docMk/>
           <pc:sldMk cId="2300769400" sldId="309"/>
         </pc:sldMkLst>
+        <pc:spChg chg="mod">
+          <ac:chgData name="Pramod Naik" userId="ceb6df04-ef15-4d9b-a141-998a03559d75" providerId="ADAL" clId="{62E9B5AE-779D-4001-92D3-8FF830A8A9C1}" dt="2025-10-27T06:47:51.196" v="2997" actId="20578"/>
+          <ac:spMkLst>
+            <pc:docMk/>
+            <pc:sldMk cId="2300769400" sldId="309"/>
+            <ac:spMk id="3" creationId="{B3E740B7-3016-3ABF-8912-284FC640E81B}"/>
+          </ac:spMkLst>
+        </pc:spChg>
       </pc:sldChg>
       <pc:sldChg chg="addSp delSp modSp add del mod">
         <pc:chgData name="Pramod Naik" userId="ceb6df04-ef15-4d9b-a141-998a03559d75" providerId="ADAL" clId="{62E9B5AE-779D-4001-92D3-8FF830A8A9C1}" dt="2025-10-26T05:53:46.492" v="2529"/>
@@ -262,11 +282,19 @@
         </pc:sldMkLst>
       </pc:sldChg>
       <pc:sldChg chg="addSp delSp modSp add del mod">
-        <pc:chgData name="Pramod Naik" userId="ceb6df04-ef15-4d9b-a141-998a03559d75" providerId="ADAL" clId="{62E9B5AE-779D-4001-92D3-8FF830A8A9C1}" dt="2025-10-26T05:53:46.492" v="2529"/>
+        <pc:chgData name="Pramod Naik" userId="ceb6df04-ef15-4d9b-a141-998a03559d75" providerId="ADAL" clId="{62E9B5AE-779D-4001-92D3-8FF830A8A9C1}" dt="2025-10-27T06:49:17.452" v="3003" actId="20577"/>
         <pc:sldMkLst>
           <pc:docMk/>
           <pc:sldMk cId="1417320102" sldId="313"/>
         </pc:sldMkLst>
+        <pc:spChg chg="mod">
+          <ac:chgData name="Pramod Naik" userId="ceb6df04-ef15-4d9b-a141-998a03559d75" providerId="ADAL" clId="{62E9B5AE-779D-4001-92D3-8FF830A8A9C1}" dt="2025-10-27T06:49:17.452" v="3003" actId="20577"/>
+          <ac:spMkLst>
+            <pc:docMk/>
+            <pc:sldMk cId="1417320102" sldId="313"/>
+            <ac:spMk id="3" creationId="{5A8A250C-3D0F-0849-B09B-2A4A159E4F65}"/>
+          </ac:spMkLst>
+        </pc:spChg>
       </pc:sldChg>
       <pc:sldChg chg="addSp delSp modSp add del mod">
         <pc:chgData name="Pramod Naik" userId="ceb6df04-ef15-4d9b-a141-998a03559d75" providerId="ADAL" clId="{62E9B5AE-779D-4001-92D3-8FF830A8A9C1}" dt="2025-10-26T05:53:46.492" v="2529"/>
@@ -276,11 +304,19 @@
         </pc:sldMkLst>
       </pc:sldChg>
       <pc:sldChg chg="modSp add del mod">
-        <pc:chgData name="Pramod Naik" userId="ceb6df04-ef15-4d9b-a141-998a03559d75" providerId="ADAL" clId="{62E9B5AE-779D-4001-92D3-8FF830A8A9C1}" dt="2025-10-26T05:53:46.492" v="2529"/>
+        <pc:chgData name="Pramod Naik" userId="ceb6df04-ef15-4d9b-a141-998a03559d75" providerId="ADAL" clId="{62E9B5AE-779D-4001-92D3-8FF830A8A9C1}" dt="2025-10-27T06:56:21.357" v="3014" actId="6549"/>
         <pc:sldMkLst>
           <pc:docMk/>
           <pc:sldMk cId="250238104" sldId="315"/>
         </pc:sldMkLst>
+        <pc:spChg chg="mod">
+          <ac:chgData name="Pramod Naik" userId="ceb6df04-ef15-4d9b-a141-998a03559d75" providerId="ADAL" clId="{62E9B5AE-779D-4001-92D3-8FF830A8A9C1}" dt="2025-10-27T06:56:21.357" v="3014" actId="6549"/>
+          <ac:spMkLst>
+            <pc:docMk/>
+            <pc:sldMk cId="250238104" sldId="315"/>
+            <ac:spMk id="3" creationId="{B7F95E68-7228-F472-D99B-68B070A9BCA7}"/>
+          </ac:spMkLst>
+        </pc:spChg>
       </pc:sldChg>
       <pc:sldChg chg="add del">
         <pc:chgData name="Pramod Naik" userId="ceb6df04-ef15-4d9b-a141-998a03559d75" providerId="ADAL" clId="{62E9B5AE-779D-4001-92D3-8FF830A8A9C1}" dt="2025-10-11T09:27:23.701" v="797" actId="47"/>
@@ -311,11 +347,43 @@
         </pc:sldMkLst>
       </pc:sldChg>
       <pc:sldChg chg="addSp delSp modSp add del mod">
-        <pc:chgData name="Pramod Naik" userId="ceb6df04-ef15-4d9b-a141-998a03559d75" providerId="ADAL" clId="{62E9B5AE-779D-4001-92D3-8FF830A8A9C1}" dt="2025-10-26T05:53:46.492" v="2529"/>
+        <pc:chgData name="Pramod Naik" userId="ceb6df04-ef15-4d9b-a141-998a03559d75" providerId="ADAL" clId="{62E9B5AE-779D-4001-92D3-8FF830A8A9C1}" dt="2025-10-27T06:57:54.582" v="3021" actId="14100"/>
         <pc:sldMkLst>
           <pc:docMk/>
           <pc:sldMk cId="3306552090" sldId="320"/>
         </pc:sldMkLst>
+        <pc:picChg chg="add mod">
+          <ac:chgData name="Pramod Naik" userId="ceb6df04-ef15-4d9b-a141-998a03559d75" providerId="ADAL" clId="{62E9B5AE-779D-4001-92D3-8FF830A8A9C1}" dt="2025-10-27T06:57:54.582" v="3021" actId="14100"/>
+          <ac:picMkLst>
+            <pc:docMk/>
+            <pc:sldMk cId="3306552090" sldId="320"/>
+            <ac:picMk id="4" creationId="{179E9F93-B544-6459-D770-A2C538F04700}"/>
+          </ac:picMkLst>
+        </pc:picChg>
+        <pc:picChg chg="mod">
+          <ac:chgData name="Pramod Naik" userId="ceb6df04-ef15-4d9b-a141-998a03559d75" providerId="ADAL" clId="{62E9B5AE-779D-4001-92D3-8FF830A8A9C1}" dt="2025-10-27T06:56:54.442" v="3017" actId="1076"/>
+          <ac:picMkLst>
+            <pc:docMk/>
+            <pc:sldMk cId="3306552090" sldId="320"/>
+            <ac:picMk id="6" creationId="{AC525010-61D2-60D1-1669-58F08CACBC88}"/>
+          </ac:picMkLst>
+        </pc:picChg>
+        <pc:picChg chg="mod">
+          <ac:chgData name="Pramod Naik" userId="ceb6df04-ef15-4d9b-a141-998a03559d75" providerId="ADAL" clId="{62E9B5AE-779D-4001-92D3-8FF830A8A9C1}" dt="2025-10-27T06:56:55.969" v="3018" actId="1076"/>
+          <ac:picMkLst>
+            <pc:docMk/>
+            <pc:sldMk cId="3306552090" sldId="320"/>
+            <ac:picMk id="9" creationId="{48D8ADC6-7662-1F3B-FDAC-9080CF7CD0B8}"/>
+          </ac:picMkLst>
+        </pc:picChg>
+        <pc:picChg chg="mod">
+          <ac:chgData name="Pramod Naik" userId="ceb6df04-ef15-4d9b-a141-998a03559d75" providerId="ADAL" clId="{62E9B5AE-779D-4001-92D3-8FF830A8A9C1}" dt="2025-10-27T06:56:50.140" v="3016" actId="1076"/>
+          <ac:picMkLst>
+            <pc:docMk/>
+            <pc:sldMk cId="3306552090" sldId="320"/>
+            <ac:picMk id="11" creationId="{D425886E-A48C-411D-63E6-05E692E0CD12}"/>
+          </ac:picMkLst>
+        </pc:picChg>
       </pc:sldChg>
       <pc:sldChg chg="del">
         <pc:chgData name="Pramod Naik" userId="ceb6df04-ef15-4d9b-a141-998a03559d75" providerId="ADAL" clId="{62E9B5AE-779D-4001-92D3-8FF830A8A9C1}" dt="2025-09-20T10:43:09.139" v="247" actId="47"/>
@@ -631,14 +699,6 @@
           <pc:docMk/>
           <pc:sldMk cId="2647842385" sldId="531"/>
         </pc:sldMkLst>
-        <pc:spChg chg="del">
-          <ac:chgData name="Pramod Naik" userId="ceb6df04-ef15-4d9b-a141-998a03559d75" providerId="ADAL" clId="{62E9B5AE-779D-4001-92D3-8FF830A8A9C1}" dt="2025-10-26T05:55:24.289" v="2531" actId="478"/>
-          <ac:spMkLst>
-            <pc:docMk/>
-            <pc:sldMk cId="2647842385" sldId="531"/>
-            <ac:spMk id="3" creationId="{DB144146-02E9-F2E9-8E92-7F25EF4CC958}"/>
-          </ac:spMkLst>
-        </pc:spChg>
         <pc:grpChg chg="add mod">
           <ac:chgData name="Pramod Naik" userId="ceb6df04-ef15-4d9b-a141-998a03559d75" providerId="ADAL" clId="{62E9B5AE-779D-4001-92D3-8FF830A8A9C1}" dt="2025-10-26T05:57:24.704" v="2546" actId="164"/>
           <ac:grpSpMkLst>
@@ -687,13 +747,13 @@
         </pc:sldMkLst>
       </pc:sldChg>
       <pc:sldChg chg="modSp add mod">
-        <pc:chgData name="Pramod Naik" userId="ceb6df04-ef15-4d9b-a141-998a03559d75" providerId="ADAL" clId="{62E9B5AE-779D-4001-92D3-8FF830A8A9C1}" dt="2025-10-26T06:11:56.326" v="2623" actId="20577"/>
+        <pc:chgData name="Pramod Naik" userId="ceb6df04-ef15-4d9b-a141-998a03559d75" providerId="ADAL" clId="{62E9B5AE-779D-4001-92D3-8FF830A8A9C1}" dt="2025-10-29T17:48:12.905" v="3038" actId="20577"/>
         <pc:sldMkLst>
           <pc:docMk/>
           <pc:sldMk cId="1542586166" sldId="532"/>
         </pc:sldMkLst>
         <pc:spChg chg="mod">
-          <ac:chgData name="Pramod Naik" userId="ceb6df04-ef15-4d9b-a141-998a03559d75" providerId="ADAL" clId="{62E9B5AE-779D-4001-92D3-8FF830A8A9C1}" dt="2025-10-26T06:11:56.326" v="2623" actId="20577"/>
+          <ac:chgData name="Pramod Naik" userId="ceb6df04-ef15-4d9b-a141-998a03559d75" providerId="ADAL" clId="{62E9B5AE-779D-4001-92D3-8FF830A8A9C1}" dt="2025-10-29T17:48:12.905" v="3038" actId="20577"/>
           <ac:spMkLst>
             <pc:docMk/>
             <pc:sldMk cId="1542586166" sldId="532"/>
@@ -753,25 +813,17 @@
         </pc:sldMkLst>
       </pc:sldChg>
       <pc:sldChg chg="addSp modSp add mod">
-        <pc:chgData name="Pramod Naik" userId="ceb6df04-ef15-4d9b-a141-998a03559d75" providerId="ADAL" clId="{62E9B5AE-779D-4001-92D3-8FF830A8A9C1}" dt="2025-10-26T06:20:34.104" v="2702" actId="20577"/>
+        <pc:chgData name="Pramod Naik" userId="ceb6df04-ef15-4d9b-a141-998a03559d75" providerId="ADAL" clId="{62E9B5AE-779D-4001-92D3-8FF830A8A9C1}" dt="2025-10-29T06:05:05.656" v="3026" actId="113"/>
         <pc:sldMkLst>
           <pc:docMk/>
           <pc:sldMk cId="1574124982" sldId="534"/>
         </pc:sldMkLst>
         <pc:spChg chg="mod">
-          <ac:chgData name="Pramod Naik" userId="ceb6df04-ef15-4d9b-a141-998a03559d75" providerId="ADAL" clId="{62E9B5AE-779D-4001-92D3-8FF830A8A9C1}" dt="2025-10-26T06:20:34.104" v="2702" actId="20577"/>
+          <ac:chgData name="Pramod Naik" userId="ceb6df04-ef15-4d9b-a141-998a03559d75" providerId="ADAL" clId="{62E9B5AE-779D-4001-92D3-8FF830A8A9C1}" dt="2025-10-29T06:05:05.656" v="3026" actId="113"/>
           <ac:spMkLst>
             <pc:docMk/>
             <pc:sldMk cId="1574124982" sldId="534"/>
             <ac:spMk id="3" creationId="{958ABE57-FDE6-6552-1BFD-6C8B87B26F6B}"/>
-          </ac:spMkLst>
-        </pc:spChg>
-        <pc:spChg chg="add">
-          <ac:chgData name="Pramod Naik" userId="ceb6df04-ef15-4d9b-a141-998a03559d75" providerId="ADAL" clId="{62E9B5AE-779D-4001-92D3-8FF830A8A9C1}" dt="2025-10-26T06:19:36.324" v="2672"/>
-          <ac:spMkLst>
-            <pc:docMk/>
-            <pc:sldMk cId="1574124982" sldId="534"/>
-            <ac:spMk id="5" creationId="{35A394A4-07F6-A423-2915-DEC36E2126E0}"/>
           </ac:spMkLst>
         </pc:spChg>
         <pc:picChg chg="add mod">
@@ -841,14 +893,6 @@
             <ac:spMk id="3" creationId="{9D1C0689-1BDD-F8AF-7598-6285D19C8E7F}"/>
           </ac:spMkLst>
         </pc:spChg>
-        <pc:spChg chg="add">
-          <ac:chgData name="Pramod Naik" userId="ceb6df04-ef15-4d9b-a141-998a03559d75" providerId="ADAL" clId="{62E9B5AE-779D-4001-92D3-8FF830A8A9C1}" dt="2025-10-26T06:23:06.402" v="2741"/>
-          <ac:spMkLst>
-            <pc:docMk/>
-            <pc:sldMk cId="2194351071" sldId="536"/>
-            <ac:spMk id="5" creationId="{C096E765-927A-38E2-49DC-89CEF408DBCD}"/>
-          </ac:spMkLst>
-        </pc:spChg>
         <pc:picChg chg="add mod">
           <ac:chgData name="Pramod Naik" userId="ceb6df04-ef15-4d9b-a141-998a03559d75" providerId="ADAL" clId="{62E9B5AE-779D-4001-92D3-8FF830A8A9C1}" dt="2025-10-26T06:23:20.067" v="2745" actId="1076"/>
           <ac:picMkLst>
@@ -923,14 +967,6 @@
             <ac:spMk id="3" creationId="{4C9173AC-408A-85E3-7099-CA01C60859DC}"/>
           </ac:spMkLst>
         </pc:spChg>
-        <pc:spChg chg="add">
-          <ac:chgData name="Pramod Naik" userId="ceb6df04-ef15-4d9b-a141-998a03559d75" providerId="ADAL" clId="{62E9B5AE-779D-4001-92D3-8FF830A8A9C1}" dt="2025-10-26T06:25:43.380" v="2782"/>
-          <ac:spMkLst>
-            <pc:docMk/>
-            <pc:sldMk cId="4226129508" sldId="538"/>
-            <ac:spMk id="5" creationId="{F0E176F5-FFCF-EC69-FF7C-586E10CA8ACE}"/>
-          </ac:spMkLst>
-        </pc:spChg>
         <pc:picChg chg="add mod">
           <ac:chgData name="Pramod Naik" userId="ceb6df04-ef15-4d9b-a141-998a03559d75" providerId="ADAL" clId="{62E9B5AE-779D-4001-92D3-8FF830A8A9C1}" dt="2025-10-26T06:25:28.250" v="2772" actId="1076"/>
           <ac:picMkLst>
@@ -997,14 +1033,6 @@
           <pc:docMk/>
           <pc:sldMk cId="2763923668" sldId="540"/>
         </pc:sldMkLst>
-        <pc:spChg chg="add">
-          <ac:chgData name="Pramod Naik" userId="ceb6df04-ef15-4d9b-a141-998a03559d75" providerId="ADAL" clId="{62E9B5AE-779D-4001-92D3-8FF830A8A9C1}" dt="2025-10-26T06:27:42.434" v="2802"/>
-          <ac:spMkLst>
-            <pc:docMk/>
-            <pc:sldMk cId="2763923668" sldId="540"/>
-            <ac:spMk id="2" creationId="{B9BC0CED-C7F6-8C58-1E2A-54DAB95F710A}"/>
-          </ac:spMkLst>
-        </pc:spChg>
         <pc:spChg chg="mod">
           <ac:chgData name="Pramod Naik" userId="ceb6df04-ef15-4d9b-a141-998a03559d75" providerId="ADAL" clId="{62E9B5AE-779D-4001-92D3-8FF830A8A9C1}" dt="2025-10-26T06:28:32.638" v="2822" actId="113"/>
           <ac:spMkLst>
@@ -1020,14 +1048,6 @@
           <pc:docMk/>
           <pc:sldMk cId="1799605924" sldId="541"/>
         </pc:sldMkLst>
-        <pc:spChg chg="mod">
-          <ac:chgData name="Pramod Naik" userId="ceb6df04-ef15-4d9b-a141-998a03559d75" providerId="ADAL" clId="{62E9B5AE-779D-4001-92D3-8FF830A8A9C1}" dt="2025-10-26T06:31:41.018" v="2847" actId="14100"/>
-          <ac:spMkLst>
-            <pc:docMk/>
-            <pc:sldMk cId="1799605924" sldId="541"/>
-            <ac:spMk id="3" creationId="{51D5AA5B-BEEC-E988-5601-C597134EE162}"/>
-          </ac:spMkLst>
-        </pc:spChg>
       </pc:sldChg>
       <pc:sldChg chg="modSp add mod">
         <pc:chgData name="Pramod Naik" userId="ceb6df04-ef15-4d9b-a141-998a03559d75" providerId="ADAL" clId="{62E9B5AE-779D-4001-92D3-8FF830A8A9C1}" dt="2025-10-26T06:41:43.034" v="2891" actId="20577"/>
@@ -1059,13 +1079,13 @@
         </pc:sldMkLst>
       </pc:sldChg>
       <pc:sldChg chg="modSp add mod">
-        <pc:chgData name="Pramod Naik" userId="ceb6df04-ef15-4d9b-a141-998a03559d75" providerId="ADAL" clId="{62E9B5AE-779D-4001-92D3-8FF830A8A9C1}" dt="2025-10-26T09:30:56.105" v="2900" actId="113"/>
+        <pc:chgData name="Pramod Naik" userId="ceb6df04-ef15-4d9b-a141-998a03559d75" providerId="ADAL" clId="{62E9B5AE-779D-4001-92D3-8FF830A8A9C1}" dt="2025-10-29T06:45:59.562" v="3027" actId="403"/>
         <pc:sldMkLst>
           <pc:docMk/>
           <pc:sldMk cId="1246240379" sldId="542"/>
         </pc:sldMkLst>
         <pc:spChg chg="mod">
-          <ac:chgData name="Pramod Naik" userId="ceb6df04-ef15-4d9b-a141-998a03559d75" providerId="ADAL" clId="{62E9B5AE-779D-4001-92D3-8FF830A8A9C1}" dt="2025-10-26T09:30:56.105" v="2900" actId="113"/>
+          <ac:chgData name="Pramod Naik" userId="ceb6df04-ef15-4d9b-a141-998a03559d75" providerId="ADAL" clId="{62E9B5AE-779D-4001-92D3-8FF830A8A9C1}" dt="2025-10-29T06:45:59.562" v="3027" actId="403"/>
           <ac:spMkLst>
             <pc:docMk/>
             <pc:sldMk cId="1246240379" sldId="542"/>
@@ -1093,31 +1113,15 @@
           <pc:docMk/>
           <pc:sldMk cId="4202198839" sldId="542"/>
         </pc:sldMkLst>
+      </pc:sldChg>
+      <pc:sldChg chg="modSp add mod">
+        <pc:chgData name="Pramod Naik" userId="ceb6df04-ef15-4d9b-a141-998a03559d75" providerId="ADAL" clId="{62E9B5AE-779D-4001-92D3-8FF830A8A9C1}" dt="2025-10-29T06:51:48.191" v="3030" actId="207"/>
+        <pc:sldMkLst>
+          <pc:docMk/>
+          <pc:sldMk cId="432416882" sldId="543"/>
+        </pc:sldMkLst>
         <pc:spChg chg="mod">
-          <ac:chgData name="Pramod Naik" userId="ceb6df04-ef15-4d9b-a141-998a03559d75" providerId="ADAL" clId="{62E9B5AE-779D-4001-92D3-8FF830A8A9C1}" dt="2025-10-26T06:35:32.549" v="2850" actId="20577"/>
-          <ac:spMkLst>
-            <pc:docMk/>
-            <pc:sldMk cId="4202198839" sldId="542"/>
-            <ac:spMk id="3" creationId="{16F99938-04B2-18EF-CB76-B49128814016}"/>
-          </ac:spMkLst>
-        </pc:spChg>
-        <pc:picChg chg="add mod">
-          <ac:chgData name="Pramod Naik" userId="ceb6df04-ef15-4d9b-a141-998a03559d75" providerId="ADAL" clId="{62E9B5AE-779D-4001-92D3-8FF830A8A9C1}" dt="2025-10-26T06:38:36.538" v="2853" actId="1076"/>
-          <ac:picMkLst>
-            <pc:docMk/>
-            <pc:sldMk cId="4202198839" sldId="542"/>
-            <ac:picMk id="4" creationId="{DAC2E2FA-E2F8-3AFB-7A80-FA55EC1C95C5}"/>
-          </ac:picMkLst>
-        </pc:picChg>
-      </pc:sldChg>
-      <pc:sldChg chg="modSp add mod">
-        <pc:chgData name="Pramod Naik" userId="ceb6df04-ef15-4d9b-a141-998a03559d75" providerId="ADAL" clId="{62E9B5AE-779D-4001-92D3-8FF830A8A9C1}" dt="2025-10-26T09:32:17.363" v="2928" actId="113"/>
-        <pc:sldMkLst>
-          <pc:docMk/>
-          <pc:sldMk cId="432416882" sldId="543"/>
-        </pc:sldMkLst>
-        <pc:spChg chg="mod">
-          <ac:chgData name="Pramod Naik" userId="ceb6df04-ef15-4d9b-a141-998a03559d75" providerId="ADAL" clId="{62E9B5AE-779D-4001-92D3-8FF830A8A9C1}" dt="2025-10-26T09:32:17.363" v="2928" actId="113"/>
+          <ac:chgData name="Pramod Naik" userId="ceb6df04-ef15-4d9b-a141-998a03559d75" providerId="ADAL" clId="{62E9B5AE-779D-4001-92D3-8FF830A8A9C1}" dt="2025-10-29T06:51:48.191" v="3030" actId="207"/>
           <ac:spMkLst>
             <pc:docMk/>
             <pc:sldMk cId="432416882" sldId="543"/>
@@ -1145,108 +1149,132 @@
           <pc:docMk/>
           <pc:sldMk cId="3323561692" sldId="543"/>
         </pc:sldMkLst>
+      </pc:sldChg>
+      <pc:sldChg chg="addSp modSp add del mod">
+        <pc:chgData name="Pramod Naik" userId="ceb6df04-ef15-4d9b-a141-998a03559d75" providerId="ADAL" clId="{62E9B5AE-779D-4001-92D3-8FF830A8A9C1}" dt="2025-10-26T05:53:01.967" v="2486" actId="47"/>
+        <pc:sldMkLst>
+          <pc:docMk/>
+          <pc:sldMk cId="3112172767" sldId="544"/>
+        </pc:sldMkLst>
+      </pc:sldChg>
+      <pc:sldChg chg="addSp modSp add del mod">
+        <pc:chgData name="Pramod Naik" userId="ceb6df04-ef15-4d9b-a141-998a03559d75" providerId="ADAL" clId="{62E9B5AE-779D-4001-92D3-8FF830A8A9C1}" dt="2025-10-26T06:41:27.026" v="2885" actId="2696"/>
+        <pc:sldMkLst>
+          <pc:docMk/>
+          <pc:sldMk cId="3270327816" sldId="544"/>
+        </pc:sldMkLst>
+      </pc:sldChg>
+      <pc:sldChg chg="add">
+        <pc:chgData name="Pramod Naik" userId="ceb6df04-ef15-4d9b-a141-998a03559d75" providerId="ADAL" clId="{62E9B5AE-779D-4001-92D3-8FF830A8A9C1}" dt="2025-10-26T06:41:33.094" v="2886"/>
+        <pc:sldMkLst>
+          <pc:docMk/>
+          <pc:sldMk cId="3813780875" sldId="544"/>
+        </pc:sldMkLst>
+      </pc:sldChg>
+      <pc:sldChg chg="delSp modSp new mod">
+        <pc:chgData name="Pramod Naik" userId="ceb6df04-ef15-4d9b-a141-998a03559d75" providerId="ADAL" clId="{62E9B5AE-779D-4001-92D3-8FF830A8A9C1}" dt="2025-10-09T19:34:28.822" v="323" actId="403"/>
+        <pc:sldMkLst>
+          <pc:docMk/>
+          <pc:sldMk cId="3900606193" sldId="544"/>
+        </pc:sldMkLst>
+      </pc:sldChg>
+      <pc:sldChg chg="delSp modSp new mod">
+        <pc:chgData name="Pramod Naik" userId="ceb6df04-ef15-4d9b-a141-998a03559d75" providerId="ADAL" clId="{62E9B5AE-779D-4001-92D3-8FF830A8A9C1}" dt="2025-10-09T19:36:05.739" v="342" actId="113"/>
+        <pc:sldMkLst>
+          <pc:docMk/>
+          <pc:sldMk cId="1280191467" sldId="545"/>
+        </pc:sldMkLst>
+      </pc:sldChg>
+      <pc:sldChg chg="addSp modSp add del mod">
+        <pc:chgData name="Pramod Naik" userId="ceb6df04-ef15-4d9b-a141-998a03559d75" providerId="ADAL" clId="{62E9B5AE-779D-4001-92D3-8FF830A8A9C1}" dt="2025-10-26T05:53:01.967" v="2487" actId="47"/>
+        <pc:sldMkLst>
+          <pc:docMk/>
+          <pc:sldMk cId="1701663649" sldId="545"/>
+        </pc:sldMkLst>
+      </pc:sldChg>
+      <pc:sldChg chg="modSp add mod">
+        <pc:chgData name="Pramod Naik" userId="ceb6df04-ef15-4d9b-a141-998a03559d75" providerId="ADAL" clId="{62E9B5AE-779D-4001-92D3-8FF830A8A9C1}" dt="2025-10-29T17:50:52.228" v="3058" actId="403"/>
+        <pc:sldMkLst>
+          <pc:docMk/>
+          <pc:sldMk cId="3943781873" sldId="545"/>
+        </pc:sldMkLst>
         <pc:spChg chg="mod">
-          <ac:chgData name="Pramod Naik" userId="ceb6df04-ef15-4d9b-a141-998a03559d75" providerId="ADAL" clId="{62E9B5AE-779D-4001-92D3-8FF830A8A9C1}" dt="2025-10-26T06:39:53.756" v="2868" actId="1035"/>
+          <ac:chgData name="Pramod Naik" userId="ceb6df04-ef15-4d9b-a141-998a03559d75" providerId="ADAL" clId="{62E9B5AE-779D-4001-92D3-8FF830A8A9C1}" dt="2025-10-29T17:50:52.228" v="3058" actId="403"/>
           <ac:spMkLst>
             <pc:docMk/>
-            <pc:sldMk cId="3323561692" sldId="543"/>
-            <ac:spMk id="3" creationId="{4900D9B0-1C8C-8D53-CBBB-97D6771E2FF1}"/>
+            <pc:sldMk cId="3943781873" sldId="545"/>
+            <ac:spMk id="3" creationId="{669DABD5-A332-1082-442E-90E31E84F908}"/>
           </ac:spMkLst>
         </pc:spChg>
       </pc:sldChg>
-      <pc:sldChg chg="addSp modSp add del mod">
-        <pc:chgData name="Pramod Naik" userId="ceb6df04-ef15-4d9b-a141-998a03559d75" providerId="ADAL" clId="{62E9B5AE-779D-4001-92D3-8FF830A8A9C1}" dt="2025-10-26T05:53:01.967" v="2486" actId="47"/>
-        <pc:sldMkLst>
-          <pc:docMk/>
-          <pc:sldMk cId="3112172767" sldId="544"/>
-        </pc:sldMkLst>
-      </pc:sldChg>
-      <pc:sldChg chg="addSp modSp add del mod">
-        <pc:chgData name="Pramod Naik" userId="ceb6df04-ef15-4d9b-a141-998a03559d75" providerId="ADAL" clId="{62E9B5AE-779D-4001-92D3-8FF830A8A9C1}" dt="2025-10-26T06:41:27.026" v="2885" actId="2696"/>
-        <pc:sldMkLst>
-          <pc:docMk/>
-          <pc:sldMk cId="3270327816" sldId="544"/>
+      <pc:sldChg chg="modSp add mod">
+        <pc:chgData name="Pramod Naik" userId="ceb6df04-ef15-4d9b-a141-998a03559d75" providerId="ADAL" clId="{62E9B5AE-779D-4001-92D3-8FF830A8A9C1}" dt="2025-10-29T17:55:36.782" v="3120" actId="14100"/>
+        <pc:sldMkLst>
+          <pc:docMk/>
+          <pc:sldMk cId="36506538" sldId="546"/>
         </pc:sldMkLst>
         <pc:spChg chg="mod">
-          <ac:chgData name="Pramod Naik" userId="ceb6df04-ef15-4d9b-a141-998a03559d75" providerId="ADAL" clId="{62E9B5AE-779D-4001-92D3-8FF830A8A9C1}" dt="2025-10-26T06:40:19.269" v="2873" actId="20577"/>
+          <ac:chgData name="Pramod Naik" userId="ceb6df04-ef15-4d9b-a141-998a03559d75" providerId="ADAL" clId="{62E9B5AE-779D-4001-92D3-8FF830A8A9C1}" dt="2025-10-29T17:55:36.782" v="3120" actId="14100"/>
           <ac:spMkLst>
             <pc:docMk/>
-            <pc:sldMk cId="3270327816" sldId="544"/>
-            <ac:spMk id="3" creationId="{F6AE819D-2CA8-1A41-68C6-D3C876994933}"/>
+            <pc:sldMk cId="36506538" sldId="546"/>
+            <ac:spMk id="3" creationId="{8746F807-C77E-7DAD-5038-EDDF5C8B83E2}"/>
+          </ac:spMkLst>
+        </pc:spChg>
+      </pc:sldChg>
+      <pc:sldChg chg="modSp add del mod">
+        <pc:chgData name="Pramod Naik" userId="ceb6df04-ef15-4d9b-a141-998a03559d75" providerId="ADAL" clId="{62E9B5AE-779D-4001-92D3-8FF830A8A9C1}" dt="2025-10-26T05:53:02.017" v="2488" actId="47"/>
+        <pc:sldMkLst>
+          <pc:docMk/>
+          <pc:sldMk cId="976242571" sldId="546"/>
+        </pc:sldMkLst>
+      </pc:sldChg>
+      <pc:sldChg chg="modSp add mod">
+        <pc:chgData name="Pramod Naik" userId="ceb6df04-ef15-4d9b-a141-998a03559d75" providerId="ADAL" clId="{62E9B5AE-779D-4001-92D3-8FF830A8A9C1}" dt="2025-10-09T19:54:08.503" v="378" actId="113"/>
+        <pc:sldMkLst>
+          <pc:docMk/>
+          <pc:sldMk cId="3146542634" sldId="546"/>
+        </pc:sldMkLst>
+      </pc:sldChg>
+      <pc:sldChg chg="addSp delSp modSp add mod">
+        <pc:chgData name="Pramod Naik" userId="ceb6df04-ef15-4d9b-a141-998a03559d75" providerId="ADAL" clId="{62E9B5AE-779D-4001-92D3-8FF830A8A9C1}" dt="2025-10-29T17:59:48.507" v="3158" actId="113"/>
+        <pc:sldMkLst>
+          <pc:docMk/>
+          <pc:sldMk cId="1075547662" sldId="547"/>
+        </pc:sldMkLst>
+        <pc:spChg chg="mod">
+          <ac:chgData name="Pramod Naik" userId="ceb6df04-ef15-4d9b-a141-998a03559d75" providerId="ADAL" clId="{62E9B5AE-779D-4001-92D3-8FF830A8A9C1}" dt="2025-10-29T17:59:48.507" v="3158" actId="113"/>
+          <ac:spMkLst>
+            <pc:docMk/>
+            <pc:sldMk cId="1075547662" sldId="547"/>
+            <ac:spMk id="3" creationId="{05E5B31D-0E10-7D2E-BC2A-F96D16287DA7}"/>
+          </ac:spMkLst>
+        </pc:spChg>
+        <pc:spChg chg="add">
+          <ac:chgData name="Pramod Naik" userId="ceb6df04-ef15-4d9b-a141-998a03559d75" providerId="ADAL" clId="{62E9B5AE-779D-4001-92D3-8FF830A8A9C1}" dt="2025-10-29T17:56:22.523" v="3132"/>
+          <ac:spMkLst>
+            <pc:docMk/>
+            <pc:sldMk cId="1075547662" sldId="547"/>
+            <ac:spMk id="5" creationId="{466BD2E3-B7E0-9853-A0AD-DEEB96312DAD}"/>
+          </ac:spMkLst>
+        </pc:spChg>
+        <pc:spChg chg="add del mod">
+          <ac:chgData name="Pramod Naik" userId="ceb6df04-ef15-4d9b-a141-998a03559d75" providerId="ADAL" clId="{62E9B5AE-779D-4001-92D3-8FF830A8A9C1}" dt="2025-10-29T17:57:15.241" v="3145" actId="478"/>
+          <ac:spMkLst>
+            <pc:docMk/>
+            <pc:sldMk cId="1075547662" sldId="547"/>
+            <ac:spMk id="6" creationId="{2DC14C48-DA8B-CA09-8981-5B6D141B0E69}"/>
           </ac:spMkLst>
         </pc:spChg>
         <pc:picChg chg="add mod">
-          <ac:chgData name="Pramod Naik" userId="ceb6df04-ef15-4d9b-a141-998a03559d75" providerId="ADAL" clId="{62E9B5AE-779D-4001-92D3-8FF830A8A9C1}" dt="2025-10-26T06:40:55.049" v="2876" actId="1076"/>
+          <ac:chgData name="Pramod Naik" userId="ceb6df04-ef15-4d9b-a141-998a03559d75" providerId="ADAL" clId="{62E9B5AE-779D-4001-92D3-8FF830A8A9C1}" dt="2025-10-29T17:57:05.429" v="3142" actId="1076"/>
           <ac:picMkLst>
             <pc:docMk/>
-            <pc:sldMk cId="3270327816" sldId="544"/>
-            <ac:picMk id="4" creationId="{45671FBA-F23D-8DD6-705E-002DEFC8ED63}"/>
+            <pc:sldMk cId="1075547662" sldId="547"/>
+            <ac:picMk id="4" creationId="{591D0356-8DE7-CE59-71BE-E3781041A58D}"/>
           </ac:picMkLst>
         </pc:picChg>
       </pc:sldChg>
-      <pc:sldChg chg="add">
-        <pc:chgData name="Pramod Naik" userId="ceb6df04-ef15-4d9b-a141-998a03559d75" providerId="ADAL" clId="{62E9B5AE-779D-4001-92D3-8FF830A8A9C1}" dt="2025-10-26T06:41:33.094" v="2886"/>
-        <pc:sldMkLst>
-          <pc:docMk/>
-          <pc:sldMk cId="3813780875" sldId="544"/>
-        </pc:sldMkLst>
-      </pc:sldChg>
-      <pc:sldChg chg="delSp modSp new mod">
-        <pc:chgData name="Pramod Naik" userId="ceb6df04-ef15-4d9b-a141-998a03559d75" providerId="ADAL" clId="{62E9B5AE-779D-4001-92D3-8FF830A8A9C1}" dt="2025-10-09T19:34:28.822" v="323" actId="403"/>
-        <pc:sldMkLst>
-          <pc:docMk/>
-          <pc:sldMk cId="3900606193" sldId="544"/>
-        </pc:sldMkLst>
-      </pc:sldChg>
-      <pc:sldChg chg="delSp modSp new mod">
-        <pc:chgData name="Pramod Naik" userId="ceb6df04-ef15-4d9b-a141-998a03559d75" providerId="ADAL" clId="{62E9B5AE-779D-4001-92D3-8FF830A8A9C1}" dt="2025-10-09T19:36:05.739" v="342" actId="113"/>
-        <pc:sldMkLst>
-          <pc:docMk/>
-          <pc:sldMk cId="1280191467" sldId="545"/>
-        </pc:sldMkLst>
-      </pc:sldChg>
-      <pc:sldChg chg="addSp modSp add del mod">
-        <pc:chgData name="Pramod Naik" userId="ceb6df04-ef15-4d9b-a141-998a03559d75" providerId="ADAL" clId="{62E9B5AE-779D-4001-92D3-8FF830A8A9C1}" dt="2025-10-26T05:53:01.967" v="2487" actId="47"/>
-        <pc:sldMkLst>
-          <pc:docMk/>
-          <pc:sldMk cId="1701663649" sldId="545"/>
-        </pc:sldMkLst>
-      </pc:sldChg>
-      <pc:sldChg chg="add">
-        <pc:chgData name="Pramod Naik" userId="ceb6df04-ef15-4d9b-a141-998a03559d75" providerId="ADAL" clId="{62E9B5AE-779D-4001-92D3-8FF830A8A9C1}" dt="2025-10-26T05:53:13.913" v="2527"/>
-        <pc:sldMkLst>
-          <pc:docMk/>
-          <pc:sldMk cId="3943781873" sldId="545"/>
-        </pc:sldMkLst>
-      </pc:sldChg>
-      <pc:sldChg chg="add">
-        <pc:chgData name="Pramod Naik" userId="ceb6df04-ef15-4d9b-a141-998a03559d75" providerId="ADAL" clId="{62E9B5AE-779D-4001-92D3-8FF830A8A9C1}" dt="2025-10-26T05:53:14.088" v="2528"/>
-        <pc:sldMkLst>
-          <pc:docMk/>
-          <pc:sldMk cId="36506538" sldId="546"/>
-        </pc:sldMkLst>
-      </pc:sldChg>
-      <pc:sldChg chg="modSp add del mod">
-        <pc:chgData name="Pramod Naik" userId="ceb6df04-ef15-4d9b-a141-998a03559d75" providerId="ADAL" clId="{62E9B5AE-779D-4001-92D3-8FF830A8A9C1}" dt="2025-10-26T05:53:02.017" v="2488" actId="47"/>
-        <pc:sldMkLst>
-          <pc:docMk/>
-          <pc:sldMk cId="976242571" sldId="546"/>
-        </pc:sldMkLst>
-      </pc:sldChg>
-      <pc:sldChg chg="modSp add mod">
-        <pc:chgData name="Pramod Naik" userId="ceb6df04-ef15-4d9b-a141-998a03559d75" providerId="ADAL" clId="{62E9B5AE-779D-4001-92D3-8FF830A8A9C1}" dt="2025-10-09T19:54:08.503" v="378" actId="113"/>
-        <pc:sldMkLst>
-          <pc:docMk/>
-          <pc:sldMk cId="3146542634" sldId="546"/>
-        </pc:sldMkLst>
-      </pc:sldChg>
-      <pc:sldChg chg="add">
-        <pc:chgData name="Pramod Naik" userId="ceb6df04-ef15-4d9b-a141-998a03559d75" providerId="ADAL" clId="{62E9B5AE-779D-4001-92D3-8FF830A8A9C1}" dt="2025-10-26T06:40:59.165" v="2877"/>
-        <pc:sldMkLst>
-          <pc:docMk/>
-          <pc:sldMk cId="1075547662" sldId="547"/>
-        </pc:sldMkLst>
-      </pc:sldChg>
       <pc:sldChg chg="addSp delSp modSp new del mod">
         <pc:chgData name="Pramod Naik" userId="ceb6df04-ef15-4d9b-a141-998a03559d75" providerId="ADAL" clId="{62E9B5AE-779D-4001-92D3-8FF830A8A9C1}" dt="2025-10-26T05:52:59.807" v="2466" actId="47"/>
         <pc:sldMkLst>
@@ -1268,12 +1296,28 @@
           <pc:sldMk cId="2217804995" sldId="548"/>
         </pc:sldMkLst>
       </pc:sldChg>
-      <pc:sldChg chg="add">
-        <pc:chgData name="Pramod Naik" userId="ceb6df04-ef15-4d9b-a141-998a03559d75" providerId="ADAL" clId="{62E9B5AE-779D-4001-92D3-8FF830A8A9C1}" dt="2025-10-26T06:40:59.339" v="2878"/>
+      <pc:sldChg chg="addSp modSp add del mod ord">
+        <pc:chgData name="Pramod Naik" userId="ceb6df04-ef15-4d9b-a141-998a03559d75" providerId="ADAL" clId="{62E9B5AE-779D-4001-92D3-8FF830A8A9C1}" dt="2025-10-29T18:16:20.876" v="3375"/>
         <pc:sldMkLst>
           <pc:docMk/>
           <pc:sldMk cId="4070054215" sldId="548"/>
         </pc:sldMkLst>
+        <pc:spChg chg="mod">
+          <ac:chgData name="Pramod Naik" userId="ceb6df04-ef15-4d9b-a141-998a03559d75" providerId="ADAL" clId="{62E9B5AE-779D-4001-92D3-8FF830A8A9C1}" dt="2025-10-29T17:59:30.277" v="3146" actId="20577"/>
+          <ac:spMkLst>
+            <pc:docMk/>
+            <pc:sldMk cId="4070054215" sldId="548"/>
+            <ac:spMk id="3" creationId="{AB66216B-06F6-82F1-5605-A4216249DAB7}"/>
+          </ac:spMkLst>
+        </pc:spChg>
+        <pc:picChg chg="add">
+          <ac:chgData name="Pramod Naik" userId="ceb6df04-ef15-4d9b-a141-998a03559d75" providerId="ADAL" clId="{62E9B5AE-779D-4001-92D3-8FF830A8A9C1}" dt="2025-10-29T17:59:30.752" v="3147" actId="22"/>
+          <ac:picMkLst>
+            <pc:docMk/>
+            <pc:sldMk cId="4070054215" sldId="548"/>
+            <ac:picMk id="4" creationId="{5A8BD139-D089-F0CB-A7C3-D1C0D5CE971A}"/>
+          </ac:picMkLst>
+        </pc:picChg>
       </pc:sldChg>
       <pc:sldChg chg="addSp delSp modSp new del mod">
         <pc:chgData name="Pramod Naik" userId="ceb6df04-ef15-4d9b-a141-998a03559d75" providerId="ADAL" clId="{62E9B5AE-779D-4001-92D3-8FF830A8A9C1}" dt="2025-10-26T05:52:59.843" v="2468" actId="47"/>
@@ -1282,19 +1326,51 @@
           <pc:sldMk cId="52434813" sldId="549"/>
         </pc:sldMkLst>
       </pc:sldChg>
-      <pc:sldChg chg="add">
-        <pc:chgData name="Pramod Naik" userId="ceb6df04-ef15-4d9b-a141-998a03559d75" providerId="ADAL" clId="{62E9B5AE-779D-4001-92D3-8FF830A8A9C1}" dt="2025-10-26T06:40:59.494" v="2879"/>
+      <pc:sldChg chg="addSp modSp add mod ord">
+        <pc:chgData name="Pramod Naik" userId="ceb6df04-ef15-4d9b-a141-998a03559d75" providerId="ADAL" clId="{62E9B5AE-779D-4001-92D3-8FF830A8A9C1}" dt="2025-10-29T18:04:08.843" v="3197" actId="207"/>
         <pc:sldMkLst>
           <pc:docMk/>
           <pc:sldMk cId="2542508812" sldId="549"/>
         </pc:sldMkLst>
-      </pc:sldChg>
-      <pc:sldChg chg="add">
-        <pc:chgData name="Pramod Naik" userId="ceb6df04-ef15-4d9b-a141-998a03559d75" providerId="ADAL" clId="{62E9B5AE-779D-4001-92D3-8FF830A8A9C1}" dt="2025-10-26T06:40:59.657" v="2880"/>
+        <pc:spChg chg="mod">
+          <ac:chgData name="Pramod Naik" userId="ceb6df04-ef15-4d9b-a141-998a03559d75" providerId="ADAL" clId="{62E9B5AE-779D-4001-92D3-8FF830A8A9C1}" dt="2025-10-29T18:04:08.843" v="3197" actId="207"/>
+          <ac:spMkLst>
+            <pc:docMk/>
+            <pc:sldMk cId="2542508812" sldId="549"/>
+            <ac:spMk id="3" creationId="{5EE72B67-D2F2-0834-C25D-97B016B19520}"/>
+          </ac:spMkLst>
+        </pc:spChg>
+        <pc:picChg chg="add mod">
+          <ac:chgData name="Pramod Naik" userId="ceb6df04-ef15-4d9b-a141-998a03559d75" providerId="ADAL" clId="{62E9B5AE-779D-4001-92D3-8FF830A8A9C1}" dt="2025-10-29T18:03:57.040" v="3178" actId="1076"/>
+          <ac:picMkLst>
+            <pc:docMk/>
+            <pc:sldMk cId="2542508812" sldId="549"/>
+            <ac:picMk id="4" creationId="{4CB49D6B-9CE2-8494-29CC-C78D472A4345}"/>
+          </ac:picMkLst>
+        </pc:picChg>
+      </pc:sldChg>
+      <pc:sldChg chg="addSp modSp add mod ord">
+        <pc:chgData name="Pramod Naik" userId="ceb6df04-ef15-4d9b-a141-998a03559d75" providerId="ADAL" clId="{62E9B5AE-779D-4001-92D3-8FF830A8A9C1}" dt="2025-10-29T18:10:34.408" v="3228" actId="1076"/>
         <pc:sldMkLst>
           <pc:docMk/>
           <pc:sldMk cId="1926645783" sldId="550"/>
         </pc:sldMkLst>
+        <pc:spChg chg="mod">
+          <ac:chgData name="Pramod Naik" userId="ceb6df04-ef15-4d9b-a141-998a03559d75" providerId="ADAL" clId="{62E9B5AE-779D-4001-92D3-8FF830A8A9C1}" dt="2025-10-29T18:10:28.462" v="3227" actId="403"/>
+          <ac:spMkLst>
+            <pc:docMk/>
+            <pc:sldMk cId="1926645783" sldId="550"/>
+            <ac:spMk id="3" creationId="{6A3750CF-38F0-DD0B-0F8A-C583D6389F8E}"/>
+          </ac:spMkLst>
+        </pc:spChg>
+        <pc:picChg chg="add mod">
+          <ac:chgData name="Pramod Naik" userId="ceb6df04-ef15-4d9b-a141-998a03559d75" providerId="ADAL" clId="{62E9B5AE-779D-4001-92D3-8FF830A8A9C1}" dt="2025-10-29T18:10:34.408" v="3228" actId="1076"/>
+          <ac:picMkLst>
+            <pc:docMk/>
+            <pc:sldMk cId="1926645783" sldId="550"/>
+            <ac:picMk id="4" creationId="{1EE2C232-DC0C-4366-AB84-8B5AB96DCB2B}"/>
+          </ac:picMkLst>
+        </pc:picChg>
       </pc:sldChg>
       <pc:sldChg chg="addSp delSp modSp add del mod">
         <pc:chgData name="Pramod Naik" userId="ceb6df04-ef15-4d9b-a141-998a03559d75" providerId="ADAL" clId="{62E9B5AE-779D-4001-92D3-8FF830A8A9C1}" dt="2025-10-26T05:52:59.879" v="2469" actId="47"/>
@@ -1310,12 +1386,28 @@
           <pc:sldMk cId="1299490774" sldId="551"/>
         </pc:sldMkLst>
       </pc:sldChg>
-      <pc:sldChg chg="add">
-        <pc:chgData name="Pramod Naik" userId="ceb6df04-ef15-4d9b-a141-998a03559d75" providerId="ADAL" clId="{62E9B5AE-779D-4001-92D3-8FF830A8A9C1}" dt="2025-10-26T06:40:59.815" v="2881"/>
+      <pc:sldChg chg="addSp modSp add mod ord">
+        <pc:chgData name="Pramod Naik" userId="ceb6df04-ef15-4d9b-a141-998a03559d75" providerId="ADAL" clId="{62E9B5AE-779D-4001-92D3-8FF830A8A9C1}" dt="2025-10-29T18:12:44.200" v="3283" actId="14100"/>
         <pc:sldMkLst>
           <pc:docMk/>
           <pc:sldMk cId="3077920898" sldId="551"/>
         </pc:sldMkLst>
+        <pc:spChg chg="mod">
+          <ac:chgData name="Pramod Naik" userId="ceb6df04-ef15-4d9b-a141-998a03559d75" providerId="ADAL" clId="{62E9B5AE-779D-4001-92D3-8FF830A8A9C1}" dt="2025-10-29T18:12:44.200" v="3283" actId="14100"/>
+          <ac:spMkLst>
+            <pc:docMk/>
+            <pc:sldMk cId="3077920898" sldId="551"/>
+            <ac:spMk id="3" creationId="{AA11C33D-7267-21DD-E537-2FC9F908BECC}"/>
+          </ac:spMkLst>
+        </pc:spChg>
+        <pc:picChg chg="add mod">
+          <ac:chgData name="Pramod Naik" userId="ceb6df04-ef15-4d9b-a141-998a03559d75" providerId="ADAL" clId="{62E9B5AE-779D-4001-92D3-8FF830A8A9C1}" dt="2025-10-29T18:12:43.517" v="3282" actId="1076"/>
+          <ac:picMkLst>
+            <pc:docMk/>
+            <pc:sldMk cId="3077920898" sldId="551"/>
+            <ac:picMk id="4" creationId="{51B211C8-2BF3-F3F5-4EAC-5CB0D85BFE57}"/>
+          </ac:picMkLst>
+        </pc:picChg>
       </pc:sldChg>
       <pc:sldChg chg="addSp modSp add del mod">
         <pc:chgData name="Pramod Naik" userId="ceb6df04-ef15-4d9b-a141-998a03559d75" providerId="ADAL" clId="{62E9B5AE-779D-4001-92D3-8FF830A8A9C1}" dt="2025-10-26T05:52:59.951" v="2471" actId="47"/>
@@ -1324,12 +1416,28 @@
           <pc:sldMk cId="865861587" sldId="552"/>
         </pc:sldMkLst>
       </pc:sldChg>
-      <pc:sldChg chg="add">
-        <pc:chgData name="Pramod Naik" userId="ceb6df04-ef15-4d9b-a141-998a03559d75" providerId="ADAL" clId="{62E9B5AE-779D-4001-92D3-8FF830A8A9C1}" dt="2025-10-26T06:40:59.965" v="2882"/>
+      <pc:sldChg chg="addSp delSp modSp add mod ord">
+        <pc:chgData name="Pramod Naik" userId="ceb6df04-ef15-4d9b-a141-998a03559d75" providerId="ADAL" clId="{62E9B5AE-779D-4001-92D3-8FF830A8A9C1}" dt="2025-10-29T18:13:37.325" v="3287" actId="1076"/>
         <pc:sldMkLst>
           <pc:docMk/>
           <pc:sldMk cId="3305929081" sldId="552"/>
         </pc:sldMkLst>
+        <pc:spChg chg="del">
+          <ac:chgData name="Pramod Naik" userId="ceb6df04-ef15-4d9b-a141-998a03559d75" providerId="ADAL" clId="{62E9B5AE-779D-4001-92D3-8FF830A8A9C1}" dt="2025-10-29T18:13:32.857" v="3286" actId="478"/>
+          <ac:spMkLst>
+            <pc:docMk/>
+            <pc:sldMk cId="3305929081" sldId="552"/>
+            <ac:spMk id="3" creationId="{E57543A8-D2CD-D88D-910D-AB7F1223C9D2}"/>
+          </ac:spMkLst>
+        </pc:spChg>
+        <pc:picChg chg="add mod">
+          <ac:chgData name="Pramod Naik" userId="ceb6df04-ef15-4d9b-a141-998a03559d75" providerId="ADAL" clId="{62E9B5AE-779D-4001-92D3-8FF830A8A9C1}" dt="2025-10-29T18:13:37.325" v="3287" actId="1076"/>
+          <ac:picMkLst>
+            <pc:docMk/>
+            <pc:sldMk cId="3305929081" sldId="552"/>
+            <ac:picMk id="4" creationId="{03EE35BF-0C44-6347-FE65-D08F0820B278}"/>
+          </ac:picMkLst>
+        </pc:picChg>
       </pc:sldChg>
       <pc:sldChg chg="addSp delSp modSp add del mod">
         <pc:chgData name="Pramod Naik" userId="ceb6df04-ef15-4d9b-a141-998a03559d75" providerId="ADAL" clId="{62E9B5AE-779D-4001-92D3-8FF830A8A9C1}" dt="2025-10-26T05:52:59.990" v="2472" actId="47"/>
@@ -1338,12 +1446,20 @@
           <pc:sldMk cId="319971518" sldId="553"/>
         </pc:sldMkLst>
       </pc:sldChg>
-      <pc:sldChg chg="add">
-        <pc:chgData name="Pramod Naik" userId="ceb6df04-ef15-4d9b-a141-998a03559d75" providerId="ADAL" clId="{62E9B5AE-779D-4001-92D3-8FF830A8A9C1}" dt="2025-10-26T06:41:00.111" v="2883"/>
+      <pc:sldChg chg="modSp add mod">
+        <pc:chgData name="Pramod Naik" userId="ceb6df04-ef15-4d9b-a141-998a03559d75" providerId="ADAL" clId="{62E9B5AE-779D-4001-92D3-8FF830A8A9C1}" dt="2025-10-29T18:16:39.307" v="3402" actId="113"/>
         <pc:sldMkLst>
           <pc:docMk/>
           <pc:sldMk cId="1895132841" sldId="553"/>
         </pc:sldMkLst>
+        <pc:spChg chg="mod">
+          <ac:chgData name="Pramod Naik" userId="ceb6df04-ef15-4d9b-a141-998a03559d75" providerId="ADAL" clId="{62E9B5AE-779D-4001-92D3-8FF830A8A9C1}" dt="2025-10-29T18:16:39.307" v="3402" actId="113"/>
+          <ac:spMkLst>
+            <pc:docMk/>
+            <pc:sldMk cId="1895132841" sldId="553"/>
+            <ac:spMk id="3" creationId="{BBABF3DF-1412-1262-0B45-131BB51E219D}"/>
+          </ac:spMkLst>
+        </pc:spChg>
       </pc:sldChg>
       <pc:sldChg chg="addSp delSp modSp add del mod">
         <pc:chgData name="Pramod Naik" userId="ceb6df04-ef15-4d9b-a141-998a03559d75" providerId="ADAL" clId="{62E9B5AE-779D-4001-92D3-8FF830A8A9C1}" dt="2025-10-26T05:53:00.025" v="2473" actId="47"/>
@@ -1352,12 +1468,91 @@
           <pc:sldMk cId="1986494582" sldId="554"/>
         </pc:sldMkLst>
       </pc:sldChg>
-      <pc:sldChg chg="add">
-        <pc:chgData name="Pramod Naik" userId="ceb6df04-ef15-4d9b-a141-998a03559d75" providerId="ADAL" clId="{62E9B5AE-779D-4001-92D3-8FF830A8A9C1}" dt="2025-10-26T06:41:00.265" v="2884"/>
+      <pc:sldChg chg="addSp modSp add mod">
+        <pc:chgData name="Pramod Naik" userId="ceb6df04-ef15-4d9b-a141-998a03559d75" providerId="ADAL" clId="{62E9B5AE-779D-4001-92D3-8FF830A8A9C1}" dt="2025-10-29T18:17:36.949" v="3412" actId="1076"/>
         <pc:sldMkLst>
           <pc:docMk/>
           <pc:sldMk cId="2406591720" sldId="554"/>
         </pc:sldMkLst>
+        <pc:spChg chg="mod">
+          <ac:chgData name="Pramod Naik" userId="ceb6df04-ef15-4d9b-a141-998a03559d75" providerId="ADAL" clId="{62E9B5AE-779D-4001-92D3-8FF830A8A9C1}" dt="2025-10-29T18:17:07.229" v="3408" actId="12"/>
+          <ac:spMkLst>
+            <pc:docMk/>
+            <pc:sldMk cId="2406591720" sldId="554"/>
+            <ac:spMk id="3" creationId="{297A44BC-D9AD-0CB8-D7A7-9091B63F9A04}"/>
+          </ac:spMkLst>
+        </pc:spChg>
+        <pc:picChg chg="add mod">
+          <ac:chgData name="Pramod Naik" userId="ceb6df04-ef15-4d9b-a141-998a03559d75" providerId="ADAL" clId="{62E9B5AE-779D-4001-92D3-8FF830A8A9C1}" dt="2025-10-29T18:17:36.949" v="3412" actId="1076"/>
+          <ac:picMkLst>
+            <pc:docMk/>
+            <pc:sldMk cId="2406591720" sldId="554"/>
+            <ac:picMk id="4" creationId="{D873B4A7-D299-DCCD-7F79-2A64AF17F7E0}"/>
+          </ac:picMkLst>
+        </pc:picChg>
+      </pc:sldChg>
+      <pc:sldChg chg="addSp delSp modSp new mod ord">
+        <pc:chgData name="Pramod Naik" userId="ceb6df04-ef15-4d9b-a141-998a03559d75" providerId="ADAL" clId="{62E9B5AE-779D-4001-92D3-8FF830A8A9C1}" dt="2025-10-27T05:48:49.273" v="2993" actId="1076"/>
+        <pc:sldMkLst>
+          <pc:docMk/>
+          <pc:sldMk cId="2633946043" sldId="555"/>
+        </pc:sldMkLst>
+        <pc:spChg chg="add mod">
+          <ac:chgData name="Pramod Naik" userId="ceb6df04-ef15-4d9b-a141-998a03559d75" providerId="ADAL" clId="{62E9B5AE-779D-4001-92D3-8FF830A8A9C1}" dt="2025-10-27T05:48:49.273" v="2993" actId="1076"/>
+          <ac:spMkLst>
+            <pc:docMk/>
+            <pc:sldMk cId="2633946043" sldId="555"/>
+            <ac:spMk id="10" creationId="{57D60E8E-E4EA-8BC2-BC63-DD933256A14C}"/>
+          </ac:spMkLst>
+        </pc:spChg>
+        <pc:grpChg chg="add mod">
+          <ac:chgData name="Pramod Naik" userId="ceb6df04-ef15-4d9b-a141-998a03559d75" providerId="ADAL" clId="{62E9B5AE-779D-4001-92D3-8FF830A8A9C1}" dt="2025-10-27T05:47:48.203" v="2958" actId="164"/>
+          <ac:grpSpMkLst>
+            <pc:docMk/>
+            <pc:sldMk cId="2633946043" sldId="555"/>
+            <ac:grpSpMk id="7" creationId="{2065756A-A698-393E-89A6-518E3AB852CC}"/>
+          </ac:grpSpMkLst>
+        </pc:grpChg>
+        <pc:grpChg chg="add mod">
+          <ac:chgData name="Pramod Naik" userId="ceb6df04-ef15-4d9b-a141-998a03559d75" providerId="ADAL" clId="{62E9B5AE-779D-4001-92D3-8FF830A8A9C1}" dt="2025-10-27T05:47:48.203" v="2958" actId="164"/>
+          <ac:grpSpMkLst>
+            <pc:docMk/>
+            <pc:sldMk cId="2633946043" sldId="555"/>
+            <ac:grpSpMk id="9" creationId="{93EB1FD5-AA15-8914-ACFA-513B792B6755}"/>
+          </ac:grpSpMkLst>
+        </pc:grpChg>
+        <pc:picChg chg="add mod">
+          <ac:chgData name="Pramod Naik" userId="ceb6df04-ef15-4d9b-a141-998a03559d75" providerId="ADAL" clId="{62E9B5AE-779D-4001-92D3-8FF830A8A9C1}" dt="2025-10-27T05:46:59.832" v="2950" actId="164"/>
+          <ac:picMkLst>
+            <pc:docMk/>
+            <pc:sldMk cId="2633946043" sldId="555"/>
+            <ac:picMk id="5" creationId="{39E4EA64-2440-DC32-AB5E-E5BE8F979972}"/>
+          </ac:picMkLst>
+        </pc:picChg>
+        <pc:picChg chg="add mod">
+          <ac:chgData name="Pramod Naik" userId="ceb6df04-ef15-4d9b-a141-998a03559d75" providerId="ADAL" clId="{62E9B5AE-779D-4001-92D3-8FF830A8A9C1}" dt="2025-10-27T05:46:59.832" v="2950" actId="164"/>
+          <ac:picMkLst>
+            <pc:docMk/>
+            <pc:sldMk cId="2633946043" sldId="555"/>
+            <ac:picMk id="6" creationId="{5734B1DF-FA33-53D3-35C3-E4BE20DD6679}"/>
+          </ac:picMkLst>
+        </pc:picChg>
+        <pc:picChg chg="add mod">
+          <ac:chgData name="Pramod Naik" userId="ceb6df04-ef15-4d9b-a141-998a03559d75" providerId="ADAL" clId="{62E9B5AE-779D-4001-92D3-8FF830A8A9C1}" dt="2025-10-27T05:47:48.203" v="2958" actId="164"/>
+          <ac:picMkLst>
+            <pc:docMk/>
+            <pc:sldMk cId="2633946043" sldId="555"/>
+            <ac:picMk id="8" creationId="{B7A47590-E920-AFDD-84F0-59A47B2EF14F}"/>
+          </ac:picMkLst>
+        </pc:picChg>
+        <pc:picChg chg="add mod">
+          <ac:chgData name="Pramod Naik" userId="ceb6df04-ef15-4d9b-a141-998a03559d75" providerId="ADAL" clId="{62E9B5AE-779D-4001-92D3-8FF830A8A9C1}" dt="2025-10-27T05:46:59.832" v="2950" actId="164"/>
+          <ac:picMkLst>
+            <pc:docMk/>
+            <pc:sldMk cId="2633946043" sldId="555"/>
+            <ac:picMk id="6150" creationId="{A47266AD-0BC2-D48F-D828-DB9B756D2271}"/>
+          </ac:picMkLst>
+        </pc:picChg>
       </pc:sldChg>
       <pc:sldChg chg="modSp add del mod">
         <pc:chgData name="Pramod Naik" userId="ceb6df04-ef15-4d9b-a141-998a03559d75" providerId="ADAL" clId="{62E9B5AE-779D-4001-92D3-8FF830A8A9C1}" dt="2025-10-26T05:53:00.064" v="2474" actId="47"/>
@@ -1366,6 +1561,21 @@
           <pc:sldMk cId="2892914401" sldId="555"/>
         </pc:sldMkLst>
       </pc:sldChg>
+      <pc:sldChg chg="modSp add mod">
+        <pc:chgData name="Pramod Naik" userId="ceb6df04-ef15-4d9b-a141-998a03559d75" providerId="ADAL" clId="{62E9B5AE-779D-4001-92D3-8FF830A8A9C1}" dt="2025-10-29T18:23:10.443" v="3433" actId="403"/>
+        <pc:sldMkLst>
+          <pc:docMk/>
+          <pc:sldMk cId="216335680" sldId="556"/>
+        </pc:sldMkLst>
+        <pc:spChg chg="mod">
+          <ac:chgData name="Pramod Naik" userId="ceb6df04-ef15-4d9b-a141-998a03559d75" providerId="ADAL" clId="{62E9B5AE-779D-4001-92D3-8FF830A8A9C1}" dt="2025-10-29T18:23:10.443" v="3433" actId="403"/>
+          <ac:spMkLst>
+            <pc:docMk/>
+            <pc:sldMk cId="216335680" sldId="556"/>
+            <ac:spMk id="3" creationId="{93D4FA4F-FF49-9381-9088-14702BE90525}"/>
+          </ac:spMkLst>
+        </pc:spChg>
+      </pc:sldChg>
       <pc:sldChg chg="addSp modSp add del mod">
         <pc:chgData name="Pramod Naik" userId="ceb6df04-ef15-4d9b-a141-998a03559d75" providerId="ADAL" clId="{62E9B5AE-779D-4001-92D3-8FF830A8A9C1}" dt="2025-10-26T05:53:00.085" v="2475" actId="47"/>
         <pc:sldMkLst>
@@ -1373,6 +1583,29 @@
           <pc:sldMk cId="1111199599" sldId="556"/>
         </pc:sldMkLst>
       </pc:sldChg>
+      <pc:sldChg chg="addSp modSp add mod">
+        <pc:chgData name="Pramod Naik" userId="ceb6df04-ef15-4d9b-a141-998a03559d75" providerId="ADAL" clId="{62E9B5AE-779D-4001-92D3-8FF830A8A9C1}" dt="2025-10-29T18:30:34.828" v="3450" actId="403"/>
+        <pc:sldMkLst>
+          <pc:docMk/>
+          <pc:sldMk cId="1678586277" sldId="557"/>
+        </pc:sldMkLst>
+        <pc:spChg chg="mod">
+          <ac:chgData name="Pramod Naik" userId="ceb6df04-ef15-4d9b-a141-998a03559d75" providerId="ADAL" clId="{62E9B5AE-779D-4001-92D3-8FF830A8A9C1}" dt="2025-10-29T18:30:34.828" v="3450" actId="403"/>
+          <ac:spMkLst>
+            <pc:docMk/>
+            <pc:sldMk cId="1678586277" sldId="557"/>
+            <ac:spMk id="3" creationId="{BDCB39C3-1BA5-2004-69AF-496300D67748}"/>
+          </ac:spMkLst>
+        </pc:spChg>
+        <pc:picChg chg="add mod modCrop">
+          <ac:chgData name="Pramod Naik" userId="ceb6df04-ef15-4d9b-a141-998a03559d75" providerId="ADAL" clId="{62E9B5AE-779D-4001-92D3-8FF830A8A9C1}" dt="2025-10-29T18:30:31.123" v="3447" actId="1076"/>
+          <ac:picMkLst>
+            <pc:docMk/>
+            <pc:sldMk cId="1678586277" sldId="557"/>
+            <ac:picMk id="4" creationId="{56264168-4FCB-0C5B-6E12-FA09694F944F}"/>
+          </ac:picMkLst>
+        </pc:picChg>
+      </pc:sldChg>
       <pc:sldChg chg="modSp add del mod">
         <pc:chgData name="Pramod Naik" userId="ceb6df04-ef15-4d9b-a141-998a03559d75" providerId="ADAL" clId="{62E9B5AE-779D-4001-92D3-8FF830A8A9C1}" dt="2025-10-26T05:53:00.106" v="2476" actId="47"/>
         <pc:sldMkLst>
@@ -1380,6 +1613,21 @@
           <pc:sldMk cId="2258860110" sldId="557"/>
         </pc:sldMkLst>
       </pc:sldChg>
+      <pc:sldChg chg="modSp add mod">
+        <pc:chgData name="Pramod Naik" userId="ceb6df04-ef15-4d9b-a141-998a03559d75" providerId="ADAL" clId="{62E9B5AE-779D-4001-92D3-8FF830A8A9C1}" dt="2025-10-29T18:33:27.562" v="3479" actId="403"/>
+        <pc:sldMkLst>
+          <pc:docMk/>
+          <pc:sldMk cId="3215175598" sldId="558"/>
+        </pc:sldMkLst>
+        <pc:spChg chg="mod">
+          <ac:chgData name="Pramod Naik" userId="ceb6df04-ef15-4d9b-a141-998a03559d75" providerId="ADAL" clId="{62E9B5AE-779D-4001-92D3-8FF830A8A9C1}" dt="2025-10-29T18:33:27.562" v="3479" actId="403"/>
+          <ac:spMkLst>
+            <pc:docMk/>
+            <pc:sldMk cId="3215175598" sldId="558"/>
+            <ac:spMk id="3" creationId="{40DBE0BE-7C7C-8108-E793-38D4FF50C854}"/>
+          </ac:spMkLst>
+        </pc:spChg>
+      </pc:sldChg>
       <pc:sldChg chg="modSp add del mod">
         <pc:chgData name="Pramod Naik" userId="ceb6df04-ef15-4d9b-a141-998a03559d75" providerId="ADAL" clId="{62E9B5AE-779D-4001-92D3-8FF830A8A9C1}" dt="2025-10-26T05:53:00.143" v="2477" actId="47"/>
         <pc:sldMkLst>
@@ -1387,6 +1635,37 @@
           <pc:sldMk cId="3340419842" sldId="558"/>
         </pc:sldMkLst>
       </pc:sldChg>
+      <pc:sldChg chg="addSp delSp modSp add mod">
+        <pc:chgData name="Pramod Naik" userId="ceb6df04-ef15-4d9b-a141-998a03559d75" providerId="ADAL" clId="{62E9B5AE-779D-4001-92D3-8FF830A8A9C1}" dt="2025-10-29T18:40:46.534" v="3506" actId="1076"/>
+        <pc:sldMkLst>
+          <pc:docMk/>
+          <pc:sldMk cId="1863801318" sldId="559"/>
+        </pc:sldMkLst>
+        <pc:spChg chg="mod">
+          <ac:chgData name="Pramod Naik" userId="ceb6df04-ef15-4d9b-a141-998a03559d75" providerId="ADAL" clId="{62E9B5AE-779D-4001-92D3-8FF830A8A9C1}" dt="2025-10-29T18:34:51.423" v="3481" actId="113"/>
+          <ac:spMkLst>
+            <pc:docMk/>
+            <pc:sldMk cId="1863801318" sldId="559"/>
+            <ac:spMk id="3" creationId="{9C1827B3-07A6-EF3F-7D9B-FF00AEEB4D31}"/>
+          </ac:spMkLst>
+        </pc:spChg>
+        <pc:picChg chg="add del mod">
+          <ac:chgData name="Pramod Naik" userId="ceb6df04-ef15-4d9b-a141-998a03559d75" providerId="ADAL" clId="{62E9B5AE-779D-4001-92D3-8FF830A8A9C1}" dt="2025-10-29T18:40:38.664" v="3503" actId="478"/>
+          <ac:picMkLst>
+            <pc:docMk/>
+            <pc:sldMk cId="1863801318" sldId="559"/>
+            <ac:picMk id="4" creationId="{437EDB8C-639A-6E5C-6B21-38DF3149B8AF}"/>
+          </ac:picMkLst>
+        </pc:picChg>
+        <pc:picChg chg="add mod">
+          <ac:chgData name="Pramod Naik" userId="ceb6df04-ef15-4d9b-a141-998a03559d75" providerId="ADAL" clId="{62E9B5AE-779D-4001-92D3-8FF830A8A9C1}" dt="2025-10-29T18:40:46.534" v="3506" actId="1076"/>
+          <ac:picMkLst>
+            <pc:docMk/>
+            <pc:sldMk cId="1863801318" sldId="559"/>
+            <ac:picMk id="6" creationId="{150AA1F4-AA37-D412-E86C-942DFE6B658C}"/>
+          </ac:picMkLst>
+        </pc:picChg>
+      </pc:sldChg>
       <pc:sldChg chg="modSp add del mod">
         <pc:chgData name="Pramod Naik" userId="ceb6df04-ef15-4d9b-a141-998a03559d75" providerId="ADAL" clId="{62E9B5AE-779D-4001-92D3-8FF830A8A9C1}" dt="2025-10-26T05:53:00.185" v="2478" actId="47"/>
         <pc:sldMkLst>
@@ -1401,6 +1680,52 @@
           <pc:sldMk cId="91052272" sldId="560"/>
         </pc:sldMkLst>
       </pc:sldChg>
+      <pc:sldChg chg="addSp modSp add mod">
+        <pc:chgData name="Pramod Naik" userId="ceb6df04-ef15-4d9b-a141-998a03559d75" providerId="ADAL" clId="{62E9B5AE-779D-4001-92D3-8FF830A8A9C1}" dt="2025-10-29T18:35:38.105" v="3502" actId="22"/>
+        <pc:sldMkLst>
+          <pc:docMk/>
+          <pc:sldMk cId="561616237" sldId="560"/>
+        </pc:sldMkLst>
+        <pc:spChg chg="mod">
+          <ac:chgData name="Pramod Naik" userId="ceb6df04-ef15-4d9b-a141-998a03559d75" providerId="ADAL" clId="{62E9B5AE-779D-4001-92D3-8FF830A8A9C1}" dt="2025-10-29T18:35:37.820" v="3501" actId="113"/>
+          <ac:spMkLst>
+            <pc:docMk/>
+            <pc:sldMk cId="561616237" sldId="560"/>
+            <ac:spMk id="3" creationId="{6E918AB6-1057-4A90-98A6-189364E9A4F4}"/>
+          </ac:spMkLst>
+        </pc:spChg>
+        <pc:picChg chg="add">
+          <ac:chgData name="Pramod Naik" userId="ceb6df04-ef15-4d9b-a141-998a03559d75" providerId="ADAL" clId="{62E9B5AE-779D-4001-92D3-8FF830A8A9C1}" dt="2025-10-29T18:35:38.105" v="3502" actId="22"/>
+          <ac:picMkLst>
+            <pc:docMk/>
+            <pc:sldMk cId="561616237" sldId="560"/>
+            <ac:picMk id="4" creationId="{A91444B6-7E8C-1280-AE79-4C8517B91DA5}"/>
+          </ac:picMkLst>
+        </pc:picChg>
+      </pc:sldChg>
+      <pc:sldChg chg="addSp modSp add mod">
+        <pc:chgData name="Pramod Naik" userId="ceb6df04-ef15-4d9b-a141-998a03559d75" providerId="ADAL" clId="{62E9B5AE-779D-4001-92D3-8FF830A8A9C1}" dt="2025-10-29T18:42:03.611" v="3513" actId="1076"/>
+        <pc:sldMkLst>
+          <pc:docMk/>
+          <pc:sldMk cId="1234122165" sldId="561"/>
+        </pc:sldMkLst>
+        <pc:spChg chg="mod">
+          <ac:chgData name="Pramod Naik" userId="ceb6df04-ef15-4d9b-a141-998a03559d75" providerId="ADAL" clId="{62E9B5AE-779D-4001-92D3-8FF830A8A9C1}" dt="2025-10-29T18:41:36.616" v="3510" actId="20577"/>
+          <ac:spMkLst>
+            <pc:docMk/>
+            <pc:sldMk cId="1234122165" sldId="561"/>
+            <ac:spMk id="3" creationId="{35C85EA4-B4B5-CF44-7889-0C522E9BF5A5}"/>
+          </ac:spMkLst>
+        </pc:spChg>
+        <pc:picChg chg="add mod">
+          <ac:chgData name="Pramod Naik" userId="ceb6df04-ef15-4d9b-a141-998a03559d75" providerId="ADAL" clId="{62E9B5AE-779D-4001-92D3-8FF830A8A9C1}" dt="2025-10-29T18:42:03.611" v="3513" actId="1076"/>
+          <ac:picMkLst>
+            <pc:docMk/>
+            <pc:sldMk cId="1234122165" sldId="561"/>
+            <ac:picMk id="4" creationId="{0FADDEBE-66B0-6531-2652-F2AD0149752F}"/>
+          </ac:picMkLst>
+        </pc:picChg>
+      </pc:sldChg>
       <pc:sldChg chg="modSp add del mod">
         <pc:chgData name="Pramod Naik" userId="ceb6df04-ef15-4d9b-a141-998a03559d75" providerId="ADAL" clId="{62E9B5AE-779D-4001-92D3-8FF830A8A9C1}" dt="2025-10-26T05:53:02.050" v="2489" actId="47"/>
         <pc:sldMkLst>
@@ -1415,6 +1740,21 @@
           <pc:sldMk cId="4226352970" sldId="561"/>
         </pc:sldMkLst>
       </pc:sldChg>
+      <pc:sldChg chg="modSp add mod">
+        <pc:chgData name="Pramod Naik" userId="ceb6df04-ef15-4d9b-a141-998a03559d75" providerId="ADAL" clId="{62E9B5AE-779D-4001-92D3-8FF830A8A9C1}" dt="2025-10-29T18:43:06.446" v="3529" actId="113"/>
+        <pc:sldMkLst>
+          <pc:docMk/>
+          <pc:sldMk cId="172351539" sldId="562"/>
+        </pc:sldMkLst>
+        <pc:spChg chg="mod">
+          <ac:chgData name="Pramod Naik" userId="ceb6df04-ef15-4d9b-a141-998a03559d75" providerId="ADAL" clId="{62E9B5AE-779D-4001-92D3-8FF830A8A9C1}" dt="2025-10-29T18:43:06.446" v="3529" actId="113"/>
+          <ac:spMkLst>
+            <pc:docMk/>
+            <pc:sldMk cId="172351539" sldId="562"/>
+            <ac:spMk id="3" creationId="{82C59336-0695-7311-88FA-940BF6424B61}"/>
+          </ac:spMkLst>
+        </pc:spChg>
+      </pc:sldChg>
       <pc:sldChg chg="add del">
         <pc:chgData name="Pramod Naik" userId="ceb6df04-ef15-4d9b-a141-998a03559d75" providerId="ADAL" clId="{62E9B5AE-779D-4001-92D3-8FF830A8A9C1}" dt="2025-10-14T05:52:28.136" v="1872" actId="47"/>
         <pc:sldMkLst>
@@ -1429,6 +1769,13 @@
           <pc:sldMk cId="1912196509" sldId="562"/>
         </pc:sldMkLst>
       </pc:sldChg>
+      <pc:sldChg chg="add">
+        <pc:chgData name="Pramod Naik" userId="ceb6df04-ef15-4d9b-a141-998a03559d75" providerId="ADAL" clId="{62E9B5AE-779D-4001-92D3-8FF830A8A9C1}" dt="2025-10-29T18:13:42.304" v="3297"/>
+        <pc:sldMkLst>
+          <pc:docMk/>
+          <pc:sldMk cId="2473509293" sldId="563"/>
+        </pc:sldMkLst>
+      </pc:sldChg>
       <pc:sldChg chg="addSp modSp add del mod">
         <pc:chgData name="Pramod Naik" userId="ceb6df04-ef15-4d9b-a141-998a03559d75" providerId="ADAL" clId="{62E9B5AE-779D-4001-92D3-8FF830A8A9C1}" dt="2025-10-26T05:53:02.113" v="2491" actId="47"/>
         <pc:sldMkLst>
@@ -1443,11 +1790,32 @@
           <pc:sldMk cId="813558974" sldId="564"/>
         </pc:sldMkLst>
       </pc:sldChg>
+      <pc:sldChg chg="add">
+        <pc:chgData name="Pramod Naik" userId="ceb6df04-ef15-4d9b-a141-998a03559d75" providerId="ADAL" clId="{62E9B5AE-779D-4001-92D3-8FF830A8A9C1}" dt="2025-10-29T18:13:42.328" v="3298"/>
+        <pc:sldMkLst>
+          <pc:docMk/>
+          <pc:sldMk cId="1794317502" sldId="564"/>
+        </pc:sldMkLst>
+      </pc:sldChg>
       <pc:sldChg chg="addSp delSp modSp add del mod">
         <pc:chgData name="Pramod Naik" userId="ceb6df04-ef15-4d9b-a141-998a03559d75" providerId="ADAL" clId="{62E9B5AE-779D-4001-92D3-8FF830A8A9C1}" dt="2025-10-26T05:53:02.177" v="2493" actId="47"/>
         <pc:sldMkLst>
           <pc:docMk/>
           <pc:sldMk cId="494025414" sldId="565"/>
+        </pc:sldMkLst>
+      </pc:sldChg>
+      <pc:sldChg chg="add">
+        <pc:chgData name="Pramod Naik" userId="ceb6df04-ef15-4d9b-a141-998a03559d75" providerId="ADAL" clId="{62E9B5AE-779D-4001-92D3-8FF830A8A9C1}" dt="2025-10-29T18:13:42.362" v="3299"/>
+        <pc:sldMkLst>
+          <pc:docMk/>
+          <pc:sldMk cId="4103649649" sldId="565"/>
+        </pc:sldMkLst>
+      </pc:sldChg>
+      <pc:sldChg chg="add">
+        <pc:chgData name="Pramod Naik" userId="ceb6df04-ef15-4d9b-a141-998a03559d75" providerId="ADAL" clId="{62E9B5AE-779D-4001-92D3-8FF830A8A9C1}" dt="2025-10-29T18:13:42.390" v="3300"/>
+        <pc:sldMkLst>
+          <pc:docMk/>
+          <pc:sldMk cId="3712268275" sldId="566"/>
         </pc:sldMkLst>
       </pc:sldChg>
       <pc:sldChg chg="addSp modSp add del mod">
@@ -1716,7 +2084,7 @@
           <a:p>
             <a:fld id="{61532AF1-4615-4667-912A-829B12F8C4D2}" type="datetimeFigureOut">
               <a:rPr lang="en-IN" smtClean="0"/>
-              <a:t>26-10-2025</a:t>
+              <a:t>29-10-2025</a:t>
             </a:fld>
             <a:endParaRPr lang="en-IN"/>
           </a:p>
@@ -2133,7 +2501,7 @@
           <a:p>
             <a:fld id="{C43A76A3-ADC8-4477-8FC1-B9DD55D84908}" type="datetime1">
               <a:rPr lang="en-US" smtClean="0"/>
-              <a:t>10/26/2025</a:t>
+              <a:t>10/29/2025</a:t>
             </a:fld>
             <a:endParaRPr lang="en-US" dirty="0"/>
           </a:p>
@@ -2331,7 +2699,7 @@
           <a:p>
             <a:fld id="{D6762538-DC4D-4667-96E5-B3278DDF8B12}" type="datetime1">
               <a:rPr lang="en-US" smtClean="0"/>
-              <a:t>10/26/2025</a:t>
+              <a:t>10/29/2025</a:t>
             </a:fld>
             <a:endParaRPr lang="en-US"/>
           </a:p>
@@ -2539,7 +2907,7 @@
           <a:p>
             <a:fld id="{05880548-5C08-4BE3-B63E-F2BB63B0B00C}" type="datetime1">
               <a:rPr lang="en-US" smtClean="0"/>
-              <a:t>10/26/2025</a:t>
+              <a:t>10/29/2025</a:t>
             </a:fld>
             <a:endParaRPr lang="en-US"/>
           </a:p>
@@ -2737,7 +3105,7 @@
           <a:p>
             <a:fld id="{DE7F49BE-398D-479A-8A7E-5DDBCA61EDCB}" type="datetime1">
               <a:rPr lang="en-US" smtClean="0"/>
-              <a:t>10/26/2025</a:t>
+              <a:t>10/29/2025</a:t>
             </a:fld>
             <a:endParaRPr lang="en-US" dirty="0"/>
           </a:p>
@@ -3013,7 +3381,7 @@
           <a:p>
             <a:fld id="{CCD0C193-4974-4A1F-9C63-07D595E30D66}" type="datetime1">
               <a:rPr lang="en-US" smtClean="0"/>
-              <a:t>10/26/2025</a:t>
+              <a:t>10/29/2025</a:t>
             </a:fld>
             <a:endParaRPr lang="en-US"/>
           </a:p>
@@ -3280,7 +3648,7 @@
           <a:p>
             <a:fld id="{701AA87F-28D4-4BF0-B81F-877A89DFD5AC}" type="datetime1">
               <a:rPr lang="en-US" smtClean="0"/>
-              <a:t>10/26/2025</a:t>
+              <a:t>10/29/2025</a:t>
             </a:fld>
             <a:endParaRPr lang="en-US"/>
           </a:p>
@@ -3694,7 +4062,7 @@
           <a:p>
             <a:fld id="{A8A9F1F3-208B-49A3-B337-9C8ACEB3E0E1}" type="datetime1">
               <a:rPr lang="en-US" smtClean="0"/>
-              <a:t>10/26/2025</a:t>
+              <a:t>10/29/2025</a:t>
             </a:fld>
             <a:endParaRPr lang="en-US"/>
           </a:p>
@@ -3841,7 +4209,7 @@
           <a:p>
             <a:fld id="{27AF6CA6-7293-4AA2-A0E0-A3BF4416E786}" type="datetime1">
               <a:rPr lang="en-US" smtClean="0"/>
-              <a:t>10/26/2025</a:t>
+              <a:t>10/29/2025</a:t>
             </a:fld>
             <a:endParaRPr lang="en-US"/>
           </a:p>
@@ -3954,7 +4322,7 @@
           <a:p>
             <a:fld id="{98D87016-7BCD-46FB-8EE3-AB6C369108B4}" type="datetime1">
               <a:rPr lang="en-US" smtClean="0"/>
-              <a:t>10/26/2025</a:t>
+              <a:t>10/29/2025</a:t>
             </a:fld>
             <a:endParaRPr lang="en-US"/>
           </a:p>
@@ -4273,7 +4641,7 @@
           <a:p>
             <a:fld id="{A1547011-1FFC-4EF8-9A2E-53B4AD2ADBD4}" type="datetime1">
               <a:rPr lang="en-US" smtClean="0"/>
-              <a:t>10/26/2025</a:t>
+              <a:t>10/29/2025</a:t>
             </a:fld>
             <a:endParaRPr lang="en-US"/>
           </a:p>
@@ -4568,7 +4936,7 @@
           <a:p>
             <a:fld id="{9562EB47-45B4-4EF5-A743-B4885DD2F060}" type="datetime1">
               <a:rPr lang="en-US" smtClean="0"/>
-              <a:t>10/26/2025</a:t>
+              <a:t>10/29/2025</a:t>
             </a:fld>
             <a:endParaRPr lang="en-US"/>
           </a:p>
@@ -5953,7 +6321,7 @@
           <a:p>
             <a:fld id="{4A8D24A4-5FEC-4062-8995-EB21925B3B40}" type="datetime1">
               <a:rPr lang="en-US" smtClean="0"/>
-              <a:t>10/26/2025</a:t>
+              <a:t>10/29/2025</a:t>
             </a:fld>
             <a:endParaRPr lang="en-US" sz="1000" dirty="0"/>
           </a:p>
@@ -6778,6 +7146,252 @@
   <p:cSld>
     <p:spTree>
       <p:nvGrpSpPr>
+        <p:cNvPr id="1" name=""/>
+        <p:cNvGrpSpPr/>
+        <p:nvPr/>
+      </p:nvGrpSpPr>
+      <p:grpSpPr>
+        <a:xfrm>
+          <a:off x="0" y="0"/>
+          <a:ext cx="0" cy="0"/>
+          <a:chOff x="0" y="0"/>
+          <a:chExt cx="0" cy="0"/>
+        </a:xfrm>
+      </p:grpSpPr>
+      <p:grpSp>
+        <p:nvGrpSpPr>
+          <p:cNvPr id="9" name="Group 8">
+            <a:extLst>
+              <a:ext uri="{FF2B5EF4-FFF2-40B4-BE49-F238E27FC236}">
+                <a16:creationId xmlns:a16="http://schemas.microsoft.com/office/drawing/2014/main" id="{93EB1FD5-AA15-8914-ACFA-513B792B6755}"/>
+              </a:ext>
+            </a:extLst>
+          </p:cNvPr>
+          <p:cNvGrpSpPr/>
+          <p:nvPr/>
+        </p:nvGrpSpPr>
+        <p:grpSpPr>
+          <a:xfrm>
+            <a:off x="0" y="0"/>
+            <a:ext cx="12192000" cy="6858000"/>
+            <a:chOff x="0" y="0"/>
+            <a:chExt cx="12192000" cy="6858000"/>
+          </a:xfrm>
+        </p:grpSpPr>
+        <p:grpSp>
+          <p:nvGrpSpPr>
+            <p:cNvPr id="7" name="Group 6">
+              <a:extLst>
+                <a:ext uri="{FF2B5EF4-FFF2-40B4-BE49-F238E27FC236}">
+                  <a16:creationId xmlns:a16="http://schemas.microsoft.com/office/drawing/2014/main" id="{2065756A-A698-393E-89A6-518E3AB852CC}"/>
+                </a:ext>
+              </a:extLst>
+            </p:cNvPr>
+            <p:cNvGrpSpPr/>
+            <p:nvPr/>
+          </p:nvGrpSpPr>
+          <p:grpSpPr>
+            <a:xfrm>
+              <a:off x="0" y="0"/>
+              <a:ext cx="12192000" cy="6858000"/>
+              <a:chOff x="0" y="0"/>
+              <a:chExt cx="12192000" cy="6858000"/>
+            </a:xfrm>
+          </p:grpSpPr>
+          <p:pic>
+            <p:nvPicPr>
+              <p:cNvPr id="6150" name="Picture 6" descr="REST Model">
+                <a:extLst>
+                  <a:ext uri="{FF2B5EF4-FFF2-40B4-BE49-F238E27FC236}">
+                    <a16:creationId xmlns:a16="http://schemas.microsoft.com/office/drawing/2014/main" id="{A47266AD-0BC2-D48F-D828-DB9B756D2271}"/>
+                  </a:ext>
+                </a:extLst>
+              </p:cNvPr>
+              <p:cNvPicPr>
+                <a:picLocks noChangeAspect="1" noChangeArrowheads="1"/>
+              </p:cNvPicPr>
+              <p:nvPr/>
+            </p:nvPicPr>
+            <p:blipFill>
+              <a:blip r:embed="rId2">
+                <a:extLst>
+                  <a:ext uri="{28A0092B-C50C-407E-A947-70E740481C1C}">
+                    <a14:useLocalDpi xmlns:a14="http://schemas.microsoft.com/office/drawing/2010/main" val="0"/>
+                  </a:ext>
+                </a:extLst>
+              </a:blip>
+              <a:srcRect/>
+              <a:stretch>
+                <a:fillRect/>
+              </a:stretch>
+            </p:blipFill>
+            <p:spPr bwMode="auto">
+              <a:xfrm>
+                <a:off x="0" y="733425"/>
+                <a:ext cx="12192000" cy="5391150"/>
+              </a:xfrm>
+              <a:prstGeom prst="rect">
+                <a:avLst/>
+              </a:prstGeom>
+              <a:noFill/>
+              <a:extLst>
+                <a:ext uri="{909E8E84-426E-40DD-AFC4-6F175D3DCCD1}">
+                  <a14:hiddenFill xmlns:a14="http://schemas.microsoft.com/office/drawing/2010/main">
+                    <a:solidFill>
+                      <a:srgbClr val="FFFFFF"/>
+                    </a:solidFill>
+                  </a14:hiddenFill>
+                </a:ext>
+              </a:extLst>
+            </p:spPr>
+          </p:pic>
+          <p:pic>
+            <p:nvPicPr>
+              <p:cNvPr id="5" name="Picture 4">
+                <a:extLst>
+                  <a:ext uri="{FF2B5EF4-FFF2-40B4-BE49-F238E27FC236}">
+                    <a16:creationId xmlns:a16="http://schemas.microsoft.com/office/drawing/2014/main" id="{39E4EA64-2440-DC32-AB5E-E5BE8F979972}"/>
+                  </a:ext>
+                </a:extLst>
+              </p:cNvPr>
+              <p:cNvPicPr>
+                <a:picLocks noChangeAspect="1"/>
+              </p:cNvPicPr>
+              <p:nvPr/>
+            </p:nvPicPr>
+            <p:blipFill>
+              <a:blip r:embed="rId3"/>
+              <a:stretch>
+                <a:fillRect/>
+              </a:stretch>
+            </p:blipFill>
+            <p:spPr>
+              <a:xfrm>
+                <a:off x="0" y="0"/>
+                <a:ext cx="12192000" cy="733425"/>
+              </a:xfrm>
+              <a:prstGeom prst="rect">
+                <a:avLst/>
+              </a:prstGeom>
+            </p:spPr>
+          </p:pic>
+          <p:pic>
+            <p:nvPicPr>
+              <p:cNvPr id="6" name="Picture 5">
+                <a:extLst>
+                  <a:ext uri="{FF2B5EF4-FFF2-40B4-BE49-F238E27FC236}">
+                    <a16:creationId xmlns:a16="http://schemas.microsoft.com/office/drawing/2014/main" id="{5734B1DF-FA33-53D3-35C3-E4BE20DD6679}"/>
+                  </a:ext>
+                </a:extLst>
+              </p:cNvPr>
+              <p:cNvPicPr>
+                <a:picLocks noChangeAspect="1"/>
+              </p:cNvPicPr>
+              <p:nvPr/>
+            </p:nvPicPr>
+            <p:blipFill>
+              <a:blip r:embed="rId3"/>
+              <a:stretch>
+                <a:fillRect/>
+              </a:stretch>
+            </p:blipFill>
+            <p:spPr>
+              <a:xfrm>
+                <a:off x="0" y="5840819"/>
+                <a:ext cx="12192000" cy="1017181"/>
+              </a:xfrm>
+              <a:prstGeom prst="rect">
+                <a:avLst/>
+              </a:prstGeom>
+            </p:spPr>
+          </p:pic>
+        </p:grpSp>
+        <p:pic>
+          <p:nvPicPr>
+            <p:cNvPr id="8" name="Picture 7">
+              <a:extLst>
+                <a:ext uri="{FF2B5EF4-FFF2-40B4-BE49-F238E27FC236}">
+                  <a16:creationId xmlns:a16="http://schemas.microsoft.com/office/drawing/2014/main" id="{B7A47590-E920-AFDD-84F0-59A47B2EF14F}"/>
+                </a:ext>
+              </a:extLst>
+            </p:cNvPr>
+            <p:cNvPicPr>
+              <a:picLocks noChangeAspect="1"/>
+            </p:cNvPicPr>
+            <p:nvPr/>
+          </p:nvPicPr>
+          <p:blipFill>
+            <a:blip r:embed="rId3"/>
+            <a:stretch>
+              <a:fillRect/>
+            </a:stretch>
+          </p:blipFill>
+          <p:spPr>
+            <a:xfrm>
+              <a:off x="6400799" y="1371600"/>
+              <a:ext cx="1222745" cy="361507"/>
+            </a:xfrm>
+            <a:prstGeom prst="rect">
+              <a:avLst/>
+            </a:prstGeom>
+          </p:spPr>
+        </p:pic>
+      </p:grpSp>
+      <p:sp>
+        <p:nvSpPr>
+          <p:cNvPr id="10" name="TextBox 9">
+            <a:extLst>
+              <a:ext uri="{FF2B5EF4-FFF2-40B4-BE49-F238E27FC236}">
+                <a16:creationId xmlns:a16="http://schemas.microsoft.com/office/drawing/2014/main" id="{57D60E8E-E4EA-8BC2-BC63-DD933256A14C}"/>
+              </a:ext>
+            </a:extLst>
+          </p:cNvPr>
+          <p:cNvSpPr txBox="1"/>
+          <p:nvPr/>
+        </p:nvSpPr>
+        <p:spPr>
+          <a:xfrm>
+            <a:off x="2902687" y="638175"/>
+            <a:ext cx="5582093" cy="646331"/>
+          </a:xfrm>
+          <a:prstGeom prst="rect">
+            <a:avLst/>
+          </a:prstGeom>
+          <a:noFill/>
+        </p:spPr>
+        <p:txBody>
+          <a:bodyPr wrap="square" rtlCol="0">
+            <a:spAutoFit/>
+          </a:bodyPr>
+          <a:lstStyle/>
+          <a:p>
+            <a:r>
+              <a:rPr lang="en-IN" sz="3600" b="1" dirty="0">
+                <a:latin typeface="+mj-lt"/>
+              </a:rPr>
+              <a:t>Client Request Data in</a:t>
+            </a:r>
+          </a:p>
+        </p:txBody>
+      </p:sp>
+    </p:spTree>
+    <p:extLst>
+      <p:ext uri="{BB962C8B-B14F-4D97-AF65-F5344CB8AC3E}">
+        <p14:creationId xmlns:p14="http://schemas.microsoft.com/office/powerpoint/2010/main" val="2633946043"/>
+      </p:ext>
+    </p:extLst>
+  </p:cSld>
+  <p:clrMapOvr>
+    <a:masterClrMapping/>
+  </p:clrMapOvr>
+</p:sld>
+</file>
+
+<file path=ppt/slides/slide11.xml><?xml version="1.0" encoding="utf-8"?>
+<p:sld xmlns:a="http://schemas.openxmlformats.org/drawingml/2006/main" xmlns:r="http://schemas.openxmlformats.org/officeDocument/2006/relationships" xmlns:p="http://schemas.openxmlformats.org/presentationml/2006/main">
+  <p:cSld>
+    <p:spTree>
+      <p:nvGrpSpPr>
         <p:cNvPr id="1" name="">
           <a:extLst>
             <a:ext uri="{FF2B5EF4-FFF2-40B4-BE49-F238E27FC236}">
@@ -6891,6 +7505,15 @@
             </a:pPr>
             <a:r>
               <a:rPr lang="en-IN" sz="2800" dirty="0"/>
+              <a:t>Cookies</a:t>
+            </a:r>
+          </a:p>
+          <a:p>
+            <a:pPr marL="457200" indent="-457200">
+              <a:buAutoNum type="arabicPeriod"/>
+            </a:pPr>
+            <a:r>
+              <a:rPr lang="en-IN" sz="2800" dirty="0"/>
               <a:t>Form Data</a:t>
             </a:r>
           </a:p>
@@ -6918,7 +7541,7 @@
 </p:sld>
 </file>
 
-<file path=ppt/slides/slide11.xml><?xml version="1.0" encoding="utf-8"?>
+<file path=ppt/slides/slide12.xml><?xml version="1.0" encoding="utf-8"?>
 <p:sld xmlns:a="http://schemas.openxmlformats.org/drawingml/2006/main" xmlns:r="http://schemas.openxmlformats.org/officeDocument/2006/relationships" xmlns:p="http://schemas.openxmlformats.org/presentationml/2006/main">
   <p:cSld>
     <p:spTree>
@@ -7171,7 +7794,7 @@
 </p:sld>
 </file>
 
-<file path=ppt/slides/slide12.xml><?xml version="1.0" encoding="utf-8"?>
+<file path=ppt/slides/slide13.xml><?xml version="1.0" encoding="utf-8"?>
 <p:sld xmlns:a="http://schemas.openxmlformats.org/drawingml/2006/main" xmlns:r="http://schemas.openxmlformats.org/officeDocument/2006/relationships" xmlns:p="http://schemas.openxmlformats.org/presentationml/2006/main">
   <p:cSld>
     <p:spTree>
@@ -7248,7 +7871,31 @@
             </a:r>
             <a:r>
               <a:rPr lang="en-US" sz="2400" dirty="0"/>
-              <a:t> in the URL and are ideal for filtering, searching, or pagination.</a:t>
+              <a:t> in the URL and are ideal for </a:t>
+            </a:r>
+            <a:r>
+              <a:rPr lang="en-US" sz="2400" b="1" dirty="0"/>
+              <a:t>filtering</a:t>
+            </a:r>
+            <a:r>
+              <a:rPr lang="en-US" sz="2400" dirty="0"/>
+              <a:t>, </a:t>
+            </a:r>
+            <a:r>
+              <a:rPr lang="en-US" sz="2400" b="1" dirty="0"/>
+              <a:t>searching</a:t>
+            </a:r>
+            <a:r>
+              <a:rPr lang="en-US" sz="2400" dirty="0"/>
+              <a:t>, or </a:t>
+            </a:r>
+            <a:r>
+              <a:rPr lang="en-US" sz="2400" b="1" dirty="0"/>
+              <a:t>pagination</a:t>
+            </a:r>
+            <a:r>
+              <a:rPr lang="en-US" sz="2400" dirty="0"/>
+              <a:t>.</a:t>
             </a:r>
           </a:p>
           <a:p>
@@ -7339,7 +7986,23 @@
             <a:pPr lvl="1"/>
             <a:r>
               <a:rPr lang="en-US" sz="2200" dirty="0"/>
-              <a:t>Great for filtering and controlling API responses.</a:t>
+              <a:t>Great for </a:t>
+            </a:r>
+            <a:r>
+              <a:rPr lang="en-US" sz="2200" b="1" dirty="0"/>
+              <a:t>filtering</a:t>
+            </a:r>
+            <a:r>
+              <a:rPr lang="en-US" sz="2200" dirty="0"/>
+              <a:t> and </a:t>
+            </a:r>
+            <a:r>
+              <a:rPr lang="en-US" sz="2200" b="1" dirty="0"/>
+              <a:t>controlling API responses</a:t>
+            </a:r>
+            <a:r>
+              <a:rPr lang="en-US" sz="2200" dirty="0"/>
+              <a:t>.</a:t>
             </a:r>
             <a:endParaRPr lang="en-IN" sz="2200" dirty="0"/>
           </a:p>
@@ -7388,7 +8051,7 @@
 </p:sld>
 </file>
 
-<file path=ppt/slides/slide13.xml><?xml version="1.0" encoding="utf-8"?>
+<file path=ppt/slides/slide14.xml><?xml version="1.0" encoding="utf-8"?>
 <p:sld xmlns:a="http://schemas.openxmlformats.org/drawingml/2006/main" xmlns:r="http://schemas.openxmlformats.org/officeDocument/2006/relationships" xmlns:p="http://schemas.openxmlformats.org/presentationml/2006/main">
   <p:cSld>
     <p:spTree>
@@ -7593,7 +8256,7 @@
 </p:sld>
 </file>
 
-<file path=ppt/slides/slide14.xml><?xml version="1.0" encoding="utf-8"?>
+<file path=ppt/slides/slide15.xml><?xml version="1.0" encoding="utf-8"?>
 <p:sld xmlns:a="http://schemas.openxmlformats.org/drawingml/2006/main" xmlns:r="http://schemas.openxmlformats.org/officeDocument/2006/relationships" xmlns:p="http://schemas.openxmlformats.org/presentationml/2006/main">
   <p:cSld>
     <p:spTree>
@@ -7802,7 +8465,7 @@
 </p:sld>
 </file>
 
-<file path=ppt/slides/slide15.xml><?xml version="1.0" encoding="utf-8"?>
+<file path=ppt/slides/slide16.xml><?xml version="1.0" encoding="utf-8"?>
 <p:sld xmlns:a="http://schemas.openxmlformats.org/drawingml/2006/main" xmlns:r="http://schemas.openxmlformats.org/officeDocument/2006/relationships" xmlns:p="http://schemas.openxmlformats.org/presentationml/2006/main">
   <p:cSld>
     <p:spTree>
@@ -7999,7 +8662,7 @@
 </p:sld>
 </file>
 
-<file path=ppt/slides/slide16.xml><?xml version="1.0" encoding="utf-8"?>
+<file path=ppt/slides/slide17.xml><?xml version="1.0" encoding="utf-8"?>
 <p:sld xmlns:a="http://schemas.openxmlformats.org/drawingml/2006/main" xmlns:r="http://schemas.openxmlformats.org/officeDocument/2006/relationships" xmlns:p="http://schemas.openxmlformats.org/presentationml/2006/main">
   <p:cSld>
     <p:spTree>
@@ -8055,15 +8718,7 @@
             </a:pPr>
             <a:r>
               <a:rPr lang="en-US" sz="2400" b="1" dirty="0"/>
-              <a:t>1) Using </a:t>
-            </a:r>
-            <a:r>
-              <a:rPr lang="en-US" b="1" dirty="0"/>
-              <a:t>Header</a:t>
-            </a:r>
-            <a:r>
-              <a:rPr lang="en-US" sz="2400" b="1" dirty="0"/>
-              <a:t> (recommended for specific headers)</a:t>
+              <a:t>1) Using Header (recommended for specific headers)</a:t>
             </a:r>
           </a:p>
           <a:p>
@@ -8154,7 +8809,7 @@
 </p:sld>
 </file>
 
-<file path=ppt/slides/slide17.xml><?xml version="1.0" encoding="utf-8"?>
+<file path=ppt/slides/slide18.xml><?xml version="1.0" encoding="utf-8"?>
 <p:sld xmlns:a="http://schemas.openxmlformats.org/drawingml/2006/main" xmlns:r="http://schemas.openxmlformats.org/officeDocument/2006/relationships" xmlns:p="http://schemas.openxmlformats.org/presentationml/2006/main">
   <p:cSld>
     <p:spTree>
@@ -8219,7 +8874,11 @@
               <a:t>Header names are </a:t>
             </a:r>
             <a:r>
-              <a:rPr lang="en-US" sz="2400" b="1" dirty="0"/>
+              <a:rPr lang="en-US" sz="2400" b="1" dirty="0">
+                <a:solidFill>
+                  <a:srgbClr val="FF0000"/>
+                </a:solidFill>
+              </a:rPr>
               <a:t>case-insensitive</a:t>
             </a:r>
             <a:r>
@@ -8232,7 +8891,31 @@
             </a:r>
             <a:r>
               <a:rPr lang="en-US" sz="2400" dirty="0"/>
-              <a:t> converts header names with hyphens to underscores in Python parameter names (</a:t>
+              <a:t> converts header names with </a:t>
+            </a:r>
+            <a:r>
+              <a:rPr lang="en-US" sz="2400" b="1" dirty="0">
+                <a:solidFill>
+                  <a:srgbClr val="C00000"/>
+                </a:solidFill>
+              </a:rPr>
+              <a:t>hyphens</a:t>
+            </a:r>
+            <a:r>
+              <a:rPr lang="en-US" sz="2400" dirty="0"/>
+              <a:t> to </a:t>
+            </a:r>
+            <a:r>
+              <a:rPr lang="en-US" sz="2400" b="1" dirty="0">
+                <a:solidFill>
+                  <a:srgbClr val="C00000"/>
+                </a:solidFill>
+              </a:rPr>
+              <a:t>underscores</a:t>
+            </a:r>
+            <a:r>
+              <a:rPr lang="en-US" sz="2400" dirty="0"/>
+              <a:t> in Python parameter names (</a:t>
             </a:r>
             <a:r>
               <a:rPr lang="en-US" dirty="0"/>
@@ -8390,7 +9073,7 @@
 </p:sld>
 </file>
 
-<file path=ppt/slides/slide18.xml><?xml version="1.0" encoding="utf-8"?>
+<file path=ppt/slides/slide19.xml><?xml version="1.0" encoding="utf-8"?>
 <p:sld xmlns:a="http://schemas.openxmlformats.org/drawingml/2006/main" xmlns:r="http://schemas.openxmlformats.org/officeDocument/2006/relationships" xmlns:p="http://schemas.openxmlformats.org/presentationml/2006/main">
   <p:cSld>
     <p:spTree>
@@ -8505,148 +9188,6 @@
     <p:extLst>
       <p:ext uri="{BB962C8B-B14F-4D97-AF65-F5344CB8AC3E}">
         <p14:creationId xmlns:p14="http://schemas.microsoft.com/office/powerpoint/2010/main" val="3813780875"/>
-      </p:ext>
-    </p:extLst>
-  </p:cSld>
-  <p:clrMapOvr>
-    <a:masterClrMapping/>
-  </p:clrMapOvr>
-</p:sld>
-</file>
-
-<file path=ppt/slides/slide19.xml><?xml version="1.0" encoding="utf-8"?>
-<p:sld xmlns:a="http://schemas.openxmlformats.org/drawingml/2006/main" xmlns:r="http://schemas.openxmlformats.org/officeDocument/2006/relationships" xmlns:p="http://schemas.openxmlformats.org/presentationml/2006/main">
-  <p:cSld>
-    <p:spTree>
-      <p:nvGrpSpPr>
-        <p:cNvPr id="1" name="">
-          <a:extLst>
-            <a:ext uri="{FF2B5EF4-FFF2-40B4-BE49-F238E27FC236}">
-              <a16:creationId xmlns:a16="http://schemas.microsoft.com/office/drawing/2014/main" id="{1DC184E6-C17F-C3E4-AFCC-66E4A817CFFC}"/>
-            </a:ext>
-          </a:extLst>
-        </p:cNvPr>
-        <p:cNvGrpSpPr/>
-        <p:nvPr/>
-      </p:nvGrpSpPr>
-      <p:grpSpPr>
-        <a:xfrm>
-          <a:off x="0" y="0"/>
-          <a:ext cx="0" cy="0"/>
-          <a:chOff x="0" y="0"/>
-          <a:chExt cx="0" cy="0"/>
-        </a:xfrm>
-      </p:grpSpPr>
-      <p:sp>
-        <p:nvSpPr>
-          <p:cNvPr id="3" name="Content Placeholder 2">
-            <a:extLst>
-              <a:ext uri="{FF2B5EF4-FFF2-40B4-BE49-F238E27FC236}">
-                <a16:creationId xmlns:a16="http://schemas.microsoft.com/office/drawing/2014/main" id="{DA967A93-DAD0-7AF9-E400-EAC833792B89}"/>
-              </a:ext>
-            </a:extLst>
-          </p:cNvPr>
-          <p:cNvSpPr>
-            <a:spLocks noGrp="1"/>
-          </p:cNvSpPr>
-          <p:nvPr>
-            <p:ph idx="1"/>
-          </p:nvPr>
-        </p:nvSpPr>
-        <p:spPr>
-          <a:xfrm>
-            <a:off x="777240" y="696686"/>
-            <a:ext cx="10659110" cy="5480277"/>
-          </a:xfrm>
-        </p:spPr>
-        <p:txBody>
-          <a:bodyPr>
-            <a:normAutofit/>
-          </a:bodyPr>
-          <a:lstStyle/>
-          <a:p>
-            <a:pPr marL="0" indent="0">
-              <a:buNone/>
-            </a:pPr>
-            <a:r>
-              <a:rPr lang="en-US" sz="2400" b="1" dirty="0"/>
-              <a:t>5. Form Data</a:t>
-            </a:r>
-          </a:p>
-          <a:p>
-            <a:r>
-              <a:rPr lang="en-US" sz="2400" dirty="0"/>
-              <a:t>Used when clients (like HTML forms) send data using the </a:t>
-            </a:r>
-            <a:r>
-              <a:rPr lang="en-US" dirty="0"/>
-              <a:t>application/x-www-form-</a:t>
-            </a:r>
-            <a:r>
-              <a:rPr lang="en-US" dirty="0" err="1"/>
-              <a:t>urlencoded</a:t>
-            </a:r>
-            <a:r>
-              <a:rPr lang="en-US" sz="2400" dirty="0"/>
-              <a:t> or </a:t>
-            </a:r>
-            <a:r>
-              <a:rPr lang="en-US" dirty="0"/>
-              <a:t>multipart/form-data</a:t>
-            </a:r>
-            <a:r>
-              <a:rPr lang="en-US" sz="2400" dirty="0"/>
-              <a:t> content types.</a:t>
-            </a:r>
-          </a:p>
-          <a:p>
-            <a:r>
-              <a:rPr lang="en-US" sz="2400" b="1" dirty="0"/>
-              <a:t>Example</a:t>
-            </a:r>
-          </a:p>
-          <a:p>
-            <a:pPr marL="0" indent="0">
-              <a:buNone/>
-            </a:pPr>
-            <a:endParaRPr lang="en-IN" sz="2400" dirty="0"/>
-          </a:p>
-        </p:txBody>
-      </p:sp>
-      <p:pic>
-        <p:nvPicPr>
-          <p:cNvPr id="4" name="Picture 3">
-            <a:extLst>
-              <a:ext uri="{FF2B5EF4-FFF2-40B4-BE49-F238E27FC236}">
-                <a16:creationId xmlns:a16="http://schemas.microsoft.com/office/drawing/2014/main" id="{B065461B-C5A9-B96A-D924-724D5048823F}"/>
-              </a:ext>
-            </a:extLst>
-          </p:cNvPr>
-          <p:cNvPicPr>
-            <a:picLocks noChangeAspect="1"/>
-          </p:cNvPicPr>
-          <p:nvPr/>
-        </p:nvPicPr>
-        <p:blipFill>
-          <a:blip r:embed="rId2"/>
-          <a:stretch>
-            <a:fillRect/>
-          </a:stretch>
-        </p:blipFill>
-        <p:spPr>
-          <a:xfrm>
-            <a:off x="914400" y="2767358"/>
-            <a:ext cx="10377014" cy="2719041"/>
-          </a:xfrm>
-          <a:prstGeom prst="rect">
-            <a:avLst/>
-          </a:prstGeom>
-        </p:spPr>
-      </p:pic>
-    </p:spTree>
-    <p:extLst>
-      <p:ext uri="{BB962C8B-B14F-4D97-AF65-F5344CB8AC3E}">
-        <p14:creationId xmlns:p14="http://schemas.microsoft.com/office/powerpoint/2010/main" val="4138878849"/>
       </p:ext>
     </p:extLst>
   </p:cSld>
@@ -8898,6 +9439,148 @@
         <p:cNvPr id="1" name="">
           <a:extLst>
             <a:ext uri="{FF2B5EF4-FFF2-40B4-BE49-F238E27FC236}">
+              <a16:creationId xmlns:a16="http://schemas.microsoft.com/office/drawing/2014/main" id="{1DC184E6-C17F-C3E4-AFCC-66E4A817CFFC}"/>
+            </a:ext>
+          </a:extLst>
+        </p:cNvPr>
+        <p:cNvGrpSpPr/>
+        <p:nvPr/>
+      </p:nvGrpSpPr>
+      <p:grpSpPr>
+        <a:xfrm>
+          <a:off x="0" y="0"/>
+          <a:ext cx="0" cy="0"/>
+          <a:chOff x="0" y="0"/>
+          <a:chExt cx="0" cy="0"/>
+        </a:xfrm>
+      </p:grpSpPr>
+      <p:sp>
+        <p:nvSpPr>
+          <p:cNvPr id="3" name="Content Placeholder 2">
+            <a:extLst>
+              <a:ext uri="{FF2B5EF4-FFF2-40B4-BE49-F238E27FC236}">
+                <a16:creationId xmlns:a16="http://schemas.microsoft.com/office/drawing/2014/main" id="{DA967A93-DAD0-7AF9-E400-EAC833792B89}"/>
+              </a:ext>
+            </a:extLst>
+          </p:cNvPr>
+          <p:cNvSpPr>
+            <a:spLocks noGrp="1"/>
+          </p:cNvSpPr>
+          <p:nvPr>
+            <p:ph idx="1"/>
+          </p:nvPr>
+        </p:nvSpPr>
+        <p:spPr>
+          <a:xfrm>
+            <a:off x="777240" y="696686"/>
+            <a:ext cx="10659110" cy="5480277"/>
+          </a:xfrm>
+        </p:spPr>
+        <p:txBody>
+          <a:bodyPr>
+            <a:normAutofit/>
+          </a:bodyPr>
+          <a:lstStyle/>
+          <a:p>
+            <a:pPr marL="0" indent="0">
+              <a:buNone/>
+            </a:pPr>
+            <a:r>
+              <a:rPr lang="en-US" sz="2400" b="1" dirty="0"/>
+              <a:t>5. Form Data</a:t>
+            </a:r>
+          </a:p>
+          <a:p>
+            <a:r>
+              <a:rPr lang="en-US" sz="2400" dirty="0"/>
+              <a:t>Used when clients (like HTML forms) send data using the </a:t>
+            </a:r>
+            <a:r>
+              <a:rPr lang="en-US" dirty="0"/>
+              <a:t>application/x-www-form-</a:t>
+            </a:r>
+            <a:r>
+              <a:rPr lang="en-US" dirty="0" err="1"/>
+              <a:t>urlencoded</a:t>
+            </a:r>
+            <a:r>
+              <a:rPr lang="en-US" sz="2400" dirty="0"/>
+              <a:t> or </a:t>
+            </a:r>
+            <a:r>
+              <a:rPr lang="en-US" dirty="0"/>
+              <a:t>multipart/form-data</a:t>
+            </a:r>
+            <a:r>
+              <a:rPr lang="en-US" sz="2400" dirty="0"/>
+              <a:t> content types.</a:t>
+            </a:r>
+          </a:p>
+          <a:p>
+            <a:r>
+              <a:rPr lang="en-US" sz="2400" b="1" dirty="0"/>
+              <a:t>Example</a:t>
+            </a:r>
+          </a:p>
+          <a:p>
+            <a:pPr marL="0" indent="0">
+              <a:buNone/>
+            </a:pPr>
+            <a:endParaRPr lang="en-IN" sz="2400" dirty="0"/>
+          </a:p>
+        </p:txBody>
+      </p:sp>
+      <p:pic>
+        <p:nvPicPr>
+          <p:cNvPr id="4" name="Picture 3">
+            <a:extLst>
+              <a:ext uri="{FF2B5EF4-FFF2-40B4-BE49-F238E27FC236}">
+                <a16:creationId xmlns:a16="http://schemas.microsoft.com/office/drawing/2014/main" id="{B065461B-C5A9-B96A-D924-724D5048823F}"/>
+              </a:ext>
+            </a:extLst>
+          </p:cNvPr>
+          <p:cNvPicPr>
+            <a:picLocks noChangeAspect="1"/>
+          </p:cNvPicPr>
+          <p:nvPr/>
+        </p:nvPicPr>
+        <p:blipFill>
+          <a:blip r:embed="rId2"/>
+          <a:stretch>
+            <a:fillRect/>
+          </a:stretch>
+        </p:blipFill>
+        <p:spPr>
+          <a:xfrm>
+            <a:off x="914400" y="2767358"/>
+            <a:ext cx="10377014" cy="2719041"/>
+          </a:xfrm>
+          <a:prstGeom prst="rect">
+            <a:avLst/>
+          </a:prstGeom>
+        </p:spPr>
+      </p:pic>
+    </p:spTree>
+    <p:extLst>
+      <p:ext uri="{BB962C8B-B14F-4D97-AF65-F5344CB8AC3E}">
+        <p14:creationId xmlns:p14="http://schemas.microsoft.com/office/powerpoint/2010/main" val="4138878849"/>
+      </p:ext>
+    </p:extLst>
+  </p:cSld>
+  <p:clrMapOvr>
+    <a:masterClrMapping/>
+  </p:clrMapOvr>
+</p:sld>
+</file>
+
+<file path=ppt/slides/slide21.xml><?xml version="1.0" encoding="utf-8"?>
+<p:sld xmlns:a="http://schemas.openxmlformats.org/drawingml/2006/main" xmlns:r="http://schemas.openxmlformats.org/officeDocument/2006/relationships" xmlns:p="http://schemas.openxmlformats.org/presentationml/2006/main">
+  <p:cSld>
+    <p:spTree>
+      <p:nvGrpSpPr>
+        <p:cNvPr id="1" name="">
+          <a:extLst>
+            <a:ext uri="{FF2B5EF4-FFF2-40B4-BE49-F238E27FC236}">
               <a16:creationId xmlns:a16="http://schemas.microsoft.com/office/drawing/2014/main" id="{F1001C11-4021-37DA-0949-0F0527AC6329}"/>
             </a:ext>
           </a:extLst>
@@ -9071,7 +9754,7 @@
 </p:sld>
 </file>
 
-<file path=ppt/slides/slide21.xml><?xml version="1.0" encoding="utf-8"?>
+<file path=ppt/slides/slide22.xml><?xml version="1.0" encoding="utf-8"?>
 <p:sld xmlns:a="http://schemas.openxmlformats.org/drawingml/2006/main" xmlns:r="http://schemas.openxmlformats.org/officeDocument/2006/relationships" xmlns:p="http://schemas.openxmlformats.org/presentationml/2006/main">
   <p:cSld>
     <p:spTree>
@@ -9220,7 +9903,7 @@
 </p:sld>
 </file>
 
-<file path=ppt/slides/slide22.xml><?xml version="1.0" encoding="utf-8"?>
+<file path=ppt/slides/slide23.xml><?xml version="1.0" encoding="utf-8"?>
 <p:sld xmlns:a="http://schemas.openxmlformats.org/drawingml/2006/main" xmlns:r="http://schemas.openxmlformats.org/officeDocument/2006/relationships" xmlns:p="http://schemas.openxmlformats.org/presentationml/2006/main">
   <p:cSld>
     <p:spTree>
@@ -9352,7 +10035,7 @@
 </p:sld>
 </file>
 
-<file path=ppt/slides/slide23.xml><?xml version="1.0" encoding="utf-8"?>
+<file path=ppt/slides/slide24.xml><?xml version="1.0" encoding="utf-8"?>
 <p:sld xmlns:a="http://schemas.openxmlformats.org/drawingml/2006/main" xmlns:r="http://schemas.openxmlformats.org/officeDocument/2006/relationships" xmlns:p="http://schemas.openxmlformats.org/presentationml/2006/main">
   <p:cSld>
     <p:spTree>
@@ -9406,6 +10089,148 @@
             <a:pPr marL="0" indent="0">
               <a:buNone/>
             </a:pPr>
+            <a:r>
+              <a:rPr lang="en-US" sz="3200" b="1" dirty="0"/>
+              <a:t>Middleware</a:t>
+            </a:r>
+          </a:p>
+          <a:p>
+            <a:r>
+              <a:rPr lang="en-US" sz="2800" b="1" dirty="0"/>
+              <a:t>Middleware</a:t>
+            </a:r>
+            <a:r>
+              <a:rPr lang="en-US" sz="2800" dirty="0"/>
+              <a:t> is a </a:t>
+            </a:r>
+            <a:r>
+              <a:rPr lang="en-US" sz="2800" b="1" i="1" dirty="0"/>
+              <a:t>layer</a:t>
+            </a:r>
+            <a:r>
+              <a:rPr lang="en-US" sz="2800" dirty="0"/>
+              <a:t> that sits </a:t>
+            </a:r>
+            <a:r>
+              <a:rPr lang="en-US" sz="2800" b="1" dirty="0"/>
+              <a:t>between</a:t>
+            </a:r>
+            <a:r>
+              <a:rPr lang="en-US" sz="2800" dirty="0"/>
+              <a:t> the </a:t>
+            </a:r>
+            <a:r>
+              <a:rPr lang="en-US" sz="2800" b="1" dirty="0">
+                <a:solidFill>
+                  <a:srgbClr val="C00000"/>
+                </a:solidFill>
+              </a:rPr>
+              <a:t>client request </a:t>
+            </a:r>
+            <a:r>
+              <a:rPr lang="en-US" sz="2800" dirty="0"/>
+              <a:t>and your </a:t>
+            </a:r>
+            <a:r>
+              <a:rPr lang="en-US" sz="2800" b="1" dirty="0">
+                <a:solidFill>
+                  <a:srgbClr val="C00000"/>
+                </a:solidFill>
+              </a:rPr>
+              <a:t>route handlers </a:t>
+            </a:r>
+            <a:r>
+              <a:rPr lang="en-US" sz="2800" dirty="0"/>
+              <a:t>(endpoints).</a:t>
+            </a:r>
+            <a:br>
+              <a:rPr lang="en-US" sz="2800" dirty="0"/>
+            </a:br>
+            <a:r>
+              <a:rPr lang="en-US" sz="2800" dirty="0"/>
+              <a:t>It can:</a:t>
+            </a:r>
+          </a:p>
+          <a:p>
+            <a:pPr lvl="1"/>
+            <a:r>
+              <a:rPr lang="en-US" sz="2800" dirty="0"/>
+              <a:t>Inspect or modify the </a:t>
+            </a:r>
+            <a:r>
+              <a:rPr lang="en-US" sz="2800" b="1" dirty="0"/>
+              <a:t>request</a:t>
+            </a:r>
+            <a:r>
+              <a:rPr lang="en-US" sz="2800" dirty="0"/>
+              <a:t> before it reaches your endpoint.</a:t>
+            </a:r>
+          </a:p>
+          <a:p>
+            <a:pPr lvl="1"/>
+            <a:r>
+              <a:rPr lang="en-US" sz="2800" dirty="0"/>
+              <a:t>Inspect or modify the </a:t>
+            </a:r>
+            <a:r>
+              <a:rPr lang="en-US" sz="2800" b="1" dirty="0"/>
+              <a:t>response</a:t>
+            </a:r>
+            <a:r>
+              <a:rPr lang="en-US" sz="2800" dirty="0"/>
+              <a:t> before it goes back to the client.</a:t>
+            </a:r>
+          </a:p>
+          <a:p>
+            <a:pPr lvl="1"/>
+            <a:r>
+              <a:rPr lang="en-US" sz="2800" dirty="0"/>
+              <a:t>Perform tasks like logging, authentication, metrics, CORS, compression, etc.</a:t>
+            </a:r>
+          </a:p>
+          <a:p>
+            <a:r>
+              <a:rPr lang="en-US" sz="2800" dirty="0"/>
+              <a:t>Think of it like an </a:t>
+            </a:r>
+            <a:r>
+              <a:rPr lang="en-US" sz="2800" b="1" dirty="0"/>
+              <a:t>onion</a:t>
+            </a:r>
+            <a:r>
+              <a:rPr lang="en-US" sz="2800" dirty="0"/>
+              <a:t> 🧅:</a:t>
+            </a:r>
+          </a:p>
+          <a:p>
+            <a:pPr marL="0" indent="0">
+              <a:buNone/>
+            </a:pPr>
+            <a:r>
+              <a:rPr lang="en-US" sz="2800" dirty="0"/>
+              <a:t>The request enters through </a:t>
+            </a:r>
+            <a:r>
+              <a:rPr lang="en-US" sz="2800" b="1" dirty="0"/>
+              <a:t>several middleware layers</a:t>
+            </a:r>
+            <a:r>
+              <a:rPr lang="en-US" sz="2800" dirty="0"/>
+              <a:t>, </a:t>
+            </a:r>
+            <a:r>
+              <a:rPr lang="en-US" sz="2800" b="1" dirty="0"/>
+              <a:t>reaches your endpoint</a:t>
+            </a:r>
+            <a:r>
+              <a:rPr lang="en-US" sz="2800" dirty="0"/>
+              <a:t>, and then travels back through the same layers as a response.</a:t>
+            </a:r>
+          </a:p>
+          <a:p>
+            <a:pPr marL="0" indent="0">
+              <a:buNone/>
+            </a:pPr>
             <a:endParaRPr lang="en-IN" sz="2400" dirty="0"/>
           </a:p>
         </p:txBody>
@@ -9423,7 +10248,7 @@
 </p:sld>
 </file>
 
-<file path=ppt/slides/slide24.xml><?xml version="1.0" encoding="utf-8"?>
+<file path=ppt/slides/slide25.xml><?xml version="1.0" encoding="utf-8"?>
 <p:sld xmlns:a="http://schemas.openxmlformats.org/drawingml/2006/main" xmlns:r="http://schemas.openxmlformats.org/officeDocument/2006/relationships" xmlns:p="http://schemas.openxmlformats.org/presentationml/2006/main">
   <p:cSld>
     <p:spTree>
@@ -9464,8 +10289,8 @@
         </p:nvSpPr>
         <p:spPr>
           <a:xfrm>
-            <a:off x="777240" y="696686"/>
-            <a:ext cx="10659110" cy="5480277"/>
+            <a:off x="777240" y="1034143"/>
+            <a:ext cx="10659110" cy="5142820"/>
           </a:xfrm>
         </p:spPr>
         <p:txBody>
@@ -9473,6 +10298,119 @@
             <a:normAutofit/>
           </a:bodyPr>
           <a:lstStyle/>
+          <a:p>
+            <a:pPr marL="0" indent="0">
+              <a:buNone/>
+            </a:pPr>
+            <a:r>
+              <a:rPr lang="en-US" sz="2800" b="1" dirty="0"/>
+              <a:t>Middleware Flow</a:t>
+            </a:r>
+          </a:p>
+          <a:p>
+            <a:pPr marL="457200" indent="-457200">
+              <a:buAutoNum type="arabicPeriod"/>
+            </a:pPr>
+            <a:r>
+              <a:rPr lang="en-US" sz="2800" dirty="0"/>
+              <a:t>Client sends a </a:t>
+            </a:r>
+            <a:r>
+              <a:rPr lang="en-US" sz="2800" b="1" dirty="0"/>
+              <a:t>request</a:t>
+            </a:r>
+            <a:r>
+              <a:rPr lang="en-US" sz="2800" dirty="0"/>
+              <a:t> → </a:t>
+            </a:r>
+            <a:r>
+              <a:rPr lang="en-US" sz="2800" b="1" dirty="0"/>
+              <a:t>enters the middleware </a:t>
+            </a:r>
+            <a:r>
+              <a:rPr lang="en-US" sz="2800" b="1" dirty="0">
+                <a:solidFill>
+                  <a:srgbClr val="C00000"/>
+                </a:solidFill>
+              </a:rPr>
+              <a:t>stack</a:t>
+            </a:r>
+            <a:r>
+              <a:rPr lang="en-US" sz="2800" dirty="0"/>
+              <a:t>.</a:t>
+            </a:r>
+          </a:p>
+          <a:p>
+            <a:pPr marL="457200" indent="-457200">
+              <a:buAutoNum type="arabicPeriod"/>
+            </a:pPr>
+            <a:r>
+              <a:rPr lang="en-US" sz="2800" dirty="0"/>
+              <a:t>Each middleware can:</a:t>
+            </a:r>
+          </a:p>
+          <a:p>
+            <a:pPr lvl="1"/>
+            <a:r>
+              <a:rPr lang="en-US" sz="2800" dirty="0"/>
+              <a:t>Run logic </a:t>
+            </a:r>
+            <a:r>
+              <a:rPr lang="en-US" sz="2800" i="1" dirty="0"/>
+              <a:t>before</a:t>
+            </a:r>
+            <a:r>
+              <a:rPr lang="en-US" sz="2800" dirty="0"/>
+              <a:t> passing to the </a:t>
+            </a:r>
+            <a:r>
+              <a:rPr lang="en-US" sz="2800" b="1" dirty="0"/>
+              <a:t>next handler</a:t>
+            </a:r>
+            <a:r>
+              <a:rPr lang="en-US" sz="2800" dirty="0"/>
+              <a:t>.</a:t>
+            </a:r>
+          </a:p>
+          <a:p>
+            <a:pPr lvl="1"/>
+            <a:r>
+              <a:rPr lang="en-US" sz="2800" b="1" dirty="0"/>
+              <a:t>Optionally</a:t>
+            </a:r>
+            <a:r>
+              <a:rPr lang="en-US" sz="2800" dirty="0"/>
+              <a:t> stop the chain (e.g., reject request).</a:t>
+            </a:r>
+            <a:endParaRPr lang="en-US" sz="2400" dirty="0"/>
+          </a:p>
+          <a:p>
+            <a:pPr marL="457200" indent="-457200">
+              <a:buFont typeface="+mj-lt"/>
+              <a:buAutoNum type="arabicPeriod"/>
+            </a:pPr>
+            <a:r>
+              <a:rPr lang="en-US" sz="2800" dirty="0"/>
+              <a:t>After your route runs and returns a response, each middleware can:</a:t>
+            </a:r>
+          </a:p>
+          <a:p>
+            <a:pPr lvl="1"/>
+            <a:r>
+              <a:rPr lang="en-US" sz="2800" dirty="0"/>
+              <a:t>Modify the outgoing response.</a:t>
+            </a:r>
+          </a:p>
+          <a:p>
+            <a:pPr marL="457200" indent="-457200">
+              <a:buFont typeface="+mj-lt"/>
+              <a:buAutoNum type="arabicPeriod"/>
+            </a:pPr>
+            <a:r>
+              <a:rPr lang="en-US" sz="2800" dirty="0"/>
+              <a:t>Finally, the response is sent back to the client.</a:t>
+            </a:r>
+          </a:p>
           <a:p>
             <a:pPr marL="0" indent="0">
               <a:buNone/>
@@ -9494,7 +10432,7 @@
 </p:sld>
 </file>
 
-<file path=ppt/slides/slide25.xml><?xml version="1.0" encoding="utf-8"?>
+<file path=ppt/slides/slide26.xml><?xml version="1.0" encoding="utf-8"?>
 <p:sld xmlns:a="http://schemas.openxmlformats.org/drawingml/2006/main" xmlns:r="http://schemas.openxmlformats.org/officeDocument/2006/relationships" xmlns:p="http://schemas.openxmlformats.org/presentationml/2006/main">
   <p:cSld>
     <p:spTree>
@@ -9548,85 +10486,145 @@
             <a:pPr marL="0" indent="0">
               <a:buNone/>
             </a:pPr>
-            <a:endParaRPr lang="en-IN" sz="2400" dirty="0"/>
+            <a:r>
+              <a:rPr lang="en-US" sz="2800" b="1" dirty="0"/>
+              <a:t>How Middleware Works in </a:t>
+            </a:r>
+            <a:r>
+              <a:rPr lang="en-US" sz="2800" b="1" dirty="0" err="1"/>
+              <a:t>FastAPI</a:t>
+            </a:r>
+            <a:r>
+              <a:rPr lang="en-US" sz="2800" b="1" dirty="0"/>
+              <a:t> (or Starlette)</a:t>
+            </a:r>
+          </a:p>
+          <a:p>
+            <a:r>
+              <a:rPr lang="en-US" sz="2800" dirty="0"/>
+              <a:t>In </a:t>
+            </a:r>
+            <a:r>
+              <a:rPr lang="en-US" sz="2800" dirty="0" err="1"/>
+              <a:t>FastAPI</a:t>
+            </a:r>
+            <a:r>
+              <a:rPr lang="en-US" sz="2800" dirty="0"/>
+              <a:t>, middleware must be </a:t>
+            </a:r>
+            <a:r>
+              <a:rPr lang="en-US" sz="2800" b="1" dirty="0"/>
+              <a:t>asynchronous</a:t>
+            </a:r>
+            <a:r>
+              <a:rPr lang="en-US" sz="2800" dirty="0"/>
+              <a:t> and accept:</a:t>
+            </a:r>
+          </a:p>
+          <a:p>
+            <a:endParaRPr lang="en-US" sz="2800" dirty="0"/>
+          </a:p>
+          <a:p>
+            <a:endParaRPr lang="en-US" sz="2800" dirty="0"/>
+          </a:p>
+          <a:p>
+            <a:endParaRPr lang="en-US" sz="2800" dirty="0"/>
+          </a:p>
+          <a:p>
+            <a:r>
+              <a:rPr lang="en-US" sz="2800" b="1" dirty="0"/>
+              <a:t>request: </a:t>
+            </a:r>
+            <a:r>
+              <a:rPr lang="en-US" sz="2800" dirty="0"/>
+              <a:t>the incoming Request object.</a:t>
+            </a:r>
+          </a:p>
+          <a:p>
+            <a:r>
+              <a:rPr lang="en-US" sz="2800" b="1" dirty="0" err="1"/>
+              <a:t>call_next</a:t>
+            </a:r>
+            <a:r>
+              <a:rPr lang="en-US" sz="2800" b="1" dirty="0"/>
+              <a:t>: </a:t>
+            </a:r>
+            <a:r>
+              <a:rPr lang="en-US" sz="2800" dirty="0"/>
+              <a:t>a function that </a:t>
+            </a:r>
+            <a:r>
+              <a:rPr lang="en-US" sz="2800" b="1" dirty="0"/>
+              <a:t>passes the request to the next handler </a:t>
+            </a:r>
+            <a:r>
+              <a:rPr lang="en-US" sz="2800" dirty="0"/>
+              <a:t>(and eventually your endpoint). It returns a Response.</a:t>
+            </a:r>
+          </a:p>
+          <a:p>
+            <a:endParaRPr lang="en-US" sz="2800" dirty="0"/>
+          </a:p>
+          <a:p>
+            <a:r>
+              <a:rPr lang="en-US" sz="2800" b="1" dirty="0"/>
+              <a:t>Example:</a:t>
+            </a:r>
+          </a:p>
+          <a:p>
+            <a:pPr marL="0" indent="0">
+              <a:buNone/>
+            </a:pPr>
+            <a:endParaRPr lang="en-US" sz="2800" dirty="0"/>
+          </a:p>
+          <a:p>
+            <a:pPr marL="0" indent="0">
+              <a:buNone/>
+            </a:pPr>
+            <a:endParaRPr lang="en-US" sz="2800" dirty="0"/>
+          </a:p>
+          <a:p>
+            <a:pPr marL="0" indent="0">
+              <a:buNone/>
+            </a:pPr>
+            <a:endParaRPr lang="en-IN" sz="2800" dirty="0"/>
           </a:p>
         </p:txBody>
       </p:sp>
+      <p:pic>
+        <p:nvPicPr>
+          <p:cNvPr id="4" name="Picture 3">
+            <a:extLst>
+              <a:ext uri="{FF2B5EF4-FFF2-40B4-BE49-F238E27FC236}">
+                <a16:creationId xmlns:a16="http://schemas.microsoft.com/office/drawing/2014/main" id="{591D0356-8DE7-CE59-71BE-E3781041A58D}"/>
+              </a:ext>
+            </a:extLst>
+          </p:cNvPr>
+          <p:cNvPicPr>
+            <a:picLocks noChangeAspect="1"/>
+          </p:cNvPicPr>
+          <p:nvPr/>
+        </p:nvPicPr>
+        <p:blipFill>
+          <a:blip r:embed="rId2"/>
+          <a:stretch>
+            <a:fillRect/>
+          </a:stretch>
+        </p:blipFill>
+        <p:spPr>
+          <a:xfrm>
+            <a:off x="2366572" y="2135685"/>
+            <a:ext cx="4306372" cy="664564"/>
+          </a:xfrm>
+          <a:prstGeom prst="rect">
+            <a:avLst/>
+          </a:prstGeom>
+        </p:spPr>
+      </p:pic>
     </p:spTree>
     <p:extLst>
       <p:ext uri="{BB962C8B-B14F-4D97-AF65-F5344CB8AC3E}">
         <p14:creationId xmlns:p14="http://schemas.microsoft.com/office/powerpoint/2010/main" val="1075547662"/>
-      </p:ext>
-    </p:extLst>
-  </p:cSld>
-  <p:clrMapOvr>
-    <a:masterClrMapping/>
-  </p:clrMapOvr>
-</p:sld>
-</file>
-
-<file path=ppt/slides/slide26.xml><?xml version="1.0" encoding="utf-8"?>
-<p:sld xmlns:a="http://schemas.openxmlformats.org/drawingml/2006/main" xmlns:r="http://schemas.openxmlformats.org/officeDocument/2006/relationships" xmlns:p="http://schemas.openxmlformats.org/presentationml/2006/main">
-  <p:cSld>
-    <p:spTree>
-      <p:nvGrpSpPr>
-        <p:cNvPr id="1" name="">
-          <a:extLst>
-            <a:ext uri="{FF2B5EF4-FFF2-40B4-BE49-F238E27FC236}">
-              <a16:creationId xmlns:a16="http://schemas.microsoft.com/office/drawing/2014/main" id="{99E149D8-93FE-6D87-12AC-B420468BAE6E}"/>
-            </a:ext>
-          </a:extLst>
-        </p:cNvPr>
-        <p:cNvGrpSpPr/>
-        <p:nvPr/>
-      </p:nvGrpSpPr>
-      <p:grpSpPr>
-        <a:xfrm>
-          <a:off x="0" y="0"/>
-          <a:ext cx="0" cy="0"/>
-          <a:chOff x="0" y="0"/>
-          <a:chExt cx="0" cy="0"/>
-        </a:xfrm>
-      </p:grpSpPr>
-      <p:sp>
-        <p:nvSpPr>
-          <p:cNvPr id="3" name="Content Placeholder 2">
-            <a:extLst>
-              <a:ext uri="{FF2B5EF4-FFF2-40B4-BE49-F238E27FC236}">
-                <a16:creationId xmlns:a16="http://schemas.microsoft.com/office/drawing/2014/main" id="{AB66216B-06F6-82F1-5605-A4216249DAB7}"/>
-              </a:ext>
-            </a:extLst>
-          </p:cNvPr>
-          <p:cNvSpPr>
-            <a:spLocks noGrp="1"/>
-          </p:cNvSpPr>
-          <p:nvPr>
-            <p:ph idx="1"/>
-          </p:nvPr>
-        </p:nvSpPr>
-        <p:spPr>
-          <a:xfrm>
-            <a:off x="777240" y="696686"/>
-            <a:ext cx="10659110" cy="5480277"/>
-          </a:xfrm>
-        </p:spPr>
-        <p:txBody>
-          <a:bodyPr>
-            <a:normAutofit/>
-          </a:bodyPr>
-          <a:lstStyle/>
-          <a:p>
-            <a:pPr marL="0" indent="0">
-              <a:buNone/>
-            </a:pPr>
-            <a:endParaRPr lang="en-IN" sz="2400" dirty="0"/>
-          </a:p>
-        </p:txBody>
-      </p:sp>
-    </p:spTree>
-    <p:extLst>
-      <p:ext uri="{BB962C8B-B14F-4D97-AF65-F5344CB8AC3E}">
-        <p14:creationId xmlns:p14="http://schemas.microsoft.com/office/powerpoint/2010/main" val="4070054215"/>
       </p:ext>
     </p:extLst>
   </p:cSld>
@@ -9690,10 +10688,131 @@
             <a:pPr marL="0" indent="0">
               <a:buNone/>
             </a:pPr>
-            <a:endParaRPr lang="en-IN" sz="2400" dirty="0"/>
+            <a:r>
+              <a:rPr lang="en-IN" sz="2400" b="1" dirty="0"/>
+              <a:t>Example:</a:t>
+            </a:r>
+          </a:p>
+          <a:p>
+            <a:pPr marL="0" indent="0">
+              <a:buNone/>
+            </a:pPr>
+            <a:endParaRPr lang="en-IN" sz="2400" b="1" dirty="0"/>
+          </a:p>
+          <a:p>
+            <a:pPr marL="0" indent="0">
+              <a:buNone/>
+            </a:pPr>
+            <a:endParaRPr lang="en-IN" sz="2400" b="1" dirty="0"/>
+          </a:p>
+          <a:p>
+            <a:pPr marL="0" indent="0">
+              <a:buNone/>
+            </a:pPr>
+            <a:endParaRPr lang="en-IN" sz="2400" b="1" dirty="0"/>
+          </a:p>
+          <a:p>
+            <a:pPr marL="0" indent="0">
+              <a:buNone/>
+            </a:pPr>
+            <a:endParaRPr lang="en-IN" sz="2400" b="1" dirty="0"/>
+          </a:p>
+          <a:p>
+            <a:pPr marL="0" indent="0">
+              <a:buNone/>
+            </a:pPr>
+            <a:endParaRPr lang="en-IN" sz="2400" b="1" dirty="0"/>
+          </a:p>
+          <a:p>
+            <a:pPr marL="0" indent="0">
+              <a:buNone/>
+            </a:pPr>
+            <a:endParaRPr lang="en-IN" sz="2400" b="1" dirty="0"/>
+          </a:p>
+          <a:p>
+            <a:pPr marL="0" indent="0">
+              <a:buNone/>
+            </a:pPr>
+            <a:endParaRPr lang="en-IN" sz="2400" b="1" dirty="0"/>
+          </a:p>
+          <a:p>
+            <a:pPr marL="0" indent="0">
+              <a:buNone/>
+            </a:pPr>
+            <a:endParaRPr lang="en-IN" sz="2400" b="1" dirty="0"/>
+          </a:p>
+          <a:p>
+            <a:pPr marL="0" indent="0">
+              <a:buNone/>
+            </a:pPr>
+            <a:endParaRPr lang="en-IN" sz="2400" b="1" dirty="0"/>
+          </a:p>
+          <a:p>
+            <a:pPr marL="0" indent="0">
+              <a:buNone/>
+            </a:pPr>
+            <a:r>
+              <a:rPr lang="en-IN" sz="2400" b="1" dirty="0"/>
+              <a:t>Note: </a:t>
+            </a:r>
+            <a:r>
+              <a:rPr lang="en-US" sz="2400" b="1" dirty="0">
+                <a:solidFill>
+                  <a:srgbClr val="C00000"/>
+                </a:solidFill>
+              </a:rPr>
+              <a:t>Every request </a:t>
+            </a:r>
+            <a:r>
+              <a:rPr lang="en-US" sz="2400" dirty="0"/>
+              <a:t>to any route passes through this middleware.</a:t>
+            </a:r>
+            <a:endParaRPr lang="en-IN" sz="2400" b="1" dirty="0"/>
+          </a:p>
+          <a:p>
+            <a:pPr marL="0" indent="0">
+              <a:buNone/>
+            </a:pPr>
+            <a:endParaRPr lang="en-IN" sz="2400" b="1" dirty="0"/>
+          </a:p>
+          <a:p>
+            <a:pPr marL="0" indent="0">
+              <a:buNone/>
+            </a:pPr>
+            <a:endParaRPr lang="en-IN" sz="2400" b="1" dirty="0"/>
           </a:p>
         </p:txBody>
       </p:sp>
+      <p:pic>
+        <p:nvPicPr>
+          <p:cNvPr id="4" name="Picture 3">
+            <a:extLst>
+              <a:ext uri="{FF2B5EF4-FFF2-40B4-BE49-F238E27FC236}">
+                <a16:creationId xmlns:a16="http://schemas.microsoft.com/office/drawing/2014/main" id="{4CB49D6B-9CE2-8494-29CC-C78D472A4345}"/>
+              </a:ext>
+            </a:extLst>
+          </p:cNvPr>
+          <p:cNvPicPr>
+            <a:picLocks noChangeAspect="1"/>
+          </p:cNvPicPr>
+          <p:nvPr/>
+        </p:nvPicPr>
+        <p:blipFill>
+          <a:blip r:embed="rId2"/>
+          <a:stretch>
+            <a:fillRect/>
+          </a:stretch>
+        </p:blipFill>
+        <p:spPr>
+          <a:xfrm>
+            <a:off x="1011730" y="1337333"/>
+            <a:ext cx="10190129" cy="3268933"/>
+          </a:xfrm>
+          <a:prstGeom prst="rect">
+            <a:avLst/>
+          </a:prstGeom>
+        </p:spPr>
+      </p:pic>
     </p:spTree>
     <p:extLst>
       <p:ext uri="{BB962C8B-B14F-4D97-AF65-F5344CB8AC3E}">
@@ -9748,8 +10867,8 @@
         </p:nvSpPr>
         <p:spPr>
           <a:xfrm>
-            <a:off x="777240" y="696686"/>
-            <a:ext cx="10659110" cy="5480277"/>
+            <a:off x="777240" y="253156"/>
+            <a:ext cx="10659110" cy="5923808"/>
           </a:xfrm>
         </p:spPr>
         <p:txBody>
@@ -9761,10 +10880,49 @@
             <a:pPr marL="0" indent="0">
               <a:buNone/>
             </a:pPr>
-            <a:endParaRPr lang="en-IN" sz="2400" dirty="0"/>
+            <a:r>
+              <a:rPr lang="en-IN" sz="2800" b="1" dirty="0"/>
+              <a:t>Multiple Middleware's:</a:t>
+            </a:r>
+          </a:p>
+          <a:p>
+            <a:pPr marL="0" indent="0">
+              <a:buNone/>
+            </a:pPr>
+            <a:endParaRPr lang="en-IN" sz="2800" b="1" dirty="0"/>
           </a:p>
         </p:txBody>
       </p:sp>
+      <p:pic>
+        <p:nvPicPr>
+          <p:cNvPr id="4" name="Picture 3">
+            <a:extLst>
+              <a:ext uri="{FF2B5EF4-FFF2-40B4-BE49-F238E27FC236}">
+                <a16:creationId xmlns:a16="http://schemas.microsoft.com/office/drawing/2014/main" id="{1EE2C232-DC0C-4366-AB84-8B5AB96DCB2B}"/>
+              </a:ext>
+            </a:extLst>
+          </p:cNvPr>
+          <p:cNvPicPr>
+            <a:picLocks noChangeAspect="1"/>
+          </p:cNvPicPr>
+          <p:nvPr/>
+        </p:nvPicPr>
+        <p:blipFill>
+          <a:blip r:embed="rId2"/>
+          <a:stretch>
+            <a:fillRect/>
+          </a:stretch>
+        </p:blipFill>
+        <p:spPr>
+          <a:xfrm>
+            <a:off x="1619809" y="837209"/>
+            <a:ext cx="8952381" cy="5923809"/>
+          </a:xfrm>
+          <a:prstGeom prst="rect">
+            <a:avLst/>
+          </a:prstGeom>
+        </p:spPr>
+      </p:pic>
     </p:spTree>
     <p:extLst>
       <p:ext uri="{BB962C8B-B14F-4D97-AF65-F5344CB8AC3E}">
@@ -9825,17 +10983,186 @@
         </p:spPr>
         <p:txBody>
           <a:bodyPr>
-            <a:normAutofit/>
+            <a:normAutofit lnSpcReduction="10000"/>
           </a:bodyPr>
           <a:lstStyle/>
           <a:p>
             <a:pPr marL="0" indent="0">
               <a:buNone/>
             </a:pPr>
+            <a:r>
+              <a:rPr lang="en-IN" sz="2400" b="1" dirty="0"/>
+              <a:t>Output:</a:t>
+            </a:r>
+          </a:p>
+          <a:p>
+            <a:pPr marL="0" indent="0">
+              <a:buNone/>
+            </a:pPr>
+            <a:endParaRPr lang="en-IN" sz="2400" dirty="0"/>
+          </a:p>
+          <a:p>
+            <a:pPr marL="0" indent="0">
+              <a:buNone/>
+            </a:pPr>
+            <a:endParaRPr lang="en-IN" sz="2400" dirty="0"/>
+          </a:p>
+          <a:p>
+            <a:pPr marL="0" indent="0">
+              <a:buNone/>
+            </a:pPr>
+            <a:endParaRPr lang="en-IN" sz="2400" dirty="0"/>
+          </a:p>
+          <a:p>
+            <a:pPr marL="0" indent="0">
+              <a:buNone/>
+            </a:pPr>
+            <a:endParaRPr lang="en-IN" sz="2400" dirty="0"/>
+          </a:p>
+          <a:p>
+            <a:pPr marL="0" indent="0">
+              <a:buNone/>
+            </a:pPr>
+            <a:endParaRPr lang="en-IN" sz="2400" dirty="0"/>
+          </a:p>
+          <a:p>
+            <a:pPr marL="0" indent="0">
+              <a:buNone/>
+            </a:pPr>
+            <a:endParaRPr lang="en-IN" sz="2400" b="1" dirty="0"/>
+          </a:p>
+          <a:p>
+            <a:pPr marL="0" indent="0">
+              <a:buNone/>
+            </a:pPr>
+            <a:endParaRPr lang="en-IN" sz="2400" b="1" dirty="0"/>
+          </a:p>
+          <a:p>
+            <a:pPr marL="0" indent="0">
+              <a:buNone/>
+            </a:pPr>
+            <a:r>
+              <a:rPr lang="en-IN" sz="2400" b="1" dirty="0"/>
+              <a:t>Note:</a:t>
+            </a:r>
+          </a:p>
+          <a:p>
+            <a:r>
+              <a:rPr lang="en-US" sz="2400" dirty="0"/>
+              <a:t>The </a:t>
+            </a:r>
+            <a:r>
+              <a:rPr lang="en-US" sz="2400" i="1" dirty="0"/>
+              <a:t>last</a:t>
+            </a:r>
+            <a:r>
+              <a:rPr lang="en-US" sz="2400" dirty="0"/>
+              <a:t> middleware you declare in code becomes the </a:t>
+            </a:r>
+            <a:r>
+              <a:rPr lang="en-US" sz="2400" b="1" dirty="0"/>
+              <a:t>outermost</a:t>
+            </a:r>
+            <a:r>
+              <a:rPr lang="en-US" sz="2400" dirty="0"/>
+              <a:t> layer and runs </a:t>
+            </a:r>
+            <a:r>
+              <a:rPr lang="en-US" sz="2400" b="1" dirty="0"/>
+              <a:t>first</a:t>
+            </a:r>
+            <a:r>
+              <a:rPr lang="en-US" sz="2400" dirty="0"/>
+              <a:t> on the way </a:t>
+            </a:r>
+            <a:r>
+              <a:rPr lang="en-US" sz="2400" i="1" dirty="0"/>
+              <a:t>in</a:t>
+            </a:r>
+            <a:r>
+              <a:rPr lang="en-US" sz="2400" dirty="0"/>
+              <a:t> (request), and </a:t>
+            </a:r>
+            <a:r>
+              <a:rPr lang="en-US" sz="2400" b="1" dirty="0"/>
+              <a:t>last</a:t>
+            </a:r>
+            <a:r>
+              <a:rPr lang="en-US" sz="2400" dirty="0"/>
+              <a:t> on the way </a:t>
+            </a:r>
+            <a:r>
+              <a:rPr lang="en-US" sz="2400" i="1" dirty="0"/>
+              <a:t>out</a:t>
+            </a:r>
+            <a:r>
+              <a:rPr lang="en-US" sz="2400" dirty="0"/>
+              <a:t> (response).</a:t>
+            </a:r>
+          </a:p>
+          <a:p>
+            <a:r>
+              <a:rPr lang="en-US" sz="2400" dirty="0"/>
+              <a:t>This is because </a:t>
+            </a:r>
+            <a:r>
+              <a:rPr lang="en-US" sz="2400" dirty="0" err="1"/>
+              <a:t>FastAPI</a:t>
+            </a:r>
+            <a:r>
+              <a:rPr lang="en-US" sz="2400" dirty="0"/>
+              <a:t> builds the middleware chain </a:t>
+            </a:r>
+            <a:r>
+              <a:rPr lang="en-US" sz="2400" b="1" dirty="0"/>
+              <a:t>in reverse declaration order</a:t>
+            </a:r>
+            <a:r>
+              <a:rPr lang="en-US" sz="2400" dirty="0"/>
+              <a:t> — each new </a:t>
+            </a:r>
+            <a:r>
+              <a:rPr lang="en-US" dirty="0"/>
+              <a:t>@app.middleware("http")</a:t>
+            </a:r>
+            <a:r>
+              <a:rPr lang="en-US" sz="2400" dirty="0"/>
+              <a:t> wraps around the previous stack.</a:t>
+            </a:r>
             <a:endParaRPr lang="en-IN" sz="2400" dirty="0"/>
           </a:p>
         </p:txBody>
       </p:sp>
+      <p:pic>
+        <p:nvPicPr>
+          <p:cNvPr id="4" name="Picture 3">
+            <a:extLst>
+              <a:ext uri="{FF2B5EF4-FFF2-40B4-BE49-F238E27FC236}">
+                <a16:creationId xmlns:a16="http://schemas.microsoft.com/office/drawing/2014/main" id="{51B211C8-2BF3-F3F5-4EAC-5CB0D85BFE57}"/>
+              </a:ext>
+            </a:extLst>
+          </p:cNvPr>
+          <p:cNvPicPr>
+            <a:picLocks noChangeAspect="1"/>
+          </p:cNvPicPr>
+          <p:nvPr/>
+        </p:nvPicPr>
+        <p:blipFill>
+          <a:blip r:embed="rId2"/>
+          <a:stretch>
+            <a:fillRect/>
+          </a:stretch>
+        </p:blipFill>
+        <p:spPr>
+          <a:xfrm>
+            <a:off x="2126782" y="1303125"/>
+            <a:ext cx="6472934" cy="2335356"/>
+          </a:xfrm>
+          <a:prstGeom prst="rect">
+            <a:avLst/>
+          </a:prstGeom>
+        </p:spPr>
+      </p:pic>
     </p:spTree>
     <p:extLst>
       <p:ext uri="{BB962C8B-B14F-4D97-AF65-F5344CB8AC3E}">
@@ -9905,7 +11232,7 @@
             </a:pPr>
             <a:r>
               <a:rPr lang="en-US" sz="2800" b="1" dirty="0"/>
-              <a:t>Core Modules</a:t>
+              <a:t>1. Core Modules</a:t>
             </a:r>
             <a:r>
               <a:rPr lang="en-US" sz="2800" dirty="0"/>
@@ -10186,41 +11513,36 @@
           <a:chExt cx="0" cy="0"/>
         </a:xfrm>
       </p:grpSpPr>
-      <p:sp>
-        <p:nvSpPr>
-          <p:cNvPr id="3" name="Content Placeholder 2">
+      <p:pic>
+        <p:nvPicPr>
+          <p:cNvPr id="4" name="Picture 3">
             <a:extLst>
               <a:ext uri="{FF2B5EF4-FFF2-40B4-BE49-F238E27FC236}">
-                <a16:creationId xmlns:a16="http://schemas.microsoft.com/office/drawing/2014/main" id="{E57543A8-D2CD-D88D-910D-AB7F1223C9D2}"/>
+                <a16:creationId xmlns:a16="http://schemas.microsoft.com/office/drawing/2014/main" id="{03EE35BF-0C44-6347-FE65-D08F0820B278}"/>
               </a:ext>
             </a:extLst>
           </p:cNvPr>
-          <p:cNvSpPr>
-            <a:spLocks noGrp="1"/>
-          </p:cNvSpPr>
-          <p:nvPr>
-            <p:ph idx="1"/>
-          </p:nvPr>
-        </p:nvSpPr>
+          <p:cNvPicPr>
+            <a:picLocks noChangeAspect="1"/>
+          </p:cNvPicPr>
+          <p:nvPr/>
+        </p:nvPicPr>
+        <p:blipFill>
+          <a:blip r:embed="rId2"/>
+          <a:stretch>
+            <a:fillRect/>
+          </a:stretch>
+        </p:blipFill>
         <p:spPr>
           <a:xfrm>
-            <a:off x="777240" y="696686"/>
-            <a:ext cx="10659110" cy="5480277"/>
+            <a:off x="1566218" y="163286"/>
+            <a:ext cx="8470411" cy="6305939"/>
           </a:xfrm>
+          <a:prstGeom prst="rect">
+            <a:avLst/>
+          </a:prstGeom>
         </p:spPr>
-        <p:txBody>
-          <a:bodyPr>
-            <a:normAutofit/>
-          </a:bodyPr>
-          <a:lstStyle/>
-          <a:p>
-            <a:pPr marL="0" indent="0">
-              <a:buNone/>
-            </a:pPr>
-            <a:endParaRPr lang="en-IN" sz="2400" dirty="0"/>
-          </a:p>
-        </p:txBody>
-      </p:sp>
+      </p:pic>
     </p:spTree>
     <p:extLst>
       <p:ext uri="{BB962C8B-B14F-4D97-AF65-F5344CB8AC3E}">
@@ -10288,7 +11610,109 @@
             <a:pPr marL="0" indent="0">
               <a:buNone/>
             </a:pPr>
-            <a:endParaRPr lang="en-IN" sz="2400" dirty="0"/>
+            <a:r>
+              <a:rPr lang="en-IN" sz="3200" b="1" dirty="0"/>
+              <a:t>Types of Middleware:</a:t>
+            </a:r>
+          </a:p>
+          <a:p>
+            <a:pPr marL="0" indent="0">
+              <a:buNone/>
+            </a:pPr>
+            <a:r>
+              <a:rPr lang="en-US" sz="2800" b="1" dirty="0"/>
+              <a:t>1. Application-Level Middleware (Custom Middleware)</a:t>
+            </a:r>
+          </a:p>
+          <a:p>
+            <a:r>
+              <a:rPr lang="en-US" sz="2800" b="1" dirty="0"/>
+              <a:t>Defined directly in your </a:t>
+            </a:r>
+            <a:r>
+              <a:rPr lang="en-US" sz="2800" b="1" dirty="0" err="1"/>
+              <a:t>FastAPI</a:t>
+            </a:r>
+            <a:r>
+              <a:rPr lang="en-US" sz="2800" b="1" dirty="0"/>
+              <a:t> app using </a:t>
+            </a:r>
+            <a:r>
+              <a:rPr lang="en-US" sz="2400" b="1" dirty="0"/>
+              <a:t>@app.middleware("http")</a:t>
+            </a:r>
+            <a:r>
+              <a:rPr lang="en-US" sz="2800" b="1" dirty="0"/>
+              <a:t>.</a:t>
+            </a:r>
+            <a:endParaRPr lang="en-US" sz="2800" dirty="0"/>
+          </a:p>
+          <a:p>
+            <a:r>
+              <a:rPr lang="en-US" sz="2800" dirty="0"/>
+              <a:t>These are </a:t>
+            </a:r>
+            <a:r>
+              <a:rPr lang="en-US" sz="2800" b="1" dirty="0"/>
+              <a:t>custom middleware</a:t>
+            </a:r>
+            <a:r>
+              <a:rPr lang="en-US" sz="2800" dirty="0"/>
+              <a:t> that you write for your own logic such as:</a:t>
+            </a:r>
+          </a:p>
+          <a:p>
+            <a:pPr lvl="1"/>
+            <a:r>
+              <a:rPr lang="en-US" sz="2800" dirty="0"/>
+              <a:t>Logging requests/responses</a:t>
+            </a:r>
+          </a:p>
+          <a:p>
+            <a:pPr lvl="1"/>
+            <a:r>
+              <a:rPr lang="en-US" sz="2800" dirty="0"/>
+              <a:t>Modifying headers</a:t>
+            </a:r>
+          </a:p>
+          <a:p>
+            <a:pPr lvl="1"/>
+            <a:r>
+              <a:rPr lang="en-US" sz="2800" dirty="0"/>
+              <a:t>Handling custom authentication</a:t>
+            </a:r>
+          </a:p>
+          <a:p>
+            <a:pPr lvl="1"/>
+            <a:r>
+              <a:rPr lang="en-US" sz="2800" dirty="0"/>
+              <a:t>Measuring execution time</a:t>
+            </a:r>
+          </a:p>
+          <a:p>
+            <a:pPr marL="0" indent="0">
+              <a:buNone/>
+            </a:pPr>
+            <a:endParaRPr lang="en-US" sz="2800" b="1" dirty="0"/>
+          </a:p>
+          <a:p>
+            <a:pPr marL="0" indent="0">
+              <a:buNone/>
+            </a:pPr>
+            <a:r>
+              <a:rPr lang="en-US" sz="2800" b="1" dirty="0"/>
+              <a:t>Example: </a:t>
+            </a:r>
+            <a:r>
+              <a:rPr lang="en-US" sz="2800" dirty="0"/>
+              <a:t>Logging Request/Response</a:t>
+            </a:r>
+          </a:p>
+          <a:p>
+            <a:pPr marL="0" indent="0">
+              <a:buNone/>
+            </a:pPr>
+            <a:endParaRPr lang="en-IN" sz="2800" dirty="0"/>
           </a:p>
         </p:txBody>
       </p:sp>
@@ -10306,6 +11730,110 @@
 </file>
 
 <file path=ppt/slides/slide32.xml><?xml version="1.0" encoding="utf-8"?>
+<p:sld xmlns:a="http://schemas.openxmlformats.org/drawingml/2006/main" xmlns:r="http://schemas.openxmlformats.org/officeDocument/2006/relationships" xmlns:p="http://schemas.openxmlformats.org/presentationml/2006/main">
+  <p:cSld>
+    <p:spTree>
+      <p:nvGrpSpPr>
+        <p:cNvPr id="1" name="">
+          <a:extLst>
+            <a:ext uri="{FF2B5EF4-FFF2-40B4-BE49-F238E27FC236}">
+              <a16:creationId xmlns:a16="http://schemas.microsoft.com/office/drawing/2014/main" id="{99E149D8-93FE-6D87-12AC-B420468BAE6E}"/>
+            </a:ext>
+          </a:extLst>
+        </p:cNvPr>
+        <p:cNvGrpSpPr/>
+        <p:nvPr/>
+      </p:nvGrpSpPr>
+      <p:grpSpPr>
+        <a:xfrm>
+          <a:off x="0" y="0"/>
+          <a:ext cx="0" cy="0"/>
+          <a:chOff x="0" y="0"/>
+          <a:chExt cx="0" cy="0"/>
+        </a:xfrm>
+      </p:grpSpPr>
+      <p:sp>
+        <p:nvSpPr>
+          <p:cNvPr id="3" name="Content Placeholder 2">
+            <a:extLst>
+              <a:ext uri="{FF2B5EF4-FFF2-40B4-BE49-F238E27FC236}">
+                <a16:creationId xmlns:a16="http://schemas.microsoft.com/office/drawing/2014/main" id="{AB66216B-06F6-82F1-5605-A4216249DAB7}"/>
+              </a:ext>
+            </a:extLst>
+          </p:cNvPr>
+          <p:cNvSpPr>
+            <a:spLocks noGrp="1"/>
+          </p:cNvSpPr>
+          <p:nvPr>
+            <p:ph idx="1"/>
+          </p:nvPr>
+        </p:nvSpPr>
+        <p:spPr>
+          <a:xfrm>
+            <a:off x="777240" y="696686"/>
+            <a:ext cx="10659110" cy="5480277"/>
+          </a:xfrm>
+        </p:spPr>
+        <p:txBody>
+          <a:bodyPr>
+            <a:normAutofit/>
+          </a:bodyPr>
+          <a:lstStyle/>
+          <a:p>
+            <a:pPr marL="0" indent="0">
+              <a:buNone/>
+            </a:pPr>
+            <a:r>
+              <a:rPr lang="en-IN" sz="2400" dirty="0"/>
+              <a:t>s</a:t>
+            </a:r>
+          </a:p>
+        </p:txBody>
+      </p:sp>
+      <p:pic>
+        <p:nvPicPr>
+          <p:cNvPr id="4" name="Picture 3">
+            <a:extLst>
+              <a:ext uri="{FF2B5EF4-FFF2-40B4-BE49-F238E27FC236}">
+                <a16:creationId xmlns:a16="http://schemas.microsoft.com/office/drawing/2014/main" id="{5A8BD139-D089-F0CB-A7C3-D1C0D5CE971A}"/>
+              </a:ext>
+            </a:extLst>
+          </p:cNvPr>
+          <p:cNvPicPr>
+            <a:picLocks noChangeAspect="1"/>
+          </p:cNvPicPr>
+          <p:nvPr/>
+        </p:nvPicPr>
+        <p:blipFill>
+          <a:blip r:embed="rId2"/>
+          <a:stretch>
+            <a:fillRect/>
+          </a:stretch>
+        </p:blipFill>
+        <p:spPr>
+          <a:xfrm>
+            <a:off x="0" y="53565"/>
+            <a:ext cx="12192000" cy="6750870"/>
+          </a:xfrm>
+          <a:prstGeom prst="rect">
+            <a:avLst/>
+          </a:prstGeom>
+        </p:spPr>
+      </p:pic>
+    </p:spTree>
+    <p:extLst>
+      <p:ext uri="{BB962C8B-B14F-4D97-AF65-F5344CB8AC3E}">
+        <p14:creationId xmlns:p14="http://schemas.microsoft.com/office/powerpoint/2010/main" val="4070054215"/>
+      </p:ext>
+    </p:extLst>
+  </p:cSld>
+  <p:clrMapOvr>
+    <a:masterClrMapping/>
+  </p:clrMapOvr>
+</p:sld>
+</file>
+
+<file path=ppt/slides/slide33.xml><?xml version="1.0" encoding="utf-8"?>
 <p:sld xmlns:a="http://schemas.openxmlformats.org/drawingml/2006/main" xmlns:r="http://schemas.openxmlformats.org/officeDocument/2006/relationships" xmlns:p="http://schemas.openxmlformats.org/presentationml/2006/main">
   <p:cSld>
     <p:spTree>
@@ -10359,6 +11887,333 @@
             <a:pPr marL="0" indent="0">
               <a:buNone/>
             </a:pPr>
+            <a:r>
+              <a:rPr lang="en-US" sz="2400" b="1" dirty="0"/>
+              <a:t>2. Third-Party or Built-in Middleware (Starlette Middleware)</a:t>
+            </a:r>
+          </a:p>
+          <a:p>
+            <a:r>
+              <a:rPr lang="en-US" sz="2400" dirty="0"/>
+              <a:t>These are </a:t>
+            </a:r>
+            <a:r>
+              <a:rPr lang="en-US" sz="2400" b="1" dirty="0"/>
+              <a:t>middleware classes</a:t>
+            </a:r>
+            <a:r>
+              <a:rPr lang="en-US" sz="2400" dirty="0"/>
+              <a:t> that come from Starlette (the framework under </a:t>
+            </a:r>
+            <a:r>
+              <a:rPr lang="en-US" sz="2400" dirty="0" err="1"/>
+              <a:t>FastAPI</a:t>
+            </a:r>
+            <a:r>
+              <a:rPr lang="en-US" sz="2400" dirty="0"/>
+              <a:t>) or third-party libraries.</a:t>
+            </a:r>
+          </a:p>
+          <a:p>
+            <a:r>
+              <a:rPr lang="en-US" sz="2400" dirty="0"/>
+              <a:t>They are added using </a:t>
+            </a:r>
+            <a:r>
+              <a:rPr lang="en-US" dirty="0" err="1"/>
+              <a:t>app.add_middleware</a:t>
+            </a:r>
+            <a:r>
+              <a:rPr lang="en-US" dirty="0"/>
+              <a:t>()</a:t>
+            </a:r>
+            <a:r>
+              <a:rPr lang="en-US" sz="2400" dirty="0"/>
+              <a:t>.</a:t>
+            </a:r>
+          </a:p>
+          <a:p>
+            <a:pPr marL="0" indent="0">
+              <a:buNone/>
+            </a:pPr>
+            <a:r>
+              <a:rPr lang="en-US" sz="2400" b="1" dirty="0"/>
+              <a:t>Example:</a:t>
+            </a:r>
+          </a:p>
+        </p:txBody>
+      </p:sp>
+      <p:pic>
+        <p:nvPicPr>
+          <p:cNvPr id="4" name="Picture 3">
+            <a:extLst>
+              <a:ext uri="{FF2B5EF4-FFF2-40B4-BE49-F238E27FC236}">
+                <a16:creationId xmlns:a16="http://schemas.microsoft.com/office/drawing/2014/main" id="{D873B4A7-D299-DCCD-7F79-2A64AF17F7E0}"/>
+              </a:ext>
+            </a:extLst>
+          </p:cNvPr>
+          <p:cNvPicPr>
+            <a:picLocks noChangeAspect="1"/>
+          </p:cNvPicPr>
+          <p:nvPr/>
+        </p:nvPicPr>
+        <p:blipFill>
+          <a:blip r:embed="rId2"/>
+          <a:stretch>
+            <a:fillRect/>
+          </a:stretch>
+        </p:blipFill>
+        <p:spPr>
+          <a:xfrm>
+            <a:off x="2567467" y="2648533"/>
+            <a:ext cx="6489448" cy="3950099"/>
+          </a:xfrm>
+          <a:prstGeom prst="rect">
+            <a:avLst/>
+          </a:prstGeom>
+        </p:spPr>
+      </p:pic>
+    </p:spTree>
+    <p:extLst>
+      <p:ext uri="{BB962C8B-B14F-4D97-AF65-F5344CB8AC3E}">
+        <p14:creationId xmlns:p14="http://schemas.microsoft.com/office/powerpoint/2010/main" val="2406591720"/>
+      </p:ext>
+    </p:extLst>
+  </p:cSld>
+  <p:clrMapOvr>
+    <a:masterClrMapping/>
+  </p:clrMapOvr>
+</p:sld>
+</file>
+
+<file path=ppt/slides/slide34.xml><?xml version="1.0" encoding="utf-8"?>
+<p:sld xmlns:a="http://schemas.openxmlformats.org/drawingml/2006/main" xmlns:r="http://schemas.openxmlformats.org/officeDocument/2006/relationships" xmlns:p="http://schemas.openxmlformats.org/presentationml/2006/main">
+  <p:cSld>
+    <p:spTree>
+      <p:nvGrpSpPr>
+        <p:cNvPr id="1" name="">
+          <a:extLst>
+            <a:ext uri="{FF2B5EF4-FFF2-40B4-BE49-F238E27FC236}">
+              <a16:creationId xmlns:a16="http://schemas.microsoft.com/office/drawing/2014/main" id="{953C3EE3-8751-653F-46A1-4E598983D6D7}"/>
+            </a:ext>
+          </a:extLst>
+        </p:cNvPr>
+        <p:cNvGrpSpPr/>
+        <p:nvPr/>
+      </p:nvGrpSpPr>
+      <p:grpSpPr>
+        <a:xfrm>
+          <a:off x="0" y="0"/>
+          <a:ext cx="0" cy="0"/>
+          <a:chOff x="0" y="0"/>
+          <a:chExt cx="0" cy="0"/>
+        </a:xfrm>
+      </p:grpSpPr>
+      <p:sp>
+        <p:nvSpPr>
+          <p:cNvPr id="3" name="Content Placeholder 2">
+            <a:extLst>
+              <a:ext uri="{FF2B5EF4-FFF2-40B4-BE49-F238E27FC236}">
+                <a16:creationId xmlns:a16="http://schemas.microsoft.com/office/drawing/2014/main" id="{93D4FA4F-FF49-9381-9088-14702BE90525}"/>
+              </a:ext>
+            </a:extLst>
+          </p:cNvPr>
+          <p:cNvSpPr>
+            <a:spLocks noGrp="1"/>
+          </p:cNvSpPr>
+          <p:nvPr>
+            <p:ph idx="1"/>
+          </p:nvPr>
+        </p:nvSpPr>
+        <p:spPr>
+          <a:xfrm>
+            <a:off x="777240" y="696686"/>
+            <a:ext cx="10659110" cy="5480277"/>
+          </a:xfrm>
+        </p:spPr>
+        <p:txBody>
+          <a:bodyPr>
+            <a:normAutofit/>
+          </a:bodyPr>
+          <a:lstStyle/>
+          <a:p>
+            <a:pPr marL="0" indent="0">
+              <a:buNone/>
+            </a:pPr>
+            <a:r>
+              <a:rPr lang="en-US" sz="3200" b="1" dirty="0">
+                <a:solidFill>
+                  <a:srgbClr val="002060"/>
+                </a:solidFill>
+              </a:rPr>
+              <a:t>Dependency Injection</a:t>
+            </a:r>
+          </a:p>
+          <a:p>
+            <a:r>
+              <a:rPr lang="en-US" sz="2800" b="1" dirty="0"/>
+              <a:t>Dependency Injection (DI)</a:t>
+            </a:r>
+            <a:r>
+              <a:rPr lang="en-US" sz="2800" dirty="0"/>
+              <a:t> is a software design pattern that allows you to </a:t>
+            </a:r>
+            <a:r>
+              <a:rPr lang="en-US" sz="2800" b="1" dirty="0">
+                <a:solidFill>
+                  <a:srgbClr val="C00000"/>
+                </a:solidFill>
+              </a:rPr>
+              <a:t>inject external components or reusable logic</a:t>
+            </a:r>
+            <a:r>
+              <a:rPr lang="en-US" sz="2800" dirty="0">
+                <a:solidFill>
+                  <a:srgbClr val="C00000"/>
+                </a:solidFill>
+              </a:rPr>
+              <a:t> </a:t>
+            </a:r>
+            <a:r>
+              <a:rPr lang="en-US" sz="2800" dirty="0"/>
+              <a:t>into your </a:t>
+            </a:r>
+            <a:r>
+              <a:rPr lang="en-US" sz="2800" b="1" dirty="0"/>
+              <a:t>path operations </a:t>
+            </a:r>
+            <a:r>
+              <a:rPr lang="en-US" sz="2800" dirty="0"/>
+              <a:t>(endpoints), instead of hardcoding them inside every function.</a:t>
+            </a:r>
+          </a:p>
+          <a:p>
+            <a:r>
+              <a:rPr lang="en-US" sz="2800" dirty="0"/>
+              <a:t>In </a:t>
+            </a:r>
+            <a:r>
+              <a:rPr lang="en-US" sz="2800" dirty="0" err="1"/>
+              <a:t>FastAPI</a:t>
+            </a:r>
+            <a:r>
+              <a:rPr lang="en-US" sz="2800" dirty="0"/>
+              <a:t>:</a:t>
+            </a:r>
+          </a:p>
+          <a:p>
+            <a:pPr lvl="1"/>
+            <a:r>
+              <a:rPr lang="en-US" sz="2800" dirty="0"/>
+              <a:t>A </a:t>
+            </a:r>
+            <a:r>
+              <a:rPr lang="en-US" sz="2800" b="1" dirty="0"/>
+              <a:t>dependency</a:t>
+            </a:r>
+            <a:r>
+              <a:rPr lang="en-US" sz="2800" dirty="0"/>
+              <a:t> </a:t>
+            </a:r>
+            <a:r>
+              <a:rPr lang="en-US" sz="2800" b="1" dirty="0">
+                <a:solidFill>
+                  <a:srgbClr val="C00000"/>
+                </a:solidFill>
+              </a:rPr>
+              <a:t>is just a function </a:t>
+            </a:r>
+            <a:r>
+              <a:rPr lang="en-US" sz="2800" dirty="0"/>
+              <a:t>(or class) that </a:t>
+            </a:r>
+            <a:r>
+              <a:rPr lang="en-US" sz="2800" dirty="0" err="1"/>
+              <a:t>FastAPI</a:t>
+            </a:r>
+            <a:r>
+              <a:rPr lang="en-US" sz="2800" dirty="0"/>
+              <a:t> </a:t>
+            </a:r>
+            <a:r>
+              <a:rPr lang="en-US" sz="2800" b="1" dirty="0"/>
+              <a:t>calls for you automatically.</a:t>
+            </a:r>
+          </a:p>
+          <a:p>
+            <a:pPr lvl="1"/>
+            <a:r>
+              <a:rPr lang="en-US" sz="2800" dirty="0"/>
+              <a:t>You can </a:t>
+            </a:r>
+            <a:r>
+              <a:rPr lang="en-US" sz="2800" b="1" dirty="0"/>
+              <a:t>reuse</a:t>
+            </a:r>
+            <a:r>
+              <a:rPr lang="en-US" sz="2800" dirty="0"/>
+              <a:t> dependencies across routes.</a:t>
+            </a:r>
+          </a:p>
+          <a:p>
+            <a:pPr lvl="1"/>
+            <a:r>
+              <a:rPr lang="en-US" sz="2800" dirty="0"/>
+              <a:t>They can perform </a:t>
+            </a:r>
+            <a:r>
+              <a:rPr lang="en-US" sz="2800" b="1" dirty="0"/>
+              <a:t>common logic</a:t>
+            </a:r>
+            <a:r>
+              <a:rPr lang="en-US" sz="2800" dirty="0"/>
+              <a:t> (e.g., </a:t>
+            </a:r>
+            <a:r>
+              <a:rPr lang="en-US" sz="2800" b="1" dirty="0"/>
+              <a:t>database</a:t>
+            </a:r>
+            <a:r>
+              <a:rPr lang="en-US" sz="2800" dirty="0"/>
+              <a:t> </a:t>
+            </a:r>
+            <a:r>
+              <a:rPr lang="en-US" sz="2800" b="1" dirty="0"/>
+              <a:t>connection</a:t>
+            </a:r>
+            <a:r>
+              <a:rPr lang="en-US" sz="2800" dirty="0"/>
+              <a:t>, </a:t>
+            </a:r>
+            <a:r>
+              <a:rPr lang="en-US" sz="2800" b="1" dirty="0"/>
+              <a:t>auth</a:t>
+            </a:r>
+            <a:r>
+              <a:rPr lang="en-US" sz="2800" dirty="0"/>
+              <a:t>, </a:t>
+            </a:r>
+            <a:r>
+              <a:rPr lang="en-US" sz="2800" b="1" dirty="0"/>
+              <a:t>config</a:t>
+            </a:r>
+            <a:r>
+              <a:rPr lang="en-US" sz="2800" dirty="0"/>
+              <a:t>, </a:t>
+            </a:r>
+            <a:r>
+              <a:rPr lang="en-US" sz="2800" b="1" dirty="0"/>
+              <a:t>validation</a:t>
+            </a:r>
+            <a:r>
+              <a:rPr lang="en-US" sz="2800" dirty="0"/>
+              <a:t>, etc.)</a:t>
+            </a:r>
+          </a:p>
+          <a:p>
+            <a:pPr marL="0" indent="0">
+              <a:buNone/>
+            </a:pPr>
             <a:endParaRPr lang="en-IN" sz="2400" dirty="0"/>
           </a:p>
         </p:txBody>
@@ -10366,7 +12221,792 @@
     </p:spTree>
     <p:extLst>
       <p:ext uri="{BB962C8B-B14F-4D97-AF65-F5344CB8AC3E}">
-        <p14:creationId xmlns:p14="http://schemas.microsoft.com/office/powerpoint/2010/main" val="2406591720"/>
+        <p14:creationId xmlns:p14="http://schemas.microsoft.com/office/powerpoint/2010/main" val="216335680"/>
+      </p:ext>
+    </p:extLst>
+  </p:cSld>
+  <p:clrMapOvr>
+    <a:masterClrMapping/>
+  </p:clrMapOvr>
+</p:sld>
+</file>
+
+<file path=ppt/slides/slide35.xml><?xml version="1.0" encoding="utf-8"?>
+<p:sld xmlns:a="http://schemas.openxmlformats.org/drawingml/2006/main" xmlns:r="http://schemas.openxmlformats.org/officeDocument/2006/relationships" xmlns:p="http://schemas.openxmlformats.org/presentationml/2006/main">
+  <p:cSld>
+    <p:spTree>
+      <p:nvGrpSpPr>
+        <p:cNvPr id="1" name="">
+          <a:extLst>
+            <a:ext uri="{FF2B5EF4-FFF2-40B4-BE49-F238E27FC236}">
+              <a16:creationId xmlns:a16="http://schemas.microsoft.com/office/drawing/2014/main" id="{2DB42F2D-6DAB-9D32-6BE9-8BBFCE9AC039}"/>
+            </a:ext>
+          </a:extLst>
+        </p:cNvPr>
+        <p:cNvGrpSpPr/>
+        <p:nvPr/>
+      </p:nvGrpSpPr>
+      <p:grpSpPr>
+        <a:xfrm>
+          <a:off x="0" y="0"/>
+          <a:ext cx="0" cy="0"/>
+          <a:chOff x="0" y="0"/>
+          <a:chExt cx="0" cy="0"/>
+        </a:xfrm>
+      </p:grpSpPr>
+      <p:sp>
+        <p:nvSpPr>
+          <p:cNvPr id="3" name="Content Placeholder 2">
+            <a:extLst>
+              <a:ext uri="{FF2B5EF4-FFF2-40B4-BE49-F238E27FC236}">
+                <a16:creationId xmlns:a16="http://schemas.microsoft.com/office/drawing/2014/main" id="{BDCB39C3-1BA5-2004-69AF-496300D67748}"/>
+              </a:ext>
+            </a:extLst>
+          </p:cNvPr>
+          <p:cNvSpPr>
+            <a:spLocks noGrp="1"/>
+          </p:cNvSpPr>
+          <p:nvPr>
+            <p:ph idx="1"/>
+          </p:nvPr>
+        </p:nvSpPr>
+        <p:spPr>
+          <a:xfrm>
+            <a:off x="777240" y="696686"/>
+            <a:ext cx="10659110" cy="5480277"/>
+          </a:xfrm>
+        </p:spPr>
+        <p:txBody>
+          <a:bodyPr>
+            <a:normAutofit/>
+          </a:bodyPr>
+          <a:lstStyle/>
+          <a:p>
+            <a:pPr marL="0" indent="0">
+              <a:buNone/>
+            </a:pPr>
+            <a:r>
+              <a:rPr lang="en-IN" sz="3200" b="1" dirty="0"/>
+              <a:t>Example:</a:t>
+            </a:r>
+          </a:p>
+          <a:p>
+            <a:pPr marL="0" indent="0">
+              <a:buNone/>
+            </a:pPr>
+            <a:endParaRPr lang="en-IN" sz="3200" b="1" dirty="0"/>
+          </a:p>
+          <a:p>
+            <a:pPr marL="0" indent="0">
+              <a:buNone/>
+            </a:pPr>
+            <a:endParaRPr lang="en-IN" sz="3200" b="1" dirty="0"/>
+          </a:p>
+        </p:txBody>
+      </p:sp>
+      <p:pic>
+        <p:nvPicPr>
+          <p:cNvPr id="4" name="Picture 3">
+            <a:extLst>
+              <a:ext uri="{FF2B5EF4-FFF2-40B4-BE49-F238E27FC236}">
+                <a16:creationId xmlns:a16="http://schemas.microsoft.com/office/drawing/2014/main" id="{56264168-4FCB-0C5B-6E12-FA09694F944F}"/>
+              </a:ext>
+            </a:extLst>
+          </p:cNvPr>
+          <p:cNvPicPr>
+            <a:picLocks noChangeAspect="1"/>
+          </p:cNvPicPr>
+          <p:nvPr/>
+        </p:nvPicPr>
+        <p:blipFill>
+          <a:blip r:embed="rId2"/>
+          <a:srcRect r="1518"/>
+          <a:stretch>
+            <a:fillRect/>
+          </a:stretch>
+        </p:blipFill>
+        <p:spPr>
+          <a:xfrm>
+            <a:off x="388620" y="1688566"/>
+            <a:ext cx="11436350" cy="3253239"/>
+          </a:xfrm>
+          <a:prstGeom prst="rect">
+            <a:avLst/>
+          </a:prstGeom>
+        </p:spPr>
+      </p:pic>
+    </p:spTree>
+    <p:extLst>
+      <p:ext uri="{BB962C8B-B14F-4D97-AF65-F5344CB8AC3E}">
+        <p14:creationId xmlns:p14="http://schemas.microsoft.com/office/powerpoint/2010/main" val="1678586277"/>
+      </p:ext>
+    </p:extLst>
+  </p:cSld>
+  <p:clrMapOvr>
+    <a:masterClrMapping/>
+  </p:clrMapOvr>
+</p:sld>
+</file>
+
+<file path=ppt/slides/slide36.xml><?xml version="1.0" encoding="utf-8"?>
+<p:sld xmlns:a="http://schemas.openxmlformats.org/drawingml/2006/main" xmlns:r="http://schemas.openxmlformats.org/officeDocument/2006/relationships" xmlns:p="http://schemas.openxmlformats.org/presentationml/2006/main">
+  <p:cSld>
+    <p:spTree>
+      <p:nvGrpSpPr>
+        <p:cNvPr id="1" name="">
+          <a:extLst>
+            <a:ext uri="{FF2B5EF4-FFF2-40B4-BE49-F238E27FC236}">
+              <a16:creationId xmlns:a16="http://schemas.microsoft.com/office/drawing/2014/main" id="{E218A30D-5962-4980-5636-207A910C7352}"/>
+            </a:ext>
+          </a:extLst>
+        </p:cNvPr>
+        <p:cNvGrpSpPr/>
+        <p:nvPr/>
+      </p:nvGrpSpPr>
+      <p:grpSpPr>
+        <a:xfrm>
+          <a:off x="0" y="0"/>
+          <a:ext cx="0" cy="0"/>
+          <a:chOff x="0" y="0"/>
+          <a:chExt cx="0" cy="0"/>
+        </a:xfrm>
+      </p:grpSpPr>
+      <p:sp>
+        <p:nvSpPr>
+          <p:cNvPr id="3" name="Content Placeholder 2">
+            <a:extLst>
+              <a:ext uri="{FF2B5EF4-FFF2-40B4-BE49-F238E27FC236}">
+                <a16:creationId xmlns:a16="http://schemas.microsoft.com/office/drawing/2014/main" id="{40DBE0BE-7C7C-8108-E793-38D4FF50C854}"/>
+              </a:ext>
+            </a:extLst>
+          </p:cNvPr>
+          <p:cNvSpPr>
+            <a:spLocks noGrp="1"/>
+          </p:cNvSpPr>
+          <p:nvPr>
+            <p:ph idx="1"/>
+          </p:nvPr>
+        </p:nvSpPr>
+        <p:spPr>
+          <a:xfrm>
+            <a:off x="777240" y="696686"/>
+            <a:ext cx="10659110" cy="5480277"/>
+          </a:xfrm>
+        </p:spPr>
+        <p:txBody>
+          <a:bodyPr>
+            <a:normAutofit lnSpcReduction="10000"/>
+          </a:bodyPr>
+          <a:lstStyle/>
+          <a:p>
+            <a:pPr marL="0" indent="0">
+              <a:buNone/>
+            </a:pPr>
+            <a:r>
+              <a:rPr lang="en-US" sz="2400" b="1" dirty="0"/>
+              <a:t>1. Depends(</a:t>
+            </a:r>
+            <a:r>
+              <a:rPr lang="en-US" sz="2400" b="1" dirty="0" err="1"/>
+              <a:t>health_dependency</a:t>
+            </a:r>
+            <a:r>
+              <a:rPr lang="en-US" sz="2400" b="1" dirty="0"/>
+              <a:t>)</a:t>
+            </a:r>
+            <a:endParaRPr lang="en-US" sz="2800" b="1" dirty="0"/>
+          </a:p>
+          <a:p>
+            <a:r>
+              <a:rPr lang="en-US" dirty="0"/>
+              <a:t>Depends</a:t>
+            </a:r>
+            <a:r>
+              <a:rPr lang="en-US" sz="2400" dirty="0"/>
+              <a:t> is a </a:t>
+            </a:r>
+            <a:r>
+              <a:rPr lang="en-US" sz="2400" b="1" dirty="0" err="1"/>
+              <a:t>FastAPI</a:t>
+            </a:r>
+            <a:r>
+              <a:rPr lang="en-US" sz="2400" b="1" dirty="0"/>
+              <a:t> dependency injection mechanism</a:t>
+            </a:r>
+            <a:r>
+              <a:rPr lang="en-US" sz="2400" dirty="0"/>
+              <a:t>.</a:t>
+            </a:r>
+          </a:p>
+          <a:p>
+            <a:r>
+              <a:rPr lang="en-US" sz="2400" dirty="0"/>
+              <a:t>It tells </a:t>
+            </a:r>
+            <a:r>
+              <a:rPr lang="en-US" sz="2400" dirty="0" err="1"/>
+              <a:t>FastAPI</a:t>
+            </a:r>
+            <a:r>
+              <a:rPr lang="en-US" sz="2400" dirty="0"/>
+              <a:t>:</a:t>
+            </a:r>
+            <a:br>
+              <a:rPr lang="en-US" sz="2400" dirty="0"/>
+            </a:br>
+            <a:r>
+              <a:rPr lang="en-US" sz="2400" dirty="0"/>
+              <a:t>“</a:t>
+            </a:r>
+            <a:r>
+              <a:rPr lang="en-US" sz="2400" b="1" dirty="0"/>
+              <a:t>Before running </a:t>
+            </a:r>
+            <a:r>
+              <a:rPr lang="en-US" sz="2400" dirty="0"/>
+              <a:t>the </a:t>
+            </a:r>
+            <a:r>
+              <a:rPr lang="en-US" sz="2400" b="1" dirty="0" err="1">
+                <a:solidFill>
+                  <a:srgbClr val="C00000"/>
+                </a:solidFill>
+              </a:rPr>
+              <a:t>health_check</a:t>
+            </a:r>
+            <a:r>
+              <a:rPr lang="en-US" sz="2400" b="1" dirty="0">
+                <a:solidFill>
+                  <a:srgbClr val="C00000"/>
+                </a:solidFill>
+              </a:rPr>
+              <a:t>()</a:t>
+            </a:r>
+            <a:r>
+              <a:rPr lang="en-US" sz="2800" b="1" dirty="0">
+                <a:solidFill>
+                  <a:srgbClr val="C00000"/>
+                </a:solidFill>
+              </a:rPr>
+              <a:t> </a:t>
+            </a:r>
+            <a:r>
+              <a:rPr lang="en-US" sz="2400" dirty="0"/>
+              <a:t>endpoint, call </a:t>
+            </a:r>
+            <a:r>
+              <a:rPr lang="en-US" sz="2400" b="1" dirty="0" err="1">
+                <a:solidFill>
+                  <a:srgbClr val="C00000"/>
+                </a:solidFill>
+              </a:rPr>
+              <a:t>health_dependency</a:t>
+            </a:r>
+            <a:r>
+              <a:rPr lang="en-US" sz="2400" b="1" dirty="0">
+                <a:solidFill>
+                  <a:srgbClr val="C00000"/>
+                </a:solidFill>
+              </a:rPr>
+              <a:t>()</a:t>
+            </a:r>
+            <a:r>
+              <a:rPr lang="en-US" sz="2800" b="1" dirty="0">
+                <a:solidFill>
+                  <a:srgbClr val="C00000"/>
+                </a:solidFill>
+              </a:rPr>
+              <a:t> </a:t>
+            </a:r>
+            <a:r>
+              <a:rPr lang="en-US" sz="2400" dirty="0"/>
+              <a:t>and pass its return value as the argument </a:t>
+            </a:r>
+            <a:r>
+              <a:rPr lang="en-US" sz="2400" b="1" dirty="0">
+                <a:solidFill>
+                  <a:srgbClr val="C00000"/>
+                </a:solidFill>
+              </a:rPr>
+              <a:t>commons</a:t>
+            </a:r>
+            <a:r>
+              <a:rPr lang="en-US" sz="2400" dirty="0"/>
+              <a:t>.”</a:t>
+            </a:r>
+          </a:p>
+          <a:p>
+            <a:pPr marL="0" indent="0">
+              <a:buNone/>
+            </a:pPr>
+            <a:endParaRPr lang="en-US" b="1" dirty="0"/>
+          </a:p>
+          <a:p>
+            <a:pPr marL="0" indent="0">
+              <a:buNone/>
+            </a:pPr>
+            <a:r>
+              <a:rPr lang="en-US" sz="2400" b="1" dirty="0"/>
+              <a:t>2. How </a:t>
+            </a:r>
+            <a:r>
+              <a:rPr lang="en-US" sz="2400" b="1" dirty="0" err="1"/>
+              <a:t>FastAPI</a:t>
+            </a:r>
+            <a:r>
+              <a:rPr lang="en-US" sz="2400" b="1" dirty="0"/>
+              <a:t> passes parameters (name, age)</a:t>
+            </a:r>
+          </a:p>
+          <a:p>
+            <a:r>
+              <a:rPr lang="en-US" sz="2400" dirty="0" err="1"/>
+              <a:t>FastAPI</a:t>
+            </a:r>
+            <a:r>
+              <a:rPr lang="en-US" sz="2400" dirty="0"/>
+              <a:t> </a:t>
+            </a:r>
+            <a:r>
+              <a:rPr lang="en-US" sz="2400" b="1" dirty="0">
+                <a:solidFill>
+                  <a:srgbClr val="C00000"/>
+                </a:solidFill>
+              </a:rPr>
+              <a:t>automatically</a:t>
+            </a:r>
+            <a:r>
+              <a:rPr lang="en-US" sz="2400" dirty="0"/>
+              <a:t> looks for parameters of the dependency function (name and age) in the </a:t>
+            </a:r>
+            <a:r>
+              <a:rPr lang="en-US" sz="2400" b="1" dirty="0"/>
+              <a:t>HTTP request</a:t>
+            </a:r>
+            <a:r>
+              <a:rPr lang="en-US" sz="2400" dirty="0"/>
+              <a:t>:</a:t>
+            </a:r>
+          </a:p>
+          <a:p>
+            <a:pPr lvl="1"/>
+            <a:r>
+              <a:rPr lang="en-US" sz="2000" b="1" dirty="0"/>
+              <a:t>Query parameters</a:t>
+            </a:r>
+            <a:r>
+              <a:rPr lang="en-US" sz="2000" dirty="0"/>
+              <a:t> (e.g., /</a:t>
+            </a:r>
+            <a:r>
+              <a:rPr lang="en-US" sz="2000" dirty="0" err="1"/>
+              <a:t>health?name</a:t>
+            </a:r>
+            <a:r>
+              <a:rPr lang="en-US" sz="2000" dirty="0"/>
+              <a:t>=</a:t>
+            </a:r>
+            <a:r>
+              <a:rPr lang="en-US" sz="2000" dirty="0" err="1"/>
+              <a:t>Pramod&amp;age</a:t>
+            </a:r>
+            <a:r>
+              <a:rPr lang="en-US" sz="2000" dirty="0"/>
+              <a:t>=25)</a:t>
+            </a:r>
+          </a:p>
+          <a:p>
+            <a:pPr lvl="1"/>
+            <a:r>
+              <a:rPr lang="en-US" sz="2000" b="1" dirty="0"/>
+              <a:t>Form data</a:t>
+            </a:r>
+            <a:endParaRPr lang="en-US" sz="2000" dirty="0"/>
+          </a:p>
+          <a:p>
+            <a:pPr lvl="1"/>
+            <a:r>
+              <a:rPr lang="en-US" sz="2000" b="1" dirty="0"/>
+              <a:t>Headers</a:t>
+            </a:r>
+            <a:endParaRPr lang="en-US" sz="2000" dirty="0"/>
+          </a:p>
+          <a:p>
+            <a:pPr lvl="1"/>
+            <a:r>
+              <a:rPr lang="en-US" sz="2000" b="1" dirty="0"/>
+              <a:t>Path parameters</a:t>
+            </a:r>
+            <a:endParaRPr lang="en-US" sz="2000" dirty="0"/>
+          </a:p>
+          <a:p>
+            <a:r>
+              <a:rPr lang="en-US" sz="2400" dirty="0"/>
+              <a:t>If it finds them, it passes them in.</a:t>
+            </a:r>
+          </a:p>
+          <a:p>
+            <a:r>
+              <a:rPr lang="en-US" sz="2400" dirty="0"/>
+              <a:t>If not, it uses their </a:t>
+            </a:r>
+            <a:r>
+              <a:rPr lang="en-US" sz="2400" b="1" dirty="0"/>
+              <a:t>default values</a:t>
+            </a:r>
+            <a:r>
+              <a:rPr lang="en-US" sz="2400" dirty="0"/>
+              <a:t> (None here).</a:t>
+            </a:r>
+          </a:p>
+          <a:p>
+            <a:endParaRPr lang="en-US" sz="2400" dirty="0"/>
+          </a:p>
+          <a:p>
+            <a:pPr marL="0" indent="0">
+              <a:buNone/>
+            </a:pPr>
+            <a:endParaRPr lang="en-IN" sz="2400" dirty="0"/>
+          </a:p>
+        </p:txBody>
+      </p:sp>
+    </p:spTree>
+    <p:extLst>
+      <p:ext uri="{BB962C8B-B14F-4D97-AF65-F5344CB8AC3E}">
+        <p14:creationId xmlns:p14="http://schemas.microsoft.com/office/powerpoint/2010/main" val="3215175598"/>
+      </p:ext>
+    </p:extLst>
+  </p:cSld>
+  <p:clrMapOvr>
+    <a:masterClrMapping/>
+  </p:clrMapOvr>
+</p:sld>
+</file>
+
+<file path=ppt/slides/slide37.xml><?xml version="1.0" encoding="utf-8"?>
+<p:sld xmlns:a="http://schemas.openxmlformats.org/drawingml/2006/main" xmlns:r="http://schemas.openxmlformats.org/officeDocument/2006/relationships" xmlns:p="http://schemas.openxmlformats.org/presentationml/2006/main">
+  <p:cSld>
+    <p:spTree>
+      <p:nvGrpSpPr>
+        <p:cNvPr id="1" name="">
+          <a:extLst>
+            <a:ext uri="{FF2B5EF4-FFF2-40B4-BE49-F238E27FC236}">
+              <a16:creationId xmlns:a16="http://schemas.microsoft.com/office/drawing/2014/main" id="{7BFE210C-09CE-B6D0-8633-ECF10B5AE4BE}"/>
+            </a:ext>
+          </a:extLst>
+        </p:cNvPr>
+        <p:cNvGrpSpPr/>
+        <p:nvPr/>
+      </p:nvGrpSpPr>
+      <p:grpSpPr>
+        <a:xfrm>
+          <a:off x="0" y="0"/>
+          <a:ext cx="0" cy="0"/>
+          <a:chOff x="0" y="0"/>
+          <a:chExt cx="0" cy="0"/>
+        </a:xfrm>
+      </p:grpSpPr>
+      <p:sp>
+        <p:nvSpPr>
+          <p:cNvPr id="3" name="Content Placeholder 2">
+            <a:extLst>
+              <a:ext uri="{FF2B5EF4-FFF2-40B4-BE49-F238E27FC236}">
+                <a16:creationId xmlns:a16="http://schemas.microsoft.com/office/drawing/2014/main" id="{9C1827B3-07A6-EF3F-7D9B-FF00AEEB4D31}"/>
+              </a:ext>
+            </a:extLst>
+          </p:cNvPr>
+          <p:cNvSpPr>
+            <a:spLocks noGrp="1"/>
+          </p:cNvSpPr>
+          <p:nvPr>
+            <p:ph idx="1"/>
+          </p:nvPr>
+        </p:nvSpPr>
+        <p:spPr>
+          <a:xfrm>
+            <a:off x="777240" y="696686"/>
+            <a:ext cx="10659110" cy="5480277"/>
+          </a:xfrm>
+        </p:spPr>
+        <p:txBody>
+          <a:bodyPr>
+            <a:normAutofit/>
+          </a:bodyPr>
+          <a:lstStyle/>
+          <a:p>
+            <a:pPr marL="0" indent="0">
+              <a:buNone/>
+            </a:pPr>
+            <a:r>
+              <a:rPr lang="en-US" sz="2400" b="1" dirty="0"/>
+              <a:t>Example 2: Using Multiple Dependencies</a:t>
+            </a:r>
+            <a:endParaRPr lang="en-IN" sz="2400" b="1" dirty="0"/>
+          </a:p>
+        </p:txBody>
+      </p:sp>
+      <p:pic>
+        <p:nvPicPr>
+          <p:cNvPr id="6" name="Picture 5">
+            <a:extLst>
+              <a:ext uri="{FF2B5EF4-FFF2-40B4-BE49-F238E27FC236}">
+                <a16:creationId xmlns:a16="http://schemas.microsoft.com/office/drawing/2014/main" id="{150AA1F4-AA37-D412-E86C-942DFE6B658C}"/>
+              </a:ext>
+            </a:extLst>
+          </p:cNvPr>
+          <p:cNvPicPr>
+            <a:picLocks noChangeAspect="1"/>
+          </p:cNvPicPr>
+          <p:nvPr/>
+        </p:nvPicPr>
+        <p:blipFill>
+          <a:blip r:embed="rId2"/>
+          <a:stretch>
+            <a:fillRect/>
+          </a:stretch>
+        </p:blipFill>
+        <p:spPr>
+          <a:xfrm>
+            <a:off x="446314" y="1812695"/>
+            <a:ext cx="11299371" cy="3232610"/>
+          </a:xfrm>
+          <a:prstGeom prst="rect">
+            <a:avLst/>
+          </a:prstGeom>
+        </p:spPr>
+      </p:pic>
+    </p:spTree>
+    <p:extLst>
+      <p:ext uri="{BB962C8B-B14F-4D97-AF65-F5344CB8AC3E}">
+        <p14:creationId xmlns:p14="http://schemas.microsoft.com/office/powerpoint/2010/main" val="1863801318"/>
+      </p:ext>
+    </p:extLst>
+  </p:cSld>
+  <p:clrMapOvr>
+    <a:masterClrMapping/>
+  </p:clrMapOvr>
+</p:sld>
+</file>
+
+<file path=ppt/slides/slide38.xml><?xml version="1.0" encoding="utf-8"?>
+<p:sld xmlns:a="http://schemas.openxmlformats.org/drawingml/2006/main" xmlns:r="http://schemas.openxmlformats.org/officeDocument/2006/relationships" xmlns:p="http://schemas.openxmlformats.org/presentationml/2006/main">
+  <p:cSld>
+    <p:spTree>
+      <p:nvGrpSpPr>
+        <p:cNvPr id="1" name="">
+          <a:extLst>
+            <a:ext uri="{FF2B5EF4-FFF2-40B4-BE49-F238E27FC236}">
+              <a16:creationId xmlns:a16="http://schemas.microsoft.com/office/drawing/2014/main" id="{6D78761D-32EB-C81F-92C1-F0370BB4FE17}"/>
+            </a:ext>
+          </a:extLst>
+        </p:cNvPr>
+        <p:cNvGrpSpPr/>
+        <p:nvPr/>
+      </p:nvGrpSpPr>
+      <p:grpSpPr>
+        <a:xfrm>
+          <a:off x="0" y="0"/>
+          <a:ext cx="0" cy="0"/>
+          <a:chOff x="0" y="0"/>
+          <a:chExt cx="0" cy="0"/>
+        </a:xfrm>
+      </p:grpSpPr>
+      <p:sp>
+        <p:nvSpPr>
+          <p:cNvPr id="3" name="Content Placeholder 2">
+            <a:extLst>
+              <a:ext uri="{FF2B5EF4-FFF2-40B4-BE49-F238E27FC236}">
+                <a16:creationId xmlns:a16="http://schemas.microsoft.com/office/drawing/2014/main" id="{6E918AB6-1057-4A90-98A6-189364E9A4F4}"/>
+              </a:ext>
+            </a:extLst>
+          </p:cNvPr>
+          <p:cNvSpPr>
+            <a:spLocks noGrp="1"/>
+          </p:cNvSpPr>
+          <p:nvPr>
+            <p:ph idx="1"/>
+          </p:nvPr>
+        </p:nvSpPr>
+        <p:spPr>
+          <a:xfrm>
+            <a:off x="777240" y="696686"/>
+            <a:ext cx="10659110" cy="5480277"/>
+          </a:xfrm>
+        </p:spPr>
+        <p:txBody>
+          <a:bodyPr>
+            <a:normAutofit/>
+          </a:bodyPr>
+          <a:lstStyle/>
+          <a:p>
+            <a:pPr marL="0" indent="0">
+              <a:buNone/>
+            </a:pPr>
+            <a:r>
+              <a:rPr lang="en-IN" sz="2400" b="1" dirty="0"/>
+              <a:t>Endpoint:</a:t>
+            </a:r>
+          </a:p>
+        </p:txBody>
+      </p:sp>
+      <p:pic>
+        <p:nvPicPr>
+          <p:cNvPr id="4" name="Picture 3">
+            <a:extLst>
+              <a:ext uri="{FF2B5EF4-FFF2-40B4-BE49-F238E27FC236}">
+                <a16:creationId xmlns:a16="http://schemas.microsoft.com/office/drawing/2014/main" id="{A91444B6-7E8C-1280-AE79-4C8517B91DA5}"/>
+              </a:ext>
+            </a:extLst>
+          </p:cNvPr>
+          <p:cNvPicPr>
+            <a:picLocks noChangeAspect="1"/>
+          </p:cNvPicPr>
+          <p:nvPr/>
+        </p:nvPicPr>
+        <p:blipFill>
+          <a:blip r:embed="rId2"/>
+          <a:stretch>
+            <a:fillRect/>
+          </a:stretch>
+        </p:blipFill>
+        <p:spPr>
+          <a:xfrm>
+            <a:off x="1453143" y="1343285"/>
+            <a:ext cx="9285714" cy="4171429"/>
+          </a:xfrm>
+          <a:prstGeom prst="rect">
+            <a:avLst/>
+          </a:prstGeom>
+        </p:spPr>
+      </p:pic>
+    </p:spTree>
+    <p:extLst>
+      <p:ext uri="{BB962C8B-B14F-4D97-AF65-F5344CB8AC3E}">
+        <p14:creationId xmlns:p14="http://schemas.microsoft.com/office/powerpoint/2010/main" val="561616237"/>
+      </p:ext>
+    </p:extLst>
+  </p:cSld>
+  <p:clrMapOvr>
+    <a:masterClrMapping/>
+  </p:clrMapOvr>
+</p:sld>
+</file>
+
+<file path=ppt/slides/slide39.xml><?xml version="1.0" encoding="utf-8"?>
+<p:sld xmlns:a="http://schemas.openxmlformats.org/drawingml/2006/main" xmlns:r="http://schemas.openxmlformats.org/officeDocument/2006/relationships" xmlns:p="http://schemas.openxmlformats.org/presentationml/2006/main">
+  <p:cSld>
+    <p:spTree>
+      <p:nvGrpSpPr>
+        <p:cNvPr id="1" name="">
+          <a:extLst>
+            <a:ext uri="{FF2B5EF4-FFF2-40B4-BE49-F238E27FC236}">
+              <a16:creationId xmlns:a16="http://schemas.microsoft.com/office/drawing/2014/main" id="{F147A741-BD91-9E39-3977-7D05B2B37E69}"/>
+            </a:ext>
+          </a:extLst>
+        </p:cNvPr>
+        <p:cNvGrpSpPr/>
+        <p:nvPr/>
+      </p:nvGrpSpPr>
+      <p:grpSpPr>
+        <a:xfrm>
+          <a:off x="0" y="0"/>
+          <a:ext cx="0" cy="0"/>
+          <a:chOff x="0" y="0"/>
+          <a:chExt cx="0" cy="0"/>
+        </a:xfrm>
+      </p:grpSpPr>
+      <p:sp>
+        <p:nvSpPr>
+          <p:cNvPr id="3" name="Content Placeholder 2">
+            <a:extLst>
+              <a:ext uri="{FF2B5EF4-FFF2-40B4-BE49-F238E27FC236}">
+                <a16:creationId xmlns:a16="http://schemas.microsoft.com/office/drawing/2014/main" id="{35C85EA4-B4B5-CF44-7889-0C522E9BF5A5}"/>
+              </a:ext>
+            </a:extLst>
+          </p:cNvPr>
+          <p:cNvSpPr>
+            <a:spLocks noGrp="1"/>
+          </p:cNvSpPr>
+          <p:nvPr>
+            <p:ph idx="1"/>
+          </p:nvPr>
+        </p:nvSpPr>
+        <p:spPr>
+          <a:xfrm>
+            <a:off x="777240" y="696686"/>
+            <a:ext cx="10659110" cy="5480277"/>
+          </a:xfrm>
+        </p:spPr>
+        <p:txBody>
+          <a:bodyPr>
+            <a:normAutofit/>
+          </a:bodyPr>
+          <a:lstStyle/>
+          <a:p>
+            <a:pPr marL="0" indent="0">
+              <a:buNone/>
+            </a:pPr>
+            <a:r>
+              <a:rPr lang="en-US" sz="2400" b="1" dirty="0"/>
+              <a:t>Example 3: Class as a Dependency</a:t>
+            </a:r>
+          </a:p>
+          <a:p>
+            <a:r>
+              <a:rPr lang="en-US" sz="2400" dirty="0"/>
+              <a:t>We can also make dependencies </a:t>
+            </a:r>
+            <a:r>
+              <a:rPr lang="en-US" sz="2400" b="1" dirty="0"/>
+              <a:t>classes</a:t>
+            </a:r>
+            <a:r>
+              <a:rPr lang="en-US" sz="2400" dirty="0"/>
+              <a:t> — very useful for stateful or structured logic.</a:t>
+            </a:r>
+          </a:p>
+          <a:p>
+            <a:pPr marL="0" indent="0">
+              <a:buNone/>
+            </a:pPr>
+            <a:endParaRPr lang="en-IN" sz="2400" dirty="0"/>
+          </a:p>
+        </p:txBody>
+      </p:sp>
+      <p:pic>
+        <p:nvPicPr>
+          <p:cNvPr id="4" name="Picture 3">
+            <a:extLst>
+              <a:ext uri="{FF2B5EF4-FFF2-40B4-BE49-F238E27FC236}">
+                <a16:creationId xmlns:a16="http://schemas.microsoft.com/office/drawing/2014/main" id="{0FADDEBE-66B0-6531-2652-F2AD0149752F}"/>
+              </a:ext>
+            </a:extLst>
+          </p:cNvPr>
+          <p:cNvPicPr>
+            <a:picLocks noChangeAspect="1"/>
+          </p:cNvPicPr>
+          <p:nvPr/>
+        </p:nvPicPr>
+        <p:blipFill>
+          <a:blip r:embed="rId2"/>
+          <a:stretch>
+            <a:fillRect/>
+          </a:stretch>
+        </p:blipFill>
+        <p:spPr>
+          <a:xfrm>
+            <a:off x="605064" y="2099582"/>
+            <a:ext cx="10831286" cy="4061732"/>
+          </a:xfrm>
+          <a:prstGeom prst="rect">
+            <a:avLst/>
+          </a:prstGeom>
+        </p:spPr>
+      </p:pic>
+    </p:spTree>
+    <p:extLst>
+      <p:ext uri="{BB962C8B-B14F-4D97-AF65-F5344CB8AC3E}">
+        <p14:creationId xmlns:p14="http://schemas.microsoft.com/office/powerpoint/2010/main" val="1234122165"/>
       </p:ext>
     </p:extLst>
   </p:cSld>
@@ -10518,6 +13158,406 @@
     <p:extLst>
       <p:ext uri="{BB962C8B-B14F-4D97-AF65-F5344CB8AC3E}">
         <p14:creationId xmlns:p14="http://schemas.microsoft.com/office/powerpoint/2010/main" val="1739931258"/>
+      </p:ext>
+    </p:extLst>
+  </p:cSld>
+  <p:clrMapOvr>
+    <a:masterClrMapping/>
+  </p:clrMapOvr>
+</p:sld>
+</file>
+
+<file path=ppt/slides/slide40.xml><?xml version="1.0" encoding="utf-8"?>
+<p:sld xmlns:a="http://schemas.openxmlformats.org/drawingml/2006/main" xmlns:r="http://schemas.openxmlformats.org/officeDocument/2006/relationships" xmlns:p="http://schemas.openxmlformats.org/presentationml/2006/main">
+  <p:cSld>
+    <p:spTree>
+      <p:nvGrpSpPr>
+        <p:cNvPr id="1" name="">
+          <a:extLst>
+            <a:ext uri="{FF2B5EF4-FFF2-40B4-BE49-F238E27FC236}">
+              <a16:creationId xmlns:a16="http://schemas.microsoft.com/office/drawing/2014/main" id="{9A767CAB-AE42-5948-CB75-F2B68B9CDD71}"/>
+            </a:ext>
+          </a:extLst>
+        </p:cNvPr>
+        <p:cNvGrpSpPr/>
+        <p:nvPr/>
+      </p:nvGrpSpPr>
+      <p:grpSpPr>
+        <a:xfrm>
+          <a:off x="0" y="0"/>
+          <a:ext cx="0" cy="0"/>
+          <a:chOff x="0" y="0"/>
+          <a:chExt cx="0" cy="0"/>
+        </a:xfrm>
+      </p:grpSpPr>
+      <p:sp>
+        <p:nvSpPr>
+          <p:cNvPr id="3" name="Content Placeholder 2">
+            <a:extLst>
+              <a:ext uri="{FF2B5EF4-FFF2-40B4-BE49-F238E27FC236}">
+                <a16:creationId xmlns:a16="http://schemas.microsoft.com/office/drawing/2014/main" id="{82C59336-0695-7311-88FA-940BF6424B61}"/>
+              </a:ext>
+            </a:extLst>
+          </p:cNvPr>
+          <p:cNvSpPr>
+            <a:spLocks noGrp="1"/>
+          </p:cNvSpPr>
+          <p:nvPr>
+            <p:ph idx="1"/>
+          </p:nvPr>
+        </p:nvSpPr>
+        <p:spPr>
+          <a:xfrm>
+            <a:off x="766445" y="688861"/>
+            <a:ext cx="10659110" cy="5480277"/>
+          </a:xfrm>
+        </p:spPr>
+        <p:txBody>
+          <a:bodyPr>
+            <a:normAutofit/>
+          </a:bodyPr>
+          <a:lstStyle/>
+          <a:p>
+            <a:pPr marL="0" indent="0">
+              <a:buNone/>
+            </a:pPr>
+            <a:r>
+              <a:rPr lang="en-US" sz="2800" b="1" dirty="0"/>
+              <a:t>Here:</a:t>
+            </a:r>
+          </a:p>
+          <a:p>
+            <a:r>
+              <a:rPr lang="en-US" sz="2800" dirty="0" err="1"/>
+              <a:t>FastAPI</a:t>
+            </a:r>
+            <a:r>
+              <a:rPr lang="en-US" sz="2800" dirty="0"/>
+              <a:t> automatically:</a:t>
+            </a:r>
+          </a:p>
+          <a:p>
+            <a:pPr lvl="1"/>
+            <a:r>
+              <a:rPr lang="en-US" sz="2800" dirty="0"/>
+              <a:t>Instantiates </a:t>
+            </a:r>
+            <a:r>
+              <a:rPr lang="en-US" sz="2400" dirty="0"/>
+              <a:t>CommonQueryParams</a:t>
+            </a:r>
+            <a:endParaRPr lang="en-US" sz="2800" dirty="0"/>
+          </a:p>
+          <a:p>
+            <a:pPr lvl="1"/>
+            <a:r>
+              <a:rPr lang="en-US" sz="2800" dirty="0"/>
+              <a:t>Extracts query params from the request</a:t>
+            </a:r>
+          </a:p>
+          <a:p>
+            <a:pPr lvl="1"/>
+            <a:r>
+              <a:rPr lang="en-US" sz="2800" dirty="0"/>
+              <a:t>Injects the instance into your route</a:t>
+            </a:r>
+          </a:p>
+          <a:p>
+            <a:pPr marL="0" indent="0">
+              <a:buNone/>
+            </a:pPr>
+            <a:endParaRPr lang="en-IN" sz="2400" dirty="0"/>
+          </a:p>
+        </p:txBody>
+      </p:sp>
+    </p:spTree>
+    <p:extLst>
+      <p:ext uri="{BB962C8B-B14F-4D97-AF65-F5344CB8AC3E}">
+        <p14:creationId xmlns:p14="http://schemas.microsoft.com/office/powerpoint/2010/main" val="172351539"/>
+      </p:ext>
+    </p:extLst>
+  </p:cSld>
+  <p:clrMapOvr>
+    <a:masterClrMapping/>
+  </p:clrMapOvr>
+</p:sld>
+</file>
+
+<file path=ppt/slides/slide41.xml><?xml version="1.0" encoding="utf-8"?>
+<p:sld xmlns:a="http://schemas.openxmlformats.org/drawingml/2006/main" xmlns:r="http://schemas.openxmlformats.org/officeDocument/2006/relationships" xmlns:p="http://schemas.openxmlformats.org/presentationml/2006/main">
+  <p:cSld>
+    <p:spTree>
+      <p:nvGrpSpPr>
+        <p:cNvPr id="1" name="">
+          <a:extLst>
+            <a:ext uri="{FF2B5EF4-FFF2-40B4-BE49-F238E27FC236}">
+              <a16:creationId xmlns:a16="http://schemas.microsoft.com/office/drawing/2014/main" id="{3C8C2DE8-FC8E-26B0-88A4-0FD4542AFB8C}"/>
+            </a:ext>
+          </a:extLst>
+        </p:cNvPr>
+        <p:cNvGrpSpPr/>
+        <p:nvPr/>
+      </p:nvGrpSpPr>
+      <p:grpSpPr>
+        <a:xfrm>
+          <a:off x="0" y="0"/>
+          <a:ext cx="0" cy="0"/>
+          <a:chOff x="0" y="0"/>
+          <a:chExt cx="0" cy="0"/>
+        </a:xfrm>
+      </p:grpSpPr>
+      <p:sp>
+        <p:nvSpPr>
+          <p:cNvPr id="3" name="Content Placeholder 2">
+            <a:extLst>
+              <a:ext uri="{FF2B5EF4-FFF2-40B4-BE49-F238E27FC236}">
+                <a16:creationId xmlns:a16="http://schemas.microsoft.com/office/drawing/2014/main" id="{147703F5-B8B6-7BA8-B68E-22FFFBCF48DE}"/>
+              </a:ext>
+            </a:extLst>
+          </p:cNvPr>
+          <p:cNvSpPr>
+            <a:spLocks noGrp="1"/>
+          </p:cNvSpPr>
+          <p:nvPr>
+            <p:ph idx="1"/>
+          </p:nvPr>
+        </p:nvSpPr>
+        <p:spPr>
+          <a:xfrm>
+            <a:off x="777240" y="696686"/>
+            <a:ext cx="10659110" cy="5480277"/>
+          </a:xfrm>
+        </p:spPr>
+        <p:txBody>
+          <a:bodyPr>
+            <a:normAutofit/>
+          </a:bodyPr>
+          <a:lstStyle/>
+          <a:p>
+            <a:pPr marL="0" indent="0">
+              <a:buNone/>
+            </a:pPr>
+            <a:endParaRPr lang="en-IN" sz="2400" dirty="0"/>
+          </a:p>
+        </p:txBody>
+      </p:sp>
+    </p:spTree>
+    <p:extLst>
+      <p:ext uri="{BB962C8B-B14F-4D97-AF65-F5344CB8AC3E}">
+        <p14:creationId xmlns:p14="http://schemas.microsoft.com/office/powerpoint/2010/main" val="2473509293"/>
+      </p:ext>
+    </p:extLst>
+  </p:cSld>
+  <p:clrMapOvr>
+    <a:masterClrMapping/>
+  </p:clrMapOvr>
+</p:sld>
+</file>
+
+<file path=ppt/slides/slide42.xml><?xml version="1.0" encoding="utf-8"?>
+<p:sld xmlns:a="http://schemas.openxmlformats.org/drawingml/2006/main" xmlns:r="http://schemas.openxmlformats.org/officeDocument/2006/relationships" xmlns:p="http://schemas.openxmlformats.org/presentationml/2006/main">
+  <p:cSld>
+    <p:spTree>
+      <p:nvGrpSpPr>
+        <p:cNvPr id="1" name="">
+          <a:extLst>
+            <a:ext uri="{FF2B5EF4-FFF2-40B4-BE49-F238E27FC236}">
+              <a16:creationId xmlns:a16="http://schemas.microsoft.com/office/drawing/2014/main" id="{B9F26981-E6C1-FF15-497A-47B0DC8B3221}"/>
+            </a:ext>
+          </a:extLst>
+        </p:cNvPr>
+        <p:cNvGrpSpPr/>
+        <p:nvPr/>
+      </p:nvGrpSpPr>
+      <p:grpSpPr>
+        <a:xfrm>
+          <a:off x="0" y="0"/>
+          <a:ext cx="0" cy="0"/>
+          <a:chOff x="0" y="0"/>
+          <a:chExt cx="0" cy="0"/>
+        </a:xfrm>
+      </p:grpSpPr>
+      <p:sp>
+        <p:nvSpPr>
+          <p:cNvPr id="3" name="Content Placeholder 2">
+            <a:extLst>
+              <a:ext uri="{FF2B5EF4-FFF2-40B4-BE49-F238E27FC236}">
+                <a16:creationId xmlns:a16="http://schemas.microsoft.com/office/drawing/2014/main" id="{FC24096A-3BE6-88B2-F3CC-318F849A5EAF}"/>
+              </a:ext>
+            </a:extLst>
+          </p:cNvPr>
+          <p:cNvSpPr>
+            <a:spLocks noGrp="1"/>
+          </p:cNvSpPr>
+          <p:nvPr>
+            <p:ph idx="1"/>
+          </p:nvPr>
+        </p:nvSpPr>
+        <p:spPr>
+          <a:xfrm>
+            <a:off x="777240" y="696686"/>
+            <a:ext cx="10659110" cy="5480277"/>
+          </a:xfrm>
+        </p:spPr>
+        <p:txBody>
+          <a:bodyPr>
+            <a:normAutofit/>
+          </a:bodyPr>
+          <a:lstStyle/>
+          <a:p>
+            <a:pPr marL="0" indent="0">
+              <a:buNone/>
+            </a:pPr>
+            <a:endParaRPr lang="en-IN" sz="2400" dirty="0"/>
+          </a:p>
+        </p:txBody>
+      </p:sp>
+    </p:spTree>
+    <p:extLst>
+      <p:ext uri="{BB962C8B-B14F-4D97-AF65-F5344CB8AC3E}">
+        <p14:creationId xmlns:p14="http://schemas.microsoft.com/office/powerpoint/2010/main" val="1794317502"/>
+      </p:ext>
+    </p:extLst>
+  </p:cSld>
+  <p:clrMapOvr>
+    <a:masterClrMapping/>
+  </p:clrMapOvr>
+</p:sld>
+</file>
+
+<file path=ppt/slides/slide43.xml><?xml version="1.0" encoding="utf-8"?>
+<p:sld xmlns:a="http://schemas.openxmlformats.org/drawingml/2006/main" xmlns:r="http://schemas.openxmlformats.org/officeDocument/2006/relationships" xmlns:p="http://schemas.openxmlformats.org/presentationml/2006/main">
+  <p:cSld>
+    <p:spTree>
+      <p:nvGrpSpPr>
+        <p:cNvPr id="1" name="">
+          <a:extLst>
+            <a:ext uri="{FF2B5EF4-FFF2-40B4-BE49-F238E27FC236}">
+              <a16:creationId xmlns:a16="http://schemas.microsoft.com/office/drawing/2014/main" id="{C1F504F8-C59B-25C0-483E-8E358855FD62}"/>
+            </a:ext>
+          </a:extLst>
+        </p:cNvPr>
+        <p:cNvGrpSpPr/>
+        <p:nvPr/>
+      </p:nvGrpSpPr>
+      <p:grpSpPr>
+        <a:xfrm>
+          <a:off x="0" y="0"/>
+          <a:ext cx="0" cy="0"/>
+          <a:chOff x="0" y="0"/>
+          <a:chExt cx="0" cy="0"/>
+        </a:xfrm>
+      </p:grpSpPr>
+      <p:sp>
+        <p:nvSpPr>
+          <p:cNvPr id="3" name="Content Placeholder 2">
+            <a:extLst>
+              <a:ext uri="{FF2B5EF4-FFF2-40B4-BE49-F238E27FC236}">
+                <a16:creationId xmlns:a16="http://schemas.microsoft.com/office/drawing/2014/main" id="{998A68B0-5C24-F615-D4FC-1FBD05838EC3}"/>
+              </a:ext>
+            </a:extLst>
+          </p:cNvPr>
+          <p:cNvSpPr>
+            <a:spLocks noGrp="1"/>
+          </p:cNvSpPr>
+          <p:nvPr>
+            <p:ph idx="1"/>
+          </p:nvPr>
+        </p:nvSpPr>
+        <p:spPr>
+          <a:xfrm>
+            <a:off x="777240" y="696686"/>
+            <a:ext cx="10659110" cy="5480277"/>
+          </a:xfrm>
+        </p:spPr>
+        <p:txBody>
+          <a:bodyPr>
+            <a:normAutofit/>
+          </a:bodyPr>
+          <a:lstStyle/>
+          <a:p>
+            <a:pPr marL="0" indent="0">
+              <a:buNone/>
+            </a:pPr>
+            <a:endParaRPr lang="en-IN" sz="2400" dirty="0"/>
+          </a:p>
+        </p:txBody>
+      </p:sp>
+    </p:spTree>
+    <p:extLst>
+      <p:ext uri="{BB962C8B-B14F-4D97-AF65-F5344CB8AC3E}">
+        <p14:creationId xmlns:p14="http://schemas.microsoft.com/office/powerpoint/2010/main" val="4103649649"/>
+      </p:ext>
+    </p:extLst>
+  </p:cSld>
+  <p:clrMapOvr>
+    <a:masterClrMapping/>
+  </p:clrMapOvr>
+</p:sld>
+</file>
+
+<file path=ppt/slides/slide44.xml><?xml version="1.0" encoding="utf-8"?>
+<p:sld xmlns:a="http://schemas.openxmlformats.org/drawingml/2006/main" xmlns:r="http://schemas.openxmlformats.org/officeDocument/2006/relationships" xmlns:p="http://schemas.openxmlformats.org/presentationml/2006/main">
+  <p:cSld>
+    <p:spTree>
+      <p:nvGrpSpPr>
+        <p:cNvPr id="1" name="">
+          <a:extLst>
+            <a:ext uri="{FF2B5EF4-FFF2-40B4-BE49-F238E27FC236}">
+              <a16:creationId xmlns:a16="http://schemas.microsoft.com/office/drawing/2014/main" id="{FDE03728-60B9-F537-3F39-63222D96954B}"/>
+            </a:ext>
+          </a:extLst>
+        </p:cNvPr>
+        <p:cNvGrpSpPr/>
+        <p:nvPr/>
+      </p:nvGrpSpPr>
+      <p:grpSpPr>
+        <a:xfrm>
+          <a:off x="0" y="0"/>
+          <a:ext cx="0" cy="0"/>
+          <a:chOff x="0" y="0"/>
+          <a:chExt cx="0" cy="0"/>
+        </a:xfrm>
+      </p:grpSpPr>
+      <p:sp>
+        <p:nvSpPr>
+          <p:cNvPr id="3" name="Content Placeholder 2">
+            <a:extLst>
+              <a:ext uri="{FF2B5EF4-FFF2-40B4-BE49-F238E27FC236}">
+                <a16:creationId xmlns:a16="http://schemas.microsoft.com/office/drawing/2014/main" id="{4298DA18-9AFF-9C1F-AC4C-6351501744B1}"/>
+              </a:ext>
+            </a:extLst>
+          </p:cNvPr>
+          <p:cNvSpPr>
+            <a:spLocks noGrp="1"/>
+          </p:cNvSpPr>
+          <p:nvPr>
+            <p:ph idx="1"/>
+          </p:nvPr>
+        </p:nvSpPr>
+        <p:spPr>
+          <a:xfrm>
+            <a:off x="777240" y="696686"/>
+            <a:ext cx="10659110" cy="5480277"/>
+          </a:xfrm>
+        </p:spPr>
+        <p:txBody>
+          <a:bodyPr>
+            <a:normAutofit/>
+          </a:bodyPr>
+          <a:lstStyle/>
+          <a:p>
+            <a:pPr marL="0" indent="0">
+              <a:buNone/>
+            </a:pPr>
+            <a:endParaRPr lang="en-IN" sz="2400" dirty="0"/>
+          </a:p>
+        </p:txBody>
+      </p:sp>
+    </p:spTree>
+    <p:extLst>
+      <p:ext uri="{BB962C8B-B14F-4D97-AF65-F5344CB8AC3E}">
+        <p14:creationId xmlns:p14="http://schemas.microsoft.com/office/powerpoint/2010/main" val="3712268275"/>
       </p:ext>
     </p:extLst>
   </p:cSld>
@@ -10853,7 +13893,7 @@
                   <a:srgbClr val="C00000"/>
                 </a:solidFill>
               </a:rPr>
-              <a:t>just a JavaScript file </a:t>
+              <a:t>just a Python file </a:t>
             </a:r>
             <a:r>
               <a:rPr lang="en-US" sz="2400" dirty="0"/>
@@ -11212,16 +14252,16 @@
               <a:t>the </a:t>
             </a:r>
             <a:r>
-              <a:rPr lang="en-US" sz="2400" b="1" dirty="0">
-                <a:solidFill>
-                  <a:srgbClr val="C00000"/>
-                </a:solidFill>
-              </a:rPr>
-              <a:t>pip</a:t>
-            </a:r>
-            <a:r>
               <a:rPr lang="en-US" sz="2400" b="1" dirty="0"/>
-              <a:t> (Python Package Index)</a:t>
+              <a:t>PYPI</a:t>
+            </a:r>
+            <a:r>
+              <a:rPr lang="en-US" sz="2400" dirty="0"/>
+              <a:t> </a:t>
+            </a:r>
+            <a:r>
+              <a:rPr lang="en-US" sz="2400" b="1" dirty="0"/>
+              <a:t>(Python Package Index)</a:t>
             </a:r>
             <a:r>
               <a:rPr lang="en-US" sz="2400" dirty="0"/>
@@ -11404,7 +14444,7 @@
                   <a:srgbClr val="002060"/>
                 </a:solidFill>
               </a:rPr>
-              <a:t>Express: </a:t>
+              <a:t> </a:t>
             </a:r>
             <a:r>
               <a:rPr lang="en-IN" sz="2400" b="1" dirty="0" err="1"/>
@@ -11735,7 +14775,7 @@
         </p:blipFill>
         <p:spPr>
           <a:xfrm>
-            <a:off x="2009495" y="1763226"/>
+            <a:off x="1360909" y="1733157"/>
             <a:ext cx="5055333" cy="796234"/>
           </a:xfrm>
           <a:prstGeom prst="rect">
@@ -11765,7 +14805,7 @@
         </p:blipFill>
         <p:spPr>
           <a:xfrm>
-            <a:off x="2328496" y="3505943"/>
+            <a:off x="6999911" y="1703088"/>
             <a:ext cx="4290018" cy="856372"/>
           </a:xfrm>
           <a:prstGeom prst="rect">
@@ -11795,8 +14835,38 @@
         </p:blipFill>
         <p:spPr>
           <a:xfrm>
-            <a:off x="2328496" y="5636810"/>
+            <a:off x="2764431" y="3588756"/>
             <a:ext cx="5400000" cy="809524"/>
+          </a:xfrm>
+          <a:prstGeom prst="rect">
+            <a:avLst/>
+          </a:prstGeom>
+        </p:spPr>
+      </p:pic>
+      <p:pic>
+        <p:nvPicPr>
+          <p:cNvPr id="4" name="Picture 3">
+            <a:extLst>
+              <a:ext uri="{FF2B5EF4-FFF2-40B4-BE49-F238E27FC236}">
+                <a16:creationId xmlns:a16="http://schemas.microsoft.com/office/drawing/2014/main" id="{179E9F93-B544-6459-D770-A2C538F04700}"/>
+              </a:ext>
+            </a:extLst>
+          </p:cNvPr>
+          <p:cNvPicPr>
+            <a:picLocks noChangeAspect="1"/>
+          </p:cNvPicPr>
+          <p:nvPr/>
+        </p:nvPicPr>
+        <p:blipFill>
+          <a:blip r:embed="rId5"/>
+          <a:stretch>
+            <a:fillRect/>
+          </a:stretch>
+        </p:blipFill>
+        <p:spPr>
+          <a:xfrm>
+            <a:off x="3058586" y="5427576"/>
+            <a:ext cx="3671994" cy="749387"/>
           </a:xfrm>
           <a:prstGeom prst="rect">
             <a:avLst/>

--- a/FastAPI/FastAPI- Intermediate.pptx
+++ b/FastAPI/FastAPI- Intermediate.pptx
@@ -5,7 +5,7 @@
     <p:sldMasterId id="2147483710" r:id="rId1"/>
   </p:sldMasterIdLst>
   <p:notesMasterIdLst>
-    <p:notesMasterId r:id="rId46"/>
+    <p:notesMasterId r:id="rId64"/>
   </p:notesMasterIdLst>
   <p:sldIdLst>
     <p:sldId id="531" r:id="rId2"/>
@@ -48,10 +48,28 @@
     <p:sldId id="560" r:id="rId39"/>
     <p:sldId id="561" r:id="rId40"/>
     <p:sldId id="562" r:id="rId41"/>
-    <p:sldId id="563" r:id="rId42"/>
-    <p:sldId id="564" r:id="rId43"/>
+    <p:sldId id="564" r:id="rId42"/>
+    <p:sldId id="563" r:id="rId43"/>
     <p:sldId id="565" r:id="rId44"/>
-    <p:sldId id="566" r:id="rId45"/>
+    <p:sldId id="567" r:id="rId45"/>
+    <p:sldId id="568" r:id="rId46"/>
+    <p:sldId id="566" r:id="rId47"/>
+    <p:sldId id="569" r:id="rId48"/>
+    <p:sldId id="570" r:id="rId49"/>
+    <p:sldId id="571" r:id="rId50"/>
+    <p:sldId id="572" r:id="rId51"/>
+    <p:sldId id="573" r:id="rId52"/>
+    <p:sldId id="574" r:id="rId53"/>
+    <p:sldId id="575" r:id="rId54"/>
+    <p:sldId id="576" r:id="rId55"/>
+    <p:sldId id="577" r:id="rId56"/>
+    <p:sldId id="578" r:id="rId57"/>
+    <p:sldId id="579" r:id="rId58"/>
+    <p:sldId id="580" r:id="rId59"/>
+    <p:sldId id="581" r:id="rId60"/>
+    <p:sldId id="582" r:id="rId61"/>
+    <p:sldId id="583" r:id="rId62"/>
+    <p:sldId id="584" r:id="rId63"/>
   </p:sldIdLst>
   <p:sldSz cx="12192000" cy="6858000"/>
   <p:notesSz cx="6858000" cy="9144000"/>
@@ -161,7 +179,7 @@
 <file path=ppt/revisionInfo.xml><?xml version="1.0" encoding="utf-8"?>
 <p1510:revInfo xmlns:a="http://schemas.openxmlformats.org/drawingml/2006/main" xmlns:r="http://schemas.openxmlformats.org/officeDocument/2006/relationships" xmlns:p1510="http://schemas.microsoft.com/office/powerpoint/2015/10/main">
   <p1510:revLst>
-    <p1510:client id="{90A747A9-39C3-436E-A3AC-34027D23E8DE}" v="126" dt="2025-10-29T18:42:23.018"/>
+    <p1510:client id="{90A747A9-39C3-436E-A3AC-34027D23E8DE}" v="190" dt="2025-11-01T14:24:57.047"/>
   </p1510:revLst>
 </p1510:revInfo>
 </file>
@@ -171,7 +189,7 @@
   <pc:docChgLst>
     <pc:chgData name="Pramod Naik" userId="ceb6df04-ef15-4d9b-a141-998a03559d75" providerId="ADAL" clId="{62E9B5AE-779D-4001-92D3-8FF830A8A9C1}"/>
     <pc:docChg chg="undo custSel addSld delSld modSld sldOrd">
-      <pc:chgData name="Pramod Naik" userId="ceb6df04-ef15-4d9b-a141-998a03559d75" providerId="ADAL" clId="{62E9B5AE-779D-4001-92D3-8FF830A8A9C1}" dt="2025-10-29T18:43:06.446" v="3529" actId="113"/>
+      <pc:chgData name="Pramod Naik" userId="ceb6df04-ef15-4d9b-a141-998a03559d75" providerId="ADAL" clId="{62E9B5AE-779D-4001-92D3-8FF830A8A9C1}" dt="2025-11-01T14:25:04.390" v="4053" actId="5793"/>
       <pc:docMkLst>
         <pc:docMk/>
       </pc:docMkLst>
@@ -747,13 +765,13 @@
         </pc:sldMkLst>
       </pc:sldChg>
       <pc:sldChg chg="modSp add mod">
-        <pc:chgData name="Pramod Naik" userId="ceb6df04-ef15-4d9b-a141-998a03559d75" providerId="ADAL" clId="{62E9B5AE-779D-4001-92D3-8FF830A8A9C1}" dt="2025-10-29T17:48:12.905" v="3038" actId="20577"/>
+        <pc:chgData name="Pramod Naik" userId="ceb6df04-ef15-4d9b-a141-998a03559d75" providerId="ADAL" clId="{62E9B5AE-779D-4001-92D3-8FF830A8A9C1}" dt="2025-10-30T05:47:28.659" v="3530" actId="113"/>
         <pc:sldMkLst>
           <pc:docMk/>
           <pc:sldMk cId="1542586166" sldId="532"/>
         </pc:sldMkLst>
         <pc:spChg chg="mod">
-          <ac:chgData name="Pramod Naik" userId="ceb6df04-ef15-4d9b-a141-998a03559d75" providerId="ADAL" clId="{62E9B5AE-779D-4001-92D3-8FF830A8A9C1}" dt="2025-10-29T17:48:12.905" v="3038" actId="20577"/>
+          <ac:chgData name="Pramod Naik" userId="ceb6df04-ef15-4d9b-a141-998a03559d75" providerId="ADAL" clId="{62E9B5AE-779D-4001-92D3-8FF830A8A9C1}" dt="2025-10-30T05:47:28.659" v="3530" actId="113"/>
           <ac:spMkLst>
             <pc:docMk/>
             <pc:sldMk cId="1542586166" sldId="532"/>
@@ -813,13 +831,13 @@
         </pc:sldMkLst>
       </pc:sldChg>
       <pc:sldChg chg="addSp modSp add mod">
-        <pc:chgData name="Pramod Naik" userId="ceb6df04-ef15-4d9b-a141-998a03559d75" providerId="ADAL" clId="{62E9B5AE-779D-4001-92D3-8FF830A8A9C1}" dt="2025-10-29T06:05:05.656" v="3026" actId="113"/>
+        <pc:chgData name="Pramod Naik" userId="ceb6df04-ef15-4d9b-a141-998a03559d75" providerId="ADAL" clId="{62E9B5AE-779D-4001-92D3-8FF830A8A9C1}" dt="2025-10-30T05:50:36.545" v="3531" actId="403"/>
         <pc:sldMkLst>
           <pc:docMk/>
           <pc:sldMk cId="1574124982" sldId="534"/>
         </pc:sldMkLst>
         <pc:spChg chg="mod">
-          <ac:chgData name="Pramod Naik" userId="ceb6df04-ef15-4d9b-a141-998a03559d75" providerId="ADAL" clId="{62E9B5AE-779D-4001-92D3-8FF830A8A9C1}" dt="2025-10-29T06:05:05.656" v="3026" actId="113"/>
+          <ac:chgData name="Pramod Naik" userId="ceb6df04-ef15-4d9b-a141-998a03559d75" providerId="ADAL" clId="{62E9B5AE-779D-4001-92D3-8FF830A8A9C1}" dt="2025-10-30T05:50:36.545" v="3531" actId="403"/>
           <ac:spMkLst>
             <pc:docMk/>
             <pc:sldMk cId="1574124982" sldId="534"/>
@@ -1250,22 +1268,6 @@
             <ac:spMk id="3" creationId="{05E5B31D-0E10-7D2E-BC2A-F96D16287DA7}"/>
           </ac:spMkLst>
         </pc:spChg>
-        <pc:spChg chg="add">
-          <ac:chgData name="Pramod Naik" userId="ceb6df04-ef15-4d9b-a141-998a03559d75" providerId="ADAL" clId="{62E9B5AE-779D-4001-92D3-8FF830A8A9C1}" dt="2025-10-29T17:56:22.523" v="3132"/>
-          <ac:spMkLst>
-            <pc:docMk/>
-            <pc:sldMk cId="1075547662" sldId="547"/>
-            <ac:spMk id="5" creationId="{466BD2E3-B7E0-9853-A0AD-DEEB96312DAD}"/>
-          </ac:spMkLst>
-        </pc:spChg>
-        <pc:spChg chg="add del mod">
-          <ac:chgData name="Pramod Naik" userId="ceb6df04-ef15-4d9b-a141-998a03559d75" providerId="ADAL" clId="{62E9B5AE-779D-4001-92D3-8FF830A8A9C1}" dt="2025-10-29T17:57:15.241" v="3145" actId="478"/>
-          <ac:spMkLst>
-            <pc:docMk/>
-            <pc:sldMk cId="1075547662" sldId="547"/>
-            <ac:spMk id="6" creationId="{2DC14C48-DA8B-CA09-8981-5B6D141B0E69}"/>
-          </ac:spMkLst>
-        </pc:spChg>
         <pc:picChg chg="add mod">
           <ac:chgData name="Pramod Naik" userId="ceb6df04-ef15-4d9b-a141-998a03559d75" providerId="ADAL" clId="{62E9B5AE-779D-4001-92D3-8FF830A8A9C1}" dt="2025-10-29T17:57:05.429" v="3142" actId="1076"/>
           <ac:picMkLst>
@@ -1422,14 +1424,6 @@
           <pc:docMk/>
           <pc:sldMk cId="3305929081" sldId="552"/>
         </pc:sldMkLst>
-        <pc:spChg chg="del">
-          <ac:chgData name="Pramod Naik" userId="ceb6df04-ef15-4d9b-a141-998a03559d75" providerId="ADAL" clId="{62E9B5AE-779D-4001-92D3-8FF830A8A9C1}" dt="2025-10-29T18:13:32.857" v="3286" actId="478"/>
-          <ac:spMkLst>
-            <pc:docMk/>
-            <pc:sldMk cId="3305929081" sldId="552"/>
-            <ac:spMk id="3" creationId="{E57543A8-D2CD-D88D-910D-AB7F1223C9D2}"/>
-          </ac:spMkLst>
-        </pc:spChg>
         <pc:picChg chg="add mod">
           <ac:chgData name="Pramod Naik" userId="ceb6df04-ef15-4d9b-a141-998a03559d75" providerId="ADAL" clId="{62E9B5AE-779D-4001-92D3-8FF830A8A9C1}" dt="2025-10-29T18:13:37.325" v="3287" actId="1076"/>
           <ac:picMkLst>
@@ -1649,14 +1643,6 @@
             <ac:spMk id="3" creationId="{9C1827B3-07A6-EF3F-7D9B-FF00AEEB4D31}"/>
           </ac:spMkLst>
         </pc:spChg>
-        <pc:picChg chg="add del mod">
-          <ac:chgData name="Pramod Naik" userId="ceb6df04-ef15-4d9b-a141-998a03559d75" providerId="ADAL" clId="{62E9B5AE-779D-4001-92D3-8FF830A8A9C1}" dt="2025-10-29T18:40:38.664" v="3503" actId="478"/>
-          <ac:picMkLst>
-            <pc:docMk/>
-            <pc:sldMk cId="1863801318" sldId="559"/>
-            <ac:picMk id="4" creationId="{437EDB8C-639A-6E5C-6B21-38DF3149B8AF}"/>
-          </ac:picMkLst>
-        </pc:picChg>
         <pc:picChg chg="add mod">
           <ac:chgData name="Pramod Naik" userId="ceb6df04-ef15-4d9b-a141-998a03559d75" providerId="ADAL" clId="{62E9B5AE-779D-4001-92D3-8FF830A8A9C1}" dt="2025-10-29T18:40:46.534" v="3506" actId="1076"/>
           <ac:picMkLst>
@@ -1769,12 +1755,44 @@
           <pc:sldMk cId="1912196509" sldId="562"/>
         </pc:sldMkLst>
       </pc:sldChg>
-      <pc:sldChg chg="add">
-        <pc:chgData name="Pramod Naik" userId="ceb6df04-ef15-4d9b-a141-998a03559d75" providerId="ADAL" clId="{62E9B5AE-779D-4001-92D3-8FF830A8A9C1}" dt="2025-10-29T18:13:42.304" v="3297"/>
+      <pc:sldChg chg="addSp modSp add mod ord">
+        <pc:chgData name="Pramod Naik" userId="ceb6df04-ef15-4d9b-a141-998a03559d75" providerId="ADAL" clId="{62E9B5AE-779D-4001-92D3-8FF830A8A9C1}" dt="2025-11-01T13:56:55.828" v="3550"/>
         <pc:sldMkLst>
           <pc:docMk/>
           <pc:sldMk cId="2473509293" sldId="563"/>
         </pc:sldMkLst>
+        <pc:grpChg chg="add mod">
+          <ac:chgData name="Pramod Naik" userId="ceb6df04-ef15-4d9b-a141-998a03559d75" providerId="ADAL" clId="{62E9B5AE-779D-4001-92D3-8FF830A8A9C1}" dt="2025-11-01T13:56:03.490" v="3546" actId="164"/>
+          <ac:grpSpMkLst>
+            <pc:docMk/>
+            <pc:sldMk cId="2473509293" sldId="563"/>
+            <ac:grpSpMk id="6" creationId="{49601D0F-58B5-676D-9A15-6B1F2A3F9304}"/>
+          </ac:grpSpMkLst>
+        </pc:grpChg>
+        <pc:picChg chg="add mod">
+          <ac:chgData name="Pramod Naik" userId="ceb6df04-ef15-4d9b-a141-998a03559d75" providerId="ADAL" clId="{62E9B5AE-779D-4001-92D3-8FF830A8A9C1}" dt="2025-11-01T13:56:03.490" v="3546" actId="164"/>
+          <ac:picMkLst>
+            <pc:docMk/>
+            <pc:sldMk cId="2473509293" sldId="563"/>
+            <ac:picMk id="4" creationId="{77966D3B-8D55-5AA0-4C04-E4073BB8BB50}"/>
+          </ac:picMkLst>
+        </pc:picChg>
+        <pc:picChg chg="add mod">
+          <ac:chgData name="Pramod Naik" userId="ceb6df04-ef15-4d9b-a141-998a03559d75" providerId="ADAL" clId="{62E9B5AE-779D-4001-92D3-8FF830A8A9C1}" dt="2025-11-01T13:56:03.490" v="3546" actId="164"/>
+          <ac:picMkLst>
+            <pc:docMk/>
+            <pc:sldMk cId="2473509293" sldId="563"/>
+            <ac:picMk id="5" creationId="{6CD3631C-A2F6-485B-9830-1404F936094A}"/>
+          </ac:picMkLst>
+        </pc:picChg>
+        <pc:picChg chg="add mod">
+          <ac:chgData name="Pramod Naik" userId="ceb6df04-ef15-4d9b-a141-998a03559d75" providerId="ADAL" clId="{62E9B5AE-779D-4001-92D3-8FF830A8A9C1}" dt="2025-11-01T13:56:03.490" v="3546" actId="164"/>
+          <ac:picMkLst>
+            <pc:docMk/>
+            <pc:sldMk cId="2473509293" sldId="563"/>
+            <ac:picMk id="1026" creationId="{A4B8EA69-61EC-BD90-5B1D-226695348111}"/>
+          </ac:picMkLst>
+        </pc:picChg>
       </pc:sldChg>
       <pc:sldChg chg="addSp modSp add del mod">
         <pc:chgData name="Pramod Naik" userId="ceb6df04-ef15-4d9b-a141-998a03559d75" providerId="ADAL" clId="{62E9B5AE-779D-4001-92D3-8FF830A8A9C1}" dt="2025-10-26T05:53:02.113" v="2491" actId="47"/>
@@ -1790,12 +1808,28 @@
           <pc:sldMk cId="813558974" sldId="564"/>
         </pc:sldMkLst>
       </pc:sldChg>
-      <pc:sldChg chg="add">
-        <pc:chgData name="Pramod Naik" userId="ceb6df04-ef15-4d9b-a141-998a03559d75" providerId="ADAL" clId="{62E9B5AE-779D-4001-92D3-8FF830A8A9C1}" dt="2025-10-29T18:13:42.328" v="3298"/>
+      <pc:sldChg chg="addSp delSp modSp add mod ord">
+        <pc:chgData name="Pramod Naik" userId="ceb6df04-ef15-4d9b-a141-998a03559d75" providerId="ADAL" clId="{62E9B5AE-779D-4001-92D3-8FF830A8A9C1}" dt="2025-11-01T13:58:51.691" v="3560" actId="1076"/>
         <pc:sldMkLst>
           <pc:docMk/>
           <pc:sldMk cId="1794317502" sldId="564"/>
         </pc:sldMkLst>
+        <pc:spChg chg="del">
+          <ac:chgData name="Pramod Naik" userId="ceb6df04-ef15-4d9b-a141-998a03559d75" providerId="ADAL" clId="{62E9B5AE-779D-4001-92D3-8FF830A8A9C1}" dt="2025-11-01T13:58:47.281" v="3559" actId="478"/>
+          <ac:spMkLst>
+            <pc:docMk/>
+            <pc:sldMk cId="1794317502" sldId="564"/>
+            <ac:spMk id="3" creationId="{FC24096A-3BE6-88B2-F3CC-318F849A5EAF}"/>
+          </ac:spMkLst>
+        </pc:spChg>
+        <pc:picChg chg="add mod">
+          <ac:chgData name="Pramod Naik" userId="ceb6df04-ef15-4d9b-a141-998a03559d75" providerId="ADAL" clId="{62E9B5AE-779D-4001-92D3-8FF830A8A9C1}" dt="2025-11-01T13:58:51.691" v="3560" actId="1076"/>
+          <ac:picMkLst>
+            <pc:docMk/>
+            <pc:sldMk cId="1794317502" sldId="564"/>
+            <ac:picMk id="2050" creationId="{F581DCC5-6A64-8FC8-35F6-9DD8C8F6F6B3}"/>
+          </ac:picMkLst>
+        </pc:picChg>
       </pc:sldChg>
       <pc:sldChg chg="addSp delSp modSp add del mod">
         <pc:chgData name="Pramod Naik" userId="ceb6df04-ef15-4d9b-a141-998a03559d75" providerId="ADAL" clId="{62E9B5AE-779D-4001-92D3-8FF830A8A9C1}" dt="2025-10-26T05:53:02.177" v="2493" actId="47"/>
@@ -1804,19 +1838,75 @@
           <pc:sldMk cId="494025414" sldId="565"/>
         </pc:sldMkLst>
       </pc:sldChg>
-      <pc:sldChg chg="add">
-        <pc:chgData name="Pramod Naik" userId="ceb6df04-ef15-4d9b-a141-998a03559d75" providerId="ADAL" clId="{62E9B5AE-779D-4001-92D3-8FF830A8A9C1}" dt="2025-10-29T18:13:42.362" v="3299"/>
+      <pc:sldChg chg="addSp delSp modSp add mod setBg">
+        <pc:chgData name="Pramod Naik" userId="ceb6df04-ef15-4d9b-a141-998a03559d75" providerId="ADAL" clId="{62E9B5AE-779D-4001-92D3-8FF830A8A9C1}" dt="2025-11-01T14:03:23.049" v="3620" actId="20577"/>
         <pc:sldMkLst>
           <pc:docMk/>
           <pc:sldMk cId="4103649649" sldId="565"/>
         </pc:sldMkLst>
+        <pc:spChg chg="mod">
+          <ac:chgData name="Pramod Naik" userId="ceb6df04-ef15-4d9b-a141-998a03559d75" providerId="ADAL" clId="{62E9B5AE-779D-4001-92D3-8FF830A8A9C1}" dt="2025-11-01T14:03:23.049" v="3620" actId="20577"/>
+          <ac:spMkLst>
+            <pc:docMk/>
+            <pc:sldMk cId="4103649649" sldId="565"/>
+            <ac:spMk id="3" creationId="{998A68B0-5C24-F615-D4FC-1FBD05838EC3}"/>
+          </ac:spMkLst>
+        </pc:spChg>
+        <pc:spChg chg="add del">
+          <ac:chgData name="Pramod Naik" userId="ceb6df04-ef15-4d9b-a141-998a03559d75" providerId="ADAL" clId="{62E9B5AE-779D-4001-92D3-8FF830A8A9C1}" dt="2025-11-01T14:01:40.662" v="3600" actId="26606"/>
+          <ac:spMkLst>
+            <pc:docMk/>
+            <pc:sldMk cId="4103649649" sldId="565"/>
+            <ac:spMk id="3079" creationId="{4F8E18AC-903E-4B46-8CC0-FE20E612CE37}"/>
+          </ac:spMkLst>
+        </pc:spChg>
+        <pc:spChg chg="add del">
+          <ac:chgData name="Pramod Naik" userId="ceb6df04-ef15-4d9b-a141-998a03559d75" providerId="ADAL" clId="{62E9B5AE-779D-4001-92D3-8FF830A8A9C1}" dt="2025-11-01T14:01:40.662" v="3600" actId="26606"/>
+          <ac:spMkLst>
+            <pc:docMk/>
+            <pc:sldMk cId="4103649649" sldId="565"/>
+            <ac:spMk id="3081" creationId="{3DEE38FB-0763-470C-8A5E-44456B5130D7}"/>
+          </ac:spMkLst>
+        </pc:spChg>
+        <pc:spChg chg="add del">
+          <ac:chgData name="Pramod Naik" userId="ceb6df04-ef15-4d9b-a141-998a03559d75" providerId="ADAL" clId="{62E9B5AE-779D-4001-92D3-8FF830A8A9C1}" dt="2025-11-01T14:01:40.662" v="3600" actId="26606"/>
+          <ac:spMkLst>
+            <pc:docMk/>
+            <pc:sldMk cId="4103649649" sldId="565"/>
+            <ac:spMk id="3083" creationId="{F1D6E6C0-11C7-4A38-BD12-80741960B53C}"/>
+          </ac:spMkLst>
+        </pc:spChg>
+        <pc:grpChg chg="add del">
+          <ac:chgData name="Pramod Naik" userId="ceb6df04-ef15-4d9b-a141-998a03559d75" providerId="ADAL" clId="{62E9B5AE-779D-4001-92D3-8FF830A8A9C1}" dt="2025-11-01T14:01:40.662" v="3600" actId="26606"/>
+          <ac:grpSpMkLst>
+            <pc:docMk/>
+            <pc:sldMk cId="4103649649" sldId="565"/>
+            <ac:grpSpMk id="3085" creationId="{2B16E781-E64A-4007-B0F1-5A50135A4276}"/>
+          </ac:grpSpMkLst>
+        </pc:grpChg>
+        <pc:picChg chg="add mod">
+          <ac:chgData name="Pramod Naik" userId="ceb6df04-ef15-4d9b-a141-998a03559d75" providerId="ADAL" clId="{62E9B5AE-779D-4001-92D3-8FF830A8A9C1}" dt="2025-11-01T14:01:48.812" v="3602" actId="1076"/>
+          <ac:picMkLst>
+            <pc:docMk/>
+            <pc:sldMk cId="4103649649" sldId="565"/>
+            <ac:picMk id="3074" creationId="{23DB1387-FE1B-A757-97F1-2CCA1CABF6B8}"/>
+          </ac:picMkLst>
+        </pc:picChg>
       </pc:sldChg>
-      <pc:sldChg chg="add">
-        <pc:chgData name="Pramod Naik" userId="ceb6df04-ef15-4d9b-a141-998a03559d75" providerId="ADAL" clId="{62E9B5AE-779D-4001-92D3-8FF830A8A9C1}" dt="2025-10-29T18:13:42.390" v="3300"/>
+      <pc:sldChg chg="modSp add mod ord">
+        <pc:chgData name="Pramod Naik" userId="ceb6df04-ef15-4d9b-a141-998a03559d75" providerId="ADAL" clId="{62E9B5AE-779D-4001-92D3-8FF830A8A9C1}" dt="2025-11-01T14:12:54.882" v="3849" actId="207"/>
         <pc:sldMkLst>
           <pc:docMk/>
           <pc:sldMk cId="3712268275" sldId="566"/>
         </pc:sldMkLst>
+        <pc:spChg chg="mod">
+          <ac:chgData name="Pramod Naik" userId="ceb6df04-ef15-4d9b-a141-998a03559d75" providerId="ADAL" clId="{62E9B5AE-779D-4001-92D3-8FF830A8A9C1}" dt="2025-11-01T14:12:54.882" v="3849" actId="207"/>
+          <ac:spMkLst>
+            <pc:docMk/>
+            <pc:sldMk cId="3712268275" sldId="566"/>
+            <ac:spMk id="3" creationId="{4298DA18-9AFF-9C1F-AC4C-6351501744B1}"/>
+          </ac:spMkLst>
+        </pc:spChg>
       </pc:sldChg>
       <pc:sldChg chg="addSp modSp add del mod">
         <pc:chgData name="Pramod Naik" userId="ceb6df04-ef15-4d9b-a141-998a03559d75" providerId="ADAL" clId="{62E9B5AE-779D-4001-92D3-8FF830A8A9C1}" dt="2025-10-26T05:53:02.205" v="2494" actId="47"/>
@@ -1824,6 +1914,29 @@
           <pc:docMk/>
           <pc:sldMk cId="4083528472" sldId="566"/>
         </pc:sldMkLst>
+      </pc:sldChg>
+      <pc:sldChg chg="addSp modSp add mod ord">
+        <pc:chgData name="Pramod Naik" userId="ceb6df04-ef15-4d9b-a141-998a03559d75" providerId="ADAL" clId="{62E9B5AE-779D-4001-92D3-8FF830A8A9C1}" dt="2025-11-01T14:05:27.088" v="3717" actId="20577"/>
+        <pc:sldMkLst>
+          <pc:docMk/>
+          <pc:sldMk cId="1517013679" sldId="567"/>
+        </pc:sldMkLst>
+        <pc:spChg chg="mod">
+          <ac:chgData name="Pramod Naik" userId="ceb6df04-ef15-4d9b-a141-998a03559d75" providerId="ADAL" clId="{62E9B5AE-779D-4001-92D3-8FF830A8A9C1}" dt="2025-11-01T14:05:27.088" v="3717" actId="20577"/>
+          <ac:spMkLst>
+            <pc:docMk/>
+            <pc:sldMk cId="1517013679" sldId="567"/>
+            <ac:spMk id="3" creationId="{F0BD15C9-DAF0-3253-6761-4709721837D1}"/>
+          </ac:spMkLst>
+        </pc:spChg>
+        <pc:picChg chg="add mod modCrop">
+          <ac:chgData name="Pramod Naik" userId="ceb6df04-ef15-4d9b-a141-998a03559d75" providerId="ADAL" clId="{62E9B5AE-779D-4001-92D3-8FF830A8A9C1}" dt="2025-11-01T14:05:06.700" v="3691" actId="732"/>
+          <ac:picMkLst>
+            <pc:docMk/>
+            <pc:sldMk cId="1517013679" sldId="567"/>
+            <ac:picMk id="4" creationId="{B3540E61-41BD-C529-F3F5-E658F2D9590A}"/>
+          </ac:picMkLst>
+        </pc:picChg>
       </pc:sldChg>
       <pc:sldChg chg="addSp modSp add del mod">
         <pc:chgData name="Pramod Naik" userId="ceb6df04-ef15-4d9b-a141-998a03559d75" providerId="ADAL" clId="{62E9B5AE-779D-4001-92D3-8FF830A8A9C1}" dt="2025-10-26T05:53:02.247" v="2495" actId="47"/>
@@ -1839,12 +1952,105 @@
           <pc:sldMk cId="1668062704" sldId="568"/>
         </pc:sldMkLst>
       </pc:sldChg>
+      <pc:sldChg chg="addSp modSp add mod">
+        <pc:chgData name="Pramod Naik" userId="ceb6df04-ef15-4d9b-a141-998a03559d75" providerId="ADAL" clId="{62E9B5AE-779D-4001-92D3-8FF830A8A9C1}" dt="2025-11-01T14:07:57.957" v="3824" actId="1076"/>
+        <pc:sldMkLst>
+          <pc:docMk/>
+          <pc:sldMk cId="2275605110" sldId="568"/>
+        </pc:sldMkLst>
+        <pc:spChg chg="mod">
+          <ac:chgData name="Pramod Naik" userId="ceb6df04-ef15-4d9b-a141-998a03559d75" providerId="ADAL" clId="{62E9B5AE-779D-4001-92D3-8FF830A8A9C1}" dt="2025-11-01T14:07:34.749" v="3820" actId="113"/>
+          <ac:spMkLst>
+            <pc:docMk/>
+            <pc:sldMk cId="2275605110" sldId="568"/>
+            <ac:spMk id="3" creationId="{B3263A9C-41D5-DC27-AE5E-66517C1A8A59}"/>
+          </ac:spMkLst>
+        </pc:spChg>
+        <pc:picChg chg="add mod modCrop">
+          <ac:chgData name="Pramod Naik" userId="ceb6df04-ef15-4d9b-a141-998a03559d75" providerId="ADAL" clId="{62E9B5AE-779D-4001-92D3-8FF830A8A9C1}" dt="2025-11-01T14:07:15.013" v="3801" actId="1076"/>
+          <ac:picMkLst>
+            <pc:docMk/>
+            <pc:sldMk cId="2275605110" sldId="568"/>
+            <ac:picMk id="4" creationId="{2F7C5F61-40DF-DA69-510B-E4FE5542F0CB}"/>
+          </ac:picMkLst>
+        </pc:picChg>
+        <pc:picChg chg="add mod modCrop">
+          <ac:chgData name="Pramod Naik" userId="ceb6df04-ef15-4d9b-a141-998a03559d75" providerId="ADAL" clId="{62E9B5AE-779D-4001-92D3-8FF830A8A9C1}" dt="2025-11-01T14:07:19.691" v="3804" actId="1076"/>
+          <ac:picMkLst>
+            <pc:docMk/>
+            <pc:sldMk cId="2275605110" sldId="568"/>
+            <ac:picMk id="6" creationId="{436F1722-8529-ED38-B75B-7CB4EF90B1DB}"/>
+          </ac:picMkLst>
+        </pc:picChg>
+        <pc:picChg chg="add mod modCrop">
+          <ac:chgData name="Pramod Naik" userId="ceb6df04-ef15-4d9b-a141-998a03559d75" providerId="ADAL" clId="{62E9B5AE-779D-4001-92D3-8FF830A8A9C1}" dt="2025-11-01T14:07:57.957" v="3824" actId="1076"/>
+          <ac:picMkLst>
+            <pc:docMk/>
+            <pc:sldMk cId="2275605110" sldId="568"/>
+            <ac:picMk id="8" creationId="{17A57875-2B92-4E86-8275-FA43CAAE948D}"/>
+          </ac:picMkLst>
+        </pc:picChg>
+        <pc:picChg chg="add mod">
+          <ac:chgData name="Pramod Naik" userId="ceb6df04-ef15-4d9b-a141-998a03559d75" providerId="ADAL" clId="{62E9B5AE-779D-4001-92D3-8FF830A8A9C1}" dt="2025-11-01T14:07:56.297" v="3823" actId="1076"/>
+          <ac:picMkLst>
+            <pc:docMk/>
+            <pc:sldMk cId="2275605110" sldId="568"/>
+            <ac:picMk id="10" creationId="{CACE381B-CEAD-7E87-2F8C-5311F69EE758}"/>
+          </ac:picMkLst>
+        </pc:picChg>
+      </pc:sldChg>
       <pc:sldChg chg="addSp modSp add del mod">
         <pc:chgData name="Pramod Naik" userId="ceb6df04-ef15-4d9b-a141-998a03559d75" providerId="ADAL" clId="{62E9B5AE-779D-4001-92D3-8FF830A8A9C1}" dt="2025-10-26T05:53:02.307" v="2497" actId="47"/>
         <pc:sldMkLst>
           <pc:docMk/>
           <pc:sldMk cId="959162173" sldId="569"/>
         </pc:sldMkLst>
+      </pc:sldChg>
+      <pc:sldChg chg="addSp modSp add mod">
+        <pc:chgData name="Pramod Naik" userId="ceb6df04-ef15-4d9b-a141-998a03559d75" providerId="ADAL" clId="{62E9B5AE-779D-4001-92D3-8FF830A8A9C1}" dt="2025-11-01T14:17:04.171" v="3925" actId="113"/>
+        <pc:sldMkLst>
+          <pc:docMk/>
+          <pc:sldMk cId="3330856063" sldId="569"/>
+        </pc:sldMkLst>
+        <pc:spChg chg="mod">
+          <ac:chgData name="Pramod Naik" userId="ceb6df04-ef15-4d9b-a141-998a03559d75" providerId="ADAL" clId="{62E9B5AE-779D-4001-92D3-8FF830A8A9C1}" dt="2025-11-01T14:17:04.171" v="3925" actId="113"/>
+          <ac:spMkLst>
+            <pc:docMk/>
+            <pc:sldMk cId="3330856063" sldId="569"/>
+            <ac:spMk id="3" creationId="{33B14B21-6322-A82C-BD09-4093DCB77DBC}"/>
+          </ac:spMkLst>
+        </pc:spChg>
+        <pc:picChg chg="add mod">
+          <ac:chgData name="Pramod Naik" userId="ceb6df04-ef15-4d9b-a141-998a03559d75" providerId="ADAL" clId="{62E9B5AE-779D-4001-92D3-8FF830A8A9C1}" dt="2025-11-01T14:16:49.365" v="3923" actId="1076"/>
+          <ac:picMkLst>
+            <pc:docMk/>
+            <pc:sldMk cId="3330856063" sldId="569"/>
+            <ac:picMk id="4098" creationId="{55E09A31-F14C-44ED-B1A6-48F50165A176}"/>
+          </ac:picMkLst>
+        </pc:picChg>
+      </pc:sldChg>
+      <pc:sldChg chg="addSp modSp add mod">
+        <pc:chgData name="Pramod Naik" userId="ceb6df04-ef15-4d9b-a141-998a03559d75" providerId="ADAL" clId="{62E9B5AE-779D-4001-92D3-8FF830A8A9C1}" dt="2025-11-01T14:19:26.509" v="3948" actId="113"/>
+        <pc:sldMkLst>
+          <pc:docMk/>
+          <pc:sldMk cId="1668023934" sldId="570"/>
+        </pc:sldMkLst>
+        <pc:spChg chg="mod">
+          <ac:chgData name="Pramod Naik" userId="ceb6df04-ef15-4d9b-a141-998a03559d75" providerId="ADAL" clId="{62E9B5AE-779D-4001-92D3-8FF830A8A9C1}" dt="2025-11-01T14:18:37.921" v="3929" actId="113"/>
+          <ac:spMkLst>
+            <pc:docMk/>
+            <pc:sldMk cId="1668023934" sldId="570"/>
+            <ac:spMk id="3" creationId="{F89D1488-AAC8-CA94-3CED-A347136BED80}"/>
+          </ac:spMkLst>
+        </pc:spChg>
+        <pc:graphicFrameChg chg="add mod modGraphic">
+          <ac:chgData name="Pramod Naik" userId="ceb6df04-ef15-4d9b-a141-998a03559d75" providerId="ADAL" clId="{62E9B5AE-779D-4001-92D3-8FF830A8A9C1}" dt="2025-11-01T14:19:26.509" v="3948" actId="113"/>
+          <ac:graphicFrameMkLst>
+            <pc:docMk/>
+            <pc:sldMk cId="1668023934" sldId="570"/>
+            <ac:graphicFrameMk id="2" creationId="{BF9CE034-CEC3-74EB-B561-CCC7056A7BFD}"/>
+          </ac:graphicFrameMkLst>
+        </pc:graphicFrameChg>
       </pc:sldChg>
       <pc:sldChg chg="addSp modSp add del mod">
         <pc:chgData name="Pramod Naik" userId="ceb6df04-ef15-4d9b-a141-998a03559d75" providerId="ADAL" clId="{62E9B5AE-779D-4001-92D3-8FF830A8A9C1}" dt="2025-10-26T05:53:02.337" v="2498" actId="47"/>
@@ -1860,12 +2066,58 @@
           <pc:sldMk cId="1073918120" sldId="571"/>
         </pc:sldMkLst>
       </pc:sldChg>
+      <pc:sldChg chg="addSp modSp add mod">
+        <pc:chgData name="Pramod Naik" userId="ceb6df04-ef15-4d9b-a141-998a03559d75" providerId="ADAL" clId="{62E9B5AE-779D-4001-92D3-8FF830A8A9C1}" dt="2025-11-01T14:21:41.211" v="3969" actId="1076"/>
+        <pc:sldMkLst>
+          <pc:docMk/>
+          <pc:sldMk cId="1873530423" sldId="571"/>
+        </pc:sldMkLst>
+        <pc:spChg chg="mod">
+          <ac:chgData name="Pramod Naik" userId="ceb6df04-ef15-4d9b-a141-998a03559d75" providerId="ADAL" clId="{62E9B5AE-779D-4001-92D3-8FF830A8A9C1}" dt="2025-11-01T14:20:13.727" v="3954" actId="20577"/>
+          <ac:spMkLst>
+            <pc:docMk/>
+            <pc:sldMk cId="1873530423" sldId="571"/>
+            <ac:spMk id="3" creationId="{BEB1F599-617A-8661-24F8-C8DC9394C1CF}"/>
+          </ac:spMkLst>
+        </pc:spChg>
+        <pc:graphicFrameChg chg="add mod modGraphic">
+          <ac:chgData name="Pramod Naik" userId="ceb6df04-ef15-4d9b-a141-998a03559d75" providerId="ADAL" clId="{62E9B5AE-779D-4001-92D3-8FF830A8A9C1}" dt="2025-11-01T14:21:41.211" v="3969" actId="1076"/>
+          <ac:graphicFrameMkLst>
+            <pc:docMk/>
+            <pc:sldMk cId="1873530423" sldId="571"/>
+            <ac:graphicFrameMk id="2" creationId="{33280359-D07B-2B59-F42A-322E79B79653}"/>
+          </ac:graphicFrameMkLst>
+        </pc:graphicFrameChg>
+      </pc:sldChg>
       <pc:sldChg chg="addSp modSp add del mod">
         <pc:chgData name="Pramod Naik" userId="ceb6df04-ef15-4d9b-a141-998a03559d75" providerId="ADAL" clId="{62E9B5AE-779D-4001-92D3-8FF830A8A9C1}" dt="2025-10-26T05:53:02.406" v="2500" actId="47"/>
         <pc:sldMkLst>
           <pc:docMk/>
           <pc:sldMk cId="1808909135" sldId="572"/>
         </pc:sldMkLst>
+      </pc:sldChg>
+      <pc:sldChg chg="addSp modSp add mod">
+        <pc:chgData name="Pramod Naik" userId="ceb6df04-ef15-4d9b-a141-998a03559d75" providerId="ADAL" clId="{62E9B5AE-779D-4001-92D3-8FF830A8A9C1}" dt="2025-11-01T14:23:25.747" v="3998" actId="207"/>
+        <pc:sldMkLst>
+          <pc:docMk/>
+          <pc:sldMk cId="3371284684" sldId="572"/>
+        </pc:sldMkLst>
+        <pc:spChg chg="mod">
+          <ac:chgData name="Pramod Naik" userId="ceb6df04-ef15-4d9b-a141-998a03559d75" providerId="ADAL" clId="{62E9B5AE-779D-4001-92D3-8FF830A8A9C1}" dt="2025-11-01T14:22:05.546" v="3977" actId="113"/>
+          <ac:spMkLst>
+            <pc:docMk/>
+            <pc:sldMk cId="3371284684" sldId="572"/>
+            <ac:spMk id="3" creationId="{87C75E1D-1CE5-1261-20F2-DE4C478C4FD4}"/>
+          </ac:spMkLst>
+        </pc:spChg>
+        <pc:graphicFrameChg chg="add mod modGraphic">
+          <ac:chgData name="Pramod Naik" userId="ceb6df04-ef15-4d9b-a141-998a03559d75" providerId="ADAL" clId="{62E9B5AE-779D-4001-92D3-8FF830A8A9C1}" dt="2025-11-01T14:23:25.747" v="3998" actId="207"/>
+          <ac:graphicFrameMkLst>
+            <pc:docMk/>
+            <pc:sldMk cId="3371284684" sldId="572"/>
+            <ac:graphicFrameMk id="2" creationId="{CFF705E1-5BC1-64F6-0431-772B4BBBABAE}"/>
+          </ac:graphicFrameMkLst>
+        </pc:graphicFrameChg>
       </pc:sldChg>
       <pc:sldChg chg="addSp modSp add del mod">
         <pc:chgData name="Pramod Naik" userId="ceb6df04-ef15-4d9b-a141-998a03559d75" providerId="ADAL" clId="{62E9B5AE-779D-4001-92D3-8FF830A8A9C1}" dt="2025-10-26T05:53:02.438" v="2501" actId="47"/>
@@ -1874,11 +2126,41 @@
           <pc:sldMk cId="636557185" sldId="573"/>
         </pc:sldMkLst>
       </pc:sldChg>
+      <pc:sldChg chg="addSp modSp add mod">
+        <pc:chgData name="Pramod Naik" userId="ceb6df04-ef15-4d9b-a141-998a03559d75" providerId="ADAL" clId="{62E9B5AE-779D-4001-92D3-8FF830A8A9C1}" dt="2025-11-01T14:25:04.390" v="4053" actId="5793"/>
+        <pc:sldMkLst>
+          <pc:docMk/>
+          <pc:sldMk cId="699174406" sldId="573"/>
+        </pc:sldMkLst>
+        <pc:spChg chg="mod">
+          <ac:chgData name="Pramod Naik" userId="ceb6df04-ef15-4d9b-a141-998a03559d75" providerId="ADAL" clId="{62E9B5AE-779D-4001-92D3-8FF830A8A9C1}" dt="2025-11-01T14:25:04.390" v="4053" actId="5793"/>
+          <ac:spMkLst>
+            <pc:docMk/>
+            <pc:sldMk cId="699174406" sldId="573"/>
+            <ac:spMk id="3" creationId="{62BF5EFD-79BA-AE8F-19B2-C71FE0F7CB99}"/>
+          </ac:spMkLst>
+        </pc:spChg>
+        <pc:picChg chg="add mod">
+          <ac:chgData name="Pramod Naik" userId="ceb6df04-ef15-4d9b-a141-998a03559d75" providerId="ADAL" clId="{62E9B5AE-779D-4001-92D3-8FF830A8A9C1}" dt="2025-11-01T14:24:43.136" v="4038" actId="1076"/>
+          <ac:picMkLst>
+            <pc:docMk/>
+            <pc:sldMk cId="699174406" sldId="573"/>
+            <ac:picMk id="4" creationId="{3DE112C0-4CC9-175A-CF8D-8379C578B253}"/>
+          </ac:picMkLst>
+        </pc:picChg>
+      </pc:sldChg>
       <pc:sldChg chg="addSp modSp add del mod">
         <pc:chgData name="Pramod Naik" userId="ceb6df04-ef15-4d9b-a141-998a03559d75" providerId="ADAL" clId="{62E9B5AE-779D-4001-92D3-8FF830A8A9C1}" dt="2025-10-26T05:53:02.473" v="2502" actId="47"/>
         <pc:sldMkLst>
           <pc:docMk/>
           <pc:sldMk cId="2101197699" sldId="574"/>
+        </pc:sldMkLst>
+      </pc:sldChg>
+      <pc:sldChg chg="add">
+        <pc:chgData name="Pramod Naik" userId="ceb6df04-ef15-4d9b-a141-998a03559d75" providerId="ADAL" clId="{62E9B5AE-779D-4001-92D3-8FF830A8A9C1}" dt="2025-11-01T14:04:20.010" v="3673"/>
+        <pc:sldMkLst>
+          <pc:docMk/>
+          <pc:sldMk cId="4026936663" sldId="574"/>
         </pc:sldMkLst>
       </pc:sldChg>
       <pc:sldChg chg="add del">
@@ -1888,11 +2170,32 @@
           <pc:sldMk cId="1438792373" sldId="575"/>
         </pc:sldMkLst>
       </pc:sldChg>
+      <pc:sldChg chg="add">
+        <pc:chgData name="Pramod Naik" userId="ceb6df04-ef15-4d9b-a141-998a03559d75" providerId="ADAL" clId="{62E9B5AE-779D-4001-92D3-8FF830A8A9C1}" dt="2025-11-01T14:04:20.055" v="3674"/>
+        <pc:sldMkLst>
+          <pc:docMk/>
+          <pc:sldMk cId="3130721367" sldId="575"/>
+        </pc:sldMkLst>
+      </pc:sldChg>
       <pc:sldChg chg="add del">
         <pc:chgData name="Pramod Naik" userId="ceb6df04-ef15-4d9b-a141-998a03559d75" providerId="ADAL" clId="{62E9B5AE-779D-4001-92D3-8FF830A8A9C1}" dt="2025-10-24T05:15:09.265" v="2386" actId="47"/>
         <pc:sldMkLst>
           <pc:docMk/>
           <pc:sldMk cId="34796182" sldId="576"/>
+        </pc:sldMkLst>
+      </pc:sldChg>
+      <pc:sldChg chg="add">
+        <pc:chgData name="Pramod Naik" userId="ceb6df04-ef15-4d9b-a141-998a03559d75" providerId="ADAL" clId="{62E9B5AE-779D-4001-92D3-8FF830A8A9C1}" dt="2025-11-01T14:04:20.090" v="3675"/>
+        <pc:sldMkLst>
+          <pc:docMk/>
+          <pc:sldMk cId="1462992910" sldId="576"/>
+        </pc:sldMkLst>
+      </pc:sldChg>
+      <pc:sldChg chg="add">
+        <pc:chgData name="Pramod Naik" userId="ceb6df04-ef15-4d9b-a141-998a03559d75" providerId="ADAL" clId="{62E9B5AE-779D-4001-92D3-8FF830A8A9C1}" dt="2025-11-01T14:04:20.110" v="3676"/>
+        <pc:sldMkLst>
+          <pc:docMk/>
+          <pc:sldMk cId="2559913098" sldId="577"/>
         </pc:sldMkLst>
       </pc:sldChg>
       <pc:sldChg chg="add del">
@@ -1902,11 +2205,60 @@
           <pc:sldMk cId="2734079874" sldId="577"/>
         </pc:sldMkLst>
       </pc:sldChg>
+      <pc:sldChg chg="add">
+        <pc:chgData name="Pramod Naik" userId="ceb6df04-ef15-4d9b-a141-998a03559d75" providerId="ADAL" clId="{62E9B5AE-779D-4001-92D3-8FF830A8A9C1}" dt="2025-11-01T14:04:20.153" v="3677"/>
+        <pc:sldMkLst>
+          <pc:docMk/>
+          <pc:sldMk cId="238499470" sldId="578"/>
+        </pc:sldMkLst>
+      </pc:sldChg>
       <pc:sldChg chg="addSp delSp modSp add del mod">
         <pc:chgData name="Pramod Naik" userId="ceb6df04-ef15-4d9b-a141-998a03559d75" providerId="ADAL" clId="{62E9B5AE-779D-4001-92D3-8FF830A8A9C1}" dt="2025-10-26T05:53:02.506" v="2503" actId="47"/>
         <pc:sldMkLst>
           <pc:docMk/>
           <pc:sldMk cId="2851575667" sldId="578"/>
+        </pc:sldMkLst>
+      </pc:sldChg>
+      <pc:sldChg chg="add">
+        <pc:chgData name="Pramod Naik" userId="ceb6df04-ef15-4d9b-a141-998a03559d75" providerId="ADAL" clId="{62E9B5AE-779D-4001-92D3-8FF830A8A9C1}" dt="2025-11-01T14:04:20.176" v="3678"/>
+        <pc:sldMkLst>
+          <pc:docMk/>
+          <pc:sldMk cId="4133616361" sldId="579"/>
+        </pc:sldMkLst>
+      </pc:sldChg>
+      <pc:sldChg chg="add">
+        <pc:chgData name="Pramod Naik" userId="ceb6df04-ef15-4d9b-a141-998a03559d75" providerId="ADAL" clId="{62E9B5AE-779D-4001-92D3-8FF830A8A9C1}" dt="2025-11-01T14:04:20.217" v="3679"/>
+        <pc:sldMkLst>
+          <pc:docMk/>
+          <pc:sldMk cId="133758683" sldId="580"/>
+        </pc:sldMkLst>
+      </pc:sldChg>
+      <pc:sldChg chg="add">
+        <pc:chgData name="Pramod Naik" userId="ceb6df04-ef15-4d9b-a141-998a03559d75" providerId="ADAL" clId="{62E9B5AE-779D-4001-92D3-8FF830A8A9C1}" dt="2025-11-01T14:04:20.245" v="3680"/>
+        <pc:sldMkLst>
+          <pc:docMk/>
+          <pc:sldMk cId="2779355306" sldId="581"/>
+        </pc:sldMkLst>
+      </pc:sldChg>
+      <pc:sldChg chg="add">
+        <pc:chgData name="Pramod Naik" userId="ceb6df04-ef15-4d9b-a141-998a03559d75" providerId="ADAL" clId="{62E9B5AE-779D-4001-92D3-8FF830A8A9C1}" dt="2025-11-01T14:04:20.283" v="3681"/>
+        <pc:sldMkLst>
+          <pc:docMk/>
+          <pc:sldMk cId="1341148807" sldId="582"/>
+        </pc:sldMkLst>
+      </pc:sldChg>
+      <pc:sldChg chg="add">
+        <pc:chgData name="Pramod Naik" userId="ceb6df04-ef15-4d9b-a141-998a03559d75" providerId="ADAL" clId="{62E9B5AE-779D-4001-92D3-8FF830A8A9C1}" dt="2025-11-01T14:04:20.314" v="3682"/>
+        <pc:sldMkLst>
+          <pc:docMk/>
+          <pc:sldMk cId="1068831768" sldId="583"/>
+        </pc:sldMkLst>
+      </pc:sldChg>
+      <pc:sldChg chg="add">
+        <pc:chgData name="Pramod Naik" userId="ceb6df04-ef15-4d9b-a141-998a03559d75" providerId="ADAL" clId="{62E9B5AE-779D-4001-92D3-8FF830A8A9C1}" dt="2025-11-01T14:04:20.351" v="3683"/>
+        <pc:sldMkLst>
+          <pc:docMk/>
+          <pc:sldMk cId="4084032356" sldId="584"/>
         </pc:sldMkLst>
       </pc:sldChg>
     </pc:docChg>
@@ -2084,7 +2436,7 @@
           <a:p>
             <a:fld id="{61532AF1-4615-4667-912A-829B12F8C4D2}" type="datetimeFigureOut">
               <a:rPr lang="en-IN" smtClean="0"/>
-              <a:t>29-10-2025</a:t>
+              <a:t>01-11-2025</a:t>
             </a:fld>
             <a:endParaRPr lang="en-IN"/>
           </a:p>
@@ -2501,7 +2853,7 @@
           <a:p>
             <a:fld id="{C43A76A3-ADC8-4477-8FC1-B9DD55D84908}" type="datetime1">
               <a:rPr lang="en-US" smtClean="0"/>
-              <a:t>10/29/2025</a:t>
+              <a:t>11/1/2025</a:t>
             </a:fld>
             <a:endParaRPr lang="en-US" dirty="0"/>
           </a:p>
@@ -2699,7 +3051,7 @@
           <a:p>
             <a:fld id="{D6762538-DC4D-4667-96E5-B3278DDF8B12}" type="datetime1">
               <a:rPr lang="en-US" smtClean="0"/>
-              <a:t>10/29/2025</a:t>
+              <a:t>11/1/2025</a:t>
             </a:fld>
             <a:endParaRPr lang="en-US"/>
           </a:p>
@@ -2907,7 +3259,7 @@
           <a:p>
             <a:fld id="{05880548-5C08-4BE3-B63E-F2BB63B0B00C}" type="datetime1">
               <a:rPr lang="en-US" smtClean="0"/>
-              <a:t>10/29/2025</a:t>
+              <a:t>11/1/2025</a:t>
             </a:fld>
             <a:endParaRPr lang="en-US"/>
           </a:p>
@@ -3105,7 +3457,7 @@
           <a:p>
             <a:fld id="{DE7F49BE-398D-479A-8A7E-5DDBCA61EDCB}" type="datetime1">
               <a:rPr lang="en-US" smtClean="0"/>
-              <a:t>10/29/2025</a:t>
+              <a:t>11/1/2025</a:t>
             </a:fld>
             <a:endParaRPr lang="en-US" dirty="0"/>
           </a:p>
@@ -3381,7 +3733,7 @@
           <a:p>
             <a:fld id="{CCD0C193-4974-4A1F-9C63-07D595E30D66}" type="datetime1">
               <a:rPr lang="en-US" smtClean="0"/>
-              <a:t>10/29/2025</a:t>
+              <a:t>11/1/2025</a:t>
             </a:fld>
             <a:endParaRPr lang="en-US"/>
           </a:p>
@@ -3648,7 +4000,7 @@
           <a:p>
             <a:fld id="{701AA87F-28D4-4BF0-B81F-877A89DFD5AC}" type="datetime1">
               <a:rPr lang="en-US" smtClean="0"/>
-              <a:t>10/29/2025</a:t>
+              <a:t>11/1/2025</a:t>
             </a:fld>
             <a:endParaRPr lang="en-US"/>
           </a:p>
@@ -4062,7 +4414,7 @@
           <a:p>
             <a:fld id="{A8A9F1F3-208B-49A3-B337-9C8ACEB3E0E1}" type="datetime1">
               <a:rPr lang="en-US" smtClean="0"/>
-              <a:t>10/29/2025</a:t>
+              <a:t>11/1/2025</a:t>
             </a:fld>
             <a:endParaRPr lang="en-US"/>
           </a:p>
@@ -4209,7 +4561,7 @@
           <a:p>
             <a:fld id="{27AF6CA6-7293-4AA2-A0E0-A3BF4416E786}" type="datetime1">
               <a:rPr lang="en-US" smtClean="0"/>
-              <a:t>10/29/2025</a:t>
+              <a:t>11/1/2025</a:t>
             </a:fld>
             <a:endParaRPr lang="en-US"/>
           </a:p>
@@ -4322,7 +4674,7 @@
           <a:p>
             <a:fld id="{98D87016-7BCD-46FB-8EE3-AB6C369108B4}" type="datetime1">
               <a:rPr lang="en-US" smtClean="0"/>
-              <a:t>10/29/2025</a:t>
+              <a:t>11/1/2025</a:t>
             </a:fld>
             <a:endParaRPr lang="en-US"/>
           </a:p>
@@ -4641,7 +4993,7 @@
           <a:p>
             <a:fld id="{A1547011-1FFC-4EF8-9A2E-53B4AD2ADBD4}" type="datetime1">
               <a:rPr lang="en-US" smtClean="0"/>
-              <a:t>10/29/2025</a:t>
+              <a:t>11/1/2025</a:t>
             </a:fld>
             <a:endParaRPr lang="en-US"/>
           </a:p>
@@ -4936,7 +5288,7 @@
           <a:p>
             <a:fld id="{9562EB47-45B4-4EF5-A743-B4885DD2F060}" type="datetime1">
               <a:rPr lang="en-US" smtClean="0"/>
-              <a:t>10/29/2025</a:t>
+              <a:t>11/1/2025</a:t>
             </a:fld>
             <a:endParaRPr lang="en-US"/>
           </a:p>
@@ -6321,7 +6673,7 @@
           <a:p>
             <a:fld id="{4A8D24A4-5FEC-4062-8995-EB21925B3B40}" type="datetime1">
               <a:rPr lang="en-US" smtClean="0"/>
-              <a:t>10/29/2025</a:t>
+              <a:t>11/1/2025</a:t>
             </a:fld>
             <a:endParaRPr lang="en-US" sz="1000" dirty="0"/>
           </a:p>
@@ -7504,7 +7856,7 @@
               <a:buAutoNum type="arabicPeriod"/>
             </a:pPr>
             <a:r>
-              <a:rPr lang="en-IN" sz="2800" dirty="0"/>
+              <a:rPr lang="en-IN" sz="2800" b="1" dirty="0"/>
               <a:t>Cookies</a:t>
             </a:r>
           </a:p>
@@ -7948,12 +8300,20 @@
               <a:t>: http://127.0.0.1:8000/items</a:t>
             </a:r>
             <a:r>
+              <a:rPr lang="en-US" sz="2800" b="1" dirty="0">
+                <a:solidFill>
+                  <a:srgbClr val="C00000"/>
+                </a:solidFill>
+              </a:rPr>
+              <a:t>?</a:t>
+            </a:r>
+            <a:r>
               <a:rPr lang="en-US" sz="2400" b="1" dirty="0">
                 <a:solidFill>
                   <a:srgbClr val="C00000"/>
                 </a:solidFill>
               </a:rPr>
-              <a:t>?category=books&amp;limit=5</a:t>
+              <a:t>category=books&amp;limit=5</a:t>
             </a:r>
           </a:p>
           <a:p>
@@ -13291,6 +13651,89 @@
         <p:cNvPr id="1" name="">
           <a:extLst>
             <a:ext uri="{FF2B5EF4-FFF2-40B4-BE49-F238E27FC236}">
+              <a16:creationId xmlns:a16="http://schemas.microsoft.com/office/drawing/2014/main" id="{B9F26981-E6C1-FF15-497A-47B0DC8B3221}"/>
+            </a:ext>
+          </a:extLst>
+        </p:cNvPr>
+        <p:cNvGrpSpPr/>
+        <p:nvPr/>
+      </p:nvGrpSpPr>
+      <p:grpSpPr>
+        <a:xfrm>
+          <a:off x="0" y="0"/>
+          <a:ext cx="0" cy="0"/>
+          <a:chOff x="0" y="0"/>
+          <a:chExt cx="0" cy="0"/>
+        </a:xfrm>
+      </p:grpSpPr>
+      <p:pic>
+        <p:nvPicPr>
+          <p:cNvPr id="2050" name="Picture 2" descr="Connecting FastAPI to a Database with SQLModel">
+            <a:extLst>
+              <a:ext uri="{FF2B5EF4-FFF2-40B4-BE49-F238E27FC236}">
+                <a16:creationId xmlns:a16="http://schemas.microsoft.com/office/drawing/2014/main" id="{F581DCC5-6A64-8FC8-35F6-9DD8C8F6F6B3}"/>
+              </a:ext>
+            </a:extLst>
+          </p:cNvPr>
+          <p:cNvPicPr>
+            <a:picLocks noChangeAspect="1" noChangeArrowheads="1"/>
+          </p:cNvPicPr>
+          <p:nvPr/>
+        </p:nvPicPr>
+        <p:blipFill>
+          <a:blip r:embed="rId2">
+            <a:extLst>
+              <a:ext uri="{28A0092B-C50C-407E-A947-70E740481C1C}">
+                <a14:useLocalDpi xmlns:a14="http://schemas.microsoft.com/office/drawing/2010/main" val="0"/>
+              </a:ext>
+            </a:extLst>
+          </a:blip>
+          <a:srcRect/>
+          <a:stretch>
+            <a:fillRect/>
+          </a:stretch>
+        </p:blipFill>
+        <p:spPr bwMode="auto">
+          <a:xfrm>
+            <a:off x="1034143" y="0"/>
+            <a:ext cx="10123714" cy="6749143"/>
+          </a:xfrm>
+          <a:prstGeom prst="rect">
+            <a:avLst/>
+          </a:prstGeom>
+          <a:noFill/>
+          <a:extLst>
+            <a:ext uri="{909E8E84-426E-40DD-AFC4-6F175D3DCCD1}">
+              <a14:hiddenFill xmlns:a14="http://schemas.microsoft.com/office/drawing/2010/main">
+                <a:solidFill>
+                  <a:srgbClr val="FFFFFF"/>
+                </a:solidFill>
+              </a14:hiddenFill>
+            </a:ext>
+          </a:extLst>
+        </p:spPr>
+      </p:pic>
+    </p:spTree>
+    <p:extLst>
+      <p:ext uri="{BB962C8B-B14F-4D97-AF65-F5344CB8AC3E}">
+        <p14:creationId xmlns:p14="http://schemas.microsoft.com/office/powerpoint/2010/main" val="1794317502"/>
+      </p:ext>
+    </p:extLst>
+  </p:cSld>
+  <p:clrMapOvr>
+    <a:masterClrMapping/>
+  </p:clrMapOvr>
+</p:sld>
+</file>
+
+<file path=ppt/slides/slide42.xml><?xml version="1.0" encoding="utf-8"?>
+<p:sld xmlns:a="http://schemas.openxmlformats.org/drawingml/2006/main" xmlns:r="http://schemas.openxmlformats.org/officeDocument/2006/relationships" xmlns:p="http://schemas.openxmlformats.org/presentationml/2006/main">
+  <p:cSld>
+    <p:spTree>
+      <p:nvGrpSpPr>
+        <p:cNvPr id="1" name="">
+          <a:extLst>
+            <a:ext uri="{FF2B5EF4-FFF2-40B4-BE49-F238E27FC236}">
               <a16:creationId xmlns:a16="http://schemas.microsoft.com/office/drawing/2014/main" id="{3C8C2DE8-FC8E-26B0-88A4-0FD4542AFB8C}"/>
             </a:ext>
           </a:extLst>
@@ -13341,81 +13784,138 @@
           </a:p>
         </p:txBody>
       </p:sp>
+      <p:grpSp>
+        <p:nvGrpSpPr>
+          <p:cNvPr id="6" name="Group 5">
+            <a:extLst>
+              <a:ext uri="{FF2B5EF4-FFF2-40B4-BE49-F238E27FC236}">
+                <a16:creationId xmlns:a16="http://schemas.microsoft.com/office/drawing/2014/main" id="{49601D0F-58B5-676D-9A15-6B1F2A3F9304}"/>
+              </a:ext>
+            </a:extLst>
+          </p:cNvPr>
+          <p:cNvGrpSpPr/>
+          <p:nvPr/>
+        </p:nvGrpSpPr>
+        <p:grpSpPr>
+          <a:xfrm>
+            <a:off x="0" y="-109629"/>
+            <a:ext cx="12213590" cy="6967630"/>
+            <a:chOff x="0" y="-109629"/>
+            <a:chExt cx="12213590" cy="6967630"/>
+          </a:xfrm>
+        </p:grpSpPr>
+        <p:pic>
+          <p:nvPicPr>
+            <p:cNvPr id="1026" name="Picture 2" descr="Deploying with Python + FastAPI + Postgres | by Ali Akram | Medium">
+              <a:extLst>
+                <a:ext uri="{FF2B5EF4-FFF2-40B4-BE49-F238E27FC236}">
+                  <a16:creationId xmlns:a16="http://schemas.microsoft.com/office/drawing/2014/main" id="{A4B8EA69-61EC-BD90-5B1D-226695348111}"/>
+                </a:ext>
+              </a:extLst>
+            </p:cNvPr>
+            <p:cNvPicPr>
+              <a:picLocks noChangeAspect="1" noChangeArrowheads="1"/>
+            </p:cNvPicPr>
+            <p:nvPr/>
+          </p:nvPicPr>
+          <p:blipFill rotWithShape="1">
+            <a:blip r:embed="rId2">
+              <a:extLst>
+                <a:ext uri="{28A0092B-C50C-407E-A947-70E740481C1C}">
+                  <a14:useLocalDpi xmlns:a14="http://schemas.microsoft.com/office/drawing/2010/main" val="0"/>
+                </a:ext>
+              </a:extLst>
+            </a:blip>
+            <a:srcRect b="16032"/>
+            <a:stretch>
+              <a:fillRect/>
+            </a:stretch>
+          </p:blipFill>
+          <p:spPr bwMode="auto">
+            <a:xfrm>
+              <a:off x="777240" y="0"/>
+              <a:ext cx="10659110" cy="6828888"/>
+            </a:xfrm>
+            <a:prstGeom prst="rect">
+              <a:avLst/>
+            </a:prstGeom>
+            <a:noFill/>
+            <a:extLst>
+              <a:ext uri="{909E8E84-426E-40DD-AFC4-6F175D3DCCD1}">
+                <a14:hiddenFill xmlns:a14="http://schemas.microsoft.com/office/drawing/2010/main">
+                  <a:solidFill>
+                    <a:srgbClr val="FFFFFF"/>
+                  </a:solidFill>
+                </a14:hiddenFill>
+              </a:ext>
+            </a:extLst>
+          </p:spPr>
+        </p:pic>
+        <p:pic>
+          <p:nvPicPr>
+            <p:cNvPr id="4" name="Picture 3">
+              <a:extLst>
+                <a:ext uri="{FF2B5EF4-FFF2-40B4-BE49-F238E27FC236}">
+                  <a16:creationId xmlns:a16="http://schemas.microsoft.com/office/drawing/2014/main" id="{77966D3B-8D55-5AA0-4C04-E4073BB8BB50}"/>
+                </a:ext>
+              </a:extLst>
+            </p:cNvPr>
+            <p:cNvPicPr>
+              <a:picLocks noChangeAspect="1"/>
+            </p:cNvPicPr>
+            <p:nvPr/>
+          </p:nvPicPr>
+          <p:blipFill>
+            <a:blip r:embed="rId3"/>
+            <a:stretch>
+              <a:fillRect/>
+            </a:stretch>
+          </p:blipFill>
+          <p:spPr>
+            <a:xfrm>
+              <a:off x="0" y="-1"/>
+              <a:ext cx="777240" cy="6858001"/>
+            </a:xfrm>
+            <a:prstGeom prst="rect">
+              <a:avLst/>
+            </a:prstGeom>
+          </p:spPr>
+        </p:pic>
+        <p:pic>
+          <p:nvPicPr>
+            <p:cNvPr id="5" name="Picture 4">
+              <a:extLst>
+                <a:ext uri="{FF2B5EF4-FFF2-40B4-BE49-F238E27FC236}">
+                  <a16:creationId xmlns:a16="http://schemas.microsoft.com/office/drawing/2014/main" id="{6CD3631C-A2F6-485B-9830-1404F936094A}"/>
+                </a:ext>
+              </a:extLst>
+            </p:cNvPr>
+            <p:cNvPicPr>
+              <a:picLocks noChangeAspect="1"/>
+            </p:cNvPicPr>
+            <p:nvPr/>
+          </p:nvPicPr>
+          <p:blipFill>
+            <a:blip r:embed="rId3"/>
+            <a:stretch>
+              <a:fillRect/>
+            </a:stretch>
+          </p:blipFill>
+          <p:spPr>
+            <a:xfrm>
+              <a:off x="11436350" y="-109629"/>
+              <a:ext cx="777240" cy="6967630"/>
+            </a:xfrm>
+            <a:prstGeom prst="rect">
+              <a:avLst/>
+            </a:prstGeom>
+          </p:spPr>
+        </p:pic>
+      </p:grpSp>
     </p:spTree>
     <p:extLst>
       <p:ext uri="{BB962C8B-B14F-4D97-AF65-F5344CB8AC3E}">
         <p14:creationId xmlns:p14="http://schemas.microsoft.com/office/powerpoint/2010/main" val="2473509293"/>
-      </p:ext>
-    </p:extLst>
-  </p:cSld>
-  <p:clrMapOvr>
-    <a:masterClrMapping/>
-  </p:clrMapOvr>
-</p:sld>
-</file>
-
-<file path=ppt/slides/slide42.xml><?xml version="1.0" encoding="utf-8"?>
-<p:sld xmlns:a="http://schemas.openxmlformats.org/drawingml/2006/main" xmlns:r="http://schemas.openxmlformats.org/officeDocument/2006/relationships" xmlns:p="http://schemas.openxmlformats.org/presentationml/2006/main">
-  <p:cSld>
-    <p:spTree>
-      <p:nvGrpSpPr>
-        <p:cNvPr id="1" name="">
-          <a:extLst>
-            <a:ext uri="{FF2B5EF4-FFF2-40B4-BE49-F238E27FC236}">
-              <a16:creationId xmlns:a16="http://schemas.microsoft.com/office/drawing/2014/main" id="{B9F26981-E6C1-FF15-497A-47B0DC8B3221}"/>
-            </a:ext>
-          </a:extLst>
-        </p:cNvPr>
-        <p:cNvGrpSpPr/>
-        <p:nvPr/>
-      </p:nvGrpSpPr>
-      <p:grpSpPr>
-        <a:xfrm>
-          <a:off x="0" y="0"/>
-          <a:ext cx="0" cy="0"/>
-          <a:chOff x="0" y="0"/>
-          <a:chExt cx="0" cy="0"/>
-        </a:xfrm>
-      </p:grpSpPr>
-      <p:sp>
-        <p:nvSpPr>
-          <p:cNvPr id="3" name="Content Placeholder 2">
-            <a:extLst>
-              <a:ext uri="{FF2B5EF4-FFF2-40B4-BE49-F238E27FC236}">
-                <a16:creationId xmlns:a16="http://schemas.microsoft.com/office/drawing/2014/main" id="{FC24096A-3BE6-88B2-F3CC-318F849A5EAF}"/>
-              </a:ext>
-            </a:extLst>
-          </p:cNvPr>
-          <p:cNvSpPr>
-            <a:spLocks noGrp="1"/>
-          </p:cNvSpPr>
-          <p:nvPr>
-            <p:ph idx="1"/>
-          </p:nvPr>
-        </p:nvSpPr>
-        <p:spPr>
-          <a:xfrm>
-            <a:off x="777240" y="696686"/>
-            <a:ext cx="10659110" cy="5480277"/>
-          </a:xfrm>
-        </p:spPr>
-        <p:txBody>
-          <a:bodyPr>
-            <a:normAutofit/>
-          </a:bodyPr>
-          <a:lstStyle/>
-          <a:p>
-            <a:pPr marL="0" indent="0">
-              <a:buNone/>
-            </a:pPr>
-            <a:endParaRPr lang="en-IN" sz="2400" dirty="0"/>
-          </a:p>
-        </p:txBody>
-      </p:sp>
-    </p:spTree>
-    <p:extLst>
-      <p:ext uri="{BB962C8B-B14F-4D97-AF65-F5344CB8AC3E}">
-        <p14:creationId xmlns:p14="http://schemas.microsoft.com/office/powerpoint/2010/main" val="1794317502"/>
       </p:ext>
     </p:extLst>
   </p:cSld>
@@ -13466,8 +13966,8 @@
         </p:nvSpPr>
         <p:spPr>
           <a:xfrm>
-            <a:off x="777240" y="696686"/>
-            <a:ext cx="10659110" cy="5480277"/>
+            <a:off x="777240" y="681037"/>
+            <a:ext cx="10659110" cy="5495926"/>
           </a:xfrm>
         </p:spPr>
         <p:txBody>
@@ -13479,10 +13979,184 @@
             <a:pPr marL="0" indent="0">
               <a:buNone/>
             </a:pPr>
-            <a:endParaRPr lang="en-IN" sz="2400" dirty="0"/>
+            <a:r>
+              <a:rPr lang="en-US" sz="2800" b="1" dirty="0"/>
+              <a:t>PostgreSQL:</a:t>
+            </a:r>
+          </a:p>
+          <a:p>
+            <a:r>
+              <a:rPr lang="en-US" sz="2400" dirty="0"/>
+              <a:t>PostgreSQL (often called </a:t>
+            </a:r>
+            <a:r>
+              <a:rPr lang="en-US" sz="2400" b="1" dirty="0"/>
+              <a:t>Postgres</a:t>
+            </a:r>
+            <a:r>
+              <a:rPr lang="en-US" sz="2400" dirty="0"/>
+              <a:t>) is an </a:t>
+            </a:r>
+            <a:r>
+              <a:rPr lang="en-US" sz="2400" b="1" dirty="0"/>
+              <a:t>open-source, powerful, and advanced relational database management system (RDBMS)</a:t>
+            </a:r>
+            <a:r>
+              <a:rPr lang="en-US" sz="2400" dirty="0"/>
+              <a:t>. It is used to </a:t>
+            </a:r>
+            <a:r>
+              <a:rPr lang="en-US" sz="2400" b="1" dirty="0"/>
+              <a:t>store, organize, and retrieve structured data</a:t>
+            </a:r>
+            <a:r>
+              <a:rPr lang="en-US" sz="2400" dirty="0"/>
+              <a:t> efficiently and reliably.</a:t>
+            </a:r>
+          </a:p>
+          <a:p>
+            <a:r>
+              <a:rPr lang="en-US" sz="2400" dirty="0"/>
+              <a:t>It stores data in </a:t>
+            </a:r>
+            <a:r>
+              <a:rPr lang="en-US" sz="2400" b="1" dirty="0"/>
+              <a:t>tables</a:t>
+            </a:r>
+            <a:r>
+              <a:rPr lang="en-US" sz="2400" dirty="0"/>
+              <a:t> (rows and columns) and supports </a:t>
+            </a:r>
+            <a:r>
+              <a:rPr lang="en-US" sz="2400" b="1" dirty="0"/>
+              <a:t>SQL</a:t>
+            </a:r>
+            <a:r>
+              <a:rPr lang="en-US" sz="2400" dirty="0"/>
+              <a:t> for queries.</a:t>
+            </a:r>
+          </a:p>
+          <a:p>
+            <a:r>
+              <a:rPr lang="en-US" sz="2400" b="1" dirty="0"/>
+              <a:t>PostgreSQL</a:t>
+            </a:r>
+            <a:r>
+              <a:rPr lang="en-US" sz="2400" dirty="0"/>
+              <a:t> is an </a:t>
+            </a:r>
+            <a:r>
+              <a:rPr lang="en-US" sz="2400" b="1" dirty="0"/>
+              <a:t>object-relational database management system (ORDBMS)</a:t>
+            </a:r>
+            <a:r>
+              <a:rPr lang="en-US" sz="2400" dirty="0"/>
+              <a:t> that uses </a:t>
+            </a:r>
+            <a:r>
+              <a:rPr lang="en-US" sz="2400" b="1" dirty="0"/>
+              <a:t>SQL</a:t>
+            </a:r>
+            <a:r>
+              <a:rPr lang="en-US" sz="2400" dirty="0"/>
+              <a:t> (Structured Query Language) for defining and manipulating data.</a:t>
+            </a:r>
+          </a:p>
+          <a:p>
+            <a:r>
+              <a:rPr lang="en-IN" sz="2400" b="1" dirty="0"/>
+              <a:t>Key Features of PostgreSQL:</a:t>
+            </a:r>
+          </a:p>
+          <a:p>
+            <a:pPr marL="457200" indent="-457200">
+              <a:buFont typeface="+mj-lt"/>
+              <a:buAutoNum type="arabicPeriod"/>
+            </a:pPr>
+            <a:r>
+              <a:rPr lang="en-IN" sz="2400" dirty="0"/>
+              <a:t>Open Source</a:t>
+            </a:r>
+          </a:p>
+          <a:p>
+            <a:pPr marL="457200" indent="-457200">
+              <a:buFont typeface="+mj-lt"/>
+              <a:buAutoNum type="arabicPeriod"/>
+            </a:pPr>
+            <a:r>
+              <a:rPr lang="en-IN" sz="2400" dirty="0"/>
+              <a:t>Cross-platform</a:t>
+            </a:r>
+          </a:p>
+          <a:p>
+            <a:pPr marL="457200" indent="-457200">
+              <a:buFont typeface="+mj-lt"/>
+              <a:buAutoNum type="arabicPeriod"/>
+            </a:pPr>
+            <a:r>
+              <a:rPr lang="en-IN" sz="2400" dirty="0"/>
+              <a:t>ACID Compliant</a:t>
+            </a:r>
+          </a:p>
+          <a:p>
+            <a:pPr marL="457200" indent="-457200">
+              <a:buFont typeface="+mj-lt"/>
+              <a:buAutoNum type="arabicPeriod"/>
+            </a:pPr>
+            <a:r>
+              <a:rPr lang="en-IN" sz="2400" dirty="0"/>
+              <a:t>Strong Security</a:t>
+            </a:r>
           </a:p>
         </p:txBody>
       </p:sp>
+      <p:pic>
+        <p:nvPicPr>
+          <p:cNvPr id="3074" name="Picture 2" descr="PostgreSQL - Wikipedia">
+            <a:extLst>
+              <a:ext uri="{FF2B5EF4-FFF2-40B4-BE49-F238E27FC236}">
+                <a16:creationId xmlns:a16="http://schemas.microsoft.com/office/drawing/2014/main" id="{23DB1387-FE1B-A757-97F1-2CCA1CABF6B8}"/>
+              </a:ext>
+            </a:extLst>
+          </p:cNvPr>
+          <p:cNvPicPr>
+            <a:picLocks noChangeAspect="1" noChangeArrowheads="1"/>
+          </p:cNvPicPr>
+          <p:nvPr/>
+        </p:nvPicPr>
+        <p:blipFill>
+          <a:blip r:embed="rId2">
+            <a:extLst>
+              <a:ext uri="{28A0092B-C50C-407E-A947-70E740481C1C}">
+                <a14:useLocalDpi xmlns:a14="http://schemas.microsoft.com/office/drawing/2010/main" val="0"/>
+              </a:ext>
+            </a:extLst>
+          </a:blip>
+          <a:srcRect/>
+          <a:stretch>
+            <a:fillRect/>
+          </a:stretch>
+        </p:blipFill>
+        <p:spPr bwMode="auto">
+          <a:xfrm>
+            <a:off x="9114745" y="4005263"/>
+            <a:ext cx="2105025" cy="2171700"/>
+          </a:xfrm>
+          <a:prstGeom prst="rect">
+            <a:avLst/>
+          </a:prstGeom>
+          <a:noFill/>
+          <a:extLst>
+            <a:ext uri="{909E8E84-426E-40DD-AFC4-6F175D3DCCD1}">
+              <a14:hiddenFill xmlns:a14="http://schemas.microsoft.com/office/drawing/2010/main">
+                <a:solidFill>
+                  <a:srgbClr val="FFFFFF"/>
+                </a:solidFill>
+              </a14:hiddenFill>
+            </a:ext>
+          </a:extLst>
+        </p:spPr>
+      </p:pic>
     </p:spTree>
     <p:extLst>
       <p:ext uri="{BB962C8B-B14F-4D97-AF65-F5344CB8AC3E}">
@@ -13497,6 +14171,390 @@
 </file>
 
 <file path=ppt/slides/slide44.xml><?xml version="1.0" encoding="utf-8"?>
+<p:sld xmlns:a="http://schemas.openxmlformats.org/drawingml/2006/main" xmlns:r="http://schemas.openxmlformats.org/officeDocument/2006/relationships" xmlns:p="http://schemas.openxmlformats.org/presentationml/2006/main">
+  <p:cSld>
+    <p:spTree>
+      <p:nvGrpSpPr>
+        <p:cNvPr id="1" name="">
+          <a:extLst>
+            <a:ext uri="{FF2B5EF4-FFF2-40B4-BE49-F238E27FC236}">
+              <a16:creationId xmlns:a16="http://schemas.microsoft.com/office/drawing/2014/main" id="{1DA7FBF6-D802-59E4-64DE-184A9FC550A0}"/>
+            </a:ext>
+          </a:extLst>
+        </p:cNvPr>
+        <p:cNvGrpSpPr/>
+        <p:nvPr/>
+      </p:nvGrpSpPr>
+      <p:grpSpPr>
+        <a:xfrm>
+          <a:off x="0" y="0"/>
+          <a:ext cx="0" cy="0"/>
+          <a:chOff x="0" y="0"/>
+          <a:chExt cx="0" cy="0"/>
+        </a:xfrm>
+      </p:grpSpPr>
+      <p:sp>
+        <p:nvSpPr>
+          <p:cNvPr id="3" name="Content Placeholder 2">
+            <a:extLst>
+              <a:ext uri="{FF2B5EF4-FFF2-40B4-BE49-F238E27FC236}">
+                <a16:creationId xmlns:a16="http://schemas.microsoft.com/office/drawing/2014/main" id="{F0BD15C9-DAF0-3253-6761-4709721837D1}"/>
+              </a:ext>
+            </a:extLst>
+          </p:cNvPr>
+          <p:cNvSpPr>
+            <a:spLocks noGrp="1"/>
+          </p:cNvSpPr>
+          <p:nvPr>
+            <p:ph idx="1"/>
+          </p:nvPr>
+        </p:nvSpPr>
+        <p:spPr>
+          <a:xfrm>
+            <a:off x="777240" y="696686"/>
+            <a:ext cx="10659110" cy="5480277"/>
+          </a:xfrm>
+        </p:spPr>
+        <p:txBody>
+          <a:bodyPr>
+            <a:normAutofit/>
+          </a:bodyPr>
+          <a:lstStyle/>
+          <a:p>
+            <a:pPr marL="0" indent="0">
+              <a:buNone/>
+            </a:pPr>
+            <a:r>
+              <a:rPr lang="en-US" sz="2400" b="1" dirty="0"/>
+              <a:t>Example: </a:t>
+            </a:r>
+            <a:r>
+              <a:rPr lang="en-US" sz="2400" dirty="0"/>
+              <a:t>Basic SQL in PostgreSQL (CRUD)</a:t>
+            </a:r>
+          </a:p>
+          <a:p>
+            <a:pPr marL="0" indent="0">
+              <a:buNone/>
+            </a:pPr>
+            <a:r>
+              <a:rPr lang="en-US" sz="2400" b="1" dirty="0"/>
+              <a:t>1. CREATE TABLE:</a:t>
+            </a:r>
+          </a:p>
+          <a:p>
+            <a:pPr marL="0" indent="0">
+              <a:buNone/>
+            </a:pPr>
+            <a:endParaRPr lang="en-IN" sz="2400" dirty="0"/>
+          </a:p>
+        </p:txBody>
+      </p:sp>
+      <p:pic>
+        <p:nvPicPr>
+          <p:cNvPr id="4" name="Picture 3">
+            <a:extLst>
+              <a:ext uri="{FF2B5EF4-FFF2-40B4-BE49-F238E27FC236}">
+                <a16:creationId xmlns:a16="http://schemas.microsoft.com/office/drawing/2014/main" id="{B3540E61-41BD-C529-F3F5-E658F2D9590A}"/>
+              </a:ext>
+            </a:extLst>
+          </p:cNvPr>
+          <p:cNvPicPr>
+            <a:picLocks noChangeAspect="1"/>
+          </p:cNvPicPr>
+          <p:nvPr/>
+        </p:nvPicPr>
+        <p:blipFill>
+          <a:blip r:embed="rId2"/>
+          <a:srcRect t="11773"/>
+          <a:stretch>
+            <a:fillRect/>
+          </a:stretch>
+        </p:blipFill>
+        <p:spPr>
+          <a:xfrm>
+            <a:off x="2214952" y="2046514"/>
+            <a:ext cx="4991391" cy="3408708"/>
+          </a:xfrm>
+          <a:prstGeom prst="rect">
+            <a:avLst/>
+          </a:prstGeom>
+        </p:spPr>
+      </p:pic>
+    </p:spTree>
+    <p:extLst>
+      <p:ext uri="{BB962C8B-B14F-4D97-AF65-F5344CB8AC3E}">
+        <p14:creationId xmlns:p14="http://schemas.microsoft.com/office/powerpoint/2010/main" val="1517013679"/>
+      </p:ext>
+    </p:extLst>
+  </p:cSld>
+  <p:clrMapOvr>
+    <a:masterClrMapping/>
+  </p:clrMapOvr>
+</p:sld>
+</file>
+
+<file path=ppt/slides/slide45.xml><?xml version="1.0" encoding="utf-8"?>
+<p:sld xmlns:a="http://schemas.openxmlformats.org/drawingml/2006/main" xmlns:r="http://schemas.openxmlformats.org/officeDocument/2006/relationships" xmlns:p="http://schemas.openxmlformats.org/presentationml/2006/main">
+  <p:cSld>
+    <p:spTree>
+      <p:nvGrpSpPr>
+        <p:cNvPr id="1" name="">
+          <a:extLst>
+            <a:ext uri="{FF2B5EF4-FFF2-40B4-BE49-F238E27FC236}">
+              <a16:creationId xmlns:a16="http://schemas.microsoft.com/office/drawing/2014/main" id="{8B2BE6B4-EE2D-F954-0859-3238092E5728}"/>
+            </a:ext>
+          </a:extLst>
+        </p:cNvPr>
+        <p:cNvGrpSpPr/>
+        <p:nvPr/>
+      </p:nvGrpSpPr>
+      <p:grpSpPr>
+        <a:xfrm>
+          <a:off x="0" y="0"/>
+          <a:ext cx="0" cy="0"/>
+          <a:chOff x="0" y="0"/>
+          <a:chExt cx="0" cy="0"/>
+        </a:xfrm>
+      </p:grpSpPr>
+      <p:sp>
+        <p:nvSpPr>
+          <p:cNvPr id="3" name="Content Placeholder 2">
+            <a:extLst>
+              <a:ext uri="{FF2B5EF4-FFF2-40B4-BE49-F238E27FC236}">
+                <a16:creationId xmlns:a16="http://schemas.microsoft.com/office/drawing/2014/main" id="{B3263A9C-41D5-DC27-AE5E-66517C1A8A59}"/>
+              </a:ext>
+            </a:extLst>
+          </p:cNvPr>
+          <p:cNvSpPr>
+            <a:spLocks noGrp="1"/>
+          </p:cNvSpPr>
+          <p:nvPr>
+            <p:ph idx="1"/>
+          </p:nvPr>
+        </p:nvSpPr>
+        <p:spPr>
+          <a:xfrm>
+            <a:off x="777240" y="696686"/>
+            <a:ext cx="10659110" cy="5480277"/>
+          </a:xfrm>
+        </p:spPr>
+        <p:txBody>
+          <a:bodyPr>
+            <a:normAutofit/>
+          </a:bodyPr>
+          <a:lstStyle/>
+          <a:p>
+            <a:pPr marL="0" indent="0">
+              <a:buNone/>
+            </a:pPr>
+            <a:r>
+              <a:rPr lang="en-IN" sz="2400" b="1" dirty="0"/>
+              <a:t>2. INSERT:</a:t>
+            </a:r>
+          </a:p>
+          <a:p>
+            <a:pPr marL="0" indent="0">
+              <a:buNone/>
+            </a:pPr>
+            <a:endParaRPr lang="en-IN" sz="2400" b="1" dirty="0"/>
+          </a:p>
+          <a:p>
+            <a:pPr marL="0" indent="0">
+              <a:buNone/>
+            </a:pPr>
+            <a:endParaRPr lang="en-IN" sz="2400" b="1" dirty="0"/>
+          </a:p>
+          <a:p>
+            <a:pPr marL="0" indent="0">
+              <a:buNone/>
+            </a:pPr>
+            <a:r>
+              <a:rPr lang="en-IN" sz="2400" b="1" dirty="0"/>
+              <a:t>3. SELECT</a:t>
+            </a:r>
+          </a:p>
+          <a:p>
+            <a:pPr marL="0" indent="0">
+              <a:buNone/>
+            </a:pPr>
+            <a:endParaRPr lang="en-IN" sz="2400" b="1" dirty="0"/>
+          </a:p>
+          <a:p>
+            <a:pPr marL="0" indent="0">
+              <a:buNone/>
+            </a:pPr>
+            <a:endParaRPr lang="en-IN" sz="2400" b="1" dirty="0"/>
+          </a:p>
+          <a:p>
+            <a:pPr marL="0" indent="0">
+              <a:buNone/>
+            </a:pPr>
+            <a:r>
+              <a:rPr lang="en-IN" sz="2400" b="1" dirty="0"/>
+              <a:t>4. UPDATE</a:t>
+            </a:r>
+          </a:p>
+          <a:p>
+            <a:pPr marL="0" indent="0">
+              <a:buNone/>
+            </a:pPr>
+            <a:endParaRPr lang="en-IN" sz="2400" b="1" dirty="0"/>
+          </a:p>
+          <a:p>
+            <a:pPr marL="0" indent="0">
+              <a:buNone/>
+            </a:pPr>
+            <a:endParaRPr lang="en-IN" sz="2400" b="1" dirty="0"/>
+          </a:p>
+          <a:p>
+            <a:pPr marL="0" indent="0">
+              <a:buNone/>
+            </a:pPr>
+            <a:r>
+              <a:rPr lang="en-IN" sz="2400" b="1" dirty="0"/>
+              <a:t>5. DELETE:</a:t>
+            </a:r>
+          </a:p>
+        </p:txBody>
+      </p:sp>
+      <p:pic>
+        <p:nvPicPr>
+          <p:cNvPr id="4" name="Picture 3">
+            <a:extLst>
+              <a:ext uri="{FF2B5EF4-FFF2-40B4-BE49-F238E27FC236}">
+                <a16:creationId xmlns:a16="http://schemas.microsoft.com/office/drawing/2014/main" id="{2F7C5F61-40DF-DA69-510B-E4FE5542F0CB}"/>
+              </a:ext>
+            </a:extLst>
+          </p:cNvPr>
+          <p:cNvPicPr>
+            <a:picLocks noChangeAspect="1"/>
+          </p:cNvPicPr>
+          <p:nvPr/>
+        </p:nvPicPr>
+        <p:blipFill>
+          <a:blip r:embed="rId2"/>
+          <a:srcRect t="8803" r="17581" b="69284"/>
+          <a:stretch>
+            <a:fillRect/>
+          </a:stretch>
+        </p:blipFill>
+        <p:spPr>
+          <a:xfrm>
+            <a:off x="2582011" y="696686"/>
+            <a:ext cx="7767933" cy="1091238"/>
+          </a:xfrm>
+          <a:prstGeom prst="rect">
+            <a:avLst/>
+          </a:prstGeom>
+        </p:spPr>
+      </p:pic>
+      <p:pic>
+        <p:nvPicPr>
+          <p:cNvPr id="6" name="Picture 5">
+            <a:extLst>
+              <a:ext uri="{FF2B5EF4-FFF2-40B4-BE49-F238E27FC236}">
+                <a16:creationId xmlns:a16="http://schemas.microsoft.com/office/drawing/2014/main" id="{436F1722-8529-ED38-B75B-7CB4EF90B1DB}"/>
+              </a:ext>
+            </a:extLst>
+          </p:cNvPr>
+          <p:cNvPicPr>
+            <a:picLocks noChangeAspect="1"/>
+          </p:cNvPicPr>
+          <p:nvPr/>
+        </p:nvPicPr>
+        <p:blipFill>
+          <a:blip r:embed="rId2"/>
+          <a:srcRect t="50000" r="17581" b="35274"/>
+          <a:stretch>
+            <a:fillRect/>
+          </a:stretch>
+        </p:blipFill>
+        <p:spPr>
+          <a:xfrm>
+            <a:off x="2582011" y="2325574"/>
+            <a:ext cx="7767933" cy="733312"/>
+          </a:xfrm>
+          <a:prstGeom prst="rect">
+            <a:avLst/>
+          </a:prstGeom>
+        </p:spPr>
+      </p:pic>
+      <p:pic>
+        <p:nvPicPr>
+          <p:cNvPr id="8" name="Picture 7">
+            <a:extLst>
+              <a:ext uri="{FF2B5EF4-FFF2-40B4-BE49-F238E27FC236}">
+                <a16:creationId xmlns:a16="http://schemas.microsoft.com/office/drawing/2014/main" id="{17A57875-2B92-4E86-8275-FA43CAAE948D}"/>
+              </a:ext>
+            </a:extLst>
+          </p:cNvPr>
+          <p:cNvPicPr>
+            <a:picLocks noChangeAspect="1"/>
+          </p:cNvPicPr>
+          <p:nvPr/>
+        </p:nvPicPr>
+        <p:blipFill>
+          <a:blip r:embed="rId2"/>
+          <a:srcRect t="82081" b="5746"/>
+          <a:stretch>
+            <a:fillRect/>
+          </a:stretch>
+        </p:blipFill>
+        <p:spPr>
+          <a:xfrm>
+            <a:off x="2582011" y="3799115"/>
+            <a:ext cx="9424934" cy="606183"/>
+          </a:xfrm>
+          <a:prstGeom prst="rect">
+            <a:avLst/>
+          </a:prstGeom>
+        </p:spPr>
+      </p:pic>
+      <p:pic>
+        <p:nvPicPr>
+          <p:cNvPr id="10" name="Picture 9">
+            <a:extLst>
+              <a:ext uri="{FF2B5EF4-FFF2-40B4-BE49-F238E27FC236}">
+                <a16:creationId xmlns:a16="http://schemas.microsoft.com/office/drawing/2014/main" id="{CACE381B-CEAD-7E87-2F8C-5311F69EE758}"/>
+              </a:ext>
+            </a:extLst>
+          </p:cNvPr>
+          <p:cNvPicPr>
+            <a:picLocks noChangeAspect="1"/>
+          </p:cNvPicPr>
+          <p:nvPr/>
+        </p:nvPicPr>
+        <p:blipFill>
+          <a:blip r:embed="rId3"/>
+          <a:stretch>
+            <a:fillRect/>
+          </a:stretch>
+        </p:blipFill>
+        <p:spPr>
+          <a:xfrm>
+            <a:off x="2582011" y="5267420"/>
+            <a:ext cx="6407790" cy="742036"/>
+          </a:xfrm>
+          <a:prstGeom prst="rect">
+            <a:avLst/>
+          </a:prstGeom>
+        </p:spPr>
+      </p:pic>
+    </p:spTree>
+    <p:extLst>
+      <p:ext uri="{BB962C8B-B14F-4D97-AF65-F5344CB8AC3E}">
+        <p14:creationId xmlns:p14="http://schemas.microsoft.com/office/powerpoint/2010/main" val="2275605110"/>
+      </p:ext>
+    </p:extLst>
+  </p:cSld>
+  <p:clrMapOvr>
+    <a:masterClrMapping/>
+  </p:clrMapOvr>
+</p:sld>
+</file>
+
+<file path=ppt/slides/slide46.xml><?xml version="1.0" encoding="utf-8"?>
 <p:sld xmlns:a="http://schemas.openxmlformats.org/drawingml/2006/main" xmlns:r="http://schemas.openxmlformats.org/officeDocument/2006/relationships" xmlns:p="http://schemas.openxmlformats.org/presentationml/2006/main">
   <p:cSld>
     <p:spTree>
@@ -13543,9 +14601,174 @@
         </p:spPr>
         <p:txBody>
           <a:bodyPr>
-            <a:normAutofit/>
+            <a:normAutofit fontScale="92500" lnSpcReduction="10000"/>
           </a:bodyPr>
           <a:lstStyle/>
+          <a:p>
+            <a:pPr marL="0" indent="0">
+              <a:buNone/>
+            </a:pPr>
+            <a:r>
+              <a:rPr lang="en-IN" sz="2600" b="1" dirty="0" err="1"/>
+              <a:t>FastAPI</a:t>
+            </a:r>
+            <a:r>
+              <a:rPr lang="en-IN" sz="2600" b="1" dirty="0"/>
+              <a:t> + PostgreSQL Integration:</a:t>
+            </a:r>
+          </a:p>
+          <a:p>
+            <a:pPr marL="0" indent="0">
+              <a:buNone/>
+            </a:pPr>
+            <a:r>
+              <a:rPr lang="en-US" sz="2400" b="1" dirty="0"/>
+              <a:t>Why Do We Need a Real Database?</a:t>
+            </a:r>
+          </a:p>
+          <a:p>
+            <a:pPr marL="0" indent="0">
+              <a:buNone/>
+            </a:pPr>
+            <a:r>
+              <a:rPr lang="en-US" sz="2600" dirty="0"/>
+              <a:t>When we use an </a:t>
+            </a:r>
+            <a:r>
+              <a:rPr lang="en-US" sz="2600" b="1" dirty="0">
+                <a:solidFill>
+                  <a:srgbClr val="C00000"/>
+                </a:solidFill>
+              </a:rPr>
+              <a:t>in-memory</a:t>
+            </a:r>
+            <a:r>
+              <a:rPr lang="en-US" sz="2600" b="1" dirty="0"/>
+              <a:t> list or dictionary</a:t>
+            </a:r>
+            <a:r>
+              <a:rPr lang="en-US" sz="2600" dirty="0"/>
+              <a:t>:</a:t>
+            </a:r>
+          </a:p>
+          <a:p>
+            <a:pPr lvl="1"/>
+            <a:r>
+              <a:rPr lang="en-US" sz="2600" dirty="0"/>
+              <a:t>Data disappears when the app restarts.</a:t>
+            </a:r>
+          </a:p>
+          <a:p>
+            <a:pPr lvl="1"/>
+            <a:r>
+              <a:rPr lang="en-US" sz="2600" dirty="0"/>
+              <a:t>Concurrency (multiple users) isn’t handled.</a:t>
+            </a:r>
+          </a:p>
+          <a:p>
+            <a:pPr lvl="1"/>
+            <a:r>
+              <a:rPr lang="en-US" sz="2600" dirty="0"/>
+              <a:t>No query optimization or indexing.</a:t>
+            </a:r>
+          </a:p>
+          <a:p>
+            <a:pPr lvl="1"/>
+            <a:r>
+              <a:rPr lang="en-US" sz="2600" dirty="0"/>
+              <a:t>No relationship between data.</a:t>
+            </a:r>
+          </a:p>
+          <a:p>
+            <a:r>
+              <a:rPr lang="en-US" sz="2400" dirty="0"/>
+              <a:t>👉 To make the data </a:t>
+            </a:r>
+            <a:r>
+              <a:rPr lang="en-US" sz="2400" b="1" dirty="0"/>
+              <a:t>persistent, reliable, and scalable</a:t>
+            </a:r>
+            <a:r>
+              <a:rPr lang="en-US" sz="2400" dirty="0"/>
+              <a:t>, we need a </a:t>
+            </a:r>
+            <a:r>
+              <a:rPr lang="en-US" sz="2400" b="1" dirty="0"/>
+              <a:t>database system</a:t>
+            </a:r>
+            <a:r>
+              <a:rPr lang="en-US" sz="2400" dirty="0"/>
+              <a:t>.</a:t>
+            </a:r>
+          </a:p>
+          <a:p>
+            <a:pPr marL="0" indent="0">
+              <a:buNone/>
+            </a:pPr>
+            <a:endParaRPr lang="en-US" sz="2400" b="1" dirty="0"/>
+          </a:p>
+          <a:p>
+            <a:pPr marL="0" indent="0">
+              <a:buNone/>
+            </a:pPr>
+            <a:r>
+              <a:rPr lang="en-US" sz="2600" b="1" dirty="0"/>
+              <a:t>PostgreSQL</a:t>
+            </a:r>
+            <a:r>
+              <a:rPr lang="en-US" sz="2400" dirty="0"/>
+              <a:t> is ideal because it’s:</a:t>
+            </a:r>
+          </a:p>
+          <a:p>
+            <a:r>
+              <a:rPr lang="en-US" sz="2400" dirty="0"/>
+              <a:t>Open-source</a:t>
+            </a:r>
+          </a:p>
+          <a:p>
+            <a:r>
+              <a:rPr lang="en-US" sz="2400" b="1" dirty="0"/>
+              <a:t>SQL-compliant</a:t>
+            </a:r>
+          </a:p>
+          <a:p>
+            <a:r>
+              <a:rPr lang="en-US" sz="2400" dirty="0"/>
+              <a:t>Highly reliable</a:t>
+            </a:r>
+          </a:p>
+          <a:p>
+            <a:r>
+              <a:rPr lang="en-US" sz="2400" dirty="0"/>
+              <a:t>Works well with </a:t>
+            </a:r>
+            <a:r>
+              <a:rPr lang="en-US" sz="2400" b="1" dirty="0" err="1">
+                <a:solidFill>
+                  <a:srgbClr val="C00000"/>
+                </a:solidFill>
+              </a:rPr>
+              <a:t>FastAPI</a:t>
+            </a:r>
+            <a:r>
+              <a:rPr lang="en-US" sz="2400" dirty="0"/>
+              <a:t> and </a:t>
+            </a:r>
+            <a:r>
+              <a:rPr lang="en-US" sz="2400" b="1" dirty="0" err="1">
+                <a:solidFill>
+                  <a:srgbClr val="C00000"/>
+                </a:solidFill>
+              </a:rPr>
+              <a:t>SQLAlchemy</a:t>
+            </a:r>
+            <a:endParaRPr lang="en-IN" sz="2400" b="1" dirty="0">
+              <a:solidFill>
+                <a:srgbClr val="C00000"/>
+              </a:solidFill>
+            </a:endParaRPr>
+          </a:p>
           <a:p>
             <a:pPr marL="0" indent="0">
               <a:buNone/>
@@ -13558,6 +14781,1091 @@
     <p:extLst>
       <p:ext uri="{BB962C8B-B14F-4D97-AF65-F5344CB8AC3E}">
         <p14:creationId xmlns:p14="http://schemas.microsoft.com/office/powerpoint/2010/main" val="3712268275"/>
+      </p:ext>
+    </p:extLst>
+  </p:cSld>
+  <p:clrMapOvr>
+    <a:masterClrMapping/>
+  </p:clrMapOvr>
+</p:sld>
+</file>
+
+<file path=ppt/slides/slide47.xml><?xml version="1.0" encoding="utf-8"?>
+<p:sld xmlns:a="http://schemas.openxmlformats.org/drawingml/2006/main" xmlns:r="http://schemas.openxmlformats.org/officeDocument/2006/relationships" xmlns:p="http://schemas.openxmlformats.org/presentationml/2006/main">
+  <p:cSld>
+    <p:spTree>
+      <p:nvGrpSpPr>
+        <p:cNvPr id="1" name="">
+          <a:extLst>
+            <a:ext uri="{FF2B5EF4-FFF2-40B4-BE49-F238E27FC236}">
+              <a16:creationId xmlns:a16="http://schemas.microsoft.com/office/drawing/2014/main" id="{36E43719-3788-2719-8DDE-A57C6D07CE7B}"/>
+            </a:ext>
+          </a:extLst>
+        </p:cNvPr>
+        <p:cNvGrpSpPr/>
+        <p:nvPr/>
+      </p:nvGrpSpPr>
+      <p:grpSpPr>
+        <a:xfrm>
+          <a:off x="0" y="0"/>
+          <a:ext cx="0" cy="0"/>
+          <a:chOff x="0" y="0"/>
+          <a:chExt cx="0" cy="0"/>
+        </a:xfrm>
+      </p:grpSpPr>
+      <p:sp>
+        <p:nvSpPr>
+          <p:cNvPr id="3" name="Content Placeholder 2">
+            <a:extLst>
+              <a:ext uri="{FF2B5EF4-FFF2-40B4-BE49-F238E27FC236}">
+                <a16:creationId xmlns:a16="http://schemas.microsoft.com/office/drawing/2014/main" id="{33B14B21-6322-A82C-BD09-4093DCB77DBC}"/>
+              </a:ext>
+            </a:extLst>
+          </p:cNvPr>
+          <p:cNvSpPr>
+            <a:spLocks noGrp="1"/>
+          </p:cNvSpPr>
+          <p:nvPr>
+            <p:ph idx="1"/>
+          </p:nvPr>
+        </p:nvSpPr>
+        <p:spPr>
+          <a:xfrm>
+            <a:off x="766445" y="688861"/>
+            <a:ext cx="10659110" cy="5480277"/>
+          </a:xfrm>
+        </p:spPr>
+        <p:txBody>
+          <a:bodyPr>
+            <a:normAutofit/>
+          </a:bodyPr>
+          <a:lstStyle/>
+          <a:p>
+            <a:pPr marL="0" indent="0">
+              <a:buNone/>
+            </a:pPr>
+            <a:r>
+              <a:rPr lang="en-IN" sz="2800" b="1" dirty="0"/>
+              <a:t>What is </a:t>
+            </a:r>
+            <a:r>
+              <a:rPr lang="en-US" sz="2800" b="1" dirty="0" err="1">
+                <a:solidFill>
+                  <a:srgbClr val="C00000"/>
+                </a:solidFill>
+              </a:rPr>
+              <a:t>SQLAlchemy</a:t>
+            </a:r>
+            <a:r>
+              <a:rPr lang="en-US" sz="2800" b="1" dirty="0">
+                <a:solidFill>
+                  <a:srgbClr val="C00000"/>
+                </a:solidFill>
+              </a:rPr>
+              <a:t>?</a:t>
+            </a:r>
+            <a:endParaRPr lang="en-IN" sz="2800" b="1" dirty="0"/>
+          </a:p>
+          <a:p>
+            <a:pPr marL="0" indent="0">
+              <a:buNone/>
+            </a:pPr>
+            <a:r>
+              <a:rPr lang="en-US" sz="2400" b="1" dirty="0" err="1"/>
+              <a:t>SQLAlchemy</a:t>
+            </a:r>
+            <a:r>
+              <a:rPr lang="en-US" sz="2400" dirty="0"/>
+              <a:t> a </a:t>
+            </a:r>
+            <a:r>
+              <a:rPr lang="en-US" sz="2400" b="1" dirty="0">
+                <a:solidFill>
+                  <a:srgbClr val="C00000"/>
+                </a:solidFill>
+              </a:rPr>
+              <a:t>Python</a:t>
+            </a:r>
+            <a:r>
+              <a:rPr lang="en-US" sz="2400" dirty="0"/>
+              <a:t> </a:t>
+            </a:r>
+            <a:r>
+              <a:rPr lang="en-US" sz="2400" b="1" dirty="0">
+                <a:solidFill>
+                  <a:srgbClr val="C00000"/>
+                </a:solidFill>
+              </a:rPr>
+              <a:t>library</a:t>
+            </a:r>
+            <a:r>
+              <a:rPr lang="en-US" sz="2400" dirty="0"/>
+              <a:t> and </a:t>
+            </a:r>
+            <a:r>
+              <a:rPr lang="en-US" sz="2400" b="1" dirty="0">
+                <a:solidFill>
+                  <a:srgbClr val="C00000"/>
+                </a:solidFill>
+              </a:rPr>
+              <a:t>ORM</a:t>
+            </a:r>
+            <a:r>
+              <a:rPr lang="en-US" sz="2400" dirty="0"/>
+              <a:t> that helps you </a:t>
+            </a:r>
+            <a:r>
+              <a:rPr lang="en-US" sz="2400" b="1" dirty="0"/>
+              <a:t>interact with relational databases (like PostgreSQL)</a:t>
+            </a:r>
+            <a:r>
+              <a:rPr lang="en-US" sz="2400" dirty="0"/>
+              <a:t> using </a:t>
+            </a:r>
+            <a:r>
+              <a:rPr lang="en-US" sz="2400" b="1" dirty="0"/>
+              <a:t>Python classes and objects</a:t>
+            </a:r>
+            <a:r>
+              <a:rPr lang="en-US" sz="2400" dirty="0"/>
+              <a:t>, instead of writing </a:t>
+            </a:r>
+            <a:r>
+              <a:rPr lang="en-US" sz="2400" b="1" dirty="0"/>
+              <a:t>raw SQL queries</a:t>
+            </a:r>
+            <a:r>
+              <a:rPr lang="en-US" sz="2400" dirty="0"/>
+              <a:t>.</a:t>
+            </a:r>
+            <a:endParaRPr lang="en-IN" sz="2400" dirty="0"/>
+          </a:p>
+          <a:p>
+            <a:endParaRPr lang="en-IN" sz="2400" b="1" dirty="0"/>
+          </a:p>
+          <a:p>
+            <a:pPr marL="0" indent="0">
+              <a:buNone/>
+            </a:pPr>
+            <a:r>
+              <a:rPr lang="en-US" sz="2400" b="1" dirty="0"/>
+              <a:t>Simple Analogy</a:t>
+            </a:r>
+          </a:p>
+          <a:p>
+            <a:r>
+              <a:rPr lang="en-US" sz="2400" b="1" dirty="0"/>
+              <a:t>Without ORM: </a:t>
+            </a:r>
+            <a:r>
+              <a:rPr lang="en-US" sz="2400" dirty="0"/>
+              <a:t>We speak to the database in </a:t>
+            </a:r>
+            <a:r>
+              <a:rPr lang="en-US" sz="2400" b="1" dirty="0">
+                <a:solidFill>
+                  <a:srgbClr val="C00000"/>
+                </a:solidFill>
+              </a:rPr>
+              <a:t>SQL</a:t>
+            </a:r>
+            <a:r>
+              <a:rPr lang="en-US" sz="2400" dirty="0"/>
+              <a:t>.</a:t>
+            </a:r>
+          </a:p>
+          <a:p>
+            <a:r>
+              <a:rPr lang="en-US" sz="2400" b="1" dirty="0"/>
+              <a:t>With ORM: </a:t>
+            </a:r>
+            <a:r>
+              <a:rPr lang="en-US" sz="2400" dirty="0"/>
+              <a:t>We speak to the database in Python — and </a:t>
+            </a:r>
+            <a:r>
+              <a:rPr lang="en-US" sz="2400" dirty="0" err="1"/>
+              <a:t>SQLAlchemy</a:t>
+            </a:r>
+            <a:r>
+              <a:rPr lang="en-US" sz="2400" dirty="0"/>
+              <a:t> translates it to SQL for you.</a:t>
+            </a:r>
+          </a:p>
+          <a:p>
+            <a:pPr marL="0" indent="0">
+              <a:buNone/>
+            </a:pPr>
+            <a:endParaRPr lang="en-IN" sz="2400" dirty="0"/>
+          </a:p>
+        </p:txBody>
+      </p:sp>
+      <p:pic>
+        <p:nvPicPr>
+          <p:cNvPr id="4098" name="Picture 2" descr="What is SQLAlchemy?. An intro to ORM and SQLAlchemy. | by Priya Srivastava  | Medium">
+            <a:extLst>
+              <a:ext uri="{FF2B5EF4-FFF2-40B4-BE49-F238E27FC236}">
+                <a16:creationId xmlns:a16="http://schemas.microsoft.com/office/drawing/2014/main" id="{55E09A31-F14C-44ED-B1A6-48F50165A176}"/>
+              </a:ext>
+            </a:extLst>
+          </p:cNvPr>
+          <p:cNvPicPr>
+            <a:picLocks noChangeAspect="1" noChangeArrowheads="1"/>
+          </p:cNvPicPr>
+          <p:nvPr/>
+        </p:nvPicPr>
+        <p:blipFill>
+          <a:blip r:embed="rId2">
+            <a:extLst>
+              <a:ext uri="{28A0092B-C50C-407E-A947-70E740481C1C}">
+                <a14:useLocalDpi xmlns:a14="http://schemas.microsoft.com/office/drawing/2010/main" val="0"/>
+              </a:ext>
+            </a:extLst>
+          </a:blip>
+          <a:srcRect/>
+          <a:stretch>
+            <a:fillRect/>
+          </a:stretch>
+        </p:blipFill>
+        <p:spPr bwMode="auto">
+          <a:xfrm>
+            <a:off x="7293430" y="2013857"/>
+            <a:ext cx="3810000" cy="1524000"/>
+          </a:xfrm>
+          <a:prstGeom prst="rect">
+            <a:avLst/>
+          </a:prstGeom>
+          <a:noFill/>
+          <a:extLst>
+            <a:ext uri="{909E8E84-426E-40DD-AFC4-6F175D3DCCD1}">
+              <a14:hiddenFill xmlns:a14="http://schemas.microsoft.com/office/drawing/2010/main">
+                <a:solidFill>
+                  <a:srgbClr val="FFFFFF"/>
+                </a:solidFill>
+              </a14:hiddenFill>
+            </a:ext>
+          </a:extLst>
+        </p:spPr>
+      </p:pic>
+    </p:spTree>
+    <p:extLst>
+      <p:ext uri="{BB962C8B-B14F-4D97-AF65-F5344CB8AC3E}">
+        <p14:creationId xmlns:p14="http://schemas.microsoft.com/office/powerpoint/2010/main" val="3330856063"/>
+      </p:ext>
+    </p:extLst>
+  </p:cSld>
+  <p:clrMapOvr>
+    <a:masterClrMapping/>
+  </p:clrMapOvr>
+</p:sld>
+</file>
+
+<file path=ppt/slides/slide48.xml><?xml version="1.0" encoding="utf-8"?>
+<p:sld xmlns:a="http://schemas.openxmlformats.org/drawingml/2006/main" xmlns:r="http://schemas.openxmlformats.org/officeDocument/2006/relationships" xmlns:p="http://schemas.openxmlformats.org/presentationml/2006/main">
+  <p:cSld>
+    <p:spTree>
+      <p:nvGrpSpPr>
+        <p:cNvPr id="1" name="">
+          <a:extLst>
+            <a:ext uri="{FF2B5EF4-FFF2-40B4-BE49-F238E27FC236}">
+              <a16:creationId xmlns:a16="http://schemas.microsoft.com/office/drawing/2014/main" id="{7555EEDC-E608-CE21-0CDD-56BBD1C5FD9A}"/>
+            </a:ext>
+          </a:extLst>
+        </p:cNvPr>
+        <p:cNvGrpSpPr/>
+        <p:nvPr/>
+      </p:nvGrpSpPr>
+      <p:grpSpPr>
+        <a:xfrm>
+          <a:off x="0" y="0"/>
+          <a:ext cx="0" cy="0"/>
+          <a:chOff x="0" y="0"/>
+          <a:chExt cx="0" cy="0"/>
+        </a:xfrm>
+      </p:grpSpPr>
+      <p:sp>
+        <p:nvSpPr>
+          <p:cNvPr id="3" name="Content Placeholder 2">
+            <a:extLst>
+              <a:ext uri="{FF2B5EF4-FFF2-40B4-BE49-F238E27FC236}">
+                <a16:creationId xmlns:a16="http://schemas.microsoft.com/office/drawing/2014/main" id="{F89D1488-AAC8-CA94-3CED-A347136BED80}"/>
+              </a:ext>
+            </a:extLst>
+          </p:cNvPr>
+          <p:cNvSpPr>
+            <a:spLocks noGrp="1"/>
+          </p:cNvSpPr>
+          <p:nvPr>
+            <p:ph idx="1"/>
+          </p:nvPr>
+        </p:nvSpPr>
+        <p:spPr>
+          <a:xfrm>
+            <a:off x="777240" y="696686"/>
+            <a:ext cx="10659110" cy="5480277"/>
+          </a:xfrm>
+        </p:spPr>
+        <p:txBody>
+          <a:bodyPr>
+            <a:normAutofit/>
+          </a:bodyPr>
+          <a:lstStyle/>
+          <a:p>
+            <a:pPr marL="0" indent="0">
+              <a:buNone/>
+            </a:pPr>
+            <a:r>
+              <a:rPr lang="en-IN" sz="2400" b="1" dirty="0"/>
+              <a:t>Why ORM?</a:t>
+            </a:r>
+          </a:p>
+        </p:txBody>
+      </p:sp>
+      <p:graphicFrame>
+        <p:nvGraphicFramePr>
+          <p:cNvPr id="2" name="Table 1">
+            <a:extLst>
+              <a:ext uri="{FF2B5EF4-FFF2-40B4-BE49-F238E27FC236}">
+                <a16:creationId xmlns:a16="http://schemas.microsoft.com/office/drawing/2014/main" id="{BF9CE034-CEC3-74EB-B561-CCC7056A7BFD}"/>
+              </a:ext>
+            </a:extLst>
+          </p:cNvPr>
+          <p:cNvGraphicFramePr>
+            <a:graphicFrameLocks noGrp="1"/>
+          </p:cNvGraphicFramePr>
+          <p:nvPr>
+            <p:extLst>
+              <p:ext uri="{D42A27DB-BD31-4B8C-83A1-F6EECF244321}">
+                <p14:modId xmlns:p14="http://schemas.microsoft.com/office/powerpoint/2010/main" val="3024450590"/>
+              </p:ext>
+            </p:extLst>
+          </p:nvPr>
+        </p:nvGraphicFramePr>
+        <p:xfrm>
+          <a:off x="1001485" y="1420532"/>
+          <a:ext cx="10413275" cy="4032583"/>
+        </p:xfrm>
+        <a:graphic>
+          <a:graphicData uri="http://schemas.openxmlformats.org/drawingml/2006/table">
+            <a:tbl>
+              <a:tblPr/>
+              <a:tblGrid>
+                <a:gridCol w="5514716">
+                  <a:extLst>
+                    <a:ext uri="{9D8B030D-6E8A-4147-A177-3AD203B41FA5}">
+                      <a16:colId xmlns:a16="http://schemas.microsoft.com/office/drawing/2014/main" val="3053410812"/>
+                    </a:ext>
+                  </a:extLst>
+                </a:gridCol>
+                <a:gridCol w="4898559">
+                  <a:extLst>
+                    <a:ext uri="{9D8B030D-6E8A-4147-A177-3AD203B41FA5}">
+                      <a16:colId xmlns:a16="http://schemas.microsoft.com/office/drawing/2014/main" val="3262588247"/>
+                    </a:ext>
+                  </a:extLst>
+                </a:gridCol>
+              </a:tblGrid>
+              <a:tr h="746541">
+                <a:tc>
+                  <a:txBody>
+                    <a:bodyPr/>
+                    <a:lstStyle/>
+                    <a:p>
+                      <a:pPr marL="0" marR="0" fontAlgn="t">
+                        <a:buNone/>
+                      </a:pPr>
+                      <a:r>
+                        <a:rPr lang="en-IN" sz="2400" b="1">
+                          <a:effectLst/>
+                          <a:latin typeface="Aptos" panose="020B0004020202020204" pitchFamily="34" charset="0"/>
+                        </a:rPr>
+                        <a:t>Traditional SQL</a:t>
+                      </a:r>
+                    </a:p>
+                  </a:txBody>
+                  <a:tcPr marL="50800" marR="50800" marT="50800" marB="50800">
+                    <a:lnL w="12700" cap="flat" cmpd="sng" algn="ctr">
+                      <a:solidFill>
+                        <a:srgbClr val="A3A3A3"/>
+                      </a:solidFill>
+                      <a:prstDash val="solid"/>
+                      <a:round/>
+                      <a:headEnd type="none" w="med" len="med"/>
+                      <a:tailEnd type="none" w="med" len="med"/>
+                    </a:lnL>
+                    <a:lnR w="12700" cap="flat" cmpd="sng" algn="ctr">
+                      <a:solidFill>
+                        <a:srgbClr val="A3A3A3"/>
+                      </a:solidFill>
+                      <a:prstDash val="solid"/>
+                      <a:round/>
+                      <a:headEnd type="none" w="med" len="med"/>
+                      <a:tailEnd type="none" w="med" len="med"/>
+                    </a:lnR>
+                    <a:lnT w="12700" cap="flat" cmpd="sng" algn="ctr">
+                      <a:solidFill>
+                        <a:srgbClr val="A3A3A3"/>
+                      </a:solidFill>
+                      <a:prstDash val="solid"/>
+                      <a:round/>
+                      <a:headEnd type="none" w="med" len="med"/>
+                      <a:tailEnd type="none" w="med" len="med"/>
+                    </a:lnT>
+                    <a:lnB w="12700" cap="flat" cmpd="sng" algn="ctr">
+                      <a:solidFill>
+                        <a:srgbClr val="A3A3A3"/>
+                      </a:solidFill>
+                      <a:prstDash val="solid"/>
+                      <a:round/>
+                      <a:headEnd type="none" w="med" len="med"/>
+                      <a:tailEnd type="none" w="med" len="med"/>
+                    </a:lnB>
+                    <a:noFill/>
+                  </a:tcPr>
+                </a:tc>
+                <a:tc>
+                  <a:txBody>
+                    <a:bodyPr/>
+                    <a:lstStyle/>
+                    <a:p>
+                      <a:pPr marL="0" marR="0" fontAlgn="t">
+                        <a:buNone/>
+                      </a:pPr>
+                      <a:r>
+                        <a:rPr lang="en-IN" sz="2400" b="1" dirty="0">
+                          <a:effectLst/>
+                          <a:latin typeface="Aptos" panose="020B0004020202020204" pitchFamily="34" charset="0"/>
+                        </a:rPr>
+                        <a:t>ORM (</a:t>
+                      </a:r>
+                      <a:r>
+                        <a:rPr lang="en-IN" sz="2400" b="1" dirty="0" err="1">
+                          <a:effectLst/>
+                          <a:latin typeface="Aptos" panose="020B0004020202020204" pitchFamily="34" charset="0"/>
+                        </a:rPr>
+                        <a:t>SQLAlchemy</a:t>
+                      </a:r>
+                      <a:r>
+                        <a:rPr lang="en-IN" sz="2400" b="1" dirty="0">
+                          <a:effectLst/>
+                          <a:latin typeface="Aptos" panose="020B0004020202020204" pitchFamily="34" charset="0"/>
+                        </a:rPr>
+                        <a:t>)</a:t>
+                      </a:r>
+                    </a:p>
+                  </a:txBody>
+                  <a:tcPr marL="50800" marR="50800" marT="50800" marB="50800">
+                    <a:lnL w="12700" cap="flat" cmpd="sng" algn="ctr">
+                      <a:solidFill>
+                        <a:srgbClr val="A3A3A3"/>
+                      </a:solidFill>
+                      <a:prstDash val="solid"/>
+                      <a:round/>
+                      <a:headEnd type="none" w="med" len="med"/>
+                      <a:tailEnd type="none" w="med" len="med"/>
+                    </a:lnL>
+                    <a:lnR w="12700" cap="flat" cmpd="sng" algn="ctr">
+                      <a:solidFill>
+                        <a:srgbClr val="A3A3A3"/>
+                      </a:solidFill>
+                      <a:prstDash val="solid"/>
+                      <a:round/>
+                      <a:headEnd type="none" w="med" len="med"/>
+                      <a:tailEnd type="none" w="med" len="med"/>
+                    </a:lnR>
+                    <a:lnT w="12700" cap="flat" cmpd="sng" algn="ctr">
+                      <a:solidFill>
+                        <a:srgbClr val="A3A3A3"/>
+                      </a:solidFill>
+                      <a:prstDash val="solid"/>
+                      <a:round/>
+                      <a:headEnd type="none" w="med" len="med"/>
+                      <a:tailEnd type="none" w="med" len="med"/>
+                    </a:lnT>
+                    <a:lnB w="12700" cap="flat" cmpd="sng" algn="ctr">
+                      <a:solidFill>
+                        <a:srgbClr val="A3A3A3"/>
+                      </a:solidFill>
+                      <a:prstDash val="solid"/>
+                      <a:round/>
+                      <a:headEnd type="none" w="med" len="med"/>
+                      <a:tailEnd type="none" w="med" len="med"/>
+                    </a:lnB>
+                    <a:noFill/>
+                  </a:tcPr>
+                </a:tc>
+                <a:extLst>
+                  <a:ext uri="{0D108BD9-81ED-4DB2-BD59-A6C34878D82A}">
+                    <a16:rowId xmlns:a16="http://schemas.microsoft.com/office/drawing/2014/main" val="481297317"/>
+                  </a:ext>
+                </a:extLst>
+              </a:tr>
+              <a:tr h="1226461">
+                <a:tc>
+                  <a:txBody>
+                    <a:bodyPr/>
+                    <a:lstStyle/>
+                    <a:p>
+                      <a:pPr marL="0" marR="0" fontAlgn="t">
+                        <a:buNone/>
+                      </a:pPr>
+                      <a:r>
+                        <a:rPr lang="en-IN" sz="2400" dirty="0">
+                          <a:effectLst/>
+                          <a:latin typeface="Aptos" panose="020B0004020202020204" pitchFamily="34" charset="0"/>
+                        </a:rPr>
+                        <a:t>You </a:t>
+                      </a:r>
+                      <a:r>
+                        <a:rPr lang="en-IN" sz="2400" b="1" dirty="0">
+                          <a:solidFill>
+                            <a:srgbClr val="C00000"/>
+                          </a:solidFill>
+                          <a:effectLst/>
+                          <a:latin typeface="Aptos" panose="020B0004020202020204" pitchFamily="34" charset="0"/>
+                        </a:rPr>
+                        <a:t>manually</a:t>
+                      </a:r>
+                      <a:r>
+                        <a:rPr lang="en-IN" sz="2400" dirty="0">
+                          <a:effectLst/>
+                          <a:latin typeface="Aptos" panose="020B0004020202020204" pitchFamily="34" charset="0"/>
+                        </a:rPr>
+                        <a:t> write INSERT, SELECT, UPDATE queries.</a:t>
+                      </a:r>
+                    </a:p>
+                  </a:txBody>
+                  <a:tcPr marL="50800" marR="50800" marT="50800" marB="50800">
+                    <a:lnL w="12700" cap="flat" cmpd="sng" algn="ctr">
+                      <a:solidFill>
+                        <a:srgbClr val="A3A3A3"/>
+                      </a:solidFill>
+                      <a:prstDash val="solid"/>
+                      <a:round/>
+                      <a:headEnd type="none" w="med" len="med"/>
+                      <a:tailEnd type="none" w="med" len="med"/>
+                    </a:lnL>
+                    <a:lnR w="12700" cap="flat" cmpd="sng" algn="ctr">
+                      <a:solidFill>
+                        <a:srgbClr val="A3A3A3"/>
+                      </a:solidFill>
+                      <a:prstDash val="solid"/>
+                      <a:round/>
+                      <a:headEnd type="none" w="med" len="med"/>
+                      <a:tailEnd type="none" w="med" len="med"/>
+                    </a:lnR>
+                    <a:lnT w="12700" cap="flat" cmpd="sng" algn="ctr">
+                      <a:solidFill>
+                        <a:srgbClr val="A3A3A3"/>
+                      </a:solidFill>
+                      <a:prstDash val="solid"/>
+                      <a:round/>
+                      <a:headEnd type="none" w="med" len="med"/>
+                      <a:tailEnd type="none" w="med" len="med"/>
+                    </a:lnT>
+                    <a:lnB w="12700" cap="flat" cmpd="sng" algn="ctr">
+                      <a:solidFill>
+                        <a:srgbClr val="A3A3A3"/>
+                      </a:solidFill>
+                      <a:prstDash val="solid"/>
+                      <a:round/>
+                      <a:headEnd type="none" w="med" len="med"/>
+                      <a:tailEnd type="none" w="med" len="med"/>
+                    </a:lnB>
+                    <a:noFill/>
+                  </a:tcPr>
+                </a:tc>
+                <a:tc>
+                  <a:txBody>
+                    <a:bodyPr/>
+                    <a:lstStyle/>
+                    <a:p>
+                      <a:pPr marL="0" marR="0" fontAlgn="t">
+                        <a:buNone/>
+                      </a:pPr>
+                      <a:r>
+                        <a:rPr lang="en-IN" sz="2400" dirty="0">
+                          <a:effectLst/>
+                          <a:latin typeface="Aptos" panose="020B0004020202020204" pitchFamily="34" charset="0"/>
+                        </a:rPr>
+                        <a:t>You create, read, and update </a:t>
+                      </a:r>
+                      <a:r>
+                        <a:rPr lang="en-IN" sz="2400" b="1" dirty="0">
+                          <a:effectLst/>
+                          <a:latin typeface="Aptos" panose="020B0004020202020204" pitchFamily="34" charset="0"/>
+                        </a:rPr>
+                        <a:t>Python objects.</a:t>
+                      </a:r>
+                    </a:p>
+                  </a:txBody>
+                  <a:tcPr marL="50800" marR="50800" marT="50800" marB="50800">
+                    <a:lnL w="12700" cap="flat" cmpd="sng" algn="ctr">
+                      <a:solidFill>
+                        <a:srgbClr val="A3A3A3"/>
+                      </a:solidFill>
+                      <a:prstDash val="solid"/>
+                      <a:round/>
+                      <a:headEnd type="none" w="med" len="med"/>
+                      <a:tailEnd type="none" w="med" len="med"/>
+                    </a:lnL>
+                    <a:lnR w="12700" cap="flat" cmpd="sng" algn="ctr">
+                      <a:solidFill>
+                        <a:srgbClr val="A3A3A3"/>
+                      </a:solidFill>
+                      <a:prstDash val="solid"/>
+                      <a:round/>
+                      <a:headEnd type="none" w="med" len="med"/>
+                      <a:tailEnd type="none" w="med" len="med"/>
+                    </a:lnR>
+                    <a:lnT w="12700" cap="flat" cmpd="sng" algn="ctr">
+                      <a:solidFill>
+                        <a:srgbClr val="A3A3A3"/>
+                      </a:solidFill>
+                      <a:prstDash val="solid"/>
+                      <a:round/>
+                      <a:headEnd type="none" w="med" len="med"/>
+                      <a:tailEnd type="none" w="med" len="med"/>
+                    </a:lnT>
+                    <a:lnB w="12700" cap="flat" cmpd="sng" algn="ctr">
+                      <a:solidFill>
+                        <a:srgbClr val="A3A3A3"/>
+                      </a:solidFill>
+                      <a:prstDash val="solid"/>
+                      <a:round/>
+                      <a:headEnd type="none" w="med" len="med"/>
+                      <a:tailEnd type="none" w="med" len="med"/>
+                    </a:lnB>
+                    <a:noFill/>
+                  </a:tcPr>
+                </a:tc>
+                <a:extLst>
+                  <a:ext uri="{0D108BD9-81ED-4DB2-BD59-A6C34878D82A}">
+                    <a16:rowId xmlns:a16="http://schemas.microsoft.com/office/drawing/2014/main" val="408637443"/>
+                  </a:ext>
+                </a:extLst>
+              </a:tr>
+              <a:tr h="1226461">
+                <a:tc>
+                  <a:txBody>
+                    <a:bodyPr/>
+                    <a:lstStyle/>
+                    <a:p>
+                      <a:pPr marL="0" marR="0" fontAlgn="t">
+                        <a:buNone/>
+                      </a:pPr>
+                      <a:r>
+                        <a:rPr lang="en-IN" sz="2400" dirty="0">
+                          <a:effectLst/>
+                          <a:latin typeface="Aptos" panose="020B0004020202020204" pitchFamily="34" charset="0"/>
+                        </a:rPr>
+                        <a:t>You need to manage table joins, schema changes, and SQL syntax.</a:t>
+                      </a:r>
+                    </a:p>
+                  </a:txBody>
+                  <a:tcPr marL="50800" marR="50800" marT="50800" marB="50800">
+                    <a:lnL w="12700" cap="flat" cmpd="sng" algn="ctr">
+                      <a:solidFill>
+                        <a:srgbClr val="A3A3A3"/>
+                      </a:solidFill>
+                      <a:prstDash val="solid"/>
+                      <a:round/>
+                      <a:headEnd type="none" w="med" len="med"/>
+                      <a:tailEnd type="none" w="med" len="med"/>
+                    </a:lnL>
+                    <a:lnR w="12700" cap="flat" cmpd="sng" algn="ctr">
+                      <a:solidFill>
+                        <a:srgbClr val="A3A3A3"/>
+                      </a:solidFill>
+                      <a:prstDash val="solid"/>
+                      <a:round/>
+                      <a:headEnd type="none" w="med" len="med"/>
+                      <a:tailEnd type="none" w="med" len="med"/>
+                    </a:lnR>
+                    <a:lnT w="12700" cap="flat" cmpd="sng" algn="ctr">
+                      <a:solidFill>
+                        <a:srgbClr val="A3A3A3"/>
+                      </a:solidFill>
+                      <a:prstDash val="solid"/>
+                      <a:round/>
+                      <a:headEnd type="none" w="med" len="med"/>
+                      <a:tailEnd type="none" w="med" len="med"/>
+                    </a:lnT>
+                    <a:lnB w="12700" cap="flat" cmpd="sng" algn="ctr">
+                      <a:solidFill>
+                        <a:srgbClr val="A3A3A3"/>
+                      </a:solidFill>
+                      <a:prstDash val="solid"/>
+                      <a:round/>
+                      <a:headEnd type="none" w="med" len="med"/>
+                      <a:tailEnd type="none" w="med" len="med"/>
+                    </a:lnB>
+                    <a:noFill/>
+                  </a:tcPr>
+                </a:tc>
+                <a:tc>
+                  <a:txBody>
+                    <a:bodyPr/>
+                    <a:lstStyle/>
+                    <a:p>
+                      <a:pPr marL="0" marR="0" fontAlgn="t">
+                        <a:buNone/>
+                      </a:pPr>
+                      <a:r>
+                        <a:rPr lang="en-IN" sz="2400" dirty="0">
+                          <a:effectLst/>
+                          <a:latin typeface="Aptos" panose="020B0004020202020204" pitchFamily="34" charset="0"/>
+                        </a:rPr>
+                        <a:t>ORM handles relationships, joins, and schema automatically.</a:t>
+                      </a:r>
+                    </a:p>
+                  </a:txBody>
+                  <a:tcPr marL="50800" marR="50800" marT="50800" marB="50800">
+                    <a:lnL w="12700" cap="flat" cmpd="sng" algn="ctr">
+                      <a:solidFill>
+                        <a:srgbClr val="A3A3A3"/>
+                      </a:solidFill>
+                      <a:prstDash val="solid"/>
+                      <a:round/>
+                      <a:headEnd type="none" w="med" len="med"/>
+                      <a:tailEnd type="none" w="med" len="med"/>
+                    </a:lnL>
+                    <a:lnR w="12700" cap="flat" cmpd="sng" algn="ctr">
+                      <a:solidFill>
+                        <a:srgbClr val="A3A3A3"/>
+                      </a:solidFill>
+                      <a:prstDash val="solid"/>
+                      <a:round/>
+                      <a:headEnd type="none" w="med" len="med"/>
+                      <a:tailEnd type="none" w="med" len="med"/>
+                    </a:lnR>
+                    <a:lnT w="12700" cap="flat" cmpd="sng" algn="ctr">
+                      <a:solidFill>
+                        <a:srgbClr val="A3A3A3"/>
+                      </a:solidFill>
+                      <a:prstDash val="solid"/>
+                      <a:round/>
+                      <a:headEnd type="none" w="med" len="med"/>
+                      <a:tailEnd type="none" w="med" len="med"/>
+                    </a:lnT>
+                    <a:lnB w="12700" cap="flat" cmpd="sng" algn="ctr">
+                      <a:solidFill>
+                        <a:srgbClr val="A3A3A3"/>
+                      </a:solidFill>
+                      <a:prstDash val="solid"/>
+                      <a:round/>
+                      <a:headEnd type="none" w="med" len="med"/>
+                      <a:tailEnd type="none" w="med" len="med"/>
+                    </a:lnB>
+                    <a:noFill/>
+                  </a:tcPr>
+                </a:tc>
+                <a:extLst>
+                  <a:ext uri="{0D108BD9-81ED-4DB2-BD59-A6C34878D82A}">
+                    <a16:rowId xmlns:a16="http://schemas.microsoft.com/office/drawing/2014/main" val="2158368584"/>
+                  </a:ext>
+                </a:extLst>
+              </a:tr>
+              <a:tr h="746541">
+                <a:tc>
+                  <a:txBody>
+                    <a:bodyPr/>
+                    <a:lstStyle/>
+                    <a:p>
+                      <a:pPr marL="0" marR="0" fontAlgn="t">
+                        <a:buNone/>
+                      </a:pPr>
+                      <a:r>
+                        <a:rPr lang="en-IN" sz="2400">
+                          <a:effectLst/>
+                          <a:latin typeface="Aptos" panose="020B0004020202020204" pitchFamily="34" charset="0"/>
+                        </a:rPr>
+                        <a:t>Harder to maintain large applications.</a:t>
+                      </a:r>
+                    </a:p>
+                  </a:txBody>
+                  <a:tcPr marL="50800" marR="50800" marT="50800" marB="50800">
+                    <a:lnL w="12700" cap="flat" cmpd="sng" algn="ctr">
+                      <a:solidFill>
+                        <a:srgbClr val="A3A3A3"/>
+                      </a:solidFill>
+                      <a:prstDash val="solid"/>
+                      <a:round/>
+                      <a:headEnd type="none" w="med" len="med"/>
+                      <a:tailEnd type="none" w="med" len="med"/>
+                    </a:lnL>
+                    <a:lnR w="12700" cap="flat" cmpd="sng" algn="ctr">
+                      <a:solidFill>
+                        <a:srgbClr val="A3A3A3"/>
+                      </a:solidFill>
+                      <a:prstDash val="solid"/>
+                      <a:round/>
+                      <a:headEnd type="none" w="med" len="med"/>
+                      <a:tailEnd type="none" w="med" len="med"/>
+                    </a:lnR>
+                    <a:lnT w="12700" cap="flat" cmpd="sng" algn="ctr">
+                      <a:solidFill>
+                        <a:srgbClr val="A3A3A3"/>
+                      </a:solidFill>
+                      <a:prstDash val="solid"/>
+                      <a:round/>
+                      <a:headEnd type="none" w="med" len="med"/>
+                      <a:tailEnd type="none" w="med" len="med"/>
+                    </a:lnT>
+                    <a:lnB w="12700" cap="flat" cmpd="sng" algn="ctr">
+                      <a:solidFill>
+                        <a:srgbClr val="A3A3A3"/>
+                      </a:solidFill>
+                      <a:prstDash val="solid"/>
+                      <a:round/>
+                      <a:headEnd type="none" w="med" len="med"/>
+                      <a:tailEnd type="none" w="med" len="med"/>
+                    </a:lnB>
+                    <a:noFill/>
+                  </a:tcPr>
+                </a:tc>
+                <a:tc>
+                  <a:txBody>
+                    <a:bodyPr/>
+                    <a:lstStyle/>
+                    <a:p>
+                      <a:pPr marL="0" marR="0" fontAlgn="t">
+                        <a:buNone/>
+                      </a:pPr>
+                      <a:r>
+                        <a:rPr lang="en-IN" sz="2400" dirty="0">
+                          <a:effectLst/>
+                          <a:latin typeface="Aptos" panose="020B0004020202020204" pitchFamily="34" charset="0"/>
+                        </a:rPr>
+                        <a:t>Easier, cleaner, and </a:t>
+                      </a:r>
+                      <a:r>
+                        <a:rPr lang="en-IN" sz="2400" b="1" dirty="0">
+                          <a:effectLst/>
+                          <a:latin typeface="Aptos" panose="020B0004020202020204" pitchFamily="34" charset="0"/>
+                        </a:rPr>
+                        <a:t>object-oriented</a:t>
+                      </a:r>
+                      <a:r>
+                        <a:rPr lang="en-IN" sz="2400" dirty="0">
+                          <a:effectLst/>
+                          <a:latin typeface="Aptos" panose="020B0004020202020204" pitchFamily="34" charset="0"/>
+                        </a:rPr>
+                        <a:t>.</a:t>
+                      </a:r>
+                    </a:p>
+                  </a:txBody>
+                  <a:tcPr marL="50800" marR="50800" marT="50800" marB="50800">
+                    <a:lnL w="12700" cap="flat" cmpd="sng" algn="ctr">
+                      <a:solidFill>
+                        <a:srgbClr val="A3A3A3"/>
+                      </a:solidFill>
+                      <a:prstDash val="solid"/>
+                      <a:round/>
+                      <a:headEnd type="none" w="med" len="med"/>
+                      <a:tailEnd type="none" w="med" len="med"/>
+                    </a:lnL>
+                    <a:lnR w="12700" cap="flat" cmpd="sng" algn="ctr">
+                      <a:solidFill>
+                        <a:srgbClr val="A3A3A3"/>
+                      </a:solidFill>
+                      <a:prstDash val="solid"/>
+                      <a:round/>
+                      <a:headEnd type="none" w="med" len="med"/>
+                      <a:tailEnd type="none" w="med" len="med"/>
+                    </a:lnR>
+                    <a:lnT w="12700" cap="flat" cmpd="sng" algn="ctr">
+                      <a:solidFill>
+                        <a:srgbClr val="A3A3A3"/>
+                      </a:solidFill>
+                      <a:prstDash val="solid"/>
+                      <a:round/>
+                      <a:headEnd type="none" w="med" len="med"/>
+                      <a:tailEnd type="none" w="med" len="med"/>
+                    </a:lnT>
+                    <a:lnB w="12700" cap="flat" cmpd="sng" algn="ctr">
+                      <a:solidFill>
+                        <a:srgbClr val="A3A3A3"/>
+                      </a:solidFill>
+                      <a:prstDash val="solid"/>
+                      <a:round/>
+                      <a:headEnd type="none" w="med" len="med"/>
+                      <a:tailEnd type="none" w="med" len="med"/>
+                    </a:lnB>
+                    <a:noFill/>
+                  </a:tcPr>
+                </a:tc>
+                <a:extLst>
+                  <a:ext uri="{0D108BD9-81ED-4DB2-BD59-A6C34878D82A}">
+                    <a16:rowId xmlns:a16="http://schemas.microsoft.com/office/drawing/2014/main" val="243295200"/>
+                  </a:ext>
+                </a:extLst>
+              </a:tr>
+            </a:tbl>
+          </a:graphicData>
+        </a:graphic>
+      </p:graphicFrame>
+    </p:spTree>
+    <p:extLst>
+      <p:ext uri="{BB962C8B-B14F-4D97-AF65-F5344CB8AC3E}">
+        <p14:creationId xmlns:p14="http://schemas.microsoft.com/office/powerpoint/2010/main" val="1668023934"/>
+      </p:ext>
+    </p:extLst>
+  </p:cSld>
+  <p:clrMapOvr>
+    <a:masterClrMapping/>
+  </p:clrMapOvr>
+</p:sld>
+</file>
+
+<file path=ppt/slides/slide49.xml><?xml version="1.0" encoding="utf-8"?>
+<p:sld xmlns:a="http://schemas.openxmlformats.org/drawingml/2006/main" xmlns:r="http://schemas.openxmlformats.org/officeDocument/2006/relationships" xmlns:p="http://schemas.openxmlformats.org/presentationml/2006/main">
+  <p:cSld>
+    <p:spTree>
+      <p:nvGrpSpPr>
+        <p:cNvPr id="1" name="">
+          <a:extLst>
+            <a:ext uri="{FF2B5EF4-FFF2-40B4-BE49-F238E27FC236}">
+              <a16:creationId xmlns:a16="http://schemas.microsoft.com/office/drawing/2014/main" id="{39C7DDE4-3423-DB29-F272-768580047855}"/>
+            </a:ext>
+          </a:extLst>
+        </p:cNvPr>
+        <p:cNvGrpSpPr/>
+        <p:nvPr/>
+      </p:nvGrpSpPr>
+      <p:grpSpPr>
+        <a:xfrm>
+          <a:off x="0" y="0"/>
+          <a:ext cx="0" cy="0"/>
+          <a:chOff x="0" y="0"/>
+          <a:chExt cx="0" cy="0"/>
+        </a:xfrm>
+      </p:grpSpPr>
+      <p:sp>
+        <p:nvSpPr>
+          <p:cNvPr id="3" name="Content Placeholder 2">
+            <a:extLst>
+              <a:ext uri="{FF2B5EF4-FFF2-40B4-BE49-F238E27FC236}">
+                <a16:creationId xmlns:a16="http://schemas.microsoft.com/office/drawing/2014/main" id="{BEB1F599-617A-8661-24F8-C8DC9394C1CF}"/>
+              </a:ext>
+            </a:extLst>
+          </p:cNvPr>
+          <p:cNvSpPr>
+            <a:spLocks noGrp="1"/>
+          </p:cNvSpPr>
+          <p:nvPr>
+            <p:ph idx="1"/>
+          </p:nvPr>
+        </p:nvSpPr>
+        <p:spPr>
+          <a:xfrm>
+            <a:off x="777240" y="696686"/>
+            <a:ext cx="10659110" cy="5480277"/>
+          </a:xfrm>
+        </p:spPr>
+        <p:txBody>
+          <a:bodyPr>
+            <a:normAutofit/>
+          </a:bodyPr>
+          <a:lstStyle/>
+          <a:p>
+            <a:pPr marL="0" indent="0">
+              <a:buNone/>
+            </a:pPr>
+            <a:r>
+              <a:rPr lang="en-US" sz="2400" b="1" dirty="0" err="1"/>
+              <a:t>SQLAlchemy</a:t>
+            </a:r>
+            <a:r>
+              <a:rPr lang="en-US" sz="2400" b="1" dirty="0"/>
+              <a:t> Layers:</a:t>
+            </a:r>
+          </a:p>
+          <a:p>
+            <a:pPr marL="0" indent="0">
+              <a:buNone/>
+            </a:pPr>
+            <a:r>
+              <a:rPr lang="en-US" sz="2400" dirty="0" err="1"/>
+              <a:t>SQLAlchemy</a:t>
+            </a:r>
+            <a:r>
+              <a:rPr lang="en-US" sz="2400" dirty="0"/>
+              <a:t> has </a:t>
+            </a:r>
+            <a:r>
+              <a:rPr lang="en-US" sz="2400" b="1" dirty="0"/>
+              <a:t>two main parts</a:t>
+            </a:r>
+            <a:r>
+              <a:rPr lang="en-US" sz="2400" dirty="0"/>
+              <a:t>:</a:t>
+            </a:r>
+          </a:p>
+          <a:p>
+            <a:pPr lvl="1"/>
+            <a:r>
+              <a:rPr lang="en-US" sz="2400" b="1" dirty="0"/>
+              <a:t>Core (Low-level)</a:t>
+            </a:r>
+            <a:r>
+              <a:rPr lang="en-US" sz="2400" dirty="0"/>
+              <a:t> — lets you write SQL-like statements in Python.</a:t>
+            </a:r>
+          </a:p>
+          <a:p>
+            <a:pPr lvl="1"/>
+            <a:r>
+              <a:rPr lang="en-US" sz="2400" b="1" dirty="0"/>
+              <a:t>ORM (High-level)</a:t>
+            </a:r>
+            <a:r>
+              <a:rPr lang="en-US" sz="2400" dirty="0"/>
+              <a:t> — maps </a:t>
+            </a:r>
+            <a:r>
+              <a:rPr lang="en-US" sz="2400" b="1" dirty="0"/>
+              <a:t>Python classes → database tables</a:t>
+            </a:r>
+            <a:r>
+              <a:rPr lang="en-US" sz="2400" dirty="0"/>
+              <a:t>.</a:t>
+            </a:r>
+          </a:p>
+          <a:p>
+            <a:r>
+              <a:rPr lang="en-US" sz="2400" dirty="0"/>
+              <a:t>In </a:t>
+            </a:r>
+            <a:r>
+              <a:rPr lang="en-US" sz="2400" dirty="0" err="1"/>
+              <a:t>FastAPI</a:t>
+            </a:r>
+            <a:r>
+              <a:rPr lang="en-US" sz="2400" dirty="0"/>
+              <a:t> projects, we usually use the </a:t>
+            </a:r>
+            <a:r>
+              <a:rPr lang="en-US" sz="2400" b="1" dirty="0"/>
+              <a:t>ORM layer</a:t>
+            </a:r>
+            <a:r>
+              <a:rPr lang="en-US" sz="2400" dirty="0"/>
+              <a:t>.</a:t>
+            </a:r>
+          </a:p>
+          <a:p>
+            <a:pPr marL="0" indent="0">
+              <a:buNone/>
+            </a:pPr>
+            <a:endParaRPr lang="en-IN" sz="2400" dirty="0"/>
+          </a:p>
+        </p:txBody>
+      </p:sp>
+    </p:spTree>
+    <p:extLst>
+      <p:ext uri="{BB962C8B-B14F-4D97-AF65-F5344CB8AC3E}">
+        <p14:creationId xmlns:p14="http://schemas.microsoft.com/office/powerpoint/2010/main" val="1873530423"/>
       </p:ext>
     </p:extLst>
   </p:cSld>
@@ -13820,6 +16128,1838 @@
 </p:sld>
 </file>
 
+<file path=ppt/slides/slide50.xml><?xml version="1.0" encoding="utf-8"?>
+<p:sld xmlns:a="http://schemas.openxmlformats.org/drawingml/2006/main" xmlns:r="http://schemas.openxmlformats.org/officeDocument/2006/relationships" xmlns:p="http://schemas.openxmlformats.org/presentationml/2006/main">
+  <p:cSld>
+    <p:spTree>
+      <p:nvGrpSpPr>
+        <p:cNvPr id="1" name="">
+          <a:extLst>
+            <a:ext uri="{FF2B5EF4-FFF2-40B4-BE49-F238E27FC236}">
+              <a16:creationId xmlns:a16="http://schemas.microsoft.com/office/drawing/2014/main" id="{EB927F45-8D67-8EEE-3968-340C71BD6433}"/>
+            </a:ext>
+          </a:extLst>
+        </p:cNvPr>
+        <p:cNvGrpSpPr/>
+        <p:nvPr/>
+      </p:nvGrpSpPr>
+      <p:grpSpPr>
+        <a:xfrm>
+          <a:off x="0" y="0"/>
+          <a:ext cx="0" cy="0"/>
+          <a:chOff x="0" y="0"/>
+          <a:chExt cx="0" cy="0"/>
+        </a:xfrm>
+      </p:grpSpPr>
+      <p:sp>
+        <p:nvSpPr>
+          <p:cNvPr id="3" name="Content Placeholder 2">
+            <a:extLst>
+              <a:ext uri="{FF2B5EF4-FFF2-40B4-BE49-F238E27FC236}">
+                <a16:creationId xmlns:a16="http://schemas.microsoft.com/office/drawing/2014/main" id="{87C75E1D-1CE5-1261-20F2-DE4C478C4FD4}"/>
+              </a:ext>
+            </a:extLst>
+          </p:cNvPr>
+          <p:cNvSpPr>
+            <a:spLocks noGrp="1"/>
+          </p:cNvSpPr>
+          <p:nvPr>
+            <p:ph idx="1"/>
+          </p:nvPr>
+        </p:nvSpPr>
+        <p:spPr>
+          <a:xfrm>
+            <a:off x="777240" y="696686"/>
+            <a:ext cx="10659110" cy="5480277"/>
+          </a:xfrm>
+        </p:spPr>
+        <p:txBody>
+          <a:bodyPr>
+            <a:normAutofit/>
+          </a:bodyPr>
+          <a:lstStyle/>
+          <a:p>
+            <a:pPr marL="0" indent="0">
+              <a:buNone/>
+            </a:pPr>
+            <a:r>
+              <a:rPr lang="en-IN" sz="2400" b="1" dirty="0"/>
+              <a:t>Key ORM Concepts</a:t>
+            </a:r>
+          </a:p>
+        </p:txBody>
+      </p:sp>
+      <p:graphicFrame>
+        <p:nvGraphicFramePr>
+          <p:cNvPr id="2" name="Table 1">
+            <a:extLst>
+              <a:ext uri="{FF2B5EF4-FFF2-40B4-BE49-F238E27FC236}">
+                <a16:creationId xmlns:a16="http://schemas.microsoft.com/office/drawing/2014/main" id="{CFF705E1-5BC1-64F6-0431-772B4BBBABAE}"/>
+              </a:ext>
+            </a:extLst>
+          </p:cNvPr>
+          <p:cNvGraphicFramePr>
+            <a:graphicFrameLocks noGrp="1"/>
+          </p:cNvGraphicFramePr>
+          <p:nvPr>
+            <p:extLst>
+              <p:ext uri="{D42A27DB-BD31-4B8C-83A1-F6EECF244321}">
+                <p14:modId xmlns:p14="http://schemas.microsoft.com/office/powerpoint/2010/main" val="1526776160"/>
+              </p:ext>
+            </p:extLst>
+          </p:nvPr>
+        </p:nvGraphicFramePr>
+        <p:xfrm>
+          <a:off x="952879" y="1381465"/>
+          <a:ext cx="10074350" cy="4377078"/>
+        </p:xfrm>
+        <a:graphic>
+          <a:graphicData uri="http://schemas.openxmlformats.org/drawingml/2006/table">
+            <a:tbl>
+              <a:tblPr/>
+              <a:tblGrid>
+                <a:gridCol w="2174522">
+                  <a:extLst>
+                    <a:ext uri="{9D8B030D-6E8A-4147-A177-3AD203B41FA5}">
+                      <a16:colId xmlns:a16="http://schemas.microsoft.com/office/drawing/2014/main" val="1249837850"/>
+                    </a:ext>
+                  </a:extLst>
+                </a:gridCol>
+                <a:gridCol w="7899828">
+                  <a:extLst>
+                    <a:ext uri="{9D8B030D-6E8A-4147-A177-3AD203B41FA5}">
+                      <a16:colId xmlns:a16="http://schemas.microsoft.com/office/drawing/2014/main" val="2024694225"/>
+                    </a:ext>
+                  </a:extLst>
+                </a:gridCol>
+              </a:tblGrid>
+              <a:tr h="490233">
+                <a:tc>
+                  <a:txBody>
+                    <a:bodyPr/>
+                    <a:lstStyle/>
+                    <a:p>
+                      <a:pPr marL="0" marR="0" fontAlgn="t">
+                        <a:buNone/>
+                      </a:pPr>
+                      <a:r>
+                        <a:rPr lang="en-IN" sz="2000" b="1">
+                          <a:effectLst/>
+                          <a:latin typeface="Aptos" panose="020B0004020202020204" pitchFamily="34" charset="0"/>
+                        </a:rPr>
+                        <a:t>Concept</a:t>
+                      </a:r>
+                    </a:p>
+                  </a:txBody>
+                  <a:tcPr marL="50800" marR="50800" marT="50800" marB="50800">
+                    <a:lnL w="12700" cap="flat" cmpd="sng" algn="ctr">
+                      <a:solidFill>
+                        <a:srgbClr val="A3A3A3"/>
+                      </a:solidFill>
+                      <a:prstDash val="solid"/>
+                      <a:round/>
+                      <a:headEnd type="none" w="med" len="med"/>
+                      <a:tailEnd type="none" w="med" len="med"/>
+                    </a:lnL>
+                    <a:lnR w="12700" cap="flat" cmpd="sng" algn="ctr">
+                      <a:solidFill>
+                        <a:srgbClr val="A3A3A3"/>
+                      </a:solidFill>
+                      <a:prstDash val="solid"/>
+                      <a:round/>
+                      <a:headEnd type="none" w="med" len="med"/>
+                      <a:tailEnd type="none" w="med" len="med"/>
+                    </a:lnR>
+                    <a:lnT w="12700" cap="flat" cmpd="sng" algn="ctr">
+                      <a:solidFill>
+                        <a:srgbClr val="A3A3A3"/>
+                      </a:solidFill>
+                      <a:prstDash val="solid"/>
+                      <a:round/>
+                      <a:headEnd type="none" w="med" len="med"/>
+                      <a:tailEnd type="none" w="med" len="med"/>
+                    </a:lnT>
+                    <a:lnB w="12700" cap="flat" cmpd="sng" algn="ctr">
+                      <a:solidFill>
+                        <a:srgbClr val="A3A3A3"/>
+                      </a:solidFill>
+                      <a:prstDash val="solid"/>
+                      <a:round/>
+                      <a:headEnd type="none" w="med" len="med"/>
+                      <a:tailEnd type="none" w="med" len="med"/>
+                    </a:lnB>
+                    <a:noFill/>
+                  </a:tcPr>
+                </a:tc>
+                <a:tc>
+                  <a:txBody>
+                    <a:bodyPr/>
+                    <a:lstStyle/>
+                    <a:p>
+                      <a:pPr marL="0" marR="0" fontAlgn="t">
+                        <a:buNone/>
+                      </a:pPr>
+                      <a:r>
+                        <a:rPr lang="en-IN" sz="2000" b="1" dirty="0">
+                          <a:effectLst/>
+                          <a:latin typeface="Aptos" panose="020B0004020202020204" pitchFamily="34" charset="0"/>
+                        </a:rPr>
+                        <a:t>Description</a:t>
+                      </a:r>
+                    </a:p>
+                  </a:txBody>
+                  <a:tcPr marL="50800" marR="50800" marT="50800" marB="50800">
+                    <a:lnL w="12700" cap="flat" cmpd="sng" algn="ctr">
+                      <a:solidFill>
+                        <a:srgbClr val="A3A3A3"/>
+                      </a:solidFill>
+                      <a:prstDash val="solid"/>
+                      <a:round/>
+                      <a:headEnd type="none" w="med" len="med"/>
+                      <a:tailEnd type="none" w="med" len="med"/>
+                    </a:lnL>
+                    <a:lnR w="12700" cap="flat" cmpd="sng" algn="ctr">
+                      <a:solidFill>
+                        <a:srgbClr val="A3A3A3"/>
+                      </a:solidFill>
+                      <a:prstDash val="solid"/>
+                      <a:round/>
+                      <a:headEnd type="none" w="med" len="med"/>
+                      <a:tailEnd type="none" w="med" len="med"/>
+                    </a:lnR>
+                    <a:lnT w="12700" cap="flat" cmpd="sng" algn="ctr">
+                      <a:solidFill>
+                        <a:srgbClr val="A3A3A3"/>
+                      </a:solidFill>
+                      <a:prstDash val="solid"/>
+                      <a:round/>
+                      <a:headEnd type="none" w="med" len="med"/>
+                      <a:tailEnd type="none" w="med" len="med"/>
+                    </a:lnT>
+                    <a:lnB w="12700" cap="flat" cmpd="sng" algn="ctr">
+                      <a:solidFill>
+                        <a:srgbClr val="A3A3A3"/>
+                      </a:solidFill>
+                      <a:prstDash val="solid"/>
+                      <a:round/>
+                      <a:headEnd type="none" w="med" len="med"/>
+                      <a:tailEnd type="none" w="med" len="med"/>
+                    </a:lnB>
+                    <a:noFill/>
+                  </a:tcPr>
+                </a:tc>
+                <a:extLst>
+                  <a:ext uri="{0D108BD9-81ED-4DB2-BD59-A6C34878D82A}">
+                    <a16:rowId xmlns:a16="http://schemas.microsoft.com/office/drawing/2014/main" val="1851218412"/>
+                  </a:ext>
+                </a:extLst>
+              </a:tr>
+              <a:tr h="805382">
+                <a:tc>
+                  <a:txBody>
+                    <a:bodyPr/>
+                    <a:lstStyle/>
+                    <a:p>
+                      <a:pPr marL="0" marR="0" fontAlgn="t">
+                        <a:buNone/>
+                      </a:pPr>
+                      <a:r>
+                        <a:rPr lang="en-IN" sz="2000" b="1" dirty="0">
+                          <a:effectLst/>
+                          <a:latin typeface="Aptos" panose="020B0004020202020204" pitchFamily="34" charset="0"/>
+                        </a:rPr>
+                        <a:t>Engine</a:t>
+                      </a:r>
+                    </a:p>
+                  </a:txBody>
+                  <a:tcPr marL="50800" marR="50800" marT="50800" marB="50800">
+                    <a:lnL w="12700" cap="flat" cmpd="sng" algn="ctr">
+                      <a:solidFill>
+                        <a:srgbClr val="A3A3A3"/>
+                      </a:solidFill>
+                      <a:prstDash val="solid"/>
+                      <a:round/>
+                      <a:headEnd type="none" w="med" len="med"/>
+                      <a:tailEnd type="none" w="med" len="med"/>
+                    </a:lnL>
+                    <a:lnR w="12700" cap="flat" cmpd="sng" algn="ctr">
+                      <a:solidFill>
+                        <a:srgbClr val="A3A3A3"/>
+                      </a:solidFill>
+                      <a:prstDash val="solid"/>
+                      <a:round/>
+                      <a:headEnd type="none" w="med" len="med"/>
+                      <a:tailEnd type="none" w="med" len="med"/>
+                    </a:lnR>
+                    <a:lnT w="12700" cap="flat" cmpd="sng" algn="ctr">
+                      <a:solidFill>
+                        <a:srgbClr val="A3A3A3"/>
+                      </a:solidFill>
+                      <a:prstDash val="solid"/>
+                      <a:round/>
+                      <a:headEnd type="none" w="med" len="med"/>
+                      <a:tailEnd type="none" w="med" len="med"/>
+                    </a:lnT>
+                    <a:lnB w="12700" cap="flat" cmpd="sng" algn="ctr">
+                      <a:solidFill>
+                        <a:srgbClr val="A3A3A3"/>
+                      </a:solidFill>
+                      <a:prstDash val="solid"/>
+                      <a:round/>
+                      <a:headEnd type="none" w="med" len="med"/>
+                      <a:tailEnd type="none" w="med" len="med"/>
+                    </a:lnB>
+                    <a:noFill/>
+                  </a:tcPr>
+                </a:tc>
+                <a:tc>
+                  <a:txBody>
+                    <a:bodyPr/>
+                    <a:lstStyle/>
+                    <a:p>
+                      <a:pPr marL="0" marR="0" fontAlgn="t">
+                        <a:buNone/>
+                      </a:pPr>
+                      <a:r>
+                        <a:rPr lang="en-IN" sz="2000" b="1" dirty="0">
+                          <a:solidFill>
+                            <a:srgbClr val="C00000"/>
+                          </a:solidFill>
+                          <a:effectLst/>
+                          <a:latin typeface="Aptos" panose="020B0004020202020204" pitchFamily="34" charset="0"/>
+                        </a:rPr>
+                        <a:t>Connects</a:t>
+                      </a:r>
+                      <a:r>
+                        <a:rPr lang="en-IN" sz="2000" dirty="0">
+                          <a:effectLst/>
+                          <a:latin typeface="Aptos" panose="020B0004020202020204" pitchFamily="34" charset="0"/>
+                        </a:rPr>
+                        <a:t> </a:t>
+                      </a:r>
+                      <a:r>
+                        <a:rPr lang="en-IN" sz="2000" dirty="0" err="1">
+                          <a:effectLst/>
+                          <a:latin typeface="Aptos" panose="020B0004020202020204" pitchFamily="34" charset="0"/>
+                        </a:rPr>
+                        <a:t>SQLAlchemy</a:t>
+                      </a:r>
+                      <a:r>
+                        <a:rPr lang="en-IN" sz="2000" dirty="0">
+                          <a:effectLst/>
+                          <a:latin typeface="Aptos" panose="020B0004020202020204" pitchFamily="34" charset="0"/>
+                        </a:rPr>
+                        <a:t> to your actual database (PostgreSQL, SQLite, etc.)</a:t>
+                      </a:r>
+                    </a:p>
+                  </a:txBody>
+                  <a:tcPr marL="50800" marR="50800" marT="50800" marB="50800">
+                    <a:lnL w="12700" cap="flat" cmpd="sng" algn="ctr">
+                      <a:solidFill>
+                        <a:srgbClr val="A3A3A3"/>
+                      </a:solidFill>
+                      <a:prstDash val="solid"/>
+                      <a:round/>
+                      <a:headEnd type="none" w="med" len="med"/>
+                      <a:tailEnd type="none" w="med" len="med"/>
+                    </a:lnL>
+                    <a:lnR w="12700" cap="flat" cmpd="sng" algn="ctr">
+                      <a:solidFill>
+                        <a:srgbClr val="A3A3A3"/>
+                      </a:solidFill>
+                      <a:prstDash val="solid"/>
+                      <a:round/>
+                      <a:headEnd type="none" w="med" len="med"/>
+                      <a:tailEnd type="none" w="med" len="med"/>
+                    </a:lnR>
+                    <a:lnT w="12700" cap="flat" cmpd="sng" algn="ctr">
+                      <a:solidFill>
+                        <a:srgbClr val="A3A3A3"/>
+                      </a:solidFill>
+                      <a:prstDash val="solid"/>
+                      <a:round/>
+                      <a:headEnd type="none" w="med" len="med"/>
+                      <a:tailEnd type="none" w="med" len="med"/>
+                    </a:lnT>
+                    <a:lnB w="12700" cap="flat" cmpd="sng" algn="ctr">
+                      <a:solidFill>
+                        <a:srgbClr val="A3A3A3"/>
+                      </a:solidFill>
+                      <a:prstDash val="solid"/>
+                      <a:round/>
+                      <a:headEnd type="none" w="med" len="med"/>
+                      <a:tailEnd type="none" w="med" len="med"/>
+                    </a:lnB>
+                    <a:noFill/>
+                  </a:tcPr>
+                </a:tc>
+                <a:extLst>
+                  <a:ext uri="{0D108BD9-81ED-4DB2-BD59-A6C34878D82A}">
+                    <a16:rowId xmlns:a16="http://schemas.microsoft.com/office/drawing/2014/main" val="3027986150"/>
+                  </a:ext>
+                </a:extLst>
+              </a:tr>
+              <a:tr h="805382">
+                <a:tc>
+                  <a:txBody>
+                    <a:bodyPr/>
+                    <a:lstStyle/>
+                    <a:p>
+                      <a:pPr marL="0" marR="0" fontAlgn="t">
+                        <a:buNone/>
+                      </a:pPr>
+                      <a:r>
+                        <a:rPr lang="en-IN" sz="2000" b="1">
+                          <a:effectLst/>
+                          <a:latin typeface="Aptos" panose="020B0004020202020204" pitchFamily="34" charset="0"/>
+                        </a:rPr>
+                        <a:t>Session</a:t>
+                      </a:r>
+                    </a:p>
+                  </a:txBody>
+                  <a:tcPr marL="50800" marR="50800" marT="50800" marB="50800">
+                    <a:lnL w="12700" cap="flat" cmpd="sng" algn="ctr">
+                      <a:solidFill>
+                        <a:srgbClr val="A3A3A3"/>
+                      </a:solidFill>
+                      <a:prstDash val="solid"/>
+                      <a:round/>
+                      <a:headEnd type="none" w="med" len="med"/>
+                      <a:tailEnd type="none" w="med" len="med"/>
+                    </a:lnL>
+                    <a:lnR w="12700" cap="flat" cmpd="sng" algn="ctr">
+                      <a:solidFill>
+                        <a:srgbClr val="A3A3A3"/>
+                      </a:solidFill>
+                      <a:prstDash val="solid"/>
+                      <a:round/>
+                      <a:headEnd type="none" w="med" len="med"/>
+                      <a:tailEnd type="none" w="med" len="med"/>
+                    </a:lnR>
+                    <a:lnT w="12700" cap="flat" cmpd="sng" algn="ctr">
+                      <a:solidFill>
+                        <a:srgbClr val="A3A3A3"/>
+                      </a:solidFill>
+                      <a:prstDash val="solid"/>
+                      <a:round/>
+                      <a:headEnd type="none" w="med" len="med"/>
+                      <a:tailEnd type="none" w="med" len="med"/>
+                    </a:lnT>
+                    <a:lnB w="12700" cap="flat" cmpd="sng" algn="ctr">
+                      <a:solidFill>
+                        <a:srgbClr val="A3A3A3"/>
+                      </a:solidFill>
+                      <a:prstDash val="solid"/>
+                      <a:round/>
+                      <a:headEnd type="none" w="med" len="med"/>
+                      <a:tailEnd type="none" w="med" len="med"/>
+                    </a:lnB>
+                    <a:noFill/>
+                  </a:tcPr>
+                </a:tc>
+                <a:tc>
+                  <a:txBody>
+                    <a:bodyPr/>
+                    <a:lstStyle/>
+                    <a:p>
+                      <a:pPr marL="0" marR="0" fontAlgn="t">
+                        <a:buNone/>
+                      </a:pPr>
+                      <a:r>
+                        <a:rPr lang="en-IN" sz="2000" dirty="0">
+                          <a:effectLst/>
+                          <a:latin typeface="Aptos" panose="020B0004020202020204" pitchFamily="34" charset="0"/>
+                        </a:rPr>
+                        <a:t>Temporary </a:t>
+                      </a:r>
+                      <a:r>
+                        <a:rPr lang="en-IN" sz="2000" b="1" dirty="0">
+                          <a:effectLst/>
+                          <a:latin typeface="Aptos" panose="020B0004020202020204" pitchFamily="34" charset="0"/>
+                        </a:rPr>
+                        <a:t>workspace for talking to the database</a:t>
+                      </a:r>
+                      <a:r>
+                        <a:rPr lang="en-IN" sz="2000" dirty="0">
+                          <a:effectLst/>
+                          <a:latin typeface="Aptos" panose="020B0004020202020204" pitchFamily="34" charset="0"/>
+                        </a:rPr>
+                        <a:t> (like a browser session).</a:t>
+                      </a:r>
+                    </a:p>
+                  </a:txBody>
+                  <a:tcPr marL="50800" marR="50800" marT="50800" marB="50800">
+                    <a:lnL w="12700" cap="flat" cmpd="sng" algn="ctr">
+                      <a:solidFill>
+                        <a:srgbClr val="A3A3A3"/>
+                      </a:solidFill>
+                      <a:prstDash val="solid"/>
+                      <a:round/>
+                      <a:headEnd type="none" w="med" len="med"/>
+                      <a:tailEnd type="none" w="med" len="med"/>
+                    </a:lnL>
+                    <a:lnR w="12700" cap="flat" cmpd="sng" algn="ctr">
+                      <a:solidFill>
+                        <a:srgbClr val="A3A3A3"/>
+                      </a:solidFill>
+                      <a:prstDash val="solid"/>
+                      <a:round/>
+                      <a:headEnd type="none" w="med" len="med"/>
+                      <a:tailEnd type="none" w="med" len="med"/>
+                    </a:lnR>
+                    <a:lnT w="12700" cap="flat" cmpd="sng" algn="ctr">
+                      <a:solidFill>
+                        <a:srgbClr val="A3A3A3"/>
+                      </a:solidFill>
+                      <a:prstDash val="solid"/>
+                      <a:round/>
+                      <a:headEnd type="none" w="med" len="med"/>
+                      <a:tailEnd type="none" w="med" len="med"/>
+                    </a:lnT>
+                    <a:lnB w="12700" cap="flat" cmpd="sng" algn="ctr">
+                      <a:solidFill>
+                        <a:srgbClr val="A3A3A3"/>
+                      </a:solidFill>
+                      <a:prstDash val="solid"/>
+                      <a:round/>
+                      <a:headEnd type="none" w="med" len="med"/>
+                      <a:tailEnd type="none" w="med" len="med"/>
+                    </a:lnB>
+                    <a:noFill/>
+                  </a:tcPr>
+                </a:tc>
+                <a:extLst>
+                  <a:ext uri="{0D108BD9-81ED-4DB2-BD59-A6C34878D82A}">
+                    <a16:rowId xmlns:a16="http://schemas.microsoft.com/office/drawing/2014/main" val="2762317901"/>
+                  </a:ext>
+                </a:extLst>
+              </a:tr>
+              <a:tr h="490233">
+                <a:tc>
+                  <a:txBody>
+                    <a:bodyPr/>
+                    <a:lstStyle/>
+                    <a:p>
+                      <a:pPr marL="0" marR="0" fontAlgn="t">
+                        <a:buNone/>
+                      </a:pPr>
+                      <a:r>
+                        <a:rPr lang="en-IN" sz="2000" b="1">
+                          <a:effectLst/>
+                          <a:latin typeface="Aptos" panose="020B0004020202020204" pitchFamily="34" charset="0"/>
+                        </a:rPr>
+                        <a:t>Model (Class)</a:t>
+                      </a:r>
+                    </a:p>
+                  </a:txBody>
+                  <a:tcPr marL="50800" marR="50800" marT="50800" marB="50800">
+                    <a:lnL w="12700" cap="flat" cmpd="sng" algn="ctr">
+                      <a:solidFill>
+                        <a:srgbClr val="A3A3A3"/>
+                      </a:solidFill>
+                      <a:prstDash val="solid"/>
+                      <a:round/>
+                      <a:headEnd type="none" w="med" len="med"/>
+                      <a:tailEnd type="none" w="med" len="med"/>
+                    </a:lnL>
+                    <a:lnR w="12700" cap="flat" cmpd="sng" algn="ctr">
+                      <a:solidFill>
+                        <a:srgbClr val="A3A3A3"/>
+                      </a:solidFill>
+                      <a:prstDash val="solid"/>
+                      <a:round/>
+                      <a:headEnd type="none" w="med" len="med"/>
+                      <a:tailEnd type="none" w="med" len="med"/>
+                    </a:lnR>
+                    <a:lnT w="12700" cap="flat" cmpd="sng" algn="ctr">
+                      <a:solidFill>
+                        <a:srgbClr val="A3A3A3"/>
+                      </a:solidFill>
+                      <a:prstDash val="solid"/>
+                      <a:round/>
+                      <a:headEnd type="none" w="med" len="med"/>
+                      <a:tailEnd type="none" w="med" len="med"/>
+                    </a:lnT>
+                    <a:lnB w="12700" cap="flat" cmpd="sng" algn="ctr">
+                      <a:solidFill>
+                        <a:srgbClr val="A3A3A3"/>
+                      </a:solidFill>
+                      <a:prstDash val="solid"/>
+                      <a:round/>
+                      <a:headEnd type="none" w="med" len="med"/>
+                      <a:tailEnd type="none" w="med" len="med"/>
+                    </a:lnB>
+                    <a:noFill/>
+                  </a:tcPr>
+                </a:tc>
+                <a:tc>
+                  <a:txBody>
+                    <a:bodyPr/>
+                    <a:lstStyle/>
+                    <a:p>
+                      <a:pPr marL="0" marR="0" fontAlgn="t">
+                        <a:buNone/>
+                      </a:pPr>
+                      <a:r>
+                        <a:rPr lang="en-IN" sz="2000" dirty="0">
+                          <a:effectLst/>
+                          <a:latin typeface="Aptos" panose="020B0004020202020204" pitchFamily="34" charset="0"/>
+                        </a:rPr>
+                        <a:t>Represents a database </a:t>
+                      </a:r>
+                      <a:r>
+                        <a:rPr lang="en-IN" sz="2000" b="1" dirty="0">
+                          <a:solidFill>
+                            <a:srgbClr val="C00000"/>
+                          </a:solidFill>
+                          <a:effectLst/>
+                          <a:latin typeface="Aptos" panose="020B0004020202020204" pitchFamily="34" charset="0"/>
+                        </a:rPr>
+                        <a:t>table</a:t>
+                      </a:r>
+                      <a:r>
+                        <a:rPr lang="en-IN" sz="2000" dirty="0">
+                          <a:effectLst/>
+                          <a:latin typeface="Aptos" panose="020B0004020202020204" pitchFamily="34" charset="0"/>
+                        </a:rPr>
+                        <a:t>.</a:t>
+                      </a:r>
+                    </a:p>
+                  </a:txBody>
+                  <a:tcPr marL="50800" marR="50800" marT="50800" marB="50800">
+                    <a:lnL w="12700" cap="flat" cmpd="sng" algn="ctr">
+                      <a:solidFill>
+                        <a:srgbClr val="A3A3A3"/>
+                      </a:solidFill>
+                      <a:prstDash val="solid"/>
+                      <a:round/>
+                      <a:headEnd type="none" w="med" len="med"/>
+                      <a:tailEnd type="none" w="med" len="med"/>
+                    </a:lnL>
+                    <a:lnR w="12700" cap="flat" cmpd="sng" algn="ctr">
+                      <a:solidFill>
+                        <a:srgbClr val="A3A3A3"/>
+                      </a:solidFill>
+                      <a:prstDash val="solid"/>
+                      <a:round/>
+                      <a:headEnd type="none" w="med" len="med"/>
+                      <a:tailEnd type="none" w="med" len="med"/>
+                    </a:lnR>
+                    <a:lnT w="12700" cap="flat" cmpd="sng" algn="ctr">
+                      <a:solidFill>
+                        <a:srgbClr val="A3A3A3"/>
+                      </a:solidFill>
+                      <a:prstDash val="solid"/>
+                      <a:round/>
+                      <a:headEnd type="none" w="med" len="med"/>
+                      <a:tailEnd type="none" w="med" len="med"/>
+                    </a:lnT>
+                    <a:lnB w="12700" cap="flat" cmpd="sng" algn="ctr">
+                      <a:solidFill>
+                        <a:srgbClr val="A3A3A3"/>
+                      </a:solidFill>
+                      <a:prstDash val="solid"/>
+                      <a:round/>
+                      <a:headEnd type="none" w="med" len="med"/>
+                      <a:tailEnd type="none" w="med" len="med"/>
+                    </a:lnB>
+                    <a:noFill/>
+                  </a:tcPr>
+                </a:tc>
+                <a:extLst>
+                  <a:ext uri="{0D108BD9-81ED-4DB2-BD59-A6C34878D82A}">
+                    <a16:rowId xmlns:a16="http://schemas.microsoft.com/office/drawing/2014/main" val="838405734"/>
+                  </a:ext>
+                </a:extLst>
+              </a:tr>
+              <a:tr h="805382">
+                <a:tc>
+                  <a:txBody>
+                    <a:bodyPr/>
+                    <a:lstStyle/>
+                    <a:p>
+                      <a:pPr marL="0" marR="0" fontAlgn="t">
+                        <a:buNone/>
+                      </a:pPr>
+                      <a:r>
+                        <a:rPr lang="en-IN" sz="2000" b="1">
+                          <a:effectLst/>
+                          <a:latin typeface="Aptos" panose="020B0004020202020204" pitchFamily="34" charset="0"/>
+                        </a:rPr>
+                        <a:t>Instance (Object)</a:t>
+                      </a:r>
+                    </a:p>
+                  </a:txBody>
+                  <a:tcPr marL="50800" marR="50800" marT="50800" marB="50800">
+                    <a:lnL w="12700" cap="flat" cmpd="sng" algn="ctr">
+                      <a:solidFill>
+                        <a:srgbClr val="A3A3A3"/>
+                      </a:solidFill>
+                      <a:prstDash val="solid"/>
+                      <a:round/>
+                      <a:headEnd type="none" w="med" len="med"/>
+                      <a:tailEnd type="none" w="med" len="med"/>
+                    </a:lnL>
+                    <a:lnR w="12700" cap="flat" cmpd="sng" algn="ctr">
+                      <a:solidFill>
+                        <a:srgbClr val="A3A3A3"/>
+                      </a:solidFill>
+                      <a:prstDash val="solid"/>
+                      <a:round/>
+                      <a:headEnd type="none" w="med" len="med"/>
+                      <a:tailEnd type="none" w="med" len="med"/>
+                    </a:lnR>
+                    <a:lnT w="12700" cap="flat" cmpd="sng" algn="ctr">
+                      <a:solidFill>
+                        <a:srgbClr val="A3A3A3"/>
+                      </a:solidFill>
+                      <a:prstDash val="solid"/>
+                      <a:round/>
+                      <a:headEnd type="none" w="med" len="med"/>
+                      <a:tailEnd type="none" w="med" len="med"/>
+                    </a:lnT>
+                    <a:lnB w="12700" cap="flat" cmpd="sng" algn="ctr">
+                      <a:solidFill>
+                        <a:srgbClr val="A3A3A3"/>
+                      </a:solidFill>
+                      <a:prstDash val="solid"/>
+                      <a:round/>
+                      <a:headEnd type="none" w="med" len="med"/>
+                      <a:tailEnd type="none" w="med" len="med"/>
+                    </a:lnB>
+                    <a:noFill/>
+                  </a:tcPr>
+                </a:tc>
+                <a:tc>
+                  <a:txBody>
+                    <a:bodyPr/>
+                    <a:lstStyle/>
+                    <a:p>
+                      <a:pPr marL="0" marR="0" fontAlgn="t">
+                        <a:buNone/>
+                      </a:pPr>
+                      <a:r>
+                        <a:rPr lang="en-IN" sz="2000" dirty="0">
+                          <a:effectLst/>
+                          <a:latin typeface="Aptos" panose="020B0004020202020204" pitchFamily="34" charset="0"/>
+                        </a:rPr>
+                        <a:t>Represents </a:t>
+                      </a:r>
+                      <a:r>
+                        <a:rPr lang="en-IN" sz="2000" b="1" dirty="0">
+                          <a:solidFill>
+                            <a:srgbClr val="C00000"/>
+                          </a:solidFill>
+                          <a:effectLst/>
+                          <a:latin typeface="Aptos" panose="020B0004020202020204" pitchFamily="34" charset="0"/>
+                        </a:rPr>
+                        <a:t>one row </a:t>
+                      </a:r>
+                      <a:r>
+                        <a:rPr lang="en-IN" sz="2000" dirty="0">
+                          <a:effectLst/>
+                          <a:latin typeface="Aptos" panose="020B0004020202020204" pitchFamily="34" charset="0"/>
+                        </a:rPr>
+                        <a:t>in the table.</a:t>
+                      </a:r>
+                    </a:p>
+                  </a:txBody>
+                  <a:tcPr marL="50800" marR="50800" marT="50800" marB="50800">
+                    <a:lnL w="12700" cap="flat" cmpd="sng" algn="ctr">
+                      <a:solidFill>
+                        <a:srgbClr val="A3A3A3"/>
+                      </a:solidFill>
+                      <a:prstDash val="solid"/>
+                      <a:round/>
+                      <a:headEnd type="none" w="med" len="med"/>
+                      <a:tailEnd type="none" w="med" len="med"/>
+                    </a:lnL>
+                    <a:lnR w="12700" cap="flat" cmpd="sng" algn="ctr">
+                      <a:solidFill>
+                        <a:srgbClr val="A3A3A3"/>
+                      </a:solidFill>
+                      <a:prstDash val="solid"/>
+                      <a:round/>
+                      <a:headEnd type="none" w="med" len="med"/>
+                      <a:tailEnd type="none" w="med" len="med"/>
+                    </a:lnR>
+                    <a:lnT w="12700" cap="flat" cmpd="sng" algn="ctr">
+                      <a:solidFill>
+                        <a:srgbClr val="A3A3A3"/>
+                      </a:solidFill>
+                      <a:prstDash val="solid"/>
+                      <a:round/>
+                      <a:headEnd type="none" w="med" len="med"/>
+                      <a:tailEnd type="none" w="med" len="med"/>
+                    </a:lnT>
+                    <a:lnB w="12700" cap="flat" cmpd="sng" algn="ctr">
+                      <a:solidFill>
+                        <a:srgbClr val="A3A3A3"/>
+                      </a:solidFill>
+                      <a:prstDash val="solid"/>
+                      <a:round/>
+                      <a:headEnd type="none" w="med" len="med"/>
+                      <a:tailEnd type="none" w="med" len="med"/>
+                    </a:lnB>
+                    <a:noFill/>
+                  </a:tcPr>
+                </a:tc>
+                <a:extLst>
+                  <a:ext uri="{0D108BD9-81ED-4DB2-BD59-A6C34878D82A}">
+                    <a16:rowId xmlns:a16="http://schemas.microsoft.com/office/drawing/2014/main" val="2729763385"/>
+                  </a:ext>
+                </a:extLst>
+              </a:tr>
+              <a:tr h="490233">
+                <a:tc>
+                  <a:txBody>
+                    <a:bodyPr/>
+                    <a:lstStyle/>
+                    <a:p>
+                      <a:pPr marL="0" marR="0" fontAlgn="t">
+                        <a:buNone/>
+                      </a:pPr>
+                      <a:r>
+                        <a:rPr lang="en-IN" sz="2000" b="1">
+                          <a:effectLst/>
+                          <a:latin typeface="Aptos" panose="020B0004020202020204" pitchFamily="34" charset="0"/>
+                        </a:rPr>
+                        <a:t>Base</a:t>
+                      </a:r>
+                    </a:p>
+                  </a:txBody>
+                  <a:tcPr marL="50800" marR="50800" marT="50800" marB="50800">
+                    <a:lnL w="12700" cap="flat" cmpd="sng" algn="ctr">
+                      <a:solidFill>
+                        <a:srgbClr val="A3A3A3"/>
+                      </a:solidFill>
+                      <a:prstDash val="solid"/>
+                      <a:round/>
+                      <a:headEnd type="none" w="med" len="med"/>
+                      <a:tailEnd type="none" w="med" len="med"/>
+                    </a:lnL>
+                    <a:lnR w="12700" cap="flat" cmpd="sng" algn="ctr">
+                      <a:solidFill>
+                        <a:srgbClr val="A3A3A3"/>
+                      </a:solidFill>
+                      <a:prstDash val="solid"/>
+                      <a:round/>
+                      <a:headEnd type="none" w="med" len="med"/>
+                      <a:tailEnd type="none" w="med" len="med"/>
+                    </a:lnR>
+                    <a:lnT w="12700" cap="flat" cmpd="sng" algn="ctr">
+                      <a:solidFill>
+                        <a:srgbClr val="A3A3A3"/>
+                      </a:solidFill>
+                      <a:prstDash val="solid"/>
+                      <a:round/>
+                      <a:headEnd type="none" w="med" len="med"/>
+                      <a:tailEnd type="none" w="med" len="med"/>
+                    </a:lnT>
+                    <a:lnB w="12700" cap="flat" cmpd="sng" algn="ctr">
+                      <a:solidFill>
+                        <a:srgbClr val="A3A3A3"/>
+                      </a:solidFill>
+                      <a:prstDash val="solid"/>
+                      <a:round/>
+                      <a:headEnd type="none" w="med" len="med"/>
+                      <a:tailEnd type="none" w="med" len="med"/>
+                    </a:lnB>
+                    <a:noFill/>
+                  </a:tcPr>
+                </a:tc>
+                <a:tc>
+                  <a:txBody>
+                    <a:bodyPr/>
+                    <a:lstStyle/>
+                    <a:p>
+                      <a:pPr marL="0" marR="0" fontAlgn="t">
+                        <a:buNone/>
+                      </a:pPr>
+                      <a:r>
+                        <a:rPr lang="en-IN" sz="2000" dirty="0">
+                          <a:effectLst/>
+                          <a:latin typeface="Aptos" panose="020B0004020202020204" pitchFamily="34" charset="0"/>
+                        </a:rPr>
+                        <a:t>Common class that </a:t>
+                      </a:r>
+                      <a:r>
+                        <a:rPr lang="en-IN" sz="2000" b="1" dirty="0">
+                          <a:effectLst/>
+                          <a:latin typeface="Aptos" panose="020B0004020202020204" pitchFamily="34" charset="0"/>
+                        </a:rPr>
+                        <a:t>all</a:t>
+                      </a:r>
+                      <a:r>
+                        <a:rPr lang="en-IN" sz="2000" dirty="0">
+                          <a:effectLst/>
+                          <a:latin typeface="Aptos" panose="020B0004020202020204" pitchFamily="34" charset="0"/>
+                        </a:rPr>
+                        <a:t> </a:t>
+                      </a:r>
+                      <a:r>
+                        <a:rPr lang="en-IN" sz="2000" b="1" dirty="0">
+                          <a:effectLst/>
+                          <a:latin typeface="Aptos" panose="020B0004020202020204" pitchFamily="34" charset="0"/>
+                        </a:rPr>
+                        <a:t>ORM models </a:t>
+                      </a:r>
+                      <a:r>
+                        <a:rPr lang="en-IN" sz="2000" b="1" dirty="0">
+                          <a:solidFill>
+                            <a:srgbClr val="C00000"/>
+                          </a:solidFill>
+                          <a:effectLst/>
+                          <a:latin typeface="Aptos" panose="020B0004020202020204" pitchFamily="34" charset="0"/>
+                        </a:rPr>
+                        <a:t>inherit</a:t>
+                      </a:r>
+                      <a:r>
+                        <a:rPr lang="en-IN" sz="2000" b="1" dirty="0">
+                          <a:effectLst/>
+                          <a:latin typeface="Aptos" panose="020B0004020202020204" pitchFamily="34" charset="0"/>
+                        </a:rPr>
+                        <a:t> </a:t>
+                      </a:r>
+                      <a:r>
+                        <a:rPr lang="en-IN" sz="2000" dirty="0">
+                          <a:effectLst/>
+                          <a:latin typeface="Aptos" panose="020B0004020202020204" pitchFamily="34" charset="0"/>
+                        </a:rPr>
+                        <a:t>from.</a:t>
+                      </a:r>
+                    </a:p>
+                  </a:txBody>
+                  <a:tcPr marL="50800" marR="50800" marT="50800" marB="50800">
+                    <a:lnL w="12700" cap="flat" cmpd="sng" algn="ctr">
+                      <a:solidFill>
+                        <a:srgbClr val="A3A3A3"/>
+                      </a:solidFill>
+                      <a:prstDash val="solid"/>
+                      <a:round/>
+                      <a:headEnd type="none" w="med" len="med"/>
+                      <a:tailEnd type="none" w="med" len="med"/>
+                    </a:lnL>
+                    <a:lnR w="12700" cap="flat" cmpd="sng" algn="ctr">
+                      <a:solidFill>
+                        <a:srgbClr val="A3A3A3"/>
+                      </a:solidFill>
+                      <a:prstDash val="solid"/>
+                      <a:round/>
+                      <a:headEnd type="none" w="med" len="med"/>
+                      <a:tailEnd type="none" w="med" len="med"/>
+                    </a:lnR>
+                    <a:lnT w="12700" cap="flat" cmpd="sng" algn="ctr">
+                      <a:solidFill>
+                        <a:srgbClr val="A3A3A3"/>
+                      </a:solidFill>
+                      <a:prstDash val="solid"/>
+                      <a:round/>
+                      <a:headEnd type="none" w="med" len="med"/>
+                      <a:tailEnd type="none" w="med" len="med"/>
+                    </a:lnT>
+                    <a:lnB w="12700" cap="flat" cmpd="sng" algn="ctr">
+                      <a:solidFill>
+                        <a:srgbClr val="A3A3A3"/>
+                      </a:solidFill>
+                      <a:prstDash val="solid"/>
+                      <a:round/>
+                      <a:headEnd type="none" w="med" len="med"/>
+                      <a:tailEnd type="none" w="med" len="med"/>
+                    </a:lnB>
+                    <a:noFill/>
+                  </a:tcPr>
+                </a:tc>
+                <a:extLst>
+                  <a:ext uri="{0D108BD9-81ED-4DB2-BD59-A6C34878D82A}">
+                    <a16:rowId xmlns:a16="http://schemas.microsoft.com/office/drawing/2014/main" val="268381161"/>
+                  </a:ext>
+                </a:extLst>
+              </a:tr>
+              <a:tr h="490233">
+                <a:tc>
+                  <a:txBody>
+                    <a:bodyPr/>
+                    <a:lstStyle/>
+                    <a:p>
+                      <a:pPr marL="0" marR="0" fontAlgn="t">
+                        <a:buNone/>
+                      </a:pPr>
+                      <a:r>
+                        <a:rPr lang="en-IN" sz="2000" b="1" dirty="0">
+                          <a:effectLst/>
+                          <a:latin typeface="Aptos" panose="020B0004020202020204" pitchFamily="34" charset="0"/>
+                        </a:rPr>
+                        <a:t>Query</a:t>
+                      </a:r>
+                    </a:p>
+                  </a:txBody>
+                  <a:tcPr marL="50800" marR="50800" marT="50800" marB="50800">
+                    <a:lnL w="12700" cap="flat" cmpd="sng" algn="ctr">
+                      <a:solidFill>
+                        <a:srgbClr val="A3A3A3"/>
+                      </a:solidFill>
+                      <a:prstDash val="solid"/>
+                      <a:round/>
+                      <a:headEnd type="none" w="med" len="med"/>
+                      <a:tailEnd type="none" w="med" len="med"/>
+                    </a:lnL>
+                    <a:lnR w="12700" cap="flat" cmpd="sng" algn="ctr">
+                      <a:solidFill>
+                        <a:srgbClr val="A3A3A3"/>
+                      </a:solidFill>
+                      <a:prstDash val="solid"/>
+                      <a:round/>
+                      <a:headEnd type="none" w="med" len="med"/>
+                      <a:tailEnd type="none" w="med" len="med"/>
+                    </a:lnR>
+                    <a:lnT w="12700" cap="flat" cmpd="sng" algn="ctr">
+                      <a:solidFill>
+                        <a:srgbClr val="A3A3A3"/>
+                      </a:solidFill>
+                      <a:prstDash val="solid"/>
+                      <a:round/>
+                      <a:headEnd type="none" w="med" len="med"/>
+                      <a:tailEnd type="none" w="med" len="med"/>
+                    </a:lnT>
+                    <a:lnB w="12700" cap="flat" cmpd="sng" algn="ctr">
+                      <a:solidFill>
+                        <a:srgbClr val="A3A3A3"/>
+                      </a:solidFill>
+                      <a:prstDash val="solid"/>
+                      <a:round/>
+                      <a:headEnd type="none" w="med" len="med"/>
+                      <a:tailEnd type="none" w="med" len="med"/>
+                    </a:lnB>
+                    <a:noFill/>
+                  </a:tcPr>
+                </a:tc>
+                <a:tc>
+                  <a:txBody>
+                    <a:bodyPr/>
+                    <a:lstStyle/>
+                    <a:p>
+                      <a:pPr marL="0" marR="0" fontAlgn="t">
+                        <a:buNone/>
+                      </a:pPr>
+                      <a:r>
+                        <a:rPr lang="en-IN" sz="2000" dirty="0">
+                          <a:effectLst/>
+                          <a:latin typeface="Aptos" panose="020B0004020202020204" pitchFamily="34" charset="0"/>
+                        </a:rPr>
+                        <a:t>A way to fetch or modify data (e.g., </a:t>
+                      </a:r>
+                      <a:r>
+                        <a:rPr lang="en-IN" sz="2000" dirty="0" err="1">
+                          <a:effectLst/>
+                          <a:latin typeface="Aptos" panose="020B0004020202020204" pitchFamily="34" charset="0"/>
+                        </a:rPr>
+                        <a:t>session.query</a:t>
+                      </a:r>
+                      <a:r>
+                        <a:rPr lang="en-IN" sz="2000" dirty="0">
+                          <a:effectLst/>
+                          <a:latin typeface="Aptos" panose="020B0004020202020204" pitchFamily="34" charset="0"/>
+                        </a:rPr>
+                        <a:t>(User).all()).</a:t>
+                      </a:r>
+                    </a:p>
+                  </a:txBody>
+                  <a:tcPr marL="50800" marR="50800" marT="50800" marB="50800">
+                    <a:lnL w="12700" cap="flat" cmpd="sng" algn="ctr">
+                      <a:solidFill>
+                        <a:srgbClr val="A3A3A3"/>
+                      </a:solidFill>
+                      <a:prstDash val="solid"/>
+                      <a:round/>
+                      <a:headEnd type="none" w="med" len="med"/>
+                      <a:tailEnd type="none" w="med" len="med"/>
+                    </a:lnL>
+                    <a:lnR w="12700" cap="flat" cmpd="sng" algn="ctr">
+                      <a:solidFill>
+                        <a:srgbClr val="A3A3A3"/>
+                      </a:solidFill>
+                      <a:prstDash val="solid"/>
+                      <a:round/>
+                      <a:headEnd type="none" w="med" len="med"/>
+                      <a:tailEnd type="none" w="med" len="med"/>
+                    </a:lnR>
+                    <a:lnT w="12700" cap="flat" cmpd="sng" algn="ctr">
+                      <a:solidFill>
+                        <a:srgbClr val="A3A3A3"/>
+                      </a:solidFill>
+                      <a:prstDash val="solid"/>
+                      <a:round/>
+                      <a:headEnd type="none" w="med" len="med"/>
+                      <a:tailEnd type="none" w="med" len="med"/>
+                    </a:lnT>
+                    <a:lnB w="12700" cap="flat" cmpd="sng" algn="ctr">
+                      <a:solidFill>
+                        <a:srgbClr val="A3A3A3"/>
+                      </a:solidFill>
+                      <a:prstDash val="solid"/>
+                      <a:round/>
+                      <a:headEnd type="none" w="med" len="med"/>
+                      <a:tailEnd type="none" w="med" len="med"/>
+                    </a:lnB>
+                    <a:noFill/>
+                  </a:tcPr>
+                </a:tc>
+                <a:extLst>
+                  <a:ext uri="{0D108BD9-81ED-4DB2-BD59-A6C34878D82A}">
+                    <a16:rowId xmlns:a16="http://schemas.microsoft.com/office/drawing/2014/main" val="3374866849"/>
+                  </a:ext>
+                </a:extLst>
+              </a:tr>
+            </a:tbl>
+          </a:graphicData>
+        </a:graphic>
+      </p:graphicFrame>
+    </p:spTree>
+    <p:extLst>
+      <p:ext uri="{BB962C8B-B14F-4D97-AF65-F5344CB8AC3E}">
+        <p14:creationId xmlns:p14="http://schemas.microsoft.com/office/powerpoint/2010/main" val="3371284684"/>
+      </p:ext>
+    </p:extLst>
+  </p:cSld>
+  <p:clrMapOvr>
+    <a:masterClrMapping/>
+  </p:clrMapOvr>
+</p:sld>
+</file>
+
+<file path=ppt/slides/slide51.xml><?xml version="1.0" encoding="utf-8"?>
+<p:sld xmlns:a="http://schemas.openxmlformats.org/drawingml/2006/main" xmlns:r="http://schemas.openxmlformats.org/officeDocument/2006/relationships" xmlns:p="http://schemas.openxmlformats.org/presentationml/2006/main">
+  <p:cSld>
+    <p:spTree>
+      <p:nvGrpSpPr>
+        <p:cNvPr id="1" name="">
+          <a:extLst>
+            <a:ext uri="{FF2B5EF4-FFF2-40B4-BE49-F238E27FC236}">
+              <a16:creationId xmlns:a16="http://schemas.microsoft.com/office/drawing/2014/main" id="{3926FDCD-1054-AD99-1C25-F1B43A7DFEBB}"/>
+            </a:ext>
+          </a:extLst>
+        </p:cNvPr>
+        <p:cNvGrpSpPr/>
+        <p:nvPr/>
+      </p:nvGrpSpPr>
+      <p:grpSpPr>
+        <a:xfrm>
+          <a:off x="0" y="0"/>
+          <a:ext cx="0" cy="0"/>
+          <a:chOff x="0" y="0"/>
+          <a:chExt cx="0" cy="0"/>
+        </a:xfrm>
+      </p:grpSpPr>
+      <p:sp>
+        <p:nvSpPr>
+          <p:cNvPr id="3" name="Content Placeholder 2">
+            <a:extLst>
+              <a:ext uri="{FF2B5EF4-FFF2-40B4-BE49-F238E27FC236}">
+                <a16:creationId xmlns:a16="http://schemas.microsoft.com/office/drawing/2014/main" id="{62BF5EFD-79BA-AE8F-19B2-C71FE0F7CB99}"/>
+              </a:ext>
+            </a:extLst>
+          </p:cNvPr>
+          <p:cNvSpPr>
+            <a:spLocks noGrp="1"/>
+          </p:cNvSpPr>
+          <p:nvPr>
+            <p:ph idx="1"/>
+          </p:nvPr>
+        </p:nvSpPr>
+        <p:spPr>
+          <a:xfrm>
+            <a:off x="777240" y="696686"/>
+            <a:ext cx="10659110" cy="5480277"/>
+          </a:xfrm>
+        </p:spPr>
+        <p:txBody>
+          <a:bodyPr>
+            <a:normAutofit/>
+          </a:bodyPr>
+          <a:lstStyle/>
+          <a:p>
+            <a:pPr marL="0" indent="0">
+              <a:buNone/>
+            </a:pPr>
+            <a:r>
+              <a:rPr lang="en-IN" sz="2400" dirty="0"/>
+              <a:t>Example:</a:t>
+            </a:r>
+          </a:p>
+          <a:p>
+            <a:pPr marL="457200" indent="-457200">
+              <a:buAutoNum type="arabicPeriod"/>
+            </a:pPr>
+            <a:r>
+              <a:rPr lang="en-IN" sz="2400" dirty="0"/>
+              <a:t>Step 1: Install the Package:</a:t>
+            </a:r>
+          </a:p>
+          <a:p>
+            <a:pPr marL="457200" indent="-457200">
+              <a:buAutoNum type="arabicPeriod"/>
+            </a:pPr>
+            <a:endParaRPr lang="en-IN" sz="2400" dirty="0"/>
+          </a:p>
+          <a:p>
+            <a:pPr marL="457200" indent="-457200">
+              <a:buAutoNum type="arabicPeriod"/>
+            </a:pPr>
+            <a:endParaRPr lang="en-IN" sz="2400" dirty="0"/>
+          </a:p>
+          <a:p>
+            <a:pPr marL="457200" indent="-457200">
+              <a:buAutoNum type="arabicPeriod"/>
+            </a:pPr>
+            <a:endParaRPr lang="en-IN" sz="2400" dirty="0"/>
+          </a:p>
+          <a:p>
+            <a:pPr marL="457200" indent="-457200">
+              <a:buAutoNum type="arabicPeriod"/>
+            </a:pPr>
+            <a:r>
+              <a:rPr lang="en-US" sz="2400" dirty="0"/>
+              <a:t>Step 2: Create a </a:t>
+            </a:r>
+            <a:r>
+              <a:rPr lang="en-US" dirty="0"/>
+              <a:t>database.</a:t>
+            </a:r>
+            <a:r>
+              <a:rPr lang="en-US"/>
+              <a:t>py</a:t>
+            </a:r>
+            <a:r>
+              <a:rPr lang="en-US" sz="2400"/>
+              <a:t> file</a:t>
+            </a:r>
+          </a:p>
+          <a:p>
+            <a:pPr marL="0" indent="0">
+              <a:buNone/>
+            </a:pPr>
+            <a:endParaRPr lang="en-IN" sz="2400" dirty="0"/>
+          </a:p>
+          <a:p>
+            <a:pPr marL="0" indent="0">
+              <a:buNone/>
+            </a:pPr>
+            <a:endParaRPr lang="en-IN" sz="2400" dirty="0"/>
+          </a:p>
+        </p:txBody>
+      </p:sp>
+      <p:pic>
+        <p:nvPicPr>
+          <p:cNvPr id="4" name="Picture 3">
+            <a:extLst>
+              <a:ext uri="{FF2B5EF4-FFF2-40B4-BE49-F238E27FC236}">
+                <a16:creationId xmlns:a16="http://schemas.microsoft.com/office/drawing/2014/main" id="{3DE112C0-4CC9-175A-CF8D-8379C578B253}"/>
+              </a:ext>
+            </a:extLst>
+          </p:cNvPr>
+          <p:cNvPicPr>
+            <a:picLocks noChangeAspect="1"/>
+          </p:cNvPicPr>
+          <p:nvPr/>
+        </p:nvPicPr>
+        <p:blipFill>
+          <a:blip r:embed="rId2"/>
+          <a:stretch>
+            <a:fillRect/>
+          </a:stretch>
+        </p:blipFill>
+        <p:spPr>
+          <a:xfrm>
+            <a:off x="1885153" y="1925466"/>
+            <a:ext cx="7661619" cy="761302"/>
+          </a:xfrm>
+          <a:prstGeom prst="rect">
+            <a:avLst/>
+          </a:prstGeom>
+        </p:spPr>
+      </p:pic>
+    </p:spTree>
+    <p:extLst>
+      <p:ext uri="{BB962C8B-B14F-4D97-AF65-F5344CB8AC3E}">
+        <p14:creationId xmlns:p14="http://schemas.microsoft.com/office/powerpoint/2010/main" val="699174406"/>
+      </p:ext>
+    </p:extLst>
+  </p:cSld>
+  <p:clrMapOvr>
+    <a:masterClrMapping/>
+  </p:clrMapOvr>
+</p:sld>
+</file>
+
+<file path=ppt/slides/slide52.xml><?xml version="1.0" encoding="utf-8"?>
+<p:sld xmlns:a="http://schemas.openxmlformats.org/drawingml/2006/main" xmlns:r="http://schemas.openxmlformats.org/officeDocument/2006/relationships" xmlns:p="http://schemas.openxmlformats.org/presentationml/2006/main">
+  <p:cSld>
+    <p:spTree>
+      <p:nvGrpSpPr>
+        <p:cNvPr id="1" name="">
+          <a:extLst>
+            <a:ext uri="{FF2B5EF4-FFF2-40B4-BE49-F238E27FC236}">
+              <a16:creationId xmlns:a16="http://schemas.microsoft.com/office/drawing/2014/main" id="{C4BFDA52-F230-6BE3-6B0F-ADA16A68BAB3}"/>
+            </a:ext>
+          </a:extLst>
+        </p:cNvPr>
+        <p:cNvGrpSpPr/>
+        <p:nvPr/>
+      </p:nvGrpSpPr>
+      <p:grpSpPr>
+        <a:xfrm>
+          <a:off x="0" y="0"/>
+          <a:ext cx="0" cy="0"/>
+          <a:chOff x="0" y="0"/>
+          <a:chExt cx="0" cy="0"/>
+        </a:xfrm>
+      </p:grpSpPr>
+      <p:sp>
+        <p:nvSpPr>
+          <p:cNvPr id="3" name="Content Placeholder 2">
+            <a:extLst>
+              <a:ext uri="{FF2B5EF4-FFF2-40B4-BE49-F238E27FC236}">
+                <a16:creationId xmlns:a16="http://schemas.microsoft.com/office/drawing/2014/main" id="{F94BCA23-FE3A-B68D-9407-EBED270166BC}"/>
+              </a:ext>
+            </a:extLst>
+          </p:cNvPr>
+          <p:cNvSpPr>
+            <a:spLocks noGrp="1"/>
+          </p:cNvSpPr>
+          <p:nvPr>
+            <p:ph idx="1"/>
+          </p:nvPr>
+        </p:nvSpPr>
+        <p:spPr>
+          <a:xfrm>
+            <a:off x="777240" y="696686"/>
+            <a:ext cx="10659110" cy="5480277"/>
+          </a:xfrm>
+        </p:spPr>
+        <p:txBody>
+          <a:bodyPr>
+            <a:normAutofit/>
+          </a:bodyPr>
+          <a:lstStyle/>
+          <a:p>
+            <a:pPr marL="0" indent="0">
+              <a:buNone/>
+            </a:pPr>
+            <a:endParaRPr lang="en-IN" sz="2400" dirty="0"/>
+          </a:p>
+        </p:txBody>
+      </p:sp>
+    </p:spTree>
+    <p:extLst>
+      <p:ext uri="{BB962C8B-B14F-4D97-AF65-F5344CB8AC3E}">
+        <p14:creationId xmlns:p14="http://schemas.microsoft.com/office/powerpoint/2010/main" val="4026936663"/>
+      </p:ext>
+    </p:extLst>
+  </p:cSld>
+  <p:clrMapOvr>
+    <a:masterClrMapping/>
+  </p:clrMapOvr>
+</p:sld>
+</file>
+
+<file path=ppt/slides/slide53.xml><?xml version="1.0" encoding="utf-8"?>
+<p:sld xmlns:a="http://schemas.openxmlformats.org/drawingml/2006/main" xmlns:r="http://schemas.openxmlformats.org/officeDocument/2006/relationships" xmlns:p="http://schemas.openxmlformats.org/presentationml/2006/main">
+  <p:cSld>
+    <p:spTree>
+      <p:nvGrpSpPr>
+        <p:cNvPr id="1" name="">
+          <a:extLst>
+            <a:ext uri="{FF2B5EF4-FFF2-40B4-BE49-F238E27FC236}">
+              <a16:creationId xmlns:a16="http://schemas.microsoft.com/office/drawing/2014/main" id="{06260C18-C696-94B6-F58A-0288D0563B80}"/>
+            </a:ext>
+          </a:extLst>
+        </p:cNvPr>
+        <p:cNvGrpSpPr/>
+        <p:nvPr/>
+      </p:nvGrpSpPr>
+      <p:grpSpPr>
+        <a:xfrm>
+          <a:off x="0" y="0"/>
+          <a:ext cx="0" cy="0"/>
+          <a:chOff x="0" y="0"/>
+          <a:chExt cx="0" cy="0"/>
+        </a:xfrm>
+      </p:grpSpPr>
+      <p:sp>
+        <p:nvSpPr>
+          <p:cNvPr id="3" name="Content Placeholder 2">
+            <a:extLst>
+              <a:ext uri="{FF2B5EF4-FFF2-40B4-BE49-F238E27FC236}">
+                <a16:creationId xmlns:a16="http://schemas.microsoft.com/office/drawing/2014/main" id="{852F22F7-98A0-3857-5D3D-951DFF4DD97D}"/>
+              </a:ext>
+            </a:extLst>
+          </p:cNvPr>
+          <p:cNvSpPr>
+            <a:spLocks noGrp="1"/>
+          </p:cNvSpPr>
+          <p:nvPr>
+            <p:ph idx="1"/>
+          </p:nvPr>
+        </p:nvSpPr>
+        <p:spPr>
+          <a:xfrm>
+            <a:off x="777240" y="696686"/>
+            <a:ext cx="10659110" cy="5480277"/>
+          </a:xfrm>
+        </p:spPr>
+        <p:txBody>
+          <a:bodyPr>
+            <a:normAutofit/>
+          </a:bodyPr>
+          <a:lstStyle/>
+          <a:p>
+            <a:pPr marL="0" indent="0">
+              <a:buNone/>
+            </a:pPr>
+            <a:endParaRPr lang="en-IN" sz="2400" dirty="0"/>
+          </a:p>
+        </p:txBody>
+      </p:sp>
+    </p:spTree>
+    <p:extLst>
+      <p:ext uri="{BB962C8B-B14F-4D97-AF65-F5344CB8AC3E}">
+        <p14:creationId xmlns:p14="http://schemas.microsoft.com/office/powerpoint/2010/main" val="3130721367"/>
+      </p:ext>
+    </p:extLst>
+  </p:cSld>
+  <p:clrMapOvr>
+    <a:masterClrMapping/>
+  </p:clrMapOvr>
+</p:sld>
+</file>
+
+<file path=ppt/slides/slide54.xml><?xml version="1.0" encoding="utf-8"?>
+<p:sld xmlns:a="http://schemas.openxmlformats.org/drawingml/2006/main" xmlns:r="http://schemas.openxmlformats.org/officeDocument/2006/relationships" xmlns:p="http://schemas.openxmlformats.org/presentationml/2006/main">
+  <p:cSld>
+    <p:spTree>
+      <p:nvGrpSpPr>
+        <p:cNvPr id="1" name="">
+          <a:extLst>
+            <a:ext uri="{FF2B5EF4-FFF2-40B4-BE49-F238E27FC236}">
+              <a16:creationId xmlns:a16="http://schemas.microsoft.com/office/drawing/2014/main" id="{D07C069C-A32B-FC24-A82A-8695761674B9}"/>
+            </a:ext>
+          </a:extLst>
+        </p:cNvPr>
+        <p:cNvGrpSpPr/>
+        <p:nvPr/>
+      </p:nvGrpSpPr>
+      <p:grpSpPr>
+        <a:xfrm>
+          <a:off x="0" y="0"/>
+          <a:ext cx="0" cy="0"/>
+          <a:chOff x="0" y="0"/>
+          <a:chExt cx="0" cy="0"/>
+        </a:xfrm>
+      </p:grpSpPr>
+      <p:sp>
+        <p:nvSpPr>
+          <p:cNvPr id="3" name="Content Placeholder 2">
+            <a:extLst>
+              <a:ext uri="{FF2B5EF4-FFF2-40B4-BE49-F238E27FC236}">
+                <a16:creationId xmlns:a16="http://schemas.microsoft.com/office/drawing/2014/main" id="{E5950FD4-C2C3-BB7D-D733-B6BF91598CA7}"/>
+              </a:ext>
+            </a:extLst>
+          </p:cNvPr>
+          <p:cNvSpPr>
+            <a:spLocks noGrp="1"/>
+          </p:cNvSpPr>
+          <p:nvPr>
+            <p:ph idx="1"/>
+          </p:nvPr>
+        </p:nvSpPr>
+        <p:spPr>
+          <a:xfrm>
+            <a:off x="777240" y="696686"/>
+            <a:ext cx="10659110" cy="5480277"/>
+          </a:xfrm>
+        </p:spPr>
+        <p:txBody>
+          <a:bodyPr>
+            <a:normAutofit/>
+          </a:bodyPr>
+          <a:lstStyle/>
+          <a:p>
+            <a:pPr marL="0" indent="0">
+              <a:buNone/>
+            </a:pPr>
+            <a:endParaRPr lang="en-IN" sz="2400" dirty="0"/>
+          </a:p>
+        </p:txBody>
+      </p:sp>
+    </p:spTree>
+    <p:extLst>
+      <p:ext uri="{BB962C8B-B14F-4D97-AF65-F5344CB8AC3E}">
+        <p14:creationId xmlns:p14="http://schemas.microsoft.com/office/powerpoint/2010/main" val="1462992910"/>
+      </p:ext>
+    </p:extLst>
+  </p:cSld>
+  <p:clrMapOvr>
+    <a:masterClrMapping/>
+  </p:clrMapOvr>
+</p:sld>
+</file>
+
+<file path=ppt/slides/slide55.xml><?xml version="1.0" encoding="utf-8"?>
+<p:sld xmlns:a="http://schemas.openxmlformats.org/drawingml/2006/main" xmlns:r="http://schemas.openxmlformats.org/officeDocument/2006/relationships" xmlns:p="http://schemas.openxmlformats.org/presentationml/2006/main">
+  <p:cSld>
+    <p:spTree>
+      <p:nvGrpSpPr>
+        <p:cNvPr id="1" name="">
+          <a:extLst>
+            <a:ext uri="{FF2B5EF4-FFF2-40B4-BE49-F238E27FC236}">
+              <a16:creationId xmlns:a16="http://schemas.microsoft.com/office/drawing/2014/main" id="{026ABC2B-6FF3-84C1-130A-76C212CDBF19}"/>
+            </a:ext>
+          </a:extLst>
+        </p:cNvPr>
+        <p:cNvGrpSpPr/>
+        <p:nvPr/>
+      </p:nvGrpSpPr>
+      <p:grpSpPr>
+        <a:xfrm>
+          <a:off x="0" y="0"/>
+          <a:ext cx="0" cy="0"/>
+          <a:chOff x="0" y="0"/>
+          <a:chExt cx="0" cy="0"/>
+        </a:xfrm>
+      </p:grpSpPr>
+      <p:sp>
+        <p:nvSpPr>
+          <p:cNvPr id="3" name="Content Placeholder 2">
+            <a:extLst>
+              <a:ext uri="{FF2B5EF4-FFF2-40B4-BE49-F238E27FC236}">
+                <a16:creationId xmlns:a16="http://schemas.microsoft.com/office/drawing/2014/main" id="{08B87A4A-D75F-2E06-A05D-6B6B10C506F6}"/>
+              </a:ext>
+            </a:extLst>
+          </p:cNvPr>
+          <p:cNvSpPr>
+            <a:spLocks noGrp="1"/>
+          </p:cNvSpPr>
+          <p:nvPr>
+            <p:ph idx="1"/>
+          </p:nvPr>
+        </p:nvSpPr>
+        <p:spPr>
+          <a:xfrm>
+            <a:off x="777240" y="696686"/>
+            <a:ext cx="10659110" cy="5480277"/>
+          </a:xfrm>
+        </p:spPr>
+        <p:txBody>
+          <a:bodyPr>
+            <a:normAutofit/>
+          </a:bodyPr>
+          <a:lstStyle/>
+          <a:p>
+            <a:pPr marL="0" indent="0">
+              <a:buNone/>
+            </a:pPr>
+            <a:endParaRPr lang="en-IN" sz="2400" dirty="0"/>
+          </a:p>
+        </p:txBody>
+      </p:sp>
+    </p:spTree>
+    <p:extLst>
+      <p:ext uri="{BB962C8B-B14F-4D97-AF65-F5344CB8AC3E}">
+        <p14:creationId xmlns:p14="http://schemas.microsoft.com/office/powerpoint/2010/main" val="2559913098"/>
+      </p:ext>
+    </p:extLst>
+  </p:cSld>
+  <p:clrMapOvr>
+    <a:masterClrMapping/>
+  </p:clrMapOvr>
+</p:sld>
+</file>
+
+<file path=ppt/slides/slide56.xml><?xml version="1.0" encoding="utf-8"?>
+<p:sld xmlns:a="http://schemas.openxmlformats.org/drawingml/2006/main" xmlns:r="http://schemas.openxmlformats.org/officeDocument/2006/relationships" xmlns:p="http://schemas.openxmlformats.org/presentationml/2006/main">
+  <p:cSld>
+    <p:spTree>
+      <p:nvGrpSpPr>
+        <p:cNvPr id="1" name="">
+          <a:extLst>
+            <a:ext uri="{FF2B5EF4-FFF2-40B4-BE49-F238E27FC236}">
+              <a16:creationId xmlns:a16="http://schemas.microsoft.com/office/drawing/2014/main" id="{81BB885C-C0AE-4DF9-90F4-1EE837C2E632}"/>
+            </a:ext>
+          </a:extLst>
+        </p:cNvPr>
+        <p:cNvGrpSpPr/>
+        <p:nvPr/>
+      </p:nvGrpSpPr>
+      <p:grpSpPr>
+        <a:xfrm>
+          <a:off x="0" y="0"/>
+          <a:ext cx="0" cy="0"/>
+          <a:chOff x="0" y="0"/>
+          <a:chExt cx="0" cy="0"/>
+        </a:xfrm>
+      </p:grpSpPr>
+      <p:sp>
+        <p:nvSpPr>
+          <p:cNvPr id="3" name="Content Placeholder 2">
+            <a:extLst>
+              <a:ext uri="{FF2B5EF4-FFF2-40B4-BE49-F238E27FC236}">
+                <a16:creationId xmlns:a16="http://schemas.microsoft.com/office/drawing/2014/main" id="{64A27972-EB2C-F067-D907-C5C51C3EFE10}"/>
+              </a:ext>
+            </a:extLst>
+          </p:cNvPr>
+          <p:cNvSpPr>
+            <a:spLocks noGrp="1"/>
+          </p:cNvSpPr>
+          <p:nvPr>
+            <p:ph idx="1"/>
+          </p:nvPr>
+        </p:nvSpPr>
+        <p:spPr>
+          <a:xfrm>
+            <a:off x="777240" y="696686"/>
+            <a:ext cx="10659110" cy="5480277"/>
+          </a:xfrm>
+        </p:spPr>
+        <p:txBody>
+          <a:bodyPr>
+            <a:normAutofit/>
+          </a:bodyPr>
+          <a:lstStyle/>
+          <a:p>
+            <a:pPr marL="0" indent="0">
+              <a:buNone/>
+            </a:pPr>
+            <a:endParaRPr lang="en-IN" sz="2400" dirty="0"/>
+          </a:p>
+        </p:txBody>
+      </p:sp>
+    </p:spTree>
+    <p:extLst>
+      <p:ext uri="{BB962C8B-B14F-4D97-AF65-F5344CB8AC3E}">
+        <p14:creationId xmlns:p14="http://schemas.microsoft.com/office/powerpoint/2010/main" val="238499470"/>
+      </p:ext>
+    </p:extLst>
+  </p:cSld>
+  <p:clrMapOvr>
+    <a:masterClrMapping/>
+  </p:clrMapOvr>
+</p:sld>
+</file>
+
+<file path=ppt/slides/slide57.xml><?xml version="1.0" encoding="utf-8"?>
+<p:sld xmlns:a="http://schemas.openxmlformats.org/drawingml/2006/main" xmlns:r="http://schemas.openxmlformats.org/officeDocument/2006/relationships" xmlns:p="http://schemas.openxmlformats.org/presentationml/2006/main">
+  <p:cSld>
+    <p:spTree>
+      <p:nvGrpSpPr>
+        <p:cNvPr id="1" name="">
+          <a:extLst>
+            <a:ext uri="{FF2B5EF4-FFF2-40B4-BE49-F238E27FC236}">
+              <a16:creationId xmlns:a16="http://schemas.microsoft.com/office/drawing/2014/main" id="{F357E115-3533-1E79-C0A2-03575CBACE2A}"/>
+            </a:ext>
+          </a:extLst>
+        </p:cNvPr>
+        <p:cNvGrpSpPr/>
+        <p:nvPr/>
+      </p:nvGrpSpPr>
+      <p:grpSpPr>
+        <a:xfrm>
+          <a:off x="0" y="0"/>
+          <a:ext cx="0" cy="0"/>
+          <a:chOff x="0" y="0"/>
+          <a:chExt cx="0" cy="0"/>
+        </a:xfrm>
+      </p:grpSpPr>
+      <p:sp>
+        <p:nvSpPr>
+          <p:cNvPr id="3" name="Content Placeholder 2">
+            <a:extLst>
+              <a:ext uri="{FF2B5EF4-FFF2-40B4-BE49-F238E27FC236}">
+                <a16:creationId xmlns:a16="http://schemas.microsoft.com/office/drawing/2014/main" id="{5BECF0CA-C938-2802-FC96-FDA5861DB0B3}"/>
+              </a:ext>
+            </a:extLst>
+          </p:cNvPr>
+          <p:cNvSpPr>
+            <a:spLocks noGrp="1"/>
+          </p:cNvSpPr>
+          <p:nvPr>
+            <p:ph idx="1"/>
+          </p:nvPr>
+        </p:nvSpPr>
+        <p:spPr>
+          <a:xfrm>
+            <a:off x="777240" y="696686"/>
+            <a:ext cx="10659110" cy="5480277"/>
+          </a:xfrm>
+        </p:spPr>
+        <p:txBody>
+          <a:bodyPr>
+            <a:normAutofit/>
+          </a:bodyPr>
+          <a:lstStyle/>
+          <a:p>
+            <a:pPr marL="0" indent="0">
+              <a:buNone/>
+            </a:pPr>
+            <a:endParaRPr lang="en-IN" sz="2400" dirty="0"/>
+          </a:p>
+        </p:txBody>
+      </p:sp>
+    </p:spTree>
+    <p:extLst>
+      <p:ext uri="{BB962C8B-B14F-4D97-AF65-F5344CB8AC3E}">
+        <p14:creationId xmlns:p14="http://schemas.microsoft.com/office/powerpoint/2010/main" val="4133616361"/>
+      </p:ext>
+    </p:extLst>
+  </p:cSld>
+  <p:clrMapOvr>
+    <a:masterClrMapping/>
+  </p:clrMapOvr>
+</p:sld>
+</file>
+
+<file path=ppt/slides/slide58.xml><?xml version="1.0" encoding="utf-8"?>
+<p:sld xmlns:a="http://schemas.openxmlformats.org/drawingml/2006/main" xmlns:r="http://schemas.openxmlformats.org/officeDocument/2006/relationships" xmlns:p="http://schemas.openxmlformats.org/presentationml/2006/main">
+  <p:cSld>
+    <p:spTree>
+      <p:nvGrpSpPr>
+        <p:cNvPr id="1" name="">
+          <a:extLst>
+            <a:ext uri="{FF2B5EF4-FFF2-40B4-BE49-F238E27FC236}">
+              <a16:creationId xmlns:a16="http://schemas.microsoft.com/office/drawing/2014/main" id="{3DE73227-C8E2-1833-A156-405743E3D8BA}"/>
+            </a:ext>
+          </a:extLst>
+        </p:cNvPr>
+        <p:cNvGrpSpPr/>
+        <p:nvPr/>
+      </p:nvGrpSpPr>
+      <p:grpSpPr>
+        <a:xfrm>
+          <a:off x="0" y="0"/>
+          <a:ext cx="0" cy="0"/>
+          <a:chOff x="0" y="0"/>
+          <a:chExt cx="0" cy="0"/>
+        </a:xfrm>
+      </p:grpSpPr>
+      <p:sp>
+        <p:nvSpPr>
+          <p:cNvPr id="3" name="Content Placeholder 2">
+            <a:extLst>
+              <a:ext uri="{FF2B5EF4-FFF2-40B4-BE49-F238E27FC236}">
+                <a16:creationId xmlns:a16="http://schemas.microsoft.com/office/drawing/2014/main" id="{5583C7C3-D10D-9FC3-DD35-3C4A5D61A8FD}"/>
+              </a:ext>
+            </a:extLst>
+          </p:cNvPr>
+          <p:cNvSpPr>
+            <a:spLocks noGrp="1"/>
+          </p:cNvSpPr>
+          <p:nvPr>
+            <p:ph idx="1"/>
+          </p:nvPr>
+        </p:nvSpPr>
+        <p:spPr>
+          <a:xfrm>
+            <a:off x="777240" y="696686"/>
+            <a:ext cx="10659110" cy="5480277"/>
+          </a:xfrm>
+        </p:spPr>
+        <p:txBody>
+          <a:bodyPr>
+            <a:normAutofit/>
+          </a:bodyPr>
+          <a:lstStyle/>
+          <a:p>
+            <a:pPr marL="0" indent="0">
+              <a:buNone/>
+            </a:pPr>
+            <a:endParaRPr lang="en-IN" sz="2400" dirty="0"/>
+          </a:p>
+        </p:txBody>
+      </p:sp>
+    </p:spTree>
+    <p:extLst>
+      <p:ext uri="{BB962C8B-B14F-4D97-AF65-F5344CB8AC3E}">
+        <p14:creationId xmlns:p14="http://schemas.microsoft.com/office/powerpoint/2010/main" val="133758683"/>
+      </p:ext>
+    </p:extLst>
+  </p:cSld>
+  <p:clrMapOvr>
+    <a:masterClrMapping/>
+  </p:clrMapOvr>
+</p:sld>
+</file>
+
+<file path=ppt/slides/slide59.xml><?xml version="1.0" encoding="utf-8"?>
+<p:sld xmlns:a="http://schemas.openxmlformats.org/drawingml/2006/main" xmlns:r="http://schemas.openxmlformats.org/officeDocument/2006/relationships" xmlns:p="http://schemas.openxmlformats.org/presentationml/2006/main">
+  <p:cSld>
+    <p:spTree>
+      <p:nvGrpSpPr>
+        <p:cNvPr id="1" name="">
+          <a:extLst>
+            <a:ext uri="{FF2B5EF4-FFF2-40B4-BE49-F238E27FC236}">
+              <a16:creationId xmlns:a16="http://schemas.microsoft.com/office/drawing/2014/main" id="{0215148C-FAA0-B28C-D11C-7A3E1CDFF100}"/>
+            </a:ext>
+          </a:extLst>
+        </p:cNvPr>
+        <p:cNvGrpSpPr/>
+        <p:nvPr/>
+      </p:nvGrpSpPr>
+      <p:grpSpPr>
+        <a:xfrm>
+          <a:off x="0" y="0"/>
+          <a:ext cx="0" cy="0"/>
+          <a:chOff x="0" y="0"/>
+          <a:chExt cx="0" cy="0"/>
+        </a:xfrm>
+      </p:grpSpPr>
+      <p:sp>
+        <p:nvSpPr>
+          <p:cNvPr id="3" name="Content Placeholder 2">
+            <a:extLst>
+              <a:ext uri="{FF2B5EF4-FFF2-40B4-BE49-F238E27FC236}">
+                <a16:creationId xmlns:a16="http://schemas.microsoft.com/office/drawing/2014/main" id="{8E594018-880D-41E9-12BB-B64C737997DB}"/>
+              </a:ext>
+            </a:extLst>
+          </p:cNvPr>
+          <p:cNvSpPr>
+            <a:spLocks noGrp="1"/>
+          </p:cNvSpPr>
+          <p:nvPr>
+            <p:ph idx="1"/>
+          </p:nvPr>
+        </p:nvSpPr>
+        <p:spPr>
+          <a:xfrm>
+            <a:off x="777240" y="696686"/>
+            <a:ext cx="10659110" cy="5480277"/>
+          </a:xfrm>
+        </p:spPr>
+        <p:txBody>
+          <a:bodyPr>
+            <a:normAutofit/>
+          </a:bodyPr>
+          <a:lstStyle/>
+          <a:p>
+            <a:pPr marL="0" indent="0">
+              <a:buNone/>
+            </a:pPr>
+            <a:endParaRPr lang="en-IN" sz="2400" dirty="0"/>
+          </a:p>
+        </p:txBody>
+      </p:sp>
+    </p:spTree>
+    <p:extLst>
+      <p:ext uri="{BB962C8B-B14F-4D97-AF65-F5344CB8AC3E}">
+        <p14:creationId xmlns:p14="http://schemas.microsoft.com/office/powerpoint/2010/main" val="2779355306"/>
+      </p:ext>
+    </p:extLst>
+  </p:cSld>
+  <p:clrMapOvr>
+    <a:masterClrMapping/>
+  </p:clrMapOvr>
+</p:sld>
+</file>
+
 <file path=ppt/slides/slide6.xml><?xml version="1.0" encoding="utf-8"?>
 <p:sld xmlns:a="http://schemas.openxmlformats.org/drawingml/2006/main" xmlns:r="http://schemas.openxmlformats.org/officeDocument/2006/relationships" xmlns:p="http://schemas.openxmlformats.org/presentationml/2006/main">
   <p:cSld>
@@ -13962,6 +18102,219 @@
     <p:extLst>
       <p:ext uri="{BB962C8B-B14F-4D97-AF65-F5344CB8AC3E}">
         <p14:creationId xmlns:p14="http://schemas.microsoft.com/office/powerpoint/2010/main" val="1417320102"/>
+      </p:ext>
+    </p:extLst>
+  </p:cSld>
+  <p:clrMapOvr>
+    <a:masterClrMapping/>
+  </p:clrMapOvr>
+</p:sld>
+</file>
+
+<file path=ppt/slides/slide60.xml><?xml version="1.0" encoding="utf-8"?>
+<p:sld xmlns:a="http://schemas.openxmlformats.org/drawingml/2006/main" xmlns:r="http://schemas.openxmlformats.org/officeDocument/2006/relationships" xmlns:p="http://schemas.openxmlformats.org/presentationml/2006/main">
+  <p:cSld>
+    <p:spTree>
+      <p:nvGrpSpPr>
+        <p:cNvPr id="1" name="">
+          <a:extLst>
+            <a:ext uri="{FF2B5EF4-FFF2-40B4-BE49-F238E27FC236}">
+              <a16:creationId xmlns:a16="http://schemas.microsoft.com/office/drawing/2014/main" id="{FFD6EED2-A3BB-B01D-74E3-F3E59700FB52}"/>
+            </a:ext>
+          </a:extLst>
+        </p:cNvPr>
+        <p:cNvGrpSpPr/>
+        <p:nvPr/>
+      </p:nvGrpSpPr>
+      <p:grpSpPr>
+        <a:xfrm>
+          <a:off x="0" y="0"/>
+          <a:ext cx="0" cy="0"/>
+          <a:chOff x="0" y="0"/>
+          <a:chExt cx="0" cy="0"/>
+        </a:xfrm>
+      </p:grpSpPr>
+      <p:sp>
+        <p:nvSpPr>
+          <p:cNvPr id="3" name="Content Placeholder 2">
+            <a:extLst>
+              <a:ext uri="{FF2B5EF4-FFF2-40B4-BE49-F238E27FC236}">
+                <a16:creationId xmlns:a16="http://schemas.microsoft.com/office/drawing/2014/main" id="{F078D154-D5E2-6D6C-49CD-F890F93EBC1A}"/>
+              </a:ext>
+            </a:extLst>
+          </p:cNvPr>
+          <p:cNvSpPr>
+            <a:spLocks noGrp="1"/>
+          </p:cNvSpPr>
+          <p:nvPr>
+            <p:ph idx="1"/>
+          </p:nvPr>
+        </p:nvSpPr>
+        <p:spPr>
+          <a:xfrm>
+            <a:off x="777240" y="696686"/>
+            <a:ext cx="10659110" cy="5480277"/>
+          </a:xfrm>
+        </p:spPr>
+        <p:txBody>
+          <a:bodyPr>
+            <a:normAutofit/>
+          </a:bodyPr>
+          <a:lstStyle/>
+          <a:p>
+            <a:pPr marL="0" indent="0">
+              <a:buNone/>
+            </a:pPr>
+            <a:endParaRPr lang="en-IN" sz="2400" dirty="0"/>
+          </a:p>
+        </p:txBody>
+      </p:sp>
+    </p:spTree>
+    <p:extLst>
+      <p:ext uri="{BB962C8B-B14F-4D97-AF65-F5344CB8AC3E}">
+        <p14:creationId xmlns:p14="http://schemas.microsoft.com/office/powerpoint/2010/main" val="1341148807"/>
+      </p:ext>
+    </p:extLst>
+  </p:cSld>
+  <p:clrMapOvr>
+    <a:masterClrMapping/>
+  </p:clrMapOvr>
+</p:sld>
+</file>
+
+<file path=ppt/slides/slide61.xml><?xml version="1.0" encoding="utf-8"?>
+<p:sld xmlns:a="http://schemas.openxmlformats.org/drawingml/2006/main" xmlns:r="http://schemas.openxmlformats.org/officeDocument/2006/relationships" xmlns:p="http://schemas.openxmlformats.org/presentationml/2006/main">
+  <p:cSld>
+    <p:spTree>
+      <p:nvGrpSpPr>
+        <p:cNvPr id="1" name="">
+          <a:extLst>
+            <a:ext uri="{FF2B5EF4-FFF2-40B4-BE49-F238E27FC236}">
+              <a16:creationId xmlns:a16="http://schemas.microsoft.com/office/drawing/2014/main" id="{A31062E5-9979-AA23-0B3F-F62EE5E58C0B}"/>
+            </a:ext>
+          </a:extLst>
+        </p:cNvPr>
+        <p:cNvGrpSpPr/>
+        <p:nvPr/>
+      </p:nvGrpSpPr>
+      <p:grpSpPr>
+        <a:xfrm>
+          <a:off x="0" y="0"/>
+          <a:ext cx="0" cy="0"/>
+          <a:chOff x="0" y="0"/>
+          <a:chExt cx="0" cy="0"/>
+        </a:xfrm>
+      </p:grpSpPr>
+      <p:sp>
+        <p:nvSpPr>
+          <p:cNvPr id="3" name="Content Placeholder 2">
+            <a:extLst>
+              <a:ext uri="{FF2B5EF4-FFF2-40B4-BE49-F238E27FC236}">
+                <a16:creationId xmlns:a16="http://schemas.microsoft.com/office/drawing/2014/main" id="{760A2593-0AF0-A4C2-0094-583BB78D131A}"/>
+              </a:ext>
+            </a:extLst>
+          </p:cNvPr>
+          <p:cNvSpPr>
+            <a:spLocks noGrp="1"/>
+          </p:cNvSpPr>
+          <p:nvPr>
+            <p:ph idx="1"/>
+          </p:nvPr>
+        </p:nvSpPr>
+        <p:spPr>
+          <a:xfrm>
+            <a:off x="777240" y="696686"/>
+            <a:ext cx="10659110" cy="5480277"/>
+          </a:xfrm>
+        </p:spPr>
+        <p:txBody>
+          <a:bodyPr>
+            <a:normAutofit/>
+          </a:bodyPr>
+          <a:lstStyle/>
+          <a:p>
+            <a:pPr marL="0" indent="0">
+              <a:buNone/>
+            </a:pPr>
+            <a:endParaRPr lang="en-IN" sz="2400" dirty="0"/>
+          </a:p>
+        </p:txBody>
+      </p:sp>
+    </p:spTree>
+    <p:extLst>
+      <p:ext uri="{BB962C8B-B14F-4D97-AF65-F5344CB8AC3E}">
+        <p14:creationId xmlns:p14="http://schemas.microsoft.com/office/powerpoint/2010/main" val="1068831768"/>
+      </p:ext>
+    </p:extLst>
+  </p:cSld>
+  <p:clrMapOvr>
+    <a:masterClrMapping/>
+  </p:clrMapOvr>
+</p:sld>
+</file>
+
+<file path=ppt/slides/slide62.xml><?xml version="1.0" encoding="utf-8"?>
+<p:sld xmlns:a="http://schemas.openxmlformats.org/drawingml/2006/main" xmlns:r="http://schemas.openxmlformats.org/officeDocument/2006/relationships" xmlns:p="http://schemas.openxmlformats.org/presentationml/2006/main">
+  <p:cSld>
+    <p:spTree>
+      <p:nvGrpSpPr>
+        <p:cNvPr id="1" name="">
+          <a:extLst>
+            <a:ext uri="{FF2B5EF4-FFF2-40B4-BE49-F238E27FC236}">
+              <a16:creationId xmlns:a16="http://schemas.microsoft.com/office/drawing/2014/main" id="{F2A1B423-1B3C-B999-58CA-1F2E39B106DE}"/>
+            </a:ext>
+          </a:extLst>
+        </p:cNvPr>
+        <p:cNvGrpSpPr/>
+        <p:nvPr/>
+      </p:nvGrpSpPr>
+      <p:grpSpPr>
+        <a:xfrm>
+          <a:off x="0" y="0"/>
+          <a:ext cx="0" cy="0"/>
+          <a:chOff x="0" y="0"/>
+          <a:chExt cx="0" cy="0"/>
+        </a:xfrm>
+      </p:grpSpPr>
+      <p:sp>
+        <p:nvSpPr>
+          <p:cNvPr id="3" name="Content Placeholder 2">
+            <a:extLst>
+              <a:ext uri="{FF2B5EF4-FFF2-40B4-BE49-F238E27FC236}">
+                <a16:creationId xmlns:a16="http://schemas.microsoft.com/office/drawing/2014/main" id="{B5867193-08B6-7B71-FE70-1AB35E1CC669}"/>
+              </a:ext>
+            </a:extLst>
+          </p:cNvPr>
+          <p:cNvSpPr>
+            <a:spLocks noGrp="1"/>
+          </p:cNvSpPr>
+          <p:nvPr>
+            <p:ph idx="1"/>
+          </p:nvPr>
+        </p:nvSpPr>
+        <p:spPr>
+          <a:xfrm>
+            <a:off x="777240" y="696686"/>
+            <a:ext cx="10659110" cy="5480277"/>
+          </a:xfrm>
+        </p:spPr>
+        <p:txBody>
+          <a:bodyPr>
+            <a:normAutofit/>
+          </a:bodyPr>
+          <a:lstStyle/>
+          <a:p>
+            <a:pPr marL="0" indent="0">
+              <a:buNone/>
+            </a:pPr>
+            <a:endParaRPr lang="en-IN" sz="2400" dirty="0"/>
+          </a:p>
+        </p:txBody>
+      </p:sp>
+    </p:spTree>
+    <p:extLst>
+      <p:ext uri="{BB962C8B-B14F-4D97-AF65-F5344CB8AC3E}">
+        <p14:creationId xmlns:p14="http://schemas.microsoft.com/office/powerpoint/2010/main" val="4084032356"/>
       </p:ext>
     </p:extLst>
   </p:cSld>

--- a/FastAPI/FastAPI- Intermediate.pptx
+++ b/FastAPI/FastAPI- Intermediate.pptx
@@ -5,7 +5,7 @@
     <p:sldMasterId id="2147483710" r:id="rId1"/>
   </p:sldMasterIdLst>
   <p:notesMasterIdLst>
-    <p:notesMasterId r:id="rId64"/>
+    <p:notesMasterId r:id="rId68"/>
   </p:notesMasterIdLst>
   <p:sldIdLst>
     <p:sldId id="531" r:id="rId2"/>
@@ -59,17 +59,21 @@
     <p:sldId id="571" r:id="rId50"/>
     <p:sldId id="572" r:id="rId51"/>
     <p:sldId id="573" r:id="rId52"/>
-    <p:sldId id="574" r:id="rId53"/>
-    <p:sldId id="575" r:id="rId54"/>
-    <p:sldId id="576" r:id="rId55"/>
-    <p:sldId id="577" r:id="rId56"/>
-    <p:sldId id="578" r:id="rId57"/>
-    <p:sldId id="579" r:id="rId58"/>
-    <p:sldId id="580" r:id="rId59"/>
-    <p:sldId id="581" r:id="rId60"/>
-    <p:sldId id="582" r:id="rId61"/>
-    <p:sldId id="583" r:id="rId62"/>
-    <p:sldId id="584" r:id="rId63"/>
+    <p:sldId id="575" r:id="rId53"/>
+    <p:sldId id="576" r:id="rId54"/>
+    <p:sldId id="577" r:id="rId55"/>
+    <p:sldId id="578" r:id="rId56"/>
+    <p:sldId id="579" r:id="rId57"/>
+    <p:sldId id="580" r:id="rId58"/>
+    <p:sldId id="581" r:id="rId59"/>
+    <p:sldId id="582" r:id="rId60"/>
+    <p:sldId id="583" r:id="rId61"/>
+    <p:sldId id="584" r:id="rId62"/>
+    <p:sldId id="585" r:id="rId63"/>
+    <p:sldId id="586" r:id="rId64"/>
+    <p:sldId id="587" r:id="rId65"/>
+    <p:sldId id="588" r:id="rId66"/>
+    <p:sldId id="589" r:id="rId67"/>
   </p:sldIdLst>
   <p:sldSz cx="12192000" cy="6858000"/>
   <p:notesSz cx="6858000" cy="9144000"/>
@@ -186,6 +190,94 @@
 
 <file path=ppt/changesInfos/changesInfo1.xml><?xml version="1.0" encoding="utf-8"?>
 <pc:chgInfo xmlns:a="http://schemas.openxmlformats.org/drawingml/2006/main" xmlns:r="http://schemas.openxmlformats.org/officeDocument/2006/relationships" xmlns:ac="http://schemas.microsoft.com/office/drawing/2013/main/command" xmlns:pc="http://schemas.microsoft.com/office/powerpoint/2013/main/command">
+  <pc:docChgLst>
+    <pc:chgData name="Pramod Naik" userId="ceb6df04-ef15-4d9b-a141-998a03559d75" providerId="ADAL" clId="{D1D4E302-CA95-476B-B320-79C7EBDE6899}"/>
+    <pc:docChg chg="undo custSel addSld delSld modSld">
+      <pc:chgData name="Pramod Naik" userId="ceb6df04-ef15-4d9b-a141-998a03559d75" providerId="ADAL" clId="{D1D4E302-CA95-476B-B320-79C7EBDE6899}" dt="2025-09-04T20:26:20.323" v="8" actId="47"/>
+      <pc:docMkLst>
+        <pc:docMk/>
+      </pc:docMkLst>
+      <pc:sldChg chg="modSp">
+        <pc:chgData name="Pramod Naik" userId="ceb6df04-ef15-4d9b-a141-998a03559d75" providerId="ADAL" clId="{D1D4E302-CA95-476B-B320-79C7EBDE6899}" dt="2025-09-04T20:26:07.698" v="4" actId="1036"/>
+        <pc:sldMkLst>
+          <pc:docMk/>
+          <pc:sldMk cId="3886295808" sldId="538"/>
+        </pc:sldMkLst>
+      </pc:sldChg>
+      <pc:sldChg chg="del">
+        <pc:chgData name="Pramod Naik" userId="ceb6df04-ef15-4d9b-a141-998a03559d75" providerId="ADAL" clId="{D1D4E302-CA95-476B-B320-79C7EBDE6899}" dt="2025-09-04T20:26:19.563" v="7" actId="47"/>
+        <pc:sldMkLst>
+          <pc:docMk/>
+          <pc:sldMk cId="2303070927" sldId="539"/>
+        </pc:sldMkLst>
+      </pc:sldChg>
+      <pc:sldChg chg="add del">
+        <pc:chgData name="Pramod Naik" userId="ceb6df04-ef15-4d9b-a141-998a03559d75" providerId="ADAL" clId="{D1D4E302-CA95-476B-B320-79C7EBDE6899}" dt="2025-09-04T20:26:20.323" v="8" actId="47"/>
+        <pc:sldMkLst>
+          <pc:docMk/>
+          <pc:sldMk cId="2173694948" sldId="540"/>
+        </pc:sldMkLst>
+      </pc:sldChg>
+    </pc:docChg>
+  </pc:docChgLst>
+  <pc:docChgLst>
+    <pc:chgData name="Pramod Naik" userId="ceb6df04-ef15-4d9b-a141-998a03559d75" providerId="ADAL" clId="{2BBA8E63-1F83-4096-B685-F0D4199669C1}"/>
+    <pc:docChg chg="undo custSel addSld delSld modSld sldOrd">
+      <pc:chgData name="Pramod Naik" userId="ceb6df04-ef15-4d9b-a141-998a03559d75" providerId="ADAL" clId="{2BBA8E63-1F83-4096-B685-F0D4199669C1}" dt="2025-06-27T12:11:23.952" v="56" actId="1076"/>
+      <pc:docMkLst>
+        <pc:docMk/>
+      </pc:docMkLst>
+      <pc:sldChg chg="addSp delSp modSp mod">
+        <pc:chgData name="Pramod Naik" userId="ceb6df04-ef15-4d9b-a141-998a03559d75" providerId="ADAL" clId="{2BBA8E63-1F83-4096-B685-F0D4199669C1}" dt="2025-06-27T12:08:58.224" v="15" actId="1076"/>
+        <pc:sldMkLst>
+          <pc:docMk/>
+          <pc:sldMk cId="2805087750" sldId="369"/>
+        </pc:sldMkLst>
+      </pc:sldChg>
+      <pc:sldChg chg="add">
+        <pc:chgData name="Pramod Naik" userId="ceb6df04-ef15-4d9b-a141-998a03559d75" providerId="ADAL" clId="{2BBA8E63-1F83-4096-B685-F0D4199669C1}" dt="2025-06-27T12:07:21.871" v="0"/>
+        <pc:sldMkLst>
+          <pc:docMk/>
+          <pc:sldMk cId="1961164702" sldId="536"/>
+        </pc:sldMkLst>
+      </pc:sldChg>
+      <pc:sldChg chg="addSp delSp modSp add mod setBg">
+        <pc:chgData name="Pramod Naik" userId="ceb6df04-ef15-4d9b-a141-998a03559d75" providerId="ADAL" clId="{2BBA8E63-1F83-4096-B685-F0D4199669C1}" dt="2025-06-27T12:11:23.952" v="56" actId="1076"/>
+        <pc:sldMkLst>
+          <pc:docMk/>
+          <pc:sldMk cId="2190670439" sldId="537"/>
+        </pc:sldMkLst>
+      </pc:sldChg>
+      <pc:sldChg chg="addSp delSp modSp add mod ord">
+        <pc:chgData name="Pramod Naik" userId="ceb6df04-ef15-4d9b-a141-998a03559d75" providerId="ADAL" clId="{2BBA8E63-1F83-4096-B685-F0D4199669C1}" dt="2025-06-27T12:10:16.046" v="40"/>
+        <pc:sldMkLst>
+          <pc:docMk/>
+          <pc:sldMk cId="3886295808" sldId="538"/>
+        </pc:sldMkLst>
+      </pc:sldChg>
+      <pc:sldChg chg="add">
+        <pc:chgData name="Pramod Naik" userId="ceb6df04-ef15-4d9b-a141-998a03559d75" providerId="ADAL" clId="{2BBA8E63-1F83-4096-B685-F0D4199669C1}" dt="2025-06-27T12:10:18.134" v="41"/>
+        <pc:sldMkLst>
+          <pc:docMk/>
+          <pc:sldMk cId="2303070927" sldId="539"/>
+        </pc:sldMkLst>
+      </pc:sldChg>
+      <pc:sldChg chg="add del">
+        <pc:chgData name="Pramod Naik" userId="ceb6df04-ef15-4d9b-a141-998a03559d75" providerId="ADAL" clId="{2BBA8E63-1F83-4096-B685-F0D4199669C1}" dt="2025-06-27T12:09:53.990" v="35"/>
+        <pc:sldMkLst>
+          <pc:docMk/>
+          <pc:sldMk cId="4238638134" sldId="539"/>
+        </pc:sldMkLst>
+      </pc:sldChg>
+      <pc:sldChg chg="add">
+        <pc:chgData name="Pramod Naik" userId="ceb6df04-ef15-4d9b-a141-998a03559d75" providerId="ADAL" clId="{2BBA8E63-1F83-4096-B685-F0D4199669C1}" dt="2025-06-27T12:10:18.332" v="42"/>
+        <pc:sldMkLst>
+          <pc:docMk/>
+          <pc:sldMk cId="2173694948" sldId="540"/>
+        </pc:sldMkLst>
+      </pc:sldChg>
+    </pc:docChg>
+  </pc:docChgLst>
   <pc:docChgLst>
     <pc:chgData name="Pramod Naik" userId="ceb6df04-ef15-4d9b-a141-998a03559d75" providerId="ADAL" clId="{62E9B5AE-779D-4001-92D3-8FF830A8A9C1}"/>
     <pc:docChg chg="undo custSel addSld delSld modSld sldOrd">
@@ -2263,94 +2355,6 @@
       </pc:sldChg>
     </pc:docChg>
   </pc:docChgLst>
-  <pc:docChgLst>
-    <pc:chgData name="Pramod Naik" userId="ceb6df04-ef15-4d9b-a141-998a03559d75" providerId="ADAL" clId="{2BBA8E63-1F83-4096-B685-F0D4199669C1}"/>
-    <pc:docChg chg="undo custSel addSld delSld modSld sldOrd">
-      <pc:chgData name="Pramod Naik" userId="ceb6df04-ef15-4d9b-a141-998a03559d75" providerId="ADAL" clId="{2BBA8E63-1F83-4096-B685-F0D4199669C1}" dt="2025-06-27T12:11:23.952" v="56" actId="1076"/>
-      <pc:docMkLst>
-        <pc:docMk/>
-      </pc:docMkLst>
-      <pc:sldChg chg="addSp delSp modSp mod">
-        <pc:chgData name="Pramod Naik" userId="ceb6df04-ef15-4d9b-a141-998a03559d75" providerId="ADAL" clId="{2BBA8E63-1F83-4096-B685-F0D4199669C1}" dt="2025-06-27T12:08:58.224" v="15" actId="1076"/>
-        <pc:sldMkLst>
-          <pc:docMk/>
-          <pc:sldMk cId="2805087750" sldId="369"/>
-        </pc:sldMkLst>
-      </pc:sldChg>
-      <pc:sldChg chg="add">
-        <pc:chgData name="Pramod Naik" userId="ceb6df04-ef15-4d9b-a141-998a03559d75" providerId="ADAL" clId="{2BBA8E63-1F83-4096-B685-F0D4199669C1}" dt="2025-06-27T12:07:21.871" v="0"/>
-        <pc:sldMkLst>
-          <pc:docMk/>
-          <pc:sldMk cId="1961164702" sldId="536"/>
-        </pc:sldMkLst>
-      </pc:sldChg>
-      <pc:sldChg chg="addSp delSp modSp add mod setBg">
-        <pc:chgData name="Pramod Naik" userId="ceb6df04-ef15-4d9b-a141-998a03559d75" providerId="ADAL" clId="{2BBA8E63-1F83-4096-B685-F0D4199669C1}" dt="2025-06-27T12:11:23.952" v="56" actId="1076"/>
-        <pc:sldMkLst>
-          <pc:docMk/>
-          <pc:sldMk cId="2190670439" sldId="537"/>
-        </pc:sldMkLst>
-      </pc:sldChg>
-      <pc:sldChg chg="addSp delSp modSp add mod ord">
-        <pc:chgData name="Pramod Naik" userId="ceb6df04-ef15-4d9b-a141-998a03559d75" providerId="ADAL" clId="{2BBA8E63-1F83-4096-B685-F0D4199669C1}" dt="2025-06-27T12:10:16.046" v="40"/>
-        <pc:sldMkLst>
-          <pc:docMk/>
-          <pc:sldMk cId="3886295808" sldId="538"/>
-        </pc:sldMkLst>
-      </pc:sldChg>
-      <pc:sldChg chg="add">
-        <pc:chgData name="Pramod Naik" userId="ceb6df04-ef15-4d9b-a141-998a03559d75" providerId="ADAL" clId="{2BBA8E63-1F83-4096-B685-F0D4199669C1}" dt="2025-06-27T12:10:18.134" v="41"/>
-        <pc:sldMkLst>
-          <pc:docMk/>
-          <pc:sldMk cId="2303070927" sldId="539"/>
-        </pc:sldMkLst>
-      </pc:sldChg>
-      <pc:sldChg chg="add del">
-        <pc:chgData name="Pramod Naik" userId="ceb6df04-ef15-4d9b-a141-998a03559d75" providerId="ADAL" clId="{2BBA8E63-1F83-4096-B685-F0D4199669C1}" dt="2025-06-27T12:09:53.990" v="35"/>
-        <pc:sldMkLst>
-          <pc:docMk/>
-          <pc:sldMk cId="4238638134" sldId="539"/>
-        </pc:sldMkLst>
-      </pc:sldChg>
-      <pc:sldChg chg="add">
-        <pc:chgData name="Pramod Naik" userId="ceb6df04-ef15-4d9b-a141-998a03559d75" providerId="ADAL" clId="{2BBA8E63-1F83-4096-B685-F0D4199669C1}" dt="2025-06-27T12:10:18.332" v="42"/>
-        <pc:sldMkLst>
-          <pc:docMk/>
-          <pc:sldMk cId="2173694948" sldId="540"/>
-        </pc:sldMkLst>
-      </pc:sldChg>
-    </pc:docChg>
-  </pc:docChgLst>
-  <pc:docChgLst>
-    <pc:chgData name="Pramod Naik" userId="ceb6df04-ef15-4d9b-a141-998a03559d75" providerId="ADAL" clId="{D1D4E302-CA95-476B-B320-79C7EBDE6899}"/>
-    <pc:docChg chg="undo custSel addSld delSld modSld">
-      <pc:chgData name="Pramod Naik" userId="ceb6df04-ef15-4d9b-a141-998a03559d75" providerId="ADAL" clId="{D1D4E302-CA95-476B-B320-79C7EBDE6899}" dt="2025-09-04T20:26:20.323" v="8" actId="47"/>
-      <pc:docMkLst>
-        <pc:docMk/>
-      </pc:docMkLst>
-      <pc:sldChg chg="modSp">
-        <pc:chgData name="Pramod Naik" userId="ceb6df04-ef15-4d9b-a141-998a03559d75" providerId="ADAL" clId="{D1D4E302-CA95-476B-B320-79C7EBDE6899}" dt="2025-09-04T20:26:07.698" v="4" actId="1036"/>
-        <pc:sldMkLst>
-          <pc:docMk/>
-          <pc:sldMk cId="3886295808" sldId="538"/>
-        </pc:sldMkLst>
-      </pc:sldChg>
-      <pc:sldChg chg="del">
-        <pc:chgData name="Pramod Naik" userId="ceb6df04-ef15-4d9b-a141-998a03559d75" providerId="ADAL" clId="{D1D4E302-CA95-476B-B320-79C7EBDE6899}" dt="2025-09-04T20:26:19.563" v="7" actId="47"/>
-        <pc:sldMkLst>
-          <pc:docMk/>
-          <pc:sldMk cId="2303070927" sldId="539"/>
-        </pc:sldMkLst>
-      </pc:sldChg>
-      <pc:sldChg chg="add del">
-        <pc:chgData name="Pramod Naik" userId="ceb6df04-ef15-4d9b-a141-998a03559d75" providerId="ADAL" clId="{D1D4E302-CA95-476B-B320-79C7EBDE6899}" dt="2025-09-04T20:26:20.323" v="8" actId="47"/>
-        <pc:sldMkLst>
-          <pc:docMk/>
-          <pc:sldMk cId="2173694948" sldId="540"/>
-        </pc:sldMkLst>
-      </pc:sldChg>
-    </pc:docChg>
-  </pc:docChgLst>
 </pc:chgInfo>
 </file>
 
@@ -17283,7 +17287,7 @@
               <a:buNone/>
             </a:pPr>
             <a:r>
-              <a:rPr lang="en-IN" sz="2400" dirty="0"/>
+              <a:rPr lang="en-IN" sz="2400" b="1" dirty="0"/>
               <a:t>Example:</a:t>
             </a:r>
           </a:p>
@@ -17324,15 +17328,17 @@
             </a:r>
             <a:r>
               <a:rPr lang="en-US" dirty="0"/>
-              <a:t>database.</a:t>
-            </a:r>
-            <a:r>
-              <a:rPr lang="en-US"/>
-              <a:t>py</a:t>
-            </a:r>
-            <a:r>
-              <a:rPr lang="en-US" sz="2400"/>
+              <a:t>database.py</a:t>
+            </a:r>
+            <a:r>
+              <a:rPr lang="en-US" sz="2400" dirty="0"/>
               <a:t> file</a:t>
+            </a:r>
+          </a:p>
+          <a:p>
+            <a:r>
+              <a:rPr lang="en-US" sz="2400" b="1" dirty="0"/>
+              <a:t>Import:</a:t>
             </a:r>
           </a:p>
           <a:p>
@@ -17379,6 +17385,36 @@
           </a:prstGeom>
         </p:spPr>
       </p:pic>
+      <p:pic>
+        <p:nvPicPr>
+          <p:cNvPr id="2" name="Content Placeholder 3">
+            <a:extLst>
+              <a:ext uri="{FF2B5EF4-FFF2-40B4-BE49-F238E27FC236}">
+                <a16:creationId xmlns:a16="http://schemas.microsoft.com/office/drawing/2014/main" id="{AA01FF40-F1A4-4E34-3F05-5FA4BFBB1DBD}"/>
+              </a:ext>
+            </a:extLst>
+          </p:cNvPr>
+          <p:cNvPicPr>
+            <a:picLocks noChangeAspect="1"/>
+          </p:cNvPicPr>
+          <p:nvPr/>
+        </p:nvPicPr>
+        <p:blipFill>
+          <a:blip r:embed="rId3"/>
+          <a:stretch>
+            <a:fillRect/>
+          </a:stretch>
+        </p:blipFill>
+        <p:spPr>
+          <a:xfrm>
+            <a:off x="174451" y="4376628"/>
+            <a:ext cx="11864688" cy="1296141"/>
+          </a:xfrm>
+          <a:prstGeom prst="rect">
+            <a:avLst/>
+          </a:prstGeom>
+        </p:spPr>
+      </p:pic>
     </p:spTree>
     <p:extLst>
       <p:ext uri="{BB962C8B-B14F-4D97-AF65-F5344CB8AC3E}">
@@ -17393,77 +17429,6 @@
 </file>
 
 <file path=ppt/slides/slide52.xml><?xml version="1.0" encoding="utf-8"?>
-<p:sld xmlns:a="http://schemas.openxmlformats.org/drawingml/2006/main" xmlns:r="http://schemas.openxmlformats.org/officeDocument/2006/relationships" xmlns:p="http://schemas.openxmlformats.org/presentationml/2006/main">
-  <p:cSld>
-    <p:spTree>
-      <p:nvGrpSpPr>
-        <p:cNvPr id="1" name="">
-          <a:extLst>
-            <a:ext uri="{FF2B5EF4-FFF2-40B4-BE49-F238E27FC236}">
-              <a16:creationId xmlns:a16="http://schemas.microsoft.com/office/drawing/2014/main" id="{C4BFDA52-F230-6BE3-6B0F-ADA16A68BAB3}"/>
-            </a:ext>
-          </a:extLst>
-        </p:cNvPr>
-        <p:cNvGrpSpPr/>
-        <p:nvPr/>
-      </p:nvGrpSpPr>
-      <p:grpSpPr>
-        <a:xfrm>
-          <a:off x="0" y="0"/>
-          <a:ext cx="0" cy="0"/>
-          <a:chOff x="0" y="0"/>
-          <a:chExt cx="0" cy="0"/>
-        </a:xfrm>
-      </p:grpSpPr>
-      <p:sp>
-        <p:nvSpPr>
-          <p:cNvPr id="3" name="Content Placeholder 2">
-            <a:extLst>
-              <a:ext uri="{FF2B5EF4-FFF2-40B4-BE49-F238E27FC236}">
-                <a16:creationId xmlns:a16="http://schemas.microsoft.com/office/drawing/2014/main" id="{F94BCA23-FE3A-B68D-9407-EBED270166BC}"/>
-              </a:ext>
-            </a:extLst>
-          </p:cNvPr>
-          <p:cNvSpPr>
-            <a:spLocks noGrp="1"/>
-          </p:cNvSpPr>
-          <p:nvPr>
-            <p:ph idx="1"/>
-          </p:nvPr>
-        </p:nvSpPr>
-        <p:spPr>
-          <a:xfrm>
-            <a:off x="777240" y="696686"/>
-            <a:ext cx="10659110" cy="5480277"/>
-          </a:xfrm>
-        </p:spPr>
-        <p:txBody>
-          <a:bodyPr>
-            <a:normAutofit/>
-          </a:bodyPr>
-          <a:lstStyle/>
-          <a:p>
-            <a:pPr marL="0" indent="0">
-              <a:buNone/>
-            </a:pPr>
-            <a:endParaRPr lang="en-IN" sz="2400" dirty="0"/>
-          </a:p>
-        </p:txBody>
-      </p:sp>
-    </p:spTree>
-    <p:extLst>
-      <p:ext uri="{BB962C8B-B14F-4D97-AF65-F5344CB8AC3E}">
-        <p14:creationId xmlns:p14="http://schemas.microsoft.com/office/powerpoint/2010/main" val="4026936663"/>
-      </p:ext>
-    </p:extLst>
-  </p:cSld>
-  <p:clrMapOvr>
-    <a:masterClrMapping/>
-  </p:clrMapOvr>
-</p:sld>
-</file>
-
-<file path=ppt/slides/slide53.xml><?xml version="1.0" encoding="utf-8"?>
 <p:sld xmlns:a="http://schemas.openxmlformats.org/drawingml/2006/main" xmlns:r="http://schemas.openxmlformats.org/officeDocument/2006/relationships" xmlns:p="http://schemas.openxmlformats.org/presentationml/2006/main">
   <p:cSld>
     <p:spTree>
@@ -17514,13 +17479,594 @@
           </a:bodyPr>
           <a:lstStyle/>
           <a:p>
+            <a:r>
+              <a:rPr lang="en-IN" sz="2400" b="1" dirty="0"/>
+              <a:t>Connection string</a:t>
+            </a:r>
+            <a:endParaRPr lang="en-US" sz="2400" b="1" dirty="0"/>
+          </a:p>
+          <a:p>
             <a:pPr marL="0" indent="0">
               <a:buNone/>
             </a:pPr>
-            <a:endParaRPr lang="en-IN" sz="2400" dirty="0"/>
+            <a:endParaRPr lang="en-IN" sz="2400" b="1" dirty="0"/>
+          </a:p>
+          <a:p>
+            <a:pPr marL="0" indent="0">
+              <a:buNone/>
+            </a:pPr>
+            <a:endParaRPr lang="en-IN" sz="2400" b="1" dirty="0"/>
+          </a:p>
+          <a:p>
+            <a:pPr marL="0" indent="0">
+              <a:buNone/>
+            </a:pPr>
+            <a:endParaRPr lang="en-IN" sz="2400" b="1" dirty="0"/>
+          </a:p>
+          <a:p>
+            <a:pPr marL="0" indent="0">
+              <a:buNone/>
+            </a:pPr>
+            <a:r>
+              <a:rPr lang="en-US" sz="2400" dirty="0"/>
+              <a:t>This line tells </a:t>
+            </a:r>
+            <a:r>
+              <a:rPr lang="en-US" sz="2400" dirty="0" err="1"/>
+              <a:t>SQLAlchemy</a:t>
+            </a:r>
+            <a:r>
+              <a:rPr lang="en-US" sz="2400" dirty="0"/>
+              <a:t> </a:t>
+            </a:r>
+            <a:r>
+              <a:rPr lang="en-US" sz="2400" b="1" dirty="0"/>
+              <a:t>where your database is</a:t>
+            </a:r>
+            <a:r>
+              <a:rPr lang="en-US" sz="2400" dirty="0"/>
+              <a:t> and </a:t>
+            </a:r>
+            <a:r>
+              <a:rPr lang="en-US" sz="2400" b="1" dirty="0"/>
+              <a:t>how to log in</a:t>
+            </a:r>
+            <a:r>
+              <a:rPr lang="en-US" sz="2400" dirty="0"/>
+              <a:t>. Think of this as a </a:t>
+            </a:r>
+            <a:r>
+              <a:rPr lang="en-US" sz="2400" b="1" dirty="0">
+                <a:solidFill>
+                  <a:srgbClr val="C00000"/>
+                </a:solidFill>
+              </a:rPr>
+              <a:t>home address</a:t>
+            </a:r>
+            <a:r>
+              <a:rPr lang="en-US" sz="2400" dirty="0">
+                <a:solidFill>
+                  <a:srgbClr val="C00000"/>
+                </a:solidFill>
+              </a:rPr>
+              <a:t> </a:t>
+            </a:r>
+            <a:r>
+              <a:rPr lang="en-US" sz="2400" dirty="0"/>
+              <a:t>for your database — it tells Python exactly where to knock!</a:t>
+            </a:r>
+          </a:p>
+          <a:p>
+            <a:pPr marL="0" indent="0">
+              <a:buNone/>
+            </a:pPr>
+            <a:endParaRPr lang="en-US" sz="2400" dirty="0"/>
+          </a:p>
+          <a:p>
+            <a:pPr marL="0" indent="0">
+              <a:buNone/>
+            </a:pPr>
+            <a:endParaRPr lang="en-IN" sz="2400" b="1" dirty="0"/>
           </a:p>
         </p:txBody>
       </p:sp>
+      <p:pic>
+        <p:nvPicPr>
+          <p:cNvPr id="5" name="Picture 4">
+            <a:extLst>
+              <a:ext uri="{FF2B5EF4-FFF2-40B4-BE49-F238E27FC236}">
+                <a16:creationId xmlns:a16="http://schemas.microsoft.com/office/drawing/2014/main" id="{C1021B93-2AC5-3CBC-180E-836971D7793D}"/>
+              </a:ext>
+            </a:extLst>
+          </p:cNvPr>
+          <p:cNvPicPr>
+            <a:picLocks noChangeAspect="1"/>
+          </p:cNvPicPr>
+          <p:nvPr/>
+        </p:nvPicPr>
+        <p:blipFill>
+          <a:blip r:embed="rId2"/>
+          <a:stretch>
+            <a:fillRect/>
+          </a:stretch>
+        </p:blipFill>
+        <p:spPr>
+          <a:xfrm>
+            <a:off x="990601" y="1336767"/>
+            <a:ext cx="10659110" cy="673597"/>
+          </a:xfrm>
+          <a:prstGeom prst="rect">
+            <a:avLst/>
+          </a:prstGeom>
+        </p:spPr>
+      </p:pic>
+      <p:graphicFrame>
+        <p:nvGraphicFramePr>
+          <p:cNvPr id="6" name="Table 5">
+            <a:extLst>
+              <a:ext uri="{FF2B5EF4-FFF2-40B4-BE49-F238E27FC236}">
+                <a16:creationId xmlns:a16="http://schemas.microsoft.com/office/drawing/2014/main" id="{872DB277-3675-6D00-D331-F3937FDDAA59}"/>
+              </a:ext>
+            </a:extLst>
+          </p:cNvPr>
+          <p:cNvGraphicFramePr>
+            <a:graphicFrameLocks noGrp="1"/>
+          </p:cNvGraphicFramePr>
+          <p:nvPr>
+            <p:extLst>
+              <p:ext uri="{D42A27DB-BD31-4B8C-83A1-F6EECF244321}">
+                <p14:modId xmlns:p14="http://schemas.microsoft.com/office/powerpoint/2010/main" val="146084946"/>
+              </p:ext>
+            </p:extLst>
+          </p:nvPr>
+        </p:nvGraphicFramePr>
+        <p:xfrm>
+          <a:off x="1328646" y="3485428"/>
+          <a:ext cx="9959840" cy="2828284"/>
+        </p:xfrm>
+        <a:graphic>
+          <a:graphicData uri="http://schemas.openxmlformats.org/drawingml/2006/table">
+            <a:tbl>
+              <a:tblPr firstRow="1" firstCol="1" bandRow="1">
+                <a:tableStyleId>{5C22544A-7EE6-4342-B048-85BDC9FD1C3A}</a:tableStyleId>
+              </a:tblPr>
+              <a:tblGrid>
+                <a:gridCol w="3080068">
+                  <a:extLst>
+                    <a:ext uri="{9D8B030D-6E8A-4147-A177-3AD203B41FA5}">
+                      <a16:colId xmlns:a16="http://schemas.microsoft.com/office/drawing/2014/main" val="3968816264"/>
+                    </a:ext>
+                  </a:extLst>
+                </a:gridCol>
+                <a:gridCol w="6879772">
+                  <a:extLst>
+                    <a:ext uri="{9D8B030D-6E8A-4147-A177-3AD203B41FA5}">
+                      <a16:colId xmlns:a16="http://schemas.microsoft.com/office/drawing/2014/main" val="1312788054"/>
+                    </a:ext>
+                  </a:extLst>
+                </a:gridCol>
+              </a:tblGrid>
+              <a:tr h="401868">
+                <a:tc>
+                  <a:txBody>
+                    <a:bodyPr/>
+                    <a:lstStyle/>
+                    <a:p>
+                      <a:pPr>
+                        <a:lnSpc>
+                          <a:spcPct val="107000"/>
+                        </a:lnSpc>
+                        <a:spcAft>
+                          <a:spcPts val="800"/>
+                        </a:spcAft>
+                        <a:buNone/>
+                      </a:pPr>
+                      <a:r>
+                        <a:rPr lang="en-IN" sz="2400" kern="100">
+                          <a:effectLst/>
+                        </a:rPr>
+                        <a:t>Part</a:t>
+                      </a:r>
+                      <a:endParaRPr lang="en-IN" sz="2400" kern="100">
+                        <a:effectLst/>
+                        <a:latin typeface="Aptos" panose="020B0004020202020204" pitchFamily="34" charset="0"/>
+                        <a:ea typeface="Aptos" panose="020B0004020202020204" pitchFamily="34" charset="0"/>
+                        <a:cs typeface="Tunga" panose="020B0502040204020203" pitchFamily="34" charset="0"/>
+                      </a:endParaRPr>
+                    </a:p>
+                  </a:txBody>
+                  <a:tcPr marL="68580" marR="68580" marT="0" marB="0"/>
+                </a:tc>
+                <a:tc>
+                  <a:txBody>
+                    <a:bodyPr/>
+                    <a:lstStyle/>
+                    <a:p>
+                      <a:pPr>
+                        <a:lnSpc>
+                          <a:spcPct val="107000"/>
+                        </a:lnSpc>
+                        <a:spcAft>
+                          <a:spcPts val="800"/>
+                        </a:spcAft>
+                        <a:buNone/>
+                      </a:pPr>
+                      <a:r>
+                        <a:rPr lang="en-IN" sz="2400" kern="100">
+                          <a:effectLst/>
+                        </a:rPr>
+                        <a:t>Meaning</a:t>
+                      </a:r>
+                      <a:endParaRPr lang="en-IN" sz="2400" kern="100">
+                        <a:effectLst/>
+                        <a:latin typeface="Aptos" panose="020B0004020202020204" pitchFamily="34" charset="0"/>
+                        <a:ea typeface="Aptos" panose="020B0004020202020204" pitchFamily="34" charset="0"/>
+                        <a:cs typeface="Tunga" panose="020B0502040204020203" pitchFamily="34" charset="0"/>
+                      </a:endParaRPr>
+                    </a:p>
+                  </a:txBody>
+                  <a:tcPr marL="68580" marR="68580" marT="0" marB="0"/>
+                </a:tc>
+                <a:extLst>
+                  <a:ext uri="{0D108BD9-81ED-4DB2-BD59-A6C34878D82A}">
+                    <a16:rowId xmlns:a16="http://schemas.microsoft.com/office/drawing/2014/main" val="3299298743"/>
+                  </a:ext>
+                </a:extLst>
+              </a:tr>
+              <a:tr h="401868">
+                <a:tc>
+                  <a:txBody>
+                    <a:bodyPr/>
+                    <a:lstStyle/>
+                    <a:p>
+                      <a:pPr>
+                        <a:lnSpc>
+                          <a:spcPct val="107000"/>
+                        </a:lnSpc>
+                        <a:spcAft>
+                          <a:spcPts val="800"/>
+                        </a:spcAft>
+                        <a:buNone/>
+                      </a:pPr>
+                      <a:r>
+                        <a:rPr lang="en-IN" sz="2400" kern="100">
+                          <a:effectLst/>
+                        </a:rPr>
+                        <a:t>postgresql://</a:t>
+                      </a:r>
+                      <a:endParaRPr lang="en-IN" sz="2400" kern="100">
+                        <a:effectLst/>
+                        <a:latin typeface="Aptos" panose="020B0004020202020204" pitchFamily="34" charset="0"/>
+                        <a:ea typeface="Aptos" panose="020B0004020202020204" pitchFamily="34" charset="0"/>
+                        <a:cs typeface="Tunga" panose="020B0502040204020203" pitchFamily="34" charset="0"/>
+                      </a:endParaRPr>
+                    </a:p>
+                  </a:txBody>
+                  <a:tcPr marL="68580" marR="68580" marT="0" marB="0"/>
+                </a:tc>
+                <a:tc>
+                  <a:txBody>
+                    <a:bodyPr/>
+                    <a:lstStyle/>
+                    <a:p>
+                      <a:pPr>
+                        <a:lnSpc>
+                          <a:spcPct val="107000"/>
+                        </a:lnSpc>
+                        <a:spcAft>
+                          <a:spcPts val="800"/>
+                        </a:spcAft>
+                        <a:buNone/>
+                      </a:pPr>
+                      <a:r>
+                        <a:rPr lang="en-IN" sz="2400" kern="100" dirty="0">
+                          <a:effectLst/>
+                        </a:rPr>
+                        <a:t>Type of database (PostgreSQL)</a:t>
+                      </a:r>
+                      <a:endParaRPr lang="en-IN" sz="2400" kern="100" dirty="0">
+                        <a:effectLst/>
+                        <a:latin typeface="Aptos" panose="020B0004020202020204" pitchFamily="34" charset="0"/>
+                        <a:ea typeface="Aptos" panose="020B0004020202020204" pitchFamily="34" charset="0"/>
+                        <a:cs typeface="Tunga" panose="020B0502040204020203" pitchFamily="34" charset="0"/>
+                      </a:endParaRPr>
+                    </a:p>
+                  </a:txBody>
+                  <a:tcPr marL="68580" marR="68580" marT="0" marB="0"/>
+                </a:tc>
+                <a:extLst>
+                  <a:ext uri="{0D108BD9-81ED-4DB2-BD59-A6C34878D82A}">
+                    <a16:rowId xmlns:a16="http://schemas.microsoft.com/office/drawing/2014/main" val="2147396739"/>
+                  </a:ext>
+                </a:extLst>
+              </a:tr>
+              <a:tr h="401868">
+                <a:tc>
+                  <a:txBody>
+                    <a:bodyPr/>
+                    <a:lstStyle/>
+                    <a:p>
+                      <a:pPr>
+                        <a:lnSpc>
+                          <a:spcPct val="107000"/>
+                        </a:lnSpc>
+                        <a:spcAft>
+                          <a:spcPts val="800"/>
+                        </a:spcAft>
+                        <a:buNone/>
+                      </a:pPr>
+                      <a:r>
+                        <a:rPr lang="en-IN" sz="2400" kern="100" dirty="0" err="1">
+                          <a:effectLst/>
+                        </a:rPr>
+                        <a:t>postgres</a:t>
+                      </a:r>
+                      <a:endParaRPr lang="en-IN" sz="2400" kern="100" dirty="0">
+                        <a:effectLst/>
+                        <a:latin typeface="Aptos" panose="020B0004020202020204" pitchFamily="34" charset="0"/>
+                        <a:ea typeface="Aptos" panose="020B0004020202020204" pitchFamily="34" charset="0"/>
+                        <a:cs typeface="Tunga" panose="020B0502040204020203" pitchFamily="34" charset="0"/>
+                      </a:endParaRPr>
+                    </a:p>
+                  </a:txBody>
+                  <a:tcPr marL="68580" marR="68580" marT="0" marB="0"/>
+                </a:tc>
+                <a:tc>
+                  <a:txBody>
+                    <a:bodyPr/>
+                    <a:lstStyle/>
+                    <a:p>
+                      <a:pPr>
+                        <a:lnSpc>
+                          <a:spcPct val="107000"/>
+                        </a:lnSpc>
+                        <a:spcAft>
+                          <a:spcPts val="800"/>
+                        </a:spcAft>
+                        <a:buNone/>
+                      </a:pPr>
+                      <a:r>
+                        <a:rPr lang="en-IN" sz="2400" kern="100" dirty="0">
+                          <a:effectLst/>
+                        </a:rPr>
+                        <a:t>Username used to log in</a:t>
+                      </a:r>
+                      <a:endParaRPr lang="en-IN" sz="2400" kern="100" dirty="0">
+                        <a:effectLst/>
+                        <a:latin typeface="Aptos" panose="020B0004020202020204" pitchFamily="34" charset="0"/>
+                        <a:ea typeface="Aptos" panose="020B0004020202020204" pitchFamily="34" charset="0"/>
+                        <a:cs typeface="Tunga" panose="020B0502040204020203" pitchFamily="34" charset="0"/>
+                      </a:endParaRPr>
+                    </a:p>
+                  </a:txBody>
+                  <a:tcPr marL="68580" marR="68580" marT="0" marB="0"/>
+                </a:tc>
+                <a:extLst>
+                  <a:ext uri="{0D108BD9-81ED-4DB2-BD59-A6C34878D82A}">
+                    <a16:rowId xmlns:a16="http://schemas.microsoft.com/office/drawing/2014/main" val="3543758045"/>
+                  </a:ext>
+                </a:extLst>
+              </a:tr>
+              <a:tr h="401868">
+                <a:tc>
+                  <a:txBody>
+                    <a:bodyPr/>
+                    <a:lstStyle/>
+                    <a:p>
+                      <a:pPr>
+                        <a:lnSpc>
+                          <a:spcPct val="107000"/>
+                        </a:lnSpc>
+                        <a:spcAft>
+                          <a:spcPts val="800"/>
+                        </a:spcAft>
+                        <a:buNone/>
+                      </a:pPr>
+                      <a:r>
+                        <a:rPr lang="en-IN" sz="2400" kern="100">
+                          <a:effectLst/>
+                        </a:rPr>
+                        <a:t>Monday%40123</a:t>
+                      </a:r>
+                      <a:endParaRPr lang="en-IN" sz="2400" kern="100">
+                        <a:effectLst/>
+                        <a:latin typeface="Aptos" panose="020B0004020202020204" pitchFamily="34" charset="0"/>
+                        <a:ea typeface="Aptos" panose="020B0004020202020204" pitchFamily="34" charset="0"/>
+                        <a:cs typeface="Tunga" panose="020B0502040204020203" pitchFamily="34" charset="0"/>
+                      </a:endParaRPr>
+                    </a:p>
+                  </a:txBody>
+                  <a:tcPr marL="68580" marR="68580" marT="0" marB="0"/>
+                </a:tc>
+                <a:tc>
+                  <a:txBody>
+                    <a:bodyPr/>
+                    <a:lstStyle/>
+                    <a:p>
+                      <a:pPr>
+                        <a:lnSpc>
+                          <a:spcPct val="107000"/>
+                        </a:lnSpc>
+                        <a:spcAft>
+                          <a:spcPts val="800"/>
+                        </a:spcAft>
+                        <a:buNone/>
+                      </a:pPr>
+                      <a:r>
+                        <a:rPr lang="en-IN" sz="2400" kern="100" dirty="0">
+                          <a:effectLst/>
+                        </a:rPr>
+                        <a:t>Password (@ is encoded as %40)</a:t>
+                      </a:r>
+                      <a:endParaRPr lang="en-IN" sz="2400" kern="100" dirty="0">
+                        <a:effectLst/>
+                        <a:latin typeface="Aptos" panose="020B0004020202020204" pitchFamily="34" charset="0"/>
+                        <a:ea typeface="Aptos" panose="020B0004020202020204" pitchFamily="34" charset="0"/>
+                        <a:cs typeface="Tunga" panose="020B0502040204020203" pitchFamily="34" charset="0"/>
+                      </a:endParaRPr>
+                    </a:p>
+                  </a:txBody>
+                  <a:tcPr marL="68580" marR="68580" marT="0" marB="0"/>
+                </a:tc>
+                <a:extLst>
+                  <a:ext uri="{0D108BD9-81ED-4DB2-BD59-A6C34878D82A}">
+                    <a16:rowId xmlns:a16="http://schemas.microsoft.com/office/drawing/2014/main" val="1497351673"/>
+                  </a:ext>
+                </a:extLst>
+              </a:tr>
+              <a:tr h="401868">
+                <a:tc>
+                  <a:txBody>
+                    <a:bodyPr/>
+                    <a:lstStyle/>
+                    <a:p>
+                      <a:pPr>
+                        <a:lnSpc>
+                          <a:spcPct val="107000"/>
+                        </a:lnSpc>
+                        <a:spcAft>
+                          <a:spcPts val="800"/>
+                        </a:spcAft>
+                        <a:buNone/>
+                      </a:pPr>
+                      <a:r>
+                        <a:rPr lang="en-IN" sz="2400" kern="100">
+                          <a:effectLst/>
+                        </a:rPr>
+                        <a:t>localhost</a:t>
+                      </a:r>
+                      <a:endParaRPr lang="en-IN" sz="2400" kern="100">
+                        <a:effectLst/>
+                        <a:latin typeface="Aptos" panose="020B0004020202020204" pitchFamily="34" charset="0"/>
+                        <a:ea typeface="Aptos" panose="020B0004020202020204" pitchFamily="34" charset="0"/>
+                        <a:cs typeface="Tunga" panose="020B0502040204020203" pitchFamily="34" charset="0"/>
+                      </a:endParaRPr>
+                    </a:p>
+                  </a:txBody>
+                  <a:tcPr marL="68580" marR="68580" marT="0" marB="0"/>
+                </a:tc>
+                <a:tc>
+                  <a:txBody>
+                    <a:bodyPr/>
+                    <a:lstStyle/>
+                    <a:p>
+                      <a:pPr>
+                        <a:lnSpc>
+                          <a:spcPct val="107000"/>
+                        </a:lnSpc>
+                        <a:spcAft>
+                          <a:spcPts val="800"/>
+                        </a:spcAft>
+                        <a:buNone/>
+                      </a:pPr>
+                      <a:r>
+                        <a:rPr lang="en-IN" sz="2400" kern="100" dirty="0">
+                          <a:effectLst/>
+                        </a:rPr>
+                        <a:t>The database is running on the same computer</a:t>
+                      </a:r>
+                      <a:endParaRPr lang="en-IN" sz="2400" kern="100" dirty="0">
+                        <a:effectLst/>
+                        <a:latin typeface="Aptos" panose="020B0004020202020204" pitchFamily="34" charset="0"/>
+                        <a:ea typeface="Aptos" panose="020B0004020202020204" pitchFamily="34" charset="0"/>
+                        <a:cs typeface="Tunga" panose="020B0502040204020203" pitchFamily="34" charset="0"/>
+                      </a:endParaRPr>
+                    </a:p>
+                  </a:txBody>
+                  <a:tcPr marL="68580" marR="68580" marT="0" marB="0"/>
+                </a:tc>
+                <a:extLst>
+                  <a:ext uri="{0D108BD9-81ED-4DB2-BD59-A6C34878D82A}">
+                    <a16:rowId xmlns:a16="http://schemas.microsoft.com/office/drawing/2014/main" val="990516419"/>
+                  </a:ext>
+                </a:extLst>
+              </a:tr>
+              <a:tr h="818944">
+                <a:tc>
+                  <a:txBody>
+                    <a:bodyPr/>
+                    <a:lstStyle/>
+                    <a:p>
+                      <a:pPr>
+                        <a:lnSpc>
+                          <a:spcPct val="107000"/>
+                        </a:lnSpc>
+                        <a:spcAft>
+                          <a:spcPts val="800"/>
+                        </a:spcAft>
+                        <a:buNone/>
+                      </a:pPr>
+                      <a:r>
+                        <a:rPr lang="en-IN" sz="2400" kern="100">
+                          <a:effectLst/>
+                        </a:rPr>
+                        <a:t>/ROOKIES</a:t>
+                      </a:r>
+                      <a:endParaRPr lang="en-IN" sz="2400" kern="100">
+                        <a:effectLst/>
+                        <a:latin typeface="Aptos" panose="020B0004020202020204" pitchFamily="34" charset="0"/>
+                        <a:ea typeface="Aptos" panose="020B0004020202020204" pitchFamily="34" charset="0"/>
+                        <a:cs typeface="Tunga" panose="020B0502040204020203" pitchFamily="34" charset="0"/>
+                      </a:endParaRPr>
+                    </a:p>
+                  </a:txBody>
+                  <a:tcPr marL="68580" marR="68580" marT="0" marB="0"/>
+                </a:tc>
+                <a:tc>
+                  <a:txBody>
+                    <a:bodyPr/>
+                    <a:lstStyle/>
+                    <a:p>
+                      <a:pPr>
+                        <a:lnSpc>
+                          <a:spcPct val="107000"/>
+                        </a:lnSpc>
+                        <a:spcAft>
+                          <a:spcPts val="800"/>
+                        </a:spcAft>
+                        <a:buNone/>
+                      </a:pPr>
+                      <a:r>
+                        <a:rPr lang="en-IN" sz="2400" kern="100" dirty="0">
+                          <a:effectLst/>
+                        </a:rPr>
+                        <a:t>The name of the </a:t>
+                      </a:r>
+                      <a:r>
+                        <a:rPr lang="en-IN" sz="2400" b="1" kern="100" dirty="0">
+                          <a:solidFill>
+                            <a:srgbClr val="C00000"/>
+                          </a:solidFill>
+                          <a:effectLst/>
+                        </a:rPr>
+                        <a:t>database</a:t>
+                      </a:r>
+                      <a:r>
+                        <a:rPr lang="en-IN" sz="2400" kern="100" dirty="0">
+                          <a:effectLst/>
+                        </a:rPr>
+                        <a:t> you want to connect to</a:t>
+                      </a:r>
+                      <a:endParaRPr lang="en-IN" sz="2400" kern="100" dirty="0">
+                        <a:effectLst/>
+                        <a:latin typeface="Aptos" panose="020B0004020202020204" pitchFamily="34" charset="0"/>
+                        <a:ea typeface="Aptos" panose="020B0004020202020204" pitchFamily="34" charset="0"/>
+                        <a:cs typeface="Tunga" panose="020B0502040204020203" pitchFamily="34" charset="0"/>
+                      </a:endParaRPr>
+                    </a:p>
+                  </a:txBody>
+                  <a:tcPr marL="68580" marR="68580" marT="0" marB="0"/>
+                </a:tc>
+                <a:extLst>
+                  <a:ext uri="{0D108BD9-81ED-4DB2-BD59-A6C34878D82A}">
+                    <a16:rowId xmlns:a16="http://schemas.microsoft.com/office/drawing/2014/main" val="3591126797"/>
+                  </a:ext>
+                </a:extLst>
+              </a:tr>
+            </a:tbl>
+          </a:graphicData>
+        </a:graphic>
+      </p:graphicFrame>
     </p:spTree>
     <p:extLst>
       <p:ext uri="{BB962C8B-B14F-4D97-AF65-F5344CB8AC3E}">
@@ -17534,7 +18080,7 @@
 </p:sld>
 </file>
 
-<file path=ppt/slides/slide54.xml><?xml version="1.0" encoding="utf-8"?>
+<file path=ppt/slides/slide53.xml><?xml version="1.0" encoding="utf-8"?>
 <p:sld xmlns:a="http://schemas.openxmlformats.org/drawingml/2006/main" xmlns:r="http://schemas.openxmlformats.org/officeDocument/2006/relationships" xmlns:p="http://schemas.openxmlformats.org/presentationml/2006/main">
   <p:cSld>
     <p:spTree>
@@ -17585,13 +18131,179 @@
           </a:bodyPr>
           <a:lstStyle/>
           <a:p>
+            <a:r>
+              <a:rPr lang="en-IN" sz="2400" b="1" dirty="0"/>
+              <a:t>Create the engine</a:t>
+            </a:r>
+          </a:p>
+          <a:p>
+            <a:endParaRPr lang="en-IN" sz="2400" b="1" dirty="0"/>
+          </a:p>
+          <a:p>
+            <a:endParaRPr lang="en-IN" sz="2400" b="1" dirty="0"/>
+          </a:p>
+          <a:p>
+            <a:endParaRPr lang="en-IN" sz="2400" b="1" dirty="0"/>
+          </a:p>
+          <a:p>
+            <a:pPr lvl="1"/>
+            <a:r>
+              <a:rPr lang="en-US" sz="2400" dirty="0"/>
+              <a:t>This </a:t>
+            </a:r>
+            <a:r>
+              <a:rPr lang="en-US" sz="2400" b="1" dirty="0"/>
+              <a:t>creates a </a:t>
+            </a:r>
+            <a:r>
+              <a:rPr lang="en-US" sz="2400" b="1" dirty="0">
+                <a:solidFill>
+                  <a:srgbClr val="C00000"/>
+                </a:solidFill>
+              </a:rPr>
+              <a:t>connection</a:t>
+            </a:r>
+            <a:r>
+              <a:rPr lang="en-US" sz="2400" b="1" dirty="0"/>
+              <a:t> </a:t>
+            </a:r>
+            <a:r>
+              <a:rPr lang="en-US" sz="2400" b="1" dirty="0">
+                <a:solidFill>
+                  <a:srgbClr val="C00000"/>
+                </a:solidFill>
+              </a:rPr>
+              <a:t>engine</a:t>
+            </a:r>
+            <a:r>
+              <a:rPr lang="en-US" sz="2400" dirty="0"/>
+              <a:t> — the tool that </a:t>
+            </a:r>
+            <a:r>
+              <a:rPr lang="en-US" sz="2400" b="1" dirty="0"/>
+              <a:t>actually talks to PostgreSQL</a:t>
+            </a:r>
+            <a:r>
+              <a:rPr lang="en-US" sz="2400" dirty="0"/>
+              <a:t>.</a:t>
+            </a:r>
+          </a:p>
+          <a:p>
+            <a:pPr lvl="1"/>
+            <a:r>
+              <a:rPr lang="en-US" sz="2400" dirty="0"/>
+              <a:t>Imagine </a:t>
+            </a:r>
+            <a:r>
+              <a:rPr lang="en-US" sz="2400" b="1" dirty="0"/>
+              <a:t>engine</a:t>
+            </a:r>
+            <a:r>
+              <a:rPr lang="en-US" sz="2400" dirty="0"/>
+              <a:t> as the </a:t>
+            </a:r>
+            <a:r>
+              <a:rPr lang="en-US" sz="2400" b="1" dirty="0">
+                <a:solidFill>
+                  <a:srgbClr val="C00000"/>
+                </a:solidFill>
+              </a:rPr>
+              <a:t>bridge</a:t>
+            </a:r>
+            <a:r>
+              <a:rPr lang="en-US" sz="2400" dirty="0"/>
+              <a:t> that connects </a:t>
+            </a:r>
+            <a:r>
+              <a:rPr lang="en-US" sz="2400" b="1" dirty="0"/>
+              <a:t>Python to your database</a:t>
+            </a:r>
+            <a:r>
+              <a:rPr lang="en-US" sz="2400" dirty="0"/>
+              <a:t>.</a:t>
+            </a:r>
+          </a:p>
+          <a:p>
+            <a:pPr lvl="1"/>
+            <a:r>
+              <a:rPr lang="en-US" sz="2400" dirty="0"/>
+              <a:t>Every time the app wants to run a query, it goes through this engine.</a:t>
+            </a:r>
+          </a:p>
+          <a:p>
             <a:pPr marL="0" indent="0">
               <a:buNone/>
             </a:pPr>
-            <a:endParaRPr lang="en-IN" sz="2400" dirty="0"/>
+            <a:endParaRPr lang="en-US" sz="2400" dirty="0"/>
+          </a:p>
+          <a:p>
+            <a:r>
+              <a:rPr lang="en-IN" sz="2400" b="1" dirty="0"/>
+              <a:t>Create a session:</a:t>
+            </a:r>
           </a:p>
         </p:txBody>
       </p:sp>
+      <p:pic>
+        <p:nvPicPr>
+          <p:cNvPr id="4" name="Picture 3">
+            <a:extLst>
+              <a:ext uri="{FF2B5EF4-FFF2-40B4-BE49-F238E27FC236}">
+                <a16:creationId xmlns:a16="http://schemas.microsoft.com/office/drawing/2014/main" id="{18183A3A-AA35-1E78-F111-EE9C90A7AE94}"/>
+              </a:ext>
+            </a:extLst>
+          </p:cNvPr>
+          <p:cNvPicPr>
+            <a:picLocks noChangeAspect="1"/>
+          </p:cNvPicPr>
+          <p:nvPr/>
+        </p:nvPicPr>
+        <p:blipFill>
+          <a:blip r:embed="rId2"/>
+          <a:stretch>
+            <a:fillRect/>
+          </a:stretch>
+        </p:blipFill>
+        <p:spPr>
+          <a:xfrm>
+            <a:off x="1392609" y="1417237"/>
+            <a:ext cx="8154162" cy="737603"/>
+          </a:xfrm>
+          <a:prstGeom prst="rect">
+            <a:avLst/>
+          </a:prstGeom>
+        </p:spPr>
+      </p:pic>
+      <p:pic>
+        <p:nvPicPr>
+          <p:cNvPr id="6" name="Picture 5">
+            <a:extLst>
+              <a:ext uri="{FF2B5EF4-FFF2-40B4-BE49-F238E27FC236}">
+                <a16:creationId xmlns:a16="http://schemas.microsoft.com/office/drawing/2014/main" id="{8FFA5EA0-B0D0-DB1F-3E17-C8857EA9355B}"/>
+              </a:ext>
+            </a:extLst>
+          </p:cNvPr>
+          <p:cNvPicPr>
+            <a:picLocks noChangeAspect="1"/>
+          </p:cNvPicPr>
+          <p:nvPr/>
+        </p:nvPicPr>
+        <p:blipFill>
+          <a:blip r:embed="rId3"/>
+          <a:stretch>
+            <a:fillRect/>
+          </a:stretch>
+        </p:blipFill>
+        <p:spPr>
+          <a:xfrm>
+            <a:off x="642257" y="5004837"/>
+            <a:ext cx="11436350" cy="637946"/>
+          </a:xfrm>
+          <a:prstGeom prst="rect">
+            <a:avLst/>
+          </a:prstGeom>
+        </p:spPr>
+      </p:pic>
     </p:spTree>
     <p:extLst>
       <p:ext uri="{BB962C8B-B14F-4D97-AF65-F5344CB8AC3E}">
@@ -17605,7 +18317,7 @@
 </p:sld>
 </file>
 
-<file path=ppt/slides/slide55.xml><?xml version="1.0" encoding="utf-8"?>
+<file path=ppt/slides/slide54.xml><?xml version="1.0" encoding="utf-8"?>
 <p:sld xmlns:a="http://schemas.openxmlformats.org/drawingml/2006/main" xmlns:r="http://schemas.openxmlformats.org/officeDocument/2006/relationships" xmlns:p="http://schemas.openxmlformats.org/presentationml/2006/main">
   <p:cSld>
     <p:spTree>
@@ -17656,6 +18368,100 @@
           </a:bodyPr>
           <a:lstStyle/>
           <a:p>
+            <a:r>
+              <a:rPr lang="en-US" sz="2400" dirty="0"/>
+              <a:t>A </a:t>
+            </a:r>
+            <a:r>
+              <a:rPr lang="en-US" sz="2400" b="1" dirty="0"/>
+              <a:t>session</a:t>
+            </a:r>
+            <a:r>
+              <a:rPr lang="en-US" sz="2400" dirty="0"/>
+              <a:t> is like </a:t>
+            </a:r>
+            <a:r>
+              <a:rPr lang="en-US" sz="2400" b="1" dirty="0">
+                <a:solidFill>
+                  <a:srgbClr val="C00000"/>
+                </a:solidFill>
+              </a:rPr>
+              <a:t>opening a document </a:t>
+            </a:r>
+            <a:r>
+              <a:rPr lang="en-US" sz="2400" dirty="0"/>
+              <a:t>to edit:</a:t>
+            </a:r>
+          </a:p>
+          <a:p>
+            <a:pPr lvl="1"/>
+            <a:r>
+              <a:rPr lang="en-US" sz="2400" dirty="0"/>
+              <a:t>You open it (</a:t>
+            </a:r>
+            <a:r>
+              <a:rPr lang="en-US" sz="2000" dirty="0"/>
+              <a:t>start a session</a:t>
+            </a:r>
+            <a:r>
+              <a:rPr lang="en-US" sz="2400" dirty="0"/>
+              <a:t>)</a:t>
+            </a:r>
+          </a:p>
+          <a:p>
+            <a:pPr lvl="1"/>
+            <a:r>
+              <a:rPr lang="en-US" sz="2400" dirty="0"/>
+              <a:t>Make your changes (insert, update, delete)</a:t>
+            </a:r>
+          </a:p>
+          <a:p>
+            <a:pPr lvl="1"/>
+            <a:r>
+              <a:rPr lang="en-US" sz="2400" dirty="0"/>
+              <a:t>Then </a:t>
+            </a:r>
+            <a:r>
+              <a:rPr lang="en-US" sz="2400" b="1" dirty="0"/>
+              <a:t>save</a:t>
+            </a:r>
+            <a:r>
+              <a:rPr lang="en-US" sz="2400" dirty="0"/>
+              <a:t> (commit) or </a:t>
+            </a:r>
+            <a:r>
+              <a:rPr lang="en-US" sz="2400" b="1" dirty="0"/>
+              <a:t>discard</a:t>
+            </a:r>
+            <a:r>
+              <a:rPr lang="en-US" sz="2400" dirty="0"/>
+              <a:t> (rollback)</a:t>
+            </a:r>
+          </a:p>
+          <a:p>
+            <a:pPr lvl="1"/>
+            <a:r>
+              <a:rPr lang="en-US" sz="2400" dirty="0"/>
+              <a:t>This line creates a </a:t>
+            </a:r>
+            <a:r>
+              <a:rPr lang="en-US" sz="2400" b="1" dirty="0"/>
+              <a:t>factory</a:t>
+            </a:r>
+            <a:r>
+              <a:rPr lang="en-US" sz="2400" dirty="0"/>
+              <a:t> (</a:t>
+            </a:r>
+            <a:r>
+              <a:rPr lang="en-US" sz="2400" dirty="0" err="1"/>
+              <a:t>SessionLocal</a:t>
+            </a:r>
+            <a:r>
+              <a:rPr lang="en-US" sz="2400" dirty="0"/>
+              <a:t>) that can make new sessions whenever you need them.</a:t>
+            </a:r>
+          </a:p>
+          <a:p>
             <a:pPr marL="0" indent="0">
               <a:buNone/>
             </a:pPr>
@@ -17663,6 +18469,330 @@
           </a:p>
         </p:txBody>
       </p:sp>
+      <p:graphicFrame>
+        <p:nvGraphicFramePr>
+          <p:cNvPr id="2" name="Table 1">
+            <a:extLst>
+              <a:ext uri="{FF2B5EF4-FFF2-40B4-BE49-F238E27FC236}">
+                <a16:creationId xmlns:a16="http://schemas.microsoft.com/office/drawing/2014/main" id="{62F95E52-6043-224B-DB08-9F523B1D13E6}"/>
+              </a:ext>
+            </a:extLst>
+          </p:cNvPr>
+          <p:cNvGraphicFramePr>
+            <a:graphicFrameLocks noGrp="1"/>
+          </p:cNvGraphicFramePr>
+          <p:nvPr>
+            <p:extLst>
+              <p:ext uri="{D42A27DB-BD31-4B8C-83A1-F6EECF244321}">
+                <p14:modId xmlns:p14="http://schemas.microsoft.com/office/powerpoint/2010/main" val="2568757587"/>
+              </p:ext>
+            </p:extLst>
+          </p:nvPr>
+        </p:nvGraphicFramePr>
+        <p:xfrm>
+          <a:off x="1219788" y="3436824"/>
+          <a:ext cx="9970726" cy="2724490"/>
+        </p:xfrm>
+        <a:graphic>
+          <a:graphicData uri="http://schemas.openxmlformats.org/drawingml/2006/table">
+            <a:tbl>
+              <a:tblPr firstRow="1" firstCol="1" bandRow="1">
+                <a:tableStyleId>{5C22544A-7EE6-4342-B048-85BDC9FD1C3A}</a:tableStyleId>
+              </a:tblPr>
+              <a:tblGrid>
+                <a:gridCol w="3254241">
+                  <a:extLst>
+                    <a:ext uri="{9D8B030D-6E8A-4147-A177-3AD203B41FA5}">
+                      <a16:colId xmlns:a16="http://schemas.microsoft.com/office/drawing/2014/main" val="2432624936"/>
+                    </a:ext>
+                  </a:extLst>
+                </a:gridCol>
+                <a:gridCol w="6716485">
+                  <a:extLst>
+                    <a:ext uri="{9D8B030D-6E8A-4147-A177-3AD203B41FA5}">
+                      <a16:colId xmlns:a16="http://schemas.microsoft.com/office/drawing/2014/main" val="2421227592"/>
+                    </a:ext>
+                  </a:extLst>
+                </a:gridCol>
+              </a:tblGrid>
+              <a:tr h="540805">
+                <a:tc>
+                  <a:txBody>
+                    <a:bodyPr/>
+                    <a:lstStyle/>
+                    <a:p>
+                      <a:pPr>
+                        <a:lnSpc>
+                          <a:spcPct val="107000"/>
+                        </a:lnSpc>
+                        <a:spcAft>
+                          <a:spcPts val="800"/>
+                        </a:spcAft>
+                        <a:buNone/>
+                      </a:pPr>
+                      <a:r>
+                        <a:rPr lang="en-IN" sz="2400" kern="100">
+                          <a:effectLst/>
+                        </a:rPr>
+                        <a:t>Parameter</a:t>
+                      </a:r>
+                      <a:endParaRPr lang="en-IN" sz="2400" kern="100">
+                        <a:effectLst/>
+                        <a:latin typeface="Aptos" panose="020B0004020202020204" pitchFamily="34" charset="0"/>
+                        <a:ea typeface="Aptos" panose="020B0004020202020204" pitchFamily="34" charset="0"/>
+                        <a:cs typeface="Tunga" panose="020B0502040204020203" pitchFamily="34" charset="0"/>
+                      </a:endParaRPr>
+                    </a:p>
+                  </a:txBody>
+                  <a:tcPr marL="68580" marR="68580" marT="0" marB="0"/>
+                </a:tc>
+                <a:tc>
+                  <a:txBody>
+                    <a:bodyPr/>
+                    <a:lstStyle/>
+                    <a:p>
+                      <a:pPr>
+                        <a:lnSpc>
+                          <a:spcPct val="107000"/>
+                        </a:lnSpc>
+                        <a:spcAft>
+                          <a:spcPts val="800"/>
+                        </a:spcAft>
+                        <a:buNone/>
+                      </a:pPr>
+                      <a:r>
+                        <a:rPr lang="en-IN" sz="2400" kern="100">
+                          <a:effectLst/>
+                        </a:rPr>
+                        <a:t>Meaning</a:t>
+                      </a:r>
+                      <a:endParaRPr lang="en-IN" sz="2400" kern="100">
+                        <a:effectLst/>
+                        <a:latin typeface="Aptos" panose="020B0004020202020204" pitchFamily="34" charset="0"/>
+                        <a:ea typeface="Aptos" panose="020B0004020202020204" pitchFamily="34" charset="0"/>
+                        <a:cs typeface="Tunga" panose="020B0502040204020203" pitchFamily="34" charset="0"/>
+                      </a:endParaRPr>
+                    </a:p>
+                  </a:txBody>
+                  <a:tcPr marL="68580" marR="68580" marT="0" marB="0"/>
+                </a:tc>
+                <a:extLst>
+                  <a:ext uri="{0D108BD9-81ED-4DB2-BD59-A6C34878D82A}">
+                    <a16:rowId xmlns:a16="http://schemas.microsoft.com/office/drawing/2014/main" val="1206254894"/>
+                  </a:ext>
+                </a:extLst>
+              </a:tr>
+              <a:tr h="540805">
+                <a:tc>
+                  <a:txBody>
+                    <a:bodyPr/>
+                    <a:lstStyle/>
+                    <a:p>
+                      <a:pPr>
+                        <a:lnSpc>
+                          <a:spcPct val="107000"/>
+                        </a:lnSpc>
+                        <a:spcAft>
+                          <a:spcPts val="800"/>
+                        </a:spcAft>
+                        <a:buNone/>
+                      </a:pPr>
+                      <a:r>
+                        <a:rPr lang="en-IN" sz="2400" kern="100" dirty="0">
+                          <a:effectLst/>
+                        </a:rPr>
+                        <a:t>bind=engine</a:t>
+                      </a:r>
+                      <a:endParaRPr lang="en-IN" sz="2400" kern="100" dirty="0">
+                        <a:effectLst/>
+                        <a:latin typeface="Aptos" panose="020B0004020202020204" pitchFamily="34" charset="0"/>
+                        <a:ea typeface="Aptos" panose="020B0004020202020204" pitchFamily="34" charset="0"/>
+                        <a:cs typeface="Tunga" panose="020B0502040204020203" pitchFamily="34" charset="0"/>
+                      </a:endParaRPr>
+                    </a:p>
+                  </a:txBody>
+                  <a:tcPr marL="68580" marR="68580" marT="0" marB="0"/>
+                </a:tc>
+                <a:tc>
+                  <a:txBody>
+                    <a:bodyPr/>
+                    <a:lstStyle/>
+                    <a:p>
+                      <a:pPr>
+                        <a:lnSpc>
+                          <a:spcPct val="107000"/>
+                        </a:lnSpc>
+                        <a:spcAft>
+                          <a:spcPts val="800"/>
+                        </a:spcAft>
+                        <a:buNone/>
+                      </a:pPr>
+                      <a:r>
+                        <a:rPr lang="en-IN" sz="2400" kern="100">
+                          <a:effectLst/>
+                        </a:rPr>
+                        <a:t>Tells sessions which database connection to use</a:t>
+                      </a:r>
+                      <a:endParaRPr lang="en-IN" sz="2400" kern="100">
+                        <a:effectLst/>
+                        <a:latin typeface="Aptos" panose="020B0004020202020204" pitchFamily="34" charset="0"/>
+                        <a:ea typeface="Aptos" panose="020B0004020202020204" pitchFamily="34" charset="0"/>
+                        <a:cs typeface="Tunga" panose="020B0502040204020203" pitchFamily="34" charset="0"/>
+                      </a:endParaRPr>
+                    </a:p>
+                  </a:txBody>
+                  <a:tcPr marL="68580" marR="68580" marT="0" marB="0"/>
+                </a:tc>
+                <a:extLst>
+                  <a:ext uri="{0D108BD9-81ED-4DB2-BD59-A6C34878D82A}">
+                    <a16:rowId xmlns:a16="http://schemas.microsoft.com/office/drawing/2014/main" val="955946412"/>
+                  </a:ext>
+                </a:extLst>
+              </a:tr>
+              <a:tr h="540805">
+                <a:tc>
+                  <a:txBody>
+                    <a:bodyPr/>
+                    <a:lstStyle/>
+                    <a:p>
+                      <a:pPr>
+                        <a:lnSpc>
+                          <a:spcPct val="107000"/>
+                        </a:lnSpc>
+                        <a:spcAft>
+                          <a:spcPts val="800"/>
+                        </a:spcAft>
+                        <a:buNone/>
+                      </a:pPr>
+                      <a:r>
+                        <a:rPr lang="en-IN" sz="2400" kern="100" dirty="0" err="1">
+                          <a:effectLst/>
+                        </a:rPr>
+                        <a:t>autocommit</a:t>
+                      </a:r>
+                      <a:r>
+                        <a:rPr lang="en-IN" sz="2400" kern="100" dirty="0">
+                          <a:effectLst/>
+                        </a:rPr>
+                        <a:t>=False</a:t>
+                      </a:r>
+                      <a:endParaRPr lang="en-IN" sz="2400" kern="100" dirty="0">
+                        <a:effectLst/>
+                        <a:latin typeface="Aptos" panose="020B0004020202020204" pitchFamily="34" charset="0"/>
+                        <a:ea typeface="Aptos" panose="020B0004020202020204" pitchFamily="34" charset="0"/>
+                        <a:cs typeface="Tunga" panose="020B0502040204020203" pitchFamily="34" charset="0"/>
+                      </a:endParaRPr>
+                    </a:p>
+                  </a:txBody>
+                  <a:tcPr marL="68580" marR="68580" marT="0" marB="0"/>
+                </a:tc>
+                <a:tc>
+                  <a:txBody>
+                    <a:bodyPr/>
+                    <a:lstStyle/>
+                    <a:p>
+                      <a:pPr>
+                        <a:lnSpc>
+                          <a:spcPct val="107000"/>
+                        </a:lnSpc>
+                        <a:spcAft>
+                          <a:spcPts val="800"/>
+                        </a:spcAft>
+                        <a:buNone/>
+                      </a:pPr>
+                      <a:r>
+                        <a:rPr lang="en-IN" sz="2400" kern="100">
+                          <a:effectLst/>
+                        </a:rPr>
+                        <a:t>You must save changes manually (safer)</a:t>
+                      </a:r>
+                      <a:endParaRPr lang="en-IN" sz="2400" kern="100">
+                        <a:effectLst/>
+                        <a:latin typeface="Aptos" panose="020B0004020202020204" pitchFamily="34" charset="0"/>
+                        <a:ea typeface="Aptos" panose="020B0004020202020204" pitchFamily="34" charset="0"/>
+                        <a:cs typeface="Tunga" panose="020B0502040204020203" pitchFamily="34" charset="0"/>
+                      </a:endParaRPr>
+                    </a:p>
+                  </a:txBody>
+                  <a:tcPr marL="68580" marR="68580" marT="0" marB="0"/>
+                </a:tc>
+                <a:extLst>
+                  <a:ext uri="{0D108BD9-81ED-4DB2-BD59-A6C34878D82A}">
+                    <a16:rowId xmlns:a16="http://schemas.microsoft.com/office/drawing/2014/main" val="917606995"/>
+                  </a:ext>
+                </a:extLst>
+              </a:tr>
+              <a:tr h="1102075">
+                <a:tc>
+                  <a:txBody>
+                    <a:bodyPr/>
+                    <a:lstStyle/>
+                    <a:p>
+                      <a:pPr>
+                        <a:lnSpc>
+                          <a:spcPct val="107000"/>
+                        </a:lnSpc>
+                        <a:spcAft>
+                          <a:spcPts val="800"/>
+                        </a:spcAft>
+                        <a:buNone/>
+                      </a:pPr>
+                      <a:r>
+                        <a:rPr lang="en-IN" sz="2400" kern="100">
+                          <a:effectLst/>
+                        </a:rPr>
+                        <a:t>autoflush=False</a:t>
+                      </a:r>
+                      <a:endParaRPr lang="en-IN" sz="2400" kern="100">
+                        <a:effectLst/>
+                        <a:latin typeface="Aptos" panose="020B0004020202020204" pitchFamily="34" charset="0"/>
+                        <a:ea typeface="Aptos" panose="020B0004020202020204" pitchFamily="34" charset="0"/>
+                        <a:cs typeface="Tunga" panose="020B0502040204020203" pitchFamily="34" charset="0"/>
+                      </a:endParaRPr>
+                    </a:p>
+                  </a:txBody>
+                  <a:tcPr marL="68580" marR="68580" marT="0" marB="0"/>
+                </a:tc>
+                <a:tc>
+                  <a:txBody>
+                    <a:bodyPr/>
+                    <a:lstStyle/>
+                    <a:p>
+                      <a:pPr>
+                        <a:lnSpc>
+                          <a:spcPct val="107000"/>
+                        </a:lnSpc>
+                        <a:spcAft>
+                          <a:spcPts val="800"/>
+                        </a:spcAft>
+                        <a:buNone/>
+                      </a:pPr>
+                      <a:r>
+                        <a:rPr lang="en-IN" sz="2400" kern="100" dirty="0">
+                          <a:effectLst/>
+                        </a:rPr>
+                        <a:t>Prevents automatic sending of changes before commit</a:t>
+                      </a:r>
+                      <a:endParaRPr lang="en-IN" sz="2400" kern="100" dirty="0">
+                        <a:effectLst/>
+                        <a:latin typeface="Aptos" panose="020B0004020202020204" pitchFamily="34" charset="0"/>
+                        <a:ea typeface="Aptos" panose="020B0004020202020204" pitchFamily="34" charset="0"/>
+                        <a:cs typeface="Tunga" panose="020B0502040204020203" pitchFamily="34" charset="0"/>
+                      </a:endParaRPr>
+                    </a:p>
+                  </a:txBody>
+                  <a:tcPr marL="68580" marR="68580" marT="0" marB="0"/>
+                </a:tc>
+                <a:extLst>
+                  <a:ext uri="{0D108BD9-81ED-4DB2-BD59-A6C34878D82A}">
+                    <a16:rowId xmlns:a16="http://schemas.microsoft.com/office/drawing/2014/main" val="1561603206"/>
+                  </a:ext>
+                </a:extLst>
+              </a:tr>
+            </a:tbl>
+          </a:graphicData>
+        </a:graphic>
+      </p:graphicFrame>
     </p:spTree>
     <p:extLst>
       <p:ext uri="{BB962C8B-B14F-4D97-AF65-F5344CB8AC3E}">
@@ -17676,7 +18806,7 @@
 </p:sld>
 </file>
 
-<file path=ppt/slides/slide56.xml><?xml version="1.0" encoding="utf-8"?>
+<file path=ppt/slides/slide55.xml><?xml version="1.0" encoding="utf-8"?>
 <p:sld xmlns:a="http://schemas.openxmlformats.org/drawingml/2006/main" xmlns:r="http://schemas.openxmlformats.org/officeDocument/2006/relationships" xmlns:p="http://schemas.openxmlformats.org/presentationml/2006/main">
   <p:cSld>
     <p:spTree>
@@ -17727,13 +18857,175 @@
           </a:bodyPr>
           <a:lstStyle/>
           <a:p>
-            <a:pPr marL="0" indent="0">
-              <a:buNone/>
-            </a:pPr>
-            <a:endParaRPr lang="en-IN" sz="2400" dirty="0"/>
+            <a:r>
+              <a:rPr lang="en-IN" sz="2400" b="1" dirty="0"/>
+              <a:t>Create the Base class</a:t>
+            </a:r>
+          </a:p>
+          <a:p>
+            <a:endParaRPr lang="en-IN" sz="2400" b="1" dirty="0"/>
+          </a:p>
+          <a:p>
+            <a:endParaRPr lang="en-IN" sz="2400" b="1" dirty="0"/>
+          </a:p>
+          <a:p>
+            <a:endParaRPr lang="en-IN" sz="2400" b="1" dirty="0"/>
+          </a:p>
+          <a:p>
+            <a:r>
+              <a:rPr lang="en-US" sz="2400" dirty="0"/>
+              <a:t>This is the </a:t>
+            </a:r>
+            <a:r>
+              <a:rPr lang="en-US" sz="2400" b="1" dirty="0"/>
+              <a:t>starting point</a:t>
+            </a:r>
+            <a:r>
+              <a:rPr lang="en-US" sz="2400" dirty="0"/>
+              <a:t> for creating database tables.</a:t>
+            </a:r>
+          </a:p>
+          <a:p>
+            <a:r>
+              <a:rPr lang="en-US" sz="2400" dirty="0"/>
+              <a:t>Later define classes (like </a:t>
+            </a:r>
+            <a:r>
+              <a:rPr lang="en-US" dirty="0"/>
+              <a:t>User</a:t>
+            </a:r>
+            <a:r>
+              <a:rPr lang="en-US" sz="2400" dirty="0"/>
+              <a:t>, </a:t>
+            </a:r>
+            <a:r>
+              <a:rPr lang="en-US" dirty="0"/>
+              <a:t>Product</a:t>
+            </a:r>
+            <a:r>
+              <a:rPr lang="en-US" sz="2400" dirty="0"/>
+              <a:t>, etc.) that </a:t>
+            </a:r>
+            <a:r>
+              <a:rPr lang="en-US" sz="2400" b="1" dirty="0"/>
+              <a:t>inherit</a:t>
+            </a:r>
+            <a:r>
+              <a:rPr lang="en-US" sz="2400" dirty="0"/>
+              <a:t> from </a:t>
+            </a:r>
+            <a:r>
+              <a:rPr lang="en-US" dirty="0"/>
+              <a:t>Base</a:t>
+            </a:r>
+            <a:r>
+              <a:rPr lang="en-US" sz="2400" dirty="0"/>
+              <a:t>.</a:t>
+            </a:r>
+          </a:p>
+          <a:p>
+            <a:r>
+              <a:rPr lang="en-US" sz="2400" dirty="0"/>
+              <a:t>Each class becomes a </a:t>
+            </a:r>
+            <a:r>
+              <a:rPr lang="en-US" sz="2400" b="1" dirty="0"/>
+              <a:t>table</a:t>
+            </a:r>
+            <a:r>
+              <a:rPr lang="en-US" sz="2400" dirty="0"/>
+              <a:t> in the database.</a:t>
+            </a:r>
+          </a:p>
+          <a:p>
+            <a:r>
+              <a:rPr lang="en-US" sz="2400" dirty="0"/>
+              <a:t>Think of </a:t>
+            </a:r>
+            <a:r>
+              <a:rPr lang="en-US" dirty="0"/>
+              <a:t>Base</a:t>
+            </a:r>
+            <a:r>
+              <a:rPr lang="en-US" sz="2400" dirty="0"/>
+              <a:t> as a </a:t>
+            </a:r>
+            <a:r>
+              <a:rPr lang="en-US" sz="2400" b="1" dirty="0">
+                <a:solidFill>
+                  <a:srgbClr val="C00000"/>
+                </a:solidFill>
+              </a:rPr>
+              <a:t>parent blueprint</a:t>
+            </a:r>
+            <a:r>
+              <a:rPr lang="en-US" sz="2400" dirty="0">
+                <a:solidFill>
+                  <a:srgbClr val="C00000"/>
+                </a:solidFill>
+              </a:rPr>
+              <a:t> </a:t>
+            </a:r>
+            <a:r>
+              <a:rPr lang="en-US" sz="2400" dirty="0"/>
+              <a:t>— </a:t>
+            </a:r>
+            <a:r>
+              <a:rPr lang="en-US" sz="2400" b="1" dirty="0"/>
+              <a:t>every new table will be a “</a:t>
+            </a:r>
+            <a:r>
+              <a:rPr lang="en-US" sz="2400" b="1" dirty="0">
+                <a:solidFill>
+                  <a:srgbClr val="C00000"/>
+                </a:solidFill>
+              </a:rPr>
+              <a:t>child</a:t>
+            </a:r>
+            <a:r>
+              <a:rPr lang="en-US" sz="2400" b="1" dirty="0"/>
+              <a:t>” of this base</a:t>
+            </a:r>
+            <a:r>
+              <a:rPr lang="en-US" sz="2400" dirty="0"/>
+              <a:t>.</a:t>
+            </a:r>
+          </a:p>
+          <a:p>
+            <a:endParaRPr lang="en-IN" sz="2400" b="1" dirty="0"/>
           </a:p>
         </p:txBody>
       </p:sp>
+      <p:pic>
+        <p:nvPicPr>
+          <p:cNvPr id="4" name="Picture 3">
+            <a:extLst>
+              <a:ext uri="{FF2B5EF4-FFF2-40B4-BE49-F238E27FC236}">
+                <a16:creationId xmlns:a16="http://schemas.microsoft.com/office/drawing/2014/main" id="{02A3E1EC-7EBD-8F1C-80D4-1C6ECA17F889}"/>
+              </a:ext>
+            </a:extLst>
+          </p:cNvPr>
+          <p:cNvPicPr>
+            <a:picLocks noChangeAspect="1"/>
+          </p:cNvPicPr>
+          <p:nvPr/>
+        </p:nvPicPr>
+        <p:blipFill>
+          <a:blip r:embed="rId2"/>
+          <a:stretch>
+            <a:fillRect/>
+          </a:stretch>
+        </p:blipFill>
+        <p:spPr>
+          <a:xfrm>
+            <a:off x="1986457" y="1383915"/>
+            <a:ext cx="5470257" cy="750432"/>
+          </a:xfrm>
+          <a:prstGeom prst="rect">
+            <a:avLst/>
+          </a:prstGeom>
+        </p:spPr>
+      </p:pic>
     </p:spTree>
     <p:extLst>
       <p:ext uri="{BB962C8B-B14F-4D97-AF65-F5344CB8AC3E}">
@@ -17747,7 +19039,7 @@
 </p:sld>
 </file>
 
-<file path=ppt/slides/slide57.xml><?xml version="1.0" encoding="utf-8"?>
+<file path=ppt/slides/slide56.xml><?xml version="1.0" encoding="utf-8"?>
 <p:sld xmlns:a="http://schemas.openxmlformats.org/drawingml/2006/main" xmlns:r="http://schemas.openxmlformats.org/officeDocument/2006/relationships" xmlns:p="http://schemas.openxmlformats.org/presentationml/2006/main">
   <p:cSld>
     <p:spTree>
@@ -17801,10 +19093,53 @@
             <a:pPr marL="0" indent="0">
               <a:buNone/>
             </a:pPr>
+            <a:r>
+              <a:rPr lang="en-US" sz="2400" b="1" dirty="0"/>
+              <a:t>Step: 3 </a:t>
+            </a:r>
+            <a:r>
+              <a:rPr lang="en-IN" sz="2400" b="1" dirty="0"/>
+              <a:t>Define a Model (a table) → models.py</a:t>
+            </a:r>
+          </a:p>
+          <a:p>
+            <a:pPr marL="0" indent="0">
+              <a:buNone/>
+            </a:pPr>
             <a:endParaRPr lang="en-IN" sz="2400" dirty="0"/>
           </a:p>
         </p:txBody>
       </p:sp>
+      <p:pic>
+        <p:nvPicPr>
+          <p:cNvPr id="4" name="Picture 3">
+            <a:extLst>
+              <a:ext uri="{FF2B5EF4-FFF2-40B4-BE49-F238E27FC236}">
+                <a16:creationId xmlns:a16="http://schemas.microsoft.com/office/drawing/2014/main" id="{17BD3939-7293-5F4E-0C4F-4D4064C498F2}"/>
+              </a:ext>
+            </a:extLst>
+          </p:cNvPr>
+          <p:cNvPicPr>
+            <a:picLocks noChangeAspect="1"/>
+          </p:cNvPicPr>
+          <p:nvPr/>
+        </p:nvPicPr>
+        <p:blipFill>
+          <a:blip r:embed="rId2"/>
+          <a:stretch>
+            <a:fillRect/>
+          </a:stretch>
+        </p:blipFill>
+        <p:spPr>
+          <a:xfrm>
+            <a:off x="959943" y="1361496"/>
+            <a:ext cx="9577429" cy="4815467"/>
+          </a:xfrm>
+          <a:prstGeom prst="rect">
+            <a:avLst/>
+          </a:prstGeom>
+        </p:spPr>
+      </p:pic>
     </p:spTree>
     <p:extLst>
       <p:ext uri="{BB962C8B-B14F-4D97-AF65-F5344CB8AC3E}">
@@ -17818,7 +19153,7 @@
 </p:sld>
 </file>
 
-<file path=ppt/slides/slide58.xml><?xml version="1.0" encoding="utf-8"?>
+<file path=ppt/slides/slide57.xml><?xml version="1.0" encoding="utf-8"?>
 <p:sld xmlns:a="http://schemas.openxmlformats.org/drawingml/2006/main" xmlns:r="http://schemas.openxmlformats.org/officeDocument/2006/relationships" xmlns:p="http://schemas.openxmlformats.org/presentationml/2006/main">
   <p:cSld>
     <p:spTree>
@@ -17872,6 +19207,90 @@
             <a:pPr marL="0" indent="0">
               <a:buNone/>
             </a:pPr>
+            <a:r>
+              <a:rPr lang="en-US" sz="2400" dirty="0"/>
+              <a:t>Where,</a:t>
+            </a:r>
+          </a:p>
+          <a:p>
+            <a:r>
+              <a:rPr lang="en-US" sz="2400" b="1" dirty="0">
+                <a:solidFill>
+                  <a:srgbClr val="C00000"/>
+                </a:solidFill>
+              </a:rPr>
+              <a:t>User class </a:t>
+            </a:r>
+            <a:r>
+              <a:rPr lang="en-US" sz="2400" dirty="0"/>
+              <a:t>represents the </a:t>
+            </a:r>
+            <a:r>
+              <a:rPr lang="en-US" sz="2400" b="1" dirty="0">
+                <a:solidFill>
+                  <a:srgbClr val="C00000"/>
+                </a:solidFill>
+              </a:rPr>
+              <a:t>users</a:t>
+            </a:r>
+            <a:r>
+              <a:rPr lang="en-US" sz="2400" dirty="0"/>
+              <a:t> </a:t>
+            </a:r>
+            <a:r>
+              <a:rPr lang="en-US" sz="2400" b="1" dirty="0">
+                <a:solidFill>
+                  <a:srgbClr val="C00000"/>
+                </a:solidFill>
+              </a:rPr>
+              <a:t>table</a:t>
+            </a:r>
+            <a:r>
+              <a:rPr lang="en-US" sz="2400" dirty="0"/>
+              <a:t>.</a:t>
+            </a:r>
+          </a:p>
+          <a:p>
+            <a:r>
+              <a:rPr lang="en-US" sz="2400" dirty="0"/>
+              <a:t>Each attribute → column in PostgreSQL.</a:t>
+            </a:r>
+          </a:p>
+          <a:p>
+            <a:r>
+              <a:rPr lang="en-US" sz="2400" dirty="0"/>
+              <a:t>id, name, email → become columns in the table.</a:t>
+            </a:r>
+          </a:p>
+          <a:p>
+            <a:r>
+              <a:rPr lang="en-US" sz="2400" b="1" dirty="0"/>
+              <a:t>Base</a:t>
+            </a:r>
+            <a:r>
+              <a:rPr lang="en-US" sz="2400" dirty="0"/>
+              <a:t> → Comes from the previous setup (</a:t>
+            </a:r>
+            <a:r>
+              <a:rPr lang="en-US" dirty="0" err="1"/>
+              <a:t>declarative_base</a:t>
+            </a:r>
+            <a:r>
+              <a:rPr lang="en-US" dirty="0"/>
+              <a:t>()</a:t>
+            </a:r>
+            <a:r>
+              <a:rPr lang="en-US" sz="2400" dirty="0"/>
+              <a:t>), acts as a </a:t>
+            </a:r>
+            <a:r>
+              <a:rPr lang="en-US" sz="2400" b="1" dirty="0"/>
+              <a:t>blueprint</a:t>
+            </a:r>
+            <a:r>
+              <a:rPr lang="en-US" sz="2400" dirty="0"/>
+              <a:t> for creating database tables.</a:t>
+            </a:r>
             <a:endParaRPr lang="en-IN" sz="2400" dirty="0"/>
           </a:p>
         </p:txBody>
@@ -17889,7 +19308,7 @@
 </p:sld>
 </file>
 
-<file path=ppt/slides/slide59.xml><?xml version="1.0" encoding="utf-8"?>
+<file path=ppt/slides/slide58.xml><?xml version="1.0" encoding="utf-8"?>
 <p:sld xmlns:a="http://schemas.openxmlformats.org/drawingml/2006/main" xmlns:r="http://schemas.openxmlformats.org/officeDocument/2006/relationships" xmlns:p="http://schemas.openxmlformats.org/presentationml/2006/main">
   <p:cSld>
     <p:spTree>
@@ -17943,14 +19362,190 @@
             <a:pPr marL="0" indent="0">
               <a:buNone/>
             </a:pPr>
+            <a:r>
+              <a:rPr lang="en-US" sz="2400" b="1" dirty="0"/>
+              <a:t>Step 4 : </a:t>
+            </a:r>
+            <a:r>
+              <a:rPr lang="en-US" sz="2400" dirty="0"/>
+              <a:t>Once your model is defined, you can </a:t>
+            </a:r>
+            <a:r>
+              <a:rPr lang="en-US" sz="2400" b="1" dirty="0"/>
+              <a:t>actually create the table</a:t>
+            </a:r>
+            <a:r>
+              <a:rPr lang="en-US" sz="2400" dirty="0"/>
+              <a:t> in your database using:</a:t>
+            </a:r>
+          </a:p>
+          <a:p>
+            <a:pPr marL="0" indent="0">
+              <a:buNone/>
+            </a:pPr>
             <a:endParaRPr lang="en-IN" sz="2400" dirty="0"/>
           </a:p>
         </p:txBody>
       </p:sp>
+      <p:pic>
+        <p:nvPicPr>
+          <p:cNvPr id="4" name="Picture 3">
+            <a:extLst>
+              <a:ext uri="{FF2B5EF4-FFF2-40B4-BE49-F238E27FC236}">
+                <a16:creationId xmlns:a16="http://schemas.microsoft.com/office/drawing/2014/main" id="{290F8F9B-799D-981D-21E1-E928E6A86C6C}"/>
+              </a:ext>
+            </a:extLst>
+          </p:cNvPr>
+          <p:cNvPicPr>
+            <a:picLocks noChangeAspect="1"/>
+          </p:cNvPicPr>
+          <p:nvPr/>
+        </p:nvPicPr>
+        <p:blipFill>
+          <a:blip r:embed="rId2"/>
+          <a:stretch>
+            <a:fillRect/>
+          </a:stretch>
+        </p:blipFill>
+        <p:spPr>
+          <a:xfrm>
+            <a:off x="974271" y="1996951"/>
+            <a:ext cx="10243457" cy="2864098"/>
+          </a:xfrm>
+          <a:prstGeom prst="rect">
+            <a:avLst/>
+          </a:prstGeom>
+        </p:spPr>
+      </p:pic>
     </p:spTree>
     <p:extLst>
       <p:ext uri="{BB962C8B-B14F-4D97-AF65-F5344CB8AC3E}">
         <p14:creationId xmlns:p14="http://schemas.microsoft.com/office/powerpoint/2010/main" val="2779355306"/>
+      </p:ext>
+    </p:extLst>
+  </p:cSld>
+  <p:clrMapOvr>
+    <a:masterClrMapping/>
+  </p:clrMapOvr>
+</p:sld>
+</file>
+
+<file path=ppt/slides/slide59.xml><?xml version="1.0" encoding="utf-8"?>
+<p:sld xmlns:a="http://schemas.openxmlformats.org/drawingml/2006/main" xmlns:r="http://schemas.openxmlformats.org/officeDocument/2006/relationships" xmlns:p="http://schemas.openxmlformats.org/presentationml/2006/main">
+  <p:cSld>
+    <p:spTree>
+      <p:nvGrpSpPr>
+        <p:cNvPr id="1" name="">
+          <a:extLst>
+            <a:ext uri="{FF2B5EF4-FFF2-40B4-BE49-F238E27FC236}">
+              <a16:creationId xmlns:a16="http://schemas.microsoft.com/office/drawing/2014/main" id="{FFD6EED2-A3BB-B01D-74E3-F3E59700FB52}"/>
+            </a:ext>
+          </a:extLst>
+        </p:cNvPr>
+        <p:cNvGrpSpPr/>
+        <p:nvPr/>
+      </p:nvGrpSpPr>
+      <p:grpSpPr>
+        <a:xfrm>
+          <a:off x="0" y="0"/>
+          <a:ext cx="0" cy="0"/>
+          <a:chOff x="0" y="0"/>
+          <a:chExt cx="0" cy="0"/>
+        </a:xfrm>
+      </p:grpSpPr>
+      <p:sp>
+        <p:nvSpPr>
+          <p:cNvPr id="3" name="Content Placeholder 2">
+            <a:extLst>
+              <a:ext uri="{FF2B5EF4-FFF2-40B4-BE49-F238E27FC236}">
+                <a16:creationId xmlns:a16="http://schemas.microsoft.com/office/drawing/2014/main" id="{F078D154-D5E2-6D6C-49CD-F890F93EBC1A}"/>
+              </a:ext>
+            </a:extLst>
+          </p:cNvPr>
+          <p:cNvSpPr>
+            <a:spLocks noGrp="1"/>
+          </p:cNvSpPr>
+          <p:nvPr>
+            <p:ph idx="1"/>
+          </p:nvPr>
+        </p:nvSpPr>
+        <p:spPr>
+          <a:xfrm>
+            <a:off x="777240" y="696686"/>
+            <a:ext cx="10659110" cy="5480277"/>
+          </a:xfrm>
+        </p:spPr>
+        <p:txBody>
+          <a:bodyPr>
+            <a:normAutofit/>
+          </a:bodyPr>
+          <a:lstStyle/>
+          <a:p>
+            <a:pPr marL="0" indent="0">
+              <a:buNone/>
+            </a:pPr>
+            <a:r>
+              <a:rPr lang="en-US" sz="2400" b="1" dirty="0"/>
+              <a:t>Step 5: </a:t>
+            </a:r>
+            <a:r>
+              <a:rPr lang="en-US" sz="2400" dirty="0"/>
+              <a:t>Opens a </a:t>
+            </a:r>
+            <a:r>
+              <a:rPr lang="en-US" sz="2400" b="1" dirty="0"/>
+              <a:t>database session</a:t>
+            </a:r>
+            <a:r>
+              <a:rPr lang="en-US" sz="2400" dirty="0"/>
+              <a:t>, and do the </a:t>
+            </a:r>
+            <a:r>
+              <a:rPr lang="en-US" sz="2400" b="1" dirty="0"/>
+              <a:t>CRUD</a:t>
+            </a:r>
+            <a:r>
+              <a:rPr lang="en-US" sz="2400" dirty="0"/>
+              <a:t> Operation</a:t>
+            </a:r>
+            <a:endParaRPr lang="en-IN" sz="2400" dirty="0"/>
+          </a:p>
+        </p:txBody>
+      </p:sp>
+      <p:pic>
+        <p:nvPicPr>
+          <p:cNvPr id="4" name="Picture 3">
+            <a:extLst>
+              <a:ext uri="{FF2B5EF4-FFF2-40B4-BE49-F238E27FC236}">
+                <a16:creationId xmlns:a16="http://schemas.microsoft.com/office/drawing/2014/main" id="{63DE8399-64B9-8195-1182-0EB3C2091634}"/>
+              </a:ext>
+            </a:extLst>
+          </p:cNvPr>
+          <p:cNvPicPr>
+            <a:picLocks noChangeAspect="1"/>
+          </p:cNvPicPr>
+          <p:nvPr/>
+        </p:nvPicPr>
+        <p:blipFill>
+          <a:blip r:embed="rId2"/>
+          <a:stretch>
+            <a:fillRect/>
+          </a:stretch>
+        </p:blipFill>
+        <p:spPr>
+          <a:xfrm>
+            <a:off x="755650" y="1304544"/>
+            <a:ext cx="10472057" cy="4565817"/>
+          </a:xfrm>
+          <a:prstGeom prst="rect">
+            <a:avLst/>
+          </a:prstGeom>
+        </p:spPr>
+      </p:pic>
+    </p:spTree>
+    <p:extLst>
+      <p:ext uri="{BB962C8B-B14F-4D97-AF65-F5344CB8AC3E}">
+        <p14:creationId xmlns:p14="http://schemas.microsoft.com/office/powerpoint/2010/main" val="1341148807"/>
       </p:ext>
     </p:extLst>
   </p:cSld>
@@ -18119,77 +19714,6 @@
         <p:cNvPr id="1" name="">
           <a:extLst>
             <a:ext uri="{FF2B5EF4-FFF2-40B4-BE49-F238E27FC236}">
-              <a16:creationId xmlns:a16="http://schemas.microsoft.com/office/drawing/2014/main" id="{FFD6EED2-A3BB-B01D-74E3-F3E59700FB52}"/>
-            </a:ext>
-          </a:extLst>
-        </p:cNvPr>
-        <p:cNvGrpSpPr/>
-        <p:nvPr/>
-      </p:nvGrpSpPr>
-      <p:grpSpPr>
-        <a:xfrm>
-          <a:off x="0" y="0"/>
-          <a:ext cx="0" cy="0"/>
-          <a:chOff x="0" y="0"/>
-          <a:chExt cx="0" cy="0"/>
-        </a:xfrm>
-      </p:grpSpPr>
-      <p:sp>
-        <p:nvSpPr>
-          <p:cNvPr id="3" name="Content Placeholder 2">
-            <a:extLst>
-              <a:ext uri="{FF2B5EF4-FFF2-40B4-BE49-F238E27FC236}">
-                <a16:creationId xmlns:a16="http://schemas.microsoft.com/office/drawing/2014/main" id="{F078D154-D5E2-6D6C-49CD-F890F93EBC1A}"/>
-              </a:ext>
-            </a:extLst>
-          </p:cNvPr>
-          <p:cNvSpPr>
-            <a:spLocks noGrp="1"/>
-          </p:cNvSpPr>
-          <p:nvPr>
-            <p:ph idx="1"/>
-          </p:nvPr>
-        </p:nvSpPr>
-        <p:spPr>
-          <a:xfrm>
-            <a:off x="777240" y="696686"/>
-            <a:ext cx="10659110" cy="5480277"/>
-          </a:xfrm>
-        </p:spPr>
-        <p:txBody>
-          <a:bodyPr>
-            <a:normAutofit/>
-          </a:bodyPr>
-          <a:lstStyle/>
-          <a:p>
-            <a:pPr marL="0" indent="0">
-              <a:buNone/>
-            </a:pPr>
-            <a:endParaRPr lang="en-IN" sz="2400" dirty="0"/>
-          </a:p>
-        </p:txBody>
-      </p:sp>
-    </p:spTree>
-    <p:extLst>
-      <p:ext uri="{BB962C8B-B14F-4D97-AF65-F5344CB8AC3E}">
-        <p14:creationId xmlns:p14="http://schemas.microsoft.com/office/powerpoint/2010/main" val="1341148807"/>
-      </p:ext>
-    </p:extLst>
-  </p:cSld>
-  <p:clrMapOvr>
-    <a:masterClrMapping/>
-  </p:clrMapOvr>
-</p:sld>
-</file>
-
-<file path=ppt/slides/slide61.xml><?xml version="1.0" encoding="utf-8"?>
-<p:sld xmlns:a="http://schemas.openxmlformats.org/drawingml/2006/main" xmlns:r="http://schemas.openxmlformats.org/officeDocument/2006/relationships" xmlns:p="http://schemas.openxmlformats.org/presentationml/2006/main">
-  <p:cSld>
-    <p:spTree>
-      <p:nvGrpSpPr>
-        <p:cNvPr id="1" name="">
-          <a:extLst>
-            <a:ext uri="{FF2B5EF4-FFF2-40B4-BE49-F238E27FC236}">
               <a16:creationId xmlns:a16="http://schemas.microsoft.com/office/drawing/2014/main" id="{A31062E5-9979-AA23-0B3F-F62EE5E58C0B}"/>
             </a:ext>
           </a:extLst>
@@ -18236,10 +19760,50 @@
             <a:pPr marL="0" indent="0">
               <a:buNone/>
             </a:pPr>
+            <a:r>
+              <a:rPr lang="en-US" sz="2400" b="1" dirty="0"/>
+              <a:t>Step 6: Check the PostgreSQL DB</a:t>
+            </a:r>
+          </a:p>
+          <a:p>
+            <a:r>
+              <a:rPr lang="en-US" sz="2400" dirty="0"/>
+              <a:t>Now there should be a table named Users with one Row</a:t>
+            </a:r>
             <a:endParaRPr lang="en-IN" sz="2400" dirty="0"/>
           </a:p>
         </p:txBody>
       </p:sp>
+      <p:pic>
+        <p:nvPicPr>
+          <p:cNvPr id="4" name="Picture 3">
+            <a:extLst>
+              <a:ext uri="{FF2B5EF4-FFF2-40B4-BE49-F238E27FC236}">
+                <a16:creationId xmlns:a16="http://schemas.microsoft.com/office/drawing/2014/main" id="{0B14B586-E511-A602-F886-EF57477564D0}"/>
+              </a:ext>
+            </a:extLst>
+          </p:cNvPr>
+          <p:cNvPicPr>
+            <a:picLocks noChangeAspect="1"/>
+          </p:cNvPicPr>
+          <p:nvPr/>
+        </p:nvPicPr>
+        <p:blipFill>
+          <a:blip r:embed="rId2"/>
+          <a:stretch>
+            <a:fillRect/>
+          </a:stretch>
+        </p:blipFill>
+        <p:spPr>
+          <a:xfrm>
+            <a:off x="2060599" y="1963067"/>
+            <a:ext cx="7657143" cy="3780952"/>
+          </a:xfrm>
+          <a:prstGeom prst="rect">
+            <a:avLst/>
+          </a:prstGeom>
+        </p:spPr>
+      </p:pic>
     </p:spTree>
     <p:extLst>
       <p:ext uri="{BB962C8B-B14F-4D97-AF65-F5344CB8AC3E}">
@@ -18253,7 +19817,7 @@
 </p:sld>
 </file>
 
-<file path=ppt/slides/slide62.xml><?xml version="1.0" encoding="utf-8"?>
+<file path=ppt/slides/slide61.xml><?xml version="1.0" encoding="utf-8"?>
 <p:sld xmlns:a="http://schemas.openxmlformats.org/drawingml/2006/main" xmlns:r="http://schemas.openxmlformats.org/officeDocument/2006/relationships" xmlns:p="http://schemas.openxmlformats.org/presentationml/2006/main">
   <p:cSld>
     <p:spTree>
@@ -18315,6 +19879,361 @@
     <p:extLst>
       <p:ext uri="{BB962C8B-B14F-4D97-AF65-F5344CB8AC3E}">
         <p14:creationId xmlns:p14="http://schemas.microsoft.com/office/powerpoint/2010/main" val="4084032356"/>
+      </p:ext>
+    </p:extLst>
+  </p:cSld>
+  <p:clrMapOvr>
+    <a:masterClrMapping/>
+  </p:clrMapOvr>
+</p:sld>
+</file>
+
+<file path=ppt/slides/slide62.xml><?xml version="1.0" encoding="utf-8"?>
+<p:sld xmlns:a="http://schemas.openxmlformats.org/drawingml/2006/main" xmlns:r="http://schemas.openxmlformats.org/officeDocument/2006/relationships" xmlns:p="http://schemas.openxmlformats.org/presentationml/2006/main">
+  <p:cSld>
+    <p:spTree>
+      <p:nvGrpSpPr>
+        <p:cNvPr id="1" name="">
+          <a:extLst>
+            <a:ext uri="{FF2B5EF4-FFF2-40B4-BE49-F238E27FC236}">
+              <a16:creationId xmlns:a16="http://schemas.microsoft.com/office/drawing/2014/main" id="{F0E70C9C-1825-C1BB-B27D-D6796596E970}"/>
+            </a:ext>
+          </a:extLst>
+        </p:cNvPr>
+        <p:cNvGrpSpPr/>
+        <p:nvPr/>
+      </p:nvGrpSpPr>
+      <p:grpSpPr>
+        <a:xfrm>
+          <a:off x="0" y="0"/>
+          <a:ext cx="0" cy="0"/>
+          <a:chOff x="0" y="0"/>
+          <a:chExt cx="0" cy="0"/>
+        </a:xfrm>
+      </p:grpSpPr>
+      <p:sp>
+        <p:nvSpPr>
+          <p:cNvPr id="3" name="Content Placeholder 2">
+            <a:extLst>
+              <a:ext uri="{FF2B5EF4-FFF2-40B4-BE49-F238E27FC236}">
+                <a16:creationId xmlns:a16="http://schemas.microsoft.com/office/drawing/2014/main" id="{939E0F72-31EB-FB6C-A5EF-627736FF1143}"/>
+              </a:ext>
+            </a:extLst>
+          </p:cNvPr>
+          <p:cNvSpPr>
+            <a:spLocks noGrp="1"/>
+          </p:cNvSpPr>
+          <p:nvPr>
+            <p:ph idx="1"/>
+          </p:nvPr>
+        </p:nvSpPr>
+        <p:spPr>
+          <a:xfrm>
+            <a:off x="777240" y="696686"/>
+            <a:ext cx="10659110" cy="5480277"/>
+          </a:xfrm>
+        </p:spPr>
+        <p:txBody>
+          <a:bodyPr>
+            <a:normAutofit/>
+          </a:bodyPr>
+          <a:lstStyle/>
+          <a:p>
+            <a:pPr marL="0" indent="0">
+              <a:buNone/>
+            </a:pPr>
+            <a:endParaRPr lang="en-IN" sz="2400" dirty="0"/>
+          </a:p>
+        </p:txBody>
+      </p:sp>
+    </p:spTree>
+    <p:extLst>
+      <p:ext uri="{BB962C8B-B14F-4D97-AF65-F5344CB8AC3E}">
+        <p14:creationId xmlns:p14="http://schemas.microsoft.com/office/powerpoint/2010/main" val="512058926"/>
+      </p:ext>
+    </p:extLst>
+  </p:cSld>
+  <p:clrMapOvr>
+    <a:masterClrMapping/>
+  </p:clrMapOvr>
+</p:sld>
+</file>
+
+<file path=ppt/slides/slide63.xml><?xml version="1.0" encoding="utf-8"?>
+<p:sld xmlns:a="http://schemas.openxmlformats.org/drawingml/2006/main" xmlns:r="http://schemas.openxmlformats.org/officeDocument/2006/relationships" xmlns:p="http://schemas.openxmlformats.org/presentationml/2006/main">
+  <p:cSld>
+    <p:spTree>
+      <p:nvGrpSpPr>
+        <p:cNvPr id="1" name="">
+          <a:extLst>
+            <a:ext uri="{FF2B5EF4-FFF2-40B4-BE49-F238E27FC236}">
+              <a16:creationId xmlns:a16="http://schemas.microsoft.com/office/drawing/2014/main" id="{498B2377-F360-B3B9-8904-5F5162A7E9B4}"/>
+            </a:ext>
+          </a:extLst>
+        </p:cNvPr>
+        <p:cNvGrpSpPr/>
+        <p:nvPr/>
+      </p:nvGrpSpPr>
+      <p:grpSpPr>
+        <a:xfrm>
+          <a:off x="0" y="0"/>
+          <a:ext cx="0" cy="0"/>
+          <a:chOff x="0" y="0"/>
+          <a:chExt cx="0" cy="0"/>
+        </a:xfrm>
+      </p:grpSpPr>
+      <p:sp>
+        <p:nvSpPr>
+          <p:cNvPr id="3" name="Content Placeholder 2">
+            <a:extLst>
+              <a:ext uri="{FF2B5EF4-FFF2-40B4-BE49-F238E27FC236}">
+                <a16:creationId xmlns:a16="http://schemas.microsoft.com/office/drawing/2014/main" id="{9D65A955-1F7A-FEF3-3FE1-AFC83BC7A3FD}"/>
+              </a:ext>
+            </a:extLst>
+          </p:cNvPr>
+          <p:cNvSpPr>
+            <a:spLocks noGrp="1"/>
+          </p:cNvSpPr>
+          <p:nvPr>
+            <p:ph idx="1"/>
+          </p:nvPr>
+        </p:nvSpPr>
+        <p:spPr>
+          <a:xfrm>
+            <a:off x="777240" y="696686"/>
+            <a:ext cx="10659110" cy="5480277"/>
+          </a:xfrm>
+        </p:spPr>
+        <p:txBody>
+          <a:bodyPr>
+            <a:normAutofit/>
+          </a:bodyPr>
+          <a:lstStyle/>
+          <a:p>
+            <a:pPr marL="0" indent="0">
+              <a:buNone/>
+            </a:pPr>
+            <a:endParaRPr lang="en-IN" sz="2400" dirty="0"/>
+          </a:p>
+        </p:txBody>
+      </p:sp>
+    </p:spTree>
+    <p:extLst>
+      <p:ext uri="{BB962C8B-B14F-4D97-AF65-F5344CB8AC3E}">
+        <p14:creationId xmlns:p14="http://schemas.microsoft.com/office/powerpoint/2010/main" val="4180232431"/>
+      </p:ext>
+    </p:extLst>
+  </p:cSld>
+  <p:clrMapOvr>
+    <a:masterClrMapping/>
+  </p:clrMapOvr>
+</p:sld>
+</file>
+
+<file path=ppt/slides/slide64.xml><?xml version="1.0" encoding="utf-8"?>
+<p:sld xmlns:a="http://schemas.openxmlformats.org/drawingml/2006/main" xmlns:r="http://schemas.openxmlformats.org/officeDocument/2006/relationships" xmlns:p="http://schemas.openxmlformats.org/presentationml/2006/main">
+  <p:cSld>
+    <p:spTree>
+      <p:nvGrpSpPr>
+        <p:cNvPr id="1" name="">
+          <a:extLst>
+            <a:ext uri="{FF2B5EF4-FFF2-40B4-BE49-F238E27FC236}">
+              <a16:creationId xmlns:a16="http://schemas.microsoft.com/office/drawing/2014/main" id="{11D49BA2-BC89-C17F-266A-4F25C53574A5}"/>
+            </a:ext>
+          </a:extLst>
+        </p:cNvPr>
+        <p:cNvGrpSpPr/>
+        <p:nvPr/>
+      </p:nvGrpSpPr>
+      <p:grpSpPr>
+        <a:xfrm>
+          <a:off x="0" y="0"/>
+          <a:ext cx="0" cy="0"/>
+          <a:chOff x="0" y="0"/>
+          <a:chExt cx="0" cy="0"/>
+        </a:xfrm>
+      </p:grpSpPr>
+      <p:sp>
+        <p:nvSpPr>
+          <p:cNvPr id="3" name="Content Placeholder 2">
+            <a:extLst>
+              <a:ext uri="{FF2B5EF4-FFF2-40B4-BE49-F238E27FC236}">
+                <a16:creationId xmlns:a16="http://schemas.microsoft.com/office/drawing/2014/main" id="{80A9459F-9908-EC24-3C88-885CB2B6AA71}"/>
+              </a:ext>
+            </a:extLst>
+          </p:cNvPr>
+          <p:cNvSpPr>
+            <a:spLocks noGrp="1"/>
+          </p:cNvSpPr>
+          <p:nvPr>
+            <p:ph idx="1"/>
+          </p:nvPr>
+        </p:nvSpPr>
+        <p:spPr>
+          <a:xfrm>
+            <a:off x="777240" y="696686"/>
+            <a:ext cx="10659110" cy="5480277"/>
+          </a:xfrm>
+        </p:spPr>
+        <p:txBody>
+          <a:bodyPr>
+            <a:normAutofit/>
+          </a:bodyPr>
+          <a:lstStyle/>
+          <a:p>
+            <a:pPr marL="0" indent="0">
+              <a:buNone/>
+            </a:pPr>
+            <a:endParaRPr lang="en-IN" sz="2400" dirty="0"/>
+          </a:p>
+        </p:txBody>
+      </p:sp>
+    </p:spTree>
+    <p:extLst>
+      <p:ext uri="{BB962C8B-B14F-4D97-AF65-F5344CB8AC3E}">
+        <p14:creationId xmlns:p14="http://schemas.microsoft.com/office/powerpoint/2010/main" val="1011538819"/>
+      </p:ext>
+    </p:extLst>
+  </p:cSld>
+  <p:clrMapOvr>
+    <a:masterClrMapping/>
+  </p:clrMapOvr>
+</p:sld>
+</file>
+
+<file path=ppt/slides/slide65.xml><?xml version="1.0" encoding="utf-8"?>
+<p:sld xmlns:a="http://schemas.openxmlformats.org/drawingml/2006/main" xmlns:r="http://schemas.openxmlformats.org/officeDocument/2006/relationships" xmlns:p="http://schemas.openxmlformats.org/presentationml/2006/main">
+  <p:cSld>
+    <p:spTree>
+      <p:nvGrpSpPr>
+        <p:cNvPr id="1" name="">
+          <a:extLst>
+            <a:ext uri="{FF2B5EF4-FFF2-40B4-BE49-F238E27FC236}">
+              <a16:creationId xmlns:a16="http://schemas.microsoft.com/office/drawing/2014/main" id="{E6F2BF70-0222-7D2A-403B-E8E7C95493AF}"/>
+            </a:ext>
+          </a:extLst>
+        </p:cNvPr>
+        <p:cNvGrpSpPr/>
+        <p:nvPr/>
+      </p:nvGrpSpPr>
+      <p:grpSpPr>
+        <a:xfrm>
+          <a:off x="0" y="0"/>
+          <a:ext cx="0" cy="0"/>
+          <a:chOff x="0" y="0"/>
+          <a:chExt cx="0" cy="0"/>
+        </a:xfrm>
+      </p:grpSpPr>
+      <p:sp>
+        <p:nvSpPr>
+          <p:cNvPr id="3" name="Content Placeholder 2">
+            <a:extLst>
+              <a:ext uri="{FF2B5EF4-FFF2-40B4-BE49-F238E27FC236}">
+                <a16:creationId xmlns:a16="http://schemas.microsoft.com/office/drawing/2014/main" id="{7FEFD233-4602-2FCC-A5D0-4B73E0D4B544}"/>
+              </a:ext>
+            </a:extLst>
+          </p:cNvPr>
+          <p:cNvSpPr>
+            <a:spLocks noGrp="1"/>
+          </p:cNvSpPr>
+          <p:nvPr>
+            <p:ph idx="1"/>
+          </p:nvPr>
+        </p:nvSpPr>
+        <p:spPr>
+          <a:xfrm>
+            <a:off x="777240" y="696686"/>
+            <a:ext cx="10659110" cy="5480277"/>
+          </a:xfrm>
+        </p:spPr>
+        <p:txBody>
+          <a:bodyPr>
+            <a:normAutofit/>
+          </a:bodyPr>
+          <a:lstStyle/>
+          <a:p>
+            <a:pPr marL="0" indent="0">
+              <a:buNone/>
+            </a:pPr>
+            <a:endParaRPr lang="en-IN" sz="2400" dirty="0"/>
+          </a:p>
+        </p:txBody>
+      </p:sp>
+    </p:spTree>
+    <p:extLst>
+      <p:ext uri="{BB962C8B-B14F-4D97-AF65-F5344CB8AC3E}">
+        <p14:creationId xmlns:p14="http://schemas.microsoft.com/office/powerpoint/2010/main" val="2823372722"/>
+      </p:ext>
+    </p:extLst>
+  </p:cSld>
+  <p:clrMapOvr>
+    <a:masterClrMapping/>
+  </p:clrMapOvr>
+</p:sld>
+</file>
+
+<file path=ppt/slides/slide66.xml><?xml version="1.0" encoding="utf-8"?>
+<p:sld xmlns:a="http://schemas.openxmlformats.org/drawingml/2006/main" xmlns:r="http://schemas.openxmlformats.org/officeDocument/2006/relationships" xmlns:p="http://schemas.openxmlformats.org/presentationml/2006/main">
+  <p:cSld>
+    <p:spTree>
+      <p:nvGrpSpPr>
+        <p:cNvPr id="1" name="">
+          <a:extLst>
+            <a:ext uri="{FF2B5EF4-FFF2-40B4-BE49-F238E27FC236}">
+              <a16:creationId xmlns:a16="http://schemas.microsoft.com/office/drawing/2014/main" id="{7D3FD299-99A3-7A8B-8AF5-EC887096DE06}"/>
+            </a:ext>
+          </a:extLst>
+        </p:cNvPr>
+        <p:cNvGrpSpPr/>
+        <p:nvPr/>
+      </p:nvGrpSpPr>
+      <p:grpSpPr>
+        <a:xfrm>
+          <a:off x="0" y="0"/>
+          <a:ext cx="0" cy="0"/>
+          <a:chOff x="0" y="0"/>
+          <a:chExt cx="0" cy="0"/>
+        </a:xfrm>
+      </p:grpSpPr>
+      <p:sp>
+        <p:nvSpPr>
+          <p:cNvPr id="3" name="Content Placeholder 2">
+            <a:extLst>
+              <a:ext uri="{FF2B5EF4-FFF2-40B4-BE49-F238E27FC236}">
+                <a16:creationId xmlns:a16="http://schemas.microsoft.com/office/drawing/2014/main" id="{54B23A25-8439-9012-C5D6-59ADDCE56641}"/>
+              </a:ext>
+            </a:extLst>
+          </p:cNvPr>
+          <p:cNvSpPr>
+            <a:spLocks noGrp="1"/>
+          </p:cNvSpPr>
+          <p:nvPr>
+            <p:ph idx="1"/>
+          </p:nvPr>
+        </p:nvSpPr>
+        <p:spPr>
+          <a:xfrm>
+            <a:off x="777240" y="696686"/>
+            <a:ext cx="10659110" cy="5480277"/>
+          </a:xfrm>
+        </p:spPr>
+        <p:txBody>
+          <a:bodyPr>
+            <a:normAutofit/>
+          </a:bodyPr>
+          <a:lstStyle/>
+          <a:p>
+            <a:pPr marL="0" indent="0">
+              <a:buNone/>
+            </a:pPr>
+            <a:endParaRPr lang="en-IN" sz="2400" dirty="0"/>
+          </a:p>
+        </p:txBody>
+      </p:sp>
+    </p:spTree>
+    <p:extLst>
+      <p:ext uri="{BB962C8B-B14F-4D97-AF65-F5344CB8AC3E}">
+        <p14:creationId xmlns:p14="http://schemas.microsoft.com/office/powerpoint/2010/main" val="2801866386"/>
       </p:ext>
     </p:extLst>
   </p:cSld>

--- a/FastAPI/FastAPI- Intermediate.pptx
+++ b/FastAPI/FastAPI- Intermediate.pptx
@@ -5,7 +5,7 @@
     <p:sldMasterId id="2147483710" r:id="rId1"/>
   </p:sldMasterIdLst>
   <p:notesMasterIdLst>
-    <p:notesMasterId r:id="rId68"/>
+    <p:notesMasterId r:id="rId69"/>
   </p:notesMasterIdLst>
   <p:sldIdLst>
     <p:sldId id="531" r:id="rId2"/>
@@ -57,23 +57,24 @@
     <p:sldId id="569" r:id="rId48"/>
     <p:sldId id="570" r:id="rId49"/>
     <p:sldId id="571" r:id="rId50"/>
-    <p:sldId id="572" r:id="rId51"/>
-    <p:sldId id="573" r:id="rId52"/>
-    <p:sldId id="575" r:id="rId53"/>
-    <p:sldId id="576" r:id="rId54"/>
-    <p:sldId id="577" r:id="rId55"/>
-    <p:sldId id="578" r:id="rId56"/>
-    <p:sldId id="579" r:id="rId57"/>
-    <p:sldId id="580" r:id="rId58"/>
-    <p:sldId id="581" r:id="rId59"/>
-    <p:sldId id="582" r:id="rId60"/>
-    <p:sldId id="583" r:id="rId61"/>
-    <p:sldId id="584" r:id="rId62"/>
-    <p:sldId id="585" r:id="rId63"/>
-    <p:sldId id="586" r:id="rId64"/>
-    <p:sldId id="587" r:id="rId65"/>
-    <p:sldId id="588" r:id="rId66"/>
-    <p:sldId id="589" r:id="rId67"/>
+    <p:sldId id="590" r:id="rId51"/>
+    <p:sldId id="572" r:id="rId52"/>
+    <p:sldId id="573" r:id="rId53"/>
+    <p:sldId id="575" r:id="rId54"/>
+    <p:sldId id="576" r:id="rId55"/>
+    <p:sldId id="577" r:id="rId56"/>
+    <p:sldId id="578" r:id="rId57"/>
+    <p:sldId id="579" r:id="rId58"/>
+    <p:sldId id="580" r:id="rId59"/>
+    <p:sldId id="581" r:id="rId60"/>
+    <p:sldId id="582" r:id="rId61"/>
+    <p:sldId id="583" r:id="rId62"/>
+    <p:sldId id="584" r:id="rId63"/>
+    <p:sldId id="585" r:id="rId64"/>
+    <p:sldId id="586" r:id="rId65"/>
+    <p:sldId id="587" r:id="rId66"/>
+    <p:sldId id="588" r:id="rId67"/>
+    <p:sldId id="589" r:id="rId68"/>
   </p:sldIdLst>
   <p:sldSz cx="12192000" cy="6858000"/>
   <p:notesSz cx="6858000" cy="9144000"/>
@@ -16137,6 +16138,71 @@
   <p:cSld>
     <p:spTree>
       <p:nvGrpSpPr>
+        <p:cNvPr id="1" name=""/>
+        <p:cNvGrpSpPr/>
+        <p:nvPr/>
+      </p:nvGrpSpPr>
+      <p:grpSpPr>
+        <a:xfrm>
+          <a:off x="0" y="0"/>
+          <a:ext cx="0" cy="0"/>
+          <a:chOff x="0" y="0"/>
+          <a:chExt cx="0" cy="0"/>
+        </a:xfrm>
+      </p:grpSpPr>
+      <p:sp>
+        <p:nvSpPr>
+          <p:cNvPr id="3" name="Content Placeholder 2">
+            <a:extLst>
+              <a:ext uri="{FF2B5EF4-FFF2-40B4-BE49-F238E27FC236}">
+                <a16:creationId xmlns:a16="http://schemas.microsoft.com/office/drawing/2014/main" id="{44B789C9-A128-880C-335C-3307097B5F25}"/>
+              </a:ext>
+            </a:extLst>
+          </p:cNvPr>
+          <p:cNvSpPr>
+            <a:spLocks noGrp="1"/>
+          </p:cNvSpPr>
+          <p:nvPr>
+            <p:ph idx="1"/>
+          </p:nvPr>
+        </p:nvSpPr>
+        <p:spPr>
+          <a:xfrm>
+            <a:off x="777240" y="849086"/>
+            <a:ext cx="10659110" cy="5327877"/>
+          </a:xfrm>
+        </p:spPr>
+        <p:txBody>
+          <a:bodyPr>
+            <a:normAutofit/>
+          </a:bodyPr>
+          <a:lstStyle/>
+          <a:p>
+            <a:pPr marL="0" indent="0">
+              <a:buNone/>
+            </a:pPr>
+            <a:endParaRPr lang="en-IN" sz="2400" dirty="0"/>
+          </a:p>
+        </p:txBody>
+      </p:sp>
+    </p:spTree>
+    <p:extLst>
+      <p:ext uri="{BB962C8B-B14F-4D97-AF65-F5344CB8AC3E}">
+        <p14:creationId xmlns:p14="http://schemas.microsoft.com/office/powerpoint/2010/main" val="3213493846"/>
+      </p:ext>
+    </p:extLst>
+  </p:cSld>
+  <p:clrMapOvr>
+    <a:masterClrMapping/>
+  </p:clrMapOvr>
+</p:sld>
+</file>
+
+<file path=ppt/slides/slide51.xml><?xml version="1.0" encoding="utf-8"?>
+<p:sld xmlns:a="http://schemas.openxmlformats.org/drawingml/2006/main" xmlns:r="http://schemas.openxmlformats.org/officeDocument/2006/relationships" xmlns:p="http://schemas.openxmlformats.org/presentationml/2006/main">
+  <p:cSld>
+    <p:spTree>
+      <p:nvGrpSpPr>
         <p:cNvPr id="1" name="">
           <a:extLst>
             <a:ext uri="{FF2B5EF4-FFF2-40B4-BE49-F238E27FC236}">
@@ -17232,7 +17298,7 @@
 </p:sld>
 </file>
 
-<file path=ppt/slides/slide51.xml><?xml version="1.0" encoding="utf-8"?>
+<file path=ppt/slides/slide52.xml><?xml version="1.0" encoding="utf-8"?>
 <p:sld xmlns:a="http://schemas.openxmlformats.org/drawingml/2006/main" xmlns:r="http://schemas.openxmlformats.org/officeDocument/2006/relationships" xmlns:p="http://schemas.openxmlformats.org/presentationml/2006/main">
   <p:cSld>
     <p:spTree>
@@ -17428,7 +17494,7 @@
 </p:sld>
 </file>
 
-<file path=ppt/slides/slide52.xml><?xml version="1.0" encoding="utf-8"?>
+<file path=ppt/slides/slide53.xml><?xml version="1.0" encoding="utf-8"?>
 <p:sld xmlns:a="http://schemas.openxmlformats.org/drawingml/2006/main" xmlns:r="http://schemas.openxmlformats.org/officeDocument/2006/relationships" xmlns:p="http://schemas.openxmlformats.org/presentationml/2006/main">
   <p:cSld>
     <p:spTree>
@@ -18080,7 +18146,7 @@
 </p:sld>
 </file>
 
-<file path=ppt/slides/slide53.xml><?xml version="1.0" encoding="utf-8"?>
+<file path=ppt/slides/slide54.xml><?xml version="1.0" encoding="utf-8"?>
 <p:sld xmlns:a="http://schemas.openxmlformats.org/drawingml/2006/main" xmlns:r="http://schemas.openxmlformats.org/officeDocument/2006/relationships" xmlns:p="http://schemas.openxmlformats.org/presentationml/2006/main">
   <p:cSld>
     <p:spTree>
@@ -18317,7 +18383,7 @@
 </p:sld>
 </file>
 
-<file path=ppt/slides/slide54.xml><?xml version="1.0" encoding="utf-8"?>
+<file path=ppt/slides/slide55.xml><?xml version="1.0" encoding="utf-8"?>
 <p:sld xmlns:a="http://schemas.openxmlformats.org/drawingml/2006/main" xmlns:r="http://schemas.openxmlformats.org/officeDocument/2006/relationships" xmlns:p="http://schemas.openxmlformats.org/presentationml/2006/main">
   <p:cSld>
     <p:spTree>
@@ -18806,7 +18872,7 @@
 </p:sld>
 </file>
 
-<file path=ppt/slides/slide55.xml><?xml version="1.0" encoding="utf-8"?>
+<file path=ppt/slides/slide56.xml><?xml version="1.0" encoding="utf-8"?>
 <p:sld xmlns:a="http://schemas.openxmlformats.org/drawingml/2006/main" xmlns:r="http://schemas.openxmlformats.org/officeDocument/2006/relationships" xmlns:p="http://schemas.openxmlformats.org/presentationml/2006/main">
   <p:cSld>
     <p:spTree>
@@ -19039,7 +19105,7 @@
 </p:sld>
 </file>
 
-<file path=ppt/slides/slide56.xml><?xml version="1.0" encoding="utf-8"?>
+<file path=ppt/slides/slide57.xml><?xml version="1.0" encoding="utf-8"?>
 <p:sld xmlns:a="http://schemas.openxmlformats.org/drawingml/2006/main" xmlns:r="http://schemas.openxmlformats.org/officeDocument/2006/relationships" xmlns:p="http://schemas.openxmlformats.org/presentationml/2006/main">
   <p:cSld>
     <p:spTree>
@@ -19153,7 +19219,7 @@
 </p:sld>
 </file>
 
-<file path=ppt/slides/slide57.xml><?xml version="1.0" encoding="utf-8"?>
+<file path=ppt/slides/slide58.xml><?xml version="1.0" encoding="utf-8"?>
 <p:sld xmlns:a="http://schemas.openxmlformats.org/drawingml/2006/main" xmlns:r="http://schemas.openxmlformats.org/officeDocument/2006/relationships" xmlns:p="http://schemas.openxmlformats.org/presentationml/2006/main">
   <p:cSld>
     <p:spTree>
@@ -19308,7 +19374,7 @@
 </p:sld>
 </file>
 
-<file path=ppt/slides/slide58.xml><?xml version="1.0" encoding="utf-8"?>
+<file path=ppt/slides/slide59.xml><?xml version="1.0" encoding="utf-8"?>
 <p:sld xmlns:a="http://schemas.openxmlformats.org/drawingml/2006/main" xmlns:r="http://schemas.openxmlformats.org/officeDocument/2006/relationships" xmlns:p="http://schemas.openxmlformats.org/presentationml/2006/main">
   <p:cSld>
     <p:spTree>
@@ -19421,131 +19487,6 @@
     <p:extLst>
       <p:ext uri="{BB962C8B-B14F-4D97-AF65-F5344CB8AC3E}">
         <p14:creationId xmlns:p14="http://schemas.microsoft.com/office/powerpoint/2010/main" val="2779355306"/>
-      </p:ext>
-    </p:extLst>
-  </p:cSld>
-  <p:clrMapOvr>
-    <a:masterClrMapping/>
-  </p:clrMapOvr>
-</p:sld>
-</file>
-
-<file path=ppt/slides/slide59.xml><?xml version="1.0" encoding="utf-8"?>
-<p:sld xmlns:a="http://schemas.openxmlformats.org/drawingml/2006/main" xmlns:r="http://schemas.openxmlformats.org/officeDocument/2006/relationships" xmlns:p="http://schemas.openxmlformats.org/presentationml/2006/main">
-  <p:cSld>
-    <p:spTree>
-      <p:nvGrpSpPr>
-        <p:cNvPr id="1" name="">
-          <a:extLst>
-            <a:ext uri="{FF2B5EF4-FFF2-40B4-BE49-F238E27FC236}">
-              <a16:creationId xmlns:a16="http://schemas.microsoft.com/office/drawing/2014/main" id="{FFD6EED2-A3BB-B01D-74E3-F3E59700FB52}"/>
-            </a:ext>
-          </a:extLst>
-        </p:cNvPr>
-        <p:cNvGrpSpPr/>
-        <p:nvPr/>
-      </p:nvGrpSpPr>
-      <p:grpSpPr>
-        <a:xfrm>
-          <a:off x="0" y="0"/>
-          <a:ext cx="0" cy="0"/>
-          <a:chOff x="0" y="0"/>
-          <a:chExt cx="0" cy="0"/>
-        </a:xfrm>
-      </p:grpSpPr>
-      <p:sp>
-        <p:nvSpPr>
-          <p:cNvPr id="3" name="Content Placeholder 2">
-            <a:extLst>
-              <a:ext uri="{FF2B5EF4-FFF2-40B4-BE49-F238E27FC236}">
-                <a16:creationId xmlns:a16="http://schemas.microsoft.com/office/drawing/2014/main" id="{F078D154-D5E2-6D6C-49CD-F890F93EBC1A}"/>
-              </a:ext>
-            </a:extLst>
-          </p:cNvPr>
-          <p:cNvSpPr>
-            <a:spLocks noGrp="1"/>
-          </p:cNvSpPr>
-          <p:nvPr>
-            <p:ph idx="1"/>
-          </p:nvPr>
-        </p:nvSpPr>
-        <p:spPr>
-          <a:xfrm>
-            <a:off x="777240" y="696686"/>
-            <a:ext cx="10659110" cy="5480277"/>
-          </a:xfrm>
-        </p:spPr>
-        <p:txBody>
-          <a:bodyPr>
-            <a:normAutofit/>
-          </a:bodyPr>
-          <a:lstStyle/>
-          <a:p>
-            <a:pPr marL="0" indent="0">
-              <a:buNone/>
-            </a:pPr>
-            <a:r>
-              <a:rPr lang="en-US" sz="2400" b="1" dirty="0"/>
-              <a:t>Step 5: </a:t>
-            </a:r>
-            <a:r>
-              <a:rPr lang="en-US" sz="2400" dirty="0"/>
-              <a:t>Opens a </a:t>
-            </a:r>
-            <a:r>
-              <a:rPr lang="en-US" sz="2400" b="1" dirty="0"/>
-              <a:t>database session</a:t>
-            </a:r>
-            <a:r>
-              <a:rPr lang="en-US" sz="2400" dirty="0"/>
-              <a:t>, and do the </a:t>
-            </a:r>
-            <a:r>
-              <a:rPr lang="en-US" sz="2400" b="1" dirty="0"/>
-              <a:t>CRUD</a:t>
-            </a:r>
-            <a:r>
-              <a:rPr lang="en-US" sz="2400" dirty="0"/>
-              <a:t> Operation</a:t>
-            </a:r>
-            <a:endParaRPr lang="en-IN" sz="2400" dirty="0"/>
-          </a:p>
-        </p:txBody>
-      </p:sp>
-      <p:pic>
-        <p:nvPicPr>
-          <p:cNvPr id="4" name="Picture 3">
-            <a:extLst>
-              <a:ext uri="{FF2B5EF4-FFF2-40B4-BE49-F238E27FC236}">
-                <a16:creationId xmlns:a16="http://schemas.microsoft.com/office/drawing/2014/main" id="{63DE8399-64B9-8195-1182-0EB3C2091634}"/>
-              </a:ext>
-            </a:extLst>
-          </p:cNvPr>
-          <p:cNvPicPr>
-            <a:picLocks noChangeAspect="1"/>
-          </p:cNvPicPr>
-          <p:nvPr/>
-        </p:nvPicPr>
-        <p:blipFill>
-          <a:blip r:embed="rId2"/>
-          <a:stretch>
-            <a:fillRect/>
-          </a:stretch>
-        </p:blipFill>
-        <p:spPr>
-          <a:xfrm>
-            <a:off x="755650" y="1304544"/>
-            <a:ext cx="10472057" cy="4565817"/>
-          </a:xfrm>
-          <a:prstGeom prst="rect">
-            <a:avLst/>
-          </a:prstGeom>
-        </p:spPr>
-      </p:pic>
-    </p:spTree>
-    <p:extLst>
-      <p:ext uri="{BB962C8B-B14F-4D97-AF65-F5344CB8AC3E}">
-        <p14:creationId xmlns:p14="http://schemas.microsoft.com/office/powerpoint/2010/main" val="1341148807"/>
       </p:ext>
     </p:extLst>
   </p:cSld>
@@ -19714,6 +19655,131 @@
         <p:cNvPr id="1" name="">
           <a:extLst>
             <a:ext uri="{FF2B5EF4-FFF2-40B4-BE49-F238E27FC236}">
+              <a16:creationId xmlns:a16="http://schemas.microsoft.com/office/drawing/2014/main" id="{FFD6EED2-A3BB-B01D-74E3-F3E59700FB52}"/>
+            </a:ext>
+          </a:extLst>
+        </p:cNvPr>
+        <p:cNvGrpSpPr/>
+        <p:nvPr/>
+      </p:nvGrpSpPr>
+      <p:grpSpPr>
+        <a:xfrm>
+          <a:off x="0" y="0"/>
+          <a:ext cx="0" cy="0"/>
+          <a:chOff x="0" y="0"/>
+          <a:chExt cx="0" cy="0"/>
+        </a:xfrm>
+      </p:grpSpPr>
+      <p:sp>
+        <p:nvSpPr>
+          <p:cNvPr id="3" name="Content Placeholder 2">
+            <a:extLst>
+              <a:ext uri="{FF2B5EF4-FFF2-40B4-BE49-F238E27FC236}">
+                <a16:creationId xmlns:a16="http://schemas.microsoft.com/office/drawing/2014/main" id="{F078D154-D5E2-6D6C-49CD-F890F93EBC1A}"/>
+              </a:ext>
+            </a:extLst>
+          </p:cNvPr>
+          <p:cNvSpPr>
+            <a:spLocks noGrp="1"/>
+          </p:cNvSpPr>
+          <p:nvPr>
+            <p:ph idx="1"/>
+          </p:nvPr>
+        </p:nvSpPr>
+        <p:spPr>
+          <a:xfrm>
+            <a:off x="777240" y="696686"/>
+            <a:ext cx="10659110" cy="5480277"/>
+          </a:xfrm>
+        </p:spPr>
+        <p:txBody>
+          <a:bodyPr>
+            <a:normAutofit/>
+          </a:bodyPr>
+          <a:lstStyle/>
+          <a:p>
+            <a:pPr marL="0" indent="0">
+              <a:buNone/>
+            </a:pPr>
+            <a:r>
+              <a:rPr lang="en-US" sz="2400" b="1" dirty="0"/>
+              <a:t>Step 5: </a:t>
+            </a:r>
+            <a:r>
+              <a:rPr lang="en-US" sz="2400" dirty="0"/>
+              <a:t>Opens a </a:t>
+            </a:r>
+            <a:r>
+              <a:rPr lang="en-US" sz="2400" b="1" dirty="0"/>
+              <a:t>database session</a:t>
+            </a:r>
+            <a:r>
+              <a:rPr lang="en-US" sz="2400" dirty="0"/>
+              <a:t>, and do the </a:t>
+            </a:r>
+            <a:r>
+              <a:rPr lang="en-US" sz="2400" b="1" dirty="0"/>
+              <a:t>CRUD</a:t>
+            </a:r>
+            <a:r>
+              <a:rPr lang="en-US" sz="2400" dirty="0"/>
+              <a:t> Operation</a:t>
+            </a:r>
+            <a:endParaRPr lang="en-IN" sz="2400" dirty="0"/>
+          </a:p>
+        </p:txBody>
+      </p:sp>
+      <p:pic>
+        <p:nvPicPr>
+          <p:cNvPr id="4" name="Picture 3">
+            <a:extLst>
+              <a:ext uri="{FF2B5EF4-FFF2-40B4-BE49-F238E27FC236}">
+                <a16:creationId xmlns:a16="http://schemas.microsoft.com/office/drawing/2014/main" id="{63DE8399-64B9-8195-1182-0EB3C2091634}"/>
+              </a:ext>
+            </a:extLst>
+          </p:cNvPr>
+          <p:cNvPicPr>
+            <a:picLocks noChangeAspect="1"/>
+          </p:cNvPicPr>
+          <p:nvPr/>
+        </p:nvPicPr>
+        <p:blipFill>
+          <a:blip r:embed="rId2"/>
+          <a:stretch>
+            <a:fillRect/>
+          </a:stretch>
+        </p:blipFill>
+        <p:spPr>
+          <a:xfrm>
+            <a:off x="755650" y="1304544"/>
+            <a:ext cx="10472057" cy="4565817"/>
+          </a:xfrm>
+          <a:prstGeom prst="rect">
+            <a:avLst/>
+          </a:prstGeom>
+        </p:spPr>
+      </p:pic>
+    </p:spTree>
+    <p:extLst>
+      <p:ext uri="{BB962C8B-B14F-4D97-AF65-F5344CB8AC3E}">
+        <p14:creationId xmlns:p14="http://schemas.microsoft.com/office/powerpoint/2010/main" val="1341148807"/>
+      </p:ext>
+    </p:extLst>
+  </p:cSld>
+  <p:clrMapOvr>
+    <a:masterClrMapping/>
+  </p:clrMapOvr>
+</p:sld>
+</file>
+
+<file path=ppt/slides/slide61.xml><?xml version="1.0" encoding="utf-8"?>
+<p:sld xmlns:a="http://schemas.openxmlformats.org/drawingml/2006/main" xmlns:r="http://schemas.openxmlformats.org/officeDocument/2006/relationships" xmlns:p="http://schemas.openxmlformats.org/presentationml/2006/main">
+  <p:cSld>
+    <p:spTree>
+      <p:nvGrpSpPr>
+        <p:cNvPr id="1" name="">
+          <a:extLst>
+            <a:ext uri="{FF2B5EF4-FFF2-40B4-BE49-F238E27FC236}">
               <a16:creationId xmlns:a16="http://schemas.microsoft.com/office/drawing/2014/main" id="{A31062E5-9979-AA23-0B3F-F62EE5E58C0B}"/>
             </a:ext>
           </a:extLst>
@@ -19817,7 +19883,7 @@
 </p:sld>
 </file>
 
-<file path=ppt/slides/slide61.xml><?xml version="1.0" encoding="utf-8"?>
+<file path=ppt/slides/slide62.xml><?xml version="1.0" encoding="utf-8"?>
 <p:sld xmlns:a="http://schemas.openxmlformats.org/drawingml/2006/main" xmlns:r="http://schemas.openxmlformats.org/officeDocument/2006/relationships" xmlns:p="http://schemas.openxmlformats.org/presentationml/2006/main">
   <p:cSld>
     <p:spTree>
@@ -19888,7 +19954,7 @@
 </p:sld>
 </file>
 
-<file path=ppt/slides/slide62.xml><?xml version="1.0" encoding="utf-8"?>
+<file path=ppt/slides/slide63.xml><?xml version="1.0" encoding="utf-8"?>
 <p:sld xmlns:a="http://schemas.openxmlformats.org/drawingml/2006/main" xmlns:r="http://schemas.openxmlformats.org/officeDocument/2006/relationships" xmlns:p="http://schemas.openxmlformats.org/presentationml/2006/main">
   <p:cSld>
     <p:spTree>
@@ -19959,7 +20025,7 @@
 </p:sld>
 </file>
 
-<file path=ppt/slides/slide63.xml><?xml version="1.0" encoding="utf-8"?>
+<file path=ppt/slides/slide64.xml><?xml version="1.0" encoding="utf-8"?>
 <p:sld xmlns:a="http://schemas.openxmlformats.org/drawingml/2006/main" xmlns:r="http://schemas.openxmlformats.org/officeDocument/2006/relationships" xmlns:p="http://schemas.openxmlformats.org/presentationml/2006/main">
   <p:cSld>
     <p:spTree>
@@ -20030,7 +20096,7 @@
 </p:sld>
 </file>
 
-<file path=ppt/slides/slide64.xml><?xml version="1.0" encoding="utf-8"?>
+<file path=ppt/slides/slide65.xml><?xml version="1.0" encoding="utf-8"?>
 <p:sld xmlns:a="http://schemas.openxmlformats.org/drawingml/2006/main" xmlns:r="http://schemas.openxmlformats.org/officeDocument/2006/relationships" xmlns:p="http://schemas.openxmlformats.org/presentationml/2006/main">
   <p:cSld>
     <p:spTree>
@@ -20101,7 +20167,7 @@
 </p:sld>
 </file>
 
-<file path=ppt/slides/slide65.xml><?xml version="1.0" encoding="utf-8"?>
+<file path=ppt/slides/slide66.xml><?xml version="1.0" encoding="utf-8"?>
 <p:sld xmlns:a="http://schemas.openxmlformats.org/drawingml/2006/main" xmlns:r="http://schemas.openxmlformats.org/officeDocument/2006/relationships" xmlns:p="http://schemas.openxmlformats.org/presentationml/2006/main">
   <p:cSld>
     <p:spTree>
@@ -20172,7 +20238,7 @@
 </p:sld>
 </file>
 
-<file path=ppt/slides/slide66.xml><?xml version="1.0" encoding="utf-8"?>
+<file path=ppt/slides/slide67.xml><?xml version="1.0" encoding="utf-8"?>
 <p:sld xmlns:a="http://schemas.openxmlformats.org/drawingml/2006/main" xmlns:r="http://schemas.openxmlformats.org/officeDocument/2006/relationships" xmlns:p="http://schemas.openxmlformats.org/presentationml/2006/main">
   <p:cSld>
     <p:spTree>

--- a/FastAPI/FastAPI- Intermediate.pptx
+++ b/FastAPI/FastAPI- Intermediate.pptx
@@ -5,7 +5,7 @@
     <p:sldMasterId id="2147483710" r:id="rId1"/>
   </p:sldMasterIdLst>
   <p:notesMasterIdLst>
-    <p:notesMasterId r:id="rId69"/>
+    <p:notesMasterId r:id="rId79"/>
   </p:notesMasterIdLst>
   <p:sldIdLst>
     <p:sldId id="531" r:id="rId2"/>
@@ -31,50 +31,60 @@
     <p:sldId id="538" r:id="rId22"/>
     <p:sldId id="539" r:id="rId23"/>
     <p:sldId id="540" r:id="rId24"/>
-    <p:sldId id="545" r:id="rId25"/>
-    <p:sldId id="546" r:id="rId26"/>
-    <p:sldId id="547" r:id="rId27"/>
-    <p:sldId id="549" r:id="rId28"/>
-    <p:sldId id="550" r:id="rId29"/>
-    <p:sldId id="551" r:id="rId30"/>
-    <p:sldId id="552" r:id="rId31"/>
-    <p:sldId id="553" r:id="rId32"/>
-    <p:sldId id="548" r:id="rId33"/>
-    <p:sldId id="554" r:id="rId34"/>
-    <p:sldId id="556" r:id="rId35"/>
-    <p:sldId id="557" r:id="rId36"/>
-    <p:sldId id="558" r:id="rId37"/>
-    <p:sldId id="559" r:id="rId38"/>
-    <p:sldId id="560" r:id="rId39"/>
-    <p:sldId id="561" r:id="rId40"/>
-    <p:sldId id="562" r:id="rId41"/>
-    <p:sldId id="564" r:id="rId42"/>
-    <p:sldId id="563" r:id="rId43"/>
-    <p:sldId id="565" r:id="rId44"/>
-    <p:sldId id="567" r:id="rId45"/>
-    <p:sldId id="568" r:id="rId46"/>
-    <p:sldId id="566" r:id="rId47"/>
-    <p:sldId id="569" r:id="rId48"/>
-    <p:sldId id="570" r:id="rId49"/>
-    <p:sldId id="571" r:id="rId50"/>
-    <p:sldId id="590" r:id="rId51"/>
-    <p:sldId id="572" r:id="rId52"/>
-    <p:sldId id="573" r:id="rId53"/>
-    <p:sldId id="575" r:id="rId54"/>
-    <p:sldId id="576" r:id="rId55"/>
-    <p:sldId id="577" r:id="rId56"/>
-    <p:sldId id="578" r:id="rId57"/>
-    <p:sldId id="579" r:id="rId58"/>
-    <p:sldId id="580" r:id="rId59"/>
-    <p:sldId id="581" r:id="rId60"/>
-    <p:sldId id="582" r:id="rId61"/>
-    <p:sldId id="583" r:id="rId62"/>
-    <p:sldId id="584" r:id="rId63"/>
-    <p:sldId id="585" r:id="rId64"/>
-    <p:sldId id="586" r:id="rId65"/>
-    <p:sldId id="587" r:id="rId66"/>
-    <p:sldId id="588" r:id="rId67"/>
-    <p:sldId id="589" r:id="rId68"/>
+    <p:sldId id="600" r:id="rId25"/>
+    <p:sldId id="545" r:id="rId26"/>
+    <p:sldId id="546" r:id="rId27"/>
+    <p:sldId id="547" r:id="rId28"/>
+    <p:sldId id="549" r:id="rId29"/>
+    <p:sldId id="550" r:id="rId30"/>
+    <p:sldId id="551" r:id="rId31"/>
+    <p:sldId id="552" r:id="rId32"/>
+    <p:sldId id="553" r:id="rId33"/>
+    <p:sldId id="548" r:id="rId34"/>
+    <p:sldId id="554" r:id="rId35"/>
+    <p:sldId id="556" r:id="rId36"/>
+    <p:sldId id="557" r:id="rId37"/>
+    <p:sldId id="558" r:id="rId38"/>
+    <p:sldId id="559" r:id="rId39"/>
+    <p:sldId id="560" r:id="rId40"/>
+    <p:sldId id="561" r:id="rId41"/>
+    <p:sldId id="562" r:id="rId42"/>
+    <p:sldId id="564" r:id="rId43"/>
+    <p:sldId id="563" r:id="rId44"/>
+    <p:sldId id="565" r:id="rId45"/>
+    <p:sldId id="567" r:id="rId46"/>
+    <p:sldId id="568" r:id="rId47"/>
+    <p:sldId id="566" r:id="rId48"/>
+    <p:sldId id="569" r:id="rId49"/>
+    <p:sldId id="570" r:id="rId50"/>
+    <p:sldId id="571" r:id="rId51"/>
+    <p:sldId id="595" r:id="rId52"/>
+    <p:sldId id="592" r:id="rId53"/>
+    <p:sldId id="593" r:id="rId54"/>
+    <p:sldId id="594" r:id="rId55"/>
+    <p:sldId id="596" r:id="rId56"/>
+    <p:sldId id="597" r:id="rId57"/>
+    <p:sldId id="598" r:id="rId58"/>
+    <p:sldId id="599" r:id="rId59"/>
+    <p:sldId id="590" r:id="rId60"/>
+    <p:sldId id="591" r:id="rId61"/>
+    <p:sldId id="572" r:id="rId62"/>
+    <p:sldId id="573" r:id="rId63"/>
+    <p:sldId id="575" r:id="rId64"/>
+    <p:sldId id="576" r:id="rId65"/>
+    <p:sldId id="577" r:id="rId66"/>
+    <p:sldId id="578" r:id="rId67"/>
+    <p:sldId id="579" r:id="rId68"/>
+    <p:sldId id="580" r:id="rId69"/>
+    <p:sldId id="581" r:id="rId70"/>
+    <p:sldId id="582" r:id="rId71"/>
+    <p:sldId id="583" r:id="rId72"/>
+    <p:sldId id="584" r:id="rId73"/>
+    <p:sldId id="585" r:id="rId74"/>
+    <p:sldId id="586" r:id="rId75"/>
+    <p:sldId id="587" r:id="rId76"/>
+    <p:sldId id="588" r:id="rId77"/>
+    <p:sldId id="589" r:id="rId78"/>
   </p:sldIdLst>
   <p:sldSz cx="12192000" cy="6858000"/>
   <p:notesSz cx="6858000" cy="9144000"/>
@@ -184,7 +194,7 @@
 <file path=ppt/revisionInfo.xml><?xml version="1.0" encoding="utf-8"?>
 <p1510:revInfo xmlns:a="http://schemas.openxmlformats.org/drawingml/2006/main" xmlns:r="http://schemas.openxmlformats.org/officeDocument/2006/relationships" xmlns:p1510="http://schemas.microsoft.com/office/powerpoint/2015/10/main">
   <p1510:revLst>
-    <p1510:client id="{90A747A9-39C3-436E-A3AC-34027D23E8DE}" v="190" dt="2025-11-01T14:24:57.047"/>
+    <p1510:client id="{90A747A9-39C3-436E-A3AC-34027D23E8DE}" v="217" dt="2025-11-05T05:23:50.433"/>
   </p1510:revLst>
 </p1510:revInfo>
 </file>
@@ -192,168 +202,17 @@
 <file path=ppt/changesInfos/changesInfo1.xml><?xml version="1.0" encoding="utf-8"?>
 <pc:chgInfo xmlns:a="http://schemas.openxmlformats.org/drawingml/2006/main" xmlns:r="http://schemas.openxmlformats.org/officeDocument/2006/relationships" xmlns:ac="http://schemas.microsoft.com/office/drawing/2013/main/command" xmlns:pc="http://schemas.microsoft.com/office/powerpoint/2013/main/command">
   <pc:docChgLst>
-    <pc:chgData name="Pramod Naik" userId="ceb6df04-ef15-4d9b-a141-998a03559d75" providerId="ADAL" clId="{D1D4E302-CA95-476B-B320-79C7EBDE6899}"/>
-    <pc:docChg chg="undo custSel addSld delSld modSld">
-      <pc:chgData name="Pramod Naik" userId="ceb6df04-ef15-4d9b-a141-998a03559d75" providerId="ADAL" clId="{D1D4E302-CA95-476B-B320-79C7EBDE6899}" dt="2025-09-04T20:26:20.323" v="8" actId="47"/>
+    <pc:chgData name="Pramod Naik" userId="ceb6df04-ef15-4d9b-a141-998a03559d75" providerId="ADAL" clId="{62E9B5AE-779D-4001-92D3-8FF830A8A9C1}"/>
+    <pc:docChg chg="undo redo custSel addSld delSld modSld sldOrd">
+      <pc:chgData name="Pramod Naik" userId="ceb6df04-ef15-4d9b-a141-998a03559d75" providerId="ADAL" clId="{62E9B5AE-779D-4001-92D3-8FF830A8A9C1}" dt="2025-11-05T07:04:31.845" v="4354" actId="207"/>
       <pc:docMkLst>
         <pc:docMk/>
       </pc:docMkLst>
-      <pc:sldChg chg="modSp">
-        <pc:chgData name="Pramod Naik" userId="ceb6df04-ef15-4d9b-a141-998a03559d75" providerId="ADAL" clId="{D1D4E302-CA95-476B-B320-79C7EBDE6899}" dt="2025-09-04T20:26:07.698" v="4" actId="1036"/>
-        <pc:sldMkLst>
-          <pc:docMk/>
-          <pc:sldMk cId="3886295808" sldId="538"/>
-        </pc:sldMkLst>
-      </pc:sldChg>
-      <pc:sldChg chg="del">
-        <pc:chgData name="Pramod Naik" userId="ceb6df04-ef15-4d9b-a141-998a03559d75" providerId="ADAL" clId="{D1D4E302-CA95-476B-B320-79C7EBDE6899}" dt="2025-09-04T20:26:19.563" v="7" actId="47"/>
-        <pc:sldMkLst>
-          <pc:docMk/>
-          <pc:sldMk cId="2303070927" sldId="539"/>
-        </pc:sldMkLst>
-      </pc:sldChg>
-      <pc:sldChg chg="add del">
-        <pc:chgData name="Pramod Naik" userId="ceb6df04-ef15-4d9b-a141-998a03559d75" providerId="ADAL" clId="{D1D4E302-CA95-476B-B320-79C7EBDE6899}" dt="2025-09-04T20:26:20.323" v="8" actId="47"/>
-        <pc:sldMkLst>
-          <pc:docMk/>
-          <pc:sldMk cId="2173694948" sldId="540"/>
-        </pc:sldMkLst>
-      </pc:sldChg>
-    </pc:docChg>
-  </pc:docChgLst>
-  <pc:docChgLst>
-    <pc:chgData name="Pramod Naik" userId="ceb6df04-ef15-4d9b-a141-998a03559d75" providerId="ADAL" clId="{2BBA8E63-1F83-4096-B685-F0D4199669C1}"/>
-    <pc:docChg chg="undo custSel addSld delSld modSld sldOrd">
-      <pc:chgData name="Pramod Naik" userId="ceb6df04-ef15-4d9b-a141-998a03559d75" providerId="ADAL" clId="{2BBA8E63-1F83-4096-B685-F0D4199669C1}" dt="2025-06-27T12:11:23.952" v="56" actId="1076"/>
-      <pc:docMkLst>
-        <pc:docMk/>
-      </pc:docMkLst>
-      <pc:sldChg chg="addSp delSp modSp mod">
-        <pc:chgData name="Pramod Naik" userId="ceb6df04-ef15-4d9b-a141-998a03559d75" providerId="ADAL" clId="{2BBA8E63-1F83-4096-B685-F0D4199669C1}" dt="2025-06-27T12:08:58.224" v="15" actId="1076"/>
-        <pc:sldMkLst>
-          <pc:docMk/>
-          <pc:sldMk cId="2805087750" sldId="369"/>
-        </pc:sldMkLst>
-      </pc:sldChg>
-      <pc:sldChg chg="add">
-        <pc:chgData name="Pramod Naik" userId="ceb6df04-ef15-4d9b-a141-998a03559d75" providerId="ADAL" clId="{2BBA8E63-1F83-4096-B685-F0D4199669C1}" dt="2025-06-27T12:07:21.871" v="0"/>
-        <pc:sldMkLst>
-          <pc:docMk/>
-          <pc:sldMk cId="1961164702" sldId="536"/>
-        </pc:sldMkLst>
-      </pc:sldChg>
-      <pc:sldChg chg="addSp delSp modSp add mod setBg">
-        <pc:chgData name="Pramod Naik" userId="ceb6df04-ef15-4d9b-a141-998a03559d75" providerId="ADAL" clId="{2BBA8E63-1F83-4096-B685-F0D4199669C1}" dt="2025-06-27T12:11:23.952" v="56" actId="1076"/>
-        <pc:sldMkLst>
-          <pc:docMk/>
-          <pc:sldMk cId="2190670439" sldId="537"/>
-        </pc:sldMkLst>
-      </pc:sldChg>
-      <pc:sldChg chg="addSp delSp modSp add mod ord">
-        <pc:chgData name="Pramod Naik" userId="ceb6df04-ef15-4d9b-a141-998a03559d75" providerId="ADAL" clId="{2BBA8E63-1F83-4096-B685-F0D4199669C1}" dt="2025-06-27T12:10:16.046" v="40"/>
-        <pc:sldMkLst>
-          <pc:docMk/>
-          <pc:sldMk cId="3886295808" sldId="538"/>
-        </pc:sldMkLst>
-      </pc:sldChg>
-      <pc:sldChg chg="add">
-        <pc:chgData name="Pramod Naik" userId="ceb6df04-ef15-4d9b-a141-998a03559d75" providerId="ADAL" clId="{2BBA8E63-1F83-4096-B685-F0D4199669C1}" dt="2025-06-27T12:10:18.134" v="41"/>
-        <pc:sldMkLst>
-          <pc:docMk/>
-          <pc:sldMk cId="2303070927" sldId="539"/>
-        </pc:sldMkLst>
-      </pc:sldChg>
-      <pc:sldChg chg="add del">
-        <pc:chgData name="Pramod Naik" userId="ceb6df04-ef15-4d9b-a141-998a03559d75" providerId="ADAL" clId="{2BBA8E63-1F83-4096-B685-F0D4199669C1}" dt="2025-06-27T12:09:53.990" v="35"/>
-        <pc:sldMkLst>
-          <pc:docMk/>
-          <pc:sldMk cId="4238638134" sldId="539"/>
-        </pc:sldMkLst>
-      </pc:sldChg>
-      <pc:sldChg chg="add">
-        <pc:chgData name="Pramod Naik" userId="ceb6df04-ef15-4d9b-a141-998a03559d75" providerId="ADAL" clId="{2BBA8E63-1F83-4096-B685-F0D4199669C1}" dt="2025-06-27T12:10:18.332" v="42"/>
-        <pc:sldMkLst>
-          <pc:docMk/>
-          <pc:sldMk cId="2173694948" sldId="540"/>
-        </pc:sldMkLst>
-      </pc:sldChg>
-    </pc:docChg>
-  </pc:docChgLst>
-  <pc:docChgLst>
-    <pc:chgData name="Pramod Naik" userId="ceb6df04-ef15-4d9b-a141-998a03559d75" providerId="ADAL" clId="{62E9B5AE-779D-4001-92D3-8FF830A8A9C1}"/>
-    <pc:docChg chg="undo custSel addSld delSld modSld sldOrd">
-      <pc:chgData name="Pramod Naik" userId="ceb6df04-ef15-4d9b-a141-998a03559d75" providerId="ADAL" clId="{62E9B5AE-779D-4001-92D3-8FF830A8A9C1}" dt="2025-11-01T14:25:04.390" v="4053" actId="5793"/>
-      <pc:docMkLst>
-        <pc:docMk/>
-      </pc:docMkLst>
-      <pc:sldChg chg="del">
-        <pc:chgData name="Pramod Naik" userId="ceb6df04-ef15-4d9b-a141-998a03559d75" providerId="ADAL" clId="{62E9B5AE-779D-4001-92D3-8FF830A8A9C1}" dt="2025-09-20T10:19:06.094" v="0" actId="47"/>
-        <pc:sldMkLst>
-          <pc:docMk/>
-          <pc:sldMk cId="3536530834" sldId="281"/>
-        </pc:sldMkLst>
-      </pc:sldChg>
-      <pc:sldChg chg="del">
-        <pc:chgData name="Pramod Naik" userId="ceb6df04-ef15-4d9b-a141-998a03559d75" providerId="ADAL" clId="{62E9B5AE-779D-4001-92D3-8FF830A8A9C1}" dt="2025-09-20T10:39:37.669" v="178" actId="47"/>
-        <pc:sldMkLst>
-          <pc:docMk/>
-          <pc:sldMk cId="3871635132" sldId="282"/>
-        </pc:sldMkLst>
-      </pc:sldChg>
-      <pc:sldChg chg="del">
-        <pc:chgData name="Pramod Naik" userId="ceb6df04-ef15-4d9b-a141-998a03559d75" providerId="ADAL" clId="{62E9B5AE-779D-4001-92D3-8FF830A8A9C1}" dt="2025-09-20T10:39:39.497" v="179" actId="47"/>
-        <pc:sldMkLst>
-          <pc:docMk/>
-          <pc:sldMk cId="98249899" sldId="283"/>
-        </pc:sldMkLst>
-      </pc:sldChg>
-      <pc:sldChg chg="del">
-        <pc:chgData name="Pramod Naik" userId="ceb6df04-ef15-4d9b-a141-998a03559d75" providerId="ADAL" clId="{62E9B5AE-779D-4001-92D3-8FF830A8A9C1}" dt="2025-09-20T10:39:43.232" v="181" actId="47"/>
-        <pc:sldMkLst>
-          <pc:docMk/>
-          <pc:sldMk cId="1725153903" sldId="284"/>
-        </pc:sldMkLst>
-      </pc:sldChg>
-      <pc:sldChg chg="del">
-        <pc:chgData name="Pramod Naik" userId="ceb6df04-ef15-4d9b-a141-998a03559d75" providerId="ADAL" clId="{62E9B5AE-779D-4001-92D3-8FF830A8A9C1}" dt="2025-09-20T10:40:12.729" v="185" actId="47"/>
-        <pc:sldMkLst>
-          <pc:docMk/>
-          <pc:sldMk cId="1206189811" sldId="287"/>
-        </pc:sldMkLst>
-      </pc:sldChg>
-      <pc:sldChg chg="del">
-        <pc:chgData name="Pramod Naik" userId="ceb6df04-ef15-4d9b-a141-998a03559d75" providerId="ADAL" clId="{62E9B5AE-779D-4001-92D3-8FF830A8A9C1}" dt="2025-09-20T10:40:26.333" v="187" actId="47"/>
-        <pc:sldMkLst>
-          <pc:docMk/>
-          <pc:sldMk cId="1887283550" sldId="289"/>
-        </pc:sldMkLst>
-      </pc:sldChg>
-      <pc:sldChg chg="del">
-        <pc:chgData name="Pramod Naik" userId="ceb6df04-ef15-4d9b-a141-998a03559d75" providerId="ADAL" clId="{62E9B5AE-779D-4001-92D3-8FF830A8A9C1}" dt="2025-09-20T10:41:54.927" v="216" actId="47"/>
-        <pc:sldMkLst>
-          <pc:docMk/>
-          <pc:sldMk cId="2706642426" sldId="305"/>
-        </pc:sldMkLst>
-      </pc:sldChg>
       <pc:sldChg chg="modSp add del mod">
         <pc:chgData name="Pramod Naik" userId="ceb6df04-ef15-4d9b-a141-998a03559d75" providerId="ADAL" clId="{62E9B5AE-779D-4001-92D3-8FF830A8A9C1}" dt="2025-10-26T05:53:46.492" v="2529"/>
         <pc:sldMkLst>
           <pc:docMk/>
           <pc:sldMk cId="3332929625" sldId="306"/>
-        </pc:sldMkLst>
-      </pc:sldChg>
-      <pc:sldChg chg="del">
-        <pc:chgData name="Pramod Naik" userId="ceb6df04-ef15-4d9b-a141-998a03559d75" providerId="ADAL" clId="{62E9B5AE-779D-4001-92D3-8FF830A8A9C1}" dt="2025-09-20T10:41:56.127" v="217" actId="47"/>
-        <pc:sldMkLst>
-          <pc:docMk/>
-          <pc:sldMk cId="73976908" sldId="307"/>
-        </pc:sldMkLst>
-      </pc:sldChg>
-      <pc:sldChg chg="del">
-        <pc:chgData name="Pramod Naik" userId="ceb6df04-ef15-4d9b-a141-998a03559d75" providerId="ADAL" clId="{62E9B5AE-779D-4001-92D3-8FF830A8A9C1}" dt="2025-09-20T10:41:52.968" v="215" actId="47"/>
-        <pc:sldMkLst>
-          <pc:docMk/>
-          <pc:sldMk cId="2788973060" sldId="308"/>
         </pc:sldMkLst>
       </pc:sldChg>
       <pc:sldChg chg="modSp add del mod">
@@ -376,13 +235,6 @@
         <pc:sldMkLst>
           <pc:docMk/>
           <pc:sldMk cId="1739931258" sldId="310"/>
-        </pc:sldMkLst>
-      </pc:sldChg>
-      <pc:sldChg chg="add del">
-        <pc:chgData name="Pramod Naik" userId="ceb6df04-ef15-4d9b-a141-998a03559d75" providerId="ADAL" clId="{62E9B5AE-779D-4001-92D3-8FF830A8A9C1}" dt="2025-10-11T09:19:43.258" v="582" actId="47"/>
-        <pc:sldMkLst>
-          <pc:docMk/>
-          <pc:sldMk cId="2838800158" sldId="311"/>
         </pc:sldMkLst>
       </pc:sldChg>
       <pc:sldChg chg="modSp add del mod">
@@ -429,34 +281,6 @@
           </ac:spMkLst>
         </pc:spChg>
       </pc:sldChg>
-      <pc:sldChg chg="add del">
-        <pc:chgData name="Pramod Naik" userId="ceb6df04-ef15-4d9b-a141-998a03559d75" providerId="ADAL" clId="{62E9B5AE-779D-4001-92D3-8FF830A8A9C1}" dt="2025-10-11T09:27:23.701" v="797" actId="47"/>
-        <pc:sldMkLst>
-          <pc:docMk/>
-          <pc:sldMk cId="171001743" sldId="316"/>
-        </pc:sldMkLst>
-      </pc:sldChg>
-      <pc:sldChg chg="add del">
-        <pc:chgData name="Pramod Naik" userId="ceb6df04-ef15-4d9b-a141-998a03559d75" providerId="ADAL" clId="{62E9B5AE-779D-4001-92D3-8FF830A8A9C1}" dt="2025-10-11T09:27:25.660" v="798" actId="47"/>
-        <pc:sldMkLst>
-          <pc:docMk/>
-          <pc:sldMk cId="246652789" sldId="317"/>
-        </pc:sldMkLst>
-      </pc:sldChg>
-      <pc:sldChg chg="del">
-        <pc:chgData name="Pramod Naik" userId="ceb6df04-ef15-4d9b-a141-998a03559d75" providerId="ADAL" clId="{62E9B5AE-779D-4001-92D3-8FF830A8A9C1}" dt="2025-09-20T10:42:05.839" v="229" actId="47"/>
-        <pc:sldMkLst>
-          <pc:docMk/>
-          <pc:sldMk cId="2446682609" sldId="318"/>
-        </pc:sldMkLst>
-      </pc:sldChg>
-      <pc:sldChg chg="del">
-        <pc:chgData name="Pramod Naik" userId="ceb6df04-ef15-4d9b-a141-998a03559d75" providerId="ADAL" clId="{62E9B5AE-779D-4001-92D3-8FF830A8A9C1}" dt="2025-09-20T10:42:06.390" v="230" actId="47"/>
-        <pc:sldMkLst>
-          <pc:docMk/>
-          <pc:sldMk cId="4040775561" sldId="319"/>
-        </pc:sldMkLst>
-      </pc:sldChg>
       <pc:sldChg chg="addSp delSp modSp add del mod">
         <pc:chgData name="Pramod Naik" userId="ceb6df04-ef15-4d9b-a141-998a03559d75" providerId="ADAL" clId="{62E9B5AE-779D-4001-92D3-8FF830A8A9C1}" dt="2025-10-27T06:57:54.582" v="3021" actId="14100"/>
         <pc:sldMkLst>
@@ -495,314 +319,6 @@
             <ac:picMk id="11" creationId="{D425886E-A48C-411D-63E6-05E692E0CD12}"/>
           </ac:picMkLst>
         </pc:picChg>
-      </pc:sldChg>
-      <pc:sldChg chg="del">
-        <pc:chgData name="Pramod Naik" userId="ceb6df04-ef15-4d9b-a141-998a03559d75" providerId="ADAL" clId="{62E9B5AE-779D-4001-92D3-8FF830A8A9C1}" dt="2025-09-20T10:43:09.139" v="247" actId="47"/>
-        <pc:sldMkLst>
-          <pc:docMk/>
-          <pc:sldMk cId="146059141" sldId="338"/>
-        </pc:sldMkLst>
-      </pc:sldChg>
-      <pc:sldChg chg="add del">
-        <pc:chgData name="Pramod Naik" userId="ceb6df04-ef15-4d9b-a141-998a03559d75" providerId="ADAL" clId="{62E9B5AE-779D-4001-92D3-8FF830A8A9C1}" dt="2025-09-20T10:43:11.843" v="249" actId="47"/>
-        <pc:sldMkLst>
-          <pc:docMk/>
-          <pc:sldMk cId="158852200" sldId="340"/>
-        </pc:sldMkLst>
-      </pc:sldChg>
-      <pc:sldChg chg="modSp mod">
-        <pc:chgData name="Pramod Naik" userId="ceb6df04-ef15-4d9b-a141-998a03559d75" providerId="ADAL" clId="{62E9B5AE-779D-4001-92D3-8FF830A8A9C1}" dt="2025-10-09T19:24:22.440" v="251" actId="20577"/>
-        <pc:sldMkLst>
-          <pc:docMk/>
-          <pc:sldMk cId="799624097" sldId="376"/>
-        </pc:sldMkLst>
-      </pc:sldChg>
-      <pc:sldChg chg="del">
-        <pc:chgData name="Pramod Naik" userId="ceb6df04-ef15-4d9b-a141-998a03559d75" providerId="ADAL" clId="{62E9B5AE-779D-4001-92D3-8FF830A8A9C1}" dt="2025-09-20T10:40:10.297" v="184" actId="47"/>
-        <pc:sldMkLst>
-          <pc:docMk/>
-          <pc:sldMk cId="1872001849" sldId="424"/>
-        </pc:sldMkLst>
-      </pc:sldChg>
-      <pc:sldChg chg="del">
-        <pc:chgData name="Pramod Naik" userId="ceb6df04-ef15-4d9b-a141-998a03559d75" providerId="ADAL" clId="{62E9B5AE-779D-4001-92D3-8FF830A8A9C1}" dt="2025-09-20T10:39:45.221" v="182" actId="47"/>
-        <pc:sldMkLst>
-          <pc:docMk/>
-          <pc:sldMk cId="3198652846" sldId="445"/>
-        </pc:sldMkLst>
-      </pc:sldChg>
-      <pc:sldChg chg="modSp mod">
-        <pc:chgData name="Pramod Naik" userId="ceb6df04-ef15-4d9b-a141-998a03559d75" providerId="ADAL" clId="{62E9B5AE-779D-4001-92D3-8FF830A8A9C1}" dt="2025-09-20T10:19:25.122" v="17" actId="113"/>
-        <pc:sldMkLst>
-          <pc:docMk/>
-          <pc:sldMk cId="3180435471" sldId="447"/>
-        </pc:sldMkLst>
-      </pc:sldChg>
-      <pc:sldChg chg="del">
-        <pc:chgData name="Pramod Naik" userId="ceb6df04-ef15-4d9b-a141-998a03559d75" providerId="ADAL" clId="{62E9B5AE-779D-4001-92D3-8FF830A8A9C1}" dt="2025-09-20T10:40:04.627" v="183" actId="47"/>
-        <pc:sldMkLst>
-          <pc:docMk/>
-          <pc:sldMk cId="3528794914" sldId="450"/>
-        </pc:sldMkLst>
-      </pc:sldChg>
-      <pc:sldChg chg="del">
-        <pc:chgData name="Pramod Naik" userId="ceb6df04-ef15-4d9b-a141-998a03559d75" providerId="ADAL" clId="{62E9B5AE-779D-4001-92D3-8FF830A8A9C1}" dt="2025-09-20T10:40:14.542" v="186" actId="47"/>
-        <pc:sldMkLst>
-          <pc:docMk/>
-          <pc:sldMk cId="2507663823" sldId="467"/>
-        </pc:sldMkLst>
-      </pc:sldChg>
-      <pc:sldChg chg="modSp mod">
-        <pc:chgData name="Pramod Naik" userId="ceb6df04-ef15-4d9b-a141-998a03559d75" providerId="ADAL" clId="{62E9B5AE-779D-4001-92D3-8FF830A8A9C1}" dt="2025-10-09T19:32:10.966" v="286"/>
-        <pc:sldMkLst>
-          <pc:docMk/>
-          <pc:sldMk cId="490608734" sldId="491"/>
-        </pc:sldMkLst>
-      </pc:sldChg>
-      <pc:sldChg chg="del">
-        <pc:chgData name="Pramod Naik" userId="ceb6df04-ef15-4d9b-a141-998a03559d75" providerId="ADAL" clId="{62E9B5AE-779D-4001-92D3-8FF830A8A9C1}" dt="2025-09-20T10:40:27.766" v="188" actId="47"/>
-        <pc:sldMkLst>
-          <pc:docMk/>
-          <pc:sldMk cId="2533904343" sldId="493"/>
-        </pc:sldMkLst>
-      </pc:sldChg>
-      <pc:sldChg chg="modSp mod">
-        <pc:chgData name="Pramod Naik" userId="ceb6df04-ef15-4d9b-a141-998a03559d75" providerId="ADAL" clId="{62E9B5AE-779D-4001-92D3-8FF830A8A9C1}" dt="2025-10-09T19:32:57.044" v="295" actId="207"/>
-        <pc:sldMkLst>
-          <pc:docMk/>
-          <pc:sldMk cId="1149732589" sldId="494"/>
-        </pc:sldMkLst>
-      </pc:sldChg>
-      <pc:sldChg chg="del">
-        <pc:chgData name="Pramod Naik" userId="ceb6df04-ef15-4d9b-a141-998a03559d75" providerId="ADAL" clId="{62E9B5AE-779D-4001-92D3-8FF830A8A9C1}" dt="2025-09-20T10:40:38.992" v="189" actId="47"/>
-        <pc:sldMkLst>
-          <pc:docMk/>
-          <pc:sldMk cId="1703640570" sldId="495"/>
-        </pc:sldMkLst>
-      </pc:sldChg>
-      <pc:sldChg chg="del">
-        <pc:chgData name="Pramod Naik" userId="ceb6df04-ef15-4d9b-a141-998a03559d75" providerId="ADAL" clId="{62E9B5AE-779D-4001-92D3-8FF830A8A9C1}" dt="2025-09-20T10:40:40.015" v="190" actId="47"/>
-        <pc:sldMkLst>
-          <pc:docMk/>
-          <pc:sldMk cId="3225806142" sldId="496"/>
-        </pc:sldMkLst>
-      </pc:sldChg>
-      <pc:sldChg chg="del">
-        <pc:chgData name="Pramod Naik" userId="ceb6df04-ef15-4d9b-a141-998a03559d75" providerId="ADAL" clId="{62E9B5AE-779D-4001-92D3-8FF830A8A9C1}" dt="2025-09-20T10:40:40.970" v="191" actId="47"/>
-        <pc:sldMkLst>
-          <pc:docMk/>
-          <pc:sldMk cId="1532476392" sldId="497"/>
-        </pc:sldMkLst>
-      </pc:sldChg>
-      <pc:sldChg chg="del">
-        <pc:chgData name="Pramod Naik" userId="ceb6df04-ef15-4d9b-a141-998a03559d75" providerId="ADAL" clId="{62E9B5AE-779D-4001-92D3-8FF830A8A9C1}" dt="2025-09-20T10:40:41.967" v="192" actId="47"/>
-        <pc:sldMkLst>
-          <pc:docMk/>
-          <pc:sldMk cId="3314440347" sldId="498"/>
-        </pc:sldMkLst>
-      </pc:sldChg>
-      <pc:sldChg chg="del">
-        <pc:chgData name="Pramod Naik" userId="ceb6df04-ef15-4d9b-a141-998a03559d75" providerId="ADAL" clId="{62E9B5AE-779D-4001-92D3-8FF830A8A9C1}" dt="2025-09-20T10:41:44.490" v="211" actId="47"/>
-        <pc:sldMkLst>
-          <pc:docMk/>
-          <pc:sldMk cId="3801089534" sldId="499"/>
-        </pc:sldMkLst>
-      </pc:sldChg>
-      <pc:sldChg chg="del">
-        <pc:chgData name="Pramod Naik" userId="ceb6df04-ef15-4d9b-a141-998a03559d75" providerId="ADAL" clId="{62E9B5AE-779D-4001-92D3-8FF830A8A9C1}" dt="2025-09-20T10:41:45.709" v="212" actId="47"/>
-        <pc:sldMkLst>
-          <pc:docMk/>
-          <pc:sldMk cId="4115866621" sldId="500"/>
-        </pc:sldMkLst>
-      </pc:sldChg>
-      <pc:sldChg chg="modSp mod">
-        <pc:chgData name="Pramod Naik" userId="ceb6df04-ef15-4d9b-a141-998a03559d75" providerId="ADAL" clId="{62E9B5AE-779D-4001-92D3-8FF830A8A9C1}" dt="2025-09-20T10:41:32.668" v="210" actId="20577"/>
-        <pc:sldMkLst>
-          <pc:docMk/>
-          <pc:sldMk cId="3930951075" sldId="501"/>
-        </pc:sldMkLst>
-      </pc:sldChg>
-      <pc:sldChg chg="add del">
-        <pc:chgData name="Pramod Naik" userId="ceb6df04-ef15-4d9b-a141-998a03559d75" providerId="ADAL" clId="{62E9B5AE-779D-4001-92D3-8FF830A8A9C1}" dt="2025-10-09T19:55:13.363" v="380" actId="47"/>
-        <pc:sldMkLst>
-          <pc:docMk/>
-          <pc:sldMk cId="1158287235" sldId="502"/>
-        </pc:sldMkLst>
-      </pc:sldChg>
-      <pc:sldChg chg="modSp add del mod">
-        <pc:chgData name="Pramod Naik" userId="ceb6df04-ef15-4d9b-a141-998a03559d75" providerId="ADAL" clId="{62E9B5AE-779D-4001-92D3-8FF830A8A9C1}" dt="2025-10-09T19:55:38.333" v="382" actId="47"/>
-        <pc:sldMkLst>
-          <pc:docMk/>
-          <pc:sldMk cId="1197408662" sldId="503"/>
-        </pc:sldMkLst>
-      </pc:sldChg>
-      <pc:sldChg chg="modSp mod">
-        <pc:chgData name="Pramod Naik" userId="ceb6df04-ef15-4d9b-a141-998a03559d75" providerId="ADAL" clId="{62E9B5AE-779D-4001-92D3-8FF830A8A9C1}" dt="2025-09-20T10:41:24.786" v="209" actId="20577"/>
-        <pc:sldMkLst>
-          <pc:docMk/>
-          <pc:sldMk cId="3356209475" sldId="504"/>
-        </pc:sldMkLst>
-      </pc:sldChg>
-      <pc:sldChg chg="modSp mod">
-        <pc:chgData name="Pramod Naik" userId="ceb6df04-ef15-4d9b-a141-998a03559d75" providerId="ADAL" clId="{62E9B5AE-779D-4001-92D3-8FF830A8A9C1}" dt="2025-09-20T10:41:16.944" v="206" actId="20577"/>
-        <pc:sldMkLst>
-          <pc:docMk/>
-          <pc:sldMk cId="1145778209" sldId="505"/>
-        </pc:sldMkLst>
-      </pc:sldChg>
-      <pc:sldChg chg="del">
-        <pc:chgData name="Pramod Naik" userId="ceb6df04-ef15-4d9b-a141-998a03559d75" providerId="ADAL" clId="{62E9B5AE-779D-4001-92D3-8FF830A8A9C1}" dt="2025-09-20T10:41:48.110" v="214" actId="47"/>
-        <pc:sldMkLst>
-          <pc:docMk/>
-          <pc:sldMk cId="2951932448" sldId="506"/>
-        </pc:sldMkLst>
-      </pc:sldChg>
-      <pc:sldChg chg="modSp mod">
-        <pc:chgData name="Pramod Naik" userId="ceb6df04-ef15-4d9b-a141-998a03559d75" providerId="ADAL" clId="{62E9B5AE-779D-4001-92D3-8FF830A8A9C1}" dt="2025-09-20T10:42:22.165" v="232" actId="20577"/>
-        <pc:sldMkLst>
-          <pc:docMk/>
-          <pc:sldMk cId="2224253486" sldId="512"/>
-        </pc:sldMkLst>
-      </pc:sldChg>
-      <pc:sldChg chg="modSp mod">
-        <pc:chgData name="Pramod Naik" userId="ceb6df04-ef15-4d9b-a141-998a03559d75" providerId="ADAL" clId="{62E9B5AE-779D-4001-92D3-8FF830A8A9C1}" dt="2025-09-20T10:42:25.203" v="233" actId="20577"/>
-        <pc:sldMkLst>
-          <pc:docMk/>
-          <pc:sldMk cId="3986850537" sldId="513"/>
-        </pc:sldMkLst>
-      </pc:sldChg>
-      <pc:sldChg chg="modSp mod">
-        <pc:chgData name="Pramod Naik" userId="ceb6df04-ef15-4d9b-a141-998a03559d75" providerId="ADAL" clId="{62E9B5AE-779D-4001-92D3-8FF830A8A9C1}" dt="2025-09-20T10:42:33.958" v="235" actId="20577"/>
-        <pc:sldMkLst>
-          <pc:docMk/>
-          <pc:sldMk cId="3495308794" sldId="515"/>
-        </pc:sldMkLst>
-      </pc:sldChg>
-      <pc:sldChg chg="modSp mod">
-        <pc:chgData name="Pramod Naik" userId="ceb6df04-ef15-4d9b-a141-998a03559d75" providerId="ADAL" clId="{62E9B5AE-779D-4001-92D3-8FF830A8A9C1}" dt="2025-09-20T10:42:39.845" v="237" actId="20577"/>
-        <pc:sldMkLst>
-          <pc:docMk/>
-          <pc:sldMk cId="2056910270" sldId="516"/>
-        </pc:sldMkLst>
-      </pc:sldChg>
-      <pc:sldChg chg="modSp mod">
-        <pc:chgData name="Pramod Naik" userId="ceb6df04-ef15-4d9b-a141-998a03559d75" providerId="ADAL" clId="{62E9B5AE-779D-4001-92D3-8FF830A8A9C1}" dt="2025-09-20T10:42:43.495" v="238" actId="20577"/>
-        <pc:sldMkLst>
-          <pc:docMk/>
-          <pc:sldMk cId="2880699123" sldId="517"/>
-        </pc:sldMkLst>
-      </pc:sldChg>
-      <pc:sldChg chg="del">
-        <pc:chgData name="Pramod Naik" userId="ceb6df04-ef15-4d9b-a141-998a03559d75" providerId="ADAL" clId="{62E9B5AE-779D-4001-92D3-8FF830A8A9C1}" dt="2025-09-20T10:42:49.455" v="239" actId="47"/>
-        <pc:sldMkLst>
-          <pc:docMk/>
-          <pc:sldMk cId="3598008498" sldId="518"/>
-        </pc:sldMkLst>
-      </pc:sldChg>
-      <pc:sldChg chg="del">
-        <pc:chgData name="Pramod Naik" userId="ceb6df04-ef15-4d9b-a141-998a03559d75" providerId="ADAL" clId="{62E9B5AE-779D-4001-92D3-8FF830A8A9C1}" dt="2025-09-20T10:42:50.319" v="240" actId="47"/>
-        <pc:sldMkLst>
-          <pc:docMk/>
-          <pc:sldMk cId="1340291649" sldId="519"/>
-        </pc:sldMkLst>
-      </pc:sldChg>
-      <pc:sldChg chg="del">
-        <pc:chgData name="Pramod Naik" userId="ceb6df04-ef15-4d9b-a141-998a03559d75" providerId="ADAL" clId="{62E9B5AE-779D-4001-92D3-8FF830A8A9C1}" dt="2025-09-20T10:42:51.840" v="241" actId="47"/>
-        <pc:sldMkLst>
-          <pc:docMk/>
-          <pc:sldMk cId="1427375454" sldId="520"/>
-        </pc:sldMkLst>
-      </pc:sldChg>
-      <pc:sldChg chg="del">
-        <pc:chgData name="Pramod Naik" userId="ceb6df04-ef15-4d9b-a141-998a03559d75" providerId="ADAL" clId="{62E9B5AE-779D-4001-92D3-8FF830A8A9C1}" dt="2025-09-20T10:42:53.187" v="242" actId="47"/>
-        <pc:sldMkLst>
-          <pc:docMk/>
-          <pc:sldMk cId="644800703" sldId="521"/>
-        </pc:sldMkLst>
-      </pc:sldChg>
-      <pc:sldChg chg="del">
-        <pc:chgData name="Pramod Naik" userId="ceb6df04-ef15-4d9b-a141-998a03559d75" providerId="ADAL" clId="{62E9B5AE-779D-4001-92D3-8FF830A8A9C1}" dt="2025-09-20T10:42:54.012" v="243" actId="47"/>
-        <pc:sldMkLst>
-          <pc:docMk/>
-          <pc:sldMk cId="2697665067" sldId="522"/>
-        </pc:sldMkLst>
-      </pc:sldChg>
-      <pc:sldChg chg="del">
-        <pc:chgData name="Pramod Naik" userId="ceb6df04-ef15-4d9b-a141-998a03559d75" providerId="ADAL" clId="{62E9B5AE-779D-4001-92D3-8FF830A8A9C1}" dt="2025-09-20T10:42:54.896" v="244" actId="47"/>
-        <pc:sldMkLst>
-          <pc:docMk/>
-          <pc:sldMk cId="2715239674" sldId="523"/>
-        </pc:sldMkLst>
-      </pc:sldChg>
-      <pc:sldChg chg="del">
-        <pc:chgData name="Pramod Naik" userId="ceb6df04-ef15-4d9b-a141-998a03559d75" providerId="ADAL" clId="{62E9B5AE-779D-4001-92D3-8FF830A8A9C1}" dt="2025-09-20T10:42:55.867" v="245" actId="47"/>
-        <pc:sldMkLst>
-          <pc:docMk/>
-          <pc:sldMk cId="3502240012" sldId="524"/>
-        </pc:sldMkLst>
-      </pc:sldChg>
-      <pc:sldChg chg="del">
-        <pc:chgData name="Pramod Naik" userId="ceb6df04-ef15-4d9b-a141-998a03559d75" providerId="ADAL" clId="{62E9B5AE-779D-4001-92D3-8FF830A8A9C1}" dt="2025-09-20T10:42:57.183" v="246" actId="47"/>
-        <pc:sldMkLst>
-          <pc:docMk/>
-          <pc:sldMk cId="3857195804" sldId="525"/>
-        </pc:sldMkLst>
-      </pc:sldChg>
-      <pc:sldChg chg="del">
-        <pc:chgData name="Pramod Naik" userId="ceb6df04-ef15-4d9b-a141-998a03559d75" providerId="ADAL" clId="{62E9B5AE-779D-4001-92D3-8FF830A8A9C1}" dt="2025-10-26T05:52:59.120" v="2460" actId="47"/>
-        <pc:sldMkLst>
-          <pc:docMk/>
-          <pc:sldMk cId="2663992815" sldId="526"/>
-        </pc:sldMkLst>
-      </pc:sldChg>
-      <pc:sldChg chg="modSp del mod">
-        <pc:chgData name="Pramod Naik" userId="ceb6df04-ef15-4d9b-a141-998a03559d75" providerId="ADAL" clId="{62E9B5AE-779D-4001-92D3-8FF830A8A9C1}" dt="2025-10-26T05:52:59.627" v="2461" actId="47"/>
-        <pc:sldMkLst>
-          <pc:docMk/>
-          <pc:sldMk cId="228400106" sldId="527"/>
-        </pc:sldMkLst>
-      </pc:sldChg>
-      <pc:sldChg chg="modSp mod">
-        <pc:chgData name="Pramod Naik" userId="ceb6df04-ef15-4d9b-a141-998a03559d75" providerId="ADAL" clId="{62E9B5AE-779D-4001-92D3-8FF830A8A9C1}" dt="2025-09-20T10:21:30.688" v="31" actId="20577"/>
-        <pc:sldMkLst>
-          <pc:docMk/>
-          <pc:sldMk cId="1792152373" sldId="527"/>
-        </pc:sldMkLst>
-      </pc:sldChg>
-      <pc:sldChg chg="modSp mod">
-        <pc:chgData name="Pramod Naik" userId="ceb6df04-ef15-4d9b-a141-998a03559d75" providerId="ADAL" clId="{62E9B5AE-779D-4001-92D3-8FF830A8A9C1}" dt="2025-09-20T10:21:41.887" v="35" actId="6549"/>
-        <pc:sldMkLst>
-          <pc:docMk/>
-          <pc:sldMk cId="273061064" sldId="528"/>
-        </pc:sldMkLst>
-      </pc:sldChg>
-      <pc:sldChg chg="addSp delSp modSp del mod">
-        <pc:chgData name="Pramod Naik" userId="ceb6df04-ef15-4d9b-a141-998a03559d75" providerId="ADAL" clId="{62E9B5AE-779D-4001-92D3-8FF830A8A9C1}" dt="2025-10-26T05:52:59.669" v="2462" actId="47"/>
-        <pc:sldMkLst>
-          <pc:docMk/>
-          <pc:sldMk cId="645782176" sldId="528"/>
-        </pc:sldMkLst>
-      </pc:sldChg>
-      <pc:sldChg chg="modSp mod">
-        <pc:chgData name="Pramod Naik" userId="ceb6df04-ef15-4d9b-a141-998a03559d75" providerId="ADAL" clId="{62E9B5AE-779D-4001-92D3-8FF830A8A9C1}" dt="2025-09-20T10:20:46.149" v="27" actId="403"/>
-        <pc:sldMkLst>
-          <pc:docMk/>
-          <pc:sldMk cId="315074426" sldId="529"/>
-        </pc:sldMkLst>
-      </pc:sldChg>
-      <pc:sldChg chg="modSp del mod">
-        <pc:chgData name="Pramod Naik" userId="ceb6df04-ef15-4d9b-a141-998a03559d75" providerId="ADAL" clId="{62E9B5AE-779D-4001-92D3-8FF830A8A9C1}" dt="2025-10-26T05:52:59.692" v="2463" actId="47"/>
-        <pc:sldMkLst>
-          <pc:docMk/>
-          <pc:sldMk cId="661470129" sldId="529"/>
-        </pc:sldMkLst>
-      </pc:sldChg>
-      <pc:sldChg chg="del">
-        <pc:chgData name="Pramod Naik" userId="ceb6df04-ef15-4d9b-a141-998a03559d75" providerId="ADAL" clId="{62E9B5AE-779D-4001-92D3-8FF830A8A9C1}" dt="2025-10-24T05:14:48.062" v="2374" actId="47"/>
-        <pc:sldMkLst>
-          <pc:docMk/>
-          <pc:sldMk cId="3183652202" sldId="530"/>
-        </pc:sldMkLst>
       </pc:sldChg>
       <pc:sldChg chg="addSp delSp modSp add del mod">
         <pc:chgData name="Pramod Naik" userId="ceb6df04-ef15-4d9b-a141-998a03559d75" providerId="ADAL" clId="{62E9B5AE-779D-4001-92D3-8FF830A8A9C1}" dt="2025-10-26T05:57:24.704" v="2546" actId="164"/>
@@ -843,20 +359,6 @@
           </ac:picMkLst>
         </pc:picChg>
       </pc:sldChg>
-      <pc:sldChg chg="del">
-        <pc:chgData name="Pramod Naik" userId="ceb6df04-ef15-4d9b-a141-998a03559d75" providerId="ADAL" clId="{62E9B5AE-779D-4001-92D3-8FF830A8A9C1}" dt="2025-09-20T10:39:41.716" v="180" actId="47"/>
-        <pc:sldMkLst>
-          <pc:docMk/>
-          <pc:sldMk cId="3157512093" sldId="531"/>
-        </pc:sldMkLst>
-      </pc:sldChg>
-      <pc:sldChg chg="modSp mod">
-        <pc:chgData name="Pramod Naik" userId="ceb6df04-ef15-4d9b-a141-998a03559d75" providerId="ADAL" clId="{62E9B5AE-779D-4001-92D3-8FF830A8A9C1}" dt="2025-10-09T19:29:32.538" v="280" actId="14100"/>
-        <pc:sldMkLst>
-          <pc:docMk/>
-          <pc:sldMk cId="535661125" sldId="532"/>
-        </pc:sldMkLst>
-      </pc:sldChg>
       <pc:sldChg chg="modSp add mod">
         <pc:chgData name="Pramod Naik" userId="ceb6df04-ef15-4d9b-a141-998a03559d75" providerId="ADAL" clId="{62E9B5AE-779D-4001-92D3-8FF830A8A9C1}" dt="2025-10-30T05:47:28.659" v="3530" actId="113"/>
         <pc:sldMkLst>
@@ -871,20 +373,6 @@
             <ac:spMk id="3" creationId="{84954DEB-2EA5-ACB5-0BDB-FAA75E67485B}"/>
           </ac:spMkLst>
         </pc:spChg>
-      </pc:sldChg>
-      <pc:sldChg chg="add del">
-        <pc:chgData name="Pramod Naik" userId="ceb6df04-ef15-4d9b-a141-998a03559d75" providerId="ADAL" clId="{62E9B5AE-779D-4001-92D3-8FF830A8A9C1}" dt="2025-10-26T05:51:04.411" v="2459" actId="47"/>
-        <pc:sldMkLst>
-          <pc:docMk/>
-          <pc:sldMk cId="3892924958" sldId="532"/>
-        </pc:sldMkLst>
-      </pc:sldChg>
-      <pc:sldChg chg="add del">
-        <pc:chgData name="Pramod Naik" userId="ceb6df04-ef15-4d9b-a141-998a03559d75" providerId="ADAL" clId="{62E9B5AE-779D-4001-92D3-8FF830A8A9C1}" dt="2025-10-26T05:51:03.218" v="2458" actId="47"/>
-        <pc:sldMkLst>
-          <pc:docMk/>
-          <pc:sldMk cId="208792046" sldId="533"/>
-        </pc:sldMkLst>
       </pc:sldChg>
       <pc:sldChg chg="addSp modSp add mod">
         <pc:chgData name="Pramod Naik" userId="ceb6df04-ef15-4d9b-a141-998a03559d75" providerId="ADAL" clId="{62E9B5AE-779D-4001-92D3-8FF830A8A9C1}" dt="2025-10-26T06:14:34.888" v="2653" actId="20577"/>
@@ -909,20 +397,6 @@
           </ac:picMkLst>
         </pc:picChg>
       </pc:sldChg>
-      <pc:sldChg chg="del">
-        <pc:chgData name="Pramod Naik" userId="ceb6df04-ef15-4d9b-a141-998a03559d75" providerId="ADAL" clId="{62E9B5AE-779D-4001-92D3-8FF830A8A9C1}" dt="2025-09-20T10:41:46.678" v="213" actId="47"/>
-        <pc:sldMkLst>
-          <pc:docMk/>
-          <pc:sldMk cId="813065072" sldId="534"/>
-        </pc:sldMkLst>
-      </pc:sldChg>
-      <pc:sldChg chg="add del">
-        <pc:chgData name="Pramod Naik" userId="ceb6df04-ef15-4d9b-a141-998a03559d75" providerId="ADAL" clId="{62E9B5AE-779D-4001-92D3-8FF830A8A9C1}" dt="2025-10-26T05:51:02.666" v="2457" actId="47"/>
-        <pc:sldMkLst>
-          <pc:docMk/>
-          <pc:sldMk cId="948425043" sldId="534"/>
-        </pc:sldMkLst>
-      </pc:sldChg>
       <pc:sldChg chg="addSp modSp add mod">
         <pc:chgData name="Pramod Naik" userId="ceb6df04-ef15-4d9b-a141-998a03559d75" providerId="ADAL" clId="{62E9B5AE-779D-4001-92D3-8FF830A8A9C1}" dt="2025-10-30T05:50:36.545" v="3531" actId="403"/>
         <pc:sldMkLst>
@@ -945,13 +419,6 @@
             <ac:picMk id="4" creationId="{856E24A2-00AC-04D7-C093-1D0B417BF428}"/>
           </ac:picMkLst>
         </pc:picChg>
-      </pc:sldChg>
-      <pc:sldChg chg="add del">
-        <pc:chgData name="Pramod Naik" userId="ceb6df04-ef15-4d9b-a141-998a03559d75" providerId="ADAL" clId="{62E9B5AE-779D-4001-92D3-8FF830A8A9C1}" dt="2025-10-26T05:51:01.972" v="2456" actId="47"/>
-        <pc:sldMkLst>
-          <pc:docMk/>
-          <pc:sldMk cId="2261098285" sldId="535"/>
-        </pc:sldMkLst>
       </pc:sldChg>
       <pc:sldChg chg="addSp modSp add mod">
         <pc:chgData name="Pramod Naik" userId="ceb6df04-ef15-4d9b-a141-998a03559d75" providerId="ADAL" clId="{62E9B5AE-779D-4001-92D3-8FF830A8A9C1}" dt="2025-10-26T06:22:15.243" v="2723" actId="1076"/>
@@ -976,20 +443,6 @@
           </ac:picMkLst>
         </pc:picChg>
       </pc:sldChg>
-      <pc:sldChg chg="del">
-        <pc:chgData name="Pramod Naik" userId="ceb6df04-ef15-4d9b-a141-998a03559d75" providerId="ADAL" clId="{62E9B5AE-779D-4001-92D3-8FF830A8A9C1}" dt="2025-09-20T10:40:43.960" v="193" actId="47"/>
-        <pc:sldMkLst>
-          <pc:docMk/>
-          <pc:sldMk cId="2713829649" sldId="535"/>
-        </pc:sldMkLst>
-      </pc:sldChg>
-      <pc:sldChg chg="modSp add del mod">
-        <pc:chgData name="Pramod Naik" userId="ceb6df04-ef15-4d9b-a141-998a03559d75" providerId="ADAL" clId="{62E9B5AE-779D-4001-92D3-8FF830A8A9C1}" dt="2025-10-26T05:52:59.727" v="2464" actId="47"/>
-        <pc:sldMkLst>
-          <pc:docMk/>
-          <pc:sldMk cId="1692959063" sldId="536"/>
-        </pc:sldMkLst>
-      </pc:sldChg>
       <pc:sldChg chg="addSp modSp add mod">
         <pc:chgData name="Pramod Naik" userId="ceb6df04-ef15-4d9b-a141-998a03559d75" providerId="ADAL" clId="{62E9B5AE-779D-4001-92D3-8FF830A8A9C1}" dt="2025-10-26T06:23:41.194" v="2754" actId="113"/>
         <pc:sldMkLst>
@@ -1013,20 +466,6 @@
           </ac:picMkLst>
         </pc:picChg>
       </pc:sldChg>
-      <pc:sldChg chg="modSp add del mod">
-        <pc:chgData name="Pramod Naik" userId="ceb6df04-ef15-4d9b-a141-998a03559d75" providerId="ADAL" clId="{62E9B5AE-779D-4001-92D3-8FF830A8A9C1}" dt="2025-10-11T09:23:35.077" v="651" actId="2696"/>
-        <pc:sldMkLst>
-          <pc:docMk/>
-          <pc:sldMk cId="2231447491" sldId="536"/>
-        </pc:sldMkLst>
-      </pc:sldChg>
-      <pc:sldChg chg="modSp add del mod">
-        <pc:chgData name="Pramod Naik" userId="ceb6df04-ef15-4d9b-a141-998a03559d75" providerId="ADAL" clId="{62E9B5AE-779D-4001-92D3-8FF830A8A9C1}" dt="2025-10-26T05:52:59.787" v="2465" actId="47"/>
-        <pc:sldMkLst>
-          <pc:docMk/>
-          <pc:sldMk cId="3011003526" sldId="537"/>
-        </pc:sldMkLst>
-      </pc:sldChg>
       <pc:sldChg chg="addSp modSp add mod">
         <pc:chgData name="Pramod Naik" userId="ceb6df04-ef15-4d9b-a141-998a03559d75" providerId="ADAL" clId="{62E9B5AE-779D-4001-92D3-8FF830A8A9C1}" dt="2025-10-26T06:41:52.356" v="2894" actId="20577"/>
         <pc:sldMkLst>
@@ -1049,20 +488,6 @@
             <ac:picMk id="4" creationId="{B065461B-C5A9-B96A-D924-724D5048823F}"/>
           </ac:picMkLst>
         </pc:picChg>
-      </pc:sldChg>
-      <pc:sldChg chg="addSp modSp add del mod">
-        <pc:chgData name="Pramod Naik" userId="ceb6df04-ef15-4d9b-a141-998a03559d75" providerId="ADAL" clId="{62E9B5AE-779D-4001-92D3-8FF830A8A9C1}" dt="2025-10-26T05:53:00.697" v="2480" actId="47"/>
-        <pc:sldMkLst>
-          <pc:docMk/>
-          <pc:sldMk cId="1663416122" sldId="538"/>
-        </pc:sldMkLst>
-      </pc:sldChg>
-      <pc:sldChg chg="modSp">
-        <pc:chgData name="Pramod Naik" userId="ceb6df04-ef15-4d9b-a141-998a03559d75" providerId="ADAL" clId="{62E9B5AE-779D-4001-92D3-8FF830A8A9C1}" dt="2025-09-20T10:19:55.680" v="20" actId="1036"/>
-        <pc:sldMkLst>
-          <pc:docMk/>
-          <pc:sldMk cId="3886295808" sldId="538"/>
-        </pc:sldMkLst>
       </pc:sldChg>
       <pc:sldChg chg="addSp modSp add mod">
         <pc:chgData name="Pramod Naik" userId="ceb6df04-ef15-4d9b-a141-998a03559d75" providerId="ADAL" clId="{62E9B5AE-779D-4001-92D3-8FF830A8A9C1}" dt="2025-10-26T06:26:11.724" v="2789" actId="207"/>
@@ -1110,34 +535,6 @@
           </ac:picMkLst>
         </pc:picChg>
       </pc:sldChg>
-      <pc:sldChg chg="addSp modSp add del mod">
-        <pc:chgData name="Pramod Naik" userId="ceb6df04-ef15-4d9b-a141-998a03559d75" providerId="ADAL" clId="{62E9B5AE-779D-4001-92D3-8FF830A8A9C1}" dt="2025-10-26T05:53:01.195" v="2481" actId="47"/>
-        <pc:sldMkLst>
-          <pc:docMk/>
-          <pc:sldMk cId="1058796560" sldId="539"/>
-        </pc:sldMkLst>
-      </pc:sldChg>
-      <pc:sldChg chg="addSp delSp modSp new mod">
-        <pc:chgData name="Pramod Naik" userId="ceb6df04-ef15-4d9b-a141-998a03559d75" providerId="ADAL" clId="{62E9B5AE-779D-4001-92D3-8FF830A8A9C1}" dt="2025-10-09T19:25:24.225" v="256" actId="113"/>
-        <pc:sldMkLst>
-          <pc:docMk/>
-          <pc:sldMk cId="4048674660" sldId="539"/>
-        </pc:sldMkLst>
-      </pc:sldChg>
-      <pc:sldChg chg="addSp modSp add del mod">
-        <pc:chgData name="Pramod Naik" userId="ceb6df04-ef15-4d9b-a141-998a03559d75" providerId="ADAL" clId="{62E9B5AE-779D-4001-92D3-8FF830A8A9C1}" dt="2025-10-26T05:53:01.237" v="2482" actId="47"/>
-        <pc:sldMkLst>
-          <pc:docMk/>
-          <pc:sldMk cId="792488442" sldId="540"/>
-        </pc:sldMkLst>
-      </pc:sldChg>
-      <pc:sldChg chg="delSp modSp new mod">
-        <pc:chgData name="Pramod Naik" userId="ceb6df04-ef15-4d9b-a141-998a03559d75" providerId="ADAL" clId="{62E9B5AE-779D-4001-92D3-8FF830A8A9C1}" dt="2025-09-20T10:35:29.201" v="86" actId="113"/>
-        <pc:sldMkLst>
-          <pc:docMk/>
-          <pc:sldMk cId="1151027427" sldId="540"/>
-        </pc:sldMkLst>
-      </pc:sldChg>
       <pc:sldChg chg="addSp modSp add mod">
         <pc:chgData name="Pramod Naik" userId="ceb6df04-ef15-4d9b-a141-998a03559d75" providerId="ADAL" clId="{62E9B5AE-779D-4001-92D3-8FF830A8A9C1}" dt="2025-10-26T06:28:32.638" v="2822" actId="113"/>
         <pc:sldMkLst>
@@ -1152,13 +549,6 @@
             <ac:spMk id="3" creationId="{3FCB765D-2F4E-315F-ABFF-91AF83104818}"/>
           </ac:spMkLst>
         </pc:spChg>
-      </pc:sldChg>
-      <pc:sldChg chg="modSp add del mod">
-        <pc:chgData name="Pramod Naik" userId="ceb6df04-ef15-4d9b-a141-998a03559d75" providerId="ADAL" clId="{62E9B5AE-779D-4001-92D3-8FF830A8A9C1}" dt="2025-10-26T06:41:27.026" v="2885" actId="2696"/>
-        <pc:sldMkLst>
-          <pc:docMk/>
-          <pc:sldMk cId="1799605924" sldId="541"/>
-        </pc:sldMkLst>
       </pc:sldChg>
       <pc:sldChg chg="modSp add mod">
         <pc:chgData name="Pramod Naik" userId="ceb6df04-ef15-4d9b-a141-998a03559d75" providerId="ADAL" clId="{62E9B5AE-779D-4001-92D3-8FF830A8A9C1}" dt="2025-10-26T06:41:43.034" v="2891" actId="20577"/>
@@ -1175,20 +565,6 @@
           </ac:spMkLst>
         </pc:spChg>
       </pc:sldChg>
-      <pc:sldChg chg="addSp delSp modSp add del mod">
-        <pc:chgData name="Pramod Naik" userId="ceb6df04-ef15-4d9b-a141-998a03559d75" providerId="ADAL" clId="{62E9B5AE-779D-4001-92D3-8FF830A8A9C1}" dt="2025-09-20T10:38:54.170" v="164" actId="47"/>
-        <pc:sldMkLst>
-          <pc:docMk/>
-          <pc:sldMk cId="3878971267" sldId="541"/>
-        </pc:sldMkLst>
-      </pc:sldChg>
-      <pc:sldChg chg="addSp modSp add del mod">
-        <pc:chgData name="Pramod Naik" userId="ceb6df04-ef15-4d9b-a141-998a03559d75" providerId="ADAL" clId="{62E9B5AE-779D-4001-92D3-8FF830A8A9C1}" dt="2025-10-26T05:53:01.369" v="2483" actId="47"/>
-        <pc:sldMkLst>
-          <pc:docMk/>
-          <pc:sldMk cId="3987673880" sldId="541"/>
-        </pc:sldMkLst>
-      </pc:sldChg>
       <pc:sldChg chg="modSp add mod">
         <pc:chgData name="Pramod Naik" userId="ceb6df04-ef15-4d9b-a141-998a03559d75" providerId="ADAL" clId="{62E9B5AE-779D-4001-92D3-8FF830A8A9C1}" dt="2025-10-29T06:45:59.562" v="3027" actId="403"/>
         <pc:sldMkLst>
@@ -1203,27 +579,6 @@
             <ac:spMk id="3" creationId="{16F99938-04B2-18EF-CB76-B49128814016}"/>
           </ac:spMkLst>
         </pc:spChg>
-      </pc:sldChg>
-      <pc:sldChg chg="addSp delSp modSp new mod">
-        <pc:chgData name="Pramod Naik" userId="ceb6df04-ef15-4d9b-a141-998a03559d75" providerId="ADAL" clId="{62E9B5AE-779D-4001-92D3-8FF830A8A9C1}" dt="2025-10-09T19:26:54.859" v="271" actId="27636"/>
-        <pc:sldMkLst>
-          <pc:docMk/>
-          <pc:sldMk cId="2854140960" sldId="542"/>
-        </pc:sldMkLst>
-      </pc:sldChg>
-      <pc:sldChg chg="addSp modSp add del mod">
-        <pc:chgData name="Pramod Naik" userId="ceb6df04-ef15-4d9b-a141-998a03559d75" providerId="ADAL" clId="{62E9B5AE-779D-4001-92D3-8FF830A8A9C1}" dt="2025-10-26T05:53:01.889" v="2484" actId="47"/>
-        <pc:sldMkLst>
-          <pc:docMk/>
-          <pc:sldMk cId="3002241645" sldId="542"/>
-        </pc:sldMkLst>
-      </pc:sldChg>
-      <pc:sldChg chg="addSp modSp add del mod">
-        <pc:chgData name="Pramod Naik" userId="ceb6df04-ef15-4d9b-a141-998a03559d75" providerId="ADAL" clId="{62E9B5AE-779D-4001-92D3-8FF830A8A9C1}" dt="2025-10-26T06:41:27.026" v="2885" actId="2696"/>
-        <pc:sldMkLst>
-          <pc:docMk/>
-          <pc:sldMk cId="4202198839" sldId="542"/>
-        </pc:sldMkLst>
       </pc:sldChg>
       <pc:sldChg chg="modSp add mod">
         <pc:chgData name="Pramod Naik" userId="ceb6df04-ef15-4d9b-a141-998a03559d75" providerId="ADAL" clId="{62E9B5AE-779D-4001-92D3-8FF830A8A9C1}" dt="2025-10-29T06:51:48.191" v="3030" actId="207"/>
@@ -1240,67 +595,11 @@
           </ac:spMkLst>
         </pc:spChg>
       </pc:sldChg>
-      <pc:sldChg chg="addSp modSp add del mod">
-        <pc:chgData name="Pramod Naik" userId="ceb6df04-ef15-4d9b-a141-998a03559d75" providerId="ADAL" clId="{62E9B5AE-779D-4001-92D3-8FF830A8A9C1}" dt="2025-10-26T05:53:01.949" v="2485" actId="47"/>
-        <pc:sldMkLst>
-          <pc:docMk/>
-          <pc:sldMk cId="1636630037" sldId="543"/>
-        </pc:sldMkLst>
-      </pc:sldChg>
-      <pc:sldChg chg="delSp modSp new mod">
-        <pc:chgData name="Pramod Naik" userId="ceb6df04-ef15-4d9b-a141-998a03559d75" providerId="ADAL" clId="{62E9B5AE-779D-4001-92D3-8FF830A8A9C1}" dt="2025-10-09T19:28:03.812" v="276"/>
-        <pc:sldMkLst>
-          <pc:docMk/>
-          <pc:sldMk cId="3110123514" sldId="543"/>
-        </pc:sldMkLst>
-      </pc:sldChg>
-      <pc:sldChg chg="modSp add del mod">
-        <pc:chgData name="Pramod Naik" userId="ceb6df04-ef15-4d9b-a141-998a03559d75" providerId="ADAL" clId="{62E9B5AE-779D-4001-92D3-8FF830A8A9C1}" dt="2025-10-26T06:41:27.026" v="2885" actId="2696"/>
-        <pc:sldMkLst>
-          <pc:docMk/>
-          <pc:sldMk cId="3323561692" sldId="543"/>
-        </pc:sldMkLst>
-      </pc:sldChg>
-      <pc:sldChg chg="addSp modSp add del mod">
-        <pc:chgData name="Pramod Naik" userId="ceb6df04-ef15-4d9b-a141-998a03559d75" providerId="ADAL" clId="{62E9B5AE-779D-4001-92D3-8FF830A8A9C1}" dt="2025-10-26T05:53:01.967" v="2486" actId="47"/>
-        <pc:sldMkLst>
-          <pc:docMk/>
-          <pc:sldMk cId="3112172767" sldId="544"/>
-        </pc:sldMkLst>
-      </pc:sldChg>
-      <pc:sldChg chg="addSp modSp add del mod">
-        <pc:chgData name="Pramod Naik" userId="ceb6df04-ef15-4d9b-a141-998a03559d75" providerId="ADAL" clId="{62E9B5AE-779D-4001-92D3-8FF830A8A9C1}" dt="2025-10-26T06:41:27.026" v="2885" actId="2696"/>
-        <pc:sldMkLst>
-          <pc:docMk/>
-          <pc:sldMk cId="3270327816" sldId="544"/>
-        </pc:sldMkLst>
-      </pc:sldChg>
       <pc:sldChg chg="add">
         <pc:chgData name="Pramod Naik" userId="ceb6df04-ef15-4d9b-a141-998a03559d75" providerId="ADAL" clId="{62E9B5AE-779D-4001-92D3-8FF830A8A9C1}" dt="2025-10-26T06:41:33.094" v="2886"/>
         <pc:sldMkLst>
           <pc:docMk/>
           <pc:sldMk cId="3813780875" sldId="544"/>
-        </pc:sldMkLst>
-      </pc:sldChg>
-      <pc:sldChg chg="delSp modSp new mod">
-        <pc:chgData name="Pramod Naik" userId="ceb6df04-ef15-4d9b-a141-998a03559d75" providerId="ADAL" clId="{62E9B5AE-779D-4001-92D3-8FF830A8A9C1}" dt="2025-10-09T19:34:28.822" v="323" actId="403"/>
-        <pc:sldMkLst>
-          <pc:docMk/>
-          <pc:sldMk cId="3900606193" sldId="544"/>
-        </pc:sldMkLst>
-      </pc:sldChg>
-      <pc:sldChg chg="delSp modSp new mod">
-        <pc:chgData name="Pramod Naik" userId="ceb6df04-ef15-4d9b-a141-998a03559d75" providerId="ADAL" clId="{62E9B5AE-779D-4001-92D3-8FF830A8A9C1}" dt="2025-10-09T19:36:05.739" v="342" actId="113"/>
-        <pc:sldMkLst>
-          <pc:docMk/>
-          <pc:sldMk cId="1280191467" sldId="545"/>
-        </pc:sldMkLst>
-      </pc:sldChg>
-      <pc:sldChg chg="addSp modSp add del mod">
-        <pc:chgData name="Pramod Naik" userId="ceb6df04-ef15-4d9b-a141-998a03559d75" providerId="ADAL" clId="{62E9B5AE-779D-4001-92D3-8FF830A8A9C1}" dt="2025-10-26T05:53:01.967" v="2487" actId="47"/>
-        <pc:sldMkLst>
-          <pc:docMk/>
-          <pc:sldMk cId="1701663649" sldId="545"/>
         </pc:sldMkLst>
       </pc:sldChg>
       <pc:sldChg chg="modSp add mod">
@@ -1333,28 +632,14 @@
           </ac:spMkLst>
         </pc:spChg>
       </pc:sldChg>
-      <pc:sldChg chg="modSp add del mod">
-        <pc:chgData name="Pramod Naik" userId="ceb6df04-ef15-4d9b-a141-998a03559d75" providerId="ADAL" clId="{62E9B5AE-779D-4001-92D3-8FF830A8A9C1}" dt="2025-10-26T05:53:02.017" v="2488" actId="47"/>
-        <pc:sldMkLst>
-          <pc:docMk/>
-          <pc:sldMk cId="976242571" sldId="546"/>
-        </pc:sldMkLst>
-      </pc:sldChg>
-      <pc:sldChg chg="modSp add mod">
-        <pc:chgData name="Pramod Naik" userId="ceb6df04-ef15-4d9b-a141-998a03559d75" providerId="ADAL" clId="{62E9B5AE-779D-4001-92D3-8FF830A8A9C1}" dt="2025-10-09T19:54:08.503" v="378" actId="113"/>
-        <pc:sldMkLst>
-          <pc:docMk/>
-          <pc:sldMk cId="3146542634" sldId="546"/>
-        </pc:sldMkLst>
-      </pc:sldChg>
       <pc:sldChg chg="addSp delSp modSp add mod">
-        <pc:chgData name="Pramod Naik" userId="ceb6df04-ef15-4d9b-a141-998a03559d75" providerId="ADAL" clId="{62E9B5AE-779D-4001-92D3-8FF830A8A9C1}" dt="2025-10-29T17:59:48.507" v="3158" actId="113"/>
+        <pc:chgData name="Pramod Naik" userId="ceb6df04-ef15-4d9b-a141-998a03559d75" providerId="ADAL" clId="{62E9B5AE-779D-4001-92D3-8FF830A8A9C1}" dt="2025-11-05T06:08:38.601" v="4334" actId="207"/>
         <pc:sldMkLst>
           <pc:docMk/>
           <pc:sldMk cId="1075547662" sldId="547"/>
         </pc:sldMkLst>
         <pc:spChg chg="mod">
-          <ac:chgData name="Pramod Naik" userId="ceb6df04-ef15-4d9b-a141-998a03559d75" providerId="ADAL" clId="{62E9B5AE-779D-4001-92D3-8FF830A8A9C1}" dt="2025-10-29T17:59:48.507" v="3158" actId="113"/>
+          <ac:chgData name="Pramod Naik" userId="ceb6df04-ef15-4d9b-a141-998a03559d75" providerId="ADAL" clId="{62E9B5AE-779D-4001-92D3-8FF830A8A9C1}" dt="2025-11-05T06:08:38.601" v="4334" actId="207"/>
           <ac:spMkLst>
             <pc:docMk/>
             <pc:sldMk cId="1075547662" sldId="547"/>
@@ -1369,27 +654,6 @@
             <ac:picMk id="4" creationId="{591D0356-8DE7-CE59-71BE-E3781041A58D}"/>
           </ac:picMkLst>
         </pc:picChg>
-      </pc:sldChg>
-      <pc:sldChg chg="addSp delSp modSp new del mod">
-        <pc:chgData name="Pramod Naik" userId="ceb6df04-ef15-4d9b-a141-998a03559d75" providerId="ADAL" clId="{62E9B5AE-779D-4001-92D3-8FF830A8A9C1}" dt="2025-10-26T05:52:59.807" v="2466" actId="47"/>
-        <pc:sldMkLst>
-          <pc:docMk/>
-          <pc:sldMk cId="1743501250" sldId="547"/>
-        </pc:sldMkLst>
-      </pc:sldChg>
-      <pc:sldChg chg="new">
-        <pc:chgData name="Pramod Naik" userId="ceb6df04-ef15-4d9b-a141-998a03559d75" providerId="ADAL" clId="{62E9B5AE-779D-4001-92D3-8FF830A8A9C1}" dt="2025-10-09T19:56:03.711" v="383" actId="680"/>
-        <pc:sldMkLst>
-          <pc:docMk/>
-          <pc:sldMk cId="2914679485" sldId="547"/>
-        </pc:sldMkLst>
-      </pc:sldChg>
-      <pc:sldChg chg="addSp delSp modSp new del mod">
-        <pc:chgData name="Pramod Naik" userId="ceb6df04-ef15-4d9b-a141-998a03559d75" providerId="ADAL" clId="{62E9B5AE-779D-4001-92D3-8FF830A8A9C1}" dt="2025-10-26T05:52:59.830" v="2467" actId="47"/>
-        <pc:sldMkLst>
-          <pc:docMk/>
-          <pc:sldMk cId="2217804995" sldId="548"/>
-        </pc:sldMkLst>
       </pc:sldChg>
       <pc:sldChg chg="addSp modSp add del mod ord">
         <pc:chgData name="Pramod Naik" userId="ceb6df04-ef15-4d9b-a141-998a03559d75" providerId="ADAL" clId="{62E9B5AE-779D-4001-92D3-8FF830A8A9C1}" dt="2025-10-29T18:16:20.876" v="3375"/>
@@ -1413,13 +677,6 @@
             <ac:picMk id="4" creationId="{5A8BD139-D089-F0CB-A7C3-D1C0D5CE971A}"/>
           </ac:picMkLst>
         </pc:picChg>
-      </pc:sldChg>
-      <pc:sldChg chg="addSp delSp modSp new del mod">
-        <pc:chgData name="Pramod Naik" userId="ceb6df04-ef15-4d9b-a141-998a03559d75" providerId="ADAL" clId="{62E9B5AE-779D-4001-92D3-8FF830A8A9C1}" dt="2025-10-26T05:52:59.843" v="2468" actId="47"/>
-        <pc:sldMkLst>
-          <pc:docMk/>
-          <pc:sldMk cId="52434813" sldId="549"/>
-        </pc:sldMkLst>
       </pc:sldChg>
       <pc:sldChg chg="addSp modSp add mod ord">
         <pc:chgData name="Pramod Naik" userId="ceb6df04-ef15-4d9b-a141-998a03559d75" providerId="ADAL" clId="{62E9B5AE-779D-4001-92D3-8FF830A8A9C1}" dt="2025-10-29T18:04:08.843" v="3197" actId="207"/>
@@ -1467,20 +724,6 @@
           </ac:picMkLst>
         </pc:picChg>
       </pc:sldChg>
-      <pc:sldChg chg="addSp delSp modSp add del mod">
-        <pc:chgData name="Pramod Naik" userId="ceb6df04-ef15-4d9b-a141-998a03559d75" providerId="ADAL" clId="{62E9B5AE-779D-4001-92D3-8FF830A8A9C1}" dt="2025-10-26T05:52:59.879" v="2469" actId="47"/>
-        <pc:sldMkLst>
-          <pc:docMk/>
-          <pc:sldMk cId="3742978219" sldId="550"/>
-        </pc:sldMkLst>
-      </pc:sldChg>
-      <pc:sldChg chg="modSp add del mod">
-        <pc:chgData name="Pramod Naik" userId="ceb6df04-ef15-4d9b-a141-998a03559d75" providerId="ADAL" clId="{62E9B5AE-779D-4001-92D3-8FF830A8A9C1}" dt="2025-10-26T05:52:59.917" v="2470" actId="47"/>
-        <pc:sldMkLst>
-          <pc:docMk/>
-          <pc:sldMk cId="1299490774" sldId="551"/>
-        </pc:sldMkLst>
-      </pc:sldChg>
       <pc:sldChg chg="addSp modSp add mod ord">
         <pc:chgData name="Pramod Naik" userId="ceb6df04-ef15-4d9b-a141-998a03559d75" providerId="ADAL" clId="{62E9B5AE-779D-4001-92D3-8FF830A8A9C1}" dt="2025-10-29T18:12:44.200" v="3283" actId="14100"/>
         <pc:sldMkLst>
@@ -1504,13 +747,6 @@
           </ac:picMkLst>
         </pc:picChg>
       </pc:sldChg>
-      <pc:sldChg chg="addSp modSp add del mod">
-        <pc:chgData name="Pramod Naik" userId="ceb6df04-ef15-4d9b-a141-998a03559d75" providerId="ADAL" clId="{62E9B5AE-779D-4001-92D3-8FF830A8A9C1}" dt="2025-10-26T05:52:59.951" v="2471" actId="47"/>
-        <pc:sldMkLst>
-          <pc:docMk/>
-          <pc:sldMk cId="865861587" sldId="552"/>
-        </pc:sldMkLst>
-      </pc:sldChg>
       <pc:sldChg chg="addSp delSp modSp add mod ord">
         <pc:chgData name="Pramod Naik" userId="ceb6df04-ef15-4d9b-a141-998a03559d75" providerId="ADAL" clId="{62E9B5AE-779D-4001-92D3-8FF830A8A9C1}" dt="2025-10-29T18:13:37.325" v="3287" actId="1076"/>
         <pc:sldMkLst>
@@ -1526,34 +762,20 @@
           </ac:picMkLst>
         </pc:picChg>
       </pc:sldChg>
-      <pc:sldChg chg="addSp delSp modSp add del mod">
-        <pc:chgData name="Pramod Naik" userId="ceb6df04-ef15-4d9b-a141-998a03559d75" providerId="ADAL" clId="{62E9B5AE-779D-4001-92D3-8FF830A8A9C1}" dt="2025-10-26T05:52:59.990" v="2472" actId="47"/>
-        <pc:sldMkLst>
-          <pc:docMk/>
-          <pc:sldMk cId="319971518" sldId="553"/>
-        </pc:sldMkLst>
-      </pc:sldChg>
       <pc:sldChg chg="modSp add mod">
-        <pc:chgData name="Pramod Naik" userId="ceb6df04-ef15-4d9b-a141-998a03559d75" providerId="ADAL" clId="{62E9B5AE-779D-4001-92D3-8FF830A8A9C1}" dt="2025-10-29T18:16:39.307" v="3402" actId="113"/>
+        <pc:chgData name="Pramod Naik" userId="ceb6df04-ef15-4d9b-a141-998a03559d75" providerId="ADAL" clId="{62E9B5AE-779D-4001-92D3-8FF830A8A9C1}" dt="2025-11-05T06:45:06.830" v="4347" actId="113"/>
         <pc:sldMkLst>
           <pc:docMk/>
           <pc:sldMk cId="1895132841" sldId="553"/>
         </pc:sldMkLst>
         <pc:spChg chg="mod">
-          <ac:chgData name="Pramod Naik" userId="ceb6df04-ef15-4d9b-a141-998a03559d75" providerId="ADAL" clId="{62E9B5AE-779D-4001-92D3-8FF830A8A9C1}" dt="2025-10-29T18:16:39.307" v="3402" actId="113"/>
+          <ac:chgData name="Pramod Naik" userId="ceb6df04-ef15-4d9b-a141-998a03559d75" providerId="ADAL" clId="{62E9B5AE-779D-4001-92D3-8FF830A8A9C1}" dt="2025-11-05T06:45:06.830" v="4347" actId="113"/>
           <ac:spMkLst>
             <pc:docMk/>
             <pc:sldMk cId="1895132841" sldId="553"/>
             <ac:spMk id="3" creationId="{BBABF3DF-1412-1262-0B45-131BB51E219D}"/>
           </ac:spMkLst>
         </pc:spChg>
-      </pc:sldChg>
-      <pc:sldChg chg="addSp delSp modSp add del mod">
-        <pc:chgData name="Pramod Naik" userId="ceb6df04-ef15-4d9b-a141-998a03559d75" providerId="ADAL" clId="{62E9B5AE-779D-4001-92D3-8FF830A8A9C1}" dt="2025-10-26T05:53:00.025" v="2473" actId="47"/>
-        <pc:sldMkLst>
-          <pc:docMk/>
-          <pc:sldMk cId="1986494582" sldId="554"/>
-        </pc:sldMkLst>
       </pc:sldChg>
       <pc:sldChg chg="addSp modSp add mod">
         <pc:chgData name="Pramod Naik" userId="ceb6df04-ef15-4d9b-a141-998a03559d75" providerId="ADAL" clId="{62E9B5AE-779D-4001-92D3-8FF830A8A9C1}" dt="2025-10-29T18:17:36.949" v="3412" actId="1076"/>
@@ -1641,34 +863,20 @@
           </ac:picMkLst>
         </pc:picChg>
       </pc:sldChg>
-      <pc:sldChg chg="modSp add del mod">
-        <pc:chgData name="Pramod Naik" userId="ceb6df04-ef15-4d9b-a141-998a03559d75" providerId="ADAL" clId="{62E9B5AE-779D-4001-92D3-8FF830A8A9C1}" dt="2025-10-26T05:53:00.064" v="2474" actId="47"/>
-        <pc:sldMkLst>
-          <pc:docMk/>
-          <pc:sldMk cId="2892914401" sldId="555"/>
-        </pc:sldMkLst>
-      </pc:sldChg>
       <pc:sldChg chg="modSp add mod">
-        <pc:chgData name="Pramod Naik" userId="ceb6df04-ef15-4d9b-a141-998a03559d75" providerId="ADAL" clId="{62E9B5AE-779D-4001-92D3-8FF830A8A9C1}" dt="2025-10-29T18:23:10.443" v="3433" actId="403"/>
+        <pc:chgData name="Pramod Naik" userId="ceb6df04-ef15-4d9b-a141-998a03559d75" providerId="ADAL" clId="{62E9B5AE-779D-4001-92D3-8FF830A8A9C1}" dt="2025-11-05T06:50:30.548" v="4351" actId="207"/>
         <pc:sldMkLst>
           <pc:docMk/>
           <pc:sldMk cId="216335680" sldId="556"/>
         </pc:sldMkLst>
         <pc:spChg chg="mod">
-          <ac:chgData name="Pramod Naik" userId="ceb6df04-ef15-4d9b-a141-998a03559d75" providerId="ADAL" clId="{62E9B5AE-779D-4001-92D3-8FF830A8A9C1}" dt="2025-10-29T18:23:10.443" v="3433" actId="403"/>
+          <ac:chgData name="Pramod Naik" userId="ceb6df04-ef15-4d9b-a141-998a03559d75" providerId="ADAL" clId="{62E9B5AE-779D-4001-92D3-8FF830A8A9C1}" dt="2025-11-05T06:50:30.548" v="4351" actId="207"/>
           <ac:spMkLst>
             <pc:docMk/>
             <pc:sldMk cId="216335680" sldId="556"/>
             <ac:spMk id="3" creationId="{93D4FA4F-FF49-9381-9088-14702BE90525}"/>
           </ac:spMkLst>
         </pc:spChg>
-      </pc:sldChg>
-      <pc:sldChg chg="addSp modSp add del mod">
-        <pc:chgData name="Pramod Naik" userId="ceb6df04-ef15-4d9b-a141-998a03559d75" providerId="ADAL" clId="{62E9B5AE-779D-4001-92D3-8FF830A8A9C1}" dt="2025-10-26T05:53:00.085" v="2475" actId="47"/>
-        <pc:sldMkLst>
-          <pc:docMk/>
-          <pc:sldMk cId="1111199599" sldId="556"/>
-        </pc:sldMkLst>
       </pc:sldChg>
       <pc:sldChg chg="addSp modSp add mod">
         <pc:chgData name="Pramod Naik" userId="ceb6df04-ef15-4d9b-a141-998a03559d75" providerId="ADAL" clId="{62E9B5AE-779D-4001-92D3-8FF830A8A9C1}" dt="2025-10-29T18:30:34.828" v="3450" actId="403"/>
@@ -1693,34 +901,20 @@
           </ac:picMkLst>
         </pc:picChg>
       </pc:sldChg>
-      <pc:sldChg chg="modSp add del mod">
-        <pc:chgData name="Pramod Naik" userId="ceb6df04-ef15-4d9b-a141-998a03559d75" providerId="ADAL" clId="{62E9B5AE-779D-4001-92D3-8FF830A8A9C1}" dt="2025-10-26T05:53:00.106" v="2476" actId="47"/>
-        <pc:sldMkLst>
-          <pc:docMk/>
-          <pc:sldMk cId="2258860110" sldId="557"/>
-        </pc:sldMkLst>
-      </pc:sldChg>
       <pc:sldChg chg="modSp add mod">
-        <pc:chgData name="Pramod Naik" userId="ceb6df04-ef15-4d9b-a141-998a03559d75" providerId="ADAL" clId="{62E9B5AE-779D-4001-92D3-8FF830A8A9C1}" dt="2025-10-29T18:33:27.562" v="3479" actId="403"/>
+        <pc:chgData name="Pramod Naik" userId="ceb6df04-ef15-4d9b-a141-998a03559d75" providerId="ADAL" clId="{62E9B5AE-779D-4001-92D3-8FF830A8A9C1}" dt="2025-11-05T07:04:31.845" v="4354" actId="207"/>
         <pc:sldMkLst>
           <pc:docMk/>
           <pc:sldMk cId="3215175598" sldId="558"/>
         </pc:sldMkLst>
         <pc:spChg chg="mod">
-          <ac:chgData name="Pramod Naik" userId="ceb6df04-ef15-4d9b-a141-998a03559d75" providerId="ADAL" clId="{62E9B5AE-779D-4001-92D3-8FF830A8A9C1}" dt="2025-10-29T18:33:27.562" v="3479" actId="403"/>
+          <ac:chgData name="Pramod Naik" userId="ceb6df04-ef15-4d9b-a141-998a03559d75" providerId="ADAL" clId="{62E9B5AE-779D-4001-92D3-8FF830A8A9C1}" dt="2025-11-05T07:04:31.845" v="4354" actId="207"/>
           <ac:spMkLst>
             <pc:docMk/>
             <pc:sldMk cId="3215175598" sldId="558"/>
             <ac:spMk id="3" creationId="{40DBE0BE-7C7C-8108-E793-38D4FF50C854}"/>
           </ac:spMkLst>
         </pc:spChg>
-      </pc:sldChg>
-      <pc:sldChg chg="modSp add del mod">
-        <pc:chgData name="Pramod Naik" userId="ceb6df04-ef15-4d9b-a141-998a03559d75" providerId="ADAL" clId="{62E9B5AE-779D-4001-92D3-8FF830A8A9C1}" dt="2025-10-26T05:53:00.143" v="2477" actId="47"/>
-        <pc:sldMkLst>
-          <pc:docMk/>
-          <pc:sldMk cId="3340419842" sldId="558"/>
-        </pc:sldMkLst>
       </pc:sldChg>
       <pc:sldChg chg="addSp delSp modSp add mod">
         <pc:chgData name="Pramod Naik" userId="ceb6df04-ef15-4d9b-a141-998a03559d75" providerId="ADAL" clId="{62E9B5AE-779D-4001-92D3-8FF830A8A9C1}" dt="2025-10-29T18:40:46.534" v="3506" actId="1076"/>
@@ -1744,20 +938,6 @@
             <ac:picMk id="6" creationId="{150AA1F4-AA37-D412-E86C-942DFE6B658C}"/>
           </ac:picMkLst>
         </pc:picChg>
-      </pc:sldChg>
-      <pc:sldChg chg="modSp add del mod">
-        <pc:chgData name="Pramod Naik" userId="ceb6df04-ef15-4d9b-a141-998a03559d75" providerId="ADAL" clId="{62E9B5AE-779D-4001-92D3-8FF830A8A9C1}" dt="2025-10-26T05:53:00.185" v="2478" actId="47"/>
-        <pc:sldMkLst>
-          <pc:docMk/>
-          <pc:sldMk cId="3804633679" sldId="559"/>
-        </pc:sldMkLst>
-      </pc:sldChg>
-      <pc:sldChg chg="addSp modSp add del mod">
-        <pc:chgData name="Pramod Naik" userId="ceb6df04-ef15-4d9b-a141-998a03559d75" providerId="ADAL" clId="{62E9B5AE-779D-4001-92D3-8FF830A8A9C1}" dt="2025-10-26T05:53:00.206" v="2479" actId="47"/>
-        <pc:sldMkLst>
-          <pc:docMk/>
-          <pc:sldMk cId="91052272" sldId="560"/>
-        </pc:sldMkLst>
       </pc:sldChg>
       <pc:sldChg chg="addSp modSp add mod">
         <pc:chgData name="Pramod Naik" userId="ceb6df04-ef15-4d9b-a141-998a03559d75" providerId="ADAL" clId="{62E9B5AE-779D-4001-92D3-8FF830A8A9C1}" dt="2025-10-29T18:35:38.105" v="3502" actId="22"/>
@@ -1805,20 +985,6 @@
           </ac:picMkLst>
         </pc:picChg>
       </pc:sldChg>
-      <pc:sldChg chg="modSp add del mod">
-        <pc:chgData name="Pramod Naik" userId="ceb6df04-ef15-4d9b-a141-998a03559d75" providerId="ADAL" clId="{62E9B5AE-779D-4001-92D3-8FF830A8A9C1}" dt="2025-10-26T05:53:02.050" v="2489" actId="47"/>
-        <pc:sldMkLst>
-          <pc:docMk/>
-          <pc:sldMk cId="4037816503" sldId="561"/>
-        </pc:sldMkLst>
-      </pc:sldChg>
-      <pc:sldChg chg="add del">
-        <pc:chgData name="Pramod Naik" userId="ceb6df04-ef15-4d9b-a141-998a03559d75" providerId="ADAL" clId="{62E9B5AE-779D-4001-92D3-8FF830A8A9C1}" dt="2025-10-14T05:52:25.527" v="1871" actId="2696"/>
-        <pc:sldMkLst>
-          <pc:docMk/>
-          <pc:sldMk cId="4226352970" sldId="561"/>
-        </pc:sldMkLst>
-      </pc:sldChg>
       <pc:sldChg chg="modSp add mod">
         <pc:chgData name="Pramod Naik" userId="ceb6df04-ef15-4d9b-a141-998a03559d75" providerId="ADAL" clId="{62E9B5AE-779D-4001-92D3-8FF830A8A9C1}" dt="2025-10-29T18:43:06.446" v="3529" actId="113"/>
         <pc:sldMkLst>
@@ -1833,20 +999,6 @@
             <ac:spMk id="3" creationId="{82C59336-0695-7311-88FA-940BF6424B61}"/>
           </ac:spMkLst>
         </pc:spChg>
-      </pc:sldChg>
-      <pc:sldChg chg="add del">
-        <pc:chgData name="Pramod Naik" userId="ceb6df04-ef15-4d9b-a141-998a03559d75" providerId="ADAL" clId="{62E9B5AE-779D-4001-92D3-8FF830A8A9C1}" dt="2025-10-14T05:52:28.136" v="1872" actId="47"/>
-        <pc:sldMkLst>
-          <pc:docMk/>
-          <pc:sldMk cId="1623273479" sldId="562"/>
-        </pc:sldMkLst>
-      </pc:sldChg>
-      <pc:sldChg chg="modSp add del mod">
-        <pc:chgData name="Pramod Naik" userId="ceb6df04-ef15-4d9b-a141-998a03559d75" providerId="ADAL" clId="{62E9B5AE-779D-4001-92D3-8FF830A8A9C1}" dt="2025-10-26T05:53:02.077" v="2490" actId="47"/>
-        <pc:sldMkLst>
-          <pc:docMk/>
-          <pc:sldMk cId="1912196509" sldId="562"/>
-        </pc:sldMkLst>
       </pc:sldChg>
       <pc:sldChg chg="addSp modSp add mod ord">
         <pc:chgData name="Pramod Naik" userId="ceb6df04-ef15-4d9b-a141-998a03559d75" providerId="ADAL" clId="{62E9B5AE-779D-4001-92D3-8FF830A8A9C1}" dt="2025-11-01T13:56:55.828" v="3550"/>
@@ -1887,34 +1039,12 @@
           </ac:picMkLst>
         </pc:picChg>
       </pc:sldChg>
-      <pc:sldChg chg="addSp modSp add del mod">
-        <pc:chgData name="Pramod Naik" userId="ceb6df04-ef15-4d9b-a141-998a03559d75" providerId="ADAL" clId="{62E9B5AE-779D-4001-92D3-8FF830A8A9C1}" dt="2025-10-26T05:53:02.113" v="2491" actId="47"/>
-        <pc:sldMkLst>
-          <pc:docMk/>
-          <pc:sldMk cId="3246291351" sldId="563"/>
-        </pc:sldMkLst>
-      </pc:sldChg>
-      <pc:sldChg chg="addSp modSp add del mod">
-        <pc:chgData name="Pramod Naik" userId="ceb6df04-ef15-4d9b-a141-998a03559d75" providerId="ADAL" clId="{62E9B5AE-779D-4001-92D3-8FF830A8A9C1}" dt="2025-10-26T05:53:02.143" v="2492" actId="47"/>
-        <pc:sldMkLst>
-          <pc:docMk/>
-          <pc:sldMk cId="813558974" sldId="564"/>
-        </pc:sldMkLst>
-      </pc:sldChg>
       <pc:sldChg chg="addSp delSp modSp add mod ord">
         <pc:chgData name="Pramod Naik" userId="ceb6df04-ef15-4d9b-a141-998a03559d75" providerId="ADAL" clId="{62E9B5AE-779D-4001-92D3-8FF830A8A9C1}" dt="2025-11-01T13:58:51.691" v="3560" actId="1076"/>
         <pc:sldMkLst>
           <pc:docMk/>
           <pc:sldMk cId="1794317502" sldId="564"/>
         </pc:sldMkLst>
-        <pc:spChg chg="del">
-          <ac:chgData name="Pramod Naik" userId="ceb6df04-ef15-4d9b-a141-998a03559d75" providerId="ADAL" clId="{62E9B5AE-779D-4001-92D3-8FF830A8A9C1}" dt="2025-11-01T13:58:47.281" v="3559" actId="478"/>
-          <ac:spMkLst>
-            <pc:docMk/>
-            <pc:sldMk cId="1794317502" sldId="564"/>
-            <ac:spMk id="3" creationId="{FC24096A-3BE6-88B2-F3CC-318F849A5EAF}"/>
-          </ac:spMkLst>
-        </pc:spChg>
         <pc:picChg chg="add mod">
           <ac:chgData name="Pramod Naik" userId="ceb6df04-ef15-4d9b-a141-998a03559d75" providerId="ADAL" clId="{62E9B5AE-779D-4001-92D3-8FF830A8A9C1}" dt="2025-11-01T13:58:51.691" v="3560" actId="1076"/>
           <ac:picMkLst>
@@ -1923,13 +1053,6 @@
             <ac:picMk id="2050" creationId="{F581DCC5-6A64-8FC8-35F6-9DD8C8F6F6B3}"/>
           </ac:picMkLst>
         </pc:picChg>
-      </pc:sldChg>
-      <pc:sldChg chg="addSp delSp modSp add del mod">
-        <pc:chgData name="Pramod Naik" userId="ceb6df04-ef15-4d9b-a141-998a03559d75" providerId="ADAL" clId="{62E9B5AE-779D-4001-92D3-8FF830A8A9C1}" dt="2025-10-26T05:53:02.177" v="2493" actId="47"/>
-        <pc:sldMkLst>
-          <pc:docMk/>
-          <pc:sldMk cId="494025414" sldId="565"/>
-        </pc:sldMkLst>
       </pc:sldChg>
       <pc:sldChg chg="addSp delSp modSp add mod setBg">
         <pc:chgData name="Pramod Naik" userId="ceb6df04-ef15-4d9b-a141-998a03559d75" providerId="ADAL" clId="{62E9B5AE-779D-4001-92D3-8FF830A8A9C1}" dt="2025-11-01T14:03:23.049" v="3620" actId="20577"/>
@@ -1945,38 +1068,6 @@
             <ac:spMk id="3" creationId="{998A68B0-5C24-F615-D4FC-1FBD05838EC3}"/>
           </ac:spMkLst>
         </pc:spChg>
-        <pc:spChg chg="add del">
-          <ac:chgData name="Pramod Naik" userId="ceb6df04-ef15-4d9b-a141-998a03559d75" providerId="ADAL" clId="{62E9B5AE-779D-4001-92D3-8FF830A8A9C1}" dt="2025-11-01T14:01:40.662" v="3600" actId="26606"/>
-          <ac:spMkLst>
-            <pc:docMk/>
-            <pc:sldMk cId="4103649649" sldId="565"/>
-            <ac:spMk id="3079" creationId="{4F8E18AC-903E-4B46-8CC0-FE20E612CE37}"/>
-          </ac:spMkLst>
-        </pc:spChg>
-        <pc:spChg chg="add del">
-          <ac:chgData name="Pramod Naik" userId="ceb6df04-ef15-4d9b-a141-998a03559d75" providerId="ADAL" clId="{62E9B5AE-779D-4001-92D3-8FF830A8A9C1}" dt="2025-11-01T14:01:40.662" v="3600" actId="26606"/>
-          <ac:spMkLst>
-            <pc:docMk/>
-            <pc:sldMk cId="4103649649" sldId="565"/>
-            <ac:spMk id="3081" creationId="{3DEE38FB-0763-470C-8A5E-44456B5130D7}"/>
-          </ac:spMkLst>
-        </pc:spChg>
-        <pc:spChg chg="add del">
-          <ac:chgData name="Pramod Naik" userId="ceb6df04-ef15-4d9b-a141-998a03559d75" providerId="ADAL" clId="{62E9B5AE-779D-4001-92D3-8FF830A8A9C1}" dt="2025-11-01T14:01:40.662" v="3600" actId="26606"/>
-          <ac:spMkLst>
-            <pc:docMk/>
-            <pc:sldMk cId="4103649649" sldId="565"/>
-            <ac:spMk id="3083" creationId="{F1D6E6C0-11C7-4A38-BD12-80741960B53C}"/>
-          </ac:spMkLst>
-        </pc:spChg>
-        <pc:grpChg chg="add del">
-          <ac:chgData name="Pramod Naik" userId="ceb6df04-ef15-4d9b-a141-998a03559d75" providerId="ADAL" clId="{62E9B5AE-779D-4001-92D3-8FF830A8A9C1}" dt="2025-11-01T14:01:40.662" v="3600" actId="26606"/>
-          <ac:grpSpMkLst>
-            <pc:docMk/>
-            <pc:sldMk cId="4103649649" sldId="565"/>
-            <ac:grpSpMk id="3085" creationId="{2B16E781-E64A-4007-B0F1-5A50135A4276}"/>
-          </ac:grpSpMkLst>
-        </pc:grpChg>
         <pc:picChg chg="add mod">
           <ac:chgData name="Pramod Naik" userId="ceb6df04-ef15-4d9b-a141-998a03559d75" providerId="ADAL" clId="{62E9B5AE-779D-4001-92D3-8FF830A8A9C1}" dt="2025-11-01T14:01:48.812" v="3602" actId="1076"/>
           <ac:picMkLst>
@@ -2001,13 +1092,6 @@
           </ac:spMkLst>
         </pc:spChg>
       </pc:sldChg>
-      <pc:sldChg chg="addSp modSp add del mod">
-        <pc:chgData name="Pramod Naik" userId="ceb6df04-ef15-4d9b-a141-998a03559d75" providerId="ADAL" clId="{62E9B5AE-779D-4001-92D3-8FF830A8A9C1}" dt="2025-10-26T05:53:02.205" v="2494" actId="47"/>
-        <pc:sldMkLst>
-          <pc:docMk/>
-          <pc:sldMk cId="4083528472" sldId="566"/>
-        </pc:sldMkLst>
-      </pc:sldChg>
       <pc:sldChg chg="addSp modSp add mod ord">
         <pc:chgData name="Pramod Naik" userId="ceb6df04-ef15-4d9b-a141-998a03559d75" providerId="ADAL" clId="{62E9B5AE-779D-4001-92D3-8FF830A8A9C1}" dt="2025-11-01T14:05:27.088" v="3717" actId="20577"/>
         <pc:sldMkLst>
@@ -2030,20 +1114,6 @@
             <ac:picMk id="4" creationId="{B3540E61-41BD-C529-F3F5-E658F2D9590A}"/>
           </ac:picMkLst>
         </pc:picChg>
-      </pc:sldChg>
-      <pc:sldChg chg="addSp modSp add del mod">
-        <pc:chgData name="Pramod Naik" userId="ceb6df04-ef15-4d9b-a141-998a03559d75" providerId="ADAL" clId="{62E9B5AE-779D-4001-92D3-8FF830A8A9C1}" dt="2025-10-26T05:53:02.247" v="2495" actId="47"/>
-        <pc:sldMkLst>
-          <pc:docMk/>
-          <pc:sldMk cId="4110756528" sldId="567"/>
-        </pc:sldMkLst>
-      </pc:sldChg>
-      <pc:sldChg chg="modSp add del mod">
-        <pc:chgData name="Pramod Naik" userId="ceb6df04-ef15-4d9b-a141-998a03559d75" providerId="ADAL" clId="{62E9B5AE-779D-4001-92D3-8FF830A8A9C1}" dt="2025-10-26T05:53:02.276" v="2496" actId="47"/>
-        <pc:sldMkLst>
-          <pc:docMk/>
-          <pc:sldMk cId="1668062704" sldId="568"/>
-        </pc:sldMkLst>
       </pc:sldChg>
       <pc:sldChg chg="addSp modSp add mod">
         <pc:chgData name="Pramod Naik" userId="ceb6df04-ef15-4d9b-a141-998a03559d75" providerId="ADAL" clId="{62E9B5AE-779D-4001-92D3-8FF830A8A9C1}" dt="2025-11-01T14:07:57.957" v="3824" actId="1076"/>
@@ -2092,21 +1162,14 @@
           </ac:picMkLst>
         </pc:picChg>
       </pc:sldChg>
-      <pc:sldChg chg="addSp modSp add del mod">
-        <pc:chgData name="Pramod Naik" userId="ceb6df04-ef15-4d9b-a141-998a03559d75" providerId="ADAL" clId="{62E9B5AE-779D-4001-92D3-8FF830A8A9C1}" dt="2025-10-26T05:53:02.307" v="2497" actId="47"/>
-        <pc:sldMkLst>
-          <pc:docMk/>
-          <pc:sldMk cId="959162173" sldId="569"/>
-        </pc:sldMkLst>
-      </pc:sldChg>
       <pc:sldChg chg="addSp modSp add mod">
-        <pc:chgData name="Pramod Naik" userId="ceb6df04-ef15-4d9b-a141-998a03559d75" providerId="ADAL" clId="{62E9B5AE-779D-4001-92D3-8FF830A8A9C1}" dt="2025-11-01T14:17:04.171" v="3925" actId="113"/>
+        <pc:chgData name="Pramod Naik" userId="ceb6df04-ef15-4d9b-a141-998a03559d75" providerId="ADAL" clId="{62E9B5AE-779D-4001-92D3-8FF830A8A9C1}" dt="2025-11-05T05:10:05.941" v="4073" actId="207"/>
         <pc:sldMkLst>
           <pc:docMk/>
           <pc:sldMk cId="3330856063" sldId="569"/>
         </pc:sldMkLst>
         <pc:spChg chg="mod">
-          <ac:chgData name="Pramod Naik" userId="ceb6df04-ef15-4d9b-a141-998a03559d75" providerId="ADAL" clId="{62E9B5AE-779D-4001-92D3-8FF830A8A9C1}" dt="2025-11-01T14:17:04.171" v="3925" actId="113"/>
+          <ac:chgData name="Pramod Naik" userId="ceb6df04-ef15-4d9b-a141-998a03559d75" providerId="ADAL" clId="{62E9B5AE-779D-4001-92D3-8FF830A8A9C1}" dt="2025-11-05T05:10:05.941" v="4073" actId="207"/>
           <ac:spMkLst>
             <pc:docMk/>
             <pc:sldMk cId="3330856063" sldId="569"/>
@@ -2145,49 +1208,28 @@
           </ac:graphicFrameMkLst>
         </pc:graphicFrameChg>
       </pc:sldChg>
-      <pc:sldChg chg="addSp modSp add del mod">
-        <pc:chgData name="Pramod Naik" userId="ceb6df04-ef15-4d9b-a141-998a03559d75" providerId="ADAL" clId="{62E9B5AE-779D-4001-92D3-8FF830A8A9C1}" dt="2025-10-26T05:53:02.337" v="2498" actId="47"/>
-        <pc:sldMkLst>
-          <pc:docMk/>
-          <pc:sldMk cId="3252099199" sldId="570"/>
-        </pc:sldMkLst>
-      </pc:sldChg>
-      <pc:sldChg chg="addSp delSp modSp add del mod">
-        <pc:chgData name="Pramod Naik" userId="ceb6df04-ef15-4d9b-a141-998a03559d75" providerId="ADAL" clId="{62E9B5AE-779D-4001-92D3-8FF830A8A9C1}" dt="2025-10-26T05:53:02.373" v="2499" actId="47"/>
-        <pc:sldMkLst>
-          <pc:docMk/>
-          <pc:sldMk cId="1073918120" sldId="571"/>
-        </pc:sldMkLst>
-      </pc:sldChg>
       <pc:sldChg chg="addSp modSp add mod">
-        <pc:chgData name="Pramod Naik" userId="ceb6df04-ef15-4d9b-a141-998a03559d75" providerId="ADAL" clId="{62E9B5AE-779D-4001-92D3-8FF830A8A9C1}" dt="2025-11-01T14:21:41.211" v="3969" actId="1076"/>
+        <pc:chgData name="Pramod Naik" userId="ceb6df04-ef15-4d9b-a141-998a03559d75" providerId="ADAL" clId="{62E9B5AE-779D-4001-92D3-8FF830A8A9C1}" dt="2025-11-05T05:13:00.865" v="4102" actId="1076"/>
         <pc:sldMkLst>
           <pc:docMk/>
           <pc:sldMk cId="1873530423" sldId="571"/>
         </pc:sldMkLst>
         <pc:spChg chg="mod">
-          <ac:chgData name="Pramod Naik" userId="ceb6df04-ef15-4d9b-a141-998a03559d75" providerId="ADAL" clId="{62E9B5AE-779D-4001-92D3-8FF830A8A9C1}" dt="2025-11-01T14:20:13.727" v="3954" actId="20577"/>
+          <ac:chgData name="Pramod Naik" userId="ceb6df04-ef15-4d9b-a141-998a03559d75" providerId="ADAL" clId="{62E9B5AE-779D-4001-92D3-8FF830A8A9C1}" dt="2025-11-05T05:12:53.088" v="4098" actId="21"/>
           <ac:spMkLst>
             <pc:docMk/>
             <pc:sldMk cId="1873530423" sldId="571"/>
             <ac:spMk id="3" creationId="{BEB1F599-617A-8661-24F8-C8DC9394C1CF}"/>
           </ac:spMkLst>
         </pc:spChg>
-        <pc:graphicFrameChg chg="add mod modGraphic">
-          <ac:chgData name="Pramod Naik" userId="ceb6df04-ef15-4d9b-a141-998a03559d75" providerId="ADAL" clId="{62E9B5AE-779D-4001-92D3-8FF830A8A9C1}" dt="2025-11-01T14:21:41.211" v="3969" actId="1076"/>
-          <ac:graphicFrameMkLst>
+        <pc:picChg chg="add mod">
+          <ac:chgData name="Pramod Naik" userId="ceb6df04-ef15-4d9b-a141-998a03559d75" providerId="ADAL" clId="{62E9B5AE-779D-4001-92D3-8FF830A8A9C1}" dt="2025-11-05T05:13:00.865" v="4102" actId="1076"/>
+          <ac:picMkLst>
             <pc:docMk/>
             <pc:sldMk cId="1873530423" sldId="571"/>
-            <ac:graphicFrameMk id="2" creationId="{33280359-D07B-2B59-F42A-322E79B79653}"/>
-          </ac:graphicFrameMkLst>
-        </pc:graphicFrameChg>
-      </pc:sldChg>
-      <pc:sldChg chg="addSp modSp add del mod">
-        <pc:chgData name="Pramod Naik" userId="ceb6df04-ef15-4d9b-a141-998a03559d75" providerId="ADAL" clId="{62E9B5AE-779D-4001-92D3-8FF830A8A9C1}" dt="2025-10-26T05:53:02.406" v="2500" actId="47"/>
-        <pc:sldMkLst>
-          <pc:docMk/>
-          <pc:sldMk cId="1808909135" sldId="572"/>
-        </pc:sldMkLst>
+            <ac:picMk id="4" creationId="{47974D31-FFDA-3ACF-4471-314256397943}"/>
+          </ac:picMkLst>
+        </pc:picChg>
       </pc:sldChg>
       <pc:sldChg chg="addSp modSp add mod">
         <pc:chgData name="Pramod Naik" userId="ceb6df04-ef15-4d9b-a141-998a03559d75" providerId="ADAL" clId="{62E9B5AE-779D-4001-92D3-8FF830A8A9C1}" dt="2025-11-01T14:23:25.747" v="3998" actId="207"/>
@@ -2212,13 +1254,6 @@
           </ac:graphicFrameMkLst>
         </pc:graphicFrameChg>
       </pc:sldChg>
-      <pc:sldChg chg="addSp modSp add del mod">
-        <pc:chgData name="Pramod Naik" userId="ceb6df04-ef15-4d9b-a141-998a03559d75" providerId="ADAL" clId="{62E9B5AE-779D-4001-92D3-8FF830A8A9C1}" dt="2025-10-26T05:53:02.438" v="2501" actId="47"/>
-        <pc:sldMkLst>
-          <pc:docMk/>
-          <pc:sldMk cId="636557185" sldId="573"/>
-        </pc:sldMkLst>
-      </pc:sldChg>
       <pc:sldChg chg="addSp modSp add mod">
         <pc:chgData name="Pramod Naik" userId="ceb6df04-ef15-4d9b-a141-998a03559d75" providerId="ADAL" clId="{62E9B5AE-779D-4001-92D3-8FF830A8A9C1}" dt="2025-11-01T14:25:04.390" v="4053" actId="5793"/>
         <pc:sldMkLst>
@@ -2242,39 +1277,11 @@
           </ac:picMkLst>
         </pc:picChg>
       </pc:sldChg>
-      <pc:sldChg chg="addSp modSp add del mod">
-        <pc:chgData name="Pramod Naik" userId="ceb6df04-ef15-4d9b-a141-998a03559d75" providerId="ADAL" clId="{62E9B5AE-779D-4001-92D3-8FF830A8A9C1}" dt="2025-10-26T05:53:02.473" v="2502" actId="47"/>
-        <pc:sldMkLst>
-          <pc:docMk/>
-          <pc:sldMk cId="2101197699" sldId="574"/>
-        </pc:sldMkLst>
-      </pc:sldChg>
-      <pc:sldChg chg="add">
-        <pc:chgData name="Pramod Naik" userId="ceb6df04-ef15-4d9b-a141-998a03559d75" providerId="ADAL" clId="{62E9B5AE-779D-4001-92D3-8FF830A8A9C1}" dt="2025-11-01T14:04:20.010" v="3673"/>
-        <pc:sldMkLst>
-          <pc:docMk/>
-          <pc:sldMk cId="4026936663" sldId="574"/>
-        </pc:sldMkLst>
-      </pc:sldChg>
-      <pc:sldChg chg="add del">
-        <pc:chgData name="Pramod Naik" userId="ceb6df04-ef15-4d9b-a141-998a03559d75" providerId="ADAL" clId="{62E9B5AE-779D-4001-92D3-8FF830A8A9C1}" dt="2025-10-24T05:15:08.428" v="2385" actId="47"/>
-        <pc:sldMkLst>
-          <pc:docMk/>
-          <pc:sldMk cId="1438792373" sldId="575"/>
-        </pc:sldMkLst>
-      </pc:sldChg>
       <pc:sldChg chg="add">
         <pc:chgData name="Pramod Naik" userId="ceb6df04-ef15-4d9b-a141-998a03559d75" providerId="ADAL" clId="{62E9B5AE-779D-4001-92D3-8FF830A8A9C1}" dt="2025-11-01T14:04:20.055" v="3674"/>
         <pc:sldMkLst>
           <pc:docMk/>
           <pc:sldMk cId="3130721367" sldId="575"/>
-        </pc:sldMkLst>
-      </pc:sldChg>
-      <pc:sldChg chg="add del">
-        <pc:chgData name="Pramod Naik" userId="ceb6df04-ef15-4d9b-a141-998a03559d75" providerId="ADAL" clId="{62E9B5AE-779D-4001-92D3-8FF830A8A9C1}" dt="2025-10-24T05:15:09.265" v="2386" actId="47"/>
-        <pc:sldMkLst>
-          <pc:docMk/>
-          <pc:sldMk cId="34796182" sldId="576"/>
         </pc:sldMkLst>
       </pc:sldChg>
       <pc:sldChg chg="add">
@@ -2291,25 +1298,11 @@
           <pc:sldMk cId="2559913098" sldId="577"/>
         </pc:sldMkLst>
       </pc:sldChg>
-      <pc:sldChg chg="add del">
-        <pc:chgData name="Pramod Naik" userId="ceb6df04-ef15-4d9b-a141-998a03559d75" providerId="ADAL" clId="{62E9B5AE-779D-4001-92D3-8FF830A8A9C1}" dt="2025-10-24T05:15:10.215" v="2387" actId="47"/>
-        <pc:sldMkLst>
-          <pc:docMk/>
-          <pc:sldMk cId="2734079874" sldId="577"/>
-        </pc:sldMkLst>
-      </pc:sldChg>
       <pc:sldChg chg="add">
         <pc:chgData name="Pramod Naik" userId="ceb6df04-ef15-4d9b-a141-998a03559d75" providerId="ADAL" clId="{62E9B5AE-779D-4001-92D3-8FF830A8A9C1}" dt="2025-11-01T14:04:20.153" v="3677"/>
         <pc:sldMkLst>
           <pc:docMk/>
           <pc:sldMk cId="238499470" sldId="578"/>
-        </pc:sldMkLst>
-      </pc:sldChg>
-      <pc:sldChg chg="addSp delSp modSp add del mod">
-        <pc:chgData name="Pramod Naik" userId="ceb6df04-ef15-4d9b-a141-998a03559d75" providerId="ADAL" clId="{62E9B5AE-779D-4001-92D3-8FF830A8A9C1}" dt="2025-10-26T05:53:02.506" v="2503" actId="47"/>
-        <pc:sldMkLst>
-          <pc:docMk/>
-          <pc:sldMk cId="2851575667" sldId="578"/>
         </pc:sldMkLst>
       </pc:sldChg>
       <pc:sldChg chg="add">
@@ -2353,6 +1346,242 @@
           <pc:docMk/>
           <pc:sldMk cId="4084032356" sldId="584"/>
         </pc:sldMkLst>
+      </pc:sldChg>
+      <pc:sldChg chg="delSp modSp new del mod">
+        <pc:chgData name="Pramod Naik" userId="ceb6df04-ef15-4d9b-a141-998a03559d75" providerId="ADAL" clId="{62E9B5AE-779D-4001-92D3-8FF830A8A9C1}" dt="2025-11-05T05:15:59.125" v="4148" actId="2696"/>
+        <pc:sldMkLst>
+          <pc:docMk/>
+          <pc:sldMk cId="896797499" sldId="592"/>
+        </pc:sldMkLst>
+        <pc:spChg chg="del">
+          <ac:chgData name="Pramod Naik" userId="ceb6df04-ef15-4d9b-a141-998a03559d75" providerId="ADAL" clId="{62E9B5AE-779D-4001-92D3-8FF830A8A9C1}" dt="2025-11-05T05:10:12.663" v="4075" actId="478"/>
+          <ac:spMkLst>
+            <pc:docMk/>
+            <pc:sldMk cId="896797499" sldId="592"/>
+            <ac:spMk id="2" creationId="{D0DB7BD7-ED04-CE09-DCC6-5AC281621DC6}"/>
+          </ac:spMkLst>
+        </pc:spChg>
+        <pc:spChg chg="mod">
+          <ac:chgData name="Pramod Naik" userId="ceb6df04-ef15-4d9b-a141-998a03559d75" providerId="ADAL" clId="{62E9B5AE-779D-4001-92D3-8FF830A8A9C1}" dt="2025-11-05T05:15:54.714" v="4147" actId="20577"/>
+          <ac:spMkLst>
+            <pc:docMk/>
+            <pc:sldMk cId="896797499" sldId="592"/>
+            <ac:spMk id="3" creationId="{68A28E55-1A27-4D87-0369-8E918B701798}"/>
+          </ac:spMkLst>
+        </pc:spChg>
+      </pc:sldChg>
+      <pc:sldChg chg="addSp modSp add mod">
+        <pc:chgData name="Pramod Naik" userId="ceb6df04-ef15-4d9b-a141-998a03559d75" providerId="ADAL" clId="{62E9B5AE-779D-4001-92D3-8FF830A8A9C1}" dt="2025-11-05T05:19:25.339" v="4228" actId="27636"/>
+        <pc:sldMkLst>
+          <pc:docMk/>
+          <pc:sldMk cId="2226177675" sldId="592"/>
+        </pc:sldMkLst>
+        <pc:spChg chg="mod">
+          <ac:chgData name="Pramod Naik" userId="ceb6df04-ef15-4d9b-a141-998a03559d75" providerId="ADAL" clId="{62E9B5AE-779D-4001-92D3-8FF830A8A9C1}" dt="2025-11-05T05:19:25.339" v="4228" actId="27636"/>
+          <ac:spMkLst>
+            <pc:docMk/>
+            <pc:sldMk cId="2226177675" sldId="592"/>
+            <ac:spMk id="3" creationId="{68A28E55-1A27-4D87-0369-8E918B701798}"/>
+          </ac:spMkLst>
+        </pc:spChg>
+        <pc:picChg chg="add mod">
+          <ac:chgData name="Pramod Naik" userId="ceb6df04-ef15-4d9b-a141-998a03559d75" providerId="ADAL" clId="{62E9B5AE-779D-4001-92D3-8FF830A8A9C1}" dt="2025-11-05T05:19:06.489" v="4213" actId="1076"/>
+          <ac:picMkLst>
+            <pc:docMk/>
+            <pc:sldMk cId="2226177675" sldId="592"/>
+            <ac:picMk id="4" creationId="{07440E90-59E2-2D23-9CD9-C16556E0DD6A}"/>
+          </ac:picMkLst>
+        </pc:picChg>
+        <pc:picChg chg="add mod">
+          <ac:chgData name="Pramod Naik" userId="ceb6df04-ef15-4d9b-a141-998a03559d75" providerId="ADAL" clId="{62E9B5AE-779D-4001-92D3-8FF830A8A9C1}" dt="2025-11-05T05:19:08.554" v="4214" actId="1076"/>
+          <ac:picMkLst>
+            <pc:docMk/>
+            <pc:sldMk cId="2226177675" sldId="592"/>
+            <ac:picMk id="6" creationId="{AB20FCE8-79DB-1149-FA25-6AA17D5808AD}"/>
+          </ac:picMkLst>
+        </pc:picChg>
+      </pc:sldChg>
+      <pc:sldChg chg="add del">
+        <pc:chgData name="Pramod Naik" userId="ceb6df04-ef15-4d9b-a141-998a03559d75" providerId="ADAL" clId="{62E9B5AE-779D-4001-92D3-8FF830A8A9C1}" dt="2025-11-05T05:15:59.125" v="4148" actId="2696"/>
+        <pc:sldMkLst>
+          <pc:docMk/>
+          <pc:sldMk cId="2827447359" sldId="593"/>
+        </pc:sldMkLst>
+      </pc:sldChg>
+      <pc:sldChg chg="addSp modSp add mod">
+        <pc:chgData name="Pramod Naik" userId="ceb6df04-ef15-4d9b-a141-998a03559d75" providerId="ADAL" clId="{62E9B5AE-779D-4001-92D3-8FF830A8A9C1}" dt="2025-11-05T05:21:19.662" v="4265" actId="1076"/>
+        <pc:sldMkLst>
+          <pc:docMk/>
+          <pc:sldMk cId="3805469623" sldId="593"/>
+        </pc:sldMkLst>
+        <pc:spChg chg="mod">
+          <ac:chgData name="Pramod Naik" userId="ceb6df04-ef15-4d9b-a141-998a03559d75" providerId="ADAL" clId="{62E9B5AE-779D-4001-92D3-8FF830A8A9C1}" dt="2025-11-05T05:21:15.242" v="4263" actId="20577"/>
+          <ac:spMkLst>
+            <pc:docMk/>
+            <pc:sldMk cId="3805469623" sldId="593"/>
+            <ac:spMk id="3" creationId="{4867100E-64F7-80FB-CA49-ED1A8BB682C7}"/>
+          </ac:spMkLst>
+        </pc:spChg>
+        <pc:picChg chg="add mod">
+          <ac:chgData name="Pramod Naik" userId="ceb6df04-ef15-4d9b-a141-998a03559d75" providerId="ADAL" clId="{62E9B5AE-779D-4001-92D3-8FF830A8A9C1}" dt="2025-11-05T05:21:19.662" v="4265" actId="1076"/>
+          <ac:picMkLst>
+            <pc:docMk/>
+            <pc:sldMk cId="3805469623" sldId="593"/>
+            <ac:picMk id="4" creationId="{2B2ACE42-2E3E-F35B-4AE8-9D0E5234D971}"/>
+          </ac:picMkLst>
+        </pc:picChg>
+      </pc:sldChg>
+      <pc:sldChg chg="add del">
+        <pc:chgData name="Pramod Naik" userId="ceb6df04-ef15-4d9b-a141-998a03559d75" providerId="ADAL" clId="{62E9B5AE-779D-4001-92D3-8FF830A8A9C1}" dt="2025-11-05T05:15:59.125" v="4148" actId="2696"/>
+        <pc:sldMkLst>
+          <pc:docMk/>
+          <pc:sldMk cId="1722304795" sldId="594"/>
+        </pc:sldMkLst>
+      </pc:sldChg>
+      <pc:sldChg chg="addSp modSp add mod">
+        <pc:chgData name="Pramod Naik" userId="ceb6df04-ef15-4d9b-a141-998a03559d75" providerId="ADAL" clId="{62E9B5AE-779D-4001-92D3-8FF830A8A9C1}" dt="2025-11-05T05:21:45.372" v="4269" actId="1076"/>
+        <pc:sldMkLst>
+          <pc:docMk/>
+          <pc:sldMk cId="4218562115" sldId="594"/>
+        </pc:sldMkLst>
+        <pc:spChg chg="mod">
+          <ac:chgData name="Pramod Naik" userId="ceb6df04-ef15-4d9b-a141-998a03559d75" providerId="ADAL" clId="{62E9B5AE-779D-4001-92D3-8FF830A8A9C1}" dt="2025-11-05T05:21:22.840" v="4266" actId="403"/>
+          <ac:spMkLst>
+            <pc:docMk/>
+            <pc:sldMk cId="4218562115" sldId="594"/>
+            <ac:spMk id="3" creationId="{8AF2952E-5CAC-43FA-1454-65EFF384492B}"/>
+          </ac:spMkLst>
+        </pc:spChg>
+        <pc:picChg chg="add mod">
+          <ac:chgData name="Pramod Naik" userId="ceb6df04-ef15-4d9b-a141-998a03559d75" providerId="ADAL" clId="{62E9B5AE-779D-4001-92D3-8FF830A8A9C1}" dt="2025-11-05T05:21:45.372" v="4269" actId="1076"/>
+          <ac:picMkLst>
+            <pc:docMk/>
+            <pc:sldMk cId="4218562115" sldId="594"/>
+            <ac:picMk id="4" creationId="{6A24FF66-DE71-94E1-A074-31433D42952A}"/>
+          </ac:picMkLst>
+        </pc:picChg>
+      </pc:sldChg>
+      <pc:sldChg chg="addSp modSp add mod ord">
+        <pc:chgData name="Pramod Naik" userId="ceb6df04-ef15-4d9b-a141-998a03559d75" providerId="ADAL" clId="{62E9B5AE-779D-4001-92D3-8FF830A8A9C1}" dt="2025-11-05T05:14:50.352" v="4142" actId="1076"/>
+        <pc:sldMkLst>
+          <pc:docMk/>
+          <pc:sldMk cId="496024509" sldId="595"/>
+        </pc:sldMkLst>
+        <pc:spChg chg="mod">
+          <ac:chgData name="Pramod Naik" userId="ceb6df04-ef15-4d9b-a141-998a03559d75" providerId="ADAL" clId="{62E9B5AE-779D-4001-92D3-8FF830A8A9C1}" dt="2025-11-05T05:14:01.452" v="4139" actId="404"/>
+          <ac:spMkLst>
+            <pc:docMk/>
+            <pc:sldMk cId="496024509" sldId="595"/>
+            <ac:spMk id="3" creationId="{72C617F3-7D7C-7726-E072-A524EDE6C54F}"/>
+          </ac:spMkLst>
+        </pc:spChg>
+        <pc:picChg chg="add mod">
+          <ac:chgData name="Pramod Naik" userId="ceb6df04-ef15-4d9b-a141-998a03559d75" providerId="ADAL" clId="{62E9B5AE-779D-4001-92D3-8FF830A8A9C1}" dt="2025-11-05T05:14:50.352" v="4142" actId="1076"/>
+          <ac:picMkLst>
+            <pc:docMk/>
+            <pc:sldMk cId="496024509" sldId="595"/>
+            <ac:picMk id="4" creationId="{20745609-E694-2602-ACB1-787B4220D664}"/>
+          </ac:picMkLst>
+        </pc:picChg>
+      </pc:sldChg>
+      <pc:sldChg chg="modSp add mod">
+        <pc:chgData name="Pramod Naik" userId="ceb6df04-ef15-4d9b-a141-998a03559d75" providerId="ADAL" clId="{62E9B5AE-779D-4001-92D3-8FF830A8A9C1}" dt="2025-11-05T05:22:08.873" v="4273" actId="113"/>
+        <pc:sldMkLst>
+          <pc:docMk/>
+          <pc:sldMk cId="3426568117" sldId="596"/>
+        </pc:sldMkLst>
+        <pc:spChg chg="mod">
+          <ac:chgData name="Pramod Naik" userId="ceb6df04-ef15-4d9b-a141-998a03559d75" providerId="ADAL" clId="{62E9B5AE-779D-4001-92D3-8FF830A8A9C1}" dt="2025-11-05T05:22:08.873" v="4273" actId="113"/>
+          <ac:spMkLst>
+            <pc:docMk/>
+            <pc:sldMk cId="3426568117" sldId="596"/>
+            <ac:spMk id="3" creationId="{7BA9A570-8FCF-9969-CFCC-8A194421DA99}"/>
+          </ac:spMkLst>
+        </pc:spChg>
+      </pc:sldChg>
+      <pc:sldChg chg="addSp modSp add mod">
+        <pc:chgData name="Pramod Naik" userId="ceb6df04-ef15-4d9b-a141-998a03559d75" providerId="ADAL" clId="{62E9B5AE-779D-4001-92D3-8FF830A8A9C1}" dt="2025-11-05T05:23:40.990" v="4295" actId="12"/>
+        <pc:sldMkLst>
+          <pc:docMk/>
+          <pc:sldMk cId="2542148358" sldId="597"/>
+        </pc:sldMkLst>
+        <pc:spChg chg="mod">
+          <ac:chgData name="Pramod Naik" userId="ceb6df04-ef15-4d9b-a141-998a03559d75" providerId="ADAL" clId="{62E9B5AE-779D-4001-92D3-8FF830A8A9C1}" dt="2025-11-05T05:23:40.990" v="4295" actId="12"/>
+          <ac:spMkLst>
+            <pc:docMk/>
+            <pc:sldMk cId="2542148358" sldId="597"/>
+            <ac:spMk id="3" creationId="{7F610804-8CF7-2A58-7F55-B6DC858FF3D1}"/>
+          </ac:spMkLst>
+        </pc:spChg>
+        <pc:picChg chg="add mod">
+          <ac:chgData name="Pramod Naik" userId="ceb6df04-ef15-4d9b-a141-998a03559d75" providerId="ADAL" clId="{62E9B5AE-779D-4001-92D3-8FF830A8A9C1}" dt="2025-11-05T05:23:24.639" v="4284" actId="1076"/>
+          <ac:picMkLst>
+            <pc:docMk/>
+            <pc:sldMk cId="2542148358" sldId="597"/>
+            <ac:picMk id="4" creationId="{C1DE3F97-43C1-272E-E30C-9E4C54DC6457}"/>
+          </ac:picMkLst>
+        </pc:picChg>
+      </pc:sldChg>
+      <pc:sldChg chg="addSp modSp add mod">
+        <pc:chgData name="Pramod Naik" userId="ceb6df04-ef15-4d9b-a141-998a03559d75" providerId="ADAL" clId="{62E9B5AE-779D-4001-92D3-8FF830A8A9C1}" dt="2025-11-05T05:24:20.176" v="4304" actId="1076"/>
+        <pc:sldMkLst>
+          <pc:docMk/>
+          <pc:sldMk cId="3280842218" sldId="598"/>
+        </pc:sldMkLst>
+        <pc:spChg chg="mod">
+          <ac:chgData name="Pramod Naik" userId="ceb6df04-ef15-4d9b-a141-998a03559d75" providerId="ADAL" clId="{62E9B5AE-779D-4001-92D3-8FF830A8A9C1}" dt="2025-11-05T05:24:02.945" v="4302" actId="15"/>
+          <ac:spMkLst>
+            <pc:docMk/>
+            <pc:sldMk cId="3280842218" sldId="598"/>
+            <ac:spMk id="3" creationId="{03AE26E3-75E8-4BF3-478B-C4E68CCAFC9D}"/>
+          </ac:spMkLst>
+        </pc:spChg>
+        <pc:picChg chg="add mod">
+          <ac:chgData name="Pramod Naik" userId="ceb6df04-ef15-4d9b-a141-998a03559d75" providerId="ADAL" clId="{62E9B5AE-779D-4001-92D3-8FF830A8A9C1}" dt="2025-11-05T05:24:20.176" v="4304" actId="1076"/>
+          <ac:picMkLst>
+            <pc:docMk/>
+            <pc:sldMk cId="3280842218" sldId="598"/>
+            <ac:picMk id="4" creationId="{58F0970E-160C-7D34-5DC5-7682318E0C52}"/>
+          </ac:picMkLst>
+        </pc:picChg>
+      </pc:sldChg>
+      <pc:sldChg chg="add">
+        <pc:chgData name="Pramod Naik" userId="ceb6df04-ef15-4d9b-a141-998a03559d75" providerId="ADAL" clId="{62E9B5AE-779D-4001-92D3-8FF830A8A9C1}" dt="2025-11-05T05:22:12.615" v="4275"/>
+        <pc:sldMkLst>
+          <pc:docMk/>
+          <pc:sldMk cId="2019070159" sldId="599"/>
+        </pc:sldMkLst>
+      </pc:sldChg>
+      <pc:sldChg chg="addSp delSp modSp new mod">
+        <pc:chgData name="Pramod Naik" userId="ceb6df04-ef15-4d9b-a141-998a03559d75" providerId="ADAL" clId="{62E9B5AE-779D-4001-92D3-8FF830A8A9C1}" dt="2025-11-05T06:06:21.311" v="4333" actId="1076"/>
+        <pc:sldMkLst>
+          <pc:docMk/>
+          <pc:sldMk cId="844457774" sldId="600"/>
+        </pc:sldMkLst>
+        <pc:spChg chg="del">
+          <ac:chgData name="Pramod Naik" userId="ceb6df04-ef15-4d9b-a141-998a03559d75" providerId="ADAL" clId="{62E9B5AE-779D-4001-92D3-8FF830A8A9C1}" dt="2025-11-05T06:05:24.702" v="4306" actId="478"/>
+          <ac:spMkLst>
+            <pc:docMk/>
+            <pc:sldMk cId="844457774" sldId="600"/>
+            <ac:spMk id="2" creationId="{E7763484-DFFE-7225-8526-DA1D0C9CEE4C}"/>
+          </ac:spMkLst>
+        </pc:spChg>
+        <pc:spChg chg="mod">
+          <ac:chgData name="Pramod Naik" userId="ceb6df04-ef15-4d9b-a141-998a03559d75" providerId="ADAL" clId="{62E9B5AE-779D-4001-92D3-8FF830A8A9C1}" dt="2025-11-05T06:05:39.484" v="4330" actId="113"/>
+          <ac:spMkLst>
+            <pc:docMk/>
+            <pc:sldMk cId="844457774" sldId="600"/>
+            <ac:spMk id="3" creationId="{5F3C8EDD-9A8B-71D0-5EB2-D46211D6782C}"/>
+          </ac:spMkLst>
+        </pc:spChg>
+        <pc:picChg chg="add mod">
+          <ac:chgData name="Pramod Naik" userId="ceb6df04-ef15-4d9b-a141-998a03559d75" providerId="ADAL" clId="{62E9B5AE-779D-4001-92D3-8FF830A8A9C1}" dt="2025-11-05T06:06:21.311" v="4333" actId="1076"/>
+          <ac:picMkLst>
+            <pc:docMk/>
+            <pc:sldMk cId="844457774" sldId="600"/>
+            <ac:picMk id="5" creationId="{409034AF-32FC-1650-FD0D-DFF3D5809E51}"/>
+          </ac:picMkLst>
+        </pc:picChg>
       </pc:sldChg>
     </pc:docChg>
   </pc:docChgLst>
@@ -2441,7 +1670,7 @@
           <a:p>
             <a:fld id="{61532AF1-4615-4667-912A-829B12F8C4D2}" type="datetimeFigureOut">
               <a:rPr lang="en-IN" smtClean="0"/>
-              <a:t>01-11-2025</a:t>
+              <a:t>05-11-2025</a:t>
             </a:fld>
             <a:endParaRPr lang="en-IN"/>
           </a:p>
@@ -2858,7 +2087,7 @@
           <a:p>
             <a:fld id="{C43A76A3-ADC8-4477-8FC1-B9DD55D84908}" type="datetime1">
               <a:rPr lang="en-US" smtClean="0"/>
-              <a:t>11/1/2025</a:t>
+              <a:t>11/5/2025</a:t>
             </a:fld>
             <a:endParaRPr lang="en-US" dirty="0"/>
           </a:p>
@@ -3056,7 +2285,7 @@
           <a:p>
             <a:fld id="{D6762538-DC4D-4667-96E5-B3278DDF8B12}" type="datetime1">
               <a:rPr lang="en-US" smtClean="0"/>
-              <a:t>11/1/2025</a:t>
+              <a:t>11/5/2025</a:t>
             </a:fld>
             <a:endParaRPr lang="en-US"/>
           </a:p>
@@ -3264,7 +2493,7 @@
           <a:p>
             <a:fld id="{05880548-5C08-4BE3-B63E-F2BB63B0B00C}" type="datetime1">
               <a:rPr lang="en-US" smtClean="0"/>
-              <a:t>11/1/2025</a:t>
+              <a:t>11/5/2025</a:t>
             </a:fld>
             <a:endParaRPr lang="en-US"/>
           </a:p>
@@ -3462,7 +2691,7 @@
           <a:p>
             <a:fld id="{DE7F49BE-398D-479A-8A7E-5DDBCA61EDCB}" type="datetime1">
               <a:rPr lang="en-US" smtClean="0"/>
-              <a:t>11/1/2025</a:t>
+              <a:t>11/5/2025</a:t>
             </a:fld>
             <a:endParaRPr lang="en-US" dirty="0"/>
           </a:p>
@@ -3738,7 +2967,7 @@
           <a:p>
             <a:fld id="{CCD0C193-4974-4A1F-9C63-07D595E30D66}" type="datetime1">
               <a:rPr lang="en-US" smtClean="0"/>
-              <a:t>11/1/2025</a:t>
+              <a:t>11/5/2025</a:t>
             </a:fld>
             <a:endParaRPr lang="en-US"/>
           </a:p>
@@ -4005,7 +3234,7 @@
           <a:p>
             <a:fld id="{701AA87F-28D4-4BF0-B81F-877A89DFD5AC}" type="datetime1">
               <a:rPr lang="en-US" smtClean="0"/>
-              <a:t>11/1/2025</a:t>
+              <a:t>11/5/2025</a:t>
             </a:fld>
             <a:endParaRPr lang="en-US"/>
           </a:p>
@@ -4419,7 +3648,7 @@
           <a:p>
             <a:fld id="{A8A9F1F3-208B-49A3-B337-9C8ACEB3E0E1}" type="datetime1">
               <a:rPr lang="en-US" smtClean="0"/>
-              <a:t>11/1/2025</a:t>
+              <a:t>11/5/2025</a:t>
             </a:fld>
             <a:endParaRPr lang="en-US"/>
           </a:p>
@@ -4566,7 +3795,7 @@
           <a:p>
             <a:fld id="{27AF6CA6-7293-4AA2-A0E0-A3BF4416E786}" type="datetime1">
               <a:rPr lang="en-US" smtClean="0"/>
-              <a:t>11/1/2025</a:t>
+              <a:t>11/5/2025</a:t>
             </a:fld>
             <a:endParaRPr lang="en-US"/>
           </a:p>
@@ -4679,7 +3908,7 @@
           <a:p>
             <a:fld id="{98D87016-7BCD-46FB-8EE3-AB6C369108B4}" type="datetime1">
               <a:rPr lang="en-US" smtClean="0"/>
-              <a:t>11/1/2025</a:t>
+              <a:t>11/5/2025</a:t>
             </a:fld>
             <a:endParaRPr lang="en-US"/>
           </a:p>
@@ -4998,7 +4227,7 @@
           <a:p>
             <a:fld id="{A1547011-1FFC-4EF8-9A2E-53B4AD2ADBD4}" type="datetime1">
               <a:rPr lang="en-US" smtClean="0"/>
-              <a:t>11/1/2025</a:t>
+              <a:t>11/5/2025</a:t>
             </a:fld>
             <a:endParaRPr lang="en-US"/>
           </a:p>
@@ -5293,7 +4522,7 @@
           <a:p>
             <a:fld id="{9562EB47-45B4-4EF5-A743-B4885DD2F060}" type="datetime1">
               <a:rPr lang="en-US" smtClean="0"/>
-              <a:t>11/1/2025</a:t>
+              <a:t>11/5/2025</a:t>
             </a:fld>
             <a:endParaRPr lang="en-US"/>
           </a:p>
@@ -6678,7 +5907,7 @@
           <a:p>
             <a:fld id="{4A8D24A4-5FEC-4062-8995-EB21925B3B40}" type="datetime1">
               <a:rPr lang="en-US" smtClean="0"/>
-              <a:t>11/1/2025</a:t>
+              <a:t>11/5/2025</a:t>
             </a:fld>
             <a:endParaRPr lang="en-US" sz="1000" dirty="0"/>
           </a:p>
@@ -10405,6 +9634,110 @@
   <p:cSld>
     <p:spTree>
       <p:nvGrpSpPr>
+        <p:cNvPr id="1" name=""/>
+        <p:cNvGrpSpPr/>
+        <p:nvPr/>
+      </p:nvGrpSpPr>
+      <p:grpSpPr>
+        <a:xfrm>
+          <a:off x="0" y="0"/>
+          <a:ext cx="0" cy="0"/>
+          <a:chOff x="0" y="0"/>
+          <a:chExt cx="0" cy="0"/>
+        </a:xfrm>
+      </p:grpSpPr>
+      <p:sp>
+        <p:nvSpPr>
+          <p:cNvPr id="3" name="Content Placeholder 2">
+            <a:extLst>
+              <a:ext uri="{FF2B5EF4-FFF2-40B4-BE49-F238E27FC236}">
+                <a16:creationId xmlns:a16="http://schemas.microsoft.com/office/drawing/2014/main" id="{5F3C8EDD-9A8B-71D0-5EB2-D46211D6782C}"/>
+              </a:ext>
+            </a:extLst>
+          </p:cNvPr>
+          <p:cNvSpPr>
+            <a:spLocks noGrp="1"/>
+          </p:cNvSpPr>
+          <p:nvPr>
+            <p:ph idx="1"/>
+          </p:nvPr>
+        </p:nvSpPr>
+        <p:spPr>
+          <a:xfrm>
+            <a:off x="777240" y="914400"/>
+            <a:ext cx="10659110" cy="5262563"/>
+          </a:xfrm>
+        </p:spPr>
+        <p:txBody>
+          <a:bodyPr>
+            <a:normAutofit/>
+          </a:bodyPr>
+          <a:lstStyle/>
+          <a:p>
+            <a:pPr marL="0" indent="0">
+              <a:buNone/>
+            </a:pPr>
+            <a:r>
+              <a:rPr lang="en-IN" sz="2400" b="1" dirty="0"/>
+              <a:t>Request Object:</a:t>
+            </a:r>
+          </a:p>
+          <a:p>
+            <a:pPr marL="0" indent="0">
+              <a:buNone/>
+            </a:pPr>
+            <a:endParaRPr lang="en-IN" sz="2400" b="1" dirty="0"/>
+          </a:p>
+        </p:txBody>
+      </p:sp>
+      <p:pic>
+        <p:nvPicPr>
+          <p:cNvPr id="5" name="Picture 4">
+            <a:extLst>
+              <a:ext uri="{FF2B5EF4-FFF2-40B4-BE49-F238E27FC236}">
+                <a16:creationId xmlns:a16="http://schemas.microsoft.com/office/drawing/2014/main" id="{409034AF-32FC-1650-FD0D-DFF3D5809E51}"/>
+              </a:ext>
+            </a:extLst>
+          </p:cNvPr>
+          <p:cNvPicPr>
+            <a:picLocks noChangeAspect="1"/>
+          </p:cNvPicPr>
+          <p:nvPr/>
+        </p:nvPicPr>
+        <p:blipFill>
+          <a:blip r:embed="rId2"/>
+          <a:stretch>
+            <a:fillRect/>
+          </a:stretch>
+        </p:blipFill>
+        <p:spPr>
+          <a:xfrm>
+            <a:off x="3117848" y="1442232"/>
+            <a:ext cx="6466667" cy="4866667"/>
+          </a:xfrm>
+          <a:prstGeom prst="rect">
+            <a:avLst/>
+          </a:prstGeom>
+        </p:spPr>
+      </p:pic>
+    </p:spTree>
+    <p:extLst>
+      <p:ext uri="{BB962C8B-B14F-4D97-AF65-F5344CB8AC3E}">
+        <p14:creationId xmlns:p14="http://schemas.microsoft.com/office/powerpoint/2010/main" val="844457774"/>
+      </p:ext>
+    </p:extLst>
+  </p:cSld>
+  <p:clrMapOvr>
+    <a:masterClrMapping/>
+  </p:clrMapOvr>
+</p:sld>
+</file>
+
+<file path=ppt/slides/slide25.xml><?xml version="1.0" encoding="utf-8"?>
+<p:sld xmlns:a="http://schemas.openxmlformats.org/drawingml/2006/main" xmlns:r="http://schemas.openxmlformats.org/officeDocument/2006/relationships" xmlns:p="http://schemas.openxmlformats.org/presentationml/2006/main">
+  <p:cSld>
+    <p:spTree>
+      <p:nvGrpSpPr>
         <p:cNvPr id="1" name="">
           <a:extLst>
             <a:ext uri="{FF2B5EF4-FFF2-40B4-BE49-F238E27FC236}">
@@ -10613,7 +9946,7 @@
 </p:sld>
 </file>
 
-<file path=ppt/slides/slide25.xml><?xml version="1.0" encoding="utf-8"?>
+<file path=ppt/slides/slide26.xml><?xml version="1.0" encoding="utf-8"?>
 <p:sld xmlns:a="http://schemas.openxmlformats.org/drawingml/2006/main" xmlns:r="http://schemas.openxmlformats.org/officeDocument/2006/relationships" xmlns:p="http://schemas.openxmlformats.org/presentationml/2006/main">
   <p:cSld>
     <p:spTree>
@@ -10797,7 +10130,7 @@
 </p:sld>
 </file>
 
-<file path=ppt/slides/slide26.xml><?xml version="1.0" encoding="utf-8"?>
+<file path=ppt/slides/slide27.xml><?xml version="1.0" encoding="utf-8"?>
 <p:sld xmlns:a="http://schemas.openxmlformats.org/drawingml/2006/main" xmlns:r="http://schemas.openxmlformats.org/officeDocument/2006/relationships" xmlns:p="http://schemas.openxmlformats.org/presentationml/2006/main">
   <p:cSld>
     <p:spTree>
@@ -10878,7 +10211,11 @@
               <a:t>, middleware must be </a:t>
             </a:r>
             <a:r>
-              <a:rPr lang="en-US" sz="2800" b="1" dirty="0"/>
+              <a:rPr lang="en-US" sz="2800" b="1" dirty="0">
+                <a:solidFill>
+                  <a:srgbClr val="C00000"/>
+                </a:solidFill>
+              </a:rPr>
               <a:t>asynchronous</a:t>
             </a:r>
             <a:r>
@@ -10999,7 +10336,7 @@
 </p:sld>
 </file>
 
-<file path=ppt/slides/slide27.xml><?xml version="1.0" encoding="utf-8"?>
+<file path=ppt/slides/slide28.xml><?xml version="1.0" encoding="utf-8"?>
 <p:sld xmlns:a="http://schemas.openxmlformats.org/drawingml/2006/main" xmlns:r="http://schemas.openxmlformats.org/officeDocument/2006/relationships" xmlns:p="http://schemas.openxmlformats.org/presentationml/2006/main">
   <p:cSld>
     <p:spTree>
@@ -11191,7 +10528,7 @@
 </p:sld>
 </file>
 
-<file path=ppt/slides/slide28.xml><?xml version="1.0" encoding="utf-8"?>
+<file path=ppt/slides/slide29.xml><?xml version="1.0" encoding="utf-8"?>
 <p:sld xmlns:a="http://schemas.openxmlformats.org/drawingml/2006/main" xmlns:r="http://schemas.openxmlformats.org/officeDocument/2006/relationships" xmlns:p="http://schemas.openxmlformats.org/presentationml/2006/main">
   <p:cSld>
     <p:spTree>
@@ -11292,246 +10629,6 @@
     <p:extLst>
       <p:ext uri="{BB962C8B-B14F-4D97-AF65-F5344CB8AC3E}">
         <p14:creationId xmlns:p14="http://schemas.microsoft.com/office/powerpoint/2010/main" val="1926645783"/>
-      </p:ext>
-    </p:extLst>
-  </p:cSld>
-  <p:clrMapOvr>
-    <a:masterClrMapping/>
-  </p:clrMapOvr>
-</p:sld>
-</file>
-
-<file path=ppt/slides/slide29.xml><?xml version="1.0" encoding="utf-8"?>
-<p:sld xmlns:a="http://schemas.openxmlformats.org/drawingml/2006/main" xmlns:r="http://schemas.openxmlformats.org/officeDocument/2006/relationships" xmlns:p="http://schemas.openxmlformats.org/presentationml/2006/main">
-  <p:cSld>
-    <p:spTree>
-      <p:nvGrpSpPr>
-        <p:cNvPr id="1" name="">
-          <a:extLst>
-            <a:ext uri="{FF2B5EF4-FFF2-40B4-BE49-F238E27FC236}">
-              <a16:creationId xmlns:a16="http://schemas.microsoft.com/office/drawing/2014/main" id="{17ADAFAD-662D-A68A-1649-E0A9090801D5}"/>
-            </a:ext>
-          </a:extLst>
-        </p:cNvPr>
-        <p:cNvGrpSpPr/>
-        <p:nvPr/>
-      </p:nvGrpSpPr>
-      <p:grpSpPr>
-        <a:xfrm>
-          <a:off x="0" y="0"/>
-          <a:ext cx="0" cy="0"/>
-          <a:chOff x="0" y="0"/>
-          <a:chExt cx="0" cy="0"/>
-        </a:xfrm>
-      </p:grpSpPr>
-      <p:sp>
-        <p:nvSpPr>
-          <p:cNvPr id="3" name="Content Placeholder 2">
-            <a:extLst>
-              <a:ext uri="{FF2B5EF4-FFF2-40B4-BE49-F238E27FC236}">
-                <a16:creationId xmlns:a16="http://schemas.microsoft.com/office/drawing/2014/main" id="{AA11C33D-7267-21DD-E537-2FC9F908BECC}"/>
-              </a:ext>
-            </a:extLst>
-          </p:cNvPr>
-          <p:cNvSpPr>
-            <a:spLocks noGrp="1"/>
-          </p:cNvSpPr>
-          <p:nvPr>
-            <p:ph idx="1"/>
-          </p:nvPr>
-        </p:nvSpPr>
-        <p:spPr>
-          <a:xfrm>
-            <a:off x="777240" y="696686"/>
-            <a:ext cx="10659110" cy="5480277"/>
-          </a:xfrm>
-        </p:spPr>
-        <p:txBody>
-          <a:bodyPr>
-            <a:normAutofit lnSpcReduction="10000"/>
-          </a:bodyPr>
-          <a:lstStyle/>
-          <a:p>
-            <a:pPr marL="0" indent="0">
-              <a:buNone/>
-            </a:pPr>
-            <a:r>
-              <a:rPr lang="en-IN" sz="2400" b="1" dirty="0"/>
-              <a:t>Output:</a:t>
-            </a:r>
-          </a:p>
-          <a:p>
-            <a:pPr marL="0" indent="0">
-              <a:buNone/>
-            </a:pPr>
-            <a:endParaRPr lang="en-IN" sz="2400" dirty="0"/>
-          </a:p>
-          <a:p>
-            <a:pPr marL="0" indent="0">
-              <a:buNone/>
-            </a:pPr>
-            <a:endParaRPr lang="en-IN" sz="2400" dirty="0"/>
-          </a:p>
-          <a:p>
-            <a:pPr marL="0" indent="0">
-              <a:buNone/>
-            </a:pPr>
-            <a:endParaRPr lang="en-IN" sz="2400" dirty="0"/>
-          </a:p>
-          <a:p>
-            <a:pPr marL="0" indent="0">
-              <a:buNone/>
-            </a:pPr>
-            <a:endParaRPr lang="en-IN" sz="2400" dirty="0"/>
-          </a:p>
-          <a:p>
-            <a:pPr marL="0" indent="0">
-              <a:buNone/>
-            </a:pPr>
-            <a:endParaRPr lang="en-IN" sz="2400" dirty="0"/>
-          </a:p>
-          <a:p>
-            <a:pPr marL="0" indent="0">
-              <a:buNone/>
-            </a:pPr>
-            <a:endParaRPr lang="en-IN" sz="2400" b="1" dirty="0"/>
-          </a:p>
-          <a:p>
-            <a:pPr marL="0" indent="0">
-              <a:buNone/>
-            </a:pPr>
-            <a:endParaRPr lang="en-IN" sz="2400" b="1" dirty="0"/>
-          </a:p>
-          <a:p>
-            <a:pPr marL="0" indent="0">
-              <a:buNone/>
-            </a:pPr>
-            <a:r>
-              <a:rPr lang="en-IN" sz="2400" b="1" dirty="0"/>
-              <a:t>Note:</a:t>
-            </a:r>
-          </a:p>
-          <a:p>
-            <a:r>
-              <a:rPr lang="en-US" sz="2400" dirty="0"/>
-              <a:t>The </a:t>
-            </a:r>
-            <a:r>
-              <a:rPr lang="en-US" sz="2400" i="1" dirty="0"/>
-              <a:t>last</a:t>
-            </a:r>
-            <a:r>
-              <a:rPr lang="en-US" sz="2400" dirty="0"/>
-              <a:t> middleware you declare in code becomes the </a:t>
-            </a:r>
-            <a:r>
-              <a:rPr lang="en-US" sz="2400" b="1" dirty="0"/>
-              <a:t>outermost</a:t>
-            </a:r>
-            <a:r>
-              <a:rPr lang="en-US" sz="2400" dirty="0"/>
-              <a:t> layer and runs </a:t>
-            </a:r>
-            <a:r>
-              <a:rPr lang="en-US" sz="2400" b="1" dirty="0"/>
-              <a:t>first</a:t>
-            </a:r>
-            <a:r>
-              <a:rPr lang="en-US" sz="2400" dirty="0"/>
-              <a:t> on the way </a:t>
-            </a:r>
-            <a:r>
-              <a:rPr lang="en-US" sz="2400" i="1" dirty="0"/>
-              <a:t>in</a:t>
-            </a:r>
-            <a:r>
-              <a:rPr lang="en-US" sz="2400" dirty="0"/>
-              <a:t> (request), and </a:t>
-            </a:r>
-            <a:r>
-              <a:rPr lang="en-US" sz="2400" b="1" dirty="0"/>
-              <a:t>last</a:t>
-            </a:r>
-            <a:r>
-              <a:rPr lang="en-US" sz="2400" dirty="0"/>
-              <a:t> on the way </a:t>
-            </a:r>
-            <a:r>
-              <a:rPr lang="en-US" sz="2400" i="1" dirty="0"/>
-              <a:t>out</a:t>
-            </a:r>
-            <a:r>
-              <a:rPr lang="en-US" sz="2400" dirty="0"/>
-              <a:t> (response).</a:t>
-            </a:r>
-          </a:p>
-          <a:p>
-            <a:r>
-              <a:rPr lang="en-US" sz="2400" dirty="0"/>
-              <a:t>This is because </a:t>
-            </a:r>
-            <a:r>
-              <a:rPr lang="en-US" sz="2400" dirty="0" err="1"/>
-              <a:t>FastAPI</a:t>
-            </a:r>
-            <a:r>
-              <a:rPr lang="en-US" sz="2400" dirty="0"/>
-              <a:t> builds the middleware chain </a:t>
-            </a:r>
-            <a:r>
-              <a:rPr lang="en-US" sz="2400" b="1" dirty="0"/>
-              <a:t>in reverse declaration order</a:t>
-            </a:r>
-            <a:r>
-              <a:rPr lang="en-US" sz="2400" dirty="0"/>
-              <a:t> — each new </a:t>
-            </a:r>
-            <a:r>
-              <a:rPr lang="en-US" dirty="0"/>
-              <a:t>@app.middleware("http")</a:t>
-            </a:r>
-            <a:r>
-              <a:rPr lang="en-US" sz="2400" dirty="0"/>
-              <a:t> wraps around the previous stack.</a:t>
-            </a:r>
-            <a:endParaRPr lang="en-IN" sz="2400" dirty="0"/>
-          </a:p>
-        </p:txBody>
-      </p:sp>
-      <p:pic>
-        <p:nvPicPr>
-          <p:cNvPr id="4" name="Picture 3">
-            <a:extLst>
-              <a:ext uri="{FF2B5EF4-FFF2-40B4-BE49-F238E27FC236}">
-                <a16:creationId xmlns:a16="http://schemas.microsoft.com/office/drawing/2014/main" id="{51B211C8-2BF3-F3F5-4EAC-5CB0D85BFE57}"/>
-              </a:ext>
-            </a:extLst>
-          </p:cNvPr>
-          <p:cNvPicPr>
-            <a:picLocks noChangeAspect="1"/>
-          </p:cNvPicPr>
-          <p:nvPr/>
-        </p:nvPicPr>
-        <p:blipFill>
-          <a:blip r:embed="rId2"/>
-          <a:stretch>
-            <a:fillRect/>
-          </a:stretch>
-        </p:blipFill>
-        <p:spPr>
-          <a:xfrm>
-            <a:off x="2126782" y="1303125"/>
-            <a:ext cx="6472934" cy="2335356"/>
-          </a:xfrm>
-          <a:prstGeom prst="rect">
-            <a:avLst/>
-          </a:prstGeom>
-        </p:spPr>
-      </p:pic>
-    </p:spTree>
-    <p:extLst>
-      <p:ext uri="{BB962C8B-B14F-4D97-AF65-F5344CB8AC3E}">
-        <p14:creationId xmlns:p14="http://schemas.microsoft.com/office/powerpoint/2010/main" val="3077920898"/>
       </p:ext>
     </p:extLst>
   </p:cSld>
@@ -11856,6 +10953,246 @@
 </file>
 
 <file path=ppt/slides/slide30.xml><?xml version="1.0" encoding="utf-8"?>
+<p:sld xmlns:a="http://schemas.openxmlformats.org/drawingml/2006/main" xmlns:r="http://schemas.openxmlformats.org/officeDocument/2006/relationships" xmlns:p="http://schemas.openxmlformats.org/presentationml/2006/main">
+  <p:cSld>
+    <p:spTree>
+      <p:nvGrpSpPr>
+        <p:cNvPr id="1" name="">
+          <a:extLst>
+            <a:ext uri="{FF2B5EF4-FFF2-40B4-BE49-F238E27FC236}">
+              <a16:creationId xmlns:a16="http://schemas.microsoft.com/office/drawing/2014/main" id="{17ADAFAD-662D-A68A-1649-E0A9090801D5}"/>
+            </a:ext>
+          </a:extLst>
+        </p:cNvPr>
+        <p:cNvGrpSpPr/>
+        <p:nvPr/>
+      </p:nvGrpSpPr>
+      <p:grpSpPr>
+        <a:xfrm>
+          <a:off x="0" y="0"/>
+          <a:ext cx="0" cy="0"/>
+          <a:chOff x="0" y="0"/>
+          <a:chExt cx="0" cy="0"/>
+        </a:xfrm>
+      </p:grpSpPr>
+      <p:sp>
+        <p:nvSpPr>
+          <p:cNvPr id="3" name="Content Placeholder 2">
+            <a:extLst>
+              <a:ext uri="{FF2B5EF4-FFF2-40B4-BE49-F238E27FC236}">
+                <a16:creationId xmlns:a16="http://schemas.microsoft.com/office/drawing/2014/main" id="{AA11C33D-7267-21DD-E537-2FC9F908BECC}"/>
+              </a:ext>
+            </a:extLst>
+          </p:cNvPr>
+          <p:cNvSpPr>
+            <a:spLocks noGrp="1"/>
+          </p:cNvSpPr>
+          <p:nvPr>
+            <p:ph idx="1"/>
+          </p:nvPr>
+        </p:nvSpPr>
+        <p:spPr>
+          <a:xfrm>
+            <a:off x="777240" y="696686"/>
+            <a:ext cx="10659110" cy="5480277"/>
+          </a:xfrm>
+        </p:spPr>
+        <p:txBody>
+          <a:bodyPr>
+            <a:normAutofit lnSpcReduction="10000"/>
+          </a:bodyPr>
+          <a:lstStyle/>
+          <a:p>
+            <a:pPr marL="0" indent="0">
+              <a:buNone/>
+            </a:pPr>
+            <a:r>
+              <a:rPr lang="en-IN" sz="2400" b="1" dirty="0"/>
+              <a:t>Output:</a:t>
+            </a:r>
+          </a:p>
+          <a:p>
+            <a:pPr marL="0" indent="0">
+              <a:buNone/>
+            </a:pPr>
+            <a:endParaRPr lang="en-IN" sz="2400" dirty="0"/>
+          </a:p>
+          <a:p>
+            <a:pPr marL="0" indent="0">
+              <a:buNone/>
+            </a:pPr>
+            <a:endParaRPr lang="en-IN" sz="2400" dirty="0"/>
+          </a:p>
+          <a:p>
+            <a:pPr marL="0" indent="0">
+              <a:buNone/>
+            </a:pPr>
+            <a:endParaRPr lang="en-IN" sz="2400" dirty="0"/>
+          </a:p>
+          <a:p>
+            <a:pPr marL="0" indent="0">
+              <a:buNone/>
+            </a:pPr>
+            <a:endParaRPr lang="en-IN" sz="2400" dirty="0"/>
+          </a:p>
+          <a:p>
+            <a:pPr marL="0" indent="0">
+              <a:buNone/>
+            </a:pPr>
+            <a:endParaRPr lang="en-IN" sz="2400" dirty="0"/>
+          </a:p>
+          <a:p>
+            <a:pPr marL="0" indent="0">
+              <a:buNone/>
+            </a:pPr>
+            <a:endParaRPr lang="en-IN" sz="2400" b="1" dirty="0"/>
+          </a:p>
+          <a:p>
+            <a:pPr marL="0" indent="0">
+              <a:buNone/>
+            </a:pPr>
+            <a:endParaRPr lang="en-IN" sz="2400" b="1" dirty="0"/>
+          </a:p>
+          <a:p>
+            <a:pPr marL="0" indent="0">
+              <a:buNone/>
+            </a:pPr>
+            <a:r>
+              <a:rPr lang="en-IN" sz="2400" b="1" dirty="0"/>
+              <a:t>Note:</a:t>
+            </a:r>
+          </a:p>
+          <a:p>
+            <a:r>
+              <a:rPr lang="en-US" sz="2400" dirty="0"/>
+              <a:t>The </a:t>
+            </a:r>
+            <a:r>
+              <a:rPr lang="en-US" sz="2400" i="1" dirty="0"/>
+              <a:t>last</a:t>
+            </a:r>
+            <a:r>
+              <a:rPr lang="en-US" sz="2400" dirty="0"/>
+              <a:t> middleware you declare in code becomes the </a:t>
+            </a:r>
+            <a:r>
+              <a:rPr lang="en-US" sz="2400" b="1" dirty="0"/>
+              <a:t>outermost</a:t>
+            </a:r>
+            <a:r>
+              <a:rPr lang="en-US" sz="2400" dirty="0"/>
+              <a:t> layer and runs </a:t>
+            </a:r>
+            <a:r>
+              <a:rPr lang="en-US" sz="2400" b="1" dirty="0"/>
+              <a:t>first</a:t>
+            </a:r>
+            <a:r>
+              <a:rPr lang="en-US" sz="2400" dirty="0"/>
+              <a:t> on the way </a:t>
+            </a:r>
+            <a:r>
+              <a:rPr lang="en-US" sz="2400" i="1" dirty="0"/>
+              <a:t>in</a:t>
+            </a:r>
+            <a:r>
+              <a:rPr lang="en-US" sz="2400" dirty="0"/>
+              <a:t> (request), and </a:t>
+            </a:r>
+            <a:r>
+              <a:rPr lang="en-US" sz="2400" b="1" dirty="0"/>
+              <a:t>last</a:t>
+            </a:r>
+            <a:r>
+              <a:rPr lang="en-US" sz="2400" dirty="0"/>
+              <a:t> on the way </a:t>
+            </a:r>
+            <a:r>
+              <a:rPr lang="en-US" sz="2400" i="1" dirty="0"/>
+              <a:t>out</a:t>
+            </a:r>
+            <a:r>
+              <a:rPr lang="en-US" sz="2400" dirty="0"/>
+              <a:t> (response).</a:t>
+            </a:r>
+          </a:p>
+          <a:p>
+            <a:r>
+              <a:rPr lang="en-US" sz="2400" dirty="0"/>
+              <a:t>This is because </a:t>
+            </a:r>
+            <a:r>
+              <a:rPr lang="en-US" sz="2400" dirty="0" err="1"/>
+              <a:t>FastAPI</a:t>
+            </a:r>
+            <a:r>
+              <a:rPr lang="en-US" sz="2400" dirty="0"/>
+              <a:t> builds the middleware chain </a:t>
+            </a:r>
+            <a:r>
+              <a:rPr lang="en-US" sz="2400" b="1" dirty="0"/>
+              <a:t>in reverse declaration order</a:t>
+            </a:r>
+            <a:r>
+              <a:rPr lang="en-US" sz="2400" dirty="0"/>
+              <a:t> — each new </a:t>
+            </a:r>
+            <a:r>
+              <a:rPr lang="en-US" dirty="0"/>
+              <a:t>@app.middleware("http")</a:t>
+            </a:r>
+            <a:r>
+              <a:rPr lang="en-US" sz="2400" dirty="0"/>
+              <a:t> wraps around the previous stack.</a:t>
+            </a:r>
+            <a:endParaRPr lang="en-IN" sz="2400" dirty="0"/>
+          </a:p>
+        </p:txBody>
+      </p:sp>
+      <p:pic>
+        <p:nvPicPr>
+          <p:cNvPr id="4" name="Picture 3">
+            <a:extLst>
+              <a:ext uri="{FF2B5EF4-FFF2-40B4-BE49-F238E27FC236}">
+                <a16:creationId xmlns:a16="http://schemas.microsoft.com/office/drawing/2014/main" id="{51B211C8-2BF3-F3F5-4EAC-5CB0D85BFE57}"/>
+              </a:ext>
+            </a:extLst>
+          </p:cNvPr>
+          <p:cNvPicPr>
+            <a:picLocks noChangeAspect="1"/>
+          </p:cNvPicPr>
+          <p:nvPr/>
+        </p:nvPicPr>
+        <p:blipFill>
+          <a:blip r:embed="rId2"/>
+          <a:stretch>
+            <a:fillRect/>
+          </a:stretch>
+        </p:blipFill>
+        <p:spPr>
+          <a:xfrm>
+            <a:off x="2126782" y="1303125"/>
+            <a:ext cx="6472934" cy="2335356"/>
+          </a:xfrm>
+          <a:prstGeom prst="rect">
+            <a:avLst/>
+          </a:prstGeom>
+        </p:spPr>
+      </p:pic>
+    </p:spTree>
+    <p:extLst>
+      <p:ext uri="{BB962C8B-B14F-4D97-AF65-F5344CB8AC3E}">
+        <p14:creationId xmlns:p14="http://schemas.microsoft.com/office/powerpoint/2010/main" val="3077920898"/>
+      </p:ext>
+    </p:extLst>
+  </p:cSld>
+  <p:clrMapOvr>
+    <a:masterClrMapping/>
+  </p:clrMapOvr>
+</p:sld>
+</file>
+
+<file path=ppt/slides/slide31.xml><?xml version="1.0" encoding="utf-8"?>
 <p:sld xmlns:a="http://schemas.openxmlformats.org/drawingml/2006/main" xmlns:r="http://schemas.openxmlformats.org/officeDocument/2006/relationships" xmlns:p="http://schemas.openxmlformats.org/presentationml/2006/main">
   <p:cSld>
     <p:spTree>
@@ -11921,7 +11258,7 @@
 </p:sld>
 </file>
 
-<file path=ppt/slides/slide31.xml><?xml version="1.0" encoding="utf-8"?>
+<file path=ppt/slides/slide32.xml><?xml version="1.0" encoding="utf-8"?>
 <p:sld xmlns:a="http://schemas.openxmlformats.org/drawingml/2006/main" xmlns:r="http://schemas.openxmlformats.org/officeDocument/2006/relationships" xmlns:p="http://schemas.openxmlformats.org/presentationml/2006/main">
   <p:cSld>
     <p:spTree>
@@ -11968,7 +11305,7 @@
         </p:spPr>
         <p:txBody>
           <a:bodyPr>
-            <a:normAutofit/>
+            <a:normAutofit lnSpcReduction="10000"/>
           </a:bodyPr>
           <a:lstStyle/>
           <a:p>
@@ -12003,14 +11340,26 @@
               <a:t> app using </a:t>
             </a:r>
             <a:r>
-              <a:rPr lang="en-US" sz="2400" b="1" dirty="0"/>
-              <a:t>@app.middleware("http")</a:t>
-            </a:r>
-            <a:r>
-              <a:rPr lang="en-US" sz="2800" b="1" dirty="0"/>
+              <a:rPr lang="en-US" sz="2400" b="1" dirty="0">
+                <a:solidFill>
+                  <a:srgbClr val="C00000"/>
+                </a:solidFill>
+              </a:rPr>
+              <a:t>@app.middleware("http") Decorator</a:t>
+            </a:r>
+            <a:r>
+              <a:rPr lang="en-US" sz="2800" b="1" dirty="0">
+                <a:solidFill>
+                  <a:srgbClr val="C00000"/>
+                </a:solidFill>
+              </a:rPr>
               <a:t>.</a:t>
             </a:r>
-            <a:endParaRPr lang="en-US" sz="2800" dirty="0"/>
+            <a:endParaRPr lang="en-US" sz="2800" dirty="0">
+              <a:solidFill>
+                <a:srgbClr val="C00000"/>
+              </a:solidFill>
+            </a:endParaRPr>
           </a:p>
           <a:p>
             <a:r>
@@ -12023,7 +11372,15 @@
             </a:r>
             <a:r>
               <a:rPr lang="en-US" sz="2800" dirty="0"/>
-              <a:t> that you write for your own logic such as:</a:t>
+              <a:t> that you write for </a:t>
+            </a:r>
+            <a:r>
+              <a:rPr lang="en-US" sz="2800" b="1" dirty="0"/>
+              <a:t>your own logic </a:t>
+            </a:r>
+            <a:r>
+              <a:rPr lang="en-US" sz="2800" dirty="0"/>
+              <a:t>such as:</a:t>
             </a:r>
           </a:p>
           <a:p>
@@ -12094,7 +11451,7 @@
 </p:sld>
 </file>
 
-<file path=ppt/slides/slide32.xml><?xml version="1.0" encoding="utf-8"?>
+<file path=ppt/slides/slide33.xml><?xml version="1.0" encoding="utf-8"?>
 <p:sld xmlns:a="http://schemas.openxmlformats.org/drawingml/2006/main" xmlns:r="http://schemas.openxmlformats.org/officeDocument/2006/relationships" xmlns:p="http://schemas.openxmlformats.org/presentationml/2006/main">
   <p:cSld>
     <p:spTree>
@@ -12198,7 +11555,7 @@
 </p:sld>
 </file>
 
-<file path=ppt/slides/slide33.xml><?xml version="1.0" encoding="utf-8"?>
+<file path=ppt/slides/slide34.xml><?xml version="1.0" encoding="utf-8"?>
 <p:sld xmlns:a="http://schemas.openxmlformats.org/drawingml/2006/main" xmlns:r="http://schemas.openxmlformats.org/officeDocument/2006/relationships" xmlns:p="http://schemas.openxmlformats.org/presentationml/2006/main">
   <p:cSld>
     <p:spTree>
@@ -12351,7 +11708,7 @@
 </p:sld>
 </file>
 
-<file path=ppt/slides/slide34.xml><?xml version="1.0" encoding="utf-8"?>
+<file path=ppt/slides/slide35.xml><?xml version="1.0" encoding="utf-8"?>
 <p:sld xmlns:a="http://schemas.openxmlformats.org/drawingml/2006/main" xmlns:r="http://schemas.openxmlformats.org/officeDocument/2006/relationships" xmlns:p="http://schemas.openxmlformats.org/presentationml/2006/main">
   <p:cSld>
     <p:spTree>
@@ -12421,7 +11778,19 @@
             </a:r>
             <a:r>
               <a:rPr lang="en-US" sz="2800" dirty="0"/>
-              <a:t> is a software design pattern that allows you to </a:t>
+              <a:t> is a </a:t>
+            </a:r>
+            <a:r>
+              <a:rPr lang="en-US" sz="2800" b="1" dirty="0">
+                <a:solidFill>
+                  <a:srgbClr val="C00000"/>
+                </a:solidFill>
+              </a:rPr>
+              <a:t>software design pattern</a:t>
+            </a:r>
+            <a:r>
+              <a:rPr lang="en-US" sz="2800" dirty="0"/>
+              <a:t> that allows you to </a:t>
             </a:r>
             <a:r>
               <a:rPr lang="en-US" sz="2800" b="1" dirty="0">
@@ -12449,7 +11818,15 @@
             </a:r>
             <a:r>
               <a:rPr lang="en-US" sz="2800" dirty="0"/>
-              <a:t>(endpoints), instead of hardcoding them inside every function.</a:t>
+              <a:t>(</a:t>
+            </a:r>
+            <a:r>
+              <a:rPr lang="en-US" sz="2800" b="1" dirty="0"/>
+              <a:t>endpoints</a:t>
+            </a:r>
+            <a:r>
+              <a:rPr lang="en-US" sz="2800" dirty="0"/>
+              <a:t>), instead of hardcoding them inside every function.</a:t>
             </a:r>
           </a:p>
           <a:p>
@@ -12535,15 +11912,27 @@
               <a:t> (e.g., </a:t>
             </a:r>
             <a:r>
-              <a:rPr lang="en-US" sz="2800" b="1" dirty="0"/>
+              <a:rPr lang="en-US" sz="2800" b="1" dirty="0">
+                <a:solidFill>
+                  <a:srgbClr val="C00000"/>
+                </a:solidFill>
+              </a:rPr>
               <a:t>database</a:t>
             </a:r>
             <a:r>
-              <a:rPr lang="en-US" sz="2800" dirty="0"/>
+              <a:rPr lang="en-US" sz="2800" dirty="0">
+                <a:solidFill>
+                  <a:srgbClr val="C00000"/>
+                </a:solidFill>
+              </a:rPr>
               <a:t> </a:t>
             </a:r>
             <a:r>
-              <a:rPr lang="en-US" sz="2800" b="1" dirty="0"/>
+              <a:rPr lang="en-US" sz="2800" b="1" dirty="0">
+                <a:solidFill>
+                  <a:srgbClr val="C00000"/>
+                </a:solidFill>
+              </a:rPr>
               <a:t>connection</a:t>
             </a:r>
             <a:r>
@@ -12596,7 +11985,7 @@
 </p:sld>
 </file>
 
-<file path=ppt/slides/slide35.xml><?xml version="1.0" encoding="utf-8"?>
+<file path=ppt/slides/slide36.xml><?xml version="1.0" encoding="utf-8"?>
 <p:sld xmlns:a="http://schemas.openxmlformats.org/drawingml/2006/main" xmlns:r="http://schemas.openxmlformats.org/officeDocument/2006/relationships" xmlns:p="http://schemas.openxmlformats.org/presentationml/2006/main">
   <p:cSld>
     <p:spTree>
@@ -12713,7 +12102,7 @@
 </p:sld>
 </file>
 
-<file path=ppt/slides/slide36.xml><?xml version="1.0" encoding="utf-8"?>
+<file path=ppt/slides/slide37.xml><?xml version="1.0" encoding="utf-8"?>
 <p:sld xmlns:a="http://schemas.openxmlformats.org/drawingml/2006/main" xmlns:r="http://schemas.openxmlformats.org/officeDocument/2006/relationships" xmlns:p="http://schemas.openxmlformats.org/presentationml/2006/main">
   <p:cSld>
     <p:spTree>
@@ -12783,7 +12172,11 @@
           </a:p>
           <a:p>
             <a:r>
-              <a:rPr lang="en-US" dirty="0"/>
+              <a:rPr lang="en-US" sz="2400" b="1" dirty="0">
+                <a:solidFill>
+                  <a:srgbClr val="C00000"/>
+                </a:solidFill>
+              </a:rPr>
               <a:t>Depends</a:t>
             </a:r>
             <a:r>
@@ -13048,7 +12441,7 @@
 </p:sld>
 </file>
 
-<file path=ppt/slides/slide37.xml><?xml version="1.0" encoding="utf-8"?>
+<file path=ppt/slides/slide38.xml><?xml version="1.0" encoding="utf-8"?>
 <p:sld xmlns:a="http://schemas.openxmlformats.org/drawingml/2006/main" xmlns:r="http://schemas.openxmlformats.org/officeDocument/2006/relationships" xmlns:p="http://schemas.openxmlformats.org/presentationml/2006/main">
   <p:cSld>
     <p:spTree>
@@ -13153,7 +12546,7 @@
 </p:sld>
 </file>
 
-<file path=ppt/slides/slide38.xml><?xml version="1.0" encoding="utf-8"?>
+<file path=ppt/slides/slide39.xml><?xml version="1.0" encoding="utf-8"?>
 <p:sld xmlns:a="http://schemas.openxmlformats.org/drawingml/2006/main" xmlns:r="http://schemas.openxmlformats.org/officeDocument/2006/relationships" xmlns:p="http://schemas.openxmlformats.org/presentationml/2006/main">
   <p:cSld>
     <p:spTree>
@@ -13248,130 +12641,6 @@
     <p:extLst>
       <p:ext uri="{BB962C8B-B14F-4D97-AF65-F5344CB8AC3E}">
         <p14:creationId xmlns:p14="http://schemas.microsoft.com/office/powerpoint/2010/main" val="561616237"/>
-      </p:ext>
-    </p:extLst>
-  </p:cSld>
-  <p:clrMapOvr>
-    <a:masterClrMapping/>
-  </p:clrMapOvr>
-</p:sld>
-</file>
-
-<file path=ppt/slides/slide39.xml><?xml version="1.0" encoding="utf-8"?>
-<p:sld xmlns:a="http://schemas.openxmlformats.org/drawingml/2006/main" xmlns:r="http://schemas.openxmlformats.org/officeDocument/2006/relationships" xmlns:p="http://schemas.openxmlformats.org/presentationml/2006/main">
-  <p:cSld>
-    <p:spTree>
-      <p:nvGrpSpPr>
-        <p:cNvPr id="1" name="">
-          <a:extLst>
-            <a:ext uri="{FF2B5EF4-FFF2-40B4-BE49-F238E27FC236}">
-              <a16:creationId xmlns:a16="http://schemas.microsoft.com/office/drawing/2014/main" id="{F147A741-BD91-9E39-3977-7D05B2B37E69}"/>
-            </a:ext>
-          </a:extLst>
-        </p:cNvPr>
-        <p:cNvGrpSpPr/>
-        <p:nvPr/>
-      </p:nvGrpSpPr>
-      <p:grpSpPr>
-        <a:xfrm>
-          <a:off x="0" y="0"/>
-          <a:ext cx="0" cy="0"/>
-          <a:chOff x="0" y="0"/>
-          <a:chExt cx="0" cy="0"/>
-        </a:xfrm>
-      </p:grpSpPr>
-      <p:sp>
-        <p:nvSpPr>
-          <p:cNvPr id="3" name="Content Placeholder 2">
-            <a:extLst>
-              <a:ext uri="{FF2B5EF4-FFF2-40B4-BE49-F238E27FC236}">
-                <a16:creationId xmlns:a16="http://schemas.microsoft.com/office/drawing/2014/main" id="{35C85EA4-B4B5-CF44-7889-0C522E9BF5A5}"/>
-              </a:ext>
-            </a:extLst>
-          </p:cNvPr>
-          <p:cNvSpPr>
-            <a:spLocks noGrp="1"/>
-          </p:cNvSpPr>
-          <p:nvPr>
-            <p:ph idx="1"/>
-          </p:nvPr>
-        </p:nvSpPr>
-        <p:spPr>
-          <a:xfrm>
-            <a:off x="777240" y="696686"/>
-            <a:ext cx="10659110" cy="5480277"/>
-          </a:xfrm>
-        </p:spPr>
-        <p:txBody>
-          <a:bodyPr>
-            <a:normAutofit/>
-          </a:bodyPr>
-          <a:lstStyle/>
-          <a:p>
-            <a:pPr marL="0" indent="0">
-              <a:buNone/>
-            </a:pPr>
-            <a:r>
-              <a:rPr lang="en-US" sz="2400" b="1" dirty="0"/>
-              <a:t>Example 3: Class as a Dependency</a:t>
-            </a:r>
-          </a:p>
-          <a:p>
-            <a:r>
-              <a:rPr lang="en-US" sz="2400" dirty="0"/>
-              <a:t>We can also make dependencies </a:t>
-            </a:r>
-            <a:r>
-              <a:rPr lang="en-US" sz="2400" b="1" dirty="0"/>
-              <a:t>classes</a:t>
-            </a:r>
-            <a:r>
-              <a:rPr lang="en-US" sz="2400" dirty="0"/>
-              <a:t> — very useful for stateful or structured logic.</a:t>
-            </a:r>
-          </a:p>
-          <a:p>
-            <a:pPr marL="0" indent="0">
-              <a:buNone/>
-            </a:pPr>
-            <a:endParaRPr lang="en-IN" sz="2400" dirty="0"/>
-          </a:p>
-        </p:txBody>
-      </p:sp>
-      <p:pic>
-        <p:nvPicPr>
-          <p:cNvPr id="4" name="Picture 3">
-            <a:extLst>
-              <a:ext uri="{FF2B5EF4-FFF2-40B4-BE49-F238E27FC236}">
-                <a16:creationId xmlns:a16="http://schemas.microsoft.com/office/drawing/2014/main" id="{0FADDEBE-66B0-6531-2652-F2AD0149752F}"/>
-              </a:ext>
-            </a:extLst>
-          </p:cNvPr>
-          <p:cNvPicPr>
-            <a:picLocks noChangeAspect="1"/>
-          </p:cNvPicPr>
-          <p:nvPr/>
-        </p:nvPicPr>
-        <p:blipFill>
-          <a:blip r:embed="rId2"/>
-          <a:stretch>
-            <a:fillRect/>
-          </a:stretch>
-        </p:blipFill>
-        <p:spPr>
-          <a:xfrm>
-            <a:off x="605064" y="2099582"/>
-            <a:ext cx="10831286" cy="4061732"/>
-          </a:xfrm>
-          <a:prstGeom prst="rect">
-            <a:avLst/>
-          </a:prstGeom>
-        </p:spPr>
-      </p:pic>
-    </p:spTree>
-    <p:extLst>
-      <p:ext uri="{BB962C8B-B14F-4D97-AF65-F5344CB8AC3E}">
-        <p14:creationId xmlns:p14="http://schemas.microsoft.com/office/powerpoint/2010/main" val="1234122165"/>
       </p:ext>
     </p:extLst>
   </p:cSld>
@@ -13540,6 +12809,130 @@
         <p:cNvPr id="1" name="">
           <a:extLst>
             <a:ext uri="{FF2B5EF4-FFF2-40B4-BE49-F238E27FC236}">
+              <a16:creationId xmlns:a16="http://schemas.microsoft.com/office/drawing/2014/main" id="{F147A741-BD91-9E39-3977-7D05B2B37E69}"/>
+            </a:ext>
+          </a:extLst>
+        </p:cNvPr>
+        <p:cNvGrpSpPr/>
+        <p:nvPr/>
+      </p:nvGrpSpPr>
+      <p:grpSpPr>
+        <a:xfrm>
+          <a:off x="0" y="0"/>
+          <a:ext cx="0" cy="0"/>
+          <a:chOff x="0" y="0"/>
+          <a:chExt cx="0" cy="0"/>
+        </a:xfrm>
+      </p:grpSpPr>
+      <p:sp>
+        <p:nvSpPr>
+          <p:cNvPr id="3" name="Content Placeholder 2">
+            <a:extLst>
+              <a:ext uri="{FF2B5EF4-FFF2-40B4-BE49-F238E27FC236}">
+                <a16:creationId xmlns:a16="http://schemas.microsoft.com/office/drawing/2014/main" id="{35C85EA4-B4B5-CF44-7889-0C522E9BF5A5}"/>
+              </a:ext>
+            </a:extLst>
+          </p:cNvPr>
+          <p:cNvSpPr>
+            <a:spLocks noGrp="1"/>
+          </p:cNvSpPr>
+          <p:nvPr>
+            <p:ph idx="1"/>
+          </p:nvPr>
+        </p:nvSpPr>
+        <p:spPr>
+          <a:xfrm>
+            <a:off x="777240" y="696686"/>
+            <a:ext cx="10659110" cy="5480277"/>
+          </a:xfrm>
+        </p:spPr>
+        <p:txBody>
+          <a:bodyPr>
+            <a:normAutofit/>
+          </a:bodyPr>
+          <a:lstStyle/>
+          <a:p>
+            <a:pPr marL="0" indent="0">
+              <a:buNone/>
+            </a:pPr>
+            <a:r>
+              <a:rPr lang="en-US" sz="2400" b="1" dirty="0"/>
+              <a:t>Example 3: Class as a Dependency</a:t>
+            </a:r>
+          </a:p>
+          <a:p>
+            <a:r>
+              <a:rPr lang="en-US" sz="2400" dirty="0"/>
+              <a:t>We can also make dependencies </a:t>
+            </a:r>
+            <a:r>
+              <a:rPr lang="en-US" sz="2400" b="1" dirty="0"/>
+              <a:t>classes</a:t>
+            </a:r>
+            <a:r>
+              <a:rPr lang="en-US" sz="2400" dirty="0"/>
+              <a:t> — very useful for stateful or structured logic.</a:t>
+            </a:r>
+          </a:p>
+          <a:p>
+            <a:pPr marL="0" indent="0">
+              <a:buNone/>
+            </a:pPr>
+            <a:endParaRPr lang="en-IN" sz="2400" dirty="0"/>
+          </a:p>
+        </p:txBody>
+      </p:sp>
+      <p:pic>
+        <p:nvPicPr>
+          <p:cNvPr id="4" name="Picture 3">
+            <a:extLst>
+              <a:ext uri="{FF2B5EF4-FFF2-40B4-BE49-F238E27FC236}">
+                <a16:creationId xmlns:a16="http://schemas.microsoft.com/office/drawing/2014/main" id="{0FADDEBE-66B0-6531-2652-F2AD0149752F}"/>
+              </a:ext>
+            </a:extLst>
+          </p:cNvPr>
+          <p:cNvPicPr>
+            <a:picLocks noChangeAspect="1"/>
+          </p:cNvPicPr>
+          <p:nvPr/>
+        </p:nvPicPr>
+        <p:blipFill>
+          <a:blip r:embed="rId2"/>
+          <a:stretch>
+            <a:fillRect/>
+          </a:stretch>
+        </p:blipFill>
+        <p:spPr>
+          <a:xfrm>
+            <a:off x="605064" y="2099582"/>
+            <a:ext cx="10831286" cy="4061732"/>
+          </a:xfrm>
+          <a:prstGeom prst="rect">
+            <a:avLst/>
+          </a:prstGeom>
+        </p:spPr>
+      </p:pic>
+    </p:spTree>
+    <p:extLst>
+      <p:ext uri="{BB962C8B-B14F-4D97-AF65-F5344CB8AC3E}">
+        <p14:creationId xmlns:p14="http://schemas.microsoft.com/office/powerpoint/2010/main" val="1234122165"/>
+      </p:ext>
+    </p:extLst>
+  </p:cSld>
+  <p:clrMapOvr>
+    <a:masterClrMapping/>
+  </p:clrMapOvr>
+</p:sld>
+</file>
+
+<file path=ppt/slides/slide41.xml><?xml version="1.0" encoding="utf-8"?>
+<p:sld xmlns:a="http://schemas.openxmlformats.org/drawingml/2006/main" xmlns:r="http://schemas.openxmlformats.org/officeDocument/2006/relationships" xmlns:p="http://schemas.openxmlformats.org/presentationml/2006/main">
+  <p:cSld>
+    <p:spTree>
+      <p:nvGrpSpPr>
+        <p:cNvPr id="1" name="">
+          <a:extLst>
+            <a:ext uri="{FF2B5EF4-FFF2-40B4-BE49-F238E27FC236}">
               <a16:creationId xmlns:a16="http://schemas.microsoft.com/office/drawing/2014/main" id="{9A767CAB-AE42-5948-CB75-F2B68B9CDD71}"/>
             </a:ext>
           </a:extLst>
@@ -13648,7 +13041,7 @@
 </p:sld>
 </file>
 
-<file path=ppt/slides/slide41.xml><?xml version="1.0" encoding="utf-8"?>
+<file path=ppt/slides/slide42.xml><?xml version="1.0" encoding="utf-8"?>
 <p:sld xmlns:a="http://schemas.openxmlformats.org/drawingml/2006/main" xmlns:r="http://schemas.openxmlformats.org/officeDocument/2006/relationships" xmlns:p="http://schemas.openxmlformats.org/presentationml/2006/main">
   <p:cSld>
     <p:spTree>
@@ -13731,7 +13124,7 @@
 </p:sld>
 </file>
 
-<file path=ppt/slides/slide42.xml><?xml version="1.0" encoding="utf-8"?>
+<file path=ppt/slides/slide43.xml><?xml version="1.0" encoding="utf-8"?>
 <p:sld xmlns:a="http://schemas.openxmlformats.org/drawingml/2006/main" xmlns:r="http://schemas.openxmlformats.org/officeDocument/2006/relationships" xmlns:p="http://schemas.openxmlformats.org/presentationml/2006/main">
   <p:cSld>
     <p:spTree>
@@ -13930,7 +13323,7 @@
 </p:sld>
 </file>
 
-<file path=ppt/slides/slide43.xml><?xml version="1.0" encoding="utf-8"?>
+<file path=ppt/slides/slide44.xml><?xml version="1.0" encoding="utf-8"?>
 <p:sld xmlns:a="http://schemas.openxmlformats.org/drawingml/2006/main" xmlns:r="http://schemas.openxmlformats.org/officeDocument/2006/relationships" xmlns:p="http://schemas.openxmlformats.org/presentationml/2006/main">
   <p:cSld>
     <p:spTree>
@@ -14175,7 +13568,7 @@
 </p:sld>
 </file>
 
-<file path=ppt/slides/slide44.xml><?xml version="1.0" encoding="utf-8"?>
+<file path=ppt/slides/slide45.xml><?xml version="1.0" encoding="utf-8"?>
 <p:sld xmlns:a="http://schemas.openxmlformats.org/drawingml/2006/main" xmlns:r="http://schemas.openxmlformats.org/officeDocument/2006/relationships" xmlns:p="http://schemas.openxmlformats.org/presentationml/2006/main">
   <p:cSld>
     <p:spTree>
@@ -14299,7 +13692,7 @@
 </p:sld>
 </file>
 
-<file path=ppt/slides/slide45.xml><?xml version="1.0" encoding="utf-8"?>
+<file path=ppt/slides/slide46.xml><?xml version="1.0" encoding="utf-8"?>
 <p:sld xmlns:a="http://schemas.openxmlformats.org/drawingml/2006/main" xmlns:r="http://schemas.openxmlformats.org/officeDocument/2006/relationships" xmlns:p="http://schemas.openxmlformats.org/presentationml/2006/main">
   <p:cSld>
     <p:spTree>
@@ -14559,7 +13952,7 @@
 </p:sld>
 </file>
 
-<file path=ppt/slides/slide46.xml><?xml version="1.0" encoding="utf-8"?>
+<file path=ppt/slides/slide47.xml><?xml version="1.0" encoding="utf-8"?>
 <p:sld xmlns:a="http://schemas.openxmlformats.org/drawingml/2006/main" xmlns:r="http://schemas.openxmlformats.org/officeDocument/2006/relationships" xmlns:p="http://schemas.openxmlformats.org/presentationml/2006/main">
   <p:cSld>
     <p:spTree>
@@ -14795,7 +14188,7 @@
 </p:sld>
 </file>
 
-<file path=ppt/slides/slide47.xml><?xml version="1.0" encoding="utf-8"?>
+<file path=ppt/slides/slide48.xml><?xml version="1.0" encoding="utf-8"?>
 <p:sld xmlns:a="http://schemas.openxmlformats.org/drawingml/2006/main" xmlns:r="http://schemas.openxmlformats.org/officeDocument/2006/relationships" xmlns:p="http://schemas.openxmlformats.org/presentationml/2006/main">
   <p:cSld>
     <p:spTree>
@@ -14842,7 +14235,7 @@
         </p:spPr>
         <p:txBody>
           <a:bodyPr>
-            <a:normAutofit/>
+            <a:normAutofit lnSpcReduction="10000"/>
           </a:bodyPr>
           <a:lstStyle/>
           <a:p>
@@ -14946,9 +14339,6 @@
             <a:endParaRPr lang="en-IN" sz="2400" dirty="0"/>
           </a:p>
           <a:p>
-            <a:endParaRPr lang="en-IN" sz="2400" b="1" dirty="0"/>
-          </a:p>
-          <a:p>
             <a:pPr marL="0" indent="0">
               <a:buNone/>
             </a:pPr>
@@ -14996,6 +14386,99 @@
               <a:rPr lang="en-US" sz="2400" dirty="0"/>
               <a:t> translates it to SQL for you.</a:t>
             </a:r>
+          </a:p>
+          <a:p>
+            <a:pPr marL="0" indent="0">
+              <a:buNone/>
+            </a:pPr>
+            <a:endParaRPr lang="en-US" sz="1600" dirty="0"/>
+          </a:p>
+          <a:p>
+            <a:pPr marL="0" indent="0">
+              <a:buNone/>
+            </a:pPr>
+            <a:r>
+              <a:rPr lang="en-US" sz="2400" b="1" dirty="0" err="1"/>
+              <a:t>SQLAlchemy</a:t>
+            </a:r>
+            <a:r>
+              <a:rPr lang="en-US" sz="2400" dirty="0"/>
+              <a:t> is a </a:t>
+            </a:r>
+            <a:r>
+              <a:rPr lang="en-US" sz="2400" b="1" dirty="0"/>
+              <a:t>Python library</a:t>
+            </a:r>
+            <a:r>
+              <a:rPr lang="en-US" sz="2400" dirty="0"/>
+              <a:t> that helps us </a:t>
+            </a:r>
+            <a:r>
+              <a:rPr lang="en-US" sz="2400" b="1" dirty="0">
+                <a:solidFill>
+                  <a:srgbClr val="C00000"/>
+                </a:solidFill>
+              </a:rPr>
+              <a:t>talk to databases</a:t>
+            </a:r>
+            <a:r>
+              <a:rPr lang="en-US" sz="2400" dirty="0">
+                <a:solidFill>
+                  <a:srgbClr val="C00000"/>
+                </a:solidFill>
+              </a:rPr>
+              <a:t> </a:t>
+            </a:r>
+            <a:r>
+              <a:rPr lang="en-US" sz="2400" dirty="0"/>
+              <a:t>easily.</a:t>
+            </a:r>
+          </a:p>
+          <a:p>
+            <a:r>
+              <a:rPr lang="en-US" sz="2400" dirty="0"/>
+              <a:t>Think of it as a </a:t>
+            </a:r>
+            <a:r>
+              <a:rPr lang="en-US" sz="2400" b="1" dirty="0"/>
+              <a:t>translator</a:t>
+            </a:r>
+            <a:r>
+              <a:rPr lang="en-US" sz="2400" dirty="0"/>
+              <a:t> between:</a:t>
+            </a:r>
+          </a:p>
+          <a:p>
+            <a:r>
+              <a:rPr lang="en-US" sz="2400" dirty="0"/>
+              <a:t>Python (which we understand)</a:t>
+            </a:r>
+          </a:p>
+          <a:p>
+            <a:r>
+              <a:rPr lang="en-US" sz="2400" dirty="0"/>
+              <a:t>SQL (which the database understands)</a:t>
+            </a:r>
+          </a:p>
+          <a:p>
+            <a:r>
+              <a:rPr lang="en-US" sz="2400" dirty="0"/>
+              <a:t>👉 Without </a:t>
+            </a:r>
+            <a:r>
+              <a:rPr lang="en-US" sz="2400" dirty="0" err="1"/>
+              <a:t>SQLAlchemy</a:t>
+            </a:r>
+            <a:r>
+              <a:rPr lang="en-US" sz="2400" dirty="0"/>
+              <a:t>, we’d have to write SQL commands.</a:t>
+            </a:r>
+          </a:p>
+          <a:p>
+            <a:pPr marL="0" indent="0">
+              <a:buNone/>
+            </a:pPr>
+            <a:endParaRPr lang="en-US" sz="2400" dirty="0"/>
           </a:p>
           <a:p>
             <a:pPr marL="0" indent="0">
@@ -15065,7 +14548,7 @@
 </p:sld>
 </file>
 
-<file path=ppt/slides/slide48.xml><?xml version="1.0" encoding="utf-8"?>
+<file path=ppt/slides/slide49.xml><?xml version="1.0" encoding="utf-8"?>
 <p:sld xmlns:a="http://schemas.openxmlformats.org/drawingml/2006/main" xmlns:r="http://schemas.openxmlformats.org/officeDocument/2006/relationships" xmlns:p="http://schemas.openxmlformats.org/presentationml/2006/main">
   <p:cSld>
     <p:spTree>
@@ -15723,163 +15206,6 @@
 </p:sld>
 </file>
 
-<file path=ppt/slides/slide49.xml><?xml version="1.0" encoding="utf-8"?>
-<p:sld xmlns:a="http://schemas.openxmlformats.org/drawingml/2006/main" xmlns:r="http://schemas.openxmlformats.org/officeDocument/2006/relationships" xmlns:p="http://schemas.openxmlformats.org/presentationml/2006/main">
-  <p:cSld>
-    <p:spTree>
-      <p:nvGrpSpPr>
-        <p:cNvPr id="1" name="">
-          <a:extLst>
-            <a:ext uri="{FF2B5EF4-FFF2-40B4-BE49-F238E27FC236}">
-              <a16:creationId xmlns:a16="http://schemas.microsoft.com/office/drawing/2014/main" id="{39C7DDE4-3423-DB29-F272-768580047855}"/>
-            </a:ext>
-          </a:extLst>
-        </p:cNvPr>
-        <p:cNvGrpSpPr/>
-        <p:nvPr/>
-      </p:nvGrpSpPr>
-      <p:grpSpPr>
-        <a:xfrm>
-          <a:off x="0" y="0"/>
-          <a:ext cx="0" cy="0"/>
-          <a:chOff x="0" y="0"/>
-          <a:chExt cx="0" cy="0"/>
-        </a:xfrm>
-      </p:grpSpPr>
-      <p:sp>
-        <p:nvSpPr>
-          <p:cNvPr id="3" name="Content Placeholder 2">
-            <a:extLst>
-              <a:ext uri="{FF2B5EF4-FFF2-40B4-BE49-F238E27FC236}">
-                <a16:creationId xmlns:a16="http://schemas.microsoft.com/office/drawing/2014/main" id="{BEB1F599-617A-8661-24F8-C8DC9394C1CF}"/>
-              </a:ext>
-            </a:extLst>
-          </p:cNvPr>
-          <p:cNvSpPr>
-            <a:spLocks noGrp="1"/>
-          </p:cNvSpPr>
-          <p:nvPr>
-            <p:ph idx="1"/>
-          </p:nvPr>
-        </p:nvSpPr>
-        <p:spPr>
-          <a:xfrm>
-            <a:off x="777240" y="696686"/>
-            <a:ext cx="10659110" cy="5480277"/>
-          </a:xfrm>
-        </p:spPr>
-        <p:txBody>
-          <a:bodyPr>
-            <a:normAutofit/>
-          </a:bodyPr>
-          <a:lstStyle/>
-          <a:p>
-            <a:pPr marL="0" indent="0">
-              <a:buNone/>
-            </a:pPr>
-            <a:r>
-              <a:rPr lang="en-US" sz="2400" b="1" dirty="0" err="1"/>
-              <a:t>SQLAlchemy</a:t>
-            </a:r>
-            <a:r>
-              <a:rPr lang="en-US" sz="2400" b="1" dirty="0"/>
-              <a:t> Layers:</a:t>
-            </a:r>
-          </a:p>
-          <a:p>
-            <a:pPr marL="0" indent="0">
-              <a:buNone/>
-            </a:pPr>
-            <a:r>
-              <a:rPr lang="en-US" sz="2400" dirty="0" err="1"/>
-              <a:t>SQLAlchemy</a:t>
-            </a:r>
-            <a:r>
-              <a:rPr lang="en-US" sz="2400" dirty="0"/>
-              <a:t> has </a:t>
-            </a:r>
-            <a:r>
-              <a:rPr lang="en-US" sz="2400" b="1" dirty="0"/>
-              <a:t>two main parts</a:t>
-            </a:r>
-            <a:r>
-              <a:rPr lang="en-US" sz="2400" dirty="0"/>
-              <a:t>:</a:t>
-            </a:r>
-          </a:p>
-          <a:p>
-            <a:pPr lvl="1"/>
-            <a:r>
-              <a:rPr lang="en-US" sz="2400" b="1" dirty="0"/>
-              <a:t>Core (Low-level)</a:t>
-            </a:r>
-            <a:r>
-              <a:rPr lang="en-US" sz="2400" dirty="0"/>
-              <a:t> — lets you write SQL-like statements in Python.</a:t>
-            </a:r>
-          </a:p>
-          <a:p>
-            <a:pPr lvl="1"/>
-            <a:r>
-              <a:rPr lang="en-US" sz="2400" b="1" dirty="0"/>
-              <a:t>ORM (High-level)</a:t>
-            </a:r>
-            <a:r>
-              <a:rPr lang="en-US" sz="2400" dirty="0"/>
-              <a:t> — maps </a:t>
-            </a:r>
-            <a:r>
-              <a:rPr lang="en-US" sz="2400" b="1" dirty="0"/>
-              <a:t>Python classes → database tables</a:t>
-            </a:r>
-            <a:r>
-              <a:rPr lang="en-US" sz="2400" dirty="0"/>
-              <a:t>.</a:t>
-            </a:r>
-          </a:p>
-          <a:p>
-            <a:r>
-              <a:rPr lang="en-US" sz="2400" dirty="0"/>
-              <a:t>In </a:t>
-            </a:r>
-            <a:r>
-              <a:rPr lang="en-US" sz="2400" dirty="0" err="1"/>
-              <a:t>FastAPI</a:t>
-            </a:r>
-            <a:r>
-              <a:rPr lang="en-US" sz="2400" dirty="0"/>
-              <a:t> projects, we usually use the </a:t>
-            </a:r>
-            <a:r>
-              <a:rPr lang="en-US" sz="2400" b="1" dirty="0"/>
-              <a:t>ORM layer</a:t>
-            </a:r>
-            <a:r>
-              <a:rPr lang="en-US" sz="2400" dirty="0"/>
-              <a:t>.</a:t>
-            </a:r>
-          </a:p>
-          <a:p>
-            <a:pPr marL="0" indent="0">
-              <a:buNone/>
-            </a:pPr>
-            <a:endParaRPr lang="en-IN" sz="2400" dirty="0"/>
-          </a:p>
-        </p:txBody>
-      </p:sp>
-    </p:spTree>
-    <p:extLst>
-      <p:ext uri="{BB962C8B-B14F-4D97-AF65-F5344CB8AC3E}">
-        <p14:creationId xmlns:p14="http://schemas.microsoft.com/office/powerpoint/2010/main" val="1873530423"/>
-      </p:ext>
-    </p:extLst>
-  </p:cSld>
-  <p:clrMapOvr>
-    <a:masterClrMapping/>
-  </p:clrMapOvr>
-</p:sld>
-</file>
-
 <file path=ppt/slides/slide5.xml><?xml version="1.0" encoding="utf-8"?>
 <p:sld xmlns:a="http://schemas.openxmlformats.org/drawingml/2006/main" xmlns:r="http://schemas.openxmlformats.org/officeDocument/2006/relationships" xmlns:p="http://schemas.openxmlformats.org/presentationml/2006/main">
   <p:cSld>
@@ -16138,6 +15464,1405 @@
   <p:cSld>
     <p:spTree>
       <p:nvGrpSpPr>
+        <p:cNvPr id="1" name="">
+          <a:extLst>
+            <a:ext uri="{FF2B5EF4-FFF2-40B4-BE49-F238E27FC236}">
+              <a16:creationId xmlns:a16="http://schemas.microsoft.com/office/drawing/2014/main" id="{39C7DDE4-3423-DB29-F272-768580047855}"/>
+            </a:ext>
+          </a:extLst>
+        </p:cNvPr>
+        <p:cNvGrpSpPr/>
+        <p:nvPr/>
+      </p:nvGrpSpPr>
+      <p:grpSpPr>
+        <a:xfrm>
+          <a:off x="0" y="0"/>
+          <a:ext cx="0" cy="0"/>
+          <a:chOff x="0" y="0"/>
+          <a:chExt cx="0" cy="0"/>
+        </a:xfrm>
+      </p:grpSpPr>
+      <p:sp>
+        <p:nvSpPr>
+          <p:cNvPr id="3" name="Content Placeholder 2">
+            <a:extLst>
+              <a:ext uri="{FF2B5EF4-FFF2-40B4-BE49-F238E27FC236}">
+                <a16:creationId xmlns:a16="http://schemas.microsoft.com/office/drawing/2014/main" id="{BEB1F599-617A-8661-24F8-C8DC9394C1CF}"/>
+              </a:ext>
+            </a:extLst>
+          </p:cNvPr>
+          <p:cNvSpPr>
+            <a:spLocks noGrp="1"/>
+          </p:cNvSpPr>
+          <p:nvPr>
+            <p:ph idx="1"/>
+          </p:nvPr>
+        </p:nvSpPr>
+        <p:spPr>
+          <a:xfrm>
+            <a:off x="777240" y="696686"/>
+            <a:ext cx="10659110" cy="5480277"/>
+          </a:xfrm>
+        </p:spPr>
+        <p:txBody>
+          <a:bodyPr>
+            <a:normAutofit/>
+          </a:bodyPr>
+          <a:lstStyle/>
+          <a:p>
+            <a:pPr marL="0" indent="0">
+              <a:buNone/>
+            </a:pPr>
+            <a:r>
+              <a:rPr lang="en-US" sz="2400" b="1" dirty="0" err="1"/>
+              <a:t>SQLAlchemy</a:t>
+            </a:r>
+            <a:r>
+              <a:rPr lang="en-US" sz="2400" b="1" dirty="0"/>
+              <a:t> Layers: </a:t>
+            </a:r>
+            <a:r>
+              <a:rPr lang="en-US" sz="2400" dirty="0" err="1"/>
+              <a:t>SQLAlchemy</a:t>
+            </a:r>
+            <a:r>
+              <a:rPr lang="en-US" sz="2400" dirty="0"/>
+              <a:t> has </a:t>
+            </a:r>
+            <a:r>
+              <a:rPr lang="en-US" sz="2400" b="1" dirty="0"/>
+              <a:t>two main parts</a:t>
+            </a:r>
+            <a:r>
+              <a:rPr lang="en-US" sz="2400" dirty="0"/>
+              <a:t>:</a:t>
+            </a:r>
+          </a:p>
+          <a:p>
+            <a:pPr marL="457200" indent="-457200">
+              <a:buAutoNum type="arabicPeriod"/>
+            </a:pPr>
+            <a:r>
+              <a:rPr lang="en-US" sz="2400" b="1" dirty="0"/>
+              <a:t>Core (Low-level)</a:t>
+            </a:r>
+            <a:r>
+              <a:rPr lang="en-US" sz="2400" dirty="0"/>
+              <a:t> — lets you write SQL-like statements in Python </a:t>
+            </a:r>
+            <a:r>
+              <a:rPr lang="en-IN" sz="2400" dirty="0"/>
+              <a:t>directly</a:t>
+            </a:r>
+            <a:r>
+              <a:rPr lang="en-US" sz="2400" dirty="0"/>
+              <a:t>.</a:t>
+            </a:r>
+          </a:p>
+          <a:p>
+            <a:pPr marL="457200" indent="-457200">
+              <a:buAutoNum type="arabicPeriod"/>
+            </a:pPr>
+            <a:endParaRPr lang="en-US" sz="2400" dirty="0"/>
+          </a:p>
+          <a:p>
+            <a:pPr marL="0" indent="0">
+              <a:buNone/>
+            </a:pPr>
+            <a:endParaRPr lang="en-IN" sz="2400" dirty="0"/>
+          </a:p>
+        </p:txBody>
+      </p:sp>
+      <p:pic>
+        <p:nvPicPr>
+          <p:cNvPr id="4" name="Picture 3">
+            <a:extLst>
+              <a:ext uri="{FF2B5EF4-FFF2-40B4-BE49-F238E27FC236}">
+                <a16:creationId xmlns:a16="http://schemas.microsoft.com/office/drawing/2014/main" id="{47974D31-FFDA-3ACF-4471-314256397943}"/>
+              </a:ext>
+            </a:extLst>
+          </p:cNvPr>
+          <p:cNvPicPr>
+            <a:picLocks noChangeAspect="1"/>
+          </p:cNvPicPr>
+          <p:nvPr/>
+        </p:nvPicPr>
+        <p:blipFill>
+          <a:blip r:embed="rId2"/>
+          <a:stretch>
+            <a:fillRect/>
+          </a:stretch>
+        </p:blipFill>
+        <p:spPr>
+          <a:xfrm>
+            <a:off x="777240" y="1856216"/>
+            <a:ext cx="10659110" cy="4425080"/>
+          </a:xfrm>
+          <a:prstGeom prst="rect">
+            <a:avLst/>
+          </a:prstGeom>
+        </p:spPr>
+      </p:pic>
+    </p:spTree>
+    <p:extLst>
+      <p:ext uri="{BB962C8B-B14F-4D97-AF65-F5344CB8AC3E}">
+        <p14:creationId xmlns:p14="http://schemas.microsoft.com/office/powerpoint/2010/main" val="1873530423"/>
+      </p:ext>
+    </p:extLst>
+  </p:cSld>
+  <p:clrMapOvr>
+    <a:masterClrMapping/>
+  </p:clrMapOvr>
+</p:sld>
+</file>
+
+<file path=ppt/slides/slide51.xml><?xml version="1.0" encoding="utf-8"?>
+<p:sld xmlns:a="http://schemas.openxmlformats.org/drawingml/2006/main" xmlns:r="http://schemas.openxmlformats.org/officeDocument/2006/relationships" xmlns:p="http://schemas.openxmlformats.org/presentationml/2006/main">
+  <p:cSld>
+    <p:spTree>
+      <p:nvGrpSpPr>
+        <p:cNvPr id="1" name="">
+          <a:extLst>
+            <a:ext uri="{FF2B5EF4-FFF2-40B4-BE49-F238E27FC236}">
+              <a16:creationId xmlns:a16="http://schemas.microsoft.com/office/drawing/2014/main" id="{F0F3FD2A-48F4-BA52-1389-BD82728A05B9}"/>
+            </a:ext>
+          </a:extLst>
+        </p:cNvPr>
+        <p:cNvGrpSpPr/>
+        <p:nvPr/>
+      </p:nvGrpSpPr>
+      <p:grpSpPr>
+        <a:xfrm>
+          <a:off x="0" y="0"/>
+          <a:ext cx="0" cy="0"/>
+          <a:chOff x="0" y="0"/>
+          <a:chExt cx="0" cy="0"/>
+        </a:xfrm>
+      </p:grpSpPr>
+      <p:sp>
+        <p:nvSpPr>
+          <p:cNvPr id="3" name="Content Placeholder 2">
+            <a:extLst>
+              <a:ext uri="{FF2B5EF4-FFF2-40B4-BE49-F238E27FC236}">
+                <a16:creationId xmlns:a16="http://schemas.microsoft.com/office/drawing/2014/main" id="{72C617F3-7D7C-7726-E072-A524EDE6C54F}"/>
+              </a:ext>
+            </a:extLst>
+          </p:cNvPr>
+          <p:cNvSpPr>
+            <a:spLocks noGrp="1"/>
+          </p:cNvSpPr>
+          <p:nvPr>
+            <p:ph idx="1"/>
+          </p:nvPr>
+        </p:nvSpPr>
+        <p:spPr>
+          <a:xfrm>
+            <a:off x="777240" y="816429"/>
+            <a:ext cx="10659110" cy="5360534"/>
+          </a:xfrm>
+        </p:spPr>
+        <p:txBody>
+          <a:bodyPr>
+            <a:normAutofit/>
+          </a:bodyPr>
+          <a:lstStyle/>
+          <a:p>
+            <a:pPr marL="0" indent="0">
+              <a:buNone/>
+            </a:pPr>
+            <a:r>
+              <a:rPr lang="en-US" sz="2400" b="1" dirty="0"/>
+              <a:t>2. ORM (High-level – </a:t>
+            </a:r>
+            <a:r>
+              <a:rPr lang="en-IN" sz="2400" b="1" dirty="0">
+                <a:solidFill>
+                  <a:srgbClr val="C00000"/>
+                </a:solidFill>
+              </a:rPr>
+              <a:t>Object Relational Mapper</a:t>
+            </a:r>
+            <a:r>
+              <a:rPr lang="en-US" sz="2400" b="1" dirty="0"/>
+              <a:t>)</a:t>
+            </a:r>
+            <a:r>
+              <a:rPr lang="en-US" sz="2400" dirty="0"/>
+              <a:t> — maps </a:t>
+            </a:r>
+            <a:r>
+              <a:rPr lang="en-US" sz="2400" b="1" dirty="0"/>
+              <a:t>Python classes → database tables</a:t>
+            </a:r>
+            <a:r>
+              <a:rPr lang="en-US" sz="2400" dirty="0"/>
+              <a:t>.</a:t>
+            </a:r>
+          </a:p>
+          <a:p>
+            <a:pPr marL="0" indent="0">
+              <a:buNone/>
+            </a:pPr>
+            <a:endParaRPr lang="en-IN" sz="2400" dirty="0"/>
+          </a:p>
+        </p:txBody>
+      </p:sp>
+      <p:pic>
+        <p:nvPicPr>
+          <p:cNvPr id="4" name="Picture 3">
+            <a:extLst>
+              <a:ext uri="{FF2B5EF4-FFF2-40B4-BE49-F238E27FC236}">
+                <a16:creationId xmlns:a16="http://schemas.microsoft.com/office/drawing/2014/main" id="{20745609-E694-2602-ACB1-787B4220D664}"/>
+              </a:ext>
+            </a:extLst>
+          </p:cNvPr>
+          <p:cNvPicPr>
+            <a:picLocks noChangeAspect="1"/>
+          </p:cNvPicPr>
+          <p:nvPr/>
+        </p:nvPicPr>
+        <p:blipFill>
+          <a:blip r:embed="rId2"/>
+          <a:stretch>
+            <a:fillRect/>
+          </a:stretch>
+        </p:blipFill>
+        <p:spPr>
+          <a:xfrm>
+            <a:off x="2518509" y="1695810"/>
+            <a:ext cx="7176572" cy="4999596"/>
+          </a:xfrm>
+          <a:prstGeom prst="rect">
+            <a:avLst/>
+          </a:prstGeom>
+        </p:spPr>
+      </p:pic>
+    </p:spTree>
+    <p:extLst>
+      <p:ext uri="{BB962C8B-B14F-4D97-AF65-F5344CB8AC3E}">
+        <p14:creationId xmlns:p14="http://schemas.microsoft.com/office/powerpoint/2010/main" val="496024509"/>
+      </p:ext>
+    </p:extLst>
+  </p:cSld>
+  <p:clrMapOvr>
+    <a:masterClrMapping/>
+  </p:clrMapOvr>
+</p:sld>
+</file>
+
+<file path=ppt/slides/slide52.xml><?xml version="1.0" encoding="utf-8"?>
+<p:sld xmlns:a="http://schemas.openxmlformats.org/drawingml/2006/main" xmlns:r="http://schemas.openxmlformats.org/officeDocument/2006/relationships" xmlns:p="http://schemas.openxmlformats.org/presentationml/2006/main">
+  <p:cSld>
+    <p:spTree>
+      <p:nvGrpSpPr>
+        <p:cNvPr id="1" name=""/>
+        <p:cNvGrpSpPr/>
+        <p:nvPr/>
+      </p:nvGrpSpPr>
+      <p:grpSpPr>
+        <a:xfrm>
+          <a:off x="0" y="0"/>
+          <a:ext cx="0" cy="0"/>
+          <a:chOff x="0" y="0"/>
+          <a:chExt cx="0" cy="0"/>
+        </a:xfrm>
+      </p:grpSpPr>
+      <p:sp>
+        <p:nvSpPr>
+          <p:cNvPr id="3" name="Content Placeholder 2">
+            <a:extLst>
+              <a:ext uri="{FF2B5EF4-FFF2-40B4-BE49-F238E27FC236}">
+                <a16:creationId xmlns:a16="http://schemas.microsoft.com/office/drawing/2014/main" id="{68A28E55-1A27-4D87-0369-8E918B701798}"/>
+              </a:ext>
+            </a:extLst>
+          </p:cNvPr>
+          <p:cNvSpPr>
+            <a:spLocks noGrp="1"/>
+          </p:cNvSpPr>
+          <p:nvPr>
+            <p:ph idx="1"/>
+          </p:nvPr>
+        </p:nvSpPr>
+        <p:spPr>
+          <a:xfrm>
+            <a:off x="777240" y="557124"/>
+            <a:ext cx="10659110" cy="6061390"/>
+          </a:xfrm>
+        </p:spPr>
+        <p:txBody>
+          <a:bodyPr>
+            <a:normAutofit/>
+          </a:bodyPr>
+          <a:lstStyle/>
+          <a:p>
+            <a:pPr marL="0" indent="0">
+              <a:buNone/>
+            </a:pPr>
+            <a:r>
+              <a:rPr lang="en-US" sz="2400" b="1" dirty="0"/>
+              <a:t>ORM (</a:t>
+            </a:r>
+            <a:r>
+              <a:rPr lang="en-IN" sz="2400" dirty="0"/>
+              <a:t>Object Relational Mapper) </a:t>
+            </a:r>
+            <a:r>
+              <a:rPr lang="en-US" sz="2400" b="1" dirty="0"/>
+              <a:t>in </a:t>
+            </a:r>
+            <a:r>
+              <a:rPr lang="en-US" sz="2400" b="1" dirty="0" err="1"/>
+              <a:t>SQLAlchemy</a:t>
+            </a:r>
+            <a:endParaRPr lang="en-US" sz="2400" b="1" dirty="0"/>
+          </a:p>
+          <a:p>
+            <a:r>
+              <a:rPr lang="en-US" sz="2400" dirty="0"/>
+              <a:t>ORM is the </a:t>
+            </a:r>
+            <a:r>
+              <a:rPr lang="en-US" sz="2400" b="1" dirty="0"/>
+              <a:t>heart of </a:t>
+            </a:r>
+            <a:r>
+              <a:rPr lang="en-US" sz="2400" b="1" dirty="0" err="1"/>
+              <a:t>SQLAlchemy</a:t>
+            </a:r>
+            <a:r>
+              <a:rPr lang="en-US" sz="2400" dirty="0"/>
+              <a:t>.</a:t>
+            </a:r>
+          </a:p>
+          <a:p>
+            <a:r>
+              <a:rPr lang="en-US" sz="2400" dirty="0"/>
+              <a:t>It allows you to </a:t>
+            </a:r>
+            <a:r>
+              <a:rPr lang="en-US" sz="2400" b="1" dirty="0"/>
+              <a:t>interact with your database using Python classes and objects</a:t>
+            </a:r>
+            <a:r>
+              <a:rPr lang="en-US" sz="2400" dirty="0"/>
+              <a:t> instead of writing raw SQL queries.</a:t>
+            </a:r>
+          </a:p>
+          <a:p>
+            <a:r>
+              <a:rPr lang="en-US" sz="2400" b="1" dirty="0"/>
+              <a:t>In simple words: </a:t>
+            </a:r>
+            <a:r>
+              <a:rPr lang="en-US" sz="2400" dirty="0"/>
+              <a:t>Without ORM 👇We use:</a:t>
+            </a:r>
+          </a:p>
+          <a:p>
+            <a:endParaRPr lang="en-US" sz="2400" dirty="0"/>
+          </a:p>
+          <a:p>
+            <a:endParaRPr lang="en-US" sz="2400" dirty="0"/>
+          </a:p>
+          <a:p>
+            <a:r>
+              <a:rPr lang="en-US" sz="2400" dirty="0"/>
+              <a:t>With ORM 👇We just write:</a:t>
+            </a:r>
+          </a:p>
+          <a:p>
+            <a:endParaRPr lang="en-US" sz="2400" dirty="0"/>
+          </a:p>
+          <a:p>
+            <a:endParaRPr lang="en-US" sz="2400" dirty="0"/>
+          </a:p>
+          <a:p>
+            <a:endParaRPr lang="en-US" sz="2400" dirty="0"/>
+          </a:p>
+          <a:p>
+            <a:endParaRPr lang="en-US" sz="2400" dirty="0"/>
+          </a:p>
+          <a:p>
+            <a:r>
+              <a:rPr lang="en-US" dirty="0"/>
+              <a:t>ORM </a:t>
+            </a:r>
+            <a:r>
+              <a:rPr lang="en-US" b="1" dirty="0"/>
+              <a:t>automatically converts</a:t>
+            </a:r>
+            <a:r>
+              <a:rPr lang="en-US" dirty="0"/>
+              <a:t> your Python code into SQL statements behind the scenes.</a:t>
+            </a:r>
+            <a:endParaRPr lang="en-US" sz="2400" dirty="0"/>
+          </a:p>
+          <a:p>
+            <a:pPr marL="0" indent="0">
+              <a:buNone/>
+            </a:pPr>
+            <a:endParaRPr lang="en-IN" sz="2400" dirty="0"/>
+          </a:p>
+        </p:txBody>
+      </p:sp>
+      <p:pic>
+        <p:nvPicPr>
+          <p:cNvPr id="4" name="Picture 3">
+            <a:extLst>
+              <a:ext uri="{FF2B5EF4-FFF2-40B4-BE49-F238E27FC236}">
+                <a16:creationId xmlns:a16="http://schemas.microsoft.com/office/drawing/2014/main" id="{07440E90-59E2-2D23-9CD9-C16556E0DD6A}"/>
+              </a:ext>
+            </a:extLst>
+          </p:cNvPr>
+          <p:cNvPicPr>
+            <a:picLocks noChangeAspect="1"/>
+          </p:cNvPicPr>
+          <p:nvPr/>
+        </p:nvPicPr>
+        <p:blipFill>
+          <a:blip r:embed="rId2"/>
+          <a:stretch>
+            <a:fillRect/>
+          </a:stretch>
+        </p:blipFill>
+        <p:spPr>
+          <a:xfrm>
+            <a:off x="1917499" y="2812927"/>
+            <a:ext cx="8378591" cy="616073"/>
+          </a:xfrm>
+          <a:prstGeom prst="rect">
+            <a:avLst/>
+          </a:prstGeom>
+        </p:spPr>
+      </p:pic>
+      <p:pic>
+        <p:nvPicPr>
+          <p:cNvPr id="6" name="Picture 5">
+            <a:extLst>
+              <a:ext uri="{FF2B5EF4-FFF2-40B4-BE49-F238E27FC236}">
+                <a16:creationId xmlns:a16="http://schemas.microsoft.com/office/drawing/2014/main" id="{AB20FCE8-79DB-1149-FA25-6AA17D5808AD}"/>
+              </a:ext>
+            </a:extLst>
+          </p:cNvPr>
+          <p:cNvPicPr>
+            <a:picLocks noChangeAspect="1"/>
+          </p:cNvPicPr>
+          <p:nvPr/>
+        </p:nvPicPr>
+        <p:blipFill>
+          <a:blip r:embed="rId3"/>
+          <a:stretch>
+            <a:fillRect/>
+          </a:stretch>
+        </p:blipFill>
+        <p:spPr>
+          <a:xfrm>
+            <a:off x="2363228" y="4285365"/>
+            <a:ext cx="6595715" cy="1399438"/>
+          </a:xfrm>
+          <a:prstGeom prst="rect">
+            <a:avLst/>
+          </a:prstGeom>
+        </p:spPr>
+      </p:pic>
+    </p:spTree>
+    <p:extLst>
+      <p:ext uri="{BB962C8B-B14F-4D97-AF65-F5344CB8AC3E}">
+        <p14:creationId xmlns:p14="http://schemas.microsoft.com/office/powerpoint/2010/main" val="2226177675"/>
+      </p:ext>
+    </p:extLst>
+  </p:cSld>
+  <p:clrMapOvr>
+    <a:masterClrMapping/>
+  </p:clrMapOvr>
+</p:sld>
+</file>
+
+<file path=ppt/slides/slide53.xml><?xml version="1.0" encoding="utf-8"?>
+<p:sld xmlns:a="http://schemas.openxmlformats.org/drawingml/2006/main" xmlns:r="http://schemas.openxmlformats.org/officeDocument/2006/relationships" xmlns:p="http://schemas.openxmlformats.org/presentationml/2006/main">
+  <p:cSld>
+    <p:spTree>
+      <p:nvGrpSpPr>
+        <p:cNvPr id="1" name="">
+          <a:extLst>
+            <a:ext uri="{FF2B5EF4-FFF2-40B4-BE49-F238E27FC236}">
+              <a16:creationId xmlns:a16="http://schemas.microsoft.com/office/drawing/2014/main" id="{42BCE635-0F7F-BD59-F7D6-BBC34C3D07F1}"/>
+            </a:ext>
+          </a:extLst>
+        </p:cNvPr>
+        <p:cNvGrpSpPr/>
+        <p:nvPr/>
+      </p:nvGrpSpPr>
+      <p:grpSpPr>
+        <a:xfrm>
+          <a:off x="0" y="0"/>
+          <a:ext cx="0" cy="0"/>
+          <a:chOff x="0" y="0"/>
+          <a:chExt cx="0" cy="0"/>
+        </a:xfrm>
+      </p:grpSpPr>
+      <p:sp>
+        <p:nvSpPr>
+          <p:cNvPr id="3" name="Content Placeholder 2">
+            <a:extLst>
+              <a:ext uri="{FF2B5EF4-FFF2-40B4-BE49-F238E27FC236}">
+                <a16:creationId xmlns:a16="http://schemas.microsoft.com/office/drawing/2014/main" id="{4867100E-64F7-80FB-CA49-ED1A8BB682C7}"/>
+              </a:ext>
+            </a:extLst>
+          </p:cNvPr>
+          <p:cNvSpPr>
+            <a:spLocks noGrp="1"/>
+          </p:cNvSpPr>
+          <p:nvPr>
+            <p:ph idx="1"/>
+          </p:nvPr>
+        </p:nvSpPr>
+        <p:spPr>
+          <a:xfrm>
+            <a:off x="777240" y="816429"/>
+            <a:ext cx="10659110" cy="5360534"/>
+          </a:xfrm>
+        </p:spPr>
+        <p:txBody>
+          <a:bodyPr>
+            <a:normAutofit/>
+          </a:bodyPr>
+          <a:lstStyle/>
+          <a:p>
+            <a:pPr marL="0" indent="0">
+              <a:buNone/>
+            </a:pPr>
+            <a:r>
+              <a:rPr lang="en-IN" sz="2800" b="1" dirty="0"/>
+              <a:t>How ORM Works — Step-by-Step:</a:t>
+            </a:r>
+          </a:p>
+          <a:p>
+            <a:pPr marL="457200" indent="-457200">
+              <a:buAutoNum type="arabicPeriod"/>
+            </a:pPr>
+            <a:r>
+              <a:rPr lang="en-US" sz="2800" b="1" dirty="0"/>
+              <a:t>Define a Base Class</a:t>
+            </a:r>
+          </a:p>
+          <a:p>
+            <a:r>
+              <a:rPr lang="en-US" sz="2800" dirty="0"/>
+              <a:t>Every ORM model (table) should inherit from a </a:t>
+            </a:r>
+            <a:r>
+              <a:rPr lang="en-US" sz="2800" b="1" dirty="0"/>
+              <a:t>Base class</a:t>
+            </a:r>
+            <a:r>
+              <a:rPr lang="en-US" sz="2800" dirty="0"/>
+              <a:t>.</a:t>
+            </a:r>
+          </a:p>
+          <a:p>
+            <a:endParaRPr lang="en-US" sz="2800" dirty="0"/>
+          </a:p>
+          <a:p>
+            <a:endParaRPr lang="en-US" sz="2800" dirty="0"/>
+          </a:p>
+          <a:p>
+            <a:endParaRPr lang="en-US" sz="2800" dirty="0"/>
+          </a:p>
+          <a:p>
+            <a:endParaRPr lang="en-US" sz="2800" b="1" dirty="0"/>
+          </a:p>
+          <a:p>
+            <a:r>
+              <a:rPr lang="en-US" sz="2800" b="1" dirty="0"/>
+              <a:t>This base class tells </a:t>
+            </a:r>
+            <a:r>
+              <a:rPr lang="en-US" sz="2800" b="1" dirty="0" err="1"/>
+              <a:t>SQLAlchemy</a:t>
+            </a:r>
+            <a:r>
+              <a:rPr lang="en-US" sz="2800" b="1" dirty="0"/>
+              <a:t>: </a:t>
+            </a:r>
+            <a:r>
+              <a:rPr lang="en-US" sz="2800" dirty="0"/>
+              <a:t>“Any class that inherits from me is a database table.”</a:t>
+            </a:r>
+          </a:p>
+          <a:p>
+            <a:endParaRPr lang="en-US" sz="2800" dirty="0"/>
+          </a:p>
+          <a:p>
+            <a:pPr marL="0" indent="0">
+              <a:buNone/>
+            </a:pPr>
+            <a:endParaRPr lang="en-IN" sz="2800" dirty="0"/>
+          </a:p>
+        </p:txBody>
+      </p:sp>
+      <p:pic>
+        <p:nvPicPr>
+          <p:cNvPr id="4" name="Picture 3">
+            <a:extLst>
+              <a:ext uri="{FF2B5EF4-FFF2-40B4-BE49-F238E27FC236}">
+                <a16:creationId xmlns:a16="http://schemas.microsoft.com/office/drawing/2014/main" id="{2B2ACE42-2E3E-F35B-4AE8-9D0E5234D971}"/>
+              </a:ext>
+            </a:extLst>
+          </p:cNvPr>
+          <p:cNvPicPr>
+            <a:picLocks noChangeAspect="1"/>
+          </p:cNvPicPr>
+          <p:nvPr/>
+        </p:nvPicPr>
+        <p:blipFill>
+          <a:blip r:embed="rId2"/>
+          <a:stretch>
+            <a:fillRect/>
+          </a:stretch>
+        </p:blipFill>
+        <p:spPr>
+          <a:xfrm>
+            <a:off x="1795997" y="2827453"/>
+            <a:ext cx="8234502" cy="1203093"/>
+          </a:xfrm>
+          <a:prstGeom prst="rect">
+            <a:avLst/>
+          </a:prstGeom>
+        </p:spPr>
+      </p:pic>
+    </p:spTree>
+    <p:extLst>
+      <p:ext uri="{BB962C8B-B14F-4D97-AF65-F5344CB8AC3E}">
+        <p14:creationId xmlns:p14="http://schemas.microsoft.com/office/powerpoint/2010/main" val="3805469623"/>
+      </p:ext>
+    </p:extLst>
+  </p:cSld>
+  <p:clrMapOvr>
+    <a:masterClrMapping/>
+  </p:clrMapOvr>
+</p:sld>
+</file>
+
+<file path=ppt/slides/slide54.xml><?xml version="1.0" encoding="utf-8"?>
+<p:sld xmlns:a="http://schemas.openxmlformats.org/drawingml/2006/main" xmlns:r="http://schemas.openxmlformats.org/officeDocument/2006/relationships" xmlns:p="http://schemas.openxmlformats.org/presentationml/2006/main">
+  <p:cSld>
+    <p:spTree>
+      <p:nvGrpSpPr>
+        <p:cNvPr id="1" name="">
+          <a:extLst>
+            <a:ext uri="{FF2B5EF4-FFF2-40B4-BE49-F238E27FC236}">
+              <a16:creationId xmlns:a16="http://schemas.microsoft.com/office/drawing/2014/main" id="{7ECDD065-4BFB-FC66-1883-C037A8C1A295}"/>
+            </a:ext>
+          </a:extLst>
+        </p:cNvPr>
+        <p:cNvGrpSpPr/>
+        <p:nvPr/>
+      </p:nvGrpSpPr>
+      <p:grpSpPr>
+        <a:xfrm>
+          <a:off x="0" y="0"/>
+          <a:ext cx="0" cy="0"/>
+          <a:chOff x="0" y="0"/>
+          <a:chExt cx="0" cy="0"/>
+        </a:xfrm>
+      </p:grpSpPr>
+      <p:sp>
+        <p:nvSpPr>
+          <p:cNvPr id="3" name="Content Placeholder 2">
+            <a:extLst>
+              <a:ext uri="{FF2B5EF4-FFF2-40B4-BE49-F238E27FC236}">
+                <a16:creationId xmlns:a16="http://schemas.microsoft.com/office/drawing/2014/main" id="{8AF2952E-5CAC-43FA-1454-65EFF384492B}"/>
+              </a:ext>
+            </a:extLst>
+          </p:cNvPr>
+          <p:cNvSpPr>
+            <a:spLocks noGrp="1"/>
+          </p:cNvSpPr>
+          <p:nvPr>
+            <p:ph idx="1"/>
+          </p:nvPr>
+        </p:nvSpPr>
+        <p:spPr>
+          <a:xfrm>
+            <a:off x="777240" y="816429"/>
+            <a:ext cx="10659110" cy="5360534"/>
+          </a:xfrm>
+        </p:spPr>
+        <p:txBody>
+          <a:bodyPr>
+            <a:normAutofit/>
+          </a:bodyPr>
+          <a:lstStyle/>
+          <a:p>
+            <a:pPr marL="0" indent="0">
+              <a:buNone/>
+            </a:pPr>
+            <a:r>
+              <a:rPr lang="en-US" sz="2800" b="1" dirty="0"/>
+              <a:t>2. Define a Model (Table)</a:t>
+            </a:r>
+          </a:p>
+          <a:p>
+            <a:r>
+              <a:rPr lang="en-US" sz="2800" dirty="0"/>
+              <a:t>Each </a:t>
+            </a:r>
+            <a:r>
+              <a:rPr lang="en-US" sz="2800" b="1" dirty="0"/>
+              <a:t>class</a:t>
+            </a:r>
+            <a:r>
+              <a:rPr lang="en-US" sz="2800" dirty="0"/>
+              <a:t> in Python represents a </a:t>
+            </a:r>
+            <a:r>
+              <a:rPr lang="en-US" sz="2800" b="1" dirty="0"/>
+              <a:t>table</a:t>
+            </a:r>
+            <a:r>
+              <a:rPr lang="en-US" sz="2800" dirty="0"/>
+              <a:t> in the database.</a:t>
+            </a:r>
+          </a:p>
+          <a:p>
+            <a:r>
+              <a:rPr lang="en-US" sz="2800" dirty="0"/>
+              <a:t>Each </a:t>
+            </a:r>
+            <a:r>
+              <a:rPr lang="en-US" sz="2800" b="1" dirty="0"/>
+              <a:t>attribute</a:t>
+            </a:r>
+            <a:r>
+              <a:rPr lang="en-US" sz="2800" dirty="0"/>
+              <a:t> in the class represents a </a:t>
+            </a:r>
+            <a:r>
+              <a:rPr lang="en-US" sz="2800" b="1" dirty="0"/>
+              <a:t>column</a:t>
+            </a:r>
+            <a:r>
+              <a:rPr lang="en-US" sz="2800" dirty="0"/>
+              <a:t>.</a:t>
+            </a:r>
+          </a:p>
+          <a:p>
+            <a:pPr marL="0" indent="0">
+              <a:buNone/>
+            </a:pPr>
+            <a:endParaRPr lang="en-IN" sz="2800" dirty="0"/>
+          </a:p>
+        </p:txBody>
+      </p:sp>
+      <p:pic>
+        <p:nvPicPr>
+          <p:cNvPr id="4" name="Picture 3">
+            <a:extLst>
+              <a:ext uri="{FF2B5EF4-FFF2-40B4-BE49-F238E27FC236}">
+                <a16:creationId xmlns:a16="http://schemas.microsoft.com/office/drawing/2014/main" id="{6A24FF66-DE71-94E1-A074-31433D42952A}"/>
+              </a:ext>
+            </a:extLst>
+          </p:cNvPr>
+          <p:cNvPicPr>
+            <a:picLocks noChangeAspect="1"/>
+          </p:cNvPicPr>
+          <p:nvPr/>
+        </p:nvPicPr>
+        <p:blipFill>
+          <a:blip r:embed="rId2"/>
+          <a:stretch>
+            <a:fillRect/>
+          </a:stretch>
+        </p:blipFill>
+        <p:spPr>
+          <a:xfrm>
+            <a:off x="893115" y="2418738"/>
+            <a:ext cx="10405769" cy="3869566"/>
+          </a:xfrm>
+          <a:prstGeom prst="rect">
+            <a:avLst/>
+          </a:prstGeom>
+        </p:spPr>
+      </p:pic>
+    </p:spTree>
+    <p:extLst>
+      <p:ext uri="{BB962C8B-B14F-4D97-AF65-F5344CB8AC3E}">
+        <p14:creationId xmlns:p14="http://schemas.microsoft.com/office/powerpoint/2010/main" val="4218562115"/>
+      </p:ext>
+    </p:extLst>
+  </p:cSld>
+  <p:clrMapOvr>
+    <a:masterClrMapping/>
+  </p:clrMapOvr>
+</p:sld>
+</file>
+
+<file path=ppt/slides/slide55.xml><?xml version="1.0" encoding="utf-8"?>
+<p:sld xmlns:a="http://schemas.openxmlformats.org/drawingml/2006/main" xmlns:r="http://schemas.openxmlformats.org/officeDocument/2006/relationships" xmlns:p="http://schemas.openxmlformats.org/presentationml/2006/main">
+  <p:cSld>
+    <p:spTree>
+      <p:nvGrpSpPr>
+        <p:cNvPr id="1" name="">
+          <a:extLst>
+            <a:ext uri="{FF2B5EF4-FFF2-40B4-BE49-F238E27FC236}">
+              <a16:creationId xmlns:a16="http://schemas.microsoft.com/office/drawing/2014/main" id="{01687AFC-1398-A926-10BE-132FF718C4FB}"/>
+            </a:ext>
+          </a:extLst>
+        </p:cNvPr>
+        <p:cNvGrpSpPr/>
+        <p:nvPr/>
+      </p:nvGrpSpPr>
+      <p:grpSpPr>
+        <a:xfrm>
+          <a:off x="0" y="0"/>
+          <a:ext cx="0" cy="0"/>
+          <a:chOff x="0" y="0"/>
+          <a:chExt cx="0" cy="0"/>
+        </a:xfrm>
+      </p:grpSpPr>
+      <p:sp>
+        <p:nvSpPr>
+          <p:cNvPr id="3" name="Content Placeholder 2">
+            <a:extLst>
+              <a:ext uri="{FF2B5EF4-FFF2-40B4-BE49-F238E27FC236}">
+                <a16:creationId xmlns:a16="http://schemas.microsoft.com/office/drawing/2014/main" id="{7BA9A570-8FCF-9969-CFCC-8A194421DA99}"/>
+              </a:ext>
+            </a:extLst>
+          </p:cNvPr>
+          <p:cNvSpPr>
+            <a:spLocks noGrp="1"/>
+          </p:cNvSpPr>
+          <p:nvPr>
+            <p:ph idx="1"/>
+          </p:nvPr>
+        </p:nvSpPr>
+        <p:spPr>
+          <a:xfrm>
+            <a:off x="777240" y="816429"/>
+            <a:ext cx="10659110" cy="5360534"/>
+          </a:xfrm>
+        </p:spPr>
+        <p:txBody>
+          <a:bodyPr>
+            <a:normAutofit/>
+          </a:bodyPr>
+          <a:lstStyle/>
+          <a:p>
+            <a:pPr marL="0" indent="0">
+              <a:buNone/>
+            </a:pPr>
+            <a:r>
+              <a:rPr lang="en-US" sz="2400" dirty="0"/>
+              <a:t>So:</a:t>
+            </a:r>
+          </a:p>
+          <a:p>
+            <a:r>
+              <a:rPr lang="en-US" sz="2400" b="1" dirty="0"/>
+              <a:t>Table name </a:t>
+            </a:r>
+            <a:r>
+              <a:rPr lang="en-US" sz="2400" dirty="0"/>
+              <a:t>→ </a:t>
+            </a:r>
+            <a:r>
+              <a:rPr lang="en-US" dirty="0"/>
+              <a:t>students</a:t>
+            </a:r>
+            <a:endParaRPr lang="en-US" sz="2400" dirty="0"/>
+          </a:p>
+          <a:p>
+            <a:r>
+              <a:rPr lang="en-US" sz="2400" b="1" dirty="0"/>
+              <a:t>Columns</a:t>
+            </a:r>
+            <a:r>
+              <a:rPr lang="en-US" sz="2400" dirty="0"/>
+              <a:t> → </a:t>
+            </a:r>
+            <a:r>
+              <a:rPr lang="en-US" dirty="0"/>
+              <a:t>id</a:t>
+            </a:r>
+            <a:r>
+              <a:rPr lang="en-US" sz="2400" dirty="0"/>
+              <a:t>, </a:t>
+            </a:r>
+            <a:r>
+              <a:rPr lang="en-US" dirty="0"/>
+              <a:t>name</a:t>
+            </a:r>
+            <a:r>
+              <a:rPr lang="en-US" sz="2400" dirty="0"/>
+              <a:t>, </a:t>
+            </a:r>
+            <a:r>
+              <a:rPr lang="en-US" dirty="0"/>
+              <a:t>grade</a:t>
+            </a:r>
+            <a:endParaRPr lang="en-US" sz="2400" dirty="0"/>
+          </a:p>
+          <a:p>
+            <a:r>
+              <a:rPr lang="en-US" sz="2400" dirty="0"/>
+              <a:t>Each object of </a:t>
+            </a:r>
+            <a:r>
+              <a:rPr lang="en-US" dirty="0"/>
+              <a:t>Student</a:t>
+            </a:r>
+            <a:r>
+              <a:rPr lang="en-US" sz="2400" dirty="0"/>
+              <a:t> → one </a:t>
+            </a:r>
+            <a:r>
+              <a:rPr lang="en-US" sz="2400" b="1" dirty="0"/>
+              <a:t>row</a:t>
+            </a:r>
+            <a:r>
+              <a:rPr lang="en-US" sz="2400" dirty="0"/>
+              <a:t> in that table.</a:t>
+            </a:r>
+          </a:p>
+          <a:p>
+            <a:pPr marL="0" indent="0">
+              <a:buNone/>
+            </a:pPr>
+            <a:endParaRPr lang="en-IN" sz="2400" dirty="0"/>
+          </a:p>
+        </p:txBody>
+      </p:sp>
+    </p:spTree>
+    <p:extLst>
+      <p:ext uri="{BB962C8B-B14F-4D97-AF65-F5344CB8AC3E}">
+        <p14:creationId xmlns:p14="http://schemas.microsoft.com/office/powerpoint/2010/main" val="3426568117"/>
+      </p:ext>
+    </p:extLst>
+  </p:cSld>
+  <p:clrMapOvr>
+    <a:masterClrMapping/>
+  </p:clrMapOvr>
+</p:sld>
+</file>
+
+<file path=ppt/slides/slide56.xml><?xml version="1.0" encoding="utf-8"?>
+<p:sld xmlns:a="http://schemas.openxmlformats.org/drawingml/2006/main" xmlns:r="http://schemas.openxmlformats.org/officeDocument/2006/relationships" xmlns:p="http://schemas.openxmlformats.org/presentationml/2006/main">
+  <p:cSld>
+    <p:spTree>
+      <p:nvGrpSpPr>
+        <p:cNvPr id="1" name="">
+          <a:extLst>
+            <a:ext uri="{FF2B5EF4-FFF2-40B4-BE49-F238E27FC236}">
+              <a16:creationId xmlns:a16="http://schemas.microsoft.com/office/drawing/2014/main" id="{BFCA9788-1553-6617-2A5C-D6BFA0EB2E98}"/>
+            </a:ext>
+          </a:extLst>
+        </p:cNvPr>
+        <p:cNvGrpSpPr/>
+        <p:nvPr/>
+      </p:nvGrpSpPr>
+      <p:grpSpPr>
+        <a:xfrm>
+          <a:off x="0" y="0"/>
+          <a:ext cx="0" cy="0"/>
+          <a:chOff x="0" y="0"/>
+          <a:chExt cx="0" cy="0"/>
+        </a:xfrm>
+      </p:grpSpPr>
+      <p:sp>
+        <p:nvSpPr>
+          <p:cNvPr id="3" name="Content Placeholder 2">
+            <a:extLst>
+              <a:ext uri="{FF2B5EF4-FFF2-40B4-BE49-F238E27FC236}">
+                <a16:creationId xmlns:a16="http://schemas.microsoft.com/office/drawing/2014/main" id="{7F610804-8CF7-2A58-7F55-B6DC858FF3D1}"/>
+              </a:ext>
+            </a:extLst>
+          </p:cNvPr>
+          <p:cNvSpPr>
+            <a:spLocks noGrp="1"/>
+          </p:cNvSpPr>
+          <p:nvPr>
+            <p:ph idx="1"/>
+          </p:nvPr>
+        </p:nvSpPr>
+        <p:spPr>
+          <a:xfrm>
+            <a:off x="777240" y="816429"/>
+            <a:ext cx="10659110" cy="5360534"/>
+          </a:xfrm>
+        </p:spPr>
+        <p:txBody>
+          <a:bodyPr>
+            <a:normAutofit/>
+          </a:bodyPr>
+          <a:lstStyle/>
+          <a:p>
+            <a:pPr marL="0" indent="0">
+              <a:buNone/>
+            </a:pPr>
+            <a:r>
+              <a:rPr lang="en-IN" sz="2400" b="1" dirty="0"/>
+              <a:t>3. Create the Database Table</a:t>
+            </a:r>
+          </a:p>
+          <a:p>
+            <a:pPr marL="0" indent="0">
+              <a:buNone/>
+            </a:pPr>
+            <a:endParaRPr lang="en-IN" sz="2400" b="1" dirty="0"/>
+          </a:p>
+          <a:p>
+            <a:pPr marL="0" indent="0">
+              <a:buNone/>
+            </a:pPr>
+            <a:endParaRPr lang="en-IN" sz="2400" b="1" dirty="0"/>
+          </a:p>
+          <a:p>
+            <a:pPr marL="0" indent="0">
+              <a:buNone/>
+            </a:pPr>
+            <a:endParaRPr lang="en-IN" sz="2400" b="1" dirty="0"/>
+          </a:p>
+          <a:p>
+            <a:pPr marL="0" indent="0">
+              <a:buNone/>
+            </a:pPr>
+            <a:endParaRPr lang="en-IN" sz="2400" b="1" dirty="0"/>
+          </a:p>
+          <a:p>
+            <a:pPr marL="0" indent="0">
+              <a:buNone/>
+            </a:pPr>
+            <a:endParaRPr lang="en-IN" sz="2400" b="1" dirty="0"/>
+          </a:p>
+          <a:p>
+            <a:pPr marL="0" indent="0">
+              <a:buNone/>
+            </a:pPr>
+            <a:endParaRPr lang="en-IN" sz="2400" b="1" dirty="0"/>
+          </a:p>
+          <a:p>
+            <a:pPr marL="0" indent="0">
+              <a:buNone/>
+            </a:pPr>
+            <a:endParaRPr lang="en-IN" sz="2400" b="1" dirty="0"/>
+          </a:p>
+          <a:p>
+            <a:r>
+              <a:rPr lang="en-US" sz="2400" dirty="0"/>
+              <a:t>This line </a:t>
+            </a:r>
+            <a:r>
+              <a:rPr lang="en-US" sz="2400" b="1" dirty="0"/>
+              <a:t>creates the table</a:t>
+            </a:r>
+            <a:r>
+              <a:rPr lang="en-US" sz="2400" dirty="0"/>
+              <a:t> in your database automatically — no need to write SQL manually.</a:t>
+            </a:r>
+            <a:endParaRPr lang="en-IN" sz="2400" dirty="0"/>
+          </a:p>
+          <a:p>
+            <a:pPr marL="0" indent="0">
+              <a:buNone/>
+            </a:pPr>
+            <a:endParaRPr lang="en-IN" sz="2400" dirty="0"/>
+          </a:p>
+        </p:txBody>
+      </p:sp>
+      <p:pic>
+        <p:nvPicPr>
+          <p:cNvPr id="4" name="Picture 3">
+            <a:extLst>
+              <a:ext uri="{FF2B5EF4-FFF2-40B4-BE49-F238E27FC236}">
+                <a16:creationId xmlns:a16="http://schemas.microsoft.com/office/drawing/2014/main" id="{C1DE3F97-43C1-272E-E30C-9E4C54DC6457}"/>
+              </a:ext>
+            </a:extLst>
+          </p:cNvPr>
+          <p:cNvPicPr>
+            <a:picLocks noChangeAspect="1"/>
+          </p:cNvPicPr>
+          <p:nvPr/>
+        </p:nvPicPr>
+        <p:blipFill>
+          <a:blip r:embed="rId2"/>
+          <a:stretch>
+            <a:fillRect/>
+          </a:stretch>
+        </p:blipFill>
+        <p:spPr>
+          <a:xfrm>
+            <a:off x="1055398" y="1807678"/>
+            <a:ext cx="10380952" cy="2285714"/>
+          </a:xfrm>
+          <a:prstGeom prst="rect">
+            <a:avLst/>
+          </a:prstGeom>
+        </p:spPr>
+      </p:pic>
+    </p:spTree>
+    <p:extLst>
+      <p:ext uri="{BB962C8B-B14F-4D97-AF65-F5344CB8AC3E}">
+        <p14:creationId xmlns:p14="http://schemas.microsoft.com/office/powerpoint/2010/main" val="2542148358"/>
+      </p:ext>
+    </p:extLst>
+  </p:cSld>
+  <p:clrMapOvr>
+    <a:masterClrMapping/>
+  </p:clrMapOvr>
+</p:sld>
+</file>
+
+<file path=ppt/slides/slide57.xml><?xml version="1.0" encoding="utf-8"?>
+<p:sld xmlns:a="http://schemas.openxmlformats.org/drawingml/2006/main" xmlns:r="http://schemas.openxmlformats.org/officeDocument/2006/relationships" xmlns:p="http://schemas.openxmlformats.org/presentationml/2006/main">
+  <p:cSld>
+    <p:spTree>
+      <p:nvGrpSpPr>
+        <p:cNvPr id="1" name="">
+          <a:extLst>
+            <a:ext uri="{FF2B5EF4-FFF2-40B4-BE49-F238E27FC236}">
+              <a16:creationId xmlns:a16="http://schemas.microsoft.com/office/drawing/2014/main" id="{F510F14C-2711-AD8E-B8C9-D075226CA7E5}"/>
+            </a:ext>
+          </a:extLst>
+        </p:cNvPr>
+        <p:cNvGrpSpPr/>
+        <p:nvPr/>
+      </p:nvGrpSpPr>
+      <p:grpSpPr>
+        <a:xfrm>
+          <a:off x="0" y="0"/>
+          <a:ext cx="0" cy="0"/>
+          <a:chOff x="0" y="0"/>
+          <a:chExt cx="0" cy="0"/>
+        </a:xfrm>
+      </p:grpSpPr>
+      <p:sp>
+        <p:nvSpPr>
+          <p:cNvPr id="3" name="Content Placeholder 2">
+            <a:extLst>
+              <a:ext uri="{FF2B5EF4-FFF2-40B4-BE49-F238E27FC236}">
+                <a16:creationId xmlns:a16="http://schemas.microsoft.com/office/drawing/2014/main" id="{03AE26E3-75E8-4BF3-478B-C4E68CCAFC9D}"/>
+              </a:ext>
+            </a:extLst>
+          </p:cNvPr>
+          <p:cNvSpPr>
+            <a:spLocks noGrp="1"/>
+          </p:cNvSpPr>
+          <p:nvPr>
+            <p:ph idx="1"/>
+          </p:nvPr>
+        </p:nvSpPr>
+        <p:spPr>
+          <a:xfrm>
+            <a:off x="777240" y="816429"/>
+            <a:ext cx="10659110" cy="5360534"/>
+          </a:xfrm>
+        </p:spPr>
+        <p:txBody>
+          <a:bodyPr>
+            <a:normAutofit/>
+          </a:bodyPr>
+          <a:lstStyle/>
+          <a:p>
+            <a:pPr marL="0" indent="0">
+              <a:buNone/>
+            </a:pPr>
+            <a:r>
+              <a:rPr lang="en-US" sz="2400" b="1" dirty="0"/>
+              <a:t>4. Create a Session (for talking to DB)</a:t>
+            </a:r>
+          </a:p>
+          <a:p>
+            <a:r>
+              <a:rPr lang="en-US" sz="2400" dirty="0"/>
+              <a:t>The </a:t>
+            </a:r>
+            <a:r>
+              <a:rPr lang="en-US" sz="2400" b="1" dirty="0"/>
+              <a:t>Session</a:t>
+            </a:r>
+            <a:r>
+              <a:rPr lang="en-US" sz="2400" dirty="0"/>
+              <a:t> is the ORM’s way of </a:t>
+            </a:r>
+            <a:r>
+              <a:rPr lang="en-US" sz="2400" b="1" dirty="0"/>
+              <a:t>communicating with the database</a:t>
+            </a:r>
+            <a:r>
+              <a:rPr lang="en-US" sz="2400" dirty="0"/>
+              <a:t>.</a:t>
+            </a:r>
+          </a:p>
+          <a:p>
+            <a:r>
+              <a:rPr lang="en-US" sz="2400" dirty="0"/>
+              <a:t>Think of it as a </a:t>
+            </a:r>
+            <a:r>
+              <a:rPr lang="en-US" sz="2400" b="1" dirty="0"/>
+              <a:t>temporary workspace</a:t>
+            </a:r>
+            <a:r>
+              <a:rPr lang="en-US" sz="2400" dirty="0"/>
+              <a:t> where you can:</a:t>
+            </a:r>
+          </a:p>
+          <a:p>
+            <a:pPr lvl="1"/>
+            <a:r>
+              <a:rPr lang="en-US" sz="2200" dirty="0"/>
+              <a:t>Add new data</a:t>
+            </a:r>
+          </a:p>
+          <a:p>
+            <a:pPr lvl="1"/>
+            <a:r>
+              <a:rPr lang="en-US" sz="2200" dirty="0"/>
+              <a:t>Query data</a:t>
+            </a:r>
+          </a:p>
+          <a:p>
+            <a:pPr lvl="1"/>
+            <a:r>
+              <a:rPr lang="en-US" sz="2200" dirty="0"/>
+              <a:t>Update data</a:t>
+            </a:r>
+          </a:p>
+          <a:p>
+            <a:pPr lvl="1"/>
+            <a:r>
+              <a:rPr lang="en-US" sz="2200" dirty="0"/>
+              <a:t>Delete data</a:t>
+            </a:r>
+          </a:p>
+          <a:p>
+            <a:pPr marL="0" indent="0">
+              <a:buNone/>
+            </a:pPr>
+            <a:endParaRPr lang="en-IN" sz="2400" dirty="0"/>
+          </a:p>
+        </p:txBody>
+      </p:sp>
+      <p:pic>
+        <p:nvPicPr>
+          <p:cNvPr id="4" name="Picture 3">
+            <a:extLst>
+              <a:ext uri="{FF2B5EF4-FFF2-40B4-BE49-F238E27FC236}">
+                <a16:creationId xmlns:a16="http://schemas.microsoft.com/office/drawing/2014/main" id="{58F0970E-160C-7D34-5DC5-7682318E0C52}"/>
+              </a:ext>
+            </a:extLst>
+          </p:cNvPr>
+          <p:cNvPicPr>
+            <a:picLocks noChangeAspect="1"/>
+          </p:cNvPicPr>
+          <p:nvPr/>
+        </p:nvPicPr>
+        <p:blipFill>
+          <a:blip r:embed="rId2"/>
+          <a:stretch>
+            <a:fillRect/>
+          </a:stretch>
+        </p:blipFill>
+        <p:spPr>
+          <a:xfrm>
+            <a:off x="1921081" y="3841694"/>
+            <a:ext cx="8371428" cy="2066667"/>
+          </a:xfrm>
+          <a:prstGeom prst="rect">
+            <a:avLst/>
+          </a:prstGeom>
+        </p:spPr>
+      </p:pic>
+    </p:spTree>
+    <p:extLst>
+      <p:ext uri="{BB962C8B-B14F-4D97-AF65-F5344CB8AC3E}">
+        <p14:creationId xmlns:p14="http://schemas.microsoft.com/office/powerpoint/2010/main" val="3280842218"/>
+      </p:ext>
+    </p:extLst>
+  </p:cSld>
+  <p:clrMapOvr>
+    <a:masterClrMapping/>
+  </p:clrMapOvr>
+</p:sld>
+</file>
+
+<file path=ppt/slides/slide58.xml><?xml version="1.0" encoding="utf-8"?>
+<p:sld xmlns:a="http://schemas.openxmlformats.org/drawingml/2006/main" xmlns:r="http://schemas.openxmlformats.org/officeDocument/2006/relationships" xmlns:p="http://schemas.openxmlformats.org/presentationml/2006/main">
+  <p:cSld>
+    <p:spTree>
+      <p:nvGrpSpPr>
+        <p:cNvPr id="1" name="">
+          <a:extLst>
+            <a:ext uri="{FF2B5EF4-FFF2-40B4-BE49-F238E27FC236}">
+              <a16:creationId xmlns:a16="http://schemas.microsoft.com/office/drawing/2014/main" id="{2B3036FD-32AF-A0A0-F602-6F7F549CF00D}"/>
+            </a:ext>
+          </a:extLst>
+        </p:cNvPr>
+        <p:cNvGrpSpPr/>
+        <p:nvPr/>
+      </p:nvGrpSpPr>
+      <p:grpSpPr>
+        <a:xfrm>
+          <a:off x="0" y="0"/>
+          <a:ext cx="0" cy="0"/>
+          <a:chOff x="0" y="0"/>
+          <a:chExt cx="0" cy="0"/>
+        </a:xfrm>
+      </p:grpSpPr>
+      <p:sp>
+        <p:nvSpPr>
+          <p:cNvPr id="3" name="Content Placeholder 2">
+            <a:extLst>
+              <a:ext uri="{FF2B5EF4-FFF2-40B4-BE49-F238E27FC236}">
+                <a16:creationId xmlns:a16="http://schemas.microsoft.com/office/drawing/2014/main" id="{3E9BC2E0-0A2C-650F-B078-B2A3F80CD624}"/>
+              </a:ext>
+            </a:extLst>
+          </p:cNvPr>
+          <p:cNvSpPr>
+            <a:spLocks noGrp="1"/>
+          </p:cNvSpPr>
+          <p:nvPr>
+            <p:ph idx="1"/>
+          </p:nvPr>
+        </p:nvSpPr>
+        <p:spPr>
+          <a:xfrm>
+            <a:off x="777240" y="816429"/>
+            <a:ext cx="10659110" cy="5360534"/>
+          </a:xfrm>
+        </p:spPr>
+        <p:txBody>
+          <a:bodyPr>
+            <a:normAutofit/>
+          </a:bodyPr>
+          <a:lstStyle/>
+          <a:p>
+            <a:pPr marL="0" indent="0">
+              <a:buNone/>
+            </a:pPr>
+            <a:endParaRPr lang="en-IN" sz="2400" dirty="0"/>
+          </a:p>
+        </p:txBody>
+      </p:sp>
+    </p:spTree>
+    <p:extLst>
+      <p:ext uri="{BB962C8B-B14F-4D97-AF65-F5344CB8AC3E}">
+        <p14:creationId xmlns:p14="http://schemas.microsoft.com/office/powerpoint/2010/main" val="2019070159"/>
+      </p:ext>
+    </p:extLst>
+  </p:cSld>
+  <p:clrMapOvr>
+    <a:masterClrMapping/>
+  </p:clrMapOvr>
+</p:sld>
+</file>
+
+<file path=ppt/slides/slide59.xml><?xml version="1.0" encoding="utf-8"?>
+<p:sld xmlns:a="http://schemas.openxmlformats.org/drawingml/2006/main" xmlns:r="http://schemas.openxmlformats.org/officeDocument/2006/relationships" xmlns:p="http://schemas.openxmlformats.org/presentationml/2006/main">
+  <p:cSld>
+    <p:spTree>
+      <p:nvGrpSpPr>
         <p:cNvPr id="1" name=""/>
         <p:cNvGrpSpPr/>
         <p:nvPr/>
@@ -16185,6 +16910,53 @@
           </a:p>
         </p:txBody>
       </p:sp>
+      <p:pic>
+        <p:nvPicPr>
+          <p:cNvPr id="1026" name="Picture 2" descr="SQL Commands | DDL, DQL, DML, DCL and ...">
+            <a:extLst>
+              <a:ext uri="{FF2B5EF4-FFF2-40B4-BE49-F238E27FC236}">
+                <a16:creationId xmlns:a16="http://schemas.microsoft.com/office/drawing/2014/main" id="{B7EE9A05-88B3-D8BB-C5BE-88BE5CCE0CE5}"/>
+              </a:ext>
+            </a:extLst>
+          </p:cNvPr>
+          <p:cNvPicPr>
+            <a:picLocks noChangeAspect="1" noChangeArrowheads="1"/>
+          </p:cNvPicPr>
+          <p:nvPr/>
+        </p:nvPicPr>
+        <p:blipFill>
+          <a:blip r:embed="rId2">
+            <a:extLst>
+              <a:ext uri="{28A0092B-C50C-407E-A947-70E740481C1C}">
+                <a14:useLocalDpi xmlns:a14="http://schemas.microsoft.com/office/drawing/2010/main" val="0"/>
+              </a:ext>
+            </a:extLst>
+          </a:blip>
+          <a:srcRect/>
+          <a:stretch>
+            <a:fillRect/>
+          </a:stretch>
+        </p:blipFill>
+        <p:spPr bwMode="auto">
+          <a:xfrm>
+            <a:off x="777240" y="849086"/>
+            <a:ext cx="10655754" cy="5327877"/>
+          </a:xfrm>
+          <a:prstGeom prst="rect">
+            <a:avLst/>
+          </a:prstGeom>
+          <a:noFill/>
+          <a:extLst>
+            <a:ext uri="{909E8E84-426E-40DD-AFC4-6F175D3DCCD1}">
+              <a14:hiddenFill xmlns:a14="http://schemas.microsoft.com/office/drawing/2010/main">
+                <a:solidFill>
+                  <a:srgbClr val="FFFFFF"/>
+                </a:solidFill>
+              </a14:hiddenFill>
+            </a:ext>
+          </a:extLst>
+        </p:spPr>
+      </p:pic>
     </p:spTree>
     <p:extLst>
       <p:ext uri="{BB962C8B-B14F-4D97-AF65-F5344CB8AC3E}">
@@ -16198,7 +16970,276 @@
 </p:sld>
 </file>
 
-<file path=ppt/slides/slide51.xml><?xml version="1.0" encoding="utf-8"?>
+<file path=ppt/slides/slide6.xml><?xml version="1.0" encoding="utf-8"?>
+<p:sld xmlns:a="http://schemas.openxmlformats.org/drawingml/2006/main" xmlns:r="http://schemas.openxmlformats.org/officeDocument/2006/relationships" xmlns:p="http://schemas.openxmlformats.org/presentationml/2006/main">
+  <p:cSld>
+    <p:spTree>
+      <p:nvGrpSpPr>
+        <p:cNvPr id="1" name="">
+          <a:extLst>
+            <a:ext uri="{FF2B5EF4-FFF2-40B4-BE49-F238E27FC236}">
+              <a16:creationId xmlns:a16="http://schemas.microsoft.com/office/drawing/2014/main" id="{9D583944-3AAC-2EB5-16F5-07ED77E1EC21}"/>
+            </a:ext>
+          </a:extLst>
+        </p:cNvPr>
+        <p:cNvGrpSpPr/>
+        <p:nvPr/>
+      </p:nvGrpSpPr>
+      <p:grpSpPr>
+        <a:xfrm>
+          <a:off x="0" y="0"/>
+          <a:ext cx="0" cy="0"/>
+          <a:chOff x="0" y="0"/>
+          <a:chExt cx="0" cy="0"/>
+        </a:xfrm>
+      </p:grpSpPr>
+      <p:sp>
+        <p:nvSpPr>
+          <p:cNvPr id="3" name="Content Placeholder 2">
+            <a:extLst>
+              <a:ext uri="{FF2B5EF4-FFF2-40B4-BE49-F238E27FC236}">
+                <a16:creationId xmlns:a16="http://schemas.microsoft.com/office/drawing/2014/main" id="{5A8A250C-3D0F-0849-B09B-2A4A159E4F65}"/>
+              </a:ext>
+            </a:extLst>
+          </p:cNvPr>
+          <p:cNvSpPr>
+            <a:spLocks noGrp="1"/>
+          </p:cNvSpPr>
+          <p:nvPr>
+            <p:ph idx="1"/>
+          </p:nvPr>
+        </p:nvSpPr>
+        <p:spPr>
+          <a:xfrm>
+            <a:off x="766445" y="468085"/>
+            <a:ext cx="10659110" cy="5502049"/>
+          </a:xfrm>
+        </p:spPr>
+        <p:txBody>
+          <a:bodyPr>
+            <a:normAutofit/>
+          </a:bodyPr>
+          <a:lstStyle/>
+          <a:p>
+            <a:pPr marL="0" indent="0">
+              <a:buNone/>
+            </a:pPr>
+            <a:r>
+              <a:rPr lang="en-US" sz="2400" b="1" dirty="0"/>
+              <a:t>Creating a Local Module:</a:t>
+            </a:r>
+          </a:p>
+          <a:p>
+            <a:pPr marL="0" indent="0">
+              <a:buNone/>
+            </a:pPr>
+            <a:r>
+              <a:rPr lang="en-US" sz="2400" dirty="0"/>
+              <a:t>A local module is </a:t>
+            </a:r>
+            <a:r>
+              <a:rPr lang="en-US" sz="2400" b="1" dirty="0">
+                <a:solidFill>
+                  <a:srgbClr val="C00000"/>
+                </a:solidFill>
+              </a:rPr>
+              <a:t>just a Python file </a:t>
+            </a:r>
+            <a:r>
+              <a:rPr lang="en-US" sz="2400" dirty="0"/>
+              <a:t>where you define your functionality </a:t>
+            </a:r>
+          </a:p>
+          <a:p>
+            <a:pPr marL="0" indent="0">
+              <a:buNone/>
+            </a:pPr>
+            <a:r>
+              <a:rPr lang="en-US" sz="2400" b="1" dirty="0"/>
+              <a:t>Example </a:t>
+            </a:r>
+            <a:r>
+              <a:rPr lang="en-IN" sz="2400" b="1" dirty="0"/>
+              <a:t>Project Structure:</a:t>
+            </a:r>
+            <a:endParaRPr lang="en-US" sz="2400" b="1" dirty="0"/>
+          </a:p>
+          <a:p>
+            <a:pPr marL="0" indent="0">
+              <a:buNone/>
+            </a:pPr>
+            <a:endParaRPr lang="en-US" sz="2400" dirty="0"/>
+          </a:p>
+          <a:p>
+            <a:pPr marL="0" indent="0">
+              <a:buNone/>
+            </a:pPr>
+            <a:endParaRPr lang="en-IN" sz="2400" dirty="0"/>
+          </a:p>
+        </p:txBody>
+      </p:sp>
+      <p:pic>
+        <p:nvPicPr>
+          <p:cNvPr id="4" name="Picture 3">
+            <a:extLst>
+              <a:ext uri="{FF2B5EF4-FFF2-40B4-BE49-F238E27FC236}">
+                <a16:creationId xmlns:a16="http://schemas.microsoft.com/office/drawing/2014/main" id="{862EC868-096E-1036-F721-98E1B696015F}"/>
+              </a:ext>
+            </a:extLst>
+          </p:cNvPr>
+          <p:cNvPicPr>
+            <a:picLocks noChangeAspect="1"/>
+          </p:cNvPicPr>
+          <p:nvPr/>
+        </p:nvPicPr>
+        <p:blipFill>
+          <a:blip r:embed="rId2"/>
+          <a:stretch>
+            <a:fillRect/>
+          </a:stretch>
+        </p:blipFill>
+        <p:spPr>
+          <a:xfrm>
+            <a:off x="3253143" y="2189915"/>
+            <a:ext cx="5237714" cy="3869065"/>
+          </a:xfrm>
+          <a:prstGeom prst="rect">
+            <a:avLst/>
+          </a:prstGeom>
+        </p:spPr>
+      </p:pic>
+    </p:spTree>
+    <p:extLst>
+      <p:ext uri="{BB962C8B-B14F-4D97-AF65-F5344CB8AC3E}">
+        <p14:creationId xmlns:p14="http://schemas.microsoft.com/office/powerpoint/2010/main" val="1417320102"/>
+      </p:ext>
+    </p:extLst>
+  </p:cSld>
+  <p:clrMapOvr>
+    <a:masterClrMapping/>
+  </p:clrMapOvr>
+</p:sld>
+</file>
+
+<file path=ppt/slides/slide60.xml><?xml version="1.0" encoding="utf-8"?>
+<p:sld xmlns:a="http://schemas.openxmlformats.org/drawingml/2006/main" xmlns:r="http://schemas.openxmlformats.org/officeDocument/2006/relationships" xmlns:p="http://schemas.openxmlformats.org/presentationml/2006/main">
+  <p:cSld>
+    <p:spTree>
+      <p:nvGrpSpPr>
+        <p:cNvPr id="1" name="">
+          <a:extLst>
+            <a:ext uri="{FF2B5EF4-FFF2-40B4-BE49-F238E27FC236}">
+              <a16:creationId xmlns:a16="http://schemas.microsoft.com/office/drawing/2014/main" id="{B60D0909-7F69-552B-4961-44BF74F6F70F}"/>
+            </a:ext>
+          </a:extLst>
+        </p:cNvPr>
+        <p:cNvGrpSpPr/>
+        <p:nvPr/>
+      </p:nvGrpSpPr>
+      <p:grpSpPr>
+        <a:xfrm>
+          <a:off x="0" y="0"/>
+          <a:ext cx="0" cy="0"/>
+          <a:chOff x="0" y="0"/>
+          <a:chExt cx="0" cy="0"/>
+        </a:xfrm>
+      </p:grpSpPr>
+      <p:sp>
+        <p:nvSpPr>
+          <p:cNvPr id="3" name="Content Placeholder 2">
+            <a:extLst>
+              <a:ext uri="{FF2B5EF4-FFF2-40B4-BE49-F238E27FC236}">
+                <a16:creationId xmlns:a16="http://schemas.microsoft.com/office/drawing/2014/main" id="{B4B2DEDA-1E80-4529-4653-55272AC1E893}"/>
+              </a:ext>
+            </a:extLst>
+          </p:cNvPr>
+          <p:cNvSpPr>
+            <a:spLocks noGrp="1"/>
+          </p:cNvSpPr>
+          <p:nvPr>
+            <p:ph idx="1"/>
+          </p:nvPr>
+        </p:nvSpPr>
+        <p:spPr>
+          <a:xfrm>
+            <a:off x="777240" y="849086"/>
+            <a:ext cx="10659110" cy="5327877"/>
+          </a:xfrm>
+        </p:spPr>
+        <p:txBody>
+          <a:bodyPr>
+            <a:normAutofit/>
+          </a:bodyPr>
+          <a:lstStyle/>
+          <a:p>
+            <a:pPr marL="0" indent="0">
+              <a:buNone/>
+            </a:pPr>
+            <a:endParaRPr lang="en-IN" sz="2400" dirty="0"/>
+          </a:p>
+        </p:txBody>
+      </p:sp>
+      <p:pic>
+        <p:nvPicPr>
+          <p:cNvPr id="2050" name="Picture 2" descr="Different Types Of SQL Commands ...">
+            <a:extLst>
+              <a:ext uri="{FF2B5EF4-FFF2-40B4-BE49-F238E27FC236}">
+                <a16:creationId xmlns:a16="http://schemas.microsoft.com/office/drawing/2014/main" id="{2DFC8A29-FB35-54C6-9631-64F0EBE37998}"/>
+              </a:ext>
+            </a:extLst>
+          </p:cNvPr>
+          <p:cNvPicPr>
+            <a:picLocks noChangeAspect="1" noChangeArrowheads="1"/>
+          </p:cNvPicPr>
+          <p:nvPr/>
+        </p:nvPicPr>
+        <p:blipFill>
+          <a:blip r:embed="rId2">
+            <a:extLst>
+              <a:ext uri="{28A0092B-C50C-407E-A947-70E740481C1C}">
+                <a14:useLocalDpi xmlns:a14="http://schemas.microsoft.com/office/drawing/2010/main" val="0"/>
+              </a:ext>
+            </a:extLst>
+          </a:blip>
+          <a:srcRect/>
+          <a:stretch>
+            <a:fillRect/>
+          </a:stretch>
+        </p:blipFill>
+        <p:spPr bwMode="auto">
+          <a:xfrm>
+            <a:off x="2572036" y="371474"/>
+            <a:ext cx="8667464" cy="5432425"/>
+          </a:xfrm>
+          <a:prstGeom prst="rect">
+            <a:avLst/>
+          </a:prstGeom>
+          <a:noFill/>
+          <a:extLst>
+            <a:ext uri="{909E8E84-426E-40DD-AFC4-6F175D3DCCD1}">
+              <a14:hiddenFill xmlns:a14="http://schemas.microsoft.com/office/drawing/2010/main">
+                <a:solidFill>
+                  <a:srgbClr val="FFFFFF"/>
+                </a:solidFill>
+              </a14:hiddenFill>
+            </a:ext>
+          </a:extLst>
+        </p:spPr>
+      </p:pic>
+    </p:spTree>
+    <p:extLst>
+      <p:ext uri="{BB962C8B-B14F-4D97-AF65-F5344CB8AC3E}">
+        <p14:creationId xmlns:p14="http://schemas.microsoft.com/office/powerpoint/2010/main" val="3124576173"/>
+      </p:ext>
+    </p:extLst>
+  </p:cSld>
+  <p:clrMapOvr>
+    <a:masterClrMapping/>
+  </p:clrMapOvr>
+</p:sld>
+</file>
+
+<file path=ppt/slides/slide61.xml><?xml version="1.0" encoding="utf-8"?>
 <p:sld xmlns:a="http://schemas.openxmlformats.org/drawingml/2006/main" xmlns:r="http://schemas.openxmlformats.org/officeDocument/2006/relationships" xmlns:p="http://schemas.openxmlformats.org/presentationml/2006/main">
   <p:cSld>
     <p:spTree>
@@ -17298,7 +18339,7 @@
 </p:sld>
 </file>
 
-<file path=ppt/slides/slide52.xml><?xml version="1.0" encoding="utf-8"?>
+<file path=ppt/slides/slide62.xml><?xml version="1.0" encoding="utf-8"?>
 <p:sld xmlns:a="http://schemas.openxmlformats.org/drawingml/2006/main" xmlns:r="http://schemas.openxmlformats.org/officeDocument/2006/relationships" xmlns:p="http://schemas.openxmlformats.org/presentationml/2006/main">
   <p:cSld>
     <p:spTree>
@@ -17494,7 +18535,7 @@
 </p:sld>
 </file>
 
-<file path=ppt/slides/slide53.xml><?xml version="1.0" encoding="utf-8"?>
+<file path=ppt/slides/slide63.xml><?xml version="1.0" encoding="utf-8"?>
 <p:sld xmlns:a="http://schemas.openxmlformats.org/drawingml/2006/main" xmlns:r="http://schemas.openxmlformats.org/officeDocument/2006/relationships" xmlns:p="http://schemas.openxmlformats.org/presentationml/2006/main">
   <p:cSld>
     <p:spTree>
@@ -18146,7 +19187,7 @@
 </p:sld>
 </file>
 
-<file path=ppt/slides/slide54.xml><?xml version="1.0" encoding="utf-8"?>
+<file path=ppt/slides/slide64.xml><?xml version="1.0" encoding="utf-8"?>
 <p:sld xmlns:a="http://schemas.openxmlformats.org/drawingml/2006/main" xmlns:r="http://schemas.openxmlformats.org/officeDocument/2006/relationships" xmlns:p="http://schemas.openxmlformats.org/presentationml/2006/main">
   <p:cSld>
     <p:spTree>
@@ -18383,7 +19424,7 @@
 </p:sld>
 </file>
 
-<file path=ppt/slides/slide55.xml><?xml version="1.0" encoding="utf-8"?>
+<file path=ppt/slides/slide65.xml><?xml version="1.0" encoding="utf-8"?>
 <p:sld xmlns:a="http://schemas.openxmlformats.org/drawingml/2006/main" xmlns:r="http://schemas.openxmlformats.org/officeDocument/2006/relationships" xmlns:p="http://schemas.openxmlformats.org/presentationml/2006/main">
   <p:cSld>
     <p:spTree>
@@ -18872,7 +19913,7 @@
 </p:sld>
 </file>
 
-<file path=ppt/slides/slide56.xml><?xml version="1.0" encoding="utf-8"?>
+<file path=ppt/slides/slide66.xml><?xml version="1.0" encoding="utf-8"?>
 <p:sld xmlns:a="http://schemas.openxmlformats.org/drawingml/2006/main" xmlns:r="http://schemas.openxmlformats.org/officeDocument/2006/relationships" xmlns:p="http://schemas.openxmlformats.org/presentationml/2006/main">
   <p:cSld>
     <p:spTree>
@@ -19105,7 +20146,7 @@
 </p:sld>
 </file>
 
-<file path=ppt/slides/slide57.xml><?xml version="1.0" encoding="utf-8"?>
+<file path=ppt/slides/slide67.xml><?xml version="1.0" encoding="utf-8"?>
 <p:sld xmlns:a="http://schemas.openxmlformats.org/drawingml/2006/main" xmlns:r="http://schemas.openxmlformats.org/officeDocument/2006/relationships" xmlns:p="http://schemas.openxmlformats.org/presentationml/2006/main">
   <p:cSld>
     <p:spTree>
@@ -19219,7 +20260,7 @@
 </p:sld>
 </file>
 
-<file path=ppt/slides/slide58.xml><?xml version="1.0" encoding="utf-8"?>
+<file path=ppt/slides/slide68.xml><?xml version="1.0" encoding="utf-8"?>
 <p:sld xmlns:a="http://schemas.openxmlformats.org/drawingml/2006/main" xmlns:r="http://schemas.openxmlformats.org/officeDocument/2006/relationships" xmlns:p="http://schemas.openxmlformats.org/presentationml/2006/main">
   <p:cSld>
     <p:spTree>
@@ -19374,7 +20415,7 @@
 </p:sld>
 </file>
 
-<file path=ppt/slides/slide59.xml><?xml version="1.0" encoding="utf-8"?>
+<file path=ppt/slides/slide69.xml><?xml version="1.0" encoding="utf-8"?>
 <p:sld xmlns:a="http://schemas.openxmlformats.org/drawingml/2006/main" xmlns:r="http://schemas.openxmlformats.org/officeDocument/2006/relationships" xmlns:p="http://schemas.openxmlformats.org/presentationml/2006/main">
   <p:cSld>
     <p:spTree>
@@ -19487,819 +20528,6 @@
     <p:extLst>
       <p:ext uri="{BB962C8B-B14F-4D97-AF65-F5344CB8AC3E}">
         <p14:creationId xmlns:p14="http://schemas.microsoft.com/office/powerpoint/2010/main" val="2779355306"/>
-      </p:ext>
-    </p:extLst>
-  </p:cSld>
-  <p:clrMapOvr>
-    <a:masterClrMapping/>
-  </p:clrMapOvr>
-</p:sld>
-</file>
-
-<file path=ppt/slides/slide6.xml><?xml version="1.0" encoding="utf-8"?>
-<p:sld xmlns:a="http://schemas.openxmlformats.org/drawingml/2006/main" xmlns:r="http://schemas.openxmlformats.org/officeDocument/2006/relationships" xmlns:p="http://schemas.openxmlformats.org/presentationml/2006/main">
-  <p:cSld>
-    <p:spTree>
-      <p:nvGrpSpPr>
-        <p:cNvPr id="1" name="">
-          <a:extLst>
-            <a:ext uri="{FF2B5EF4-FFF2-40B4-BE49-F238E27FC236}">
-              <a16:creationId xmlns:a16="http://schemas.microsoft.com/office/drawing/2014/main" id="{9D583944-3AAC-2EB5-16F5-07ED77E1EC21}"/>
-            </a:ext>
-          </a:extLst>
-        </p:cNvPr>
-        <p:cNvGrpSpPr/>
-        <p:nvPr/>
-      </p:nvGrpSpPr>
-      <p:grpSpPr>
-        <a:xfrm>
-          <a:off x="0" y="0"/>
-          <a:ext cx="0" cy="0"/>
-          <a:chOff x="0" y="0"/>
-          <a:chExt cx="0" cy="0"/>
-        </a:xfrm>
-      </p:grpSpPr>
-      <p:sp>
-        <p:nvSpPr>
-          <p:cNvPr id="3" name="Content Placeholder 2">
-            <a:extLst>
-              <a:ext uri="{FF2B5EF4-FFF2-40B4-BE49-F238E27FC236}">
-                <a16:creationId xmlns:a16="http://schemas.microsoft.com/office/drawing/2014/main" id="{5A8A250C-3D0F-0849-B09B-2A4A159E4F65}"/>
-              </a:ext>
-            </a:extLst>
-          </p:cNvPr>
-          <p:cNvSpPr>
-            <a:spLocks noGrp="1"/>
-          </p:cNvSpPr>
-          <p:nvPr>
-            <p:ph idx="1"/>
-          </p:nvPr>
-        </p:nvSpPr>
-        <p:spPr>
-          <a:xfrm>
-            <a:off x="766445" y="468085"/>
-            <a:ext cx="10659110" cy="5502049"/>
-          </a:xfrm>
-        </p:spPr>
-        <p:txBody>
-          <a:bodyPr>
-            <a:normAutofit/>
-          </a:bodyPr>
-          <a:lstStyle/>
-          <a:p>
-            <a:pPr marL="0" indent="0">
-              <a:buNone/>
-            </a:pPr>
-            <a:r>
-              <a:rPr lang="en-US" sz="2400" b="1" dirty="0"/>
-              <a:t>Creating a Local Module:</a:t>
-            </a:r>
-          </a:p>
-          <a:p>
-            <a:pPr marL="0" indent="0">
-              <a:buNone/>
-            </a:pPr>
-            <a:r>
-              <a:rPr lang="en-US" sz="2400" dirty="0"/>
-              <a:t>A local module is </a:t>
-            </a:r>
-            <a:r>
-              <a:rPr lang="en-US" sz="2400" b="1" dirty="0">
-                <a:solidFill>
-                  <a:srgbClr val="C00000"/>
-                </a:solidFill>
-              </a:rPr>
-              <a:t>just a Python file </a:t>
-            </a:r>
-            <a:r>
-              <a:rPr lang="en-US" sz="2400" dirty="0"/>
-              <a:t>where you define your functionality </a:t>
-            </a:r>
-          </a:p>
-          <a:p>
-            <a:pPr marL="0" indent="0">
-              <a:buNone/>
-            </a:pPr>
-            <a:r>
-              <a:rPr lang="en-US" sz="2400" b="1" dirty="0"/>
-              <a:t>Example </a:t>
-            </a:r>
-            <a:r>
-              <a:rPr lang="en-IN" sz="2400" b="1" dirty="0"/>
-              <a:t>Project Structure:</a:t>
-            </a:r>
-            <a:endParaRPr lang="en-US" sz="2400" b="1" dirty="0"/>
-          </a:p>
-          <a:p>
-            <a:pPr marL="0" indent="0">
-              <a:buNone/>
-            </a:pPr>
-            <a:endParaRPr lang="en-US" sz="2400" dirty="0"/>
-          </a:p>
-          <a:p>
-            <a:pPr marL="0" indent="0">
-              <a:buNone/>
-            </a:pPr>
-            <a:endParaRPr lang="en-IN" sz="2400" dirty="0"/>
-          </a:p>
-        </p:txBody>
-      </p:sp>
-      <p:pic>
-        <p:nvPicPr>
-          <p:cNvPr id="4" name="Picture 3">
-            <a:extLst>
-              <a:ext uri="{FF2B5EF4-FFF2-40B4-BE49-F238E27FC236}">
-                <a16:creationId xmlns:a16="http://schemas.microsoft.com/office/drawing/2014/main" id="{862EC868-096E-1036-F721-98E1B696015F}"/>
-              </a:ext>
-            </a:extLst>
-          </p:cNvPr>
-          <p:cNvPicPr>
-            <a:picLocks noChangeAspect="1"/>
-          </p:cNvPicPr>
-          <p:nvPr/>
-        </p:nvPicPr>
-        <p:blipFill>
-          <a:blip r:embed="rId2"/>
-          <a:stretch>
-            <a:fillRect/>
-          </a:stretch>
-        </p:blipFill>
-        <p:spPr>
-          <a:xfrm>
-            <a:off x="3253143" y="2189915"/>
-            <a:ext cx="5237714" cy="3869065"/>
-          </a:xfrm>
-          <a:prstGeom prst="rect">
-            <a:avLst/>
-          </a:prstGeom>
-        </p:spPr>
-      </p:pic>
-    </p:spTree>
-    <p:extLst>
-      <p:ext uri="{BB962C8B-B14F-4D97-AF65-F5344CB8AC3E}">
-        <p14:creationId xmlns:p14="http://schemas.microsoft.com/office/powerpoint/2010/main" val="1417320102"/>
-      </p:ext>
-    </p:extLst>
-  </p:cSld>
-  <p:clrMapOvr>
-    <a:masterClrMapping/>
-  </p:clrMapOvr>
-</p:sld>
-</file>
-
-<file path=ppt/slides/slide60.xml><?xml version="1.0" encoding="utf-8"?>
-<p:sld xmlns:a="http://schemas.openxmlformats.org/drawingml/2006/main" xmlns:r="http://schemas.openxmlformats.org/officeDocument/2006/relationships" xmlns:p="http://schemas.openxmlformats.org/presentationml/2006/main">
-  <p:cSld>
-    <p:spTree>
-      <p:nvGrpSpPr>
-        <p:cNvPr id="1" name="">
-          <a:extLst>
-            <a:ext uri="{FF2B5EF4-FFF2-40B4-BE49-F238E27FC236}">
-              <a16:creationId xmlns:a16="http://schemas.microsoft.com/office/drawing/2014/main" id="{FFD6EED2-A3BB-B01D-74E3-F3E59700FB52}"/>
-            </a:ext>
-          </a:extLst>
-        </p:cNvPr>
-        <p:cNvGrpSpPr/>
-        <p:nvPr/>
-      </p:nvGrpSpPr>
-      <p:grpSpPr>
-        <a:xfrm>
-          <a:off x="0" y="0"/>
-          <a:ext cx="0" cy="0"/>
-          <a:chOff x="0" y="0"/>
-          <a:chExt cx="0" cy="0"/>
-        </a:xfrm>
-      </p:grpSpPr>
-      <p:sp>
-        <p:nvSpPr>
-          <p:cNvPr id="3" name="Content Placeholder 2">
-            <a:extLst>
-              <a:ext uri="{FF2B5EF4-FFF2-40B4-BE49-F238E27FC236}">
-                <a16:creationId xmlns:a16="http://schemas.microsoft.com/office/drawing/2014/main" id="{F078D154-D5E2-6D6C-49CD-F890F93EBC1A}"/>
-              </a:ext>
-            </a:extLst>
-          </p:cNvPr>
-          <p:cNvSpPr>
-            <a:spLocks noGrp="1"/>
-          </p:cNvSpPr>
-          <p:nvPr>
-            <p:ph idx="1"/>
-          </p:nvPr>
-        </p:nvSpPr>
-        <p:spPr>
-          <a:xfrm>
-            <a:off x="777240" y="696686"/>
-            <a:ext cx="10659110" cy="5480277"/>
-          </a:xfrm>
-        </p:spPr>
-        <p:txBody>
-          <a:bodyPr>
-            <a:normAutofit/>
-          </a:bodyPr>
-          <a:lstStyle/>
-          <a:p>
-            <a:pPr marL="0" indent="0">
-              <a:buNone/>
-            </a:pPr>
-            <a:r>
-              <a:rPr lang="en-US" sz="2400" b="1" dirty="0"/>
-              <a:t>Step 5: </a:t>
-            </a:r>
-            <a:r>
-              <a:rPr lang="en-US" sz="2400" dirty="0"/>
-              <a:t>Opens a </a:t>
-            </a:r>
-            <a:r>
-              <a:rPr lang="en-US" sz="2400" b="1" dirty="0"/>
-              <a:t>database session</a:t>
-            </a:r>
-            <a:r>
-              <a:rPr lang="en-US" sz="2400" dirty="0"/>
-              <a:t>, and do the </a:t>
-            </a:r>
-            <a:r>
-              <a:rPr lang="en-US" sz="2400" b="1" dirty="0"/>
-              <a:t>CRUD</a:t>
-            </a:r>
-            <a:r>
-              <a:rPr lang="en-US" sz="2400" dirty="0"/>
-              <a:t> Operation</a:t>
-            </a:r>
-            <a:endParaRPr lang="en-IN" sz="2400" dirty="0"/>
-          </a:p>
-        </p:txBody>
-      </p:sp>
-      <p:pic>
-        <p:nvPicPr>
-          <p:cNvPr id="4" name="Picture 3">
-            <a:extLst>
-              <a:ext uri="{FF2B5EF4-FFF2-40B4-BE49-F238E27FC236}">
-                <a16:creationId xmlns:a16="http://schemas.microsoft.com/office/drawing/2014/main" id="{63DE8399-64B9-8195-1182-0EB3C2091634}"/>
-              </a:ext>
-            </a:extLst>
-          </p:cNvPr>
-          <p:cNvPicPr>
-            <a:picLocks noChangeAspect="1"/>
-          </p:cNvPicPr>
-          <p:nvPr/>
-        </p:nvPicPr>
-        <p:blipFill>
-          <a:blip r:embed="rId2"/>
-          <a:stretch>
-            <a:fillRect/>
-          </a:stretch>
-        </p:blipFill>
-        <p:spPr>
-          <a:xfrm>
-            <a:off x="755650" y="1304544"/>
-            <a:ext cx="10472057" cy="4565817"/>
-          </a:xfrm>
-          <a:prstGeom prst="rect">
-            <a:avLst/>
-          </a:prstGeom>
-        </p:spPr>
-      </p:pic>
-    </p:spTree>
-    <p:extLst>
-      <p:ext uri="{BB962C8B-B14F-4D97-AF65-F5344CB8AC3E}">
-        <p14:creationId xmlns:p14="http://schemas.microsoft.com/office/powerpoint/2010/main" val="1341148807"/>
-      </p:ext>
-    </p:extLst>
-  </p:cSld>
-  <p:clrMapOvr>
-    <a:masterClrMapping/>
-  </p:clrMapOvr>
-</p:sld>
-</file>
-
-<file path=ppt/slides/slide61.xml><?xml version="1.0" encoding="utf-8"?>
-<p:sld xmlns:a="http://schemas.openxmlformats.org/drawingml/2006/main" xmlns:r="http://schemas.openxmlformats.org/officeDocument/2006/relationships" xmlns:p="http://schemas.openxmlformats.org/presentationml/2006/main">
-  <p:cSld>
-    <p:spTree>
-      <p:nvGrpSpPr>
-        <p:cNvPr id="1" name="">
-          <a:extLst>
-            <a:ext uri="{FF2B5EF4-FFF2-40B4-BE49-F238E27FC236}">
-              <a16:creationId xmlns:a16="http://schemas.microsoft.com/office/drawing/2014/main" id="{A31062E5-9979-AA23-0B3F-F62EE5E58C0B}"/>
-            </a:ext>
-          </a:extLst>
-        </p:cNvPr>
-        <p:cNvGrpSpPr/>
-        <p:nvPr/>
-      </p:nvGrpSpPr>
-      <p:grpSpPr>
-        <a:xfrm>
-          <a:off x="0" y="0"/>
-          <a:ext cx="0" cy="0"/>
-          <a:chOff x="0" y="0"/>
-          <a:chExt cx="0" cy="0"/>
-        </a:xfrm>
-      </p:grpSpPr>
-      <p:sp>
-        <p:nvSpPr>
-          <p:cNvPr id="3" name="Content Placeholder 2">
-            <a:extLst>
-              <a:ext uri="{FF2B5EF4-FFF2-40B4-BE49-F238E27FC236}">
-                <a16:creationId xmlns:a16="http://schemas.microsoft.com/office/drawing/2014/main" id="{760A2593-0AF0-A4C2-0094-583BB78D131A}"/>
-              </a:ext>
-            </a:extLst>
-          </p:cNvPr>
-          <p:cNvSpPr>
-            <a:spLocks noGrp="1"/>
-          </p:cNvSpPr>
-          <p:nvPr>
-            <p:ph idx="1"/>
-          </p:nvPr>
-        </p:nvSpPr>
-        <p:spPr>
-          <a:xfrm>
-            <a:off x="777240" y="696686"/>
-            <a:ext cx="10659110" cy="5480277"/>
-          </a:xfrm>
-        </p:spPr>
-        <p:txBody>
-          <a:bodyPr>
-            <a:normAutofit/>
-          </a:bodyPr>
-          <a:lstStyle/>
-          <a:p>
-            <a:pPr marL="0" indent="0">
-              <a:buNone/>
-            </a:pPr>
-            <a:r>
-              <a:rPr lang="en-US" sz="2400" b="1" dirty="0"/>
-              <a:t>Step 6: Check the PostgreSQL DB</a:t>
-            </a:r>
-          </a:p>
-          <a:p>
-            <a:r>
-              <a:rPr lang="en-US" sz="2400" dirty="0"/>
-              <a:t>Now there should be a table named Users with one Row</a:t>
-            </a:r>
-            <a:endParaRPr lang="en-IN" sz="2400" dirty="0"/>
-          </a:p>
-        </p:txBody>
-      </p:sp>
-      <p:pic>
-        <p:nvPicPr>
-          <p:cNvPr id="4" name="Picture 3">
-            <a:extLst>
-              <a:ext uri="{FF2B5EF4-FFF2-40B4-BE49-F238E27FC236}">
-                <a16:creationId xmlns:a16="http://schemas.microsoft.com/office/drawing/2014/main" id="{0B14B586-E511-A602-F886-EF57477564D0}"/>
-              </a:ext>
-            </a:extLst>
-          </p:cNvPr>
-          <p:cNvPicPr>
-            <a:picLocks noChangeAspect="1"/>
-          </p:cNvPicPr>
-          <p:nvPr/>
-        </p:nvPicPr>
-        <p:blipFill>
-          <a:blip r:embed="rId2"/>
-          <a:stretch>
-            <a:fillRect/>
-          </a:stretch>
-        </p:blipFill>
-        <p:spPr>
-          <a:xfrm>
-            <a:off x="2060599" y="1963067"/>
-            <a:ext cx="7657143" cy="3780952"/>
-          </a:xfrm>
-          <a:prstGeom prst="rect">
-            <a:avLst/>
-          </a:prstGeom>
-        </p:spPr>
-      </p:pic>
-    </p:spTree>
-    <p:extLst>
-      <p:ext uri="{BB962C8B-B14F-4D97-AF65-F5344CB8AC3E}">
-        <p14:creationId xmlns:p14="http://schemas.microsoft.com/office/powerpoint/2010/main" val="1068831768"/>
-      </p:ext>
-    </p:extLst>
-  </p:cSld>
-  <p:clrMapOvr>
-    <a:masterClrMapping/>
-  </p:clrMapOvr>
-</p:sld>
-</file>
-
-<file path=ppt/slides/slide62.xml><?xml version="1.0" encoding="utf-8"?>
-<p:sld xmlns:a="http://schemas.openxmlformats.org/drawingml/2006/main" xmlns:r="http://schemas.openxmlformats.org/officeDocument/2006/relationships" xmlns:p="http://schemas.openxmlformats.org/presentationml/2006/main">
-  <p:cSld>
-    <p:spTree>
-      <p:nvGrpSpPr>
-        <p:cNvPr id="1" name="">
-          <a:extLst>
-            <a:ext uri="{FF2B5EF4-FFF2-40B4-BE49-F238E27FC236}">
-              <a16:creationId xmlns:a16="http://schemas.microsoft.com/office/drawing/2014/main" id="{F2A1B423-1B3C-B999-58CA-1F2E39B106DE}"/>
-            </a:ext>
-          </a:extLst>
-        </p:cNvPr>
-        <p:cNvGrpSpPr/>
-        <p:nvPr/>
-      </p:nvGrpSpPr>
-      <p:grpSpPr>
-        <a:xfrm>
-          <a:off x="0" y="0"/>
-          <a:ext cx="0" cy="0"/>
-          <a:chOff x="0" y="0"/>
-          <a:chExt cx="0" cy="0"/>
-        </a:xfrm>
-      </p:grpSpPr>
-      <p:sp>
-        <p:nvSpPr>
-          <p:cNvPr id="3" name="Content Placeholder 2">
-            <a:extLst>
-              <a:ext uri="{FF2B5EF4-FFF2-40B4-BE49-F238E27FC236}">
-                <a16:creationId xmlns:a16="http://schemas.microsoft.com/office/drawing/2014/main" id="{B5867193-08B6-7B71-FE70-1AB35E1CC669}"/>
-              </a:ext>
-            </a:extLst>
-          </p:cNvPr>
-          <p:cNvSpPr>
-            <a:spLocks noGrp="1"/>
-          </p:cNvSpPr>
-          <p:nvPr>
-            <p:ph idx="1"/>
-          </p:nvPr>
-        </p:nvSpPr>
-        <p:spPr>
-          <a:xfrm>
-            <a:off x="777240" y="696686"/>
-            <a:ext cx="10659110" cy="5480277"/>
-          </a:xfrm>
-        </p:spPr>
-        <p:txBody>
-          <a:bodyPr>
-            <a:normAutofit/>
-          </a:bodyPr>
-          <a:lstStyle/>
-          <a:p>
-            <a:pPr marL="0" indent="0">
-              <a:buNone/>
-            </a:pPr>
-            <a:endParaRPr lang="en-IN" sz="2400" dirty="0"/>
-          </a:p>
-        </p:txBody>
-      </p:sp>
-    </p:spTree>
-    <p:extLst>
-      <p:ext uri="{BB962C8B-B14F-4D97-AF65-F5344CB8AC3E}">
-        <p14:creationId xmlns:p14="http://schemas.microsoft.com/office/powerpoint/2010/main" val="4084032356"/>
-      </p:ext>
-    </p:extLst>
-  </p:cSld>
-  <p:clrMapOvr>
-    <a:masterClrMapping/>
-  </p:clrMapOvr>
-</p:sld>
-</file>
-
-<file path=ppt/slides/slide63.xml><?xml version="1.0" encoding="utf-8"?>
-<p:sld xmlns:a="http://schemas.openxmlformats.org/drawingml/2006/main" xmlns:r="http://schemas.openxmlformats.org/officeDocument/2006/relationships" xmlns:p="http://schemas.openxmlformats.org/presentationml/2006/main">
-  <p:cSld>
-    <p:spTree>
-      <p:nvGrpSpPr>
-        <p:cNvPr id="1" name="">
-          <a:extLst>
-            <a:ext uri="{FF2B5EF4-FFF2-40B4-BE49-F238E27FC236}">
-              <a16:creationId xmlns:a16="http://schemas.microsoft.com/office/drawing/2014/main" id="{F0E70C9C-1825-C1BB-B27D-D6796596E970}"/>
-            </a:ext>
-          </a:extLst>
-        </p:cNvPr>
-        <p:cNvGrpSpPr/>
-        <p:nvPr/>
-      </p:nvGrpSpPr>
-      <p:grpSpPr>
-        <a:xfrm>
-          <a:off x="0" y="0"/>
-          <a:ext cx="0" cy="0"/>
-          <a:chOff x="0" y="0"/>
-          <a:chExt cx="0" cy="0"/>
-        </a:xfrm>
-      </p:grpSpPr>
-      <p:sp>
-        <p:nvSpPr>
-          <p:cNvPr id="3" name="Content Placeholder 2">
-            <a:extLst>
-              <a:ext uri="{FF2B5EF4-FFF2-40B4-BE49-F238E27FC236}">
-                <a16:creationId xmlns:a16="http://schemas.microsoft.com/office/drawing/2014/main" id="{939E0F72-31EB-FB6C-A5EF-627736FF1143}"/>
-              </a:ext>
-            </a:extLst>
-          </p:cNvPr>
-          <p:cNvSpPr>
-            <a:spLocks noGrp="1"/>
-          </p:cNvSpPr>
-          <p:nvPr>
-            <p:ph idx="1"/>
-          </p:nvPr>
-        </p:nvSpPr>
-        <p:spPr>
-          <a:xfrm>
-            <a:off x="777240" y="696686"/>
-            <a:ext cx="10659110" cy="5480277"/>
-          </a:xfrm>
-        </p:spPr>
-        <p:txBody>
-          <a:bodyPr>
-            <a:normAutofit/>
-          </a:bodyPr>
-          <a:lstStyle/>
-          <a:p>
-            <a:pPr marL="0" indent="0">
-              <a:buNone/>
-            </a:pPr>
-            <a:endParaRPr lang="en-IN" sz="2400" dirty="0"/>
-          </a:p>
-        </p:txBody>
-      </p:sp>
-    </p:spTree>
-    <p:extLst>
-      <p:ext uri="{BB962C8B-B14F-4D97-AF65-F5344CB8AC3E}">
-        <p14:creationId xmlns:p14="http://schemas.microsoft.com/office/powerpoint/2010/main" val="512058926"/>
-      </p:ext>
-    </p:extLst>
-  </p:cSld>
-  <p:clrMapOvr>
-    <a:masterClrMapping/>
-  </p:clrMapOvr>
-</p:sld>
-</file>
-
-<file path=ppt/slides/slide64.xml><?xml version="1.0" encoding="utf-8"?>
-<p:sld xmlns:a="http://schemas.openxmlformats.org/drawingml/2006/main" xmlns:r="http://schemas.openxmlformats.org/officeDocument/2006/relationships" xmlns:p="http://schemas.openxmlformats.org/presentationml/2006/main">
-  <p:cSld>
-    <p:spTree>
-      <p:nvGrpSpPr>
-        <p:cNvPr id="1" name="">
-          <a:extLst>
-            <a:ext uri="{FF2B5EF4-FFF2-40B4-BE49-F238E27FC236}">
-              <a16:creationId xmlns:a16="http://schemas.microsoft.com/office/drawing/2014/main" id="{498B2377-F360-B3B9-8904-5F5162A7E9B4}"/>
-            </a:ext>
-          </a:extLst>
-        </p:cNvPr>
-        <p:cNvGrpSpPr/>
-        <p:nvPr/>
-      </p:nvGrpSpPr>
-      <p:grpSpPr>
-        <a:xfrm>
-          <a:off x="0" y="0"/>
-          <a:ext cx="0" cy="0"/>
-          <a:chOff x="0" y="0"/>
-          <a:chExt cx="0" cy="0"/>
-        </a:xfrm>
-      </p:grpSpPr>
-      <p:sp>
-        <p:nvSpPr>
-          <p:cNvPr id="3" name="Content Placeholder 2">
-            <a:extLst>
-              <a:ext uri="{FF2B5EF4-FFF2-40B4-BE49-F238E27FC236}">
-                <a16:creationId xmlns:a16="http://schemas.microsoft.com/office/drawing/2014/main" id="{9D65A955-1F7A-FEF3-3FE1-AFC83BC7A3FD}"/>
-              </a:ext>
-            </a:extLst>
-          </p:cNvPr>
-          <p:cNvSpPr>
-            <a:spLocks noGrp="1"/>
-          </p:cNvSpPr>
-          <p:nvPr>
-            <p:ph idx="1"/>
-          </p:nvPr>
-        </p:nvSpPr>
-        <p:spPr>
-          <a:xfrm>
-            <a:off x="777240" y="696686"/>
-            <a:ext cx="10659110" cy="5480277"/>
-          </a:xfrm>
-        </p:spPr>
-        <p:txBody>
-          <a:bodyPr>
-            <a:normAutofit/>
-          </a:bodyPr>
-          <a:lstStyle/>
-          <a:p>
-            <a:pPr marL="0" indent="0">
-              <a:buNone/>
-            </a:pPr>
-            <a:endParaRPr lang="en-IN" sz="2400" dirty="0"/>
-          </a:p>
-        </p:txBody>
-      </p:sp>
-    </p:spTree>
-    <p:extLst>
-      <p:ext uri="{BB962C8B-B14F-4D97-AF65-F5344CB8AC3E}">
-        <p14:creationId xmlns:p14="http://schemas.microsoft.com/office/powerpoint/2010/main" val="4180232431"/>
-      </p:ext>
-    </p:extLst>
-  </p:cSld>
-  <p:clrMapOvr>
-    <a:masterClrMapping/>
-  </p:clrMapOvr>
-</p:sld>
-</file>
-
-<file path=ppt/slides/slide65.xml><?xml version="1.0" encoding="utf-8"?>
-<p:sld xmlns:a="http://schemas.openxmlformats.org/drawingml/2006/main" xmlns:r="http://schemas.openxmlformats.org/officeDocument/2006/relationships" xmlns:p="http://schemas.openxmlformats.org/presentationml/2006/main">
-  <p:cSld>
-    <p:spTree>
-      <p:nvGrpSpPr>
-        <p:cNvPr id="1" name="">
-          <a:extLst>
-            <a:ext uri="{FF2B5EF4-FFF2-40B4-BE49-F238E27FC236}">
-              <a16:creationId xmlns:a16="http://schemas.microsoft.com/office/drawing/2014/main" id="{11D49BA2-BC89-C17F-266A-4F25C53574A5}"/>
-            </a:ext>
-          </a:extLst>
-        </p:cNvPr>
-        <p:cNvGrpSpPr/>
-        <p:nvPr/>
-      </p:nvGrpSpPr>
-      <p:grpSpPr>
-        <a:xfrm>
-          <a:off x="0" y="0"/>
-          <a:ext cx="0" cy="0"/>
-          <a:chOff x="0" y="0"/>
-          <a:chExt cx="0" cy="0"/>
-        </a:xfrm>
-      </p:grpSpPr>
-      <p:sp>
-        <p:nvSpPr>
-          <p:cNvPr id="3" name="Content Placeholder 2">
-            <a:extLst>
-              <a:ext uri="{FF2B5EF4-FFF2-40B4-BE49-F238E27FC236}">
-                <a16:creationId xmlns:a16="http://schemas.microsoft.com/office/drawing/2014/main" id="{80A9459F-9908-EC24-3C88-885CB2B6AA71}"/>
-              </a:ext>
-            </a:extLst>
-          </p:cNvPr>
-          <p:cNvSpPr>
-            <a:spLocks noGrp="1"/>
-          </p:cNvSpPr>
-          <p:nvPr>
-            <p:ph idx="1"/>
-          </p:nvPr>
-        </p:nvSpPr>
-        <p:spPr>
-          <a:xfrm>
-            <a:off x="777240" y="696686"/>
-            <a:ext cx="10659110" cy="5480277"/>
-          </a:xfrm>
-        </p:spPr>
-        <p:txBody>
-          <a:bodyPr>
-            <a:normAutofit/>
-          </a:bodyPr>
-          <a:lstStyle/>
-          <a:p>
-            <a:pPr marL="0" indent="0">
-              <a:buNone/>
-            </a:pPr>
-            <a:endParaRPr lang="en-IN" sz="2400" dirty="0"/>
-          </a:p>
-        </p:txBody>
-      </p:sp>
-    </p:spTree>
-    <p:extLst>
-      <p:ext uri="{BB962C8B-B14F-4D97-AF65-F5344CB8AC3E}">
-        <p14:creationId xmlns:p14="http://schemas.microsoft.com/office/powerpoint/2010/main" val="1011538819"/>
-      </p:ext>
-    </p:extLst>
-  </p:cSld>
-  <p:clrMapOvr>
-    <a:masterClrMapping/>
-  </p:clrMapOvr>
-</p:sld>
-</file>
-
-<file path=ppt/slides/slide66.xml><?xml version="1.0" encoding="utf-8"?>
-<p:sld xmlns:a="http://schemas.openxmlformats.org/drawingml/2006/main" xmlns:r="http://schemas.openxmlformats.org/officeDocument/2006/relationships" xmlns:p="http://schemas.openxmlformats.org/presentationml/2006/main">
-  <p:cSld>
-    <p:spTree>
-      <p:nvGrpSpPr>
-        <p:cNvPr id="1" name="">
-          <a:extLst>
-            <a:ext uri="{FF2B5EF4-FFF2-40B4-BE49-F238E27FC236}">
-              <a16:creationId xmlns:a16="http://schemas.microsoft.com/office/drawing/2014/main" id="{E6F2BF70-0222-7D2A-403B-E8E7C95493AF}"/>
-            </a:ext>
-          </a:extLst>
-        </p:cNvPr>
-        <p:cNvGrpSpPr/>
-        <p:nvPr/>
-      </p:nvGrpSpPr>
-      <p:grpSpPr>
-        <a:xfrm>
-          <a:off x="0" y="0"/>
-          <a:ext cx="0" cy="0"/>
-          <a:chOff x="0" y="0"/>
-          <a:chExt cx="0" cy="0"/>
-        </a:xfrm>
-      </p:grpSpPr>
-      <p:sp>
-        <p:nvSpPr>
-          <p:cNvPr id="3" name="Content Placeholder 2">
-            <a:extLst>
-              <a:ext uri="{FF2B5EF4-FFF2-40B4-BE49-F238E27FC236}">
-                <a16:creationId xmlns:a16="http://schemas.microsoft.com/office/drawing/2014/main" id="{7FEFD233-4602-2FCC-A5D0-4B73E0D4B544}"/>
-              </a:ext>
-            </a:extLst>
-          </p:cNvPr>
-          <p:cNvSpPr>
-            <a:spLocks noGrp="1"/>
-          </p:cNvSpPr>
-          <p:nvPr>
-            <p:ph idx="1"/>
-          </p:nvPr>
-        </p:nvSpPr>
-        <p:spPr>
-          <a:xfrm>
-            <a:off x="777240" y="696686"/>
-            <a:ext cx="10659110" cy="5480277"/>
-          </a:xfrm>
-        </p:spPr>
-        <p:txBody>
-          <a:bodyPr>
-            <a:normAutofit/>
-          </a:bodyPr>
-          <a:lstStyle/>
-          <a:p>
-            <a:pPr marL="0" indent="0">
-              <a:buNone/>
-            </a:pPr>
-            <a:endParaRPr lang="en-IN" sz="2400" dirty="0"/>
-          </a:p>
-        </p:txBody>
-      </p:sp>
-    </p:spTree>
-    <p:extLst>
-      <p:ext uri="{BB962C8B-B14F-4D97-AF65-F5344CB8AC3E}">
-        <p14:creationId xmlns:p14="http://schemas.microsoft.com/office/powerpoint/2010/main" val="2823372722"/>
-      </p:ext>
-    </p:extLst>
-  </p:cSld>
-  <p:clrMapOvr>
-    <a:masterClrMapping/>
-  </p:clrMapOvr>
-</p:sld>
-</file>
-
-<file path=ppt/slides/slide67.xml><?xml version="1.0" encoding="utf-8"?>
-<p:sld xmlns:a="http://schemas.openxmlformats.org/drawingml/2006/main" xmlns:r="http://schemas.openxmlformats.org/officeDocument/2006/relationships" xmlns:p="http://schemas.openxmlformats.org/presentationml/2006/main">
-  <p:cSld>
-    <p:spTree>
-      <p:nvGrpSpPr>
-        <p:cNvPr id="1" name="">
-          <a:extLst>
-            <a:ext uri="{FF2B5EF4-FFF2-40B4-BE49-F238E27FC236}">
-              <a16:creationId xmlns:a16="http://schemas.microsoft.com/office/drawing/2014/main" id="{7D3FD299-99A3-7A8B-8AF5-EC887096DE06}"/>
-            </a:ext>
-          </a:extLst>
-        </p:cNvPr>
-        <p:cNvGrpSpPr/>
-        <p:nvPr/>
-      </p:nvGrpSpPr>
-      <p:grpSpPr>
-        <a:xfrm>
-          <a:off x="0" y="0"/>
-          <a:ext cx="0" cy="0"/>
-          <a:chOff x="0" y="0"/>
-          <a:chExt cx="0" cy="0"/>
-        </a:xfrm>
-      </p:grpSpPr>
-      <p:sp>
-        <p:nvSpPr>
-          <p:cNvPr id="3" name="Content Placeholder 2">
-            <a:extLst>
-              <a:ext uri="{FF2B5EF4-FFF2-40B4-BE49-F238E27FC236}">
-                <a16:creationId xmlns:a16="http://schemas.microsoft.com/office/drawing/2014/main" id="{54B23A25-8439-9012-C5D6-59ADDCE56641}"/>
-              </a:ext>
-            </a:extLst>
-          </p:cNvPr>
-          <p:cNvSpPr>
-            <a:spLocks noGrp="1"/>
-          </p:cNvSpPr>
-          <p:nvPr>
-            <p:ph idx="1"/>
-          </p:nvPr>
-        </p:nvSpPr>
-        <p:spPr>
-          <a:xfrm>
-            <a:off x="777240" y="696686"/>
-            <a:ext cx="10659110" cy="5480277"/>
-          </a:xfrm>
-        </p:spPr>
-        <p:txBody>
-          <a:bodyPr>
-            <a:normAutofit/>
-          </a:bodyPr>
-          <a:lstStyle/>
-          <a:p>
-            <a:pPr marL="0" indent="0">
-              <a:buNone/>
-            </a:pPr>
-            <a:endParaRPr lang="en-IN" sz="2400" dirty="0"/>
-          </a:p>
-        </p:txBody>
-      </p:sp>
-    </p:spTree>
-    <p:extLst>
-      <p:ext uri="{BB962C8B-B14F-4D97-AF65-F5344CB8AC3E}">
-        <p14:creationId xmlns:p14="http://schemas.microsoft.com/office/powerpoint/2010/main" val="2801866386"/>
       </p:ext>
     </p:extLst>
   </p:cSld>
@@ -20477,6 +20705,668 @@
     <p:extLst>
       <p:ext uri="{BB962C8B-B14F-4D97-AF65-F5344CB8AC3E}">
         <p14:creationId xmlns:p14="http://schemas.microsoft.com/office/powerpoint/2010/main" val="4187949477"/>
+      </p:ext>
+    </p:extLst>
+  </p:cSld>
+  <p:clrMapOvr>
+    <a:masterClrMapping/>
+  </p:clrMapOvr>
+</p:sld>
+</file>
+
+<file path=ppt/slides/slide70.xml><?xml version="1.0" encoding="utf-8"?>
+<p:sld xmlns:a="http://schemas.openxmlformats.org/drawingml/2006/main" xmlns:r="http://schemas.openxmlformats.org/officeDocument/2006/relationships" xmlns:p="http://schemas.openxmlformats.org/presentationml/2006/main">
+  <p:cSld>
+    <p:spTree>
+      <p:nvGrpSpPr>
+        <p:cNvPr id="1" name="">
+          <a:extLst>
+            <a:ext uri="{FF2B5EF4-FFF2-40B4-BE49-F238E27FC236}">
+              <a16:creationId xmlns:a16="http://schemas.microsoft.com/office/drawing/2014/main" id="{FFD6EED2-A3BB-B01D-74E3-F3E59700FB52}"/>
+            </a:ext>
+          </a:extLst>
+        </p:cNvPr>
+        <p:cNvGrpSpPr/>
+        <p:nvPr/>
+      </p:nvGrpSpPr>
+      <p:grpSpPr>
+        <a:xfrm>
+          <a:off x="0" y="0"/>
+          <a:ext cx="0" cy="0"/>
+          <a:chOff x="0" y="0"/>
+          <a:chExt cx="0" cy="0"/>
+        </a:xfrm>
+      </p:grpSpPr>
+      <p:sp>
+        <p:nvSpPr>
+          <p:cNvPr id="3" name="Content Placeholder 2">
+            <a:extLst>
+              <a:ext uri="{FF2B5EF4-FFF2-40B4-BE49-F238E27FC236}">
+                <a16:creationId xmlns:a16="http://schemas.microsoft.com/office/drawing/2014/main" id="{F078D154-D5E2-6D6C-49CD-F890F93EBC1A}"/>
+              </a:ext>
+            </a:extLst>
+          </p:cNvPr>
+          <p:cNvSpPr>
+            <a:spLocks noGrp="1"/>
+          </p:cNvSpPr>
+          <p:nvPr>
+            <p:ph idx="1"/>
+          </p:nvPr>
+        </p:nvSpPr>
+        <p:spPr>
+          <a:xfrm>
+            <a:off x="777240" y="696686"/>
+            <a:ext cx="10659110" cy="5480277"/>
+          </a:xfrm>
+        </p:spPr>
+        <p:txBody>
+          <a:bodyPr>
+            <a:normAutofit/>
+          </a:bodyPr>
+          <a:lstStyle/>
+          <a:p>
+            <a:pPr marL="0" indent="0">
+              <a:buNone/>
+            </a:pPr>
+            <a:r>
+              <a:rPr lang="en-US" sz="2400" b="1" dirty="0"/>
+              <a:t>Step 5: </a:t>
+            </a:r>
+            <a:r>
+              <a:rPr lang="en-US" sz="2400" dirty="0"/>
+              <a:t>Opens a </a:t>
+            </a:r>
+            <a:r>
+              <a:rPr lang="en-US" sz="2400" b="1" dirty="0"/>
+              <a:t>database session</a:t>
+            </a:r>
+            <a:r>
+              <a:rPr lang="en-US" sz="2400" dirty="0"/>
+              <a:t>, and do the </a:t>
+            </a:r>
+            <a:r>
+              <a:rPr lang="en-US" sz="2400" b="1" dirty="0"/>
+              <a:t>CRUD</a:t>
+            </a:r>
+            <a:r>
+              <a:rPr lang="en-US" sz="2400" dirty="0"/>
+              <a:t> Operation</a:t>
+            </a:r>
+            <a:endParaRPr lang="en-IN" sz="2400" dirty="0"/>
+          </a:p>
+        </p:txBody>
+      </p:sp>
+      <p:pic>
+        <p:nvPicPr>
+          <p:cNvPr id="4" name="Picture 3">
+            <a:extLst>
+              <a:ext uri="{FF2B5EF4-FFF2-40B4-BE49-F238E27FC236}">
+                <a16:creationId xmlns:a16="http://schemas.microsoft.com/office/drawing/2014/main" id="{63DE8399-64B9-8195-1182-0EB3C2091634}"/>
+              </a:ext>
+            </a:extLst>
+          </p:cNvPr>
+          <p:cNvPicPr>
+            <a:picLocks noChangeAspect="1"/>
+          </p:cNvPicPr>
+          <p:nvPr/>
+        </p:nvPicPr>
+        <p:blipFill>
+          <a:blip r:embed="rId2"/>
+          <a:stretch>
+            <a:fillRect/>
+          </a:stretch>
+        </p:blipFill>
+        <p:spPr>
+          <a:xfrm>
+            <a:off x="755650" y="1304544"/>
+            <a:ext cx="10472057" cy="4565817"/>
+          </a:xfrm>
+          <a:prstGeom prst="rect">
+            <a:avLst/>
+          </a:prstGeom>
+        </p:spPr>
+      </p:pic>
+    </p:spTree>
+    <p:extLst>
+      <p:ext uri="{BB962C8B-B14F-4D97-AF65-F5344CB8AC3E}">
+        <p14:creationId xmlns:p14="http://schemas.microsoft.com/office/powerpoint/2010/main" val="1341148807"/>
+      </p:ext>
+    </p:extLst>
+  </p:cSld>
+  <p:clrMapOvr>
+    <a:masterClrMapping/>
+  </p:clrMapOvr>
+</p:sld>
+</file>
+
+<file path=ppt/slides/slide71.xml><?xml version="1.0" encoding="utf-8"?>
+<p:sld xmlns:a="http://schemas.openxmlformats.org/drawingml/2006/main" xmlns:r="http://schemas.openxmlformats.org/officeDocument/2006/relationships" xmlns:p="http://schemas.openxmlformats.org/presentationml/2006/main">
+  <p:cSld>
+    <p:spTree>
+      <p:nvGrpSpPr>
+        <p:cNvPr id="1" name="">
+          <a:extLst>
+            <a:ext uri="{FF2B5EF4-FFF2-40B4-BE49-F238E27FC236}">
+              <a16:creationId xmlns:a16="http://schemas.microsoft.com/office/drawing/2014/main" id="{A31062E5-9979-AA23-0B3F-F62EE5E58C0B}"/>
+            </a:ext>
+          </a:extLst>
+        </p:cNvPr>
+        <p:cNvGrpSpPr/>
+        <p:nvPr/>
+      </p:nvGrpSpPr>
+      <p:grpSpPr>
+        <a:xfrm>
+          <a:off x="0" y="0"/>
+          <a:ext cx="0" cy="0"/>
+          <a:chOff x="0" y="0"/>
+          <a:chExt cx="0" cy="0"/>
+        </a:xfrm>
+      </p:grpSpPr>
+      <p:sp>
+        <p:nvSpPr>
+          <p:cNvPr id="3" name="Content Placeholder 2">
+            <a:extLst>
+              <a:ext uri="{FF2B5EF4-FFF2-40B4-BE49-F238E27FC236}">
+                <a16:creationId xmlns:a16="http://schemas.microsoft.com/office/drawing/2014/main" id="{760A2593-0AF0-A4C2-0094-583BB78D131A}"/>
+              </a:ext>
+            </a:extLst>
+          </p:cNvPr>
+          <p:cNvSpPr>
+            <a:spLocks noGrp="1"/>
+          </p:cNvSpPr>
+          <p:nvPr>
+            <p:ph idx="1"/>
+          </p:nvPr>
+        </p:nvSpPr>
+        <p:spPr>
+          <a:xfrm>
+            <a:off x="777240" y="696686"/>
+            <a:ext cx="10659110" cy="5480277"/>
+          </a:xfrm>
+        </p:spPr>
+        <p:txBody>
+          <a:bodyPr>
+            <a:normAutofit/>
+          </a:bodyPr>
+          <a:lstStyle/>
+          <a:p>
+            <a:pPr marL="0" indent="0">
+              <a:buNone/>
+            </a:pPr>
+            <a:r>
+              <a:rPr lang="en-US" sz="2400" b="1" dirty="0"/>
+              <a:t>Step 6: Check the PostgreSQL DB</a:t>
+            </a:r>
+          </a:p>
+          <a:p>
+            <a:r>
+              <a:rPr lang="en-US" sz="2400" dirty="0"/>
+              <a:t>Now there should be a table named Users with one Row</a:t>
+            </a:r>
+            <a:endParaRPr lang="en-IN" sz="2400" dirty="0"/>
+          </a:p>
+        </p:txBody>
+      </p:sp>
+      <p:pic>
+        <p:nvPicPr>
+          <p:cNvPr id="4" name="Picture 3">
+            <a:extLst>
+              <a:ext uri="{FF2B5EF4-FFF2-40B4-BE49-F238E27FC236}">
+                <a16:creationId xmlns:a16="http://schemas.microsoft.com/office/drawing/2014/main" id="{0B14B586-E511-A602-F886-EF57477564D0}"/>
+              </a:ext>
+            </a:extLst>
+          </p:cNvPr>
+          <p:cNvPicPr>
+            <a:picLocks noChangeAspect="1"/>
+          </p:cNvPicPr>
+          <p:nvPr/>
+        </p:nvPicPr>
+        <p:blipFill>
+          <a:blip r:embed="rId2"/>
+          <a:stretch>
+            <a:fillRect/>
+          </a:stretch>
+        </p:blipFill>
+        <p:spPr>
+          <a:xfrm>
+            <a:off x="2060599" y="1963067"/>
+            <a:ext cx="7657143" cy="3780952"/>
+          </a:xfrm>
+          <a:prstGeom prst="rect">
+            <a:avLst/>
+          </a:prstGeom>
+        </p:spPr>
+      </p:pic>
+    </p:spTree>
+    <p:extLst>
+      <p:ext uri="{BB962C8B-B14F-4D97-AF65-F5344CB8AC3E}">
+        <p14:creationId xmlns:p14="http://schemas.microsoft.com/office/powerpoint/2010/main" val="1068831768"/>
+      </p:ext>
+    </p:extLst>
+  </p:cSld>
+  <p:clrMapOvr>
+    <a:masterClrMapping/>
+  </p:clrMapOvr>
+</p:sld>
+</file>
+
+<file path=ppt/slides/slide72.xml><?xml version="1.0" encoding="utf-8"?>
+<p:sld xmlns:a="http://schemas.openxmlformats.org/drawingml/2006/main" xmlns:r="http://schemas.openxmlformats.org/officeDocument/2006/relationships" xmlns:p="http://schemas.openxmlformats.org/presentationml/2006/main">
+  <p:cSld>
+    <p:spTree>
+      <p:nvGrpSpPr>
+        <p:cNvPr id="1" name="">
+          <a:extLst>
+            <a:ext uri="{FF2B5EF4-FFF2-40B4-BE49-F238E27FC236}">
+              <a16:creationId xmlns:a16="http://schemas.microsoft.com/office/drawing/2014/main" id="{F2A1B423-1B3C-B999-58CA-1F2E39B106DE}"/>
+            </a:ext>
+          </a:extLst>
+        </p:cNvPr>
+        <p:cNvGrpSpPr/>
+        <p:nvPr/>
+      </p:nvGrpSpPr>
+      <p:grpSpPr>
+        <a:xfrm>
+          <a:off x="0" y="0"/>
+          <a:ext cx="0" cy="0"/>
+          <a:chOff x="0" y="0"/>
+          <a:chExt cx="0" cy="0"/>
+        </a:xfrm>
+      </p:grpSpPr>
+      <p:sp>
+        <p:nvSpPr>
+          <p:cNvPr id="3" name="Content Placeholder 2">
+            <a:extLst>
+              <a:ext uri="{FF2B5EF4-FFF2-40B4-BE49-F238E27FC236}">
+                <a16:creationId xmlns:a16="http://schemas.microsoft.com/office/drawing/2014/main" id="{B5867193-08B6-7B71-FE70-1AB35E1CC669}"/>
+              </a:ext>
+            </a:extLst>
+          </p:cNvPr>
+          <p:cNvSpPr>
+            <a:spLocks noGrp="1"/>
+          </p:cNvSpPr>
+          <p:nvPr>
+            <p:ph idx="1"/>
+          </p:nvPr>
+        </p:nvSpPr>
+        <p:spPr>
+          <a:xfrm>
+            <a:off x="777240" y="696686"/>
+            <a:ext cx="10659110" cy="5480277"/>
+          </a:xfrm>
+        </p:spPr>
+        <p:txBody>
+          <a:bodyPr>
+            <a:normAutofit/>
+          </a:bodyPr>
+          <a:lstStyle/>
+          <a:p>
+            <a:pPr marL="0" indent="0">
+              <a:buNone/>
+            </a:pPr>
+            <a:endParaRPr lang="en-IN" sz="2400" dirty="0"/>
+          </a:p>
+        </p:txBody>
+      </p:sp>
+    </p:spTree>
+    <p:extLst>
+      <p:ext uri="{BB962C8B-B14F-4D97-AF65-F5344CB8AC3E}">
+        <p14:creationId xmlns:p14="http://schemas.microsoft.com/office/powerpoint/2010/main" val="4084032356"/>
+      </p:ext>
+    </p:extLst>
+  </p:cSld>
+  <p:clrMapOvr>
+    <a:masterClrMapping/>
+  </p:clrMapOvr>
+</p:sld>
+</file>
+
+<file path=ppt/slides/slide73.xml><?xml version="1.0" encoding="utf-8"?>
+<p:sld xmlns:a="http://schemas.openxmlformats.org/drawingml/2006/main" xmlns:r="http://schemas.openxmlformats.org/officeDocument/2006/relationships" xmlns:p="http://schemas.openxmlformats.org/presentationml/2006/main">
+  <p:cSld>
+    <p:spTree>
+      <p:nvGrpSpPr>
+        <p:cNvPr id="1" name="">
+          <a:extLst>
+            <a:ext uri="{FF2B5EF4-FFF2-40B4-BE49-F238E27FC236}">
+              <a16:creationId xmlns:a16="http://schemas.microsoft.com/office/drawing/2014/main" id="{F0E70C9C-1825-C1BB-B27D-D6796596E970}"/>
+            </a:ext>
+          </a:extLst>
+        </p:cNvPr>
+        <p:cNvGrpSpPr/>
+        <p:nvPr/>
+      </p:nvGrpSpPr>
+      <p:grpSpPr>
+        <a:xfrm>
+          <a:off x="0" y="0"/>
+          <a:ext cx="0" cy="0"/>
+          <a:chOff x="0" y="0"/>
+          <a:chExt cx="0" cy="0"/>
+        </a:xfrm>
+      </p:grpSpPr>
+      <p:sp>
+        <p:nvSpPr>
+          <p:cNvPr id="3" name="Content Placeholder 2">
+            <a:extLst>
+              <a:ext uri="{FF2B5EF4-FFF2-40B4-BE49-F238E27FC236}">
+                <a16:creationId xmlns:a16="http://schemas.microsoft.com/office/drawing/2014/main" id="{939E0F72-31EB-FB6C-A5EF-627736FF1143}"/>
+              </a:ext>
+            </a:extLst>
+          </p:cNvPr>
+          <p:cNvSpPr>
+            <a:spLocks noGrp="1"/>
+          </p:cNvSpPr>
+          <p:nvPr>
+            <p:ph idx="1"/>
+          </p:nvPr>
+        </p:nvSpPr>
+        <p:spPr>
+          <a:xfrm>
+            <a:off x="777240" y="696686"/>
+            <a:ext cx="10659110" cy="5480277"/>
+          </a:xfrm>
+        </p:spPr>
+        <p:txBody>
+          <a:bodyPr>
+            <a:normAutofit/>
+          </a:bodyPr>
+          <a:lstStyle/>
+          <a:p>
+            <a:pPr marL="0" indent="0">
+              <a:buNone/>
+            </a:pPr>
+            <a:endParaRPr lang="en-IN" sz="2400" dirty="0"/>
+          </a:p>
+        </p:txBody>
+      </p:sp>
+    </p:spTree>
+    <p:extLst>
+      <p:ext uri="{BB962C8B-B14F-4D97-AF65-F5344CB8AC3E}">
+        <p14:creationId xmlns:p14="http://schemas.microsoft.com/office/powerpoint/2010/main" val="512058926"/>
+      </p:ext>
+    </p:extLst>
+  </p:cSld>
+  <p:clrMapOvr>
+    <a:masterClrMapping/>
+  </p:clrMapOvr>
+</p:sld>
+</file>
+
+<file path=ppt/slides/slide74.xml><?xml version="1.0" encoding="utf-8"?>
+<p:sld xmlns:a="http://schemas.openxmlformats.org/drawingml/2006/main" xmlns:r="http://schemas.openxmlformats.org/officeDocument/2006/relationships" xmlns:p="http://schemas.openxmlformats.org/presentationml/2006/main">
+  <p:cSld>
+    <p:spTree>
+      <p:nvGrpSpPr>
+        <p:cNvPr id="1" name="">
+          <a:extLst>
+            <a:ext uri="{FF2B5EF4-FFF2-40B4-BE49-F238E27FC236}">
+              <a16:creationId xmlns:a16="http://schemas.microsoft.com/office/drawing/2014/main" id="{498B2377-F360-B3B9-8904-5F5162A7E9B4}"/>
+            </a:ext>
+          </a:extLst>
+        </p:cNvPr>
+        <p:cNvGrpSpPr/>
+        <p:nvPr/>
+      </p:nvGrpSpPr>
+      <p:grpSpPr>
+        <a:xfrm>
+          <a:off x="0" y="0"/>
+          <a:ext cx="0" cy="0"/>
+          <a:chOff x="0" y="0"/>
+          <a:chExt cx="0" cy="0"/>
+        </a:xfrm>
+      </p:grpSpPr>
+      <p:sp>
+        <p:nvSpPr>
+          <p:cNvPr id="3" name="Content Placeholder 2">
+            <a:extLst>
+              <a:ext uri="{FF2B5EF4-FFF2-40B4-BE49-F238E27FC236}">
+                <a16:creationId xmlns:a16="http://schemas.microsoft.com/office/drawing/2014/main" id="{9D65A955-1F7A-FEF3-3FE1-AFC83BC7A3FD}"/>
+              </a:ext>
+            </a:extLst>
+          </p:cNvPr>
+          <p:cNvSpPr>
+            <a:spLocks noGrp="1"/>
+          </p:cNvSpPr>
+          <p:nvPr>
+            <p:ph idx="1"/>
+          </p:nvPr>
+        </p:nvSpPr>
+        <p:spPr>
+          <a:xfrm>
+            <a:off x="777240" y="696686"/>
+            <a:ext cx="10659110" cy="5480277"/>
+          </a:xfrm>
+        </p:spPr>
+        <p:txBody>
+          <a:bodyPr>
+            <a:normAutofit/>
+          </a:bodyPr>
+          <a:lstStyle/>
+          <a:p>
+            <a:pPr marL="0" indent="0">
+              <a:buNone/>
+            </a:pPr>
+            <a:endParaRPr lang="en-IN" sz="2400" dirty="0"/>
+          </a:p>
+        </p:txBody>
+      </p:sp>
+    </p:spTree>
+    <p:extLst>
+      <p:ext uri="{BB962C8B-B14F-4D97-AF65-F5344CB8AC3E}">
+        <p14:creationId xmlns:p14="http://schemas.microsoft.com/office/powerpoint/2010/main" val="4180232431"/>
+      </p:ext>
+    </p:extLst>
+  </p:cSld>
+  <p:clrMapOvr>
+    <a:masterClrMapping/>
+  </p:clrMapOvr>
+</p:sld>
+</file>
+
+<file path=ppt/slides/slide75.xml><?xml version="1.0" encoding="utf-8"?>
+<p:sld xmlns:a="http://schemas.openxmlformats.org/drawingml/2006/main" xmlns:r="http://schemas.openxmlformats.org/officeDocument/2006/relationships" xmlns:p="http://schemas.openxmlformats.org/presentationml/2006/main">
+  <p:cSld>
+    <p:spTree>
+      <p:nvGrpSpPr>
+        <p:cNvPr id="1" name="">
+          <a:extLst>
+            <a:ext uri="{FF2B5EF4-FFF2-40B4-BE49-F238E27FC236}">
+              <a16:creationId xmlns:a16="http://schemas.microsoft.com/office/drawing/2014/main" id="{11D49BA2-BC89-C17F-266A-4F25C53574A5}"/>
+            </a:ext>
+          </a:extLst>
+        </p:cNvPr>
+        <p:cNvGrpSpPr/>
+        <p:nvPr/>
+      </p:nvGrpSpPr>
+      <p:grpSpPr>
+        <a:xfrm>
+          <a:off x="0" y="0"/>
+          <a:ext cx="0" cy="0"/>
+          <a:chOff x="0" y="0"/>
+          <a:chExt cx="0" cy="0"/>
+        </a:xfrm>
+      </p:grpSpPr>
+      <p:sp>
+        <p:nvSpPr>
+          <p:cNvPr id="3" name="Content Placeholder 2">
+            <a:extLst>
+              <a:ext uri="{FF2B5EF4-FFF2-40B4-BE49-F238E27FC236}">
+                <a16:creationId xmlns:a16="http://schemas.microsoft.com/office/drawing/2014/main" id="{80A9459F-9908-EC24-3C88-885CB2B6AA71}"/>
+              </a:ext>
+            </a:extLst>
+          </p:cNvPr>
+          <p:cNvSpPr>
+            <a:spLocks noGrp="1"/>
+          </p:cNvSpPr>
+          <p:nvPr>
+            <p:ph idx="1"/>
+          </p:nvPr>
+        </p:nvSpPr>
+        <p:spPr>
+          <a:xfrm>
+            <a:off x="777240" y="696686"/>
+            <a:ext cx="10659110" cy="5480277"/>
+          </a:xfrm>
+        </p:spPr>
+        <p:txBody>
+          <a:bodyPr>
+            <a:normAutofit/>
+          </a:bodyPr>
+          <a:lstStyle/>
+          <a:p>
+            <a:pPr marL="0" indent="0">
+              <a:buNone/>
+            </a:pPr>
+            <a:endParaRPr lang="en-IN" sz="2400" dirty="0"/>
+          </a:p>
+        </p:txBody>
+      </p:sp>
+    </p:spTree>
+    <p:extLst>
+      <p:ext uri="{BB962C8B-B14F-4D97-AF65-F5344CB8AC3E}">
+        <p14:creationId xmlns:p14="http://schemas.microsoft.com/office/powerpoint/2010/main" val="1011538819"/>
+      </p:ext>
+    </p:extLst>
+  </p:cSld>
+  <p:clrMapOvr>
+    <a:masterClrMapping/>
+  </p:clrMapOvr>
+</p:sld>
+</file>
+
+<file path=ppt/slides/slide76.xml><?xml version="1.0" encoding="utf-8"?>
+<p:sld xmlns:a="http://schemas.openxmlformats.org/drawingml/2006/main" xmlns:r="http://schemas.openxmlformats.org/officeDocument/2006/relationships" xmlns:p="http://schemas.openxmlformats.org/presentationml/2006/main">
+  <p:cSld>
+    <p:spTree>
+      <p:nvGrpSpPr>
+        <p:cNvPr id="1" name="">
+          <a:extLst>
+            <a:ext uri="{FF2B5EF4-FFF2-40B4-BE49-F238E27FC236}">
+              <a16:creationId xmlns:a16="http://schemas.microsoft.com/office/drawing/2014/main" id="{E6F2BF70-0222-7D2A-403B-E8E7C95493AF}"/>
+            </a:ext>
+          </a:extLst>
+        </p:cNvPr>
+        <p:cNvGrpSpPr/>
+        <p:nvPr/>
+      </p:nvGrpSpPr>
+      <p:grpSpPr>
+        <a:xfrm>
+          <a:off x="0" y="0"/>
+          <a:ext cx="0" cy="0"/>
+          <a:chOff x="0" y="0"/>
+          <a:chExt cx="0" cy="0"/>
+        </a:xfrm>
+      </p:grpSpPr>
+      <p:sp>
+        <p:nvSpPr>
+          <p:cNvPr id="3" name="Content Placeholder 2">
+            <a:extLst>
+              <a:ext uri="{FF2B5EF4-FFF2-40B4-BE49-F238E27FC236}">
+                <a16:creationId xmlns:a16="http://schemas.microsoft.com/office/drawing/2014/main" id="{7FEFD233-4602-2FCC-A5D0-4B73E0D4B544}"/>
+              </a:ext>
+            </a:extLst>
+          </p:cNvPr>
+          <p:cNvSpPr>
+            <a:spLocks noGrp="1"/>
+          </p:cNvSpPr>
+          <p:nvPr>
+            <p:ph idx="1"/>
+          </p:nvPr>
+        </p:nvSpPr>
+        <p:spPr>
+          <a:xfrm>
+            <a:off x="777240" y="696686"/>
+            <a:ext cx="10659110" cy="5480277"/>
+          </a:xfrm>
+        </p:spPr>
+        <p:txBody>
+          <a:bodyPr>
+            <a:normAutofit/>
+          </a:bodyPr>
+          <a:lstStyle/>
+          <a:p>
+            <a:pPr marL="0" indent="0">
+              <a:buNone/>
+            </a:pPr>
+            <a:endParaRPr lang="en-IN" sz="2400" dirty="0"/>
+          </a:p>
+        </p:txBody>
+      </p:sp>
+    </p:spTree>
+    <p:extLst>
+      <p:ext uri="{BB962C8B-B14F-4D97-AF65-F5344CB8AC3E}">
+        <p14:creationId xmlns:p14="http://schemas.microsoft.com/office/powerpoint/2010/main" val="2823372722"/>
+      </p:ext>
+    </p:extLst>
+  </p:cSld>
+  <p:clrMapOvr>
+    <a:masterClrMapping/>
+  </p:clrMapOvr>
+</p:sld>
+</file>
+
+<file path=ppt/slides/slide77.xml><?xml version="1.0" encoding="utf-8"?>
+<p:sld xmlns:a="http://schemas.openxmlformats.org/drawingml/2006/main" xmlns:r="http://schemas.openxmlformats.org/officeDocument/2006/relationships" xmlns:p="http://schemas.openxmlformats.org/presentationml/2006/main">
+  <p:cSld>
+    <p:spTree>
+      <p:nvGrpSpPr>
+        <p:cNvPr id="1" name="">
+          <a:extLst>
+            <a:ext uri="{FF2B5EF4-FFF2-40B4-BE49-F238E27FC236}">
+              <a16:creationId xmlns:a16="http://schemas.microsoft.com/office/drawing/2014/main" id="{7D3FD299-99A3-7A8B-8AF5-EC887096DE06}"/>
+            </a:ext>
+          </a:extLst>
+        </p:cNvPr>
+        <p:cNvGrpSpPr/>
+        <p:nvPr/>
+      </p:nvGrpSpPr>
+      <p:grpSpPr>
+        <a:xfrm>
+          <a:off x="0" y="0"/>
+          <a:ext cx="0" cy="0"/>
+          <a:chOff x="0" y="0"/>
+          <a:chExt cx="0" cy="0"/>
+        </a:xfrm>
+      </p:grpSpPr>
+      <p:sp>
+        <p:nvSpPr>
+          <p:cNvPr id="3" name="Content Placeholder 2">
+            <a:extLst>
+              <a:ext uri="{FF2B5EF4-FFF2-40B4-BE49-F238E27FC236}">
+                <a16:creationId xmlns:a16="http://schemas.microsoft.com/office/drawing/2014/main" id="{54B23A25-8439-9012-C5D6-59ADDCE56641}"/>
+              </a:ext>
+            </a:extLst>
+          </p:cNvPr>
+          <p:cNvSpPr>
+            <a:spLocks noGrp="1"/>
+          </p:cNvSpPr>
+          <p:nvPr>
+            <p:ph idx="1"/>
+          </p:nvPr>
+        </p:nvSpPr>
+        <p:spPr>
+          <a:xfrm>
+            <a:off x="777240" y="696686"/>
+            <a:ext cx="10659110" cy="5480277"/>
+          </a:xfrm>
+        </p:spPr>
+        <p:txBody>
+          <a:bodyPr>
+            <a:normAutofit/>
+          </a:bodyPr>
+          <a:lstStyle/>
+          <a:p>
+            <a:pPr marL="0" indent="0">
+              <a:buNone/>
+            </a:pPr>
+            <a:endParaRPr lang="en-IN" sz="2400" dirty="0"/>
+          </a:p>
+        </p:txBody>
+      </p:sp>
+    </p:spTree>
+    <p:extLst>
+      <p:ext uri="{BB962C8B-B14F-4D97-AF65-F5344CB8AC3E}">
+        <p14:creationId xmlns:p14="http://schemas.microsoft.com/office/powerpoint/2010/main" val="2801866386"/>
       </p:ext>
     </p:extLst>
   </p:cSld>
